--- a/docs/260724_Comparison of AECs between groups after low-smi classification with clinic data.pptx
+++ b/docs/260724_Comparison of AECs between groups after low-smi classification with clinic data.pptx
@@ -12,9 +12,9 @@
     <p:sldId id="495" r:id="rId3"/>
     <p:sldId id="507" r:id="rId4"/>
     <p:sldId id="481" r:id="rId5"/>
-    <p:sldId id="514" r:id="rId6"/>
-    <p:sldId id="519" r:id="rId7"/>
-    <p:sldId id="534" r:id="rId8"/>
+    <p:sldId id="534" r:id="rId6"/>
+    <p:sldId id="514" r:id="rId7"/>
+    <p:sldId id="519" r:id="rId8"/>
     <p:sldId id="535" r:id="rId9"/>
     <p:sldId id="479" r:id="rId10"/>
   </p:sldIdLst>
@@ -134,9 +134,9 @@
             <p14:sldId id="495"/>
             <p14:sldId id="507"/>
             <p14:sldId id="481"/>
+            <p14:sldId id="534"/>
             <p14:sldId id="514"/>
             <p14:sldId id="519"/>
-            <p14:sldId id="534"/>
             <p14:sldId id="535"/>
             <p14:sldId id="479"/>
           </p14:sldIdLst>
@@ -3694,6 +3694,103 @@
         <p:cNvPr id="1" name="">
           <a:extLst>
             <a:ext uri="{FF2B5EF4-FFF2-40B4-BE49-F238E27FC236}">
+              <a16:creationId xmlns:a16="http://schemas.microsoft.com/office/drawing/2014/main" id="{7B783C6F-81C2-4881-265B-DC90DB1176D4}"/>
+            </a:ext>
+          </a:extLst>
+        </p:cNvPr>
+        <p:cNvGrpSpPr/>
+        <p:nvPr/>
+      </p:nvGrpSpPr>
+      <p:grpSpPr>
+        <a:xfrm>
+          <a:off x="0" y="0"/>
+          <a:ext cx="0" cy="0"/>
+          <a:chOff x="0" y="0"/>
+          <a:chExt cx="0" cy="0"/>
+        </a:xfrm>
+      </p:grpSpPr>
+      <p:sp>
+        <p:nvSpPr>
+          <p:cNvPr id="2" name="Slide Image Placeholder 1">
+            <a:extLst>
+              <a:ext uri="{FF2B5EF4-FFF2-40B4-BE49-F238E27FC236}">
+                <a16:creationId xmlns:a16="http://schemas.microsoft.com/office/drawing/2014/main" id="{014360F5-78A5-F8F2-3AF1-E6B8A31113EB}"/>
+              </a:ext>
+            </a:extLst>
+          </p:cNvPr>
+          <p:cNvSpPr>
+            <a:spLocks noGrp="1" noRot="1" noChangeAspect="1"/>
+          </p:cNvSpPr>
+          <p:nvPr>
+            <p:ph type="sldImg" idx="2"/>
+          </p:nvPr>
+        </p:nvSpPr>
+        <p:spPr/>
+      </p:sp>
+      <p:sp>
+        <p:nvSpPr>
+          <p:cNvPr id="3" name="Notes Placeholder 2">
+            <a:extLst>
+              <a:ext uri="{FF2B5EF4-FFF2-40B4-BE49-F238E27FC236}">
+                <a16:creationId xmlns:a16="http://schemas.microsoft.com/office/drawing/2014/main" id="{28EBFA01-DC83-FA69-1A52-247DA37A5AB1}"/>
+              </a:ext>
+            </a:extLst>
+          </p:cNvPr>
+          <p:cNvSpPr>
+            <a:spLocks noGrp="1"/>
+          </p:cNvSpPr>
+          <p:nvPr>
+            <p:ph type="body" sz="quarter" idx="3"/>
+          </p:nvPr>
+        </p:nvSpPr>
+        <p:spPr/>
+        <p:txBody>
+          <a:bodyPr/>
+          <a:lstStyle/>
+          <a:p>
+            <a:endParaRPr dirty="0"/>
+          </a:p>
+        </p:txBody>
+      </p:sp>
+      <p:sp>
+        <p:nvSpPr>
+          <p:cNvPr id="4" name="Slide Number Placeholder 3">
+            <a:extLst>
+              <a:ext uri="{FF2B5EF4-FFF2-40B4-BE49-F238E27FC236}">
+                <a16:creationId xmlns:a16="http://schemas.microsoft.com/office/drawing/2014/main" id="{9C70E2E4-AEC5-C29D-5657-714969E15497}"/>
+              </a:ext>
+            </a:extLst>
+          </p:cNvPr>
+          <p:cNvSpPr>
+            <a:spLocks noGrp="1"/>
+          </p:cNvSpPr>
+          <p:nvPr>
+            <p:ph type="sldNum" sz="quarter" idx="5"/>
+          </p:nvPr>
+        </p:nvSpPr>
+        <p:spPr/>
+      </p:sp>
+    </p:spTree>
+    <p:extLst>
+      <p:ext uri="{BB962C8B-B14F-4D97-AF65-F5344CB8AC3E}">
+        <p14:creationId xmlns:p14="http://schemas.microsoft.com/office/powerpoint/2010/main" val="2708564693"/>
+      </p:ext>
+    </p:extLst>
+  </p:cSld>
+  <p:clrMapOvr>
+    <a:masterClrMapping/>
+  </p:clrMapOvr>
+</p:notes>
+</file>
+
+<file path=ppt/notesSlides/notesSlide6.xml><?xml version="1.0" encoding="utf-8"?>
+<p:notes xmlns:a="http://schemas.openxmlformats.org/drawingml/2006/main" xmlns:r="http://schemas.openxmlformats.org/officeDocument/2006/relationships" xmlns:p="http://schemas.openxmlformats.org/presentationml/2006/main">
+  <p:cSld>
+    <p:spTree>
+      <p:nvGrpSpPr>
+        <p:cNvPr id="1" name="">
+          <a:extLst>
+            <a:ext uri="{FF2B5EF4-FFF2-40B4-BE49-F238E27FC236}">
               <a16:creationId xmlns:a16="http://schemas.microsoft.com/office/drawing/2014/main" id="{54488A4A-BF4E-A68A-5F1E-D49EEEC9C6DD}"/>
             </a:ext>
           </a:extLst>
@@ -3783,7 +3880,7 @@
 </p:notes>
 </file>
 
-<file path=ppt/notesSlides/notesSlide6.xml><?xml version="1.0" encoding="utf-8"?>
+<file path=ppt/notesSlides/notesSlide7.xml><?xml version="1.0" encoding="utf-8"?>
 <p:notes xmlns:a="http://schemas.openxmlformats.org/drawingml/2006/main" xmlns:r="http://schemas.openxmlformats.org/officeDocument/2006/relationships" xmlns:p="http://schemas.openxmlformats.org/presentationml/2006/main">
   <p:cSld>
     <p:spTree>
@@ -3847,103 +3944,6 @@
     <p:extLst>
       <p:ext uri="{BB962C8B-B14F-4D97-AF65-F5344CB8AC3E}">
         <p14:creationId xmlns:p14="http://schemas.microsoft.com/office/powerpoint/2010/main" val="508260566"/>
-      </p:ext>
-    </p:extLst>
-  </p:cSld>
-  <p:clrMapOvr>
-    <a:masterClrMapping/>
-  </p:clrMapOvr>
-</p:notes>
-</file>
-
-<file path=ppt/notesSlides/notesSlide7.xml><?xml version="1.0" encoding="utf-8"?>
-<p:notes xmlns:a="http://schemas.openxmlformats.org/drawingml/2006/main" xmlns:r="http://schemas.openxmlformats.org/officeDocument/2006/relationships" xmlns:p="http://schemas.openxmlformats.org/presentationml/2006/main">
-  <p:cSld>
-    <p:spTree>
-      <p:nvGrpSpPr>
-        <p:cNvPr id="1" name="">
-          <a:extLst>
-            <a:ext uri="{FF2B5EF4-FFF2-40B4-BE49-F238E27FC236}">
-              <a16:creationId xmlns:a16="http://schemas.microsoft.com/office/drawing/2014/main" id="{7B783C6F-81C2-4881-265B-DC90DB1176D4}"/>
-            </a:ext>
-          </a:extLst>
-        </p:cNvPr>
-        <p:cNvGrpSpPr/>
-        <p:nvPr/>
-      </p:nvGrpSpPr>
-      <p:grpSpPr>
-        <a:xfrm>
-          <a:off x="0" y="0"/>
-          <a:ext cx="0" cy="0"/>
-          <a:chOff x="0" y="0"/>
-          <a:chExt cx="0" cy="0"/>
-        </a:xfrm>
-      </p:grpSpPr>
-      <p:sp>
-        <p:nvSpPr>
-          <p:cNvPr id="2" name="Slide Image Placeholder 1">
-            <a:extLst>
-              <a:ext uri="{FF2B5EF4-FFF2-40B4-BE49-F238E27FC236}">
-                <a16:creationId xmlns:a16="http://schemas.microsoft.com/office/drawing/2014/main" id="{014360F5-78A5-F8F2-3AF1-E6B8A31113EB}"/>
-              </a:ext>
-            </a:extLst>
-          </p:cNvPr>
-          <p:cNvSpPr>
-            <a:spLocks noGrp="1" noRot="1" noChangeAspect="1"/>
-          </p:cNvSpPr>
-          <p:nvPr>
-            <p:ph type="sldImg" idx="2"/>
-          </p:nvPr>
-        </p:nvSpPr>
-        <p:spPr/>
-      </p:sp>
-      <p:sp>
-        <p:nvSpPr>
-          <p:cNvPr id="3" name="Notes Placeholder 2">
-            <a:extLst>
-              <a:ext uri="{FF2B5EF4-FFF2-40B4-BE49-F238E27FC236}">
-                <a16:creationId xmlns:a16="http://schemas.microsoft.com/office/drawing/2014/main" id="{28EBFA01-DC83-FA69-1A52-247DA37A5AB1}"/>
-              </a:ext>
-            </a:extLst>
-          </p:cNvPr>
-          <p:cNvSpPr>
-            <a:spLocks noGrp="1"/>
-          </p:cNvSpPr>
-          <p:nvPr>
-            <p:ph type="body" sz="quarter" idx="3"/>
-          </p:nvPr>
-        </p:nvSpPr>
-        <p:spPr/>
-        <p:txBody>
-          <a:bodyPr/>
-          <a:lstStyle/>
-          <a:p>
-            <a:endParaRPr dirty="0"/>
-          </a:p>
-        </p:txBody>
-      </p:sp>
-      <p:sp>
-        <p:nvSpPr>
-          <p:cNvPr id="4" name="Slide Number Placeholder 3">
-            <a:extLst>
-              <a:ext uri="{FF2B5EF4-FFF2-40B4-BE49-F238E27FC236}">
-                <a16:creationId xmlns:a16="http://schemas.microsoft.com/office/drawing/2014/main" id="{9C70E2E4-AEC5-C29D-5657-714969E15497}"/>
-              </a:ext>
-            </a:extLst>
-          </p:cNvPr>
-          <p:cNvSpPr>
-            <a:spLocks noGrp="1"/>
-          </p:cNvSpPr>
-          <p:nvPr>
-            <p:ph type="sldNum" sz="quarter" idx="5"/>
-          </p:nvPr>
-        </p:nvSpPr>
-        <p:spPr/>
-      </p:sp>
-    </p:spTree>
-    <p:extLst>
-      <p:ext uri="{BB962C8B-B14F-4D97-AF65-F5344CB8AC3E}">
-        <p14:creationId xmlns:p14="http://schemas.microsoft.com/office/powerpoint/2010/main" val="2708564693"/>
       </p:ext>
     </p:extLst>
   </p:cSld>
@@ -9507,6 +9507,2611 @@
         <p:cNvPr id="1" name="">
           <a:extLst>
             <a:ext uri="{FF2B5EF4-FFF2-40B4-BE49-F238E27FC236}">
+              <a16:creationId xmlns:a16="http://schemas.microsoft.com/office/drawing/2014/main" id="{E5E235E1-990A-B61D-C2FB-0E5F237ECDDF}"/>
+            </a:ext>
+          </a:extLst>
+        </p:cNvPr>
+        <p:cNvGrpSpPr/>
+        <p:nvPr/>
+      </p:nvGrpSpPr>
+      <p:grpSpPr>
+        <a:xfrm>
+          <a:off x="0" y="0"/>
+          <a:ext cx="0" cy="0"/>
+          <a:chOff x="0" y="0"/>
+          <a:chExt cx="0" cy="0"/>
+        </a:xfrm>
+      </p:grpSpPr>
+      <p:sp>
+        <p:nvSpPr>
+          <p:cNvPr id="2" name="Title 1">
+            <a:extLst>
+              <a:ext uri="{FF2B5EF4-FFF2-40B4-BE49-F238E27FC236}">
+                <a16:creationId xmlns:a16="http://schemas.microsoft.com/office/drawing/2014/main" id="{0845B1E2-F9E7-3B5D-A7E2-C46DA9E961BE}"/>
+              </a:ext>
+            </a:extLst>
+          </p:cNvPr>
+          <p:cNvSpPr>
+            <a:spLocks noGrp="1"/>
+          </p:cNvSpPr>
+          <p:nvPr>
+            <p:ph type="title"/>
+          </p:nvPr>
+        </p:nvSpPr>
+        <p:spPr/>
+        <p:txBody>
+          <a:bodyPr/>
+          <a:lstStyle/>
+          <a:p>
+            <a:r>
+              <a:rPr lang="en-US" altLang="ko-KR" dirty="0"/>
+              <a:t>Detailed progress</a:t>
+            </a:r>
+            <a:endParaRPr dirty="0"/>
+          </a:p>
+        </p:txBody>
+      </p:sp>
+      <p:sp>
+        <p:nvSpPr>
+          <p:cNvPr id="3" name="Content Placeholder 2">
+            <a:extLst>
+              <a:ext uri="{FF2B5EF4-FFF2-40B4-BE49-F238E27FC236}">
+                <a16:creationId xmlns:a16="http://schemas.microsoft.com/office/drawing/2014/main" id="{A66672E8-387A-B761-2D48-323AA293B225}"/>
+              </a:ext>
+            </a:extLst>
+          </p:cNvPr>
+          <p:cNvSpPr>
+            <a:spLocks noGrp="1"/>
+          </p:cNvSpPr>
+          <p:nvPr>
+            <p:ph idx="1"/>
+          </p:nvPr>
+        </p:nvSpPr>
+        <p:spPr/>
+        <p:txBody>
+          <a:bodyPr>
+            <a:normAutofit/>
+          </a:bodyPr>
+          <a:lstStyle/>
+          <a:p>
+            <a:pPr>
+              <a:lnSpc>
+                <a:spcPct val="150000"/>
+              </a:lnSpc>
+            </a:pPr>
+            <a:r>
+              <a:rPr lang="ko-KR" altLang="en-US" b="1" dirty="0"/>
+              <a:t>그룹 간 </a:t>
+            </a:r>
+            <a:r>
+              <a:rPr lang="en-US" altLang="ko-KR" b="1" dirty="0"/>
+              <a:t>p / </a:t>
+            </a:r>
+            <a:r>
+              <a:rPr lang="en-US" altLang="ko-KR" b="1" dirty="0" err="1"/>
+              <a:t>dp</a:t>
+            </a:r>
+            <a:r>
+              <a:rPr lang="ko-KR" altLang="en-US" b="1" dirty="0"/>
+              <a:t> </a:t>
+            </a:r>
+            <a:r>
+              <a:rPr lang="en-US" altLang="ko-KR" b="1" dirty="0"/>
+              <a:t>/ d2p </a:t>
+            </a:r>
+            <a:r>
+              <a:rPr lang="ko-KR" altLang="en-US" b="1" dirty="0"/>
+              <a:t>곡선 비교</a:t>
+            </a:r>
+            <a:endParaRPr b="1" dirty="0"/>
+          </a:p>
+        </p:txBody>
+      </p:sp>
+      <p:graphicFrame>
+        <p:nvGraphicFramePr>
+          <p:cNvPr id="4" name="표 3">
+            <a:extLst>
+              <a:ext uri="{FF2B5EF4-FFF2-40B4-BE49-F238E27FC236}">
+                <a16:creationId xmlns:a16="http://schemas.microsoft.com/office/drawing/2014/main" id="{6EA819FF-824A-52D4-3A7F-A3DF216AF6CF}"/>
+              </a:ext>
+            </a:extLst>
+          </p:cNvPr>
+          <p:cNvGraphicFramePr>
+            <a:graphicFrameLocks noGrp="1"/>
+          </p:cNvGraphicFramePr>
+          <p:nvPr>
+            <p:extLst>
+              <p:ext uri="{D42A27DB-BD31-4B8C-83A1-F6EECF244321}">
+                <p14:modId xmlns:p14="http://schemas.microsoft.com/office/powerpoint/2010/main" val="472271731"/>
+              </p:ext>
+            </p:extLst>
+          </p:nvPr>
+        </p:nvGraphicFramePr>
+        <p:xfrm>
+          <a:off x="1312092" y="1574800"/>
+          <a:ext cx="9567816" cy="1854200"/>
+        </p:xfrm>
+        <a:graphic>
+          <a:graphicData uri="http://schemas.openxmlformats.org/drawingml/2006/table">
+            <a:tbl>
+              <a:tblPr firstRow="1" bandRow="1">
+                <a:tableStyleId>{9D7B26C5-4107-4FEC-AEDC-1716B250A1EF}</a:tableStyleId>
+              </a:tblPr>
+              <a:tblGrid>
+                <a:gridCol w="2391954">
+                  <a:extLst>
+                    <a:ext uri="{9D8B030D-6E8A-4147-A177-3AD203B41FA5}">
+                      <a16:colId xmlns:a16="http://schemas.microsoft.com/office/drawing/2014/main" val="380248596"/>
+                    </a:ext>
+                  </a:extLst>
+                </a:gridCol>
+                <a:gridCol w="2391954">
+                  <a:extLst>
+                    <a:ext uri="{9D8B030D-6E8A-4147-A177-3AD203B41FA5}">
+                      <a16:colId xmlns:a16="http://schemas.microsoft.com/office/drawing/2014/main" val="2374354257"/>
+                    </a:ext>
+                  </a:extLst>
+                </a:gridCol>
+                <a:gridCol w="2391954">
+                  <a:extLst>
+                    <a:ext uri="{9D8B030D-6E8A-4147-A177-3AD203B41FA5}">
+                      <a16:colId xmlns:a16="http://schemas.microsoft.com/office/drawing/2014/main" val="983427934"/>
+                    </a:ext>
+                  </a:extLst>
+                </a:gridCol>
+                <a:gridCol w="2391954">
+                  <a:extLst>
+                    <a:ext uri="{9D8B030D-6E8A-4147-A177-3AD203B41FA5}">
+                      <a16:colId xmlns:a16="http://schemas.microsoft.com/office/drawing/2014/main" val="13888355"/>
+                    </a:ext>
+                  </a:extLst>
+                </a:gridCol>
+              </a:tblGrid>
+              <a:tr h="370840">
+                <a:tc>
+                  <a:txBody>
+                    <a:bodyPr/>
+                    <a:lstStyle/>
+                    <a:p>
+                      <a:pPr algn="ctr" latinLnBrk="1"/>
+                      <a:r>
+                        <a:rPr lang="ko-KR" altLang="en-US" sz="1200" b="0" dirty="0">
+                          <a:solidFill>
+                            <a:schemeClr val="tx1"/>
+                          </a:solidFill>
+                          <a:latin typeface="KoPub돋움체 Bold" panose="00000800000000000000" pitchFamily="2" charset="-127"/>
+                          <a:ea typeface="KoPub돋움체 Bold" panose="00000800000000000000" pitchFamily="2" charset="-127"/>
+                        </a:rPr>
+                        <a:t>비교 </a:t>
+                      </a:r>
+                      <a:r>
+                        <a:rPr lang="en-US" altLang="ko-KR" sz="1200" b="0" dirty="0">
+                          <a:solidFill>
+                            <a:schemeClr val="tx1"/>
+                          </a:solidFill>
+                          <a:latin typeface="KoPub돋움체 Bold" panose="00000800000000000000" pitchFamily="2" charset="-127"/>
+                          <a:ea typeface="KoPub돋움체 Bold" panose="00000800000000000000" pitchFamily="2" charset="-127"/>
+                        </a:rPr>
+                        <a:t>(</a:t>
+                      </a:r>
+                      <a:r>
+                        <a:rPr lang="ko-KR" altLang="en-US" sz="1200" b="0" dirty="0">
+                          <a:solidFill>
+                            <a:schemeClr val="tx1"/>
+                          </a:solidFill>
+                          <a:latin typeface="KoPub돋움체 Bold" panose="00000800000000000000" pitchFamily="2" charset="-127"/>
+                          <a:ea typeface="KoPub돋움체 Bold" panose="00000800000000000000" pitchFamily="2" charset="-127"/>
+                        </a:rPr>
+                        <a:t>강남</a:t>
+                      </a:r>
+                      <a:r>
+                        <a:rPr lang="en-US" altLang="ko-KR" sz="1200" b="0" dirty="0">
+                          <a:solidFill>
+                            <a:schemeClr val="tx1"/>
+                          </a:solidFill>
+                          <a:latin typeface="KoPub돋움체 Bold" panose="00000800000000000000" pitchFamily="2" charset="-127"/>
+                          <a:ea typeface="KoPub돋움체 Bold" panose="00000800000000000000" pitchFamily="2" charset="-127"/>
+                        </a:rPr>
+                        <a:t>)</a:t>
+                      </a:r>
+                      <a:endParaRPr lang="ko-KR" altLang="en-US" sz="1200" b="0" dirty="0">
+                        <a:solidFill>
+                          <a:schemeClr val="tx1"/>
+                        </a:solidFill>
+                        <a:latin typeface="KoPub돋움체 Bold" panose="00000800000000000000" pitchFamily="2" charset="-127"/>
+                        <a:ea typeface="KoPub돋움체 Bold" panose="00000800000000000000" pitchFamily="2" charset="-127"/>
+                      </a:endParaRPr>
+                    </a:p>
+                  </a:txBody>
+                  <a:tcPr anchor="ctr"/>
+                </a:tc>
+                <a:tc>
+                  <a:txBody>
+                    <a:bodyPr/>
+                    <a:lstStyle/>
+                    <a:p>
+                      <a:pPr algn="ctr" latinLnBrk="1"/>
+                      <a:r>
+                        <a:rPr lang="en-US" altLang="ko-KR" sz="1200" b="0" dirty="0">
+                          <a:solidFill>
+                            <a:schemeClr val="tx1"/>
+                          </a:solidFill>
+                          <a:latin typeface="KoPub돋움체 Bold" panose="00000800000000000000" pitchFamily="2" charset="-127"/>
+                          <a:ea typeface="KoPub돋움체 Bold" panose="00000800000000000000" pitchFamily="2" charset="-127"/>
+                        </a:rPr>
+                        <a:t>p (raw)</a:t>
+                      </a:r>
+                      <a:endParaRPr lang="ko-KR" altLang="en-US" sz="1200" b="0" dirty="0">
+                        <a:solidFill>
+                          <a:schemeClr val="tx1"/>
+                        </a:solidFill>
+                        <a:latin typeface="KoPub돋움체 Bold" panose="00000800000000000000" pitchFamily="2" charset="-127"/>
+                        <a:ea typeface="KoPub돋움체 Bold" panose="00000800000000000000" pitchFamily="2" charset="-127"/>
+                      </a:endParaRPr>
+                    </a:p>
+                  </a:txBody>
+                  <a:tcPr anchor="ctr"/>
+                </a:tc>
+                <a:tc>
+                  <a:txBody>
+                    <a:bodyPr/>
+                    <a:lstStyle/>
+                    <a:p>
+                      <a:pPr algn="ctr" latinLnBrk="1"/>
+                      <a:r>
+                        <a:rPr lang="en-US" altLang="ko-KR" sz="1200" b="0" dirty="0" err="1">
+                          <a:solidFill>
+                            <a:schemeClr val="tx1"/>
+                          </a:solidFill>
+                          <a:latin typeface="KoPub돋움체 Bold" panose="00000800000000000000" pitchFamily="2" charset="-127"/>
+                          <a:ea typeface="KoPub돋움체 Bold" panose="00000800000000000000" pitchFamily="2" charset="-127"/>
+                        </a:rPr>
+                        <a:t>dp</a:t>
+                      </a:r>
+                      <a:r>
+                        <a:rPr lang="en-US" altLang="ko-KR" sz="1200" b="0" dirty="0">
+                          <a:solidFill>
+                            <a:schemeClr val="tx1"/>
+                          </a:solidFill>
+                          <a:latin typeface="KoPub돋움체 Bold" panose="00000800000000000000" pitchFamily="2" charset="-127"/>
+                          <a:ea typeface="KoPub돋움체 Bold" panose="00000800000000000000" pitchFamily="2" charset="-127"/>
+                        </a:rPr>
+                        <a:t> (1</a:t>
+                      </a:r>
+                      <a:r>
+                        <a:rPr lang="ko-KR" altLang="en-US" sz="1200" b="0" dirty="0" err="1">
+                          <a:solidFill>
+                            <a:schemeClr val="tx1"/>
+                          </a:solidFill>
+                          <a:latin typeface="KoPub돋움체 Bold" panose="00000800000000000000" pitchFamily="2" charset="-127"/>
+                          <a:ea typeface="KoPub돋움체 Bold" panose="00000800000000000000" pitchFamily="2" charset="-127"/>
+                        </a:rPr>
+                        <a:t>차미분</a:t>
+                      </a:r>
+                      <a:r>
+                        <a:rPr lang="en-US" altLang="ko-KR" sz="1200" b="0" dirty="0">
+                          <a:solidFill>
+                            <a:schemeClr val="tx1"/>
+                          </a:solidFill>
+                          <a:latin typeface="KoPub돋움체 Bold" panose="00000800000000000000" pitchFamily="2" charset="-127"/>
+                          <a:ea typeface="KoPub돋움체 Bold" panose="00000800000000000000" pitchFamily="2" charset="-127"/>
+                        </a:rPr>
+                        <a:t>)</a:t>
+                      </a:r>
+                      <a:endParaRPr lang="ko-KR" altLang="en-US" sz="1200" b="0" dirty="0">
+                        <a:solidFill>
+                          <a:schemeClr val="tx1"/>
+                        </a:solidFill>
+                        <a:latin typeface="KoPub돋움체 Bold" panose="00000800000000000000" pitchFamily="2" charset="-127"/>
+                        <a:ea typeface="KoPub돋움체 Bold" panose="00000800000000000000" pitchFamily="2" charset="-127"/>
+                      </a:endParaRPr>
+                    </a:p>
+                  </a:txBody>
+                  <a:tcPr anchor="ctr"/>
+                </a:tc>
+                <a:tc>
+                  <a:txBody>
+                    <a:bodyPr/>
+                    <a:lstStyle/>
+                    <a:p>
+                      <a:pPr algn="ctr" latinLnBrk="1"/>
+                      <a:r>
+                        <a:rPr lang="en-US" altLang="ko-KR" sz="1200" b="0" dirty="0">
+                          <a:solidFill>
+                            <a:schemeClr val="tx1"/>
+                          </a:solidFill>
+                          <a:latin typeface="KoPub돋움체 Bold" panose="00000800000000000000" pitchFamily="2" charset="-127"/>
+                          <a:ea typeface="KoPub돋움체 Bold" panose="00000800000000000000" pitchFamily="2" charset="-127"/>
+                        </a:rPr>
+                        <a:t>d2p (2</a:t>
+                      </a:r>
+                      <a:r>
+                        <a:rPr lang="ko-KR" altLang="en-US" sz="1200" b="0" dirty="0" err="1">
+                          <a:solidFill>
+                            <a:schemeClr val="tx1"/>
+                          </a:solidFill>
+                          <a:latin typeface="KoPub돋움체 Bold" panose="00000800000000000000" pitchFamily="2" charset="-127"/>
+                          <a:ea typeface="KoPub돋움체 Bold" panose="00000800000000000000" pitchFamily="2" charset="-127"/>
+                        </a:rPr>
+                        <a:t>차미분</a:t>
+                      </a:r>
+                      <a:r>
+                        <a:rPr lang="en-US" altLang="ko-KR" sz="1200" b="0" dirty="0">
+                          <a:solidFill>
+                            <a:schemeClr val="tx1"/>
+                          </a:solidFill>
+                          <a:latin typeface="KoPub돋움체 Bold" panose="00000800000000000000" pitchFamily="2" charset="-127"/>
+                          <a:ea typeface="KoPub돋움체 Bold" panose="00000800000000000000" pitchFamily="2" charset="-127"/>
+                        </a:rPr>
+                        <a:t>)</a:t>
+                      </a:r>
+                      <a:endParaRPr lang="ko-KR" altLang="en-US" sz="1200" b="0" dirty="0">
+                        <a:solidFill>
+                          <a:schemeClr val="tx1"/>
+                        </a:solidFill>
+                        <a:latin typeface="KoPub돋움체 Bold" panose="00000800000000000000" pitchFamily="2" charset="-127"/>
+                        <a:ea typeface="KoPub돋움체 Bold" panose="00000800000000000000" pitchFamily="2" charset="-127"/>
+                      </a:endParaRPr>
+                    </a:p>
+                  </a:txBody>
+                  <a:tcPr anchor="ctr"/>
+                </a:tc>
+                <a:extLst>
+                  <a:ext uri="{0D108BD9-81ED-4DB2-BD59-A6C34878D82A}">
+                    <a16:rowId xmlns:a16="http://schemas.microsoft.com/office/drawing/2014/main" val="1992821599"/>
+                  </a:ext>
+                </a:extLst>
+              </a:tr>
+              <a:tr h="370840">
+                <a:tc>
+                  <a:txBody>
+                    <a:bodyPr/>
+                    <a:lstStyle/>
+                    <a:p>
+                      <a:pPr algn="ctr" latinLnBrk="1"/>
+                      <a:r>
+                        <a:rPr lang="ko-KR" altLang="ko-KR" sz="1200" b="0" i="0" kern="1200" dirty="0">
+                          <a:solidFill>
+                            <a:schemeClr val="tx1"/>
+                          </a:solidFill>
+                          <a:effectLst/>
+                          <a:latin typeface="KoPub돋움체 Medium" panose="00000600000000000000" pitchFamily="2" charset="-127"/>
+                          <a:ea typeface="KoPub돋움체 Medium" panose="00000600000000000000" pitchFamily="2" charset="-127"/>
+                          <a:cs typeface="+mn-cs"/>
+                        </a:rPr>
+                        <a:t>FP </a:t>
+                      </a:r>
+                      <a:r>
+                        <a:rPr lang="ko-KR" altLang="ko-KR" sz="1200" b="0" i="0" kern="1200" dirty="0" err="1">
+                          <a:solidFill>
+                            <a:schemeClr val="tx1"/>
+                          </a:solidFill>
+                          <a:effectLst/>
+                          <a:latin typeface="KoPub돋움체 Medium" panose="00000600000000000000" pitchFamily="2" charset="-127"/>
+                          <a:ea typeface="KoPub돋움체 Medium" panose="00000600000000000000" pitchFamily="2" charset="-127"/>
+                          <a:cs typeface="+mn-cs"/>
+                        </a:rPr>
+                        <a:t>vs</a:t>
+                      </a:r>
+                      <a:r>
+                        <a:rPr lang="ko-KR" altLang="ko-KR" sz="1200" b="0" i="0" kern="1200" dirty="0">
+                          <a:solidFill>
+                            <a:schemeClr val="tx1"/>
+                          </a:solidFill>
+                          <a:effectLst/>
+                          <a:latin typeface="KoPub돋움체 Medium" panose="00000600000000000000" pitchFamily="2" charset="-127"/>
+                          <a:ea typeface="KoPub돋움체 Medium" panose="00000600000000000000" pitchFamily="2" charset="-127"/>
+                          <a:cs typeface="+mn-cs"/>
+                        </a:rPr>
+                        <a:t> TN</a:t>
+                      </a:r>
+                      <a:endParaRPr lang="ko-KR" altLang="en-US" sz="1200" dirty="0">
+                        <a:solidFill>
+                          <a:schemeClr val="tx1"/>
+                        </a:solidFill>
+                        <a:latin typeface="KoPub돋움체 Medium" panose="00000600000000000000" pitchFamily="2" charset="-127"/>
+                        <a:ea typeface="KoPub돋움체 Medium" panose="00000600000000000000" pitchFamily="2" charset="-127"/>
+                      </a:endParaRPr>
+                    </a:p>
+                  </a:txBody>
+                  <a:tcPr anchor="ctr">
+                    <a:solidFill>
+                      <a:schemeClr val="bg1"/>
+                    </a:solidFill>
+                  </a:tcPr>
+                </a:tc>
+                <a:tc>
+                  <a:txBody>
+                    <a:bodyPr/>
+                    <a:lstStyle/>
+                    <a:p>
+                      <a:pPr algn="l">
+                        <a:buNone/>
+                      </a:pPr>
+                      <a:r>
+                        <a:rPr lang="ko-KR" sz="1200" b="0" i="0" dirty="0">
+                          <a:solidFill>
+                            <a:schemeClr val="tx1"/>
+                          </a:solidFill>
+                          <a:effectLst/>
+                          <a:latin typeface="KoPub돋움체 Medium" panose="00000600000000000000" pitchFamily="2" charset="-127"/>
+                          <a:ea typeface="KoPub돋움체 Medium" panose="00000600000000000000" pitchFamily="2" charset="-127"/>
+                        </a:rPr>
+                        <a:t>RMSD=0.0287, </a:t>
+                      </a:r>
+                      <a:r>
+                        <a:rPr lang="ko-KR" sz="1200" b="0" i="0" dirty="0" err="1">
+                          <a:solidFill>
+                            <a:schemeClr val="tx1"/>
+                          </a:solidFill>
+                          <a:effectLst/>
+                          <a:latin typeface="KoPub돋움체 Medium" panose="00000600000000000000" pitchFamily="2" charset="-127"/>
+                          <a:ea typeface="KoPub돋움체 Medium" panose="00000600000000000000" pitchFamily="2" charset="-127"/>
+                        </a:rPr>
+                        <a:t>p</a:t>
+                      </a:r>
+                      <a:r>
+                        <a:rPr lang="ko-KR" sz="1200" b="0" i="0" dirty="0">
+                          <a:solidFill>
+                            <a:schemeClr val="tx1"/>
+                          </a:solidFill>
+                          <a:effectLst/>
+                          <a:latin typeface="KoPub돋움체 Medium" panose="00000600000000000000" pitchFamily="2" charset="-127"/>
+                          <a:ea typeface="KoPub돋움체 Medium" panose="00000600000000000000" pitchFamily="2" charset="-127"/>
+                        </a:rPr>
+                        <a:t>=0.0005</a:t>
+                      </a:r>
+                    </a:p>
+                  </a:txBody>
+                  <a:tcPr marL="19050" marR="19050" marT="19050" marB="19050" anchor="ctr">
+                    <a:solidFill>
+                      <a:schemeClr val="bg1"/>
+                    </a:solidFill>
+                  </a:tcPr>
+                </a:tc>
+                <a:tc>
+                  <a:txBody>
+                    <a:bodyPr/>
+                    <a:lstStyle/>
+                    <a:p>
+                      <a:pPr algn="l">
+                        <a:buNone/>
+                      </a:pPr>
+                      <a:r>
+                        <a:rPr lang="ko-KR" sz="1200" b="0" i="0">
+                          <a:solidFill>
+                            <a:schemeClr val="tx1"/>
+                          </a:solidFill>
+                          <a:effectLst/>
+                          <a:latin typeface="KoPub돋움체 Medium" panose="00000600000000000000" pitchFamily="2" charset="-127"/>
+                          <a:ea typeface="KoPub돋움체 Medium" panose="00000600000000000000" pitchFamily="2" charset="-127"/>
+                        </a:rPr>
+                        <a:t>RMSD=0.0021, p=0.0005</a:t>
+                      </a:r>
+                    </a:p>
+                  </a:txBody>
+                  <a:tcPr marL="19050" marR="19050" marT="19050" marB="19050" anchor="ctr">
+                    <a:solidFill>
+                      <a:schemeClr val="bg1"/>
+                    </a:solidFill>
+                  </a:tcPr>
+                </a:tc>
+                <a:tc>
+                  <a:txBody>
+                    <a:bodyPr/>
+                    <a:lstStyle/>
+                    <a:p>
+                      <a:pPr algn="l">
+                        <a:buNone/>
+                      </a:pPr>
+                      <a:r>
+                        <a:rPr lang="ko-KR" sz="1200" b="0" i="0" dirty="0">
+                          <a:solidFill>
+                            <a:schemeClr val="tx1"/>
+                          </a:solidFill>
+                          <a:effectLst/>
+                          <a:latin typeface="KoPub돋움체 Medium" panose="00000600000000000000" pitchFamily="2" charset="-127"/>
+                          <a:ea typeface="KoPub돋움체 Medium" panose="00000600000000000000" pitchFamily="2" charset="-127"/>
+                        </a:rPr>
+                        <a:t>RMSD=0.0004, </a:t>
+                      </a:r>
+                      <a:r>
+                        <a:rPr lang="ko-KR" sz="1200" b="0" i="0" dirty="0" err="1">
+                          <a:solidFill>
+                            <a:schemeClr val="tx1"/>
+                          </a:solidFill>
+                          <a:effectLst/>
+                          <a:latin typeface="KoPub돋움체 Medium" panose="00000600000000000000" pitchFamily="2" charset="-127"/>
+                          <a:ea typeface="KoPub돋움체 Medium" panose="00000600000000000000" pitchFamily="2" charset="-127"/>
+                        </a:rPr>
+                        <a:t>p</a:t>
+                      </a:r>
+                      <a:r>
+                        <a:rPr lang="ko-KR" sz="1200" b="0" i="0" dirty="0">
+                          <a:solidFill>
+                            <a:schemeClr val="tx1"/>
+                          </a:solidFill>
+                          <a:effectLst/>
+                          <a:latin typeface="KoPub돋움체 Medium" panose="00000600000000000000" pitchFamily="2" charset="-127"/>
+                          <a:ea typeface="KoPub돋움체 Medium" panose="00000600000000000000" pitchFamily="2" charset="-127"/>
+                        </a:rPr>
+                        <a:t>=0.0005</a:t>
+                      </a:r>
+                    </a:p>
+                  </a:txBody>
+                  <a:tcPr marL="19050" marR="19050" marT="19050" marB="19050" anchor="ctr">
+                    <a:solidFill>
+                      <a:schemeClr val="bg1"/>
+                    </a:solidFill>
+                  </a:tcPr>
+                </a:tc>
+                <a:extLst>
+                  <a:ext uri="{0D108BD9-81ED-4DB2-BD59-A6C34878D82A}">
+                    <a16:rowId xmlns:a16="http://schemas.microsoft.com/office/drawing/2014/main" val="3290363448"/>
+                  </a:ext>
+                </a:extLst>
+              </a:tr>
+              <a:tr h="370840">
+                <a:tc>
+                  <a:txBody>
+                    <a:bodyPr/>
+                    <a:lstStyle/>
+                    <a:p>
+                      <a:pPr algn="ctr" latinLnBrk="1"/>
+                      <a:r>
+                        <a:rPr lang="ko-KR" altLang="ko-KR" sz="1200" b="0" i="0" kern="1200" dirty="0">
+                          <a:solidFill>
+                            <a:schemeClr val="tx1"/>
+                          </a:solidFill>
+                          <a:effectLst/>
+                          <a:latin typeface="KoPub돋움체 Medium" panose="00000600000000000000" pitchFamily="2" charset="-127"/>
+                          <a:ea typeface="KoPub돋움체 Medium" panose="00000600000000000000" pitchFamily="2" charset="-127"/>
+                          <a:cs typeface="+mn-cs"/>
+                        </a:rPr>
+                        <a:t>TP </a:t>
+                      </a:r>
+                      <a:r>
+                        <a:rPr lang="ko-KR" altLang="ko-KR" sz="1200" b="0" i="0" kern="1200" dirty="0" err="1">
+                          <a:solidFill>
+                            <a:schemeClr val="tx1"/>
+                          </a:solidFill>
+                          <a:effectLst/>
+                          <a:latin typeface="KoPub돋움체 Medium" panose="00000600000000000000" pitchFamily="2" charset="-127"/>
+                          <a:ea typeface="KoPub돋움체 Medium" panose="00000600000000000000" pitchFamily="2" charset="-127"/>
+                          <a:cs typeface="+mn-cs"/>
+                        </a:rPr>
+                        <a:t>vs</a:t>
+                      </a:r>
+                      <a:r>
+                        <a:rPr lang="ko-KR" altLang="ko-KR" sz="1200" b="0" i="0" kern="1200" dirty="0">
+                          <a:solidFill>
+                            <a:schemeClr val="tx1"/>
+                          </a:solidFill>
+                          <a:effectLst/>
+                          <a:latin typeface="KoPub돋움체 Medium" panose="00000600000000000000" pitchFamily="2" charset="-127"/>
+                          <a:ea typeface="KoPub돋움체 Medium" panose="00000600000000000000" pitchFamily="2" charset="-127"/>
+                          <a:cs typeface="+mn-cs"/>
+                        </a:rPr>
+                        <a:t> TN</a:t>
+                      </a:r>
+                      <a:endParaRPr lang="ko-KR" altLang="en-US" sz="1200" dirty="0">
+                        <a:solidFill>
+                          <a:schemeClr val="tx1"/>
+                        </a:solidFill>
+                        <a:latin typeface="KoPub돋움체 Medium" panose="00000600000000000000" pitchFamily="2" charset="-127"/>
+                        <a:ea typeface="KoPub돋움체 Medium" panose="00000600000000000000" pitchFamily="2" charset="-127"/>
+                      </a:endParaRPr>
+                    </a:p>
+                  </a:txBody>
+                  <a:tcPr anchor="ctr">
+                    <a:lnB w="28575" cap="flat" cmpd="sng" algn="ctr">
+                      <a:solidFill>
+                        <a:srgbClr val="FF0000"/>
+                      </a:solidFill>
+                      <a:prstDash val="solid"/>
+                      <a:round/>
+                      <a:headEnd type="none" w="med" len="med"/>
+                      <a:tailEnd type="none" w="med" len="med"/>
+                    </a:lnB>
+                    <a:solidFill>
+                      <a:schemeClr val="bg1"/>
+                    </a:solidFill>
+                  </a:tcPr>
+                </a:tc>
+                <a:tc>
+                  <a:txBody>
+                    <a:bodyPr/>
+                    <a:lstStyle/>
+                    <a:p>
+                      <a:pPr algn="l">
+                        <a:buNone/>
+                      </a:pPr>
+                      <a:r>
+                        <a:rPr lang="ko-KR" sz="1200" b="0" i="0" dirty="0">
+                          <a:solidFill>
+                            <a:schemeClr val="tx1"/>
+                          </a:solidFill>
+                          <a:effectLst/>
+                          <a:latin typeface="KoPub돋움체 Medium" panose="00000600000000000000" pitchFamily="2" charset="-127"/>
+                          <a:ea typeface="KoPub돋움체 Medium" panose="00000600000000000000" pitchFamily="2" charset="-127"/>
+                        </a:rPr>
+                        <a:t>RMSD=0.0325, </a:t>
+                      </a:r>
+                      <a:r>
+                        <a:rPr lang="ko-KR" sz="1200" b="0" i="0" dirty="0" err="1">
+                          <a:solidFill>
+                            <a:schemeClr val="tx1"/>
+                          </a:solidFill>
+                          <a:effectLst/>
+                          <a:latin typeface="KoPub돋움체 Medium" panose="00000600000000000000" pitchFamily="2" charset="-127"/>
+                          <a:ea typeface="KoPub돋움체 Medium" panose="00000600000000000000" pitchFamily="2" charset="-127"/>
+                        </a:rPr>
+                        <a:t>p</a:t>
+                      </a:r>
+                      <a:r>
+                        <a:rPr lang="ko-KR" sz="1200" b="0" i="0" dirty="0">
+                          <a:solidFill>
+                            <a:schemeClr val="tx1"/>
+                          </a:solidFill>
+                          <a:effectLst/>
+                          <a:latin typeface="KoPub돋움체 Medium" panose="00000600000000000000" pitchFamily="2" charset="-127"/>
+                          <a:ea typeface="KoPub돋움체 Medium" panose="00000600000000000000" pitchFamily="2" charset="-127"/>
+                        </a:rPr>
+                        <a:t>=0.002</a:t>
+                      </a:r>
+                    </a:p>
+                  </a:txBody>
+                  <a:tcPr marL="19050" marR="19050" marT="19050" marB="19050" anchor="ctr">
+                    <a:lnB w="28575" cap="flat" cmpd="sng" algn="ctr">
+                      <a:solidFill>
+                        <a:srgbClr val="FF0000"/>
+                      </a:solidFill>
+                      <a:prstDash val="solid"/>
+                      <a:round/>
+                      <a:headEnd type="none" w="med" len="med"/>
+                      <a:tailEnd type="none" w="med" len="med"/>
+                    </a:lnB>
+                    <a:solidFill>
+                      <a:schemeClr val="bg1"/>
+                    </a:solidFill>
+                  </a:tcPr>
+                </a:tc>
+                <a:tc>
+                  <a:txBody>
+                    <a:bodyPr/>
+                    <a:lstStyle/>
+                    <a:p>
+                      <a:pPr algn="l">
+                        <a:buNone/>
+                      </a:pPr>
+                      <a:r>
+                        <a:rPr lang="ko-KR" sz="1200" b="0" i="0">
+                          <a:solidFill>
+                            <a:schemeClr val="tx1"/>
+                          </a:solidFill>
+                          <a:effectLst/>
+                          <a:latin typeface="KoPub돋움체 Medium" panose="00000600000000000000" pitchFamily="2" charset="-127"/>
+                          <a:ea typeface="KoPub돋움체 Medium" panose="00000600000000000000" pitchFamily="2" charset="-127"/>
+                        </a:rPr>
+                        <a:t>RMSD=0.0026, p=0.0005</a:t>
+                      </a:r>
+                    </a:p>
+                  </a:txBody>
+                  <a:tcPr marL="19050" marR="19050" marT="19050" marB="19050" anchor="ctr">
+                    <a:lnB w="28575" cap="flat" cmpd="sng" algn="ctr">
+                      <a:solidFill>
+                        <a:srgbClr val="FF0000"/>
+                      </a:solidFill>
+                      <a:prstDash val="solid"/>
+                      <a:round/>
+                      <a:headEnd type="none" w="med" len="med"/>
+                      <a:tailEnd type="none" w="med" len="med"/>
+                    </a:lnB>
+                    <a:solidFill>
+                      <a:schemeClr val="bg1"/>
+                    </a:solidFill>
+                  </a:tcPr>
+                </a:tc>
+                <a:tc>
+                  <a:txBody>
+                    <a:bodyPr/>
+                    <a:lstStyle/>
+                    <a:p>
+                      <a:pPr algn="l">
+                        <a:buNone/>
+                      </a:pPr>
+                      <a:r>
+                        <a:rPr lang="ko-KR" sz="1200" b="0" i="0" dirty="0">
+                          <a:solidFill>
+                            <a:schemeClr val="tx1"/>
+                          </a:solidFill>
+                          <a:effectLst/>
+                          <a:latin typeface="KoPub돋움체 Medium" panose="00000600000000000000" pitchFamily="2" charset="-127"/>
+                          <a:ea typeface="KoPub돋움체 Medium" panose="00000600000000000000" pitchFamily="2" charset="-127"/>
+                        </a:rPr>
+                        <a:t>RMSD=0.0006, </a:t>
+                      </a:r>
+                      <a:r>
+                        <a:rPr lang="ko-KR" sz="1200" b="0" i="0" dirty="0" err="1">
+                          <a:solidFill>
+                            <a:schemeClr val="tx1"/>
+                          </a:solidFill>
+                          <a:effectLst/>
+                          <a:latin typeface="KoPub돋움체 Medium" panose="00000600000000000000" pitchFamily="2" charset="-127"/>
+                          <a:ea typeface="KoPub돋움체 Medium" panose="00000600000000000000" pitchFamily="2" charset="-127"/>
+                        </a:rPr>
+                        <a:t>p</a:t>
+                      </a:r>
+                      <a:r>
+                        <a:rPr lang="ko-KR" sz="1200" b="0" i="0" dirty="0">
+                          <a:solidFill>
+                            <a:schemeClr val="tx1"/>
+                          </a:solidFill>
+                          <a:effectLst/>
+                          <a:latin typeface="KoPub돋움체 Medium" panose="00000600000000000000" pitchFamily="2" charset="-127"/>
+                          <a:ea typeface="KoPub돋움체 Medium" panose="00000600000000000000" pitchFamily="2" charset="-127"/>
+                        </a:rPr>
+                        <a:t>=0.0005</a:t>
+                      </a:r>
+                    </a:p>
+                  </a:txBody>
+                  <a:tcPr marL="19050" marR="19050" marT="19050" marB="19050" anchor="ctr">
+                    <a:lnB w="28575" cap="flat" cmpd="sng" algn="ctr">
+                      <a:solidFill>
+                        <a:srgbClr val="FF0000"/>
+                      </a:solidFill>
+                      <a:prstDash val="solid"/>
+                      <a:round/>
+                      <a:headEnd type="none" w="med" len="med"/>
+                      <a:tailEnd type="none" w="med" len="med"/>
+                    </a:lnB>
+                    <a:solidFill>
+                      <a:schemeClr val="bg1"/>
+                    </a:solidFill>
+                  </a:tcPr>
+                </a:tc>
+                <a:extLst>
+                  <a:ext uri="{0D108BD9-81ED-4DB2-BD59-A6C34878D82A}">
+                    <a16:rowId xmlns:a16="http://schemas.microsoft.com/office/drawing/2014/main" val="4189124397"/>
+                  </a:ext>
+                </a:extLst>
+              </a:tr>
+              <a:tr h="370840">
+                <a:tc>
+                  <a:txBody>
+                    <a:bodyPr/>
+                    <a:lstStyle/>
+                    <a:p>
+                      <a:pPr algn="ctr" latinLnBrk="1"/>
+                      <a:r>
+                        <a:rPr lang="ko-KR" altLang="ko-KR" sz="1200" b="0" i="0" kern="1200" dirty="0">
+                          <a:solidFill>
+                            <a:schemeClr val="tx1"/>
+                          </a:solidFill>
+                          <a:effectLst/>
+                          <a:latin typeface="KoPub돋움체 Medium" panose="00000600000000000000" pitchFamily="2" charset="-127"/>
+                          <a:ea typeface="KoPub돋움체 Medium" panose="00000600000000000000" pitchFamily="2" charset="-127"/>
+                          <a:cs typeface="+mn-cs"/>
+                        </a:rPr>
+                        <a:t>TP </a:t>
+                      </a:r>
+                      <a:r>
+                        <a:rPr lang="ko-KR" altLang="ko-KR" sz="1200" b="0" i="0" kern="1200" dirty="0" err="1">
+                          <a:solidFill>
+                            <a:schemeClr val="tx1"/>
+                          </a:solidFill>
+                          <a:effectLst/>
+                          <a:latin typeface="KoPub돋움체 Medium" panose="00000600000000000000" pitchFamily="2" charset="-127"/>
+                          <a:ea typeface="KoPub돋움체 Medium" panose="00000600000000000000" pitchFamily="2" charset="-127"/>
+                          <a:cs typeface="+mn-cs"/>
+                        </a:rPr>
+                        <a:t>vs</a:t>
+                      </a:r>
+                      <a:r>
+                        <a:rPr lang="ko-KR" altLang="ko-KR" sz="1200" b="0" i="0" kern="1200" dirty="0">
+                          <a:solidFill>
+                            <a:schemeClr val="tx1"/>
+                          </a:solidFill>
+                          <a:effectLst/>
+                          <a:latin typeface="KoPub돋움체 Medium" panose="00000600000000000000" pitchFamily="2" charset="-127"/>
+                          <a:ea typeface="KoPub돋움체 Medium" panose="00000600000000000000" pitchFamily="2" charset="-127"/>
+                          <a:cs typeface="+mn-cs"/>
+                        </a:rPr>
+                        <a:t> FP</a:t>
+                      </a:r>
+                      <a:endParaRPr lang="ko-KR" altLang="en-US" sz="1200" dirty="0">
+                        <a:solidFill>
+                          <a:schemeClr val="tx1"/>
+                        </a:solidFill>
+                        <a:latin typeface="KoPub돋움체 Medium" panose="00000600000000000000" pitchFamily="2" charset="-127"/>
+                        <a:ea typeface="KoPub돋움체 Medium" panose="00000600000000000000" pitchFamily="2" charset="-127"/>
+                      </a:endParaRPr>
+                    </a:p>
+                  </a:txBody>
+                  <a:tcPr anchor="ctr">
+                    <a:lnL w="28575" cap="flat" cmpd="sng" algn="ctr">
+                      <a:solidFill>
+                        <a:srgbClr val="FF0000"/>
+                      </a:solidFill>
+                      <a:prstDash val="solid"/>
+                      <a:round/>
+                      <a:headEnd type="none" w="med" len="med"/>
+                      <a:tailEnd type="none" w="med" len="med"/>
+                    </a:lnL>
+                    <a:lnT w="28575" cap="flat" cmpd="sng" algn="ctr">
+                      <a:solidFill>
+                        <a:srgbClr val="FF0000"/>
+                      </a:solidFill>
+                      <a:prstDash val="solid"/>
+                      <a:round/>
+                      <a:headEnd type="none" w="med" len="med"/>
+                      <a:tailEnd type="none" w="med" len="med"/>
+                    </a:lnT>
+                    <a:solidFill>
+                      <a:schemeClr val="bg1"/>
+                    </a:solidFill>
+                  </a:tcPr>
+                </a:tc>
+                <a:tc>
+                  <a:txBody>
+                    <a:bodyPr/>
+                    <a:lstStyle/>
+                    <a:p>
+                      <a:pPr algn="l">
+                        <a:buNone/>
+                      </a:pPr>
+                      <a:r>
+                        <a:rPr lang="ko-KR" sz="1200" b="0" i="0" dirty="0">
+                          <a:solidFill>
+                            <a:schemeClr val="tx1"/>
+                          </a:solidFill>
+                          <a:effectLst/>
+                          <a:latin typeface="KoPub돋움체 Medium" panose="00000600000000000000" pitchFamily="2" charset="-127"/>
+                          <a:ea typeface="KoPub돋움체 Medium" panose="00000600000000000000" pitchFamily="2" charset="-127"/>
+                        </a:rPr>
+                        <a:t>RMSD=0.0155, </a:t>
+                      </a:r>
+                      <a:r>
+                        <a:rPr lang="ko-KR" sz="1200" b="0" i="0" dirty="0" err="1">
+                          <a:solidFill>
+                            <a:schemeClr val="tx1"/>
+                          </a:solidFill>
+                          <a:effectLst/>
+                          <a:latin typeface="KoPub돋움체 Medium" panose="00000600000000000000" pitchFamily="2" charset="-127"/>
+                          <a:ea typeface="KoPub돋움체 Medium" panose="00000600000000000000" pitchFamily="2" charset="-127"/>
+                        </a:rPr>
+                        <a:t>p</a:t>
+                      </a:r>
+                      <a:r>
+                        <a:rPr lang="ko-KR" sz="1200" b="0" i="0" dirty="0">
+                          <a:solidFill>
+                            <a:schemeClr val="tx1"/>
+                          </a:solidFill>
+                          <a:effectLst/>
+                          <a:latin typeface="KoPub돋움체 Medium" panose="00000600000000000000" pitchFamily="2" charset="-127"/>
+                          <a:ea typeface="KoPub돋움체 Medium" panose="00000600000000000000" pitchFamily="2" charset="-127"/>
+                        </a:rPr>
+                        <a:t>=0.227</a:t>
+                      </a:r>
+                    </a:p>
+                  </a:txBody>
+                  <a:tcPr marL="19050" marR="19050" marT="19050" marB="19050" anchor="ctr">
+                    <a:lnT w="28575" cap="flat" cmpd="sng" algn="ctr">
+                      <a:solidFill>
+                        <a:srgbClr val="FF0000"/>
+                      </a:solidFill>
+                      <a:prstDash val="solid"/>
+                      <a:round/>
+                      <a:headEnd type="none" w="med" len="med"/>
+                      <a:tailEnd type="none" w="med" len="med"/>
+                    </a:lnT>
+                    <a:solidFill>
+                      <a:schemeClr val="accent4">
+                        <a:lumMod val="20000"/>
+                        <a:lumOff val="80000"/>
+                      </a:schemeClr>
+                    </a:solidFill>
+                  </a:tcPr>
+                </a:tc>
+                <a:tc>
+                  <a:txBody>
+                    <a:bodyPr/>
+                    <a:lstStyle/>
+                    <a:p>
+                      <a:pPr algn="l">
+                        <a:buNone/>
+                      </a:pPr>
+                      <a:r>
+                        <a:rPr lang="ko-KR" sz="1200" b="0" i="0" dirty="0">
+                          <a:solidFill>
+                            <a:schemeClr val="tx1"/>
+                          </a:solidFill>
+                          <a:effectLst/>
+                          <a:latin typeface="KoPub돋움체 Medium" panose="00000600000000000000" pitchFamily="2" charset="-127"/>
+                          <a:ea typeface="KoPub돋움체 Medium" panose="00000600000000000000" pitchFamily="2" charset="-127"/>
+                        </a:rPr>
+                        <a:t>RMSD=0.0012, </a:t>
+                      </a:r>
+                      <a:r>
+                        <a:rPr lang="ko-KR" sz="1200" b="0" i="0" dirty="0" err="1">
+                          <a:solidFill>
+                            <a:schemeClr val="tx1"/>
+                          </a:solidFill>
+                          <a:effectLst/>
+                          <a:latin typeface="KoPub돋움체 Medium" panose="00000600000000000000" pitchFamily="2" charset="-127"/>
+                          <a:ea typeface="KoPub돋움체 Medium" panose="00000600000000000000" pitchFamily="2" charset="-127"/>
+                        </a:rPr>
+                        <a:t>p</a:t>
+                      </a:r>
+                      <a:r>
+                        <a:rPr lang="ko-KR" sz="1200" b="0" i="0" dirty="0">
+                          <a:solidFill>
+                            <a:schemeClr val="tx1"/>
+                          </a:solidFill>
+                          <a:effectLst/>
+                          <a:latin typeface="KoPub돋움체 Medium" panose="00000600000000000000" pitchFamily="2" charset="-127"/>
+                          <a:ea typeface="KoPub돋움체 Medium" panose="00000600000000000000" pitchFamily="2" charset="-127"/>
+                        </a:rPr>
+                        <a:t>=0.155</a:t>
+                      </a:r>
+                    </a:p>
+                  </a:txBody>
+                  <a:tcPr marL="19050" marR="19050" marT="19050" marB="19050" anchor="ctr">
+                    <a:lnT w="28575" cap="flat" cmpd="sng" algn="ctr">
+                      <a:solidFill>
+                        <a:srgbClr val="FF0000"/>
+                      </a:solidFill>
+                      <a:prstDash val="solid"/>
+                      <a:round/>
+                      <a:headEnd type="none" w="med" len="med"/>
+                      <a:tailEnd type="none" w="med" len="med"/>
+                    </a:lnT>
+                    <a:solidFill>
+                      <a:schemeClr val="accent4">
+                        <a:lumMod val="20000"/>
+                        <a:lumOff val="80000"/>
+                      </a:schemeClr>
+                    </a:solidFill>
+                  </a:tcPr>
+                </a:tc>
+                <a:tc>
+                  <a:txBody>
+                    <a:bodyPr/>
+                    <a:lstStyle/>
+                    <a:p>
+                      <a:pPr algn="l">
+                        <a:buNone/>
+                      </a:pPr>
+                      <a:r>
+                        <a:rPr lang="ko-KR" sz="1200" b="0" i="0" dirty="0">
+                          <a:solidFill>
+                            <a:schemeClr val="tx1"/>
+                          </a:solidFill>
+                          <a:effectLst/>
+                          <a:latin typeface="KoPub돋움체 Medium" panose="00000600000000000000" pitchFamily="2" charset="-127"/>
+                          <a:ea typeface="KoPub돋움체 Medium" panose="00000600000000000000" pitchFamily="2" charset="-127"/>
+                        </a:rPr>
+                        <a:t>RMSD=0.0005, </a:t>
+                      </a:r>
+                      <a:r>
+                        <a:rPr lang="ko-KR" sz="1200" b="0" i="0" dirty="0" err="1">
+                          <a:solidFill>
+                            <a:schemeClr val="tx1"/>
+                          </a:solidFill>
+                          <a:effectLst/>
+                          <a:latin typeface="KoPub돋움체 Medium" panose="00000600000000000000" pitchFamily="2" charset="-127"/>
+                          <a:ea typeface="KoPub돋움체 Medium" panose="00000600000000000000" pitchFamily="2" charset="-127"/>
+                        </a:rPr>
+                        <a:t>p</a:t>
+                      </a:r>
+                      <a:r>
+                        <a:rPr lang="ko-KR" sz="1200" b="0" i="0" dirty="0">
+                          <a:solidFill>
+                            <a:schemeClr val="tx1"/>
+                          </a:solidFill>
+                          <a:effectLst/>
+                          <a:latin typeface="KoPub돋움체 Medium" panose="00000600000000000000" pitchFamily="2" charset="-127"/>
+                          <a:ea typeface="KoPub돋움체 Medium" panose="00000600000000000000" pitchFamily="2" charset="-127"/>
+                        </a:rPr>
+                        <a:t>=0.199</a:t>
+                      </a:r>
+                    </a:p>
+                  </a:txBody>
+                  <a:tcPr marL="19050" marR="19050" marT="19050" marB="19050" anchor="ctr">
+                    <a:lnR w="28575" cap="flat" cmpd="sng" algn="ctr">
+                      <a:solidFill>
+                        <a:srgbClr val="FF0000"/>
+                      </a:solidFill>
+                      <a:prstDash val="solid"/>
+                      <a:round/>
+                      <a:headEnd type="none" w="med" len="med"/>
+                      <a:tailEnd type="none" w="med" len="med"/>
+                    </a:lnR>
+                    <a:lnT w="28575" cap="flat" cmpd="sng" algn="ctr">
+                      <a:solidFill>
+                        <a:srgbClr val="FF0000"/>
+                      </a:solidFill>
+                      <a:prstDash val="solid"/>
+                      <a:round/>
+                      <a:headEnd type="none" w="med" len="med"/>
+                      <a:tailEnd type="none" w="med" len="med"/>
+                    </a:lnT>
+                    <a:solidFill>
+                      <a:schemeClr val="accent4">
+                        <a:lumMod val="20000"/>
+                        <a:lumOff val="80000"/>
+                      </a:schemeClr>
+                    </a:solidFill>
+                  </a:tcPr>
+                </a:tc>
+                <a:extLst>
+                  <a:ext uri="{0D108BD9-81ED-4DB2-BD59-A6C34878D82A}">
+                    <a16:rowId xmlns:a16="http://schemas.microsoft.com/office/drawing/2014/main" val="1968725908"/>
+                  </a:ext>
+                </a:extLst>
+              </a:tr>
+              <a:tr h="370840">
+                <a:tc>
+                  <a:txBody>
+                    <a:bodyPr/>
+                    <a:lstStyle/>
+                    <a:p>
+                      <a:pPr algn="ctr" latinLnBrk="1"/>
+                      <a:r>
+                        <a:rPr lang="ko-KR" altLang="ko-KR" sz="1200" b="0" i="0" kern="1200" dirty="0">
+                          <a:solidFill>
+                            <a:schemeClr val="tx1"/>
+                          </a:solidFill>
+                          <a:effectLst/>
+                          <a:latin typeface="KoPub돋움체 Medium" panose="00000600000000000000" pitchFamily="2" charset="-127"/>
+                          <a:ea typeface="KoPub돋움체 Medium" panose="00000600000000000000" pitchFamily="2" charset="-127"/>
+                          <a:cs typeface="+mn-cs"/>
+                        </a:rPr>
+                        <a:t>TP </a:t>
+                      </a:r>
+                      <a:r>
+                        <a:rPr lang="ko-KR" altLang="ko-KR" sz="1200" b="0" i="0" kern="1200" dirty="0" err="1">
+                          <a:solidFill>
+                            <a:schemeClr val="tx1"/>
+                          </a:solidFill>
+                          <a:effectLst/>
+                          <a:latin typeface="KoPub돋움체 Medium" panose="00000600000000000000" pitchFamily="2" charset="-127"/>
+                          <a:ea typeface="KoPub돋움체 Medium" panose="00000600000000000000" pitchFamily="2" charset="-127"/>
+                          <a:cs typeface="+mn-cs"/>
+                        </a:rPr>
+                        <a:t>vs</a:t>
+                      </a:r>
+                      <a:r>
+                        <a:rPr lang="ko-KR" altLang="ko-KR" sz="1200" b="0" i="0" kern="1200" dirty="0">
+                          <a:solidFill>
+                            <a:schemeClr val="tx1"/>
+                          </a:solidFill>
+                          <a:effectLst/>
+                          <a:latin typeface="KoPub돋움체 Medium" panose="00000600000000000000" pitchFamily="2" charset="-127"/>
+                          <a:ea typeface="KoPub돋움체 Medium" panose="00000600000000000000" pitchFamily="2" charset="-127"/>
+                          <a:cs typeface="+mn-cs"/>
+                        </a:rPr>
+                        <a:t> FP (</a:t>
+                      </a:r>
+                      <a:r>
+                        <a:rPr lang="en-US" altLang="ko-KR" sz="1200" b="0" i="0" kern="1200" dirty="0" err="1">
+                          <a:solidFill>
+                            <a:schemeClr val="tx1"/>
+                          </a:solidFill>
+                          <a:effectLst/>
+                          <a:latin typeface="KoPub돋움체 Medium" panose="00000600000000000000" pitchFamily="2" charset="-127"/>
+                          <a:ea typeface="KoPub돋움체 Medium" panose="00000600000000000000" pitchFamily="2" charset="-127"/>
+                          <a:cs typeface="+mn-cs"/>
+                        </a:rPr>
+                        <a:t>psm</a:t>
+                      </a:r>
+                      <a:r>
+                        <a:rPr lang="ko-KR" altLang="ko-KR" sz="1200" b="0" i="0" kern="1200" dirty="0">
+                          <a:solidFill>
+                            <a:schemeClr val="tx1"/>
+                          </a:solidFill>
+                          <a:effectLst/>
+                          <a:latin typeface="KoPub돋움체 Medium" panose="00000600000000000000" pitchFamily="2" charset="-127"/>
+                          <a:ea typeface="KoPub돋움체 Medium" panose="00000600000000000000" pitchFamily="2" charset="-127"/>
+                          <a:cs typeface="+mn-cs"/>
+                        </a:rPr>
+                        <a:t>)</a:t>
+                      </a:r>
+                      <a:endParaRPr lang="ko-KR" altLang="en-US" sz="1200" dirty="0">
+                        <a:solidFill>
+                          <a:schemeClr val="tx1"/>
+                        </a:solidFill>
+                        <a:latin typeface="KoPub돋움체 Medium" panose="00000600000000000000" pitchFamily="2" charset="-127"/>
+                        <a:ea typeface="KoPub돋움체 Medium" panose="00000600000000000000" pitchFamily="2" charset="-127"/>
+                      </a:endParaRPr>
+                    </a:p>
+                  </a:txBody>
+                  <a:tcPr anchor="ctr">
+                    <a:lnL w="28575" cap="flat" cmpd="sng" algn="ctr">
+                      <a:solidFill>
+                        <a:srgbClr val="FF0000"/>
+                      </a:solidFill>
+                      <a:prstDash val="solid"/>
+                      <a:round/>
+                      <a:headEnd type="none" w="med" len="med"/>
+                      <a:tailEnd type="none" w="med" len="med"/>
+                    </a:lnL>
+                    <a:lnB w="28575" cap="flat" cmpd="sng" algn="ctr">
+                      <a:solidFill>
+                        <a:srgbClr val="FF0000"/>
+                      </a:solidFill>
+                      <a:prstDash val="solid"/>
+                      <a:round/>
+                      <a:headEnd type="none" w="med" len="med"/>
+                      <a:tailEnd type="none" w="med" len="med"/>
+                    </a:lnB>
+                    <a:solidFill>
+                      <a:schemeClr val="bg1"/>
+                    </a:solidFill>
+                  </a:tcPr>
+                </a:tc>
+                <a:tc>
+                  <a:txBody>
+                    <a:bodyPr/>
+                    <a:lstStyle/>
+                    <a:p>
+                      <a:pPr algn="l">
+                        <a:buNone/>
+                      </a:pPr>
+                      <a:r>
+                        <a:rPr lang="ko-KR" sz="1200" b="0" i="0" dirty="0">
+                          <a:solidFill>
+                            <a:schemeClr val="tx1"/>
+                          </a:solidFill>
+                          <a:effectLst/>
+                          <a:latin typeface="KoPub돋움체 Medium" panose="00000600000000000000" pitchFamily="2" charset="-127"/>
+                          <a:ea typeface="KoPub돋움체 Medium" panose="00000600000000000000" pitchFamily="2" charset="-127"/>
+                        </a:rPr>
+                        <a:t>RMSD=0.0057, </a:t>
+                      </a:r>
+                      <a:r>
+                        <a:rPr lang="ko-KR" sz="1200" b="0" i="0" dirty="0" err="1">
+                          <a:solidFill>
+                            <a:schemeClr val="tx1"/>
+                          </a:solidFill>
+                          <a:effectLst/>
+                          <a:latin typeface="KoPub돋움체 Medium" panose="00000600000000000000" pitchFamily="2" charset="-127"/>
+                          <a:ea typeface="KoPub돋움체 Medium" panose="00000600000000000000" pitchFamily="2" charset="-127"/>
+                        </a:rPr>
+                        <a:t>p</a:t>
+                      </a:r>
+                      <a:r>
+                        <a:rPr lang="ko-KR" sz="1200" b="0" i="0" dirty="0">
+                          <a:solidFill>
+                            <a:schemeClr val="tx1"/>
+                          </a:solidFill>
+                          <a:effectLst/>
+                          <a:latin typeface="KoPub돋움체 Medium" panose="00000600000000000000" pitchFamily="2" charset="-127"/>
+                          <a:ea typeface="KoPub돋움체 Medium" panose="00000600000000000000" pitchFamily="2" charset="-127"/>
+                        </a:rPr>
+                        <a:t>=0.983</a:t>
+                      </a:r>
+                    </a:p>
+                  </a:txBody>
+                  <a:tcPr marL="19050" marR="19050" marT="19050" marB="19050" anchor="ctr">
+                    <a:lnB w="28575" cap="flat" cmpd="sng" algn="ctr">
+                      <a:solidFill>
+                        <a:srgbClr val="FF0000"/>
+                      </a:solidFill>
+                      <a:prstDash val="solid"/>
+                      <a:round/>
+                      <a:headEnd type="none" w="med" len="med"/>
+                      <a:tailEnd type="none" w="med" len="med"/>
+                    </a:lnB>
+                    <a:solidFill>
+                      <a:schemeClr val="accent4">
+                        <a:lumMod val="20000"/>
+                        <a:lumOff val="80000"/>
+                      </a:schemeClr>
+                    </a:solidFill>
+                  </a:tcPr>
+                </a:tc>
+                <a:tc>
+                  <a:txBody>
+                    <a:bodyPr/>
+                    <a:lstStyle/>
+                    <a:p>
+                      <a:pPr algn="l">
+                        <a:buNone/>
+                      </a:pPr>
+                      <a:r>
+                        <a:rPr lang="ko-KR" sz="1200" b="0" i="0" dirty="0">
+                          <a:solidFill>
+                            <a:schemeClr val="tx1"/>
+                          </a:solidFill>
+                          <a:effectLst/>
+                          <a:latin typeface="KoPub돋움체 Medium" panose="00000600000000000000" pitchFamily="2" charset="-127"/>
+                          <a:ea typeface="KoPub돋움체 Medium" panose="00000600000000000000" pitchFamily="2" charset="-127"/>
+                        </a:rPr>
+                        <a:t>RMSD=0.0009, </a:t>
+                      </a:r>
+                      <a:r>
+                        <a:rPr lang="ko-KR" sz="1200" b="0" i="0" dirty="0" err="1">
+                          <a:solidFill>
+                            <a:schemeClr val="tx1"/>
+                          </a:solidFill>
+                          <a:effectLst/>
+                          <a:latin typeface="KoPub돋움체 Medium" panose="00000600000000000000" pitchFamily="2" charset="-127"/>
+                          <a:ea typeface="KoPub돋움체 Medium" panose="00000600000000000000" pitchFamily="2" charset="-127"/>
+                        </a:rPr>
+                        <a:t>p</a:t>
+                      </a:r>
+                      <a:r>
+                        <a:rPr lang="ko-KR" sz="1200" b="0" i="0" dirty="0">
+                          <a:solidFill>
+                            <a:schemeClr val="tx1"/>
+                          </a:solidFill>
+                          <a:effectLst/>
+                          <a:latin typeface="KoPub돋움체 Medium" panose="00000600000000000000" pitchFamily="2" charset="-127"/>
+                          <a:ea typeface="KoPub돋움체 Medium" panose="00000600000000000000" pitchFamily="2" charset="-127"/>
+                        </a:rPr>
+                        <a:t>=0.982</a:t>
+                      </a:r>
+                    </a:p>
+                  </a:txBody>
+                  <a:tcPr marL="19050" marR="19050" marT="19050" marB="19050" anchor="ctr">
+                    <a:lnB w="28575" cap="flat" cmpd="sng" algn="ctr">
+                      <a:solidFill>
+                        <a:srgbClr val="FF0000"/>
+                      </a:solidFill>
+                      <a:prstDash val="solid"/>
+                      <a:round/>
+                      <a:headEnd type="none" w="med" len="med"/>
+                      <a:tailEnd type="none" w="med" len="med"/>
+                    </a:lnB>
+                    <a:solidFill>
+                      <a:schemeClr val="accent4">
+                        <a:lumMod val="20000"/>
+                        <a:lumOff val="80000"/>
+                      </a:schemeClr>
+                    </a:solidFill>
+                  </a:tcPr>
+                </a:tc>
+                <a:tc>
+                  <a:txBody>
+                    <a:bodyPr/>
+                    <a:lstStyle/>
+                    <a:p>
+                      <a:pPr algn="l">
+                        <a:buNone/>
+                      </a:pPr>
+                      <a:r>
+                        <a:rPr lang="ko-KR" sz="1200" b="0" i="0" dirty="0">
+                          <a:solidFill>
+                            <a:schemeClr val="tx1"/>
+                          </a:solidFill>
+                          <a:effectLst/>
+                          <a:latin typeface="KoPub돋움체 Medium" panose="00000600000000000000" pitchFamily="2" charset="-127"/>
+                          <a:ea typeface="KoPub돋움체 Medium" panose="00000600000000000000" pitchFamily="2" charset="-127"/>
+                        </a:rPr>
+                        <a:t>RMSD=0.0006, </a:t>
+                      </a:r>
+                      <a:r>
+                        <a:rPr lang="ko-KR" sz="1200" b="0" i="0" dirty="0" err="1">
+                          <a:solidFill>
+                            <a:schemeClr val="tx1"/>
+                          </a:solidFill>
+                          <a:effectLst/>
+                          <a:latin typeface="KoPub돋움체 Medium" panose="00000600000000000000" pitchFamily="2" charset="-127"/>
+                          <a:ea typeface="KoPub돋움체 Medium" panose="00000600000000000000" pitchFamily="2" charset="-127"/>
+                        </a:rPr>
+                        <a:t>p</a:t>
+                      </a:r>
+                      <a:r>
+                        <a:rPr lang="ko-KR" sz="1200" b="0" i="0" dirty="0">
+                          <a:solidFill>
+                            <a:schemeClr val="tx1"/>
+                          </a:solidFill>
+                          <a:effectLst/>
+                          <a:latin typeface="KoPub돋움체 Medium" panose="00000600000000000000" pitchFamily="2" charset="-127"/>
+                          <a:ea typeface="KoPub돋움체 Medium" panose="00000600000000000000" pitchFamily="2" charset="-127"/>
+                        </a:rPr>
+                        <a:t>=0.478</a:t>
+                      </a:r>
+                    </a:p>
+                  </a:txBody>
+                  <a:tcPr marL="19050" marR="19050" marT="19050" marB="19050" anchor="ctr">
+                    <a:lnR w="28575" cap="flat" cmpd="sng" algn="ctr">
+                      <a:solidFill>
+                        <a:srgbClr val="FF0000"/>
+                      </a:solidFill>
+                      <a:prstDash val="solid"/>
+                      <a:round/>
+                      <a:headEnd type="none" w="med" len="med"/>
+                      <a:tailEnd type="none" w="med" len="med"/>
+                    </a:lnR>
+                    <a:lnB w="28575" cap="flat" cmpd="sng" algn="ctr">
+                      <a:solidFill>
+                        <a:srgbClr val="FF0000"/>
+                      </a:solidFill>
+                      <a:prstDash val="solid"/>
+                      <a:round/>
+                      <a:headEnd type="none" w="med" len="med"/>
+                      <a:tailEnd type="none" w="med" len="med"/>
+                    </a:lnB>
+                    <a:solidFill>
+                      <a:schemeClr val="accent4">
+                        <a:lumMod val="20000"/>
+                        <a:lumOff val="80000"/>
+                      </a:schemeClr>
+                    </a:solidFill>
+                  </a:tcPr>
+                </a:tc>
+                <a:extLst>
+                  <a:ext uri="{0D108BD9-81ED-4DB2-BD59-A6C34878D82A}">
+                    <a16:rowId xmlns:a16="http://schemas.microsoft.com/office/drawing/2014/main" val="2054828031"/>
+                  </a:ext>
+                </a:extLst>
+              </a:tr>
+            </a:tbl>
+          </a:graphicData>
+        </a:graphic>
+      </p:graphicFrame>
+      <p:graphicFrame>
+        <p:nvGraphicFramePr>
+          <p:cNvPr id="6" name="표 5">
+            <a:extLst>
+              <a:ext uri="{FF2B5EF4-FFF2-40B4-BE49-F238E27FC236}">
+                <a16:creationId xmlns:a16="http://schemas.microsoft.com/office/drawing/2014/main" id="{093DC214-F213-AB61-FBB1-2D265A00B606}"/>
+              </a:ext>
+            </a:extLst>
+          </p:cNvPr>
+          <p:cNvGraphicFramePr>
+            <a:graphicFrameLocks noGrp="1"/>
+          </p:cNvGraphicFramePr>
+          <p:nvPr>
+            <p:extLst>
+              <p:ext uri="{D42A27DB-BD31-4B8C-83A1-F6EECF244321}">
+                <p14:modId xmlns:p14="http://schemas.microsoft.com/office/powerpoint/2010/main" val="3565125605"/>
+              </p:ext>
+            </p:extLst>
+          </p:nvPr>
+        </p:nvGraphicFramePr>
+        <p:xfrm>
+          <a:off x="1312092" y="3767667"/>
+          <a:ext cx="9567816" cy="1854200"/>
+        </p:xfrm>
+        <a:graphic>
+          <a:graphicData uri="http://schemas.openxmlformats.org/drawingml/2006/table">
+            <a:tbl>
+              <a:tblPr firstRow="1" bandRow="1">
+                <a:tableStyleId>{9D7B26C5-4107-4FEC-AEDC-1716B250A1EF}</a:tableStyleId>
+              </a:tblPr>
+              <a:tblGrid>
+                <a:gridCol w="2385989">
+                  <a:extLst>
+                    <a:ext uri="{9D8B030D-6E8A-4147-A177-3AD203B41FA5}">
+                      <a16:colId xmlns:a16="http://schemas.microsoft.com/office/drawing/2014/main" val="380248596"/>
+                    </a:ext>
+                  </a:extLst>
+                </a:gridCol>
+                <a:gridCol w="2385989">
+                  <a:extLst>
+                    <a:ext uri="{9D8B030D-6E8A-4147-A177-3AD203B41FA5}">
+                      <a16:colId xmlns:a16="http://schemas.microsoft.com/office/drawing/2014/main" val="2374354257"/>
+                    </a:ext>
+                  </a:extLst>
+                </a:gridCol>
+                <a:gridCol w="2385989">
+                  <a:extLst>
+                    <a:ext uri="{9D8B030D-6E8A-4147-A177-3AD203B41FA5}">
+                      <a16:colId xmlns:a16="http://schemas.microsoft.com/office/drawing/2014/main" val="983427934"/>
+                    </a:ext>
+                  </a:extLst>
+                </a:gridCol>
+                <a:gridCol w="2409849">
+                  <a:extLst>
+                    <a:ext uri="{9D8B030D-6E8A-4147-A177-3AD203B41FA5}">
+                      <a16:colId xmlns:a16="http://schemas.microsoft.com/office/drawing/2014/main" val="13888355"/>
+                    </a:ext>
+                  </a:extLst>
+                </a:gridCol>
+              </a:tblGrid>
+              <a:tr h="370840">
+                <a:tc>
+                  <a:txBody>
+                    <a:bodyPr/>
+                    <a:lstStyle/>
+                    <a:p>
+                      <a:pPr algn="ctr" latinLnBrk="1"/>
+                      <a:r>
+                        <a:rPr lang="ko-KR" altLang="en-US" sz="1200" b="0" dirty="0">
+                          <a:solidFill>
+                            <a:schemeClr val="tx1"/>
+                          </a:solidFill>
+                          <a:latin typeface="KoPub돋움체 Bold" panose="00000800000000000000" pitchFamily="2" charset="-127"/>
+                          <a:ea typeface="KoPub돋움체 Bold" panose="00000800000000000000" pitchFamily="2" charset="-127"/>
+                        </a:rPr>
+                        <a:t>비교 </a:t>
+                      </a:r>
+                      <a:r>
+                        <a:rPr lang="en-US" altLang="ko-KR" sz="1200" b="0" dirty="0">
+                          <a:solidFill>
+                            <a:schemeClr val="tx1"/>
+                          </a:solidFill>
+                          <a:latin typeface="KoPub돋움체 Bold" panose="00000800000000000000" pitchFamily="2" charset="-127"/>
+                          <a:ea typeface="KoPub돋움체 Bold" panose="00000800000000000000" pitchFamily="2" charset="-127"/>
+                        </a:rPr>
+                        <a:t>(</a:t>
+                      </a:r>
+                      <a:r>
+                        <a:rPr lang="ko-KR" altLang="en-US" sz="1200" b="0" dirty="0">
+                          <a:solidFill>
+                            <a:schemeClr val="tx1"/>
+                          </a:solidFill>
+                          <a:latin typeface="KoPub돋움체 Bold" panose="00000800000000000000" pitchFamily="2" charset="-127"/>
+                          <a:ea typeface="KoPub돋움체 Bold" panose="00000800000000000000" pitchFamily="2" charset="-127"/>
+                        </a:rPr>
+                        <a:t>신촌</a:t>
+                      </a:r>
+                      <a:r>
+                        <a:rPr lang="en-US" altLang="ko-KR" sz="1200" b="0" dirty="0">
+                          <a:solidFill>
+                            <a:schemeClr val="tx1"/>
+                          </a:solidFill>
+                          <a:latin typeface="KoPub돋움체 Bold" panose="00000800000000000000" pitchFamily="2" charset="-127"/>
+                          <a:ea typeface="KoPub돋움체 Bold" panose="00000800000000000000" pitchFamily="2" charset="-127"/>
+                        </a:rPr>
+                        <a:t>)</a:t>
+                      </a:r>
+                      <a:endParaRPr lang="ko-KR" altLang="en-US" sz="1200" b="0" dirty="0">
+                        <a:solidFill>
+                          <a:schemeClr val="tx1"/>
+                        </a:solidFill>
+                        <a:latin typeface="KoPub돋움체 Bold" panose="00000800000000000000" pitchFamily="2" charset="-127"/>
+                        <a:ea typeface="KoPub돋움체 Bold" panose="00000800000000000000" pitchFamily="2" charset="-127"/>
+                      </a:endParaRPr>
+                    </a:p>
+                  </a:txBody>
+                  <a:tcPr anchor="ctr"/>
+                </a:tc>
+                <a:tc>
+                  <a:txBody>
+                    <a:bodyPr/>
+                    <a:lstStyle/>
+                    <a:p>
+                      <a:pPr algn="ctr" latinLnBrk="1"/>
+                      <a:r>
+                        <a:rPr lang="en-US" altLang="ko-KR" sz="1200" b="0" dirty="0">
+                          <a:solidFill>
+                            <a:schemeClr val="tx1"/>
+                          </a:solidFill>
+                          <a:latin typeface="KoPub돋움체 Bold" panose="00000800000000000000" pitchFamily="2" charset="-127"/>
+                          <a:ea typeface="KoPub돋움체 Bold" panose="00000800000000000000" pitchFamily="2" charset="-127"/>
+                        </a:rPr>
+                        <a:t>p (raw)</a:t>
+                      </a:r>
+                      <a:endParaRPr lang="ko-KR" altLang="en-US" sz="1200" b="0" dirty="0">
+                        <a:solidFill>
+                          <a:schemeClr val="tx1"/>
+                        </a:solidFill>
+                        <a:latin typeface="KoPub돋움체 Bold" panose="00000800000000000000" pitchFamily="2" charset="-127"/>
+                        <a:ea typeface="KoPub돋움체 Bold" panose="00000800000000000000" pitchFamily="2" charset="-127"/>
+                      </a:endParaRPr>
+                    </a:p>
+                  </a:txBody>
+                  <a:tcPr anchor="ctr"/>
+                </a:tc>
+                <a:tc>
+                  <a:txBody>
+                    <a:bodyPr/>
+                    <a:lstStyle/>
+                    <a:p>
+                      <a:pPr algn="ctr" latinLnBrk="1"/>
+                      <a:r>
+                        <a:rPr lang="en-US" altLang="ko-KR" sz="1200" b="0" dirty="0" err="1">
+                          <a:solidFill>
+                            <a:schemeClr val="tx1"/>
+                          </a:solidFill>
+                          <a:latin typeface="KoPub돋움체 Bold" panose="00000800000000000000" pitchFamily="2" charset="-127"/>
+                          <a:ea typeface="KoPub돋움체 Bold" panose="00000800000000000000" pitchFamily="2" charset="-127"/>
+                        </a:rPr>
+                        <a:t>dp</a:t>
+                      </a:r>
+                      <a:r>
+                        <a:rPr lang="en-US" altLang="ko-KR" sz="1200" b="0" dirty="0">
+                          <a:solidFill>
+                            <a:schemeClr val="tx1"/>
+                          </a:solidFill>
+                          <a:latin typeface="KoPub돋움체 Bold" panose="00000800000000000000" pitchFamily="2" charset="-127"/>
+                          <a:ea typeface="KoPub돋움체 Bold" panose="00000800000000000000" pitchFamily="2" charset="-127"/>
+                        </a:rPr>
+                        <a:t> (1</a:t>
+                      </a:r>
+                      <a:r>
+                        <a:rPr lang="ko-KR" altLang="en-US" sz="1200" b="0" dirty="0" err="1">
+                          <a:solidFill>
+                            <a:schemeClr val="tx1"/>
+                          </a:solidFill>
+                          <a:latin typeface="KoPub돋움체 Bold" panose="00000800000000000000" pitchFamily="2" charset="-127"/>
+                          <a:ea typeface="KoPub돋움체 Bold" panose="00000800000000000000" pitchFamily="2" charset="-127"/>
+                        </a:rPr>
+                        <a:t>차미분</a:t>
+                      </a:r>
+                      <a:r>
+                        <a:rPr lang="en-US" altLang="ko-KR" sz="1200" b="0" dirty="0">
+                          <a:solidFill>
+                            <a:schemeClr val="tx1"/>
+                          </a:solidFill>
+                          <a:latin typeface="KoPub돋움체 Bold" panose="00000800000000000000" pitchFamily="2" charset="-127"/>
+                          <a:ea typeface="KoPub돋움체 Bold" panose="00000800000000000000" pitchFamily="2" charset="-127"/>
+                        </a:rPr>
+                        <a:t>)</a:t>
+                      </a:r>
+                      <a:endParaRPr lang="ko-KR" altLang="en-US" sz="1200" b="0" dirty="0">
+                        <a:solidFill>
+                          <a:schemeClr val="tx1"/>
+                        </a:solidFill>
+                        <a:latin typeface="KoPub돋움체 Bold" panose="00000800000000000000" pitchFamily="2" charset="-127"/>
+                        <a:ea typeface="KoPub돋움체 Bold" panose="00000800000000000000" pitchFamily="2" charset="-127"/>
+                      </a:endParaRPr>
+                    </a:p>
+                  </a:txBody>
+                  <a:tcPr anchor="ctr"/>
+                </a:tc>
+                <a:tc>
+                  <a:txBody>
+                    <a:bodyPr/>
+                    <a:lstStyle/>
+                    <a:p>
+                      <a:pPr algn="ctr" latinLnBrk="1"/>
+                      <a:r>
+                        <a:rPr lang="en-US" altLang="ko-KR" sz="1200" b="0" dirty="0">
+                          <a:solidFill>
+                            <a:schemeClr val="tx1"/>
+                          </a:solidFill>
+                          <a:latin typeface="KoPub돋움체 Bold" panose="00000800000000000000" pitchFamily="2" charset="-127"/>
+                          <a:ea typeface="KoPub돋움체 Bold" panose="00000800000000000000" pitchFamily="2" charset="-127"/>
+                        </a:rPr>
+                        <a:t>d2p (2</a:t>
+                      </a:r>
+                      <a:r>
+                        <a:rPr lang="ko-KR" altLang="en-US" sz="1200" b="0" dirty="0" err="1">
+                          <a:solidFill>
+                            <a:schemeClr val="tx1"/>
+                          </a:solidFill>
+                          <a:latin typeface="KoPub돋움체 Bold" panose="00000800000000000000" pitchFamily="2" charset="-127"/>
+                          <a:ea typeface="KoPub돋움체 Bold" panose="00000800000000000000" pitchFamily="2" charset="-127"/>
+                        </a:rPr>
+                        <a:t>차미분</a:t>
+                      </a:r>
+                      <a:r>
+                        <a:rPr lang="en-US" altLang="ko-KR" sz="1200" b="0" dirty="0">
+                          <a:solidFill>
+                            <a:schemeClr val="tx1"/>
+                          </a:solidFill>
+                          <a:latin typeface="KoPub돋움체 Bold" panose="00000800000000000000" pitchFamily="2" charset="-127"/>
+                          <a:ea typeface="KoPub돋움체 Bold" panose="00000800000000000000" pitchFamily="2" charset="-127"/>
+                        </a:rPr>
+                        <a:t>)</a:t>
+                      </a:r>
+                      <a:endParaRPr lang="ko-KR" altLang="en-US" sz="1200" b="0" dirty="0">
+                        <a:solidFill>
+                          <a:schemeClr val="tx1"/>
+                        </a:solidFill>
+                        <a:latin typeface="KoPub돋움체 Bold" panose="00000800000000000000" pitchFamily="2" charset="-127"/>
+                        <a:ea typeface="KoPub돋움체 Bold" panose="00000800000000000000" pitchFamily="2" charset="-127"/>
+                      </a:endParaRPr>
+                    </a:p>
+                  </a:txBody>
+                  <a:tcPr anchor="ctr"/>
+                </a:tc>
+                <a:extLst>
+                  <a:ext uri="{0D108BD9-81ED-4DB2-BD59-A6C34878D82A}">
+                    <a16:rowId xmlns:a16="http://schemas.microsoft.com/office/drawing/2014/main" val="1992821599"/>
+                  </a:ext>
+                </a:extLst>
+              </a:tr>
+              <a:tr h="370840">
+                <a:tc>
+                  <a:txBody>
+                    <a:bodyPr/>
+                    <a:lstStyle/>
+                    <a:p>
+                      <a:pPr algn="ctr" latinLnBrk="1"/>
+                      <a:r>
+                        <a:rPr lang="ko-KR" altLang="ko-KR" sz="1200" b="0" i="0" kern="1200" dirty="0">
+                          <a:solidFill>
+                            <a:schemeClr val="tx1"/>
+                          </a:solidFill>
+                          <a:effectLst/>
+                          <a:latin typeface="KoPub돋움체 Medium" panose="00000600000000000000" pitchFamily="2" charset="-127"/>
+                          <a:ea typeface="KoPub돋움체 Medium" panose="00000600000000000000" pitchFamily="2" charset="-127"/>
+                          <a:cs typeface="+mn-cs"/>
+                        </a:rPr>
+                        <a:t>FP </a:t>
+                      </a:r>
+                      <a:r>
+                        <a:rPr lang="ko-KR" altLang="ko-KR" sz="1200" b="0" i="0" kern="1200" dirty="0" err="1">
+                          <a:solidFill>
+                            <a:schemeClr val="tx1"/>
+                          </a:solidFill>
+                          <a:effectLst/>
+                          <a:latin typeface="KoPub돋움체 Medium" panose="00000600000000000000" pitchFamily="2" charset="-127"/>
+                          <a:ea typeface="KoPub돋움체 Medium" panose="00000600000000000000" pitchFamily="2" charset="-127"/>
+                          <a:cs typeface="+mn-cs"/>
+                        </a:rPr>
+                        <a:t>vs</a:t>
+                      </a:r>
+                      <a:r>
+                        <a:rPr lang="ko-KR" altLang="ko-KR" sz="1200" b="0" i="0" kern="1200" dirty="0">
+                          <a:solidFill>
+                            <a:schemeClr val="tx1"/>
+                          </a:solidFill>
+                          <a:effectLst/>
+                          <a:latin typeface="KoPub돋움체 Medium" panose="00000600000000000000" pitchFamily="2" charset="-127"/>
+                          <a:ea typeface="KoPub돋움체 Medium" panose="00000600000000000000" pitchFamily="2" charset="-127"/>
+                          <a:cs typeface="+mn-cs"/>
+                        </a:rPr>
+                        <a:t> TN</a:t>
+                      </a:r>
+                      <a:endParaRPr lang="ko-KR" altLang="en-US" sz="1200" dirty="0">
+                        <a:solidFill>
+                          <a:schemeClr val="tx1"/>
+                        </a:solidFill>
+                        <a:latin typeface="KoPub돋움체 Medium" panose="00000600000000000000" pitchFamily="2" charset="-127"/>
+                        <a:ea typeface="KoPub돋움체 Medium" panose="00000600000000000000" pitchFamily="2" charset="-127"/>
+                      </a:endParaRPr>
+                    </a:p>
+                  </a:txBody>
+                  <a:tcPr anchor="ctr">
+                    <a:solidFill>
+                      <a:schemeClr val="bg1"/>
+                    </a:solidFill>
+                  </a:tcPr>
+                </a:tc>
+                <a:tc>
+                  <a:txBody>
+                    <a:bodyPr/>
+                    <a:lstStyle/>
+                    <a:p>
+                      <a:pPr algn="l">
+                        <a:buNone/>
+                      </a:pPr>
+                      <a:r>
+                        <a:rPr lang="ko-KR" sz="1200" b="0" i="0" dirty="0">
+                          <a:solidFill>
+                            <a:schemeClr val="tx1"/>
+                          </a:solidFill>
+                          <a:effectLst/>
+                          <a:latin typeface="KoPub돋움체 Medium" panose="00000600000000000000" pitchFamily="2" charset="-127"/>
+                          <a:ea typeface="KoPub돋움체 Medium" panose="00000600000000000000" pitchFamily="2" charset="-127"/>
+                        </a:rPr>
+                        <a:t>RMSD=0.0226, </a:t>
+                      </a:r>
+                      <a:r>
+                        <a:rPr lang="ko-KR" sz="1200" b="0" i="0" dirty="0" err="1">
+                          <a:solidFill>
+                            <a:schemeClr val="tx1"/>
+                          </a:solidFill>
+                          <a:effectLst/>
+                          <a:latin typeface="KoPub돋움체 Medium" panose="00000600000000000000" pitchFamily="2" charset="-127"/>
+                          <a:ea typeface="KoPub돋움체 Medium" panose="00000600000000000000" pitchFamily="2" charset="-127"/>
+                        </a:rPr>
+                        <a:t>p</a:t>
+                      </a:r>
+                      <a:r>
+                        <a:rPr lang="ko-KR" sz="1200" b="0" i="0" dirty="0">
+                          <a:solidFill>
+                            <a:schemeClr val="tx1"/>
+                          </a:solidFill>
+                          <a:effectLst/>
+                          <a:latin typeface="KoPub돋움체 Medium" panose="00000600000000000000" pitchFamily="2" charset="-127"/>
+                          <a:ea typeface="KoPub돋움체 Medium" panose="00000600000000000000" pitchFamily="2" charset="-127"/>
+                        </a:rPr>
+                        <a:t>=0.0045</a:t>
+                      </a:r>
+                    </a:p>
+                  </a:txBody>
+                  <a:tcPr marL="19050" marR="19050" marT="19050" marB="19050" anchor="ctr">
+                    <a:solidFill>
+                      <a:schemeClr val="bg1"/>
+                    </a:solidFill>
+                  </a:tcPr>
+                </a:tc>
+                <a:tc>
+                  <a:txBody>
+                    <a:bodyPr/>
+                    <a:lstStyle/>
+                    <a:p>
+                      <a:pPr algn="l">
+                        <a:buNone/>
+                      </a:pPr>
+                      <a:r>
+                        <a:rPr lang="ko-KR" sz="1200" b="0" i="0">
+                          <a:solidFill>
+                            <a:schemeClr val="tx1"/>
+                          </a:solidFill>
+                          <a:effectLst/>
+                          <a:latin typeface="KoPub돋움체 Medium" panose="00000600000000000000" pitchFamily="2" charset="-127"/>
+                          <a:ea typeface="KoPub돋움체 Medium" panose="00000600000000000000" pitchFamily="2" charset="-127"/>
+                        </a:rPr>
+                        <a:t>RMSD=0.0017, p=0.0005</a:t>
+                      </a:r>
+                    </a:p>
+                  </a:txBody>
+                  <a:tcPr marL="19050" marR="19050" marT="19050" marB="19050" anchor="ctr">
+                    <a:solidFill>
+                      <a:schemeClr val="bg1"/>
+                    </a:solidFill>
+                  </a:tcPr>
+                </a:tc>
+                <a:tc>
+                  <a:txBody>
+                    <a:bodyPr/>
+                    <a:lstStyle/>
+                    <a:p>
+                      <a:pPr algn="l">
+                        <a:buNone/>
+                      </a:pPr>
+                      <a:r>
+                        <a:rPr lang="ko-KR" sz="1200" b="0" i="0" dirty="0">
+                          <a:solidFill>
+                            <a:schemeClr val="tx1"/>
+                          </a:solidFill>
+                          <a:effectLst/>
+                          <a:latin typeface="KoPub돋움체 Medium" panose="00000600000000000000" pitchFamily="2" charset="-127"/>
+                          <a:ea typeface="KoPub돋움체 Medium" panose="00000600000000000000" pitchFamily="2" charset="-127"/>
+                        </a:rPr>
+                        <a:t>RMSD=0.0004, </a:t>
+                      </a:r>
+                      <a:r>
+                        <a:rPr lang="ko-KR" sz="1200" b="0" i="0" dirty="0" err="1">
+                          <a:solidFill>
+                            <a:schemeClr val="tx1"/>
+                          </a:solidFill>
+                          <a:effectLst/>
+                          <a:latin typeface="KoPub돋움체 Medium" panose="00000600000000000000" pitchFamily="2" charset="-127"/>
+                          <a:ea typeface="KoPub돋움체 Medium" panose="00000600000000000000" pitchFamily="2" charset="-127"/>
+                        </a:rPr>
+                        <a:t>p</a:t>
+                      </a:r>
+                      <a:r>
+                        <a:rPr lang="ko-KR" sz="1200" b="0" i="0" dirty="0">
+                          <a:solidFill>
+                            <a:schemeClr val="tx1"/>
+                          </a:solidFill>
+                          <a:effectLst/>
+                          <a:latin typeface="KoPub돋움체 Medium" panose="00000600000000000000" pitchFamily="2" charset="-127"/>
+                          <a:ea typeface="KoPub돋움체 Medium" panose="00000600000000000000" pitchFamily="2" charset="-127"/>
+                        </a:rPr>
+                        <a:t>=0.093</a:t>
+                      </a:r>
+                    </a:p>
+                  </a:txBody>
+                  <a:tcPr marL="19050" marR="19050" marT="19050" marB="19050" anchor="ctr">
+                    <a:solidFill>
+                      <a:schemeClr val="accent4">
+                        <a:lumMod val="20000"/>
+                        <a:lumOff val="80000"/>
+                      </a:schemeClr>
+                    </a:solidFill>
+                  </a:tcPr>
+                </a:tc>
+                <a:extLst>
+                  <a:ext uri="{0D108BD9-81ED-4DB2-BD59-A6C34878D82A}">
+                    <a16:rowId xmlns:a16="http://schemas.microsoft.com/office/drawing/2014/main" val="3290363448"/>
+                  </a:ext>
+                </a:extLst>
+              </a:tr>
+              <a:tr h="370840">
+                <a:tc>
+                  <a:txBody>
+                    <a:bodyPr/>
+                    <a:lstStyle/>
+                    <a:p>
+                      <a:pPr algn="ctr" latinLnBrk="1"/>
+                      <a:r>
+                        <a:rPr lang="ko-KR" altLang="ko-KR" sz="1200" b="0" i="0" kern="1200" dirty="0">
+                          <a:solidFill>
+                            <a:schemeClr val="tx1"/>
+                          </a:solidFill>
+                          <a:effectLst/>
+                          <a:latin typeface="KoPub돋움체 Medium" panose="00000600000000000000" pitchFamily="2" charset="-127"/>
+                          <a:ea typeface="KoPub돋움체 Medium" panose="00000600000000000000" pitchFamily="2" charset="-127"/>
+                          <a:cs typeface="+mn-cs"/>
+                        </a:rPr>
+                        <a:t>TP </a:t>
+                      </a:r>
+                      <a:r>
+                        <a:rPr lang="ko-KR" altLang="ko-KR" sz="1200" b="0" i="0" kern="1200" dirty="0" err="1">
+                          <a:solidFill>
+                            <a:schemeClr val="tx1"/>
+                          </a:solidFill>
+                          <a:effectLst/>
+                          <a:latin typeface="KoPub돋움체 Medium" panose="00000600000000000000" pitchFamily="2" charset="-127"/>
+                          <a:ea typeface="KoPub돋움체 Medium" panose="00000600000000000000" pitchFamily="2" charset="-127"/>
+                          <a:cs typeface="+mn-cs"/>
+                        </a:rPr>
+                        <a:t>vs</a:t>
+                      </a:r>
+                      <a:r>
+                        <a:rPr lang="ko-KR" altLang="ko-KR" sz="1200" b="0" i="0" kern="1200" dirty="0">
+                          <a:solidFill>
+                            <a:schemeClr val="tx1"/>
+                          </a:solidFill>
+                          <a:effectLst/>
+                          <a:latin typeface="KoPub돋움체 Medium" panose="00000600000000000000" pitchFamily="2" charset="-127"/>
+                          <a:ea typeface="KoPub돋움체 Medium" panose="00000600000000000000" pitchFamily="2" charset="-127"/>
+                          <a:cs typeface="+mn-cs"/>
+                        </a:rPr>
+                        <a:t> TN</a:t>
+                      </a:r>
+                      <a:endParaRPr lang="ko-KR" altLang="en-US" sz="1200" dirty="0">
+                        <a:solidFill>
+                          <a:schemeClr val="tx1"/>
+                        </a:solidFill>
+                        <a:latin typeface="KoPub돋움체 Medium" panose="00000600000000000000" pitchFamily="2" charset="-127"/>
+                        <a:ea typeface="KoPub돋움체 Medium" panose="00000600000000000000" pitchFamily="2" charset="-127"/>
+                      </a:endParaRPr>
+                    </a:p>
+                  </a:txBody>
+                  <a:tcPr anchor="ctr">
+                    <a:lnB w="28575" cap="flat" cmpd="sng" algn="ctr">
+                      <a:solidFill>
+                        <a:srgbClr val="FF0000"/>
+                      </a:solidFill>
+                      <a:prstDash val="solid"/>
+                      <a:round/>
+                      <a:headEnd type="none" w="med" len="med"/>
+                      <a:tailEnd type="none" w="med" len="med"/>
+                    </a:lnB>
+                    <a:solidFill>
+                      <a:schemeClr val="bg1"/>
+                    </a:solidFill>
+                  </a:tcPr>
+                </a:tc>
+                <a:tc>
+                  <a:txBody>
+                    <a:bodyPr/>
+                    <a:lstStyle/>
+                    <a:p>
+                      <a:pPr algn="l">
+                        <a:buNone/>
+                      </a:pPr>
+                      <a:r>
+                        <a:rPr lang="ko-KR" sz="1200" b="0" i="0" dirty="0">
+                          <a:solidFill>
+                            <a:schemeClr val="tx1"/>
+                          </a:solidFill>
+                          <a:effectLst/>
+                          <a:latin typeface="KoPub돋움체 Medium" panose="00000600000000000000" pitchFamily="2" charset="-127"/>
+                          <a:ea typeface="KoPub돋움체 Medium" panose="00000600000000000000" pitchFamily="2" charset="-127"/>
+                        </a:rPr>
+                        <a:t>RMSD=0.0289, </a:t>
+                      </a:r>
+                      <a:r>
+                        <a:rPr lang="ko-KR" sz="1200" b="0" i="0" dirty="0" err="1">
+                          <a:solidFill>
+                            <a:schemeClr val="tx1"/>
+                          </a:solidFill>
+                          <a:effectLst/>
+                          <a:latin typeface="KoPub돋움체 Medium" panose="00000600000000000000" pitchFamily="2" charset="-127"/>
+                          <a:ea typeface="KoPub돋움체 Medium" panose="00000600000000000000" pitchFamily="2" charset="-127"/>
+                        </a:rPr>
+                        <a:t>p</a:t>
+                      </a:r>
+                      <a:r>
+                        <a:rPr lang="ko-KR" sz="1200" b="0" i="0" dirty="0">
+                          <a:solidFill>
+                            <a:schemeClr val="tx1"/>
+                          </a:solidFill>
+                          <a:effectLst/>
+                          <a:latin typeface="KoPub돋움체 Medium" panose="00000600000000000000" pitchFamily="2" charset="-127"/>
+                          <a:ea typeface="KoPub돋움체 Medium" panose="00000600000000000000" pitchFamily="2" charset="-127"/>
+                        </a:rPr>
+                        <a:t>=0.0135</a:t>
+                      </a:r>
+                    </a:p>
+                  </a:txBody>
+                  <a:tcPr marL="19050" marR="19050" marT="19050" marB="19050" anchor="ctr">
+                    <a:lnB w="28575" cap="flat" cmpd="sng" algn="ctr">
+                      <a:solidFill>
+                        <a:srgbClr val="FF0000"/>
+                      </a:solidFill>
+                      <a:prstDash val="solid"/>
+                      <a:round/>
+                      <a:headEnd type="none" w="med" len="med"/>
+                      <a:tailEnd type="none" w="med" len="med"/>
+                    </a:lnB>
+                    <a:solidFill>
+                      <a:schemeClr val="bg1"/>
+                    </a:solidFill>
+                  </a:tcPr>
+                </a:tc>
+                <a:tc>
+                  <a:txBody>
+                    <a:bodyPr/>
+                    <a:lstStyle/>
+                    <a:p>
+                      <a:pPr algn="l">
+                        <a:buNone/>
+                      </a:pPr>
+                      <a:r>
+                        <a:rPr lang="ko-KR" sz="1200" b="0" i="0">
+                          <a:solidFill>
+                            <a:schemeClr val="tx1"/>
+                          </a:solidFill>
+                          <a:effectLst/>
+                          <a:latin typeface="KoPub돋움체 Medium" panose="00000600000000000000" pitchFamily="2" charset="-127"/>
+                          <a:ea typeface="KoPub돋움체 Medium" panose="00000600000000000000" pitchFamily="2" charset="-127"/>
+                        </a:rPr>
+                        <a:t>RMSD=0.0023, p=0.0005</a:t>
+                      </a:r>
+                    </a:p>
+                  </a:txBody>
+                  <a:tcPr marL="19050" marR="19050" marT="19050" marB="19050" anchor="ctr">
+                    <a:lnB w="28575" cap="flat" cmpd="sng" algn="ctr">
+                      <a:solidFill>
+                        <a:srgbClr val="FF0000"/>
+                      </a:solidFill>
+                      <a:prstDash val="solid"/>
+                      <a:round/>
+                      <a:headEnd type="none" w="med" len="med"/>
+                      <a:tailEnd type="none" w="med" len="med"/>
+                    </a:lnB>
+                    <a:solidFill>
+                      <a:schemeClr val="bg1"/>
+                    </a:solidFill>
+                  </a:tcPr>
+                </a:tc>
+                <a:tc>
+                  <a:txBody>
+                    <a:bodyPr/>
+                    <a:lstStyle/>
+                    <a:p>
+                      <a:pPr algn="l">
+                        <a:buNone/>
+                      </a:pPr>
+                      <a:r>
+                        <a:rPr lang="ko-KR" sz="1200" b="0" i="0" dirty="0">
+                          <a:solidFill>
+                            <a:schemeClr val="tx1"/>
+                          </a:solidFill>
+                          <a:effectLst/>
+                          <a:latin typeface="KoPub돋움체 Medium" panose="00000600000000000000" pitchFamily="2" charset="-127"/>
+                          <a:ea typeface="KoPub돋움체 Medium" panose="00000600000000000000" pitchFamily="2" charset="-127"/>
+                        </a:rPr>
+                        <a:t>RMSD=0.0006, </a:t>
+                      </a:r>
+                      <a:r>
+                        <a:rPr lang="ko-KR" sz="1200" b="0" i="0" dirty="0" err="1">
+                          <a:solidFill>
+                            <a:schemeClr val="tx1"/>
+                          </a:solidFill>
+                          <a:effectLst/>
+                          <a:latin typeface="KoPub돋움체 Medium" panose="00000600000000000000" pitchFamily="2" charset="-127"/>
+                          <a:ea typeface="KoPub돋움체 Medium" panose="00000600000000000000" pitchFamily="2" charset="-127"/>
+                        </a:rPr>
+                        <a:t>p</a:t>
+                      </a:r>
+                      <a:r>
+                        <a:rPr lang="ko-KR" sz="1200" b="0" i="0" dirty="0">
+                          <a:solidFill>
+                            <a:schemeClr val="tx1"/>
+                          </a:solidFill>
+                          <a:effectLst/>
+                          <a:latin typeface="KoPub돋움체 Medium" panose="00000600000000000000" pitchFamily="2" charset="-127"/>
+                          <a:ea typeface="KoPub돋움체 Medium" panose="00000600000000000000" pitchFamily="2" charset="-127"/>
+                        </a:rPr>
+                        <a:t>=0.084</a:t>
+                      </a:r>
+                    </a:p>
+                  </a:txBody>
+                  <a:tcPr marL="19050" marR="19050" marT="19050" marB="19050" anchor="ctr">
+                    <a:lnB w="28575" cap="flat" cmpd="sng" algn="ctr">
+                      <a:solidFill>
+                        <a:srgbClr val="FF0000"/>
+                      </a:solidFill>
+                      <a:prstDash val="solid"/>
+                      <a:round/>
+                      <a:headEnd type="none" w="med" len="med"/>
+                      <a:tailEnd type="none" w="med" len="med"/>
+                    </a:lnB>
+                    <a:solidFill>
+                      <a:schemeClr val="accent4">
+                        <a:lumMod val="20000"/>
+                        <a:lumOff val="80000"/>
+                      </a:schemeClr>
+                    </a:solidFill>
+                  </a:tcPr>
+                </a:tc>
+                <a:extLst>
+                  <a:ext uri="{0D108BD9-81ED-4DB2-BD59-A6C34878D82A}">
+                    <a16:rowId xmlns:a16="http://schemas.microsoft.com/office/drawing/2014/main" val="4189124397"/>
+                  </a:ext>
+                </a:extLst>
+              </a:tr>
+              <a:tr h="370840">
+                <a:tc>
+                  <a:txBody>
+                    <a:bodyPr/>
+                    <a:lstStyle/>
+                    <a:p>
+                      <a:pPr algn="ctr" latinLnBrk="1"/>
+                      <a:r>
+                        <a:rPr lang="ko-KR" altLang="ko-KR" sz="1200" b="0" i="0" kern="1200" dirty="0">
+                          <a:solidFill>
+                            <a:schemeClr val="tx1"/>
+                          </a:solidFill>
+                          <a:effectLst/>
+                          <a:latin typeface="KoPub돋움체 Medium" panose="00000600000000000000" pitchFamily="2" charset="-127"/>
+                          <a:ea typeface="KoPub돋움체 Medium" panose="00000600000000000000" pitchFamily="2" charset="-127"/>
+                          <a:cs typeface="+mn-cs"/>
+                        </a:rPr>
+                        <a:t>TP </a:t>
+                      </a:r>
+                      <a:r>
+                        <a:rPr lang="ko-KR" altLang="ko-KR" sz="1200" b="0" i="0" kern="1200" dirty="0" err="1">
+                          <a:solidFill>
+                            <a:schemeClr val="tx1"/>
+                          </a:solidFill>
+                          <a:effectLst/>
+                          <a:latin typeface="KoPub돋움체 Medium" panose="00000600000000000000" pitchFamily="2" charset="-127"/>
+                          <a:ea typeface="KoPub돋움체 Medium" panose="00000600000000000000" pitchFamily="2" charset="-127"/>
+                          <a:cs typeface="+mn-cs"/>
+                        </a:rPr>
+                        <a:t>vs</a:t>
+                      </a:r>
+                      <a:r>
+                        <a:rPr lang="ko-KR" altLang="ko-KR" sz="1200" b="0" i="0" kern="1200" dirty="0">
+                          <a:solidFill>
+                            <a:schemeClr val="tx1"/>
+                          </a:solidFill>
+                          <a:effectLst/>
+                          <a:latin typeface="KoPub돋움체 Medium" panose="00000600000000000000" pitchFamily="2" charset="-127"/>
+                          <a:ea typeface="KoPub돋움체 Medium" panose="00000600000000000000" pitchFamily="2" charset="-127"/>
+                          <a:cs typeface="+mn-cs"/>
+                        </a:rPr>
+                        <a:t> FP</a:t>
+                      </a:r>
+                      <a:endParaRPr lang="ko-KR" altLang="en-US" sz="1200" dirty="0">
+                        <a:solidFill>
+                          <a:schemeClr val="tx1"/>
+                        </a:solidFill>
+                        <a:latin typeface="KoPub돋움체 Medium" panose="00000600000000000000" pitchFamily="2" charset="-127"/>
+                        <a:ea typeface="KoPub돋움체 Medium" panose="00000600000000000000" pitchFamily="2" charset="-127"/>
+                      </a:endParaRPr>
+                    </a:p>
+                  </a:txBody>
+                  <a:tcPr anchor="ctr">
+                    <a:lnL w="28575" cap="flat" cmpd="sng" algn="ctr">
+                      <a:solidFill>
+                        <a:srgbClr val="FF0000"/>
+                      </a:solidFill>
+                      <a:prstDash val="solid"/>
+                      <a:round/>
+                      <a:headEnd type="none" w="med" len="med"/>
+                      <a:tailEnd type="none" w="med" len="med"/>
+                    </a:lnL>
+                    <a:lnT w="28575" cap="flat" cmpd="sng" algn="ctr">
+                      <a:solidFill>
+                        <a:srgbClr val="FF0000"/>
+                      </a:solidFill>
+                      <a:prstDash val="solid"/>
+                      <a:round/>
+                      <a:headEnd type="none" w="med" len="med"/>
+                      <a:tailEnd type="none" w="med" len="med"/>
+                    </a:lnT>
+                    <a:solidFill>
+                      <a:schemeClr val="bg1"/>
+                    </a:solidFill>
+                  </a:tcPr>
+                </a:tc>
+                <a:tc>
+                  <a:txBody>
+                    <a:bodyPr/>
+                    <a:lstStyle/>
+                    <a:p>
+                      <a:pPr algn="l">
+                        <a:buNone/>
+                      </a:pPr>
+                      <a:r>
+                        <a:rPr lang="ko-KR" sz="1200" b="0" i="0" dirty="0">
+                          <a:solidFill>
+                            <a:schemeClr val="tx1"/>
+                          </a:solidFill>
+                          <a:effectLst/>
+                          <a:latin typeface="KoPub돋움체 Medium" panose="00000600000000000000" pitchFamily="2" charset="-127"/>
+                          <a:ea typeface="KoPub돋움체 Medium" panose="00000600000000000000" pitchFamily="2" charset="-127"/>
+                        </a:rPr>
+                        <a:t>RMSD=0.0274, </a:t>
+                      </a:r>
+                      <a:r>
+                        <a:rPr lang="ko-KR" sz="1200" b="0" i="0" dirty="0" err="1">
+                          <a:solidFill>
+                            <a:schemeClr val="tx1"/>
+                          </a:solidFill>
+                          <a:effectLst/>
+                          <a:latin typeface="KoPub돋움체 Medium" panose="00000600000000000000" pitchFamily="2" charset="-127"/>
+                          <a:ea typeface="KoPub돋움체 Medium" panose="00000600000000000000" pitchFamily="2" charset="-127"/>
+                        </a:rPr>
+                        <a:t>p</a:t>
+                      </a:r>
+                      <a:r>
+                        <a:rPr lang="ko-KR" sz="1200" b="0" i="0" dirty="0">
+                          <a:solidFill>
+                            <a:schemeClr val="tx1"/>
+                          </a:solidFill>
+                          <a:effectLst/>
+                          <a:latin typeface="KoPub돋움체 Medium" panose="00000600000000000000" pitchFamily="2" charset="-127"/>
+                          <a:ea typeface="KoPub돋움체 Medium" panose="00000600000000000000" pitchFamily="2" charset="-127"/>
+                        </a:rPr>
+                        <a:t>=0.0175</a:t>
+                      </a:r>
+                    </a:p>
+                  </a:txBody>
+                  <a:tcPr marL="19050" marR="19050" marT="19050" marB="19050" anchor="ctr">
+                    <a:lnT w="28575" cap="flat" cmpd="sng" algn="ctr">
+                      <a:solidFill>
+                        <a:srgbClr val="FF0000"/>
+                      </a:solidFill>
+                      <a:prstDash val="solid"/>
+                      <a:round/>
+                      <a:headEnd type="none" w="med" len="med"/>
+                      <a:tailEnd type="none" w="med" len="med"/>
+                    </a:lnT>
+                    <a:solidFill>
+                      <a:schemeClr val="bg1"/>
+                    </a:solidFill>
+                  </a:tcPr>
+                </a:tc>
+                <a:tc>
+                  <a:txBody>
+                    <a:bodyPr/>
+                    <a:lstStyle/>
+                    <a:p>
+                      <a:pPr algn="l">
+                        <a:buNone/>
+                      </a:pPr>
+                      <a:r>
+                        <a:rPr lang="ko-KR" sz="1200" b="0" i="0" dirty="0">
+                          <a:solidFill>
+                            <a:schemeClr val="tx1"/>
+                          </a:solidFill>
+                          <a:effectLst/>
+                          <a:latin typeface="KoPub돋움체 Medium" panose="00000600000000000000" pitchFamily="2" charset="-127"/>
+                          <a:ea typeface="KoPub돋움체 Medium" panose="00000600000000000000" pitchFamily="2" charset="-127"/>
+                        </a:rPr>
+                        <a:t>RMSD=0.0016, </a:t>
+                      </a:r>
+                      <a:r>
+                        <a:rPr lang="ko-KR" sz="1200" b="0" i="0" dirty="0" err="1">
+                          <a:solidFill>
+                            <a:schemeClr val="tx1"/>
+                          </a:solidFill>
+                          <a:effectLst/>
+                          <a:latin typeface="KoPub돋움체 Medium" panose="00000600000000000000" pitchFamily="2" charset="-127"/>
+                          <a:ea typeface="KoPub돋움체 Medium" panose="00000600000000000000" pitchFamily="2" charset="-127"/>
+                        </a:rPr>
+                        <a:t>p</a:t>
+                      </a:r>
+                      <a:r>
+                        <a:rPr lang="ko-KR" sz="1200" b="0" i="0" dirty="0">
+                          <a:solidFill>
+                            <a:schemeClr val="tx1"/>
+                          </a:solidFill>
+                          <a:effectLst/>
+                          <a:latin typeface="KoPub돋움체 Medium" panose="00000600000000000000" pitchFamily="2" charset="-127"/>
+                          <a:ea typeface="KoPub돋움체 Medium" panose="00000600000000000000" pitchFamily="2" charset="-127"/>
+                        </a:rPr>
+                        <a:t>=0.005</a:t>
+                      </a:r>
+                    </a:p>
+                  </a:txBody>
+                  <a:tcPr marL="19050" marR="19050" marT="19050" marB="19050" anchor="ctr">
+                    <a:lnT w="28575" cap="flat" cmpd="sng" algn="ctr">
+                      <a:solidFill>
+                        <a:srgbClr val="FF0000"/>
+                      </a:solidFill>
+                      <a:prstDash val="solid"/>
+                      <a:round/>
+                      <a:headEnd type="none" w="med" len="med"/>
+                      <a:tailEnd type="none" w="med" len="med"/>
+                    </a:lnT>
+                    <a:solidFill>
+                      <a:schemeClr val="bg1"/>
+                    </a:solidFill>
+                  </a:tcPr>
+                </a:tc>
+                <a:tc>
+                  <a:txBody>
+                    <a:bodyPr/>
+                    <a:lstStyle/>
+                    <a:p>
+                      <a:pPr algn="l">
+                        <a:buNone/>
+                      </a:pPr>
+                      <a:r>
+                        <a:rPr lang="ko-KR" sz="1200" b="0" i="0" dirty="0">
+                          <a:solidFill>
+                            <a:schemeClr val="tx1"/>
+                          </a:solidFill>
+                          <a:effectLst/>
+                          <a:latin typeface="KoPub돋움체 Medium" panose="00000600000000000000" pitchFamily="2" charset="-127"/>
+                          <a:ea typeface="KoPub돋움체 Medium" panose="00000600000000000000" pitchFamily="2" charset="-127"/>
+                        </a:rPr>
+                        <a:t>RMSD=0.0005, </a:t>
+                      </a:r>
+                      <a:r>
+                        <a:rPr lang="ko-KR" sz="1200" b="0" i="0" dirty="0" err="1">
+                          <a:solidFill>
+                            <a:schemeClr val="tx1"/>
+                          </a:solidFill>
+                          <a:effectLst/>
+                          <a:latin typeface="KoPub돋움체 Medium" panose="00000600000000000000" pitchFamily="2" charset="-127"/>
+                          <a:ea typeface="KoPub돋움체 Medium" panose="00000600000000000000" pitchFamily="2" charset="-127"/>
+                        </a:rPr>
+                        <a:t>p</a:t>
+                      </a:r>
+                      <a:r>
+                        <a:rPr lang="ko-KR" sz="1200" b="0" i="0" dirty="0">
+                          <a:solidFill>
+                            <a:schemeClr val="tx1"/>
+                          </a:solidFill>
+                          <a:effectLst/>
+                          <a:latin typeface="KoPub돋움체 Medium" panose="00000600000000000000" pitchFamily="2" charset="-127"/>
+                          <a:ea typeface="KoPub돋움체 Medium" panose="00000600000000000000" pitchFamily="2" charset="-127"/>
+                        </a:rPr>
+                        <a:t>=0.425</a:t>
+                      </a:r>
+                    </a:p>
+                  </a:txBody>
+                  <a:tcPr marL="19050" marR="19050" marT="19050" marB="19050" anchor="ctr">
+                    <a:lnR w="28575" cap="flat" cmpd="sng" algn="ctr">
+                      <a:solidFill>
+                        <a:srgbClr val="FF0000"/>
+                      </a:solidFill>
+                      <a:prstDash val="solid"/>
+                      <a:round/>
+                      <a:headEnd type="none" w="med" len="med"/>
+                      <a:tailEnd type="none" w="med" len="med"/>
+                    </a:lnR>
+                    <a:lnT w="28575" cap="flat" cmpd="sng" algn="ctr">
+                      <a:solidFill>
+                        <a:srgbClr val="FF0000"/>
+                      </a:solidFill>
+                      <a:prstDash val="solid"/>
+                      <a:round/>
+                      <a:headEnd type="none" w="med" len="med"/>
+                      <a:tailEnd type="none" w="med" len="med"/>
+                    </a:lnT>
+                    <a:solidFill>
+                      <a:schemeClr val="accent4">
+                        <a:lumMod val="20000"/>
+                        <a:lumOff val="80000"/>
+                      </a:schemeClr>
+                    </a:solidFill>
+                  </a:tcPr>
+                </a:tc>
+                <a:extLst>
+                  <a:ext uri="{0D108BD9-81ED-4DB2-BD59-A6C34878D82A}">
+                    <a16:rowId xmlns:a16="http://schemas.microsoft.com/office/drawing/2014/main" val="1968725908"/>
+                  </a:ext>
+                </a:extLst>
+              </a:tr>
+              <a:tr h="370840">
+                <a:tc>
+                  <a:txBody>
+                    <a:bodyPr/>
+                    <a:lstStyle/>
+                    <a:p>
+                      <a:pPr algn="ctr" latinLnBrk="1"/>
+                      <a:r>
+                        <a:rPr lang="ko-KR" altLang="ko-KR" sz="1200" b="0" i="0" kern="1200" dirty="0">
+                          <a:solidFill>
+                            <a:schemeClr val="tx1"/>
+                          </a:solidFill>
+                          <a:effectLst/>
+                          <a:latin typeface="KoPub돋움체 Medium" panose="00000600000000000000" pitchFamily="2" charset="-127"/>
+                          <a:ea typeface="KoPub돋움체 Medium" panose="00000600000000000000" pitchFamily="2" charset="-127"/>
+                          <a:cs typeface="+mn-cs"/>
+                        </a:rPr>
+                        <a:t>TP </a:t>
+                      </a:r>
+                      <a:r>
+                        <a:rPr lang="ko-KR" altLang="ko-KR" sz="1200" b="0" i="0" kern="1200" dirty="0" err="1">
+                          <a:solidFill>
+                            <a:schemeClr val="tx1"/>
+                          </a:solidFill>
+                          <a:effectLst/>
+                          <a:latin typeface="KoPub돋움체 Medium" panose="00000600000000000000" pitchFamily="2" charset="-127"/>
+                          <a:ea typeface="KoPub돋움체 Medium" panose="00000600000000000000" pitchFamily="2" charset="-127"/>
+                          <a:cs typeface="+mn-cs"/>
+                        </a:rPr>
+                        <a:t>vs</a:t>
+                      </a:r>
+                      <a:r>
+                        <a:rPr lang="ko-KR" altLang="ko-KR" sz="1200" b="0" i="0" kern="1200" dirty="0">
+                          <a:solidFill>
+                            <a:schemeClr val="tx1"/>
+                          </a:solidFill>
+                          <a:effectLst/>
+                          <a:latin typeface="KoPub돋움체 Medium" panose="00000600000000000000" pitchFamily="2" charset="-127"/>
+                          <a:ea typeface="KoPub돋움체 Medium" panose="00000600000000000000" pitchFamily="2" charset="-127"/>
+                          <a:cs typeface="+mn-cs"/>
+                        </a:rPr>
+                        <a:t> FP (</a:t>
+                      </a:r>
+                      <a:r>
+                        <a:rPr lang="en-US" altLang="ko-KR" sz="1200" b="0" i="0" kern="1200" dirty="0" err="1">
+                          <a:solidFill>
+                            <a:schemeClr val="tx1"/>
+                          </a:solidFill>
+                          <a:effectLst/>
+                          <a:latin typeface="KoPub돋움체 Medium" panose="00000600000000000000" pitchFamily="2" charset="-127"/>
+                          <a:ea typeface="KoPub돋움체 Medium" panose="00000600000000000000" pitchFamily="2" charset="-127"/>
+                          <a:cs typeface="+mn-cs"/>
+                        </a:rPr>
+                        <a:t>psm</a:t>
+                      </a:r>
+                      <a:r>
+                        <a:rPr lang="ko-KR" altLang="ko-KR" sz="1200" b="0" i="0" kern="1200" dirty="0">
+                          <a:solidFill>
+                            <a:schemeClr val="tx1"/>
+                          </a:solidFill>
+                          <a:effectLst/>
+                          <a:latin typeface="KoPub돋움체 Medium" panose="00000600000000000000" pitchFamily="2" charset="-127"/>
+                          <a:ea typeface="KoPub돋움체 Medium" panose="00000600000000000000" pitchFamily="2" charset="-127"/>
+                          <a:cs typeface="+mn-cs"/>
+                        </a:rPr>
+                        <a:t>)</a:t>
+                      </a:r>
+                      <a:endParaRPr lang="ko-KR" altLang="en-US" sz="1200" dirty="0">
+                        <a:solidFill>
+                          <a:schemeClr val="tx1"/>
+                        </a:solidFill>
+                        <a:latin typeface="KoPub돋움체 Medium" panose="00000600000000000000" pitchFamily="2" charset="-127"/>
+                        <a:ea typeface="KoPub돋움체 Medium" panose="00000600000000000000" pitchFamily="2" charset="-127"/>
+                      </a:endParaRPr>
+                    </a:p>
+                  </a:txBody>
+                  <a:tcPr anchor="ctr">
+                    <a:lnL w="28575" cap="flat" cmpd="sng" algn="ctr">
+                      <a:solidFill>
+                        <a:srgbClr val="FF0000"/>
+                      </a:solidFill>
+                      <a:prstDash val="solid"/>
+                      <a:round/>
+                      <a:headEnd type="none" w="med" len="med"/>
+                      <a:tailEnd type="none" w="med" len="med"/>
+                    </a:lnL>
+                    <a:lnB w="28575" cap="flat" cmpd="sng" algn="ctr">
+                      <a:solidFill>
+                        <a:srgbClr val="FF0000"/>
+                      </a:solidFill>
+                      <a:prstDash val="solid"/>
+                      <a:round/>
+                      <a:headEnd type="none" w="med" len="med"/>
+                      <a:tailEnd type="none" w="med" len="med"/>
+                    </a:lnB>
+                    <a:solidFill>
+                      <a:schemeClr val="bg1"/>
+                    </a:solidFill>
+                  </a:tcPr>
+                </a:tc>
+                <a:tc>
+                  <a:txBody>
+                    <a:bodyPr/>
+                    <a:lstStyle/>
+                    <a:p>
+                      <a:pPr algn="l">
+                        <a:buNone/>
+                      </a:pPr>
+                      <a:r>
+                        <a:rPr lang="ko-KR" sz="1200" b="0" i="0" dirty="0">
+                          <a:solidFill>
+                            <a:schemeClr val="tx1"/>
+                          </a:solidFill>
+                          <a:effectLst/>
+                          <a:latin typeface="KoPub돋움체 Medium" panose="00000600000000000000" pitchFamily="2" charset="-127"/>
+                          <a:ea typeface="KoPub돋움체 Medium" panose="00000600000000000000" pitchFamily="2" charset="-127"/>
+                        </a:rPr>
+                        <a:t>RMSD=0.0422, </a:t>
+                      </a:r>
+                      <a:r>
+                        <a:rPr lang="ko-KR" sz="1200" b="0" i="0" dirty="0" err="1">
+                          <a:solidFill>
+                            <a:schemeClr val="tx1"/>
+                          </a:solidFill>
+                          <a:effectLst/>
+                          <a:latin typeface="KoPub돋움체 Medium" panose="00000600000000000000" pitchFamily="2" charset="-127"/>
+                          <a:ea typeface="KoPub돋움체 Medium" panose="00000600000000000000" pitchFamily="2" charset="-127"/>
+                        </a:rPr>
+                        <a:t>p</a:t>
+                      </a:r>
+                      <a:r>
+                        <a:rPr lang="ko-KR" sz="1200" b="0" i="0" dirty="0">
+                          <a:solidFill>
+                            <a:schemeClr val="tx1"/>
+                          </a:solidFill>
+                          <a:effectLst/>
+                          <a:latin typeface="KoPub돋움체 Medium" panose="00000600000000000000" pitchFamily="2" charset="-127"/>
+                          <a:ea typeface="KoPub돋움체 Medium" panose="00000600000000000000" pitchFamily="2" charset="-127"/>
+                        </a:rPr>
+                        <a:t>=0.0165</a:t>
+                      </a:r>
+                    </a:p>
+                  </a:txBody>
+                  <a:tcPr marL="19050" marR="19050" marT="19050" marB="19050" anchor="ctr">
+                    <a:lnB w="28575" cap="flat" cmpd="sng" algn="ctr">
+                      <a:solidFill>
+                        <a:srgbClr val="FF0000"/>
+                      </a:solidFill>
+                      <a:prstDash val="solid"/>
+                      <a:round/>
+                      <a:headEnd type="none" w="med" len="med"/>
+                      <a:tailEnd type="none" w="med" len="med"/>
+                    </a:lnB>
+                    <a:solidFill>
+                      <a:schemeClr val="bg1"/>
+                    </a:solidFill>
+                  </a:tcPr>
+                </a:tc>
+                <a:tc>
+                  <a:txBody>
+                    <a:bodyPr/>
+                    <a:lstStyle/>
+                    <a:p>
+                      <a:pPr algn="l">
+                        <a:buNone/>
+                      </a:pPr>
+                      <a:r>
+                        <a:rPr lang="ko-KR" sz="1200" b="0" i="0" dirty="0">
+                          <a:solidFill>
+                            <a:schemeClr val="tx1"/>
+                          </a:solidFill>
+                          <a:effectLst/>
+                          <a:latin typeface="KoPub돋움체 Medium" panose="00000600000000000000" pitchFamily="2" charset="-127"/>
+                          <a:ea typeface="KoPub돋움체 Medium" panose="00000600000000000000" pitchFamily="2" charset="-127"/>
+                        </a:rPr>
+                        <a:t>RMSD=0.0023, </a:t>
+                      </a:r>
+                      <a:r>
+                        <a:rPr lang="ko-KR" sz="1200" b="0" i="0" dirty="0" err="1">
+                          <a:solidFill>
+                            <a:schemeClr val="tx1"/>
+                          </a:solidFill>
+                          <a:effectLst/>
+                          <a:latin typeface="KoPub돋움체 Medium" panose="00000600000000000000" pitchFamily="2" charset="-127"/>
+                          <a:ea typeface="KoPub돋움체 Medium" panose="00000600000000000000" pitchFamily="2" charset="-127"/>
+                        </a:rPr>
+                        <a:t>p</a:t>
+                      </a:r>
+                      <a:r>
+                        <a:rPr lang="ko-KR" sz="1200" b="0" i="0" dirty="0">
+                          <a:solidFill>
+                            <a:schemeClr val="tx1"/>
+                          </a:solidFill>
+                          <a:effectLst/>
+                          <a:latin typeface="KoPub돋움체 Medium" panose="00000600000000000000" pitchFamily="2" charset="-127"/>
+                          <a:ea typeface="KoPub돋움체 Medium" panose="00000600000000000000" pitchFamily="2" charset="-127"/>
+                        </a:rPr>
+                        <a:t>=0.0095</a:t>
+                      </a:r>
+                    </a:p>
+                  </a:txBody>
+                  <a:tcPr marL="19050" marR="19050" marT="19050" marB="19050" anchor="ctr">
+                    <a:lnB w="28575" cap="flat" cmpd="sng" algn="ctr">
+                      <a:solidFill>
+                        <a:srgbClr val="FF0000"/>
+                      </a:solidFill>
+                      <a:prstDash val="solid"/>
+                      <a:round/>
+                      <a:headEnd type="none" w="med" len="med"/>
+                      <a:tailEnd type="none" w="med" len="med"/>
+                    </a:lnB>
+                    <a:solidFill>
+                      <a:schemeClr val="bg1"/>
+                    </a:solidFill>
+                  </a:tcPr>
+                </a:tc>
+                <a:tc>
+                  <a:txBody>
+                    <a:bodyPr/>
+                    <a:lstStyle/>
+                    <a:p>
+                      <a:pPr algn="l">
+                        <a:buNone/>
+                      </a:pPr>
+                      <a:r>
+                        <a:rPr lang="ko-KR" sz="1200" b="0" i="0" dirty="0">
+                          <a:solidFill>
+                            <a:schemeClr val="tx1"/>
+                          </a:solidFill>
+                          <a:effectLst/>
+                          <a:latin typeface="KoPub돋움체 Medium" panose="00000600000000000000" pitchFamily="2" charset="-127"/>
+                          <a:ea typeface="KoPub돋움체 Medium" panose="00000600000000000000" pitchFamily="2" charset="-127"/>
+                        </a:rPr>
+                        <a:t>RMSD=0.0006, </a:t>
+                      </a:r>
+                      <a:r>
+                        <a:rPr lang="ko-KR" sz="1200" b="0" i="0" dirty="0" err="1">
+                          <a:solidFill>
+                            <a:schemeClr val="tx1"/>
+                          </a:solidFill>
+                          <a:effectLst/>
+                          <a:latin typeface="KoPub돋움체 Medium" panose="00000600000000000000" pitchFamily="2" charset="-127"/>
+                          <a:ea typeface="KoPub돋움체 Medium" panose="00000600000000000000" pitchFamily="2" charset="-127"/>
+                        </a:rPr>
+                        <a:t>p</a:t>
+                      </a:r>
+                      <a:r>
+                        <a:rPr lang="ko-KR" sz="1200" b="0" i="0" dirty="0">
+                          <a:solidFill>
+                            <a:schemeClr val="tx1"/>
+                          </a:solidFill>
+                          <a:effectLst/>
+                          <a:latin typeface="KoPub돋움체 Medium" panose="00000600000000000000" pitchFamily="2" charset="-127"/>
+                          <a:ea typeface="KoPub돋움체 Medium" panose="00000600000000000000" pitchFamily="2" charset="-127"/>
+                        </a:rPr>
+                        <a:t>=0.417</a:t>
+                      </a:r>
+                    </a:p>
+                  </a:txBody>
+                  <a:tcPr marL="19050" marR="19050" marT="19050" marB="19050" anchor="ctr">
+                    <a:lnR w="28575" cap="flat" cmpd="sng" algn="ctr">
+                      <a:solidFill>
+                        <a:srgbClr val="FF0000"/>
+                      </a:solidFill>
+                      <a:prstDash val="solid"/>
+                      <a:round/>
+                      <a:headEnd type="none" w="med" len="med"/>
+                      <a:tailEnd type="none" w="med" len="med"/>
+                    </a:lnR>
+                    <a:lnB w="28575" cap="flat" cmpd="sng" algn="ctr">
+                      <a:solidFill>
+                        <a:srgbClr val="FF0000"/>
+                      </a:solidFill>
+                      <a:prstDash val="solid"/>
+                      <a:round/>
+                      <a:headEnd type="none" w="med" len="med"/>
+                      <a:tailEnd type="none" w="med" len="med"/>
+                    </a:lnB>
+                    <a:solidFill>
+                      <a:schemeClr val="accent4">
+                        <a:lumMod val="20000"/>
+                        <a:lumOff val="80000"/>
+                      </a:schemeClr>
+                    </a:solidFill>
+                  </a:tcPr>
+                </a:tc>
+                <a:extLst>
+                  <a:ext uri="{0D108BD9-81ED-4DB2-BD59-A6C34878D82A}">
+                    <a16:rowId xmlns:a16="http://schemas.microsoft.com/office/drawing/2014/main" val="2054828031"/>
+                  </a:ext>
+                </a:extLst>
+              </a:tr>
+            </a:tbl>
+          </a:graphicData>
+        </a:graphic>
+      </p:graphicFrame>
+    </p:spTree>
+    <p:extLst>
+      <p:ext uri="{BB962C8B-B14F-4D97-AF65-F5344CB8AC3E}">
+        <p14:creationId xmlns:p14="http://schemas.microsoft.com/office/powerpoint/2010/main" val="1105379008"/>
+      </p:ext>
+    </p:extLst>
+  </p:cSld>
+  <p:clrMapOvr>
+    <a:masterClrMapping/>
+  </p:clrMapOvr>
+</p:sld>
+</file>
+
+<file path=ppt/slides/slide6.xml><?xml version="1.0" encoding="utf-8"?>
+<p:sld xmlns:a="http://schemas.openxmlformats.org/drawingml/2006/main" xmlns:r="http://schemas.openxmlformats.org/officeDocument/2006/relationships" xmlns:p="http://schemas.openxmlformats.org/presentationml/2006/main">
+  <p:cSld>
+    <p:spTree>
+      <p:nvGrpSpPr>
+        <p:cNvPr id="1" name="">
+          <a:extLst>
+            <a:ext uri="{FF2B5EF4-FFF2-40B4-BE49-F238E27FC236}">
               <a16:creationId xmlns:a16="http://schemas.microsoft.com/office/drawing/2014/main" id="{6A773A45-53DB-1D03-067B-82EF4C5C0722}"/>
             </a:ext>
           </a:extLst>
@@ -10299,11 +12904,11 @@
             </a:r>
             <a:r>
               <a:rPr lang="en-US" altLang="ko-KR" b="1" dirty="0"/>
-              <a:t>(p&lt;0.01) → BMI confound </a:t>
-            </a:r>
-            <a:r>
-              <a:rPr lang="ko-KR" altLang="en-US" b="1" dirty="0"/>
-              <a:t>가능성 </a:t>
+              <a:t>(p&lt;</a:t>
+            </a:r>
+            <a:r>
+              <a:rPr lang="en-US" altLang="ko-KR" b="1"/>
+              <a:t>0.01)</a:t>
             </a:r>
             <a:endParaRPr lang="en-US" altLang="ko-KR" b="1" dirty="0"/>
           </a:p>
@@ -10322,7 +12927,7 @@
 </p:sld>
 </file>
 
-<file path=ppt/slides/slide6.xml><?xml version="1.0" encoding="utf-8"?>
+<file path=ppt/slides/slide7.xml><?xml version="1.0" encoding="utf-8"?>
 <p:sld xmlns:a="http://schemas.openxmlformats.org/drawingml/2006/main" xmlns:r="http://schemas.openxmlformats.org/officeDocument/2006/relationships" xmlns:p="http://schemas.openxmlformats.org/presentationml/2006/main">
   <p:cSld>
     <p:spTree>
@@ -10339,6 +12944,36 @@
           <a:chExt cx="0" cy="0"/>
         </a:xfrm>
       </p:grpSpPr>
+      <p:pic>
+        <p:nvPicPr>
+          <p:cNvPr id="5" name="그림 4">
+            <a:extLst>
+              <a:ext uri="{FF2B5EF4-FFF2-40B4-BE49-F238E27FC236}">
+                <a16:creationId xmlns:a16="http://schemas.microsoft.com/office/drawing/2014/main" id="{208045E6-AB4B-8191-87F4-9D786FB05D65}"/>
+              </a:ext>
+            </a:extLst>
+          </p:cNvPr>
+          <p:cNvPicPr>
+            <a:picLocks noChangeAspect="1"/>
+          </p:cNvPicPr>
+          <p:nvPr/>
+        </p:nvPicPr>
+        <p:blipFill>
+          <a:blip r:embed="rId3"/>
+          <a:stretch>
+            <a:fillRect/>
+          </a:stretch>
+        </p:blipFill>
+        <p:spPr>
+          <a:xfrm>
+            <a:off x="1878740" y="3429000"/>
+            <a:ext cx="4209137" cy="2875110"/>
+          </a:xfrm>
+          <a:prstGeom prst="rect">
+            <a:avLst/>
+          </a:prstGeom>
+        </p:spPr>
+      </p:pic>
       <p:sp>
         <p:nvSpPr>
           <p:cNvPr id="2" name="Title 1"/>
@@ -10390,19 +13025,8 @@
             </a:r>
             <a:r>
               <a:rPr lang="ko-KR" altLang="en-US" b="1" dirty="0"/>
-              <a:t>비교 </a:t>
-            </a:r>
-            <a:r>
-              <a:rPr lang="en-US" altLang="ko-KR" b="1" dirty="0"/>
-              <a:t>(Propensity-matched)</a:t>
-            </a:r>
-          </a:p>
-          <a:p>
-            <a:pPr>
-              <a:lnSpc>
-                <a:spcPct val="150000"/>
-              </a:lnSpc>
-            </a:pPr>
+              <a:t>비교</a:t>
+            </a:r>
             <a:endParaRPr b="1" dirty="0"/>
           </a:p>
         </p:txBody>
@@ -10416,14 +13040,14 @@
           <p:nvPr>
             <p:extLst>
               <p:ext uri="{D42A27DB-BD31-4B8C-83A1-F6EECF244321}">
-                <p14:modId xmlns:p14="http://schemas.microsoft.com/office/powerpoint/2010/main" val="963387739"/>
+                <p14:modId xmlns:p14="http://schemas.microsoft.com/office/powerpoint/2010/main" val="2487695188"/>
               </p:ext>
             </p:extLst>
           </p:nvPr>
         </p:nvGraphicFramePr>
         <p:xfrm>
-          <a:off x="3764159" y="1821709"/>
-          <a:ext cx="4679923" cy="1341120"/>
+          <a:off x="4373546" y="1821709"/>
+          <a:ext cx="3682318" cy="1341120"/>
         </p:xfrm>
         <a:graphic>
           <a:graphicData uri="http://schemas.openxmlformats.org/drawingml/2006/table">
@@ -10432,31 +13056,24 @@
                 <a:tableStyleId>{9D7B26C5-4107-4FEC-AEDC-1716B250A1EF}</a:tableStyleId>
               </a:tblPr>
               <a:tblGrid>
-                <a:gridCol w="1112479">
+                <a:gridCol w="1212955">
                   <a:extLst>
                     <a:ext uri="{9D8B030D-6E8A-4147-A177-3AD203B41FA5}">
                       <a16:colId xmlns:a16="http://schemas.microsoft.com/office/drawing/2014/main" val="20000"/>
                     </a:ext>
                   </a:extLst>
                 </a:gridCol>
-                <a:gridCol w="1400310">
+                <a:gridCol w="1291907">
                   <a:extLst>
                     <a:ext uri="{9D8B030D-6E8A-4147-A177-3AD203B41FA5}">
                       <a16:colId xmlns:a16="http://schemas.microsoft.com/office/drawing/2014/main" val="20001"/>
                     </a:ext>
                   </a:extLst>
                 </a:gridCol>
-                <a:gridCol w="948368">
+                <a:gridCol w="1177456">
                   <a:extLst>
                     <a:ext uri="{9D8B030D-6E8A-4147-A177-3AD203B41FA5}">
                       <a16:colId xmlns:a16="http://schemas.microsoft.com/office/drawing/2014/main" val="20002"/>
-                    </a:ext>
-                  </a:extLst>
-                </a:gridCol>
-                <a:gridCol w="1218766">
-                  <a:extLst>
-                    <a:ext uri="{9D8B030D-6E8A-4147-A177-3AD203B41FA5}">
-                      <a16:colId xmlns:a16="http://schemas.microsoft.com/office/drawing/2014/main" val="20003"/>
                     </a:ext>
                   </a:extLst>
                 </a:gridCol>
@@ -10499,20 +13116,6 @@
                       <a:r>
                         <a:rPr sz="1400" b="1"/>
                         <a:t>P-value</a:t>
-                      </a:r>
-                    </a:p>
-                  </a:txBody>
-                  <a:tcPr anchor="ctr"/>
-                </a:tc>
-                <a:tc>
-                  <a:txBody>
-                    <a:bodyPr/>
-                    <a:lstStyle/>
-                    <a:p>
-                      <a:pPr algn="ctr"/>
-                      <a:r>
-                        <a:rPr sz="1400" b="1"/>
-                        <a:t>Matched n</a:t>
                       </a:r>
                     </a:p>
                   </a:txBody>
@@ -10560,8 +13163,13 @@
                       <a:pPr algn="ctr"/>
                       <a:r>
                         <a:rPr sz="1400" b="0" dirty="0"/>
-                        <a:t>0.0057</a:t>
-                      </a:r>
+                        <a:t>0.0</a:t>
+                      </a:r>
+                      <a:r>
+                        <a:rPr lang="en-US" sz="1400" b="0" dirty="0"/>
+                        <a:t>155</a:t>
+                      </a:r>
+                      <a:endParaRPr sz="1400" b="0" dirty="0"/>
                     </a:p>
                   </a:txBody>
                   <a:tcPr anchor="ctr">
@@ -10580,28 +13188,21 @@
                       <a:pPr algn="ctr"/>
                       <a:r>
                         <a:rPr sz="1400" b="0" dirty="0"/>
-                        <a:t>0.983</a:t>
-                      </a:r>
-                    </a:p>
-                  </a:txBody>
-                  <a:tcPr anchor="ctr">
-                    <a:solidFill>
-                      <a:schemeClr val="bg1">
-                        <a:alpha val="20000"/>
-                      </a:schemeClr>
-                    </a:solidFill>
-                  </a:tcPr>
-                </a:tc>
-                <a:tc>
-                  <a:txBody>
-                    <a:bodyPr/>
-                    <a:lstStyle/>
-                    <a:p>
-                      <a:pPr algn="ctr"/>
-                      <a:r>
-                        <a:rPr sz="1400" b="0" dirty="0"/>
-                        <a:t>97 pairs</a:t>
-                      </a:r>
+                        <a:t>0.</a:t>
+                      </a:r>
+                      <a:r>
+                        <a:rPr lang="en-US" sz="1400" b="0" dirty="0"/>
+                        <a:t>227 (</a:t>
+                      </a:r>
+                      <a:r>
+                        <a:rPr lang="en-US" sz="1400" b="0" dirty="0" err="1"/>
+                        <a:t>n.s</a:t>
+                      </a:r>
+                      <a:r>
+                        <a:rPr lang="en-US" sz="1400" b="0" dirty="0"/>
+                        <a:t>.)</a:t>
+                      </a:r>
+                      <a:endParaRPr sz="1400" b="0" dirty="0"/>
                     </a:p>
                   </a:txBody>
                   <a:tcPr anchor="ctr">
@@ -10647,9 +13248,10 @@
                     <a:p>
                       <a:pPr algn="ctr"/>
                       <a:r>
-                        <a:rPr sz="1400" b="0"/>
-                        <a:t>0.0422</a:t>
-                      </a:r>
+                        <a:rPr lang="en-US" sz="1400" b="0" dirty="0"/>
+                        <a:t>0.0274</a:t>
+                      </a:r>
+                      <a:endParaRPr sz="1400" b="0" dirty="0"/>
                     </a:p>
                   </a:txBody>
                   <a:tcPr anchor="ctr"/>
@@ -10661,22 +13263,12 @@
                     <a:p>
                       <a:pPr algn="ctr"/>
                       <a:r>
-                        <a:rPr sz="1400" b="0"/>
-                        <a:t>0.0165</a:t>
-                      </a:r>
-                    </a:p>
-                  </a:txBody>
-                  <a:tcPr anchor="ctr"/>
-                </a:tc>
-                <a:tc>
-                  <a:txBody>
-                    <a:bodyPr/>
-                    <a:lstStyle/>
-                    <a:p>
-                      <a:pPr algn="ctr"/>
-                      <a:r>
                         <a:rPr sz="1400" b="0" dirty="0"/>
-                        <a:t>94 pairs</a:t>
+                        <a:t>0.01</a:t>
+                      </a:r>
+                      <a:r>
+                        <a:rPr lang="en-US" sz="1400" b="0" dirty="0"/>
+                        <a:t>75</a:t>
                       </a:r>
                     </a:p>
                   </a:txBody>
@@ -10692,2893 +13284,40 @@
           </a:graphicData>
         </a:graphic>
       </p:graphicFrame>
-      <p:grpSp>
-        <p:nvGrpSpPr>
-          <p:cNvPr id="12" name="그룹 11">
+      <p:pic>
+        <p:nvPicPr>
+          <p:cNvPr id="7" name="그림 6">
             <a:extLst>
               <a:ext uri="{FF2B5EF4-FFF2-40B4-BE49-F238E27FC236}">
-                <a16:creationId xmlns:a16="http://schemas.microsoft.com/office/drawing/2014/main" id="{7C38C2DF-B7CD-0288-0279-A7016A6CEFDB}"/>
+                <a16:creationId xmlns:a16="http://schemas.microsoft.com/office/drawing/2014/main" id="{F6BCAC1A-71D7-F33B-BBC4-F66D65788912}"/>
               </a:ext>
             </a:extLst>
           </p:cNvPr>
-          <p:cNvGrpSpPr/>
+          <p:cNvPicPr>
+            <a:picLocks noChangeAspect="1"/>
+          </p:cNvPicPr>
           <p:nvPr/>
-        </p:nvGrpSpPr>
-        <p:grpSpPr>
+        </p:nvPicPr>
+        <p:blipFill>
+          <a:blip r:embed="rId4"/>
+          <a:stretch>
+            <a:fillRect/>
+          </a:stretch>
+        </p:blipFill>
+        <p:spPr>
           <a:xfrm>
-            <a:off x="1878741" y="3429000"/>
-            <a:ext cx="8434517" cy="2875111"/>
-            <a:chOff x="1424174" y="3429000"/>
-            <a:chExt cx="8434517" cy="2875111"/>
+            <a:off x="6104125" y="3429000"/>
+            <a:ext cx="4209137" cy="2875110"/>
           </a:xfrm>
-        </p:grpSpPr>
-        <p:pic>
-          <p:nvPicPr>
-            <p:cNvPr id="10" name="Picture 9" descr="image.png"/>
-            <p:cNvPicPr>
-              <a:picLocks noChangeAspect="1"/>
-            </p:cNvPicPr>
-            <p:nvPr/>
-          </p:nvPicPr>
-          <p:blipFill>
-            <a:blip r:embed="rId3"/>
-            <a:stretch>
-              <a:fillRect/>
-            </a:stretch>
-          </p:blipFill>
-          <p:spPr>
-            <a:xfrm>
-              <a:off x="1424174" y="3429001"/>
-              <a:ext cx="4209137" cy="2875110"/>
-            </a:xfrm>
-            <a:prstGeom prst="rect">
-              <a:avLst/>
-            </a:prstGeom>
-          </p:spPr>
-        </p:pic>
-        <p:pic>
-          <p:nvPicPr>
-            <p:cNvPr id="11" name="Picture 10" descr="image.png"/>
-            <p:cNvPicPr>
-              <a:picLocks noChangeAspect="1"/>
-            </p:cNvPicPr>
-            <p:nvPr/>
-          </p:nvPicPr>
-          <p:blipFill>
-            <a:blip r:embed="rId4"/>
-            <a:stretch>
-              <a:fillRect/>
-            </a:stretch>
-          </p:blipFill>
-          <p:spPr>
-            <a:xfrm>
-              <a:off x="5649554" y="3429000"/>
-              <a:ext cx="4209137" cy="2875110"/>
-            </a:xfrm>
-            <a:prstGeom prst="rect">
-              <a:avLst/>
-            </a:prstGeom>
-          </p:spPr>
-        </p:pic>
-      </p:grpSp>
+          <a:prstGeom prst="rect">
+            <a:avLst/>
+          </a:prstGeom>
+        </p:spPr>
+      </p:pic>
     </p:spTree>
     <p:extLst>
       <p:ext uri="{BB962C8B-B14F-4D97-AF65-F5344CB8AC3E}">
         <p14:creationId xmlns:p14="http://schemas.microsoft.com/office/powerpoint/2010/main" val="4040032724"/>
-      </p:ext>
-    </p:extLst>
-  </p:cSld>
-  <p:clrMapOvr>
-    <a:masterClrMapping/>
-  </p:clrMapOvr>
-</p:sld>
-</file>
-
-<file path=ppt/slides/slide7.xml><?xml version="1.0" encoding="utf-8"?>
-<p:sld xmlns:a="http://schemas.openxmlformats.org/drawingml/2006/main" xmlns:r="http://schemas.openxmlformats.org/officeDocument/2006/relationships" xmlns:p="http://schemas.openxmlformats.org/presentationml/2006/main">
-  <p:cSld>
-    <p:spTree>
-      <p:nvGrpSpPr>
-        <p:cNvPr id="1" name="">
-          <a:extLst>
-            <a:ext uri="{FF2B5EF4-FFF2-40B4-BE49-F238E27FC236}">
-              <a16:creationId xmlns:a16="http://schemas.microsoft.com/office/drawing/2014/main" id="{E5E235E1-990A-B61D-C2FB-0E5F237ECDDF}"/>
-            </a:ext>
-          </a:extLst>
-        </p:cNvPr>
-        <p:cNvGrpSpPr/>
-        <p:nvPr/>
-      </p:nvGrpSpPr>
-      <p:grpSpPr>
-        <a:xfrm>
-          <a:off x="0" y="0"/>
-          <a:ext cx="0" cy="0"/>
-          <a:chOff x="0" y="0"/>
-          <a:chExt cx="0" cy="0"/>
-        </a:xfrm>
-      </p:grpSpPr>
-      <p:sp>
-        <p:nvSpPr>
-          <p:cNvPr id="2" name="Title 1">
-            <a:extLst>
-              <a:ext uri="{FF2B5EF4-FFF2-40B4-BE49-F238E27FC236}">
-                <a16:creationId xmlns:a16="http://schemas.microsoft.com/office/drawing/2014/main" id="{0845B1E2-F9E7-3B5D-A7E2-C46DA9E961BE}"/>
-              </a:ext>
-            </a:extLst>
-          </p:cNvPr>
-          <p:cNvSpPr>
-            <a:spLocks noGrp="1"/>
-          </p:cNvSpPr>
-          <p:nvPr>
-            <p:ph type="title"/>
-          </p:nvPr>
-        </p:nvSpPr>
-        <p:spPr/>
-        <p:txBody>
-          <a:bodyPr/>
-          <a:lstStyle/>
-          <a:p>
-            <a:r>
-              <a:rPr lang="en-US" altLang="ko-KR" dirty="0"/>
-              <a:t>Detailed progress</a:t>
-            </a:r>
-            <a:endParaRPr dirty="0"/>
-          </a:p>
-        </p:txBody>
-      </p:sp>
-      <p:sp>
-        <p:nvSpPr>
-          <p:cNvPr id="3" name="Content Placeholder 2">
-            <a:extLst>
-              <a:ext uri="{FF2B5EF4-FFF2-40B4-BE49-F238E27FC236}">
-                <a16:creationId xmlns:a16="http://schemas.microsoft.com/office/drawing/2014/main" id="{A66672E8-387A-B761-2D48-323AA293B225}"/>
-              </a:ext>
-            </a:extLst>
-          </p:cNvPr>
-          <p:cNvSpPr>
-            <a:spLocks noGrp="1"/>
-          </p:cNvSpPr>
-          <p:nvPr>
-            <p:ph idx="1"/>
-          </p:nvPr>
-        </p:nvSpPr>
-        <p:spPr/>
-        <p:txBody>
-          <a:bodyPr>
-            <a:normAutofit/>
-          </a:bodyPr>
-          <a:lstStyle/>
-          <a:p>
-            <a:pPr>
-              <a:lnSpc>
-                <a:spcPct val="150000"/>
-              </a:lnSpc>
-            </a:pPr>
-            <a:r>
-              <a:rPr lang="ko-KR" altLang="en-US" b="1" dirty="0"/>
-              <a:t>그룹 간 </a:t>
-            </a:r>
-            <a:r>
-              <a:rPr lang="en-US" altLang="ko-KR" b="1" dirty="0"/>
-              <a:t>p / </a:t>
-            </a:r>
-            <a:r>
-              <a:rPr lang="en-US" altLang="ko-KR" b="1" dirty="0" err="1"/>
-              <a:t>dp</a:t>
-            </a:r>
-            <a:r>
-              <a:rPr lang="ko-KR" altLang="en-US" b="1" dirty="0"/>
-              <a:t> </a:t>
-            </a:r>
-            <a:r>
-              <a:rPr lang="en-US" altLang="ko-KR" b="1" dirty="0"/>
-              <a:t>/ d2p </a:t>
-            </a:r>
-            <a:r>
-              <a:rPr lang="ko-KR" altLang="en-US" b="1" dirty="0"/>
-              <a:t>곡선 비교</a:t>
-            </a:r>
-            <a:endParaRPr b="1" dirty="0"/>
-          </a:p>
-        </p:txBody>
-      </p:sp>
-      <p:graphicFrame>
-        <p:nvGraphicFramePr>
-          <p:cNvPr id="4" name="표 3">
-            <a:extLst>
-              <a:ext uri="{FF2B5EF4-FFF2-40B4-BE49-F238E27FC236}">
-                <a16:creationId xmlns:a16="http://schemas.microsoft.com/office/drawing/2014/main" id="{6EA819FF-824A-52D4-3A7F-A3DF216AF6CF}"/>
-              </a:ext>
-            </a:extLst>
-          </p:cNvPr>
-          <p:cNvGraphicFramePr>
-            <a:graphicFrameLocks noGrp="1"/>
-          </p:cNvGraphicFramePr>
-          <p:nvPr>
-            <p:extLst>
-              <p:ext uri="{D42A27DB-BD31-4B8C-83A1-F6EECF244321}">
-                <p14:modId xmlns:p14="http://schemas.microsoft.com/office/powerpoint/2010/main" val="3788254965"/>
-              </p:ext>
-            </p:extLst>
-          </p:nvPr>
-        </p:nvGraphicFramePr>
-        <p:xfrm>
-          <a:off x="1312092" y="1574800"/>
-          <a:ext cx="9567816" cy="1854200"/>
-        </p:xfrm>
-        <a:graphic>
-          <a:graphicData uri="http://schemas.openxmlformats.org/drawingml/2006/table">
-            <a:tbl>
-              <a:tblPr firstRow="1" bandRow="1">
-                <a:tableStyleId>{9D7B26C5-4107-4FEC-AEDC-1716B250A1EF}</a:tableStyleId>
-              </a:tblPr>
-              <a:tblGrid>
-                <a:gridCol w="2391954">
-                  <a:extLst>
-                    <a:ext uri="{9D8B030D-6E8A-4147-A177-3AD203B41FA5}">
-                      <a16:colId xmlns:a16="http://schemas.microsoft.com/office/drawing/2014/main" val="380248596"/>
-                    </a:ext>
-                  </a:extLst>
-                </a:gridCol>
-                <a:gridCol w="2391954">
-                  <a:extLst>
-                    <a:ext uri="{9D8B030D-6E8A-4147-A177-3AD203B41FA5}">
-                      <a16:colId xmlns:a16="http://schemas.microsoft.com/office/drawing/2014/main" val="2374354257"/>
-                    </a:ext>
-                  </a:extLst>
-                </a:gridCol>
-                <a:gridCol w="2391954">
-                  <a:extLst>
-                    <a:ext uri="{9D8B030D-6E8A-4147-A177-3AD203B41FA5}">
-                      <a16:colId xmlns:a16="http://schemas.microsoft.com/office/drawing/2014/main" val="983427934"/>
-                    </a:ext>
-                  </a:extLst>
-                </a:gridCol>
-                <a:gridCol w="2391954">
-                  <a:extLst>
-                    <a:ext uri="{9D8B030D-6E8A-4147-A177-3AD203B41FA5}">
-                      <a16:colId xmlns:a16="http://schemas.microsoft.com/office/drawing/2014/main" val="13888355"/>
-                    </a:ext>
-                  </a:extLst>
-                </a:gridCol>
-              </a:tblGrid>
-              <a:tr h="370840">
-                <a:tc>
-                  <a:txBody>
-                    <a:bodyPr/>
-                    <a:lstStyle/>
-                    <a:p>
-                      <a:pPr algn="ctr" latinLnBrk="1"/>
-                      <a:r>
-                        <a:rPr lang="ko-KR" altLang="en-US" sz="1200" b="0" dirty="0">
-                          <a:solidFill>
-                            <a:schemeClr val="tx1"/>
-                          </a:solidFill>
-                          <a:latin typeface="KoPub돋움체 Bold" panose="00000800000000000000" pitchFamily="2" charset="-127"/>
-                          <a:ea typeface="KoPub돋움체 Bold" panose="00000800000000000000" pitchFamily="2" charset="-127"/>
-                        </a:rPr>
-                        <a:t>비교 </a:t>
-                      </a:r>
-                      <a:r>
-                        <a:rPr lang="en-US" altLang="ko-KR" sz="1200" b="0" dirty="0">
-                          <a:solidFill>
-                            <a:schemeClr val="tx1"/>
-                          </a:solidFill>
-                          <a:latin typeface="KoPub돋움체 Bold" panose="00000800000000000000" pitchFamily="2" charset="-127"/>
-                          <a:ea typeface="KoPub돋움체 Bold" panose="00000800000000000000" pitchFamily="2" charset="-127"/>
-                        </a:rPr>
-                        <a:t>(</a:t>
-                      </a:r>
-                      <a:r>
-                        <a:rPr lang="ko-KR" altLang="en-US" sz="1200" b="0" dirty="0">
-                          <a:solidFill>
-                            <a:schemeClr val="tx1"/>
-                          </a:solidFill>
-                          <a:latin typeface="KoPub돋움체 Bold" panose="00000800000000000000" pitchFamily="2" charset="-127"/>
-                          <a:ea typeface="KoPub돋움체 Bold" panose="00000800000000000000" pitchFamily="2" charset="-127"/>
-                        </a:rPr>
-                        <a:t>강남</a:t>
-                      </a:r>
-                      <a:r>
-                        <a:rPr lang="en-US" altLang="ko-KR" sz="1200" b="0" dirty="0">
-                          <a:solidFill>
-                            <a:schemeClr val="tx1"/>
-                          </a:solidFill>
-                          <a:latin typeface="KoPub돋움체 Bold" panose="00000800000000000000" pitchFamily="2" charset="-127"/>
-                          <a:ea typeface="KoPub돋움체 Bold" panose="00000800000000000000" pitchFamily="2" charset="-127"/>
-                        </a:rPr>
-                        <a:t>)</a:t>
-                      </a:r>
-                      <a:endParaRPr lang="ko-KR" altLang="en-US" sz="1200" b="0" dirty="0">
-                        <a:solidFill>
-                          <a:schemeClr val="tx1"/>
-                        </a:solidFill>
-                        <a:latin typeface="KoPub돋움체 Bold" panose="00000800000000000000" pitchFamily="2" charset="-127"/>
-                        <a:ea typeface="KoPub돋움체 Bold" panose="00000800000000000000" pitchFamily="2" charset="-127"/>
-                      </a:endParaRPr>
-                    </a:p>
-                  </a:txBody>
-                  <a:tcPr anchor="ctr"/>
-                </a:tc>
-                <a:tc>
-                  <a:txBody>
-                    <a:bodyPr/>
-                    <a:lstStyle/>
-                    <a:p>
-                      <a:pPr algn="ctr" latinLnBrk="1"/>
-                      <a:r>
-                        <a:rPr lang="en-US" altLang="ko-KR" sz="1200" b="0" dirty="0">
-                          <a:solidFill>
-                            <a:schemeClr val="tx1"/>
-                          </a:solidFill>
-                          <a:latin typeface="KoPub돋움체 Bold" panose="00000800000000000000" pitchFamily="2" charset="-127"/>
-                          <a:ea typeface="KoPub돋움체 Bold" panose="00000800000000000000" pitchFamily="2" charset="-127"/>
-                        </a:rPr>
-                        <a:t>p (raw)</a:t>
-                      </a:r>
-                      <a:endParaRPr lang="ko-KR" altLang="en-US" sz="1200" b="0" dirty="0">
-                        <a:solidFill>
-                          <a:schemeClr val="tx1"/>
-                        </a:solidFill>
-                        <a:latin typeface="KoPub돋움체 Bold" panose="00000800000000000000" pitchFamily="2" charset="-127"/>
-                        <a:ea typeface="KoPub돋움체 Bold" panose="00000800000000000000" pitchFamily="2" charset="-127"/>
-                      </a:endParaRPr>
-                    </a:p>
-                  </a:txBody>
-                  <a:tcPr anchor="ctr"/>
-                </a:tc>
-                <a:tc>
-                  <a:txBody>
-                    <a:bodyPr/>
-                    <a:lstStyle/>
-                    <a:p>
-                      <a:pPr algn="ctr" latinLnBrk="1"/>
-                      <a:r>
-                        <a:rPr lang="en-US" altLang="ko-KR" sz="1200" b="0" dirty="0" err="1">
-                          <a:solidFill>
-                            <a:schemeClr val="tx1"/>
-                          </a:solidFill>
-                          <a:latin typeface="KoPub돋움체 Bold" panose="00000800000000000000" pitchFamily="2" charset="-127"/>
-                          <a:ea typeface="KoPub돋움체 Bold" panose="00000800000000000000" pitchFamily="2" charset="-127"/>
-                        </a:rPr>
-                        <a:t>dp</a:t>
-                      </a:r>
-                      <a:r>
-                        <a:rPr lang="en-US" altLang="ko-KR" sz="1200" b="0" dirty="0">
-                          <a:solidFill>
-                            <a:schemeClr val="tx1"/>
-                          </a:solidFill>
-                          <a:latin typeface="KoPub돋움체 Bold" panose="00000800000000000000" pitchFamily="2" charset="-127"/>
-                          <a:ea typeface="KoPub돋움체 Bold" panose="00000800000000000000" pitchFamily="2" charset="-127"/>
-                        </a:rPr>
-                        <a:t> (1</a:t>
-                      </a:r>
-                      <a:r>
-                        <a:rPr lang="ko-KR" altLang="en-US" sz="1200" b="0" dirty="0" err="1">
-                          <a:solidFill>
-                            <a:schemeClr val="tx1"/>
-                          </a:solidFill>
-                          <a:latin typeface="KoPub돋움체 Bold" panose="00000800000000000000" pitchFamily="2" charset="-127"/>
-                          <a:ea typeface="KoPub돋움체 Bold" panose="00000800000000000000" pitchFamily="2" charset="-127"/>
-                        </a:rPr>
-                        <a:t>차미분</a:t>
-                      </a:r>
-                      <a:r>
-                        <a:rPr lang="en-US" altLang="ko-KR" sz="1200" b="0" dirty="0">
-                          <a:solidFill>
-                            <a:schemeClr val="tx1"/>
-                          </a:solidFill>
-                          <a:latin typeface="KoPub돋움체 Bold" panose="00000800000000000000" pitchFamily="2" charset="-127"/>
-                          <a:ea typeface="KoPub돋움체 Bold" panose="00000800000000000000" pitchFamily="2" charset="-127"/>
-                        </a:rPr>
-                        <a:t>)</a:t>
-                      </a:r>
-                      <a:endParaRPr lang="ko-KR" altLang="en-US" sz="1200" b="0" dirty="0">
-                        <a:solidFill>
-                          <a:schemeClr val="tx1"/>
-                        </a:solidFill>
-                        <a:latin typeface="KoPub돋움체 Bold" panose="00000800000000000000" pitchFamily="2" charset="-127"/>
-                        <a:ea typeface="KoPub돋움체 Bold" panose="00000800000000000000" pitchFamily="2" charset="-127"/>
-                      </a:endParaRPr>
-                    </a:p>
-                  </a:txBody>
-                  <a:tcPr anchor="ctr"/>
-                </a:tc>
-                <a:tc>
-                  <a:txBody>
-                    <a:bodyPr/>
-                    <a:lstStyle/>
-                    <a:p>
-                      <a:pPr algn="ctr" latinLnBrk="1"/>
-                      <a:r>
-                        <a:rPr lang="en-US" altLang="ko-KR" sz="1200" b="0" dirty="0">
-                          <a:solidFill>
-                            <a:schemeClr val="tx1"/>
-                          </a:solidFill>
-                          <a:latin typeface="KoPub돋움체 Bold" panose="00000800000000000000" pitchFamily="2" charset="-127"/>
-                          <a:ea typeface="KoPub돋움체 Bold" panose="00000800000000000000" pitchFamily="2" charset="-127"/>
-                        </a:rPr>
-                        <a:t>d2p (2</a:t>
-                      </a:r>
-                      <a:r>
-                        <a:rPr lang="ko-KR" altLang="en-US" sz="1200" b="0" dirty="0" err="1">
-                          <a:solidFill>
-                            <a:schemeClr val="tx1"/>
-                          </a:solidFill>
-                          <a:latin typeface="KoPub돋움체 Bold" panose="00000800000000000000" pitchFamily="2" charset="-127"/>
-                          <a:ea typeface="KoPub돋움체 Bold" panose="00000800000000000000" pitchFamily="2" charset="-127"/>
-                        </a:rPr>
-                        <a:t>차미분</a:t>
-                      </a:r>
-                      <a:r>
-                        <a:rPr lang="en-US" altLang="ko-KR" sz="1200" b="0" dirty="0">
-                          <a:solidFill>
-                            <a:schemeClr val="tx1"/>
-                          </a:solidFill>
-                          <a:latin typeface="KoPub돋움체 Bold" panose="00000800000000000000" pitchFamily="2" charset="-127"/>
-                          <a:ea typeface="KoPub돋움체 Bold" panose="00000800000000000000" pitchFamily="2" charset="-127"/>
-                        </a:rPr>
-                        <a:t>)</a:t>
-                      </a:r>
-                      <a:endParaRPr lang="ko-KR" altLang="en-US" sz="1200" b="0" dirty="0">
-                        <a:solidFill>
-                          <a:schemeClr val="tx1"/>
-                        </a:solidFill>
-                        <a:latin typeface="KoPub돋움체 Bold" panose="00000800000000000000" pitchFamily="2" charset="-127"/>
-                        <a:ea typeface="KoPub돋움체 Bold" panose="00000800000000000000" pitchFamily="2" charset="-127"/>
-                      </a:endParaRPr>
-                    </a:p>
-                  </a:txBody>
-                  <a:tcPr anchor="ctr"/>
-                </a:tc>
-                <a:extLst>
-                  <a:ext uri="{0D108BD9-81ED-4DB2-BD59-A6C34878D82A}">
-                    <a16:rowId xmlns:a16="http://schemas.microsoft.com/office/drawing/2014/main" val="1992821599"/>
-                  </a:ext>
-                </a:extLst>
-              </a:tr>
-              <a:tr h="370840">
-                <a:tc>
-                  <a:txBody>
-                    <a:bodyPr/>
-                    <a:lstStyle/>
-                    <a:p>
-                      <a:pPr algn="ctr" latinLnBrk="1"/>
-                      <a:r>
-                        <a:rPr lang="ko-KR" altLang="ko-KR" sz="1200" b="0" i="0" kern="1200" dirty="0">
-                          <a:solidFill>
-                            <a:schemeClr val="tx1"/>
-                          </a:solidFill>
-                          <a:effectLst/>
-                          <a:latin typeface="KoPub돋움체 Medium" panose="00000600000000000000" pitchFamily="2" charset="-127"/>
-                          <a:ea typeface="KoPub돋움체 Medium" panose="00000600000000000000" pitchFamily="2" charset="-127"/>
-                          <a:cs typeface="+mn-cs"/>
-                        </a:rPr>
-                        <a:t>FP </a:t>
-                      </a:r>
-                      <a:r>
-                        <a:rPr lang="ko-KR" altLang="ko-KR" sz="1200" b="0" i="0" kern="1200" dirty="0" err="1">
-                          <a:solidFill>
-                            <a:schemeClr val="tx1"/>
-                          </a:solidFill>
-                          <a:effectLst/>
-                          <a:latin typeface="KoPub돋움체 Medium" panose="00000600000000000000" pitchFamily="2" charset="-127"/>
-                          <a:ea typeface="KoPub돋움체 Medium" panose="00000600000000000000" pitchFamily="2" charset="-127"/>
-                          <a:cs typeface="+mn-cs"/>
-                        </a:rPr>
-                        <a:t>vs</a:t>
-                      </a:r>
-                      <a:r>
-                        <a:rPr lang="ko-KR" altLang="ko-KR" sz="1200" b="0" i="0" kern="1200" dirty="0">
-                          <a:solidFill>
-                            <a:schemeClr val="tx1"/>
-                          </a:solidFill>
-                          <a:effectLst/>
-                          <a:latin typeface="KoPub돋움체 Medium" panose="00000600000000000000" pitchFamily="2" charset="-127"/>
-                          <a:ea typeface="KoPub돋움체 Medium" panose="00000600000000000000" pitchFamily="2" charset="-127"/>
-                          <a:cs typeface="+mn-cs"/>
-                        </a:rPr>
-                        <a:t> TN</a:t>
-                      </a:r>
-                      <a:endParaRPr lang="ko-KR" altLang="en-US" sz="1200" dirty="0">
-                        <a:solidFill>
-                          <a:schemeClr val="tx1"/>
-                        </a:solidFill>
-                        <a:latin typeface="KoPub돋움체 Medium" panose="00000600000000000000" pitchFamily="2" charset="-127"/>
-                        <a:ea typeface="KoPub돋움체 Medium" panose="00000600000000000000" pitchFamily="2" charset="-127"/>
-                      </a:endParaRPr>
-                    </a:p>
-                  </a:txBody>
-                  <a:tcPr anchor="ctr">
-                    <a:solidFill>
-                      <a:schemeClr val="bg1"/>
-                    </a:solidFill>
-                  </a:tcPr>
-                </a:tc>
-                <a:tc>
-                  <a:txBody>
-                    <a:bodyPr/>
-                    <a:lstStyle/>
-                    <a:p>
-                      <a:pPr algn="l">
-                        <a:buNone/>
-                      </a:pPr>
-                      <a:r>
-                        <a:rPr lang="ko-KR" sz="1200" b="0" i="0" dirty="0">
-                          <a:solidFill>
-                            <a:schemeClr val="tx1"/>
-                          </a:solidFill>
-                          <a:effectLst/>
-                          <a:latin typeface="KoPub돋움체 Medium" panose="00000600000000000000" pitchFamily="2" charset="-127"/>
-                          <a:ea typeface="KoPub돋움체 Medium" panose="00000600000000000000" pitchFamily="2" charset="-127"/>
-                        </a:rPr>
-                        <a:t>RMSD=0.0287, </a:t>
-                      </a:r>
-                      <a:r>
-                        <a:rPr lang="ko-KR" sz="1200" b="0" i="0" dirty="0" err="1">
-                          <a:solidFill>
-                            <a:schemeClr val="tx1"/>
-                          </a:solidFill>
-                          <a:effectLst/>
-                          <a:latin typeface="KoPub돋움체 Medium" panose="00000600000000000000" pitchFamily="2" charset="-127"/>
-                          <a:ea typeface="KoPub돋움체 Medium" panose="00000600000000000000" pitchFamily="2" charset="-127"/>
-                        </a:rPr>
-                        <a:t>p</a:t>
-                      </a:r>
-                      <a:r>
-                        <a:rPr lang="ko-KR" sz="1200" b="0" i="0" dirty="0">
-                          <a:solidFill>
-                            <a:schemeClr val="tx1"/>
-                          </a:solidFill>
-                          <a:effectLst/>
-                          <a:latin typeface="KoPub돋움체 Medium" panose="00000600000000000000" pitchFamily="2" charset="-127"/>
-                          <a:ea typeface="KoPub돋움체 Medium" panose="00000600000000000000" pitchFamily="2" charset="-127"/>
-                        </a:rPr>
-                        <a:t>=0.0005</a:t>
-                      </a:r>
-                    </a:p>
-                  </a:txBody>
-                  <a:tcPr marL="19050" marR="19050" marT="19050" marB="19050" anchor="ctr">
-                    <a:solidFill>
-                      <a:schemeClr val="bg1"/>
-                    </a:solidFill>
-                  </a:tcPr>
-                </a:tc>
-                <a:tc>
-                  <a:txBody>
-                    <a:bodyPr/>
-                    <a:lstStyle/>
-                    <a:p>
-                      <a:pPr algn="l">
-                        <a:buNone/>
-                      </a:pPr>
-                      <a:r>
-                        <a:rPr lang="ko-KR" sz="1200" b="0" i="0">
-                          <a:solidFill>
-                            <a:schemeClr val="tx1"/>
-                          </a:solidFill>
-                          <a:effectLst/>
-                          <a:latin typeface="KoPub돋움체 Medium" panose="00000600000000000000" pitchFamily="2" charset="-127"/>
-                          <a:ea typeface="KoPub돋움체 Medium" panose="00000600000000000000" pitchFamily="2" charset="-127"/>
-                        </a:rPr>
-                        <a:t>RMSD=0.0021, p=0.0005</a:t>
-                      </a:r>
-                    </a:p>
-                  </a:txBody>
-                  <a:tcPr marL="19050" marR="19050" marT="19050" marB="19050" anchor="ctr">
-                    <a:solidFill>
-                      <a:schemeClr val="bg1"/>
-                    </a:solidFill>
-                  </a:tcPr>
-                </a:tc>
-                <a:tc>
-                  <a:txBody>
-                    <a:bodyPr/>
-                    <a:lstStyle/>
-                    <a:p>
-                      <a:pPr algn="l">
-                        <a:buNone/>
-                      </a:pPr>
-                      <a:r>
-                        <a:rPr lang="ko-KR" sz="1200" b="0" i="0" dirty="0">
-                          <a:solidFill>
-                            <a:schemeClr val="tx1"/>
-                          </a:solidFill>
-                          <a:effectLst/>
-                          <a:latin typeface="KoPub돋움체 Medium" panose="00000600000000000000" pitchFamily="2" charset="-127"/>
-                          <a:ea typeface="KoPub돋움체 Medium" panose="00000600000000000000" pitchFamily="2" charset="-127"/>
-                        </a:rPr>
-                        <a:t>RMSD=0.0004, </a:t>
-                      </a:r>
-                      <a:r>
-                        <a:rPr lang="ko-KR" sz="1200" b="0" i="0" dirty="0" err="1">
-                          <a:solidFill>
-                            <a:schemeClr val="tx1"/>
-                          </a:solidFill>
-                          <a:effectLst/>
-                          <a:latin typeface="KoPub돋움체 Medium" panose="00000600000000000000" pitchFamily="2" charset="-127"/>
-                          <a:ea typeface="KoPub돋움체 Medium" panose="00000600000000000000" pitchFamily="2" charset="-127"/>
-                        </a:rPr>
-                        <a:t>p</a:t>
-                      </a:r>
-                      <a:r>
-                        <a:rPr lang="ko-KR" sz="1200" b="0" i="0" dirty="0">
-                          <a:solidFill>
-                            <a:schemeClr val="tx1"/>
-                          </a:solidFill>
-                          <a:effectLst/>
-                          <a:latin typeface="KoPub돋움체 Medium" panose="00000600000000000000" pitchFamily="2" charset="-127"/>
-                          <a:ea typeface="KoPub돋움체 Medium" panose="00000600000000000000" pitchFamily="2" charset="-127"/>
-                        </a:rPr>
-                        <a:t>=0.0005</a:t>
-                      </a:r>
-                    </a:p>
-                  </a:txBody>
-                  <a:tcPr marL="19050" marR="19050" marT="19050" marB="19050" anchor="ctr">
-                    <a:solidFill>
-                      <a:schemeClr val="bg1"/>
-                    </a:solidFill>
-                  </a:tcPr>
-                </a:tc>
-                <a:extLst>
-                  <a:ext uri="{0D108BD9-81ED-4DB2-BD59-A6C34878D82A}">
-                    <a16:rowId xmlns:a16="http://schemas.microsoft.com/office/drawing/2014/main" val="3290363448"/>
-                  </a:ext>
-                </a:extLst>
-              </a:tr>
-              <a:tr h="370840">
-                <a:tc>
-                  <a:txBody>
-                    <a:bodyPr/>
-                    <a:lstStyle/>
-                    <a:p>
-                      <a:pPr algn="ctr" latinLnBrk="1"/>
-                      <a:r>
-                        <a:rPr lang="ko-KR" altLang="ko-KR" sz="1200" b="0" i="0" kern="1200" dirty="0">
-                          <a:solidFill>
-                            <a:schemeClr val="tx1"/>
-                          </a:solidFill>
-                          <a:effectLst/>
-                          <a:latin typeface="KoPub돋움체 Medium" panose="00000600000000000000" pitchFamily="2" charset="-127"/>
-                          <a:ea typeface="KoPub돋움체 Medium" panose="00000600000000000000" pitchFamily="2" charset="-127"/>
-                          <a:cs typeface="+mn-cs"/>
-                        </a:rPr>
-                        <a:t>TP </a:t>
-                      </a:r>
-                      <a:r>
-                        <a:rPr lang="ko-KR" altLang="ko-KR" sz="1200" b="0" i="0" kern="1200" dirty="0" err="1">
-                          <a:solidFill>
-                            <a:schemeClr val="tx1"/>
-                          </a:solidFill>
-                          <a:effectLst/>
-                          <a:latin typeface="KoPub돋움체 Medium" panose="00000600000000000000" pitchFamily="2" charset="-127"/>
-                          <a:ea typeface="KoPub돋움체 Medium" panose="00000600000000000000" pitchFamily="2" charset="-127"/>
-                          <a:cs typeface="+mn-cs"/>
-                        </a:rPr>
-                        <a:t>vs</a:t>
-                      </a:r>
-                      <a:r>
-                        <a:rPr lang="ko-KR" altLang="ko-KR" sz="1200" b="0" i="0" kern="1200" dirty="0">
-                          <a:solidFill>
-                            <a:schemeClr val="tx1"/>
-                          </a:solidFill>
-                          <a:effectLst/>
-                          <a:latin typeface="KoPub돋움체 Medium" panose="00000600000000000000" pitchFamily="2" charset="-127"/>
-                          <a:ea typeface="KoPub돋움체 Medium" panose="00000600000000000000" pitchFamily="2" charset="-127"/>
-                          <a:cs typeface="+mn-cs"/>
-                        </a:rPr>
-                        <a:t> TN</a:t>
-                      </a:r>
-                      <a:endParaRPr lang="ko-KR" altLang="en-US" sz="1200" dirty="0">
-                        <a:solidFill>
-                          <a:schemeClr val="tx1"/>
-                        </a:solidFill>
-                        <a:latin typeface="KoPub돋움체 Medium" panose="00000600000000000000" pitchFamily="2" charset="-127"/>
-                        <a:ea typeface="KoPub돋움체 Medium" panose="00000600000000000000" pitchFamily="2" charset="-127"/>
-                      </a:endParaRPr>
-                    </a:p>
-                  </a:txBody>
-                  <a:tcPr anchor="ctr">
-                    <a:lnB w="28575" cap="flat" cmpd="sng" algn="ctr">
-                      <a:solidFill>
-                        <a:srgbClr val="FF0000"/>
-                      </a:solidFill>
-                      <a:prstDash val="solid"/>
-                      <a:round/>
-                      <a:headEnd type="none" w="med" len="med"/>
-                      <a:tailEnd type="none" w="med" len="med"/>
-                    </a:lnB>
-                    <a:solidFill>
-                      <a:schemeClr val="bg1"/>
-                    </a:solidFill>
-                  </a:tcPr>
-                </a:tc>
-                <a:tc>
-                  <a:txBody>
-                    <a:bodyPr/>
-                    <a:lstStyle/>
-                    <a:p>
-                      <a:pPr algn="l">
-                        <a:buNone/>
-                      </a:pPr>
-                      <a:r>
-                        <a:rPr lang="ko-KR" sz="1200" b="0" i="0" dirty="0">
-                          <a:solidFill>
-                            <a:schemeClr val="tx1"/>
-                          </a:solidFill>
-                          <a:effectLst/>
-                          <a:latin typeface="KoPub돋움체 Medium" panose="00000600000000000000" pitchFamily="2" charset="-127"/>
-                          <a:ea typeface="KoPub돋움체 Medium" panose="00000600000000000000" pitchFamily="2" charset="-127"/>
-                        </a:rPr>
-                        <a:t>RMSD=0.0325, </a:t>
-                      </a:r>
-                      <a:r>
-                        <a:rPr lang="ko-KR" sz="1200" b="0" i="0" dirty="0" err="1">
-                          <a:solidFill>
-                            <a:schemeClr val="tx1"/>
-                          </a:solidFill>
-                          <a:effectLst/>
-                          <a:latin typeface="KoPub돋움체 Medium" panose="00000600000000000000" pitchFamily="2" charset="-127"/>
-                          <a:ea typeface="KoPub돋움체 Medium" panose="00000600000000000000" pitchFamily="2" charset="-127"/>
-                        </a:rPr>
-                        <a:t>p</a:t>
-                      </a:r>
-                      <a:r>
-                        <a:rPr lang="ko-KR" sz="1200" b="0" i="0" dirty="0">
-                          <a:solidFill>
-                            <a:schemeClr val="tx1"/>
-                          </a:solidFill>
-                          <a:effectLst/>
-                          <a:latin typeface="KoPub돋움체 Medium" panose="00000600000000000000" pitchFamily="2" charset="-127"/>
-                          <a:ea typeface="KoPub돋움체 Medium" panose="00000600000000000000" pitchFamily="2" charset="-127"/>
-                        </a:rPr>
-                        <a:t>=0.002</a:t>
-                      </a:r>
-                    </a:p>
-                  </a:txBody>
-                  <a:tcPr marL="19050" marR="19050" marT="19050" marB="19050" anchor="ctr">
-                    <a:lnB w="28575" cap="flat" cmpd="sng" algn="ctr">
-                      <a:solidFill>
-                        <a:srgbClr val="FF0000"/>
-                      </a:solidFill>
-                      <a:prstDash val="solid"/>
-                      <a:round/>
-                      <a:headEnd type="none" w="med" len="med"/>
-                      <a:tailEnd type="none" w="med" len="med"/>
-                    </a:lnB>
-                    <a:solidFill>
-                      <a:schemeClr val="bg1"/>
-                    </a:solidFill>
-                  </a:tcPr>
-                </a:tc>
-                <a:tc>
-                  <a:txBody>
-                    <a:bodyPr/>
-                    <a:lstStyle/>
-                    <a:p>
-                      <a:pPr algn="l">
-                        <a:buNone/>
-                      </a:pPr>
-                      <a:r>
-                        <a:rPr lang="ko-KR" sz="1200" b="0" i="0">
-                          <a:solidFill>
-                            <a:schemeClr val="tx1"/>
-                          </a:solidFill>
-                          <a:effectLst/>
-                          <a:latin typeface="KoPub돋움체 Medium" panose="00000600000000000000" pitchFamily="2" charset="-127"/>
-                          <a:ea typeface="KoPub돋움체 Medium" panose="00000600000000000000" pitchFamily="2" charset="-127"/>
-                        </a:rPr>
-                        <a:t>RMSD=0.0026, p=0.0005</a:t>
-                      </a:r>
-                    </a:p>
-                  </a:txBody>
-                  <a:tcPr marL="19050" marR="19050" marT="19050" marB="19050" anchor="ctr">
-                    <a:lnB w="28575" cap="flat" cmpd="sng" algn="ctr">
-                      <a:solidFill>
-                        <a:srgbClr val="FF0000"/>
-                      </a:solidFill>
-                      <a:prstDash val="solid"/>
-                      <a:round/>
-                      <a:headEnd type="none" w="med" len="med"/>
-                      <a:tailEnd type="none" w="med" len="med"/>
-                    </a:lnB>
-                    <a:solidFill>
-                      <a:schemeClr val="bg1"/>
-                    </a:solidFill>
-                  </a:tcPr>
-                </a:tc>
-                <a:tc>
-                  <a:txBody>
-                    <a:bodyPr/>
-                    <a:lstStyle/>
-                    <a:p>
-                      <a:pPr algn="l">
-                        <a:buNone/>
-                      </a:pPr>
-                      <a:r>
-                        <a:rPr lang="ko-KR" sz="1200" b="0" i="0" dirty="0">
-                          <a:solidFill>
-                            <a:schemeClr val="tx1"/>
-                          </a:solidFill>
-                          <a:effectLst/>
-                          <a:latin typeface="KoPub돋움체 Medium" panose="00000600000000000000" pitchFamily="2" charset="-127"/>
-                          <a:ea typeface="KoPub돋움체 Medium" panose="00000600000000000000" pitchFamily="2" charset="-127"/>
-                        </a:rPr>
-                        <a:t>RMSD=0.0006, </a:t>
-                      </a:r>
-                      <a:r>
-                        <a:rPr lang="ko-KR" sz="1200" b="0" i="0" dirty="0" err="1">
-                          <a:solidFill>
-                            <a:schemeClr val="tx1"/>
-                          </a:solidFill>
-                          <a:effectLst/>
-                          <a:latin typeface="KoPub돋움체 Medium" panose="00000600000000000000" pitchFamily="2" charset="-127"/>
-                          <a:ea typeface="KoPub돋움체 Medium" panose="00000600000000000000" pitchFamily="2" charset="-127"/>
-                        </a:rPr>
-                        <a:t>p</a:t>
-                      </a:r>
-                      <a:r>
-                        <a:rPr lang="ko-KR" sz="1200" b="0" i="0" dirty="0">
-                          <a:solidFill>
-                            <a:schemeClr val="tx1"/>
-                          </a:solidFill>
-                          <a:effectLst/>
-                          <a:latin typeface="KoPub돋움체 Medium" panose="00000600000000000000" pitchFamily="2" charset="-127"/>
-                          <a:ea typeface="KoPub돋움체 Medium" panose="00000600000000000000" pitchFamily="2" charset="-127"/>
-                        </a:rPr>
-                        <a:t>=0.0005</a:t>
-                      </a:r>
-                    </a:p>
-                  </a:txBody>
-                  <a:tcPr marL="19050" marR="19050" marT="19050" marB="19050" anchor="ctr">
-                    <a:lnB w="28575" cap="flat" cmpd="sng" algn="ctr">
-                      <a:solidFill>
-                        <a:srgbClr val="FF0000"/>
-                      </a:solidFill>
-                      <a:prstDash val="solid"/>
-                      <a:round/>
-                      <a:headEnd type="none" w="med" len="med"/>
-                      <a:tailEnd type="none" w="med" len="med"/>
-                    </a:lnB>
-                    <a:solidFill>
-                      <a:schemeClr val="bg1"/>
-                    </a:solidFill>
-                  </a:tcPr>
-                </a:tc>
-                <a:extLst>
-                  <a:ext uri="{0D108BD9-81ED-4DB2-BD59-A6C34878D82A}">
-                    <a16:rowId xmlns:a16="http://schemas.microsoft.com/office/drawing/2014/main" val="4189124397"/>
-                  </a:ext>
-                </a:extLst>
-              </a:tr>
-              <a:tr h="370840">
-                <a:tc>
-                  <a:txBody>
-                    <a:bodyPr/>
-                    <a:lstStyle/>
-                    <a:p>
-                      <a:pPr algn="ctr" latinLnBrk="1"/>
-                      <a:r>
-                        <a:rPr lang="ko-KR" altLang="ko-KR" sz="1200" b="0" i="0" kern="1200" dirty="0">
-                          <a:solidFill>
-                            <a:schemeClr val="tx1"/>
-                          </a:solidFill>
-                          <a:effectLst/>
-                          <a:latin typeface="KoPub돋움체 Medium" panose="00000600000000000000" pitchFamily="2" charset="-127"/>
-                          <a:ea typeface="KoPub돋움체 Medium" panose="00000600000000000000" pitchFamily="2" charset="-127"/>
-                          <a:cs typeface="+mn-cs"/>
-                        </a:rPr>
-                        <a:t>TP </a:t>
-                      </a:r>
-                      <a:r>
-                        <a:rPr lang="ko-KR" altLang="ko-KR" sz="1200" b="0" i="0" kern="1200" dirty="0" err="1">
-                          <a:solidFill>
-                            <a:schemeClr val="tx1"/>
-                          </a:solidFill>
-                          <a:effectLst/>
-                          <a:latin typeface="KoPub돋움체 Medium" panose="00000600000000000000" pitchFamily="2" charset="-127"/>
-                          <a:ea typeface="KoPub돋움체 Medium" panose="00000600000000000000" pitchFamily="2" charset="-127"/>
-                          <a:cs typeface="+mn-cs"/>
-                        </a:rPr>
-                        <a:t>vs</a:t>
-                      </a:r>
-                      <a:r>
-                        <a:rPr lang="ko-KR" altLang="ko-KR" sz="1200" b="0" i="0" kern="1200" dirty="0">
-                          <a:solidFill>
-                            <a:schemeClr val="tx1"/>
-                          </a:solidFill>
-                          <a:effectLst/>
-                          <a:latin typeface="KoPub돋움체 Medium" panose="00000600000000000000" pitchFamily="2" charset="-127"/>
-                          <a:ea typeface="KoPub돋움체 Medium" panose="00000600000000000000" pitchFamily="2" charset="-127"/>
-                          <a:cs typeface="+mn-cs"/>
-                        </a:rPr>
-                        <a:t> FP</a:t>
-                      </a:r>
-                      <a:endParaRPr lang="ko-KR" altLang="en-US" sz="1200" dirty="0">
-                        <a:solidFill>
-                          <a:schemeClr val="tx1"/>
-                        </a:solidFill>
-                        <a:latin typeface="KoPub돋움체 Medium" panose="00000600000000000000" pitchFamily="2" charset="-127"/>
-                        <a:ea typeface="KoPub돋움체 Medium" panose="00000600000000000000" pitchFamily="2" charset="-127"/>
-                      </a:endParaRPr>
-                    </a:p>
-                  </a:txBody>
-                  <a:tcPr anchor="ctr">
-                    <a:lnL w="28575" cap="flat" cmpd="sng" algn="ctr">
-                      <a:solidFill>
-                        <a:srgbClr val="FF0000"/>
-                      </a:solidFill>
-                      <a:prstDash val="solid"/>
-                      <a:round/>
-                      <a:headEnd type="none" w="med" len="med"/>
-                      <a:tailEnd type="none" w="med" len="med"/>
-                    </a:lnL>
-                    <a:lnT w="28575" cap="flat" cmpd="sng" algn="ctr">
-                      <a:solidFill>
-                        <a:srgbClr val="FF0000"/>
-                      </a:solidFill>
-                      <a:prstDash val="solid"/>
-                      <a:round/>
-                      <a:headEnd type="none" w="med" len="med"/>
-                      <a:tailEnd type="none" w="med" len="med"/>
-                    </a:lnT>
-                    <a:solidFill>
-                      <a:schemeClr val="bg1"/>
-                    </a:solidFill>
-                  </a:tcPr>
-                </a:tc>
-                <a:tc>
-                  <a:txBody>
-                    <a:bodyPr/>
-                    <a:lstStyle/>
-                    <a:p>
-                      <a:pPr algn="l">
-                        <a:buNone/>
-                      </a:pPr>
-                      <a:r>
-                        <a:rPr lang="ko-KR" sz="1200" b="0" i="0" dirty="0">
-                          <a:solidFill>
-                            <a:schemeClr val="tx1"/>
-                          </a:solidFill>
-                          <a:effectLst/>
-                          <a:latin typeface="KoPub돋움체 Medium" panose="00000600000000000000" pitchFamily="2" charset="-127"/>
-                          <a:ea typeface="KoPub돋움체 Medium" panose="00000600000000000000" pitchFamily="2" charset="-127"/>
-                        </a:rPr>
-                        <a:t>RMSD=0.0155, </a:t>
-                      </a:r>
-                      <a:r>
-                        <a:rPr lang="ko-KR" sz="1200" b="0" i="0" dirty="0" err="1">
-                          <a:solidFill>
-                            <a:schemeClr val="tx1"/>
-                          </a:solidFill>
-                          <a:effectLst/>
-                          <a:latin typeface="KoPub돋움체 Medium" panose="00000600000000000000" pitchFamily="2" charset="-127"/>
-                          <a:ea typeface="KoPub돋움체 Medium" panose="00000600000000000000" pitchFamily="2" charset="-127"/>
-                        </a:rPr>
-                        <a:t>p</a:t>
-                      </a:r>
-                      <a:r>
-                        <a:rPr lang="ko-KR" sz="1200" b="0" i="0" dirty="0">
-                          <a:solidFill>
-                            <a:schemeClr val="tx1"/>
-                          </a:solidFill>
-                          <a:effectLst/>
-                          <a:latin typeface="KoPub돋움체 Medium" panose="00000600000000000000" pitchFamily="2" charset="-127"/>
-                          <a:ea typeface="KoPub돋움체 Medium" panose="00000600000000000000" pitchFamily="2" charset="-127"/>
-                        </a:rPr>
-                        <a:t>=0.227 (</a:t>
-                      </a:r>
-                      <a:r>
-                        <a:rPr lang="ko-KR" sz="1200" b="0" i="0" dirty="0" err="1">
-                          <a:solidFill>
-                            <a:schemeClr val="tx1"/>
-                          </a:solidFill>
-                          <a:effectLst/>
-                          <a:latin typeface="KoPub돋움체 Medium" panose="00000600000000000000" pitchFamily="2" charset="-127"/>
-                          <a:ea typeface="KoPub돋움체 Medium" panose="00000600000000000000" pitchFamily="2" charset="-127"/>
-                        </a:rPr>
-                        <a:t>n.s</a:t>
-                      </a:r>
-                      <a:r>
-                        <a:rPr lang="ko-KR" sz="1200" b="0" i="0" dirty="0">
-                          <a:solidFill>
-                            <a:schemeClr val="tx1"/>
-                          </a:solidFill>
-                          <a:effectLst/>
-                          <a:latin typeface="KoPub돋움체 Medium" panose="00000600000000000000" pitchFamily="2" charset="-127"/>
-                          <a:ea typeface="KoPub돋움체 Medium" panose="00000600000000000000" pitchFamily="2" charset="-127"/>
-                        </a:rPr>
-                        <a:t>.)</a:t>
-                      </a:r>
-                    </a:p>
-                  </a:txBody>
-                  <a:tcPr marL="19050" marR="19050" marT="19050" marB="19050" anchor="ctr">
-                    <a:lnT w="28575" cap="flat" cmpd="sng" algn="ctr">
-                      <a:solidFill>
-                        <a:srgbClr val="FF0000"/>
-                      </a:solidFill>
-                      <a:prstDash val="solid"/>
-                      <a:round/>
-                      <a:headEnd type="none" w="med" len="med"/>
-                      <a:tailEnd type="none" w="med" len="med"/>
-                    </a:lnT>
-                    <a:solidFill>
-                      <a:schemeClr val="bg1"/>
-                    </a:solidFill>
-                  </a:tcPr>
-                </a:tc>
-                <a:tc>
-                  <a:txBody>
-                    <a:bodyPr/>
-                    <a:lstStyle/>
-                    <a:p>
-                      <a:pPr algn="l">
-                        <a:buNone/>
-                      </a:pPr>
-                      <a:r>
-                        <a:rPr lang="ko-KR" sz="1200" b="0" i="0" dirty="0">
-                          <a:solidFill>
-                            <a:schemeClr val="tx1"/>
-                          </a:solidFill>
-                          <a:effectLst/>
-                          <a:latin typeface="KoPub돋움체 Medium" panose="00000600000000000000" pitchFamily="2" charset="-127"/>
-                          <a:ea typeface="KoPub돋움체 Medium" panose="00000600000000000000" pitchFamily="2" charset="-127"/>
-                        </a:rPr>
-                        <a:t>RMSD=0.0012, </a:t>
-                      </a:r>
-                      <a:r>
-                        <a:rPr lang="ko-KR" sz="1200" b="0" i="0" dirty="0" err="1">
-                          <a:solidFill>
-                            <a:schemeClr val="tx1"/>
-                          </a:solidFill>
-                          <a:effectLst/>
-                          <a:latin typeface="KoPub돋움체 Medium" panose="00000600000000000000" pitchFamily="2" charset="-127"/>
-                          <a:ea typeface="KoPub돋움체 Medium" panose="00000600000000000000" pitchFamily="2" charset="-127"/>
-                        </a:rPr>
-                        <a:t>p</a:t>
-                      </a:r>
-                      <a:r>
-                        <a:rPr lang="ko-KR" sz="1200" b="0" i="0" dirty="0">
-                          <a:solidFill>
-                            <a:schemeClr val="tx1"/>
-                          </a:solidFill>
-                          <a:effectLst/>
-                          <a:latin typeface="KoPub돋움체 Medium" panose="00000600000000000000" pitchFamily="2" charset="-127"/>
-                          <a:ea typeface="KoPub돋움체 Medium" panose="00000600000000000000" pitchFamily="2" charset="-127"/>
-                        </a:rPr>
-                        <a:t>=0.155 (</a:t>
-                      </a:r>
-                      <a:r>
-                        <a:rPr lang="ko-KR" sz="1200" b="0" i="0" dirty="0" err="1">
-                          <a:solidFill>
-                            <a:schemeClr val="tx1"/>
-                          </a:solidFill>
-                          <a:effectLst/>
-                          <a:latin typeface="KoPub돋움체 Medium" panose="00000600000000000000" pitchFamily="2" charset="-127"/>
-                          <a:ea typeface="KoPub돋움체 Medium" panose="00000600000000000000" pitchFamily="2" charset="-127"/>
-                        </a:rPr>
-                        <a:t>n.s</a:t>
-                      </a:r>
-                      <a:r>
-                        <a:rPr lang="ko-KR" sz="1200" b="0" i="0" dirty="0">
-                          <a:solidFill>
-                            <a:schemeClr val="tx1"/>
-                          </a:solidFill>
-                          <a:effectLst/>
-                          <a:latin typeface="KoPub돋움체 Medium" panose="00000600000000000000" pitchFamily="2" charset="-127"/>
-                          <a:ea typeface="KoPub돋움체 Medium" panose="00000600000000000000" pitchFamily="2" charset="-127"/>
-                        </a:rPr>
-                        <a:t>.)</a:t>
-                      </a:r>
-                    </a:p>
-                  </a:txBody>
-                  <a:tcPr marL="19050" marR="19050" marT="19050" marB="19050" anchor="ctr">
-                    <a:lnT w="28575" cap="flat" cmpd="sng" algn="ctr">
-                      <a:solidFill>
-                        <a:srgbClr val="FF0000"/>
-                      </a:solidFill>
-                      <a:prstDash val="solid"/>
-                      <a:round/>
-                      <a:headEnd type="none" w="med" len="med"/>
-                      <a:tailEnd type="none" w="med" len="med"/>
-                    </a:lnT>
-                    <a:solidFill>
-                      <a:schemeClr val="bg1"/>
-                    </a:solidFill>
-                  </a:tcPr>
-                </a:tc>
-                <a:tc>
-                  <a:txBody>
-                    <a:bodyPr/>
-                    <a:lstStyle/>
-                    <a:p>
-                      <a:pPr algn="l">
-                        <a:buNone/>
-                      </a:pPr>
-                      <a:r>
-                        <a:rPr lang="ko-KR" sz="1200" b="0" i="0" dirty="0">
-                          <a:solidFill>
-                            <a:schemeClr val="tx1"/>
-                          </a:solidFill>
-                          <a:effectLst/>
-                          <a:latin typeface="KoPub돋움체 Medium" panose="00000600000000000000" pitchFamily="2" charset="-127"/>
-                          <a:ea typeface="KoPub돋움체 Medium" panose="00000600000000000000" pitchFamily="2" charset="-127"/>
-                        </a:rPr>
-                        <a:t>RMSD=0.0005, </a:t>
-                      </a:r>
-                      <a:r>
-                        <a:rPr lang="ko-KR" sz="1200" b="0" i="0" dirty="0" err="1">
-                          <a:solidFill>
-                            <a:schemeClr val="tx1"/>
-                          </a:solidFill>
-                          <a:effectLst/>
-                          <a:latin typeface="KoPub돋움체 Medium" panose="00000600000000000000" pitchFamily="2" charset="-127"/>
-                          <a:ea typeface="KoPub돋움체 Medium" panose="00000600000000000000" pitchFamily="2" charset="-127"/>
-                        </a:rPr>
-                        <a:t>p</a:t>
-                      </a:r>
-                      <a:r>
-                        <a:rPr lang="ko-KR" sz="1200" b="0" i="0" dirty="0">
-                          <a:solidFill>
-                            <a:schemeClr val="tx1"/>
-                          </a:solidFill>
-                          <a:effectLst/>
-                          <a:latin typeface="KoPub돋움체 Medium" panose="00000600000000000000" pitchFamily="2" charset="-127"/>
-                          <a:ea typeface="KoPub돋움체 Medium" panose="00000600000000000000" pitchFamily="2" charset="-127"/>
-                        </a:rPr>
-                        <a:t>=0.199 (</a:t>
-                      </a:r>
-                      <a:r>
-                        <a:rPr lang="ko-KR" sz="1200" b="0" i="0" dirty="0" err="1">
-                          <a:solidFill>
-                            <a:schemeClr val="tx1"/>
-                          </a:solidFill>
-                          <a:effectLst/>
-                          <a:latin typeface="KoPub돋움체 Medium" panose="00000600000000000000" pitchFamily="2" charset="-127"/>
-                          <a:ea typeface="KoPub돋움체 Medium" panose="00000600000000000000" pitchFamily="2" charset="-127"/>
-                        </a:rPr>
-                        <a:t>n.s</a:t>
-                      </a:r>
-                      <a:r>
-                        <a:rPr lang="ko-KR" sz="1200" b="0" i="0" dirty="0">
-                          <a:solidFill>
-                            <a:schemeClr val="tx1"/>
-                          </a:solidFill>
-                          <a:effectLst/>
-                          <a:latin typeface="KoPub돋움체 Medium" panose="00000600000000000000" pitchFamily="2" charset="-127"/>
-                          <a:ea typeface="KoPub돋움체 Medium" panose="00000600000000000000" pitchFamily="2" charset="-127"/>
-                        </a:rPr>
-                        <a:t>.)</a:t>
-                      </a:r>
-                    </a:p>
-                  </a:txBody>
-                  <a:tcPr marL="19050" marR="19050" marT="19050" marB="19050" anchor="ctr">
-                    <a:lnR w="28575" cap="flat" cmpd="sng" algn="ctr">
-                      <a:solidFill>
-                        <a:srgbClr val="FF0000"/>
-                      </a:solidFill>
-                      <a:prstDash val="solid"/>
-                      <a:round/>
-                      <a:headEnd type="none" w="med" len="med"/>
-                      <a:tailEnd type="none" w="med" len="med"/>
-                    </a:lnR>
-                    <a:lnT w="28575" cap="flat" cmpd="sng" algn="ctr">
-                      <a:solidFill>
-                        <a:srgbClr val="FF0000"/>
-                      </a:solidFill>
-                      <a:prstDash val="solid"/>
-                      <a:round/>
-                      <a:headEnd type="none" w="med" len="med"/>
-                      <a:tailEnd type="none" w="med" len="med"/>
-                    </a:lnT>
-                    <a:solidFill>
-                      <a:schemeClr val="bg1"/>
-                    </a:solidFill>
-                  </a:tcPr>
-                </a:tc>
-                <a:extLst>
-                  <a:ext uri="{0D108BD9-81ED-4DB2-BD59-A6C34878D82A}">
-                    <a16:rowId xmlns:a16="http://schemas.microsoft.com/office/drawing/2014/main" val="1968725908"/>
-                  </a:ext>
-                </a:extLst>
-              </a:tr>
-              <a:tr h="370840">
-                <a:tc>
-                  <a:txBody>
-                    <a:bodyPr/>
-                    <a:lstStyle/>
-                    <a:p>
-                      <a:pPr algn="ctr" latinLnBrk="1"/>
-                      <a:r>
-                        <a:rPr lang="ko-KR" altLang="ko-KR" sz="1200" b="0" i="0" kern="1200" dirty="0">
-                          <a:solidFill>
-                            <a:schemeClr val="tx1"/>
-                          </a:solidFill>
-                          <a:effectLst/>
-                          <a:latin typeface="KoPub돋움체 Medium" panose="00000600000000000000" pitchFamily="2" charset="-127"/>
-                          <a:ea typeface="KoPub돋움체 Medium" panose="00000600000000000000" pitchFamily="2" charset="-127"/>
-                          <a:cs typeface="+mn-cs"/>
-                        </a:rPr>
-                        <a:t>TP </a:t>
-                      </a:r>
-                      <a:r>
-                        <a:rPr lang="ko-KR" altLang="ko-KR" sz="1200" b="0" i="0" kern="1200" dirty="0" err="1">
-                          <a:solidFill>
-                            <a:schemeClr val="tx1"/>
-                          </a:solidFill>
-                          <a:effectLst/>
-                          <a:latin typeface="KoPub돋움체 Medium" panose="00000600000000000000" pitchFamily="2" charset="-127"/>
-                          <a:ea typeface="KoPub돋움체 Medium" panose="00000600000000000000" pitchFamily="2" charset="-127"/>
-                          <a:cs typeface="+mn-cs"/>
-                        </a:rPr>
-                        <a:t>vs</a:t>
-                      </a:r>
-                      <a:r>
-                        <a:rPr lang="ko-KR" altLang="ko-KR" sz="1200" b="0" i="0" kern="1200" dirty="0">
-                          <a:solidFill>
-                            <a:schemeClr val="tx1"/>
-                          </a:solidFill>
-                          <a:effectLst/>
-                          <a:latin typeface="KoPub돋움체 Medium" panose="00000600000000000000" pitchFamily="2" charset="-127"/>
-                          <a:ea typeface="KoPub돋움체 Medium" panose="00000600000000000000" pitchFamily="2" charset="-127"/>
-                          <a:cs typeface="+mn-cs"/>
-                        </a:rPr>
-                        <a:t> FP (</a:t>
-                      </a:r>
-                      <a:r>
-                        <a:rPr lang="en-US" altLang="ko-KR" sz="1200" b="0" i="0" kern="1200" dirty="0" err="1">
-                          <a:solidFill>
-                            <a:schemeClr val="tx1"/>
-                          </a:solidFill>
-                          <a:effectLst/>
-                          <a:latin typeface="KoPub돋움체 Medium" panose="00000600000000000000" pitchFamily="2" charset="-127"/>
-                          <a:ea typeface="KoPub돋움체 Medium" panose="00000600000000000000" pitchFamily="2" charset="-127"/>
-                          <a:cs typeface="+mn-cs"/>
-                        </a:rPr>
-                        <a:t>psm</a:t>
-                      </a:r>
-                      <a:r>
-                        <a:rPr lang="ko-KR" altLang="ko-KR" sz="1200" b="0" i="0" kern="1200" dirty="0">
-                          <a:solidFill>
-                            <a:schemeClr val="tx1"/>
-                          </a:solidFill>
-                          <a:effectLst/>
-                          <a:latin typeface="KoPub돋움체 Medium" panose="00000600000000000000" pitchFamily="2" charset="-127"/>
-                          <a:ea typeface="KoPub돋움체 Medium" panose="00000600000000000000" pitchFamily="2" charset="-127"/>
-                          <a:cs typeface="+mn-cs"/>
-                        </a:rPr>
-                        <a:t>)</a:t>
-                      </a:r>
-                      <a:endParaRPr lang="ko-KR" altLang="en-US" sz="1200" dirty="0">
-                        <a:solidFill>
-                          <a:schemeClr val="tx1"/>
-                        </a:solidFill>
-                        <a:latin typeface="KoPub돋움체 Medium" panose="00000600000000000000" pitchFamily="2" charset="-127"/>
-                        <a:ea typeface="KoPub돋움체 Medium" panose="00000600000000000000" pitchFamily="2" charset="-127"/>
-                      </a:endParaRPr>
-                    </a:p>
-                  </a:txBody>
-                  <a:tcPr anchor="ctr">
-                    <a:lnL w="28575" cap="flat" cmpd="sng" algn="ctr">
-                      <a:solidFill>
-                        <a:srgbClr val="FF0000"/>
-                      </a:solidFill>
-                      <a:prstDash val="solid"/>
-                      <a:round/>
-                      <a:headEnd type="none" w="med" len="med"/>
-                      <a:tailEnd type="none" w="med" len="med"/>
-                    </a:lnL>
-                    <a:lnB w="28575" cap="flat" cmpd="sng" algn="ctr">
-                      <a:solidFill>
-                        <a:srgbClr val="FF0000"/>
-                      </a:solidFill>
-                      <a:prstDash val="solid"/>
-                      <a:round/>
-                      <a:headEnd type="none" w="med" len="med"/>
-                      <a:tailEnd type="none" w="med" len="med"/>
-                    </a:lnB>
-                    <a:solidFill>
-                      <a:schemeClr val="bg1"/>
-                    </a:solidFill>
-                  </a:tcPr>
-                </a:tc>
-                <a:tc>
-                  <a:txBody>
-                    <a:bodyPr/>
-                    <a:lstStyle/>
-                    <a:p>
-                      <a:pPr algn="l">
-                        <a:buNone/>
-                      </a:pPr>
-                      <a:r>
-                        <a:rPr lang="ko-KR" sz="1200" b="0" i="0" dirty="0">
-                          <a:solidFill>
-                            <a:schemeClr val="tx1"/>
-                          </a:solidFill>
-                          <a:effectLst/>
-                          <a:latin typeface="KoPub돋움체 Medium" panose="00000600000000000000" pitchFamily="2" charset="-127"/>
-                          <a:ea typeface="KoPub돋움체 Medium" panose="00000600000000000000" pitchFamily="2" charset="-127"/>
-                        </a:rPr>
-                        <a:t>RMSD=0.0057, </a:t>
-                      </a:r>
-                      <a:r>
-                        <a:rPr lang="ko-KR" sz="1200" b="0" i="0" dirty="0" err="1">
-                          <a:solidFill>
-                            <a:schemeClr val="tx1"/>
-                          </a:solidFill>
-                          <a:effectLst/>
-                          <a:latin typeface="KoPub돋움체 Medium" panose="00000600000000000000" pitchFamily="2" charset="-127"/>
-                          <a:ea typeface="KoPub돋움체 Medium" panose="00000600000000000000" pitchFamily="2" charset="-127"/>
-                        </a:rPr>
-                        <a:t>p</a:t>
-                      </a:r>
-                      <a:r>
-                        <a:rPr lang="ko-KR" sz="1200" b="0" i="0" dirty="0">
-                          <a:solidFill>
-                            <a:schemeClr val="tx1"/>
-                          </a:solidFill>
-                          <a:effectLst/>
-                          <a:latin typeface="KoPub돋움체 Medium" panose="00000600000000000000" pitchFamily="2" charset="-127"/>
-                          <a:ea typeface="KoPub돋움체 Medium" panose="00000600000000000000" pitchFamily="2" charset="-127"/>
-                        </a:rPr>
-                        <a:t>=0.983 (</a:t>
-                      </a:r>
-                      <a:r>
-                        <a:rPr lang="ko-KR" sz="1200" b="0" i="0" dirty="0" err="1">
-                          <a:solidFill>
-                            <a:schemeClr val="tx1"/>
-                          </a:solidFill>
-                          <a:effectLst/>
-                          <a:latin typeface="KoPub돋움체 Medium" panose="00000600000000000000" pitchFamily="2" charset="-127"/>
-                          <a:ea typeface="KoPub돋움체 Medium" panose="00000600000000000000" pitchFamily="2" charset="-127"/>
-                        </a:rPr>
-                        <a:t>n.s</a:t>
-                      </a:r>
-                      <a:r>
-                        <a:rPr lang="ko-KR" sz="1200" b="0" i="0" dirty="0">
-                          <a:solidFill>
-                            <a:schemeClr val="tx1"/>
-                          </a:solidFill>
-                          <a:effectLst/>
-                          <a:latin typeface="KoPub돋움체 Medium" panose="00000600000000000000" pitchFamily="2" charset="-127"/>
-                          <a:ea typeface="KoPub돋움체 Medium" panose="00000600000000000000" pitchFamily="2" charset="-127"/>
-                        </a:rPr>
-                        <a:t>.)</a:t>
-                      </a:r>
-                    </a:p>
-                  </a:txBody>
-                  <a:tcPr marL="19050" marR="19050" marT="19050" marB="19050" anchor="ctr">
-                    <a:lnB w="28575" cap="flat" cmpd="sng" algn="ctr">
-                      <a:solidFill>
-                        <a:srgbClr val="FF0000"/>
-                      </a:solidFill>
-                      <a:prstDash val="solid"/>
-                      <a:round/>
-                      <a:headEnd type="none" w="med" len="med"/>
-                      <a:tailEnd type="none" w="med" len="med"/>
-                    </a:lnB>
-                    <a:solidFill>
-                      <a:schemeClr val="bg1"/>
-                    </a:solidFill>
-                  </a:tcPr>
-                </a:tc>
-                <a:tc>
-                  <a:txBody>
-                    <a:bodyPr/>
-                    <a:lstStyle/>
-                    <a:p>
-                      <a:pPr algn="l">
-                        <a:buNone/>
-                      </a:pPr>
-                      <a:r>
-                        <a:rPr lang="ko-KR" sz="1200" b="0" i="0" dirty="0">
-                          <a:solidFill>
-                            <a:schemeClr val="tx1"/>
-                          </a:solidFill>
-                          <a:effectLst/>
-                          <a:latin typeface="KoPub돋움체 Medium" panose="00000600000000000000" pitchFamily="2" charset="-127"/>
-                          <a:ea typeface="KoPub돋움체 Medium" panose="00000600000000000000" pitchFamily="2" charset="-127"/>
-                        </a:rPr>
-                        <a:t>RMSD=0.0009, </a:t>
-                      </a:r>
-                      <a:r>
-                        <a:rPr lang="ko-KR" sz="1200" b="0" i="0" dirty="0" err="1">
-                          <a:solidFill>
-                            <a:schemeClr val="tx1"/>
-                          </a:solidFill>
-                          <a:effectLst/>
-                          <a:latin typeface="KoPub돋움체 Medium" panose="00000600000000000000" pitchFamily="2" charset="-127"/>
-                          <a:ea typeface="KoPub돋움체 Medium" panose="00000600000000000000" pitchFamily="2" charset="-127"/>
-                        </a:rPr>
-                        <a:t>p</a:t>
-                      </a:r>
-                      <a:r>
-                        <a:rPr lang="ko-KR" sz="1200" b="0" i="0" dirty="0">
-                          <a:solidFill>
-                            <a:schemeClr val="tx1"/>
-                          </a:solidFill>
-                          <a:effectLst/>
-                          <a:latin typeface="KoPub돋움체 Medium" panose="00000600000000000000" pitchFamily="2" charset="-127"/>
-                          <a:ea typeface="KoPub돋움체 Medium" panose="00000600000000000000" pitchFamily="2" charset="-127"/>
-                        </a:rPr>
-                        <a:t>=0.982 (</a:t>
-                      </a:r>
-                      <a:r>
-                        <a:rPr lang="ko-KR" sz="1200" b="0" i="0" dirty="0" err="1">
-                          <a:solidFill>
-                            <a:schemeClr val="tx1"/>
-                          </a:solidFill>
-                          <a:effectLst/>
-                          <a:latin typeface="KoPub돋움체 Medium" panose="00000600000000000000" pitchFamily="2" charset="-127"/>
-                          <a:ea typeface="KoPub돋움체 Medium" panose="00000600000000000000" pitchFamily="2" charset="-127"/>
-                        </a:rPr>
-                        <a:t>n.s</a:t>
-                      </a:r>
-                      <a:r>
-                        <a:rPr lang="ko-KR" sz="1200" b="0" i="0" dirty="0">
-                          <a:solidFill>
-                            <a:schemeClr val="tx1"/>
-                          </a:solidFill>
-                          <a:effectLst/>
-                          <a:latin typeface="KoPub돋움체 Medium" panose="00000600000000000000" pitchFamily="2" charset="-127"/>
-                          <a:ea typeface="KoPub돋움체 Medium" panose="00000600000000000000" pitchFamily="2" charset="-127"/>
-                        </a:rPr>
-                        <a:t>.)</a:t>
-                      </a:r>
-                    </a:p>
-                  </a:txBody>
-                  <a:tcPr marL="19050" marR="19050" marT="19050" marB="19050" anchor="ctr">
-                    <a:lnB w="28575" cap="flat" cmpd="sng" algn="ctr">
-                      <a:solidFill>
-                        <a:srgbClr val="FF0000"/>
-                      </a:solidFill>
-                      <a:prstDash val="solid"/>
-                      <a:round/>
-                      <a:headEnd type="none" w="med" len="med"/>
-                      <a:tailEnd type="none" w="med" len="med"/>
-                    </a:lnB>
-                    <a:solidFill>
-                      <a:schemeClr val="bg1"/>
-                    </a:solidFill>
-                  </a:tcPr>
-                </a:tc>
-                <a:tc>
-                  <a:txBody>
-                    <a:bodyPr/>
-                    <a:lstStyle/>
-                    <a:p>
-                      <a:pPr algn="l">
-                        <a:buNone/>
-                      </a:pPr>
-                      <a:r>
-                        <a:rPr lang="ko-KR" sz="1200" b="0" i="0" dirty="0">
-                          <a:solidFill>
-                            <a:schemeClr val="tx1"/>
-                          </a:solidFill>
-                          <a:effectLst/>
-                          <a:latin typeface="KoPub돋움체 Medium" panose="00000600000000000000" pitchFamily="2" charset="-127"/>
-                          <a:ea typeface="KoPub돋움체 Medium" panose="00000600000000000000" pitchFamily="2" charset="-127"/>
-                        </a:rPr>
-                        <a:t>RMSD=0.0006, </a:t>
-                      </a:r>
-                      <a:r>
-                        <a:rPr lang="ko-KR" sz="1200" b="0" i="0" dirty="0" err="1">
-                          <a:solidFill>
-                            <a:schemeClr val="tx1"/>
-                          </a:solidFill>
-                          <a:effectLst/>
-                          <a:latin typeface="KoPub돋움체 Medium" panose="00000600000000000000" pitchFamily="2" charset="-127"/>
-                          <a:ea typeface="KoPub돋움체 Medium" panose="00000600000000000000" pitchFamily="2" charset="-127"/>
-                        </a:rPr>
-                        <a:t>p</a:t>
-                      </a:r>
-                      <a:r>
-                        <a:rPr lang="ko-KR" sz="1200" b="0" i="0" dirty="0">
-                          <a:solidFill>
-                            <a:schemeClr val="tx1"/>
-                          </a:solidFill>
-                          <a:effectLst/>
-                          <a:latin typeface="KoPub돋움체 Medium" panose="00000600000000000000" pitchFamily="2" charset="-127"/>
-                          <a:ea typeface="KoPub돋움체 Medium" panose="00000600000000000000" pitchFamily="2" charset="-127"/>
-                        </a:rPr>
-                        <a:t>=0.478 (</a:t>
-                      </a:r>
-                      <a:r>
-                        <a:rPr lang="ko-KR" sz="1200" b="0" i="0" dirty="0" err="1">
-                          <a:solidFill>
-                            <a:schemeClr val="tx1"/>
-                          </a:solidFill>
-                          <a:effectLst/>
-                          <a:latin typeface="KoPub돋움체 Medium" panose="00000600000000000000" pitchFamily="2" charset="-127"/>
-                          <a:ea typeface="KoPub돋움체 Medium" panose="00000600000000000000" pitchFamily="2" charset="-127"/>
-                        </a:rPr>
-                        <a:t>n.s</a:t>
-                      </a:r>
-                      <a:r>
-                        <a:rPr lang="ko-KR" sz="1200" b="0" i="0" dirty="0">
-                          <a:solidFill>
-                            <a:schemeClr val="tx1"/>
-                          </a:solidFill>
-                          <a:effectLst/>
-                          <a:latin typeface="KoPub돋움체 Medium" panose="00000600000000000000" pitchFamily="2" charset="-127"/>
-                          <a:ea typeface="KoPub돋움체 Medium" panose="00000600000000000000" pitchFamily="2" charset="-127"/>
-                        </a:rPr>
-                        <a:t>.)</a:t>
-                      </a:r>
-                    </a:p>
-                  </a:txBody>
-                  <a:tcPr marL="19050" marR="19050" marT="19050" marB="19050" anchor="ctr">
-                    <a:lnR w="28575" cap="flat" cmpd="sng" algn="ctr">
-                      <a:solidFill>
-                        <a:srgbClr val="FF0000"/>
-                      </a:solidFill>
-                      <a:prstDash val="solid"/>
-                      <a:round/>
-                      <a:headEnd type="none" w="med" len="med"/>
-                      <a:tailEnd type="none" w="med" len="med"/>
-                    </a:lnR>
-                    <a:lnB w="28575" cap="flat" cmpd="sng" algn="ctr">
-                      <a:solidFill>
-                        <a:srgbClr val="FF0000"/>
-                      </a:solidFill>
-                      <a:prstDash val="solid"/>
-                      <a:round/>
-                      <a:headEnd type="none" w="med" len="med"/>
-                      <a:tailEnd type="none" w="med" len="med"/>
-                    </a:lnB>
-                    <a:solidFill>
-                      <a:schemeClr val="bg1"/>
-                    </a:solidFill>
-                  </a:tcPr>
-                </a:tc>
-                <a:extLst>
-                  <a:ext uri="{0D108BD9-81ED-4DB2-BD59-A6C34878D82A}">
-                    <a16:rowId xmlns:a16="http://schemas.microsoft.com/office/drawing/2014/main" val="2054828031"/>
-                  </a:ext>
-                </a:extLst>
-              </a:tr>
-            </a:tbl>
-          </a:graphicData>
-        </a:graphic>
-      </p:graphicFrame>
-      <p:graphicFrame>
-        <p:nvGraphicFramePr>
-          <p:cNvPr id="6" name="표 5">
-            <a:extLst>
-              <a:ext uri="{FF2B5EF4-FFF2-40B4-BE49-F238E27FC236}">
-                <a16:creationId xmlns:a16="http://schemas.microsoft.com/office/drawing/2014/main" id="{093DC214-F213-AB61-FBB1-2D265A00B606}"/>
-              </a:ext>
-            </a:extLst>
-          </p:cNvPr>
-          <p:cNvGraphicFramePr>
-            <a:graphicFrameLocks noGrp="1"/>
-          </p:cNvGraphicFramePr>
-          <p:nvPr>
-            <p:extLst>
-              <p:ext uri="{D42A27DB-BD31-4B8C-83A1-F6EECF244321}">
-                <p14:modId xmlns:p14="http://schemas.microsoft.com/office/powerpoint/2010/main" val="3422349279"/>
-              </p:ext>
-            </p:extLst>
-          </p:nvPr>
-        </p:nvGraphicFramePr>
-        <p:xfrm>
-          <a:off x="1312092" y="3767667"/>
-          <a:ext cx="9567816" cy="1854200"/>
-        </p:xfrm>
-        <a:graphic>
-          <a:graphicData uri="http://schemas.openxmlformats.org/drawingml/2006/table">
-            <a:tbl>
-              <a:tblPr firstRow="1" bandRow="1">
-                <a:tableStyleId>{9D7B26C5-4107-4FEC-AEDC-1716B250A1EF}</a:tableStyleId>
-              </a:tblPr>
-              <a:tblGrid>
-                <a:gridCol w="2385989">
-                  <a:extLst>
-                    <a:ext uri="{9D8B030D-6E8A-4147-A177-3AD203B41FA5}">
-                      <a16:colId xmlns:a16="http://schemas.microsoft.com/office/drawing/2014/main" val="380248596"/>
-                    </a:ext>
-                  </a:extLst>
-                </a:gridCol>
-                <a:gridCol w="2385989">
-                  <a:extLst>
-                    <a:ext uri="{9D8B030D-6E8A-4147-A177-3AD203B41FA5}">
-                      <a16:colId xmlns:a16="http://schemas.microsoft.com/office/drawing/2014/main" val="2374354257"/>
-                    </a:ext>
-                  </a:extLst>
-                </a:gridCol>
-                <a:gridCol w="2385989">
-                  <a:extLst>
-                    <a:ext uri="{9D8B030D-6E8A-4147-A177-3AD203B41FA5}">
-                      <a16:colId xmlns:a16="http://schemas.microsoft.com/office/drawing/2014/main" val="983427934"/>
-                    </a:ext>
-                  </a:extLst>
-                </a:gridCol>
-                <a:gridCol w="2409849">
-                  <a:extLst>
-                    <a:ext uri="{9D8B030D-6E8A-4147-A177-3AD203B41FA5}">
-                      <a16:colId xmlns:a16="http://schemas.microsoft.com/office/drawing/2014/main" val="13888355"/>
-                    </a:ext>
-                  </a:extLst>
-                </a:gridCol>
-              </a:tblGrid>
-              <a:tr h="370840">
-                <a:tc>
-                  <a:txBody>
-                    <a:bodyPr/>
-                    <a:lstStyle/>
-                    <a:p>
-                      <a:pPr algn="ctr" latinLnBrk="1"/>
-                      <a:r>
-                        <a:rPr lang="ko-KR" altLang="en-US" sz="1200" b="0" dirty="0">
-                          <a:solidFill>
-                            <a:schemeClr val="tx1"/>
-                          </a:solidFill>
-                          <a:latin typeface="KoPub돋움체 Bold" panose="00000800000000000000" pitchFamily="2" charset="-127"/>
-                          <a:ea typeface="KoPub돋움체 Bold" panose="00000800000000000000" pitchFamily="2" charset="-127"/>
-                        </a:rPr>
-                        <a:t>비교 </a:t>
-                      </a:r>
-                      <a:r>
-                        <a:rPr lang="en-US" altLang="ko-KR" sz="1200" b="0" dirty="0">
-                          <a:solidFill>
-                            <a:schemeClr val="tx1"/>
-                          </a:solidFill>
-                          <a:latin typeface="KoPub돋움체 Bold" panose="00000800000000000000" pitchFamily="2" charset="-127"/>
-                          <a:ea typeface="KoPub돋움체 Bold" panose="00000800000000000000" pitchFamily="2" charset="-127"/>
-                        </a:rPr>
-                        <a:t>(</a:t>
-                      </a:r>
-                      <a:r>
-                        <a:rPr lang="ko-KR" altLang="en-US" sz="1200" b="0" dirty="0">
-                          <a:solidFill>
-                            <a:schemeClr val="tx1"/>
-                          </a:solidFill>
-                          <a:latin typeface="KoPub돋움체 Bold" panose="00000800000000000000" pitchFamily="2" charset="-127"/>
-                          <a:ea typeface="KoPub돋움체 Bold" panose="00000800000000000000" pitchFamily="2" charset="-127"/>
-                        </a:rPr>
-                        <a:t>신촌</a:t>
-                      </a:r>
-                      <a:r>
-                        <a:rPr lang="en-US" altLang="ko-KR" sz="1200" b="0" dirty="0">
-                          <a:solidFill>
-                            <a:schemeClr val="tx1"/>
-                          </a:solidFill>
-                          <a:latin typeface="KoPub돋움체 Bold" panose="00000800000000000000" pitchFamily="2" charset="-127"/>
-                          <a:ea typeface="KoPub돋움체 Bold" panose="00000800000000000000" pitchFamily="2" charset="-127"/>
-                        </a:rPr>
-                        <a:t>)</a:t>
-                      </a:r>
-                      <a:endParaRPr lang="ko-KR" altLang="en-US" sz="1200" b="0" dirty="0">
-                        <a:solidFill>
-                          <a:schemeClr val="tx1"/>
-                        </a:solidFill>
-                        <a:latin typeface="KoPub돋움체 Bold" panose="00000800000000000000" pitchFamily="2" charset="-127"/>
-                        <a:ea typeface="KoPub돋움체 Bold" panose="00000800000000000000" pitchFamily="2" charset="-127"/>
-                      </a:endParaRPr>
-                    </a:p>
-                  </a:txBody>
-                  <a:tcPr anchor="ctr"/>
-                </a:tc>
-                <a:tc>
-                  <a:txBody>
-                    <a:bodyPr/>
-                    <a:lstStyle/>
-                    <a:p>
-                      <a:pPr algn="ctr" latinLnBrk="1"/>
-                      <a:r>
-                        <a:rPr lang="en-US" altLang="ko-KR" sz="1200" b="0" dirty="0">
-                          <a:solidFill>
-                            <a:schemeClr val="tx1"/>
-                          </a:solidFill>
-                          <a:latin typeface="KoPub돋움체 Bold" panose="00000800000000000000" pitchFamily="2" charset="-127"/>
-                          <a:ea typeface="KoPub돋움체 Bold" panose="00000800000000000000" pitchFamily="2" charset="-127"/>
-                        </a:rPr>
-                        <a:t>p (raw)</a:t>
-                      </a:r>
-                      <a:endParaRPr lang="ko-KR" altLang="en-US" sz="1200" b="0" dirty="0">
-                        <a:solidFill>
-                          <a:schemeClr val="tx1"/>
-                        </a:solidFill>
-                        <a:latin typeface="KoPub돋움체 Bold" panose="00000800000000000000" pitchFamily="2" charset="-127"/>
-                        <a:ea typeface="KoPub돋움체 Bold" panose="00000800000000000000" pitchFamily="2" charset="-127"/>
-                      </a:endParaRPr>
-                    </a:p>
-                  </a:txBody>
-                  <a:tcPr anchor="ctr"/>
-                </a:tc>
-                <a:tc>
-                  <a:txBody>
-                    <a:bodyPr/>
-                    <a:lstStyle/>
-                    <a:p>
-                      <a:pPr algn="ctr" latinLnBrk="1"/>
-                      <a:r>
-                        <a:rPr lang="en-US" altLang="ko-KR" sz="1200" b="0" dirty="0" err="1">
-                          <a:solidFill>
-                            <a:schemeClr val="tx1"/>
-                          </a:solidFill>
-                          <a:latin typeface="KoPub돋움체 Bold" panose="00000800000000000000" pitchFamily="2" charset="-127"/>
-                          <a:ea typeface="KoPub돋움체 Bold" panose="00000800000000000000" pitchFamily="2" charset="-127"/>
-                        </a:rPr>
-                        <a:t>dp</a:t>
-                      </a:r>
-                      <a:r>
-                        <a:rPr lang="en-US" altLang="ko-KR" sz="1200" b="0" dirty="0">
-                          <a:solidFill>
-                            <a:schemeClr val="tx1"/>
-                          </a:solidFill>
-                          <a:latin typeface="KoPub돋움체 Bold" panose="00000800000000000000" pitchFamily="2" charset="-127"/>
-                          <a:ea typeface="KoPub돋움체 Bold" panose="00000800000000000000" pitchFamily="2" charset="-127"/>
-                        </a:rPr>
-                        <a:t> (1</a:t>
-                      </a:r>
-                      <a:r>
-                        <a:rPr lang="ko-KR" altLang="en-US" sz="1200" b="0" dirty="0" err="1">
-                          <a:solidFill>
-                            <a:schemeClr val="tx1"/>
-                          </a:solidFill>
-                          <a:latin typeface="KoPub돋움체 Bold" panose="00000800000000000000" pitchFamily="2" charset="-127"/>
-                          <a:ea typeface="KoPub돋움체 Bold" panose="00000800000000000000" pitchFamily="2" charset="-127"/>
-                        </a:rPr>
-                        <a:t>차미분</a:t>
-                      </a:r>
-                      <a:r>
-                        <a:rPr lang="en-US" altLang="ko-KR" sz="1200" b="0" dirty="0">
-                          <a:solidFill>
-                            <a:schemeClr val="tx1"/>
-                          </a:solidFill>
-                          <a:latin typeface="KoPub돋움체 Bold" panose="00000800000000000000" pitchFamily="2" charset="-127"/>
-                          <a:ea typeface="KoPub돋움체 Bold" panose="00000800000000000000" pitchFamily="2" charset="-127"/>
-                        </a:rPr>
-                        <a:t>)</a:t>
-                      </a:r>
-                      <a:endParaRPr lang="ko-KR" altLang="en-US" sz="1200" b="0" dirty="0">
-                        <a:solidFill>
-                          <a:schemeClr val="tx1"/>
-                        </a:solidFill>
-                        <a:latin typeface="KoPub돋움체 Bold" panose="00000800000000000000" pitchFamily="2" charset="-127"/>
-                        <a:ea typeface="KoPub돋움체 Bold" panose="00000800000000000000" pitchFamily="2" charset="-127"/>
-                      </a:endParaRPr>
-                    </a:p>
-                  </a:txBody>
-                  <a:tcPr anchor="ctr"/>
-                </a:tc>
-                <a:tc>
-                  <a:txBody>
-                    <a:bodyPr/>
-                    <a:lstStyle/>
-                    <a:p>
-                      <a:pPr algn="ctr" latinLnBrk="1"/>
-                      <a:r>
-                        <a:rPr lang="en-US" altLang="ko-KR" sz="1200" b="0" dirty="0">
-                          <a:solidFill>
-                            <a:schemeClr val="tx1"/>
-                          </a:solidFill>
-                          <a:latin typeface="KoPub돋움체 Bold" panose="00000800000000000000" pitchFamily="2" charset="-127"/>
-                          <a:ea typeface="KoPub돋움체 Bold" panose="00000800000000000000" pitchFamily="2" charset="-127"/>
-                        </a:rPr>
-                        <a:t>d2p (2</a:t>
-                      </a:r>
-                      <a:r>
-                        <a:rPr lang="ko-KR" altLang="en-US" sz="1200" b="0" dirty="0" err="1">
-                          <a:solidFill>
-                            <a:schemeClr val="tx1"/>
-                          </a:solidFill>
-                          <a:latin typeface="KoPub돋움체 Bold" panose="00000800000000000000" pitchFamily="2" charset="-127"/>
-                          <a:ea typeface="KoPub돋움체 Bold" panose="00000800000000000000" pitchFamily="2" charset="-127"/>
-                        </a:rPr>
-                        <a:t>차미분</a:t>
-                      </a:r>
-                      <a:r>
-                        <a:rPr lang="en-US" altLang="ko-KR" sz="1200" b="0" dirty="0">
-                          <a:solidFill>
-                            <a:schemeClr val="tx1"/>
-                          </a:solidFill>
-                          <a:latin typeface="KoPub돋움체 Bold" panose="00000800000000000000" pitchFamily="2" charset="-127"/>
-                          <a:ea typeface="KoPub돋움체 Bold" panose="00000800000000000000" pitchFamily="2" charset="-127"/>
-                        </a:rPr>
-                        <a:t>)</a:t>
-                      </a:r>
-                      <a:endParaRPr lang="ko-KR" altLang="en-US" sz="1200" b="0" dirty="0">
-                        <a:solidFill>
-                          <a:schemeClr val="tx1"/>
-                        </a:solidFill>
-                        <a:latin typeface="KoPub돋움체 Bold" panose="00000800000000000000" pitchFamily="2" charset="-127"/>
-                        <a:ea typeface="KoPub돋움체 Bold" panose="00000800000000000000" pitchFamily="2" charset="-127"/>
-                      </a:endParaRPr>
-                    </a:p>
-                  </a:txBody>
-                  <a:tcPr anchor="ctr"/>
-                </a:tc>
-                <a:extLst>
-                  <a:ext uri="{0D108BD9-81ED-4DB2-BD59-A6C34878D82A}">
-                    <a16:rowId xmlns:a16="http://schemas.microsoft.com/office/drawing/2014/main" val="1992821599"/>
-                  </a:ext>
-                </a:extLst>
-              </a:tr>
-              <a:tr h="370840">
-                <a:tc>
-                  <a:txBody>
-                    <a:bodyPr/>
-                    <a:lstStyle/>
-                    <a:p>
-                      <a:pPr algn="ctr" latinLnBrk="1"/>
-                      <a:r>
-                        <a:rPr lang="ko-KR" altLang="ko-KR" sz="1200" b="0" i="0" kern="1200" dirty="0">
-                          <a:solidFill>
-                            <a:schemeClr val="tx1"/>
-                          </a:solidFill>
-                          <a:effectLst/>
-                          <a:latin typeface="KoPub돋움체 Medium" panose="00000600000000000000" pitchFamily="2" charset="-127"/>
-                          <a:ea typeface="KoPub돋움체 Medium" panose="00000600000000000000" pitchFamily="2" charset="-127"/>
-                          <a:cs typeface="+mn-cs"/>
-                        </a:rPr>
-                        <a:t>FP </a:t>
-                      </a:r>
-                      <a:r>
-                        <a:rPr lang="ko-KR" altLang="ko-KR" sz="1200" b="0" i="0" kern="1200" dirty="0" err="1">
-                          <a:solidFill>
-                            <a:schemeClr val="tx1"/>
-                          </a:solidFill>
-                          <a:effectLst/>
-                          <a:latin typeface="KoPub돋움체 Medium" panose="00000600000000000000" pitchFamily="2" charset="-127"/>
-                          <a:ea typeface="KoPub돋움체 Medium" panose="00000600000000000000" pitchFamily="2" charset="-127"/>
-                          <a:cs typeface="+mn-cs"/>
-                        </a:rPr>
-                        <a:t>vs</a:t>
-                      </a:r>
-                      <a:r>
-                        <a:rPr lang="ko-KR" altLang="ko-KR" sz="1200" b="0" i="0" kern="1200" dirty="0">
-                          <a:solidFill>
-                            <a:schemeClr val="tx1"/>
-                          </a:solidFill>
-                          <a:effectLst/>
-                          <a:latin typeface="KoPub돋움체 Medium" panose="00000600000000000000" pitchFamily="2" charset="-127"/>
-                          <a:ea typeface="KoPub돋움체 Medium" panose="00000600000000000000" pitchFamily="2" charset="-127"/>
-                          <a:cs typeface="+mn-cs"/>
-                        </a:rPr>
-                        <a:t> TN</a:t>
-                      </a:r>
-                      <a:endParaRPr lang="ko-KR" altLang="en-US" sz="1200" dirty="0">
-                        <a:solidFill>
-                          <a:schemeClr val="tx1"/>
-                        </a:solidFill>
-                        <a:latin typeface="KoPub돋움체 Medium" panose="00000600000000000000" pitchFamily="2" charset="-127"/>
-                        <a:ea typeface="KoPub돋움체 Medium" panose="00000600000000000000" pitchFamily="2" charset="-127"/>
-                      </a:endParaRPr>
-                    </a:p>
-                  </a:txBody>
-                  <a:tcPr anchor="ctr">
-                    <a:solidFill>
-                      <a:schemeClr val="bg1"/>
-                    </a:solidFill>
-                  </a:tcPr>
-                </a:tc>
-                <a:tc>
-                  <a:txBody>
-                    <a:bodyPr/>
-                    <a:lstStyle/>
-                    <a:p>
-                      <a:pPr algn="l">
-                        <a:buNone/>
-                      </a:pPr>
-                      <a:r>
-                        <a:rPr lang="ko-KR" sz="1200" b="0" i="0" dirty="0">
-                          <a:solidFill>
-                            <a:schemeClr val="tx1"/>
-                          </a:solidFill>
-                          <a:effectLst/>
-                          <a:latin typeface="KoPub돋움체 Medium" panose="00000600000000000000" pitchFamily="2" charset="-127"/>
-                          <a:ea typeface="KoPub돋움체 Medium" panose="00000600000000000000" pitchFamily="2" charset="-127"/>
-                        </a:rPr>
-                        <a:t>RMSD=0.0226, </a:t>
-                      </a:r>
-                      <a:r>
-                        <a:rPr lang="ko-KR" sz="1200" b="0" i="0" dirty="0" err="1">
-                          <a:solidFill>
-                            <a:schemeClr val="tx1"/>
-                          </a:solidFill>
-                          <a:effectLst/>
-                          <a:latin typeface="KoPub돋움체 Medium" panose="00000600000000000000" pitchFamily="2" charset="-127"/>
-                          <a:ea typeface="KoPub돋움체 Medium" panose="00000600000000000000" pitchFamily="2" charset="-127"/>
-                        </a:rPr>
-                        <a:t>p</a:t>
-                      </a:r>
-                      <a:r>
-                        <a:rPr lang="ko-KR" sz="1200" b="0" i="0" dirty="0">
-                          <a:solidFill>
-                            <a:schemeClr val="tx1"/>
-                          </a:solidFill>
-                          <a:effectLst/>
-                          <a:latin typeface="KoPub돋움체 Medium" panose="00000600000000000000" pitchFamily="2" charset="-127"/>
-                          <a:ea typeface="KoPub돋움체 Medium" panose="00000600000000000000" pitchFamily="2" charset="-127"/>
-                        </a:rPr>
-                        <a:t>=0.0045</a:t>
-                      </a:r>
-                    </a:p>
-                  </a:txBody>
-                  <a:tcPr marL="19050" marR="19050" marT="19050" marB="19050" anchor="ctr">
-                    <a:solidFill>
-                      <a:schemeClr val="bg1"/>
-                    </a:solidFill>
-                  </a:tcPr>
-                </a:tc>
-                <a:tc>
-                  <a:txBody>
-                    <a:bodyPr/>
-                    <a:lstStyle/>
-                    <a:p>
-                      <a:pPr algn="l">
-                        <a:buNone/>
-                      </a:pPr>
-                      <a:r>
-                        <a:rPr lang="ko-KR" sz="1200" b="0" i="0">
-                          <a:solidFill>
-                            <a:schemeClr val="tx1"/>
-                          </a:solidFill>
-                          <a:effectLst/>
-                          <a:latin typeface="KoPub돋움체 Medium" panose="00000600000000000000" pitchFamily="2" charset="-127"/>
-                          <a:ea typeface="KoPub돋움체 Medium" panose="00000600000000000000" pitchFamily="2" charset="-127"/>
-                        </a:rPr>
-                        <a:t>RMSD=0.0017, p=0.0005</a:t>
-                      </a:r>
-                    </a:p>
-                  </a:txBody>
-                  <a:tcPr marL="19050" marR="19050" marT="19050" marB="19050" anchor="ctr">
-                    <a:solidFill>
-                      <a:schemeClr val="bg1"/>
-                    </a:solidFill>
-                  </a:tcPr>
-                </a:tc>
-                <a:tc>
-                  <a:txBody>
-                    <a:bodyPr/>
-                    <a:lstStyle/>
-                    <a:p>
-                      <a:pPr algn="l">
-                        <a:buNone/>
-                      </a:pPr>
-                      <a:r>
-                        <a:rPr lang="ko-KR" sz="1200" b="0" i="0" dirty="0">
-                          <a:solidFill>
-                            <a:schemeClr val="tx1"/>
-                          </a:solidFill>
-                          <a:effectLst/>
-                          <a:latin typeface="KoPub돋움체 Medium" panose="00000600000000000000" pitchFamily="2" charset="-127"/>
-                          <a:ea typeface="KoPub돋움체 Medium" panose="00000600000000000000" pitchFamily="2" charset="-127"/>
-                        </a:rPr>
-                        <a:t>RMSD=0.0004, </a:t>
-                      </a:r>
-                      <a:r>
-                        <a:rPr lang="ko-KR" sz="1200" b="0" i="0" dirty="0" err="1">
-                          <a:solidFill>
-                            <a:schemeClr val="tx1"/>
-                          </a:solidFill>
-                          <a:effectLst/>
-                          <a:latin typeface="KoPub돋움체 Medium" panose="00000600000000000000" pitchFamily="2" charset="-127"/>
-                          <a:ea typeface="KoPub돋움체 Medium" panose="00000600000000000000" pitchFamily="2" charset="-127"/>
-                        </a:rPr>
-                        <a:t>p</a:t>
-                      </a:r>
-                      <a:r>
-                        <a:rPr lang="ko-KR" sz="1200" b="0" i="0" dirty="0">
-                          <a:solidFill>
-                            <a:schemeClr val="tx1"/>
-                          </a:solidFill>
-                          <a:effectLst/>
-                          <a:latin typeface="KoPub돋움체 Medium" panose="00000600000000000000" pitchFamily="2" charset="-127"/>
-                          <a:ea typeface="KoPub돋움체 Medium" panose="00000600000000000000" pitchFamily="2" charset="-127"/>
-                        </a:rPr>
-                        <a:t>=0.093 (</a:t>
-                      </a:r>
-                      <a:r>
-                        <a:rPr lang="ko-KR" sz="1200" b="0" i="0" dirty="0" err="1">
-                          <a:solidFill>
-                            <a:schemeClr val="tx1"/>
-                          </a:solidFill>
-                          <a:effectLst/>
-                          <a:latin typeface="KoPub돋움체 Medium" panose="00000600000000000000" pitchFamily="2" charset="-127"/>
-                          <a:ea typeface="KoPub돋움체 Medium" panose="00000600000000000000" pitchFamily="2" charset="-127"/>
-                        </a:rPr>
-                        <a:t>n.s</a:t>
-                      </a:r>
-                      <a:r>
-                        <a:rPr lang="ko-KR" sz="1200" b="0" i="0" dirty="0">
-                          <a:solidFill>
-                            <a:schemeClr val="tx1"/>
-                          </a:solidFill>
-                          <a:effectLst/>
-                          <a:latin typeface="KoPub돋움체 Medium" panose="00000600000000000000" pitchFamily="2" charset="-127"/>
-                          <a:ea typeface="KoPub돋움체 Medium" panose="00000600000000000000" pitchFamily="2" charset="-127"/>
-                        </a:rPr>
-                        <a:t>.)</a:t>
-                      </a:r>
-                    </a:p>
-                  </a:txBody>
-                  <a:tcPr marL="19050" marR="19050" marT="19050" marB="19050" anchor="ctr">
-                    <a:solidFill>
-                      <a:schemeClr val="bg1"/>
-                    </a:solidFill>
-                  </a:tcPr>
-                </a:tc>
-                <a:extLst>
-                  <a:ext uri="{0D108BD9-81ED-4DB2-BD59-A6C34878D82A}">
-                    <a16:rowId xmlns:a16="http://schemas.microsoft.com/office/drawing/2014/main" val="3290363448"/>
-                  </a:ext>
-                </a:extLst>
-              </a:tr>
-              <a:tr h="370840">
-                <a:tc>
-                  <a:txBody>
-                    <a:bodyPr/>
-                    <a:lstStyle/>
-                    <a:p>
-                      <a:pPr algn="ctr" latinLnBrk="1"/>
-                      <a:r>
-                        <a:rPr lang="ko-KR" altLang="ko-KR" sz="1200" b="0" i="0" kern="1200" dirty="0">
-                          <a:solidFill>
-                            <a:schemeClr val="tx1"/>
-                          </a:solidFill>
-                          <a:effectLst/>
-                          <a:latin typeface="KoPub돋움체 Medium" panose="00000600000000000000" pitchFamily="2" charset="-127"/>
-                          <a:ea typeface="KoPub돋움체 Medium" panose="00000600000000000000" pitchFamily="2" charset="-127"/>
-                          <a:cs typeface="+mn-cs"/>
-                        </a:rPr>
-                        <a:t>TP </a:t>
-                      </a:r>
-                      <a:r>
-                        <a:rPr lang="ko-KR" altLang="ko-KR" sz="1200" b="0" i="0" kern="1200" dirty="0" err="1">
-                          <a:solidFill>
-                            <a:schemeClr val="tx1"/>
-                          </a:solidFill>
-                          <a:effectLst/>
-                          <a:latin typeface="KoPub돋움체 Medium" panose="00000600000000000000" pitchFamily="2" charset="-127"/>
-                          <a:ea typeface="KoPub돋움체 Medium" panose="00000600000000000000" pitchFamily="2" charset="-127"/>
-                          <a:cs typeface="+mn-cs"/>
-                        </a:rPr>
-                        <a:t>vs</a:t>
-                      </a:r>
-                      <a:r>
-                        <a:rPr lang="ko-KR" altLang="ko-KR" sz="1200" b="0" i="0" kern="1200" dirty="0">
-                          <a:solidFill>
-                            <a:schemeClr val="tx1"/>
-                          </a:solidFill>
-                          <a:effectLst/>
-                          <a:latin typeface="KoPub돋움체 Medium" panose="00000600000000000000" pitchFamily="2" charset="-127"/>
-                          <a:ea typeface="KoPub돋움체 Medium" panose="00000600000000000000" pitchFamily="2" charset="-127"/>
-                          <a:cs typeface="+mn-cs"/>
-                        </a:rPr>
-                        <a:t> TN</a:t>
-                      </a:r>
-                      <a:endParaRPr lang="ko-KR" altLang="en-US" sz="1200" dirty="0">
-                        <a:solidFill>
-                          <a:schemeClr val="tx1"/>
-                        </a:solidFill>
-                        <a:latin typeface="KoPub돋움체 Medium" panose="00000600000000000000" pitchFamily="2" charset="-127"/>
-                        <a:ea typeface="KoPub돋움체 Medium" panose="00000600000000000000" pitchFamily="2" charset="-127"/>
-                      </a:endParaRPr>
-                    </a:p>
-                  </a:txBody>
-                  <a:tcPr anchor="ctr">
-                    <a:lnB w="28575" cap="flat" cmpd="sng" algn="ctr">
-                      <a:solidFill>
-                        <a:srgbClr val="FF0000"/>
-                      </a:solidFill>
-                      <a:prstDash val="solid"/>
-                      <a:round/>
-                      <a:headEnd type="none" w="med" len="med"/>
-                      <a:tailEnd type="none" w="med" len="med"/>
-                    </a:lnB>
-                    <a:solidFill>
-                      <a:schemeClr val="bg1"/>
-                    </a:solidFill>
-                  </a:tcPr>
-                </a:tc>
-                <a:tc>
-                  <a:txBody>
-                    <a:bodyPr/>
-                    <a:lstStyle/>
-                    <a:p>
-                      <a:pPr algn="l">
-                        <a:buNone/>
-                      </a:pPr>
-                      <a:r>
-                        <a:rPr lang="ko-KR" sz="1200" b="0" i="0" dirty="0">
-                          <a:solidFill>
-                            <a:schemeClr val="tx1"/>
-                          </a:solidFill>
-                          <a:effectLst/>
-                          <a:latin typeface="KoPub돋움체 Medium" panose="00000600000000000000" pitchFamily="2" charset="-127"/>
-                          <a:ea typeface="KoPub돋움체 Medium" panose="00000600000000000000" pitchFamily="2" charset="-127"/>
-                        </a:rPr>
-                        <a:t>RMSD=0.0289, </a:t>
-                      </a:r>
-                      <a:r>
-                        <a:rPr lang="ko-KR" sz="1200" b="0" i="0" dirty="0" err="1">
-                          <a:solidFill>
-                            <a:schemeClr val="tx1"/>
-                          </a:solidFill>
-                          <a:effectLst/>
-                          <a:latin typeface="KoPub돋움체 Medium" panose="00000600000000000000" pitchFamily="2" charset="-127"/>
-                          <a:ea typeface="KoPub돋움체 Medium" panose="00000600000000000000" pitchFamily="2" charset="-127"/>
-                        </a:rPr>
-                        <a:t>p</a:t>
-                      </a:r>
-                      <a:r>
-                        <a:rPr lang="ko-KR" sz="1200" b="0" i="0" dirty="0">
-                          <a:solidFill>
-                            <a:schemeClr val="tx1"/>
-                          </a:solidFill>
-                          <a:effectLst/>
-                          <a:latin typeface="KoPub돋움체 Medium" panose="00000600000000000000" pitchFamily="2" charset="-127"/>
-                          <a:ea typeface="KoPub돋움체 Medium" panose="00000600000000000000" pitchFamily="2" charset="-127"/>
-                        </a:rPr>
-                        <a:t>=0.0135</a:t>
-                      </a:r>
-                    </a:p>
-                  </a:txBody>
-                  <a:tcPr marL="19050" marR="19050" marT="19050" marB="19050" anchor="ctr">
-                    <a:lnB w="28575" cap="flat" cmpd="sng" algn="ctr">
-                      <a:solidFill>
-                        <a:srgbClr val="FF0000"/>
-                      </a:solidFill>
-                      <a:prstDash val="solid"/>
-                      <a:round/>
-                      <a:headEnd type="none" w="med" len="med"/>
-                      <a:tailEnd type="none" w="med" len="med"/>
-                    </a:lnB>
-                    <a:solidFill>
-                      <a:schemeClr val="bg1"/>
-                    </a:solidFill>
-                  </a:tcPr>
-                </a:tc>
-                <a:tc>
-                  <a:txBody>
-                    <a:bodyPr/>
-                    <a:lstStyle/>
-                    <a:p>
-                      <a:pPr algn="l">
-                        <a:buNone/>
-                      </a:pPr>
-                      <a:r>
-                        <a:rPr lang="ko-KR" sz="1200" b="0" i="0">
-                          <a:solidFill>
-                            <a:schemeClr val="tx1"/>
-                          </a:solidFill>
-                          <a:effectLst/>
-                          <a:latin typeface="KoPub돋움체 Medium" panose="00000600000000000000" pitchFamily="2" charset="-127"/>
-                          <a:ea typeface="KoPub돋움체 Medium" panose="00000600000000000000" pitchFamily="2" charset="-127"/>
-                        </a:rPr>
-                        <a:t>RMSD=0.0023, p=0.0005</a:t>
-                      </a:r>
-                    </a:p>
-                  </a:txBody>
-                  <a:tcPr marL="19050" marR="19050" marT="19050" marB="19050" anchor="ctr">
-                    <a:lnB w="28575" cap="flat" cmpd="sng" algn="ctr">
-                      <a:solidFill>
-                        <a:srgbClr val="FF0000"/>
-                      </a:solidFill>
-                      <a:prstDash val="solid"/>
-                      <a:round/>
-                      <a:headEnd type="none" w="med" len="med"/>
-                      <a:tailEnd type="none" w="med" len="med"/>
-                    </a:lnB>
-                    <a:solidFill>
-                      <a:schemeClr val="bg1"/>
-                    </a:solidFill>
-                  </a:tcPr>
-                </a:tc>
-                <a:tc>
-                  <a:txBody>
-                    <a:bodyPr/>
-                    <a:lstStyle/>
-                    <a:p>
-                      <a:pPr algn="l">
-                        <a:buNone/>
-                      </a:pPr>
-                      <a:r>
-                        <a:rPr lang="ko-KR" sz="1200" b="0" i="0" dirty="0">
-                          <a:solidFill>
-                            <a:schemeClr val="tx1"/>
-                          </a:solidFill>
-                          <a:effectLst/>
-                          <a:latin typeface="KoPub돋움체 Medium" panose="00000600000000000000" pitchFamily="2" charset="-127"/>
-                          <a:ea typeface="KoPub돋움체 Medium" panose="00000600000000000000" pitchFamily="2" charset="-127"/>
-                        </a:rPr>
-                        <a:t>RMSD=0.0006, </a:t>
-                      </a:r>
-                      <a:r>
-                        <a:rPr lang="ko-KR" sz="1200" b="0" i="0" dirty="0" err="1">
-                          <a:solidFill>
-                            <a:schemeClr val="tx1"/>
-                          </a:solidFill>
-                          <a:effectLst/>
-                          <a:latin typeface="KoPub돋움체 Medium" panose="00000600000000000000" pitchFamily="2" charset="-127"/>
-                          <a:ea typeface="KoPub돋움체 Medium" panose="00000600000000000000" pitchFamily="2" charset="-127"/>
-                        </a:rPr>
-                        <a:t>p</a:t>
-                      </a:r>
-                      <a:r>
-                        <a:rPr lang="ko-KR" sz="1200" b="0" i="0" dirty="0">
-                          <a:solidFill>
-                            <a:schemeClr val="tx1"/>
-                          </a:solidFill>
-                          <a:effectLst/>
-                          <a:latin typeface="KoPub돋움체 Medium" panose="00000600000000000000" pitchFamily="2" charset="-127"/>
-                          <a:ea typeface="KoPub돋움체 Medium" panose="00000600000000000000" pitchFamily="2" charset="-127"/>
-                        </a:rPr>
-                        <a:t>=0.084 (</a:t>
-                      </a:r>
-                      <a:r>
-                        <a:rPr lang="ko-KR" sz="1200" b="0" i="0" dirty="0" err="1">
-                          <a:solidFill>
-                            <a:schemeClr val="tx1"/>
-                          </a:solidFill>
-                          <a:effectLst/>
-                          <a:latin typeface="KoPub돋움체 Medium" panose="00000600000000000000" pitchFamily="2" charset="-127"/>
-                          <a:ea typeface="KoPub돋움체 Medium" panose="00000600000000000000" pitchFamily="2" charset="-127"/>
-                        </a:rPr>
-                        <a:t>n.s</a:t>
-                      </a:r>
-                      <a:r>
-                        <a:rPr lang="ko-KR" sz="1200" b="0" i="0" dirty="0">
-                          <a:solidFill>
-                            <a:schemeClr val="tx1"/>
-                          </a:solidFill>
-                          <a:effectLst/>
-                          <a:latin typeface="KoPub돋움체 Medium" panose="00000600000000000000" pitchFamily="2" charset="-127"/>
-                          <a:ea typeface="KoPub돋움체 Medium" panose="00000600000000000000" pitchFamily="2" charset="-127"/>
-                        </a:rPr>
-                        <a:t>.</a:t>
-                      </a:r>
-                      <a:r>
-                        <a:rPr lang="en-US" altLang="ko-KR" sz="1200" b="0" i="0" dirty="0">
-                          <a:solidFill>
-                            <a:schemeClr val="tx1"/>
-                          </a:solidFill>
-                          <a:effectLst/>
-                          <a:latin typeface="KoPub돋움체 Medium" panose="00000600000000000000" pitchFamily="2" charset="-127"/>
-                          <a:ea typeface="KoPub돋움체 Medium" panose="00000600000000000000" pitchFamily="2" charset="-127"/>
-                        </a:rPr>
-                        <a:t>)</a:t>
-                      </a:r>
-                      <a:endParaRPr lang="ko-KR" sz="1200" b="0" i="0" dirty="0">
-                        <a:solidFill>
-                          <a:schemeClr val="tx1"/>
-                        </a:solidFill>
-                        <a:effectLst/>
-                        <a:latin typeface="KoPub돋움체 Medium" panose="00000600000000000000" pitchFamily="2" charset="-127"/>
-                        <a:ea typeface="KoPub돋움체 Medium" panose="00000600000000000000" pitchFamily="2" charset="-127"/>
-                      </a:endParaRPr>
-                    </a:p>
-                  </a:txBody>
-                  <a:tcPr marL="19050" marR="19050" marT="19050" marB="19050" anchor="ctr">
-                    <a:lnB w="28575" cap="flat" cmpd="sng" algn="ctr">
-                      <a:solidFill>
-                        <a:srgbClr val="FF0000"/>
-                      </a:solidFill>
-                      <a:prstDash val="solid"/>
-                      <a:round/>
-                      <a:headEnd type="none" w="med" len="med"/>
-                      <a:tailEnd type="none" w="med" len="med"/>
-                    </a:lnB>
-                    <a:solidFill>
-                      <a:schemeClr val="bg1"/>
-                    </a:solidFill>
-                  </a:tcPr>
-                </a:tc>
-                <a:extLst>
-                  <a:ext uri="{0D108BD9-81ED-4DB2-BD59-A6C34878D82A}">
-                    <a16:rowId xmlns:a16="http://schemas.microsoft.com/office/drawing/2014/main" val="4189124397"/>
-                  </a:ext>
-                </a:extLst>
-              </a:tr>
-              <a:tr h="370840">
-                <a:tc>
-                  <a:txBody>
-                    <a:bodyPr/>
-                    <a:lstStyle/>
-                    <a:p>
-                      <a:pPr algn="ctr" latinLnBrk="1"/>
-                      <a:r>
-                        <a:rPr lang="ko-KR" altLang="ko-KR" sz="1200" b="0" i="0" kern="1200" dirty="0">
-                          <a:solidFill>
-                            <a:schemeClr val="tx1"/>
-                          </a:solidFill>
-                          <a:effectLst/>
-                          <a:latin typeface="KoPub돋움체 Medium" panose="00000600000000000000" pitchFamily="2" charset="-127"/>
-                          <a:ea typeface="KoPub돋움체 Medium" panose="00000600000000000000" pitchFamily="2" charset="-127"/>
-                          <a:cs typeface="+mn-cs"/>
-                        </a:rPr>
-                        <a:t>TP </a:t>
-                      </a:r>
-                      <a:r>
-                        <a:rPr lang="ko-KR" altLang="ko-KR" sz="1200" b="0" i="0" kern="1200" dirty="0" err="1">
-                          <a:solidFill>
-                            <a:schemeClr val="tx1"/>
-                          </a:solidFill>
-                          <a:effectLst/>
-                          <a:latin typeface="KoPub돋움체 Medium" panose="00000600000000000000" pitchFamily="2" charset="-127"/>
-                          <a:ea typeface="KoPub돋움체 Medium" panose="00000600000000000000" pitchFamily="2" charset="-127"/>
-                          <a:cs typeface="+mn-cs"/>
-                        </a:rPr>
-                        <a:t>vs</a:t>
-                      </a:r>
-                      <a:r>
-                        <a:rPr lang="ko-KR" altLang="ko-KR" sz="1200" b="0" i="0" kern="1200" dirty="0">
-                          <a:solidFill>
-                            <a:schemeClr val="tx1"/>
-                          </a:solidFill>
-                          <a:effectLst/>
-                          <a:latin typeface="KoPub돋움체 Medium" panose="00000600000000000000" pitchFamily="2" charset="-127"/>
-                          <a:ea typeface="KoPub돋움체 Medium" panose="00000600000000000000" pitchFamily="2" charset="-127"/>
-                          <a:cs typeface="+mn-cs"/>
-                        </a:rPr>
-                        <a:t> FP</a:t>
-                      </a:r>
-                      <a:endParaRPr lang="ko-KR" altLang="en-US" sz="1200" dirty="0">
-                        <a:solidFill>
-                          <a:schemeClr val="tx1"/>
-                        </a:solidFill>
-                        <a:latin typeface="KoPub돋움체 Medium" panose="00000600000000000000" pitchFamily="2" charset="-127"/>
-                        <a:ea typeface="KoPub돋움체 Medium" panose="00000600000000000000" pitchFamily="2" charset="-127"/>
-                      </a:endParaRPr>
-                    </a:p>
-                  </a:txBody>
-                  <a:tcPr anchor="ctr">
-                    <a:lnL w="28575" cap="flat" cmpd="sng" algn="ctr">
-                      <a:solidFill>
-                        <a:srgbClr val="FF0000"/>
-                      </a:solidFill>
-                      <a:prstDash val="solid"/>
-                      <a:round/>
-                      <a:headEnd type="none" w="med" len="med"/>
-                      <a:tailEnd type="none" w="med" len="med"/>
-                    </a:lnL>
-                    <a:lnT w="28575" cap="flat" cmpd="sng" algn="ctr">
-                      <a:solidFill>
-                        <a:srgbClr val="FF0000"/>
-                      </a:solidFill>
-                      <a:prstDash val="solid"/>
-                      <a:round/>
-                      <a:headEnd type="none" w="med" len="med"/>
-                      <a:tailEnd type="none" w="med" len="med"/>
-                    </a:lnT>
-                    <a:solidFill>
-                      <a:schemeClr val="bg1"/>
-                    </a:solidFill>
-                  </a:tcPr>
-                </a:tc>
-                <a:tc>
-                  <a:txBody>
-                    <a:bodyPr/>
-                    <a:lstStyle/>
-                    <a:p>
-                      <a:pPr algn="l">
-                        <a:buNone/>
-                      </a:pPr>
-                      <a:r>
-                        <a:rPr lang="ko-KR" sz="1200" b="0" i="0" dirty="0">
-                          <a:solidFill>
-                            <a:schemeClr val="tx1"/>
-                          </a:solidFill>
-                          <a:effectLst/>
-                          <a:latin typeface="KoPub돋움체 Medium" panose="00000600000000000000" pitchFamily="2" charset="-127"/>
-                          <a:ea typeface="KoPub돋움체 Medium" panose="00000600000000000000" pitchFamily="2" charset="-127"/>
-                        </a:rPr>
-                        <a:t>RMSD=0.0274, </a:t>
-                      </a:r>
-                      <a:r>
-                        <a:rPr lang="ko-KR" sz="1200" b="0" i="0" dirty="0" err="1">
-                          <a:solidFill>
-                            <a:schemeClr val="tx1"/>
-                          </a:solidFill>
-                          <a:effectLst/>
-                          <a:latin typeface="KoPub돋움체 Medium" panose="00000600000000000000" pitchFamily="2" charset="-127"/>
-                          <a:ea typeface="KoPub돋움체 Medium" panose="00000600000000000000" pitchFamily="2" charset="-127"/>
-                        </a:rPr>
-                        <a:t>p</a:t>
-                      </a:r>
-                      <a:r>
-                        <a:rPr lang="ko-KR" sz="1200" b="0" i="0" dirty="0">
-                          <a:solidFill>
-                            <a:schemeClr val="tx1"/>
-                          </a:solidFill>
-                          <a:effectLst/>
-                          <a:latin typeface="KoPub돋움체 Medium" panose="00000600000000000000" pitchFamily="2" charset="-127"/>
-                          <a:ea typeface="KoPub돋움체 Medium" panose="00000600000000000000" pitchFamily="2" charset="-127"/>
-                        </a:rPr>
-                        <a:t>=0.0175</a:t>
-                      </a:r>
-                    </a:p>
-                  </a:txBody>
-                  <a:tcPr marL="19050" marR="19050" marT="19050" marB="19050" anchor="ctr">
-                    <a:lnT w="28575" cap="flat" cmpd="sng" algn="ctr">
-                      <a:solidFill>
-                        <a:srgbClr val="FF0000"/>
-                      </a:solidFill>
-                      <a:prstDash val="solid"/>
-                      <a:round/>
-                      <a:headEnd type="none" w="med" len="med"/>
-                      <a:tailEnd type="none" w="med" len="med"/>
-                    </a:lnT>
-                    <a:solidFill>
-                      <a:schemeClr val="bg1"/>
-                    </a:solidFill>
-                  </a:tcPr>
-                </a:tc>
-                <a:tc>
-                  <a:txBody>
-                    <a:bodyPr/>
-                    <a:lstStyle/>
-                    <a:p>
-                      <a:pPr algn="l">
-                        <a:buNone/>
-                      </a:pPr>
-                      <a:r>
-                        <a:rPr lang="ko-KR" sz="1200" b="0" i="0" dirty="0">
-                          <a:solidFill>
-                            <a:schemeClr val="tx1"/>
-                          </a:solidFill>
-                          <a:effectLst/>
-                          <a:latin typeface="KoPub돋움체 Medium" panose="00000600000000000000" pitchFamily="2" charset="-127"/>
-                          <a:ea typeface="KoPub돋움체 Medium" panose="00000600000000000000" pitchFamily="2" charset="-127"/>
-                        </a:rPr>
-                        <a:t>RMSD=0.0016, </a:t>
-                      </a:r>
-                      <a:r>
-                        <a:rPr lang="ko-KR" sz="1200" b="0" i="0" dirty="0" err="1">
-                          <a:solidFill>
-                            <a:schemeClr val="tx1"/>
-                          </a:solidFill>
-                          <a:effectLst/>
-                          <a:latin typeface="KoPub돋움체 Medium" panose="00000600000000000000" pitchFamily="2" charset="-127"/>
-                          <a:ea typeface="KoPub돋움체 Medium" panose="00000600000000000000" pitchFamily="2" charset="-127"/>
-                        </a:rPr>
-                        <a:t>p</a:t>
-                      </a:r>
-                      <a:r>
-                        <a:rPr lang="ko-KR" sz="1200" b="0" i="0" dirty="0">
-                          <a:solidFill>
-                            <a:schemeClr val="tx1"/>
-                          </a:solidFill>
-                          <a:effectLst/>
-                          <a:latin typeface="KoPub돋움체 Medium" panose="00000600000000000000" pitchFamily="2" charset="-127"/>
-                          <a:ea typeface="KoPub돋움체 Medium" panose="00000600000000000000" pitchFamily="2" charset="-127"/>
-                        </a:rPr>
-                        <a:t>=0.005</a:t>
-                      </a:r>
-                    </a:p>
-                  </a:txBody>
-                  <a:tcPr marL="19050" marR="19050" marT="19050" marB="19050" anchor="ctr">
-                    <a:lnT w="28575" cap="flat" cmpd="sng" algn="ctr">
-                      <a:solidFill>
-                        <a:srgbClr val="FF0000"/>
-                      </a:solidFill>
-                      <a:prstDash val="solid"/>
-                      <a:round/>
-                      <a:headEnd type="none" w="med" len="med"/>
-                      <a:tailEnd type="none" w="med" len="med"/>
-                    </a:lnT>
-                    <a:solidFill>
-                      <a:schemeClr val="bg1"/>
-                    </a:solidFill>
-                  </a:tcPr>
-                </a:tc>
-                <a:tc>
-                  <a:txBody>
-                    <a:bodyPr/>
-                    <a:lstStyle/>
-                    <a:p>
-                      <a:pPr algn="l">
-                        <a:buNone/>
-                      </a:pPr>
-                      <a:r>
-                        <a:rPr lang="ko-KR" sz="1200" b="0" i="0" dirty="0">
-                          <a:solidFill>
-                            <a:schemeClr val="tx1"/>
-                          </a:solidFill>
-                          <a:effectLst/>
-                          <a:latin typeface="KoPub돋움체 Medium" panose="00000600000000000000" pitchFamily="2" charset="-127"/>
-                          <a:ea typeface="KoPub돋움체 Medium" panose="00000600000000000000" pitchFamily="2" charset="-127"/>
-                        </a:rPr>
-                        <a:t>RMSD=0.0005, </a:t>
-                      </a:r>
-                      <a:r>
-                        <a:rPr lang="ko-KR" sz="1200" b="0" i="0" dirty="0" err="1">
-                          <a:solidFill>
-                            <a:schemeClr val="tx1"/>
-                          </a:solidFill>
-                          <a:effectLst/>
-                          <a:latin typeface="KoPub돋움체 Medium" panose="00000600000000000000" pitchFamily="2" charset="-127"/>
-                          <a:ea typeface="KoPub돋움체 Medium" panose="00000600000000000000" pitchFamily="2" charset="-127"/>
-                        </a:rPr>
-                        <a:t>p</a:t>
-                      </a:r>
-                      <a:r>
-                        <a:rPr lang="ko-KR" sz="1200" b="0" i="0" dirty="0">
-                          <a:solidFill>
-                            <a:schemeClr val="tx1"/>
-                          </a:solidFill>
-                          <a:effectLst/>
-                          <a:latin typeface="KoPub돋움체 Medium" panose="00000600000000000000" pitchFamily="2" charset="-127"/>
-                          <a:ea typeface="KoPub돋움체 Medium" panose="00000600000000000000" pitchFamily="2" charset="-127"/>
-                        </a:rPr>
-                        <a:t>=0.425 (</a:t>
-                      </a:r>
-                      <a:r>
-                        <a:rPr lang="ko-KR" sz="1200" b="0" i="0" dirty="0" err="1">
-                          <a:solidFill>
-                            <a:schemeClr val="tx1"/>
-                          </a:solidFill>
-                          <a:effectLst/>
-                          <a:latin typeface="KoPub돋움체 Medium" panose="00000600000000000000" pitchFamily="2" charset="-127"/>
-                          <a:ea typeface="KoPub돋움체 Medium" panose="00000600000000000000" pitchFamily="2" charset="-127"/>
-                        </a:rPr>
-                        <a:t>n.s</a:t>
-                      </a:r>
-                      <a:r>
-                        <a:rPr lang="ko-KR" sz="1200" b="0" i="0" dirty="0">
-                          <a:solidFill>
-                            <a:schemeClr val="tx1"/>
-                          </a:solidFill>
-                          <a:effectLst/>
-                          <a:latin typeface="KoPub돋움체 Medium" panose="00000600000000000000" pitchFamily="2" charset="-127"/>
-                          <a:ea typeface="KoPub돋움체 Medium" panose="00000600000000000000" pitchFamily="2" charset="-127"/>
-                        </a:rPr>
-                        <a:t>.)</a:t>
-                      </a:r>
-                    </a:p>
-                  </a:txBody>
-                  <a:tcPr marL="19050" marR="19050" marT="19050" marB="19050" anchor="ctr">
-                    <a:lnR w="28575" cap="flat" cmpd="sng" algn="ctr">
-                      <a:solidFill>
-                        <a:srgbClr val="FF0000"/>
-                      </a:solidFill>
-                      <a:prstDash val="solid"/>
-                      <a:round/>
-                      <a:headEnd type="none" w="med" len="med"/>
-                      <a:tailEnd type="none" w="med" len="med"/>
-                    </a:lnR>
-                    <a:lnT w="28575" cap="flat" cmpd="sng" algn="ctr">
-                      <a:solidFill>
-                        <a:srgbClr val="FF0000"/>
-                      </a:solidFill>
-                      <a:prstDash val="solid"/>
-                      <a:round/>
-                      <a:headEnd type="none" w="med" len="med"/>
-                      <a:tailEnd type="none" w="med" len="med"/>
-                    </a:lnT>
-                    <a:solidFill>
-                      <a:schemeClr val="bg1"/>
-                    </a:solidFill>
-                  </a:tcPr>
-                </a:tc>
-                <a:extLst>
-                  <a:ext uri="{0D108BD9-81ED-4DB2-BD59-A6C34878D82A}">
-                    <a16:rowId xmlns:a16="http://schemas.microsoft.com/office/drawing/2014/main" val="1968725908"/>
-                  </a:ext>
-                </a:extLst>
-              </a:tr>
-              <a:tr h="370840">
-                <a:tc>
-                  <a:txBody>
-                    <a:bodyPr/>
-                    <a:lstStyle/>
-                    <a:p>
-                      <a:pPr algn="ctr" latinLnBrk="1"/>
-                      <a:r>
-                        <a:rPr lang="ko-KR" altLang="ko-KR" sz="1200" b="0" i="0" kern="1200" dirty="0">
-                          <a:solidFill>
-                            <a:schemeClr val="tx1"/>
-                          </a:solidFill>
-                          <a:effectLst/>
-                          <a:latin typeface="KoPub돋움체 Medium" panose="00000600000000000000" pitchFamily="2" charset="-127"/>
-                          <a:ea typeface="KoPub돋움체 Medium" panose="00000600000000000000" pitchFamily="2" charset="-127"/>
-                          <a:cs typeface="+mn-cs"/>
-                        </a:rPr>
-                        <a:t>TP </a:t>
-                      </a:r>
-                      <a:r>
-                        <a:rPr lang="ko-KR" altLang="ko-KR" sz="1200" b="0" i="0" kern="1200" dirty="0" err="1">
-                          <a:solidFill>
-                            <a:schemeClr val="tx1"/>
-                          </a:solidFill>
-                          <a:effectLst/>
-                          <a:latin typeface="KoPub돋움체 Medium" panose="00000600000000000000" pitchFamily="2" charset="-127"/>
-                          <a:ea typeface="KoPub돋움체 Medium" panose="00000600000000000000" pitchFamily="2" charset="-127"/>
-                          <a:cs typeface="+mn-cs"/>
-                        </a:rPr>
-                        <a:t>vs</a:t>
-                      </a:r>
-                      <a:r>
-                        <a:rPr lang="ko-KR" altLang="ko-KR" sz="1200" b="0" i="0" kern="1200" dirty="0">
-                          <a:solidFill>
-                            <a:schemeClr val="tx1"/>
-                          </a:solidFill>
-                          <a:effectLst/>
-                          <a:latin typeface="KoPub돋움체 Medium" panose="00000600000000000000" pitchFamily="2" charset="-127"/>
-                          <a:ea typeface="KoPub돋움체 Medium" panose="00000600000000000000" pitchFamily="2" charset="-127"/>
-                          <a:cs typeface="+mn-cs"/>
-                        </a:rPr>
-                        <a:t> FP (</a:t>
-                      </a:r>
-                      <a:r>
-                        <a:rPr lang="en-US" altLang="ko-KR" sz="1200" b="0" i="0" kern="1200" dirty="0" err="1">
-                          <a:solidFill>
-                            <a:schemeClr val="tx1"/>
-                          </a:solidFill>
-                          <a:effectLst/>
-                          <a:latin typeface="KoPub돋움체 Medium" panose="00000600000000000000" pitchFamily="2" charset="-127"/>
-                          <a:ea typeface="KoPub돋움체 Medium" panose="00000600000000000000" pitchFamily="2" charset="-127"/>
-                          <a:cs typeface="+mn-cs"/>
-                        </a:rPr>
-                        <a:t>psm</a:t>
-                      </a:r>
-                      <a:r>
-                        <a:rPr lang="ko-KR" altLang="ko-KR" sz="1200" b="0" i="0" kern="1200" dirty="0">
-                          <a:solidFill>
-                            <a:schemeClr val="tx1"/>
-                          </a:solidFill>
-                          <a:effectLst/>
-                          <a:latin typeface="KoPub돋움체 Medium" panose="00000600000000000000" pitchFamily="2" charset="-127"/>
-                          <a:ea typeface="KoPub돋움체 Medium" panose="00000600000000000000" pitchFamily="2" charset="-127"/>
-                          <a:cs typeface="+mn-cs"/>
-                        </a:rPr>
-                        <a:t>)</a:t>
-                      </a:r>
-                      <a:endParaRPr lang="ko-KR" altLang="en-US" sz="1200" dirty="0">
-                        <a:solidFill>
-                          <a:schemeClr val="tx1"/>
-                        </a:solidFill>
-                        <a:latin typeface="KoPub돋움체 Medium" panose="00000600000000000000" pitchFamily="2" charset="-127"/>
-                        <a:ea typeface="KoPub돋움체 Medium" panose="00000600000000000000" pitchFamily="2" charset="-127"/>
-                      </a:endParaRPr>
-                    </a:p>
-                  </a:txBody>
-                  <a:tcPr anchor="ctr">
-                    <a:lnL w="28575" cap="flat" cmpd="sng" algn="ctr">
-                      <a:solidFill>
-                        <a:srgbClr val="FF0000"/>
-                      </a:solidFill>
-                      <a:prstDash val="solid"/>
-                      <a:round/>
-                      <a:headEnd type="none" w="med" len="med"/>
-                      <a:tailEnd type="none" w="med" len="med"/>
-                    </a:lnL>
-                    <a:lnB w="28575" cap="flat" cmpd="sng" algn="ctr">
-                      <a:solidFill>
-                        <a:srgbClr val="FF0000"/>
-                      </a:solidFill>
-                      <a:prstDash val="solid"/>
-                      <a:round/>
-                      <a:headEnd type="none" w="med" len="med"/>
-                      <a:tailEnd type="none" w="med" len="med"/>
-                    </a:lnB>
-                    <a:solidFill>
-                      <a:schemeClr val="bg1"/>
-                    </a:solidFill>
-                  </a:tcPr>
-                </a:tc>
-                <a:tc>
-                  <a:txBody>
-                    <a:bodyPr/>
-                    <a:lstStyle/>
-                    <a:p>
-                      <a:pPr algn="l">
-                        <a:buNone/>
-                      </a:pPr>
-                      <a:r>
-                        <a:rPr lang="ko-KR" sz="1200" b="0" i="0" dirty="0">
-                          <a:solidFill>
-                            <a:schemeClr val="tx1"/>
-                          </a:solidFill>
-                          <a:effectLst/>
-                          <a:latin typeface="KoPub돋움체 Medium" panose="00000600000000000000" pitchFamily="2" charset="-127"/>
-                          <a:ea typeface="KoPub돋움체 Medium" panose="00000600000000000000" pitchFamily="2" charset="-127"/>
-                        </a:rPr>
-                        <a:t>RMSD=0.0422, </a:t>
-                      </a:r>
-                      <a:r>
-                        <a:rPr lang="ko-KR" sz="1200" b="0" i="0" dirty="0" err="1">
-                          <a:solidFill>
-                            <a:schemeClr val="tx1"/>
-                          </a:solidFill>
-                          <a:effectLst/>
-                          <a:latin typeface="KoPub돋움체 Medium" panose="00000600000000000000" pitchFamily="2" charset="-127"/>
-                          <a:ea typeface="KoPub돋움체 Medium" panose="00000600000000000000" pitchFamily="2" charset="-127"/>
-                        </a:rPr>
-                        <a:t>p</a:t>
-                      </a:r>
-                      <a:r>
-                        <a:rPr lang="ko-KR" sz="1200" b="0" i="0" dirty="0">
-                          <a:solidFill>
-                            <a:schemeClr val="tx1"/>
-                          </a:solidFill>
-                          <a:effectLst/>
-                          <a:latin typeface="KoPub돋움체 Medium" panose="00000600000000000000" pitchFamily="2" charset="-127"/>
-                          <a:ea typeface="KoPub돋움체 Medium" panose="00000600000000000000" pitchFamily="2" charset="-127"/>
-                        </a:rPr>
-                        <a:t>=0.0165</a:t>
-                      </a:r>
-                    </a:p>
-                  </a:txBody>
-                  <a:tcPr marL="19050" marR="19050" marT="19050" marB="19050" anchor="ctr">
-                    <a:lnB w="28575" cap="flat" cmpd="sng" algn="ctr">
-                      <a:solidFill>
-                        <a:srgbClr val="FF0000"/>
-                      </a:solidFill>
-                      <a:prstDash val="solid"/>
-                      <a:round/>
-                      <a:headEnd type="none" w="med" len="med"/>
-                      <a:tailEnd type="none" w="med" len="med"/>
-                    </a:lnB>
-                    <a:solidFill>
-                      <a:schemeClr val="bg1"/>
-                    </a:solidFill>
-                  </a:tcPr>
-                </a:tc>
-                <a:tc>
-                  <a:txBody>
-                    <a:bodyPr/>
-                    <a:lstStyle/>
-                    <a:p>
-                      <a:pPr algn="l">
-                        <a:buNone/>
-                      </a:pPr>
-                      <a:r>
-                        <a:rPr lang="ko-KR" sz="1200" b="0" i="0" dirty="0">
-                          <a:solidFill>
-                            <a:schemeClr val="tx1"/>
-                          </a:solidFill>
-                          <a:effectLst/>
-                          <a:latin typeface="KoPub돋움체 Medium" panose="00000600000000000000" pitchFamily="2" charset="-127"/>
-                          <a:ea typeface="KoPub돋움체 Medium" panose="00000600000000000000" pitchFamily="2" charset="-127"/>
-                        </a:rPr>
-                        <a:t>RMSD=0.0023, </a:t>
-                      </a:r>
-                      <a:r>
-                        <a:rPr lang="ko-KR" sz="1200" b="0" i="0" dirty="0" err="1">
-                          <a:solidFill>
-                            <a:schemeClr val="tx1"/>
-                          </a:solidFill>
-                          <a:effectLst/>
-                          <a:latin typeface="KoPub돋움체 Medium" panose="00000600000000000000" pitchFamily="2" charset="-127"/>
-                          <a:ea typeface="KoPub돋움체 Medium" panose="00000600000000000000" pitchFamily="2" charset="-127"/>
-                        </a:rPr>
-                        <a:t>p</a:t>
-                      </a:r>
-                      <a:r>
-                        <a:rPr lang="ko-KR" sz="1200" b="0" i="0" dirty="0">
-                          <a:solidFill>
-                            <a:schemeClr val="tx1"/>
-                          </a:solidFill>
-                          <a:effectLst/>
-                          <a:latin typeface="KoPub돋움체 Medium" panose="00000600000000000000" pitchFamily="2" charset="-127"/>
-                          <a:ea typeface="KoPub돋움체 Medium" panose="00000600000000000000" pitchFamily="2" charset="-127"/>
-                        </a:rPr>
-                        <a:t>=0.0095</a:t>
-                      </a:r>
-                    </a:p>
-                  </a:txBody>
-                  <a:tcPr marL="19050" marR="19050" marT="19050" marB="19050" anchor="ctr">
-                    <a:lnB w="28575" cap="flat" cmpd="sng" algn="ctr">
-                      <a:solidFill>
-                        <a:srgbClr val="FF0000"/>
-                      </a:solidFill>
-                      <a:prstDash val="solid"/>
-                      <a:round/>
-                      <a:headEnd type="none" w="med" len="med"/>
-                      <a:tailEnd type="none" w="med" len="med"/>
-                    </a:lnB>
-                    <a:solidFill>
-                      <a:schemeClr val="bg1"/>
-                    </a:solidFill>
-                  </a:tcPr>
-                </a:tc>
-                <a:tc>
-                  <a:txBody>
-                    <a:bodyPr/>
-                    <a:lstStyle/>
-                    <a:p>
-                      <a:pPr algn="l">
-                        <a:buNone/>
-                      </a:pPr>
-                      <a:r>
-                        <a:rPr lang="ko-KR" sz="1200" b="0" i="0" dirty="0">
-                          <a:solidFill>
-                            <a:schemeClr val="tx1"/>
-                          </a:solidFill>
-                          <a:effectLst/>
-                          <a:latin typeface="KoPub돋움체 Medium" panose="00000600000000000000" pitchFamily="2" charset="-127"/>
-                          <a:ea typeface="KoPub돋움체 Medium" panose="00000600000000000000" pitchFamily="2" charset="-127"/>
-                        </a:rPr>
-                        <a:t>RMSD=0.0006, </a:t>
-                      </a:r>
-                      <a:r>
-                        <a:rPr lang="ko-KR" sz="1200" b="0" i="0" dirty="0" err="1">
-                          <a:solidFill>
-                            <a:schemeClr val="tx1"/>
-                          </a:solidFill>
-                          <a:effectLst/>
-                          <a:latin typeface="KoPub돋움체 Medium" panose="00000600000000000000" pitchFamily="2" charset="-127"/>
-                          <a:ea typeface="KoPub돋움체 Medium" panose="00000600000000000000" pitchFamily="2" charset="-127"/>
-                        </a:rPr>
-                        <a:t>p</a:t>
-                      </a:r>
-                      <a:r>
-                        <a:rPr lang="ko-KR" sz="1200" b="0" i="0" dirty="0">
-                          <a:solidFill>
-                            <a:schemeClr val="tx1"/>
-                          </a:solidFill>
-                          <a:effectLst/>
-                          <a:latin typeface="KoPub돋움체 Medium" panose="00000600000000000000" pitchFamily="2" charset="-127"/>
-                          <a:ea typeface="KoPub돋움체 Medium" panose="00000600000000000000" pitchFamily="2" charset="-127"/>
-                        </a:rPr>
-                        <a:t>=0.417 (</a:t>
-                      </a:r>
-                      <a:r>
-                        <a:rPr lang="ko-KR" sz="1200" b="0" i="0" dirty="0" err="1">
-                          <a:solidFill>
-                            <a:schemeClr val="tx1"/>
-                          </a:solidFill>
-                          <a:effectLst/>
-                          <a:latin typeface="KoPub돋움체 Medium" panose="00000600000000000000" pitchFamily="2" charset="-127"/>
-                          <a:ea typeface="KoPub돋움체 Medium" panose="00000600000000000000" pitchFamily="2" charset="-127"/>
-                        </a:rPr>
-                        <a:t>n.s</a:t>
-                      </a:r>
-                      <a:r>
-                        <a:rPr lang="ko-KR" sz="1200" b="0" i="0" dirty="0">
-                          <a:solidFill>
-                            <a:schemeClr val="tx1"/>
-                          </a:solidFill>
-                          <a:effectLst/>
-                          <a:latin typeface="KoPub돋움체 Medium" panose="00000600000000000000" pitchFamily="2" charset="-127"/>
-                          <a:ea typeface="KoPub돋움체 Medium" panose="00000600000000000000" pitchFamily="2" charset="-127"/>
-                        </a:rPr>
-                        <a:t>.)</a:t>
-                      </a:r>
-                    </a:p>
-                  </a:txBody>
-                  <a:tcPr marL="19050" marR="19050" marT="19050" marB="19050" anchor="ctr">
-                    <a:lnR w="28575" cap="flat" cmpd="sng" algn="ctr">
-                      <a:solidFill>
-                        <a:srgbClr val="FF0000"/>
-                      </a:solidFill>
-                      <a:prstDash val="solid"/>
-                      <a:round/>
-                      <a:headEnd type="none" w="med" len="med"/>
-                      <a:tailEnd type="none" w="med" len="med"/>
-                    </a:lnR>
-                    <a:lnB w="28575" cap="flat" cmpd="sng" algn="ctr">
-                      <a:solidFill>
-                        <a:srgbClr val="FF0000"/>
-                      </a:solidFill>
-                      <a:prstDash val="solid"/>
-                      <a:round/>
-                      <a:headEnd type="none" w="med" len="med"/>
-                      <a:tailEnd type="none" w="med" len="med"/>
-                    </a:lnB>
-                    <a:solidFill>
-                      <a:schemeClr val="bg1"/>
-                    </a:solidFill>
-                  </a:tcPr>
-                </a:tc>
-                <a:extLst>
-                  <a:ext uri="{0D108BD9-81ED-4DB2-BD59-A6C34878D82A}">
-                    <a16:rowId xmlns:a16="http://schemas.microsoft.com/office/drawing/2014/main" val="2054828031"/>
-                  </a:ext>
-                </a:extLst>
-              </a:tr>
-            </a:tbl>
-          </a:graphicData>
-        </a:graphic>
-      </p:graphicFrame>
-    </p:spTree>
-    <p:extLst>
-      <p:ext uri="{BB962C8B-B14F-4D97-AF65-F5344CB8AC3E}">
-        <p14:creationId xmlns:p14="http://schemas.microsoft.com/office/powerpoint/2010/main" val="1105379008"/>
       </p:ext>
     </p:extLst>
   </p:cSld>
@@ -13730,27 +13469,7 @@
             </a:r>
             <a:r>
               <a:rPr lang="ko-KR" altLang="en-US" b="1" dirty="0"/>
-              <a:t>개선 확인 </a:t>
-            </a:r>
-            <a:r>
-              <a:rPr lang="en-US" altLang="ko-KR" b="1" dirty="0"/>
-              <a:t>(</a:t>
-            </a:r>
-            <a:r>
-              <a:rPr lang="ko-KR" altLang="en-US" b="1" dirty="0"/>
-              <a:t>강남</a:t>
-            </a:r>
-            <a:r>
-              <a:rPr lang="en-US" altLang="ko-KR" b="1" dirty="0"/>
-              <a:t>: 0.828, </a:t>
-            </a:r>
-            <a:r>
-              <a:rPr lang="ko-KR" altLang="en-US" b="1" dirty="0"/>
-              <a:t>신촌</a:t>
-            </a:r>
-            <a:r>
-              <a:rPr lang="en-US" altLang="ko-KR" b="1"/>
-              <a:t>: 0.835)</a:t>
+              <a:t>개선 방안 연구</a:t>
             </a:r>
             <a:endParaRPr b="1" dirty="0"/>
           </a:p>

--- a/docs/260724_Comparison of AECs between groups after low-smi classification with clinic data.pptx
+++ b/docs/260724_Comparison of AECs between groups after low-smi classification with clinic data.pptx
@@ -5,7 +5,7 @@
     <p:sldMasterId id="2147483648" r:id="rId1"/>
   </p:sldMasterIdLst>
   <p:notesMasterIdLst>
-    <p:notesMasterId r:id="rId11"/>
+    <p:notesMasterId r:id="rId13"/>
   </p:notesMasterIdLst>
   <p:sldIdLst>
     <p:sldId id="256" r:id="rId2"/>
@@ -15,19 +15,21 @@
     <p:sldId id="534" r:id="rId6"/>
     <p:sldId id="514" r:id="rId7"/>
     <p:sldId id="519" r:id="rId8"/>
-    <p:sldId id="535" r:id="rId9"/>
-    <p:sldId id="479" r:id="rId10"/>
+    <p:sldId id="536" r:id="rId9"/>
+    <p:sldId id="535" r:id="rId10"/>
+    <p:sldId id="479" r:id="rId11"/>
+    <p:sldId id="537" r:id="rId12"/>
   </p:sldIdLst>
   <p:sldSz cx="12192000" cy="6858000"/>
   <p:notesSz cx="6858000" cy="9144000"/>
   <p:embeddedFontLst>
     <p:embeddedFont>
       <p:font typeface="KoPub돋움체 Bold" panose="00000800000000000000" pitchFamily="2" charset="-127"/>
-      <p:bold r:id="rId12"/>
+      <p:bold r:id="rId14"/>
     </p:embeddedFont>
     <p:embeddedFont>
       <p:font typeface="KoPub돋움체 Medium" panose="00000600000000000000" pitchFamily="2" charset="-127"/>
-      <p:regular r:id="rId13"/>
+      <p:regular r:id="rId15"/>
     </p:embeddedFont>
   </p:embeddedFontLst>
   <p:defaultTextStyle>
@@ -137,8 +139,10 @@
             <p14:sldId id="534"/>
             <p14:sldId id="514"/>
             <p14:sldId id="519"/>
+            <p14:sldId id="536"/>
             <p14:sldId id="535"/>
             <p14:sldId id="479"/>
+            <p14:sldId id="537"/>
           </p14:sldIdLst>
         </p14:section>
       </p14:sectionLst>
@@ -2523,7 +2527,7 @@
             <a:fld id="{33074436-1BEA-4F09-AD5C-9DF87C96BF5A}" type="datetimeFigureOut">
               <a:rPr lang="ko-KR" altLang="en-US" smtClean="0"/>
               <a:pPr/>
-              <a:t>2026-07-23</a:t>
+              <a:t>2026-07-24</a:t>
             </a:fld>
             <a:endParaRPr lang="ko-KR" altLang="en-US" dirty="0"/>
           </a:p>
@@ -4187,7 +4191,7 @@
             </a:pPr>
             <a:fld id="{00000000-1234-1234-1234-123412341234}" type="slidenum">
               <a:rPr lang="en-US"/>
-              <a:t>9</a:t>
+              <a:t>10</a:t>
             </a:fld>
             <a:endParaRPr/>
           </a:p>
@@ -7989,6 +7993,2101 @@
 </p:sld>
 </file>
 
+<file path=ppt/slides/slide10.xml><?xml version="1.0" encoding="utf-8"?>
+<p:sld xmlns:a="http://schemas.openxmlformats.org/drawingml/2006/main" xmlns:r="http://schemas.openxmlformats.org/officeDocument/2006/relationships" xmlns:p="http://schemas.openxmlformats.org/presentationml/2006/main">
+  <p:cSld>
+    <p:spTree>
+      <p:nvGrpSpPr>
+        <p:cNvPr id="1" name="Shape 1175"/>
+        <p:cNvGrpSpPr/>
+        <p:nvPr/>
+      </p:nvGrpSpPr>
+      <p:grpSpPr>
+        <a:xfrm>
+          <a:off x="0" y="0"/>
+          <a:ext cx="0" cy="0"/>
+          <a:chOff x="0" y="0"/>
+          <a:chExt cx="0" cy="0"/>
+        </a:xfrm>
+      </p:grpSpPr>
+      <p:pic>
+        <p:nvPicPr>
+          <p:cNvPr id="1176" name="Google Shape;1176;g3d412ffb079_0_61"/>
+          <p:cNvPicPr preferRelativeResize="0"/>
+          <p:nvPr/>
+        </p:nvPicPr>
+        <p:blipFill>
+          <a:blip r:embed="rId3">
+            <a:alphaModFix/>
+          </a:blip>
+          <a:stretch>
+            <a:fillRect/>
+          </a:stretch>
+        </p:blipFill>
+        <p:spPr>
+          <a:xfrm>
+            <a:off x="0" y="0"/>
+            <a:ext cx="12192000" cy="6858000"/>
+          </a:xfrm>
+          <a:prstGeom prst="rect">
+            <a:avLst/>
+          </a:prstGeom>
+          <a:noFill/>
+          <a:ln>
+            <a:noFill/>
+          </a:ln>
+        </p:spPr>
+      </p:pic>
+    </p:spTree>
+    <p:extLst>
+      <p:ext uri="{BB962C8B-B14F-4D97-AF65-F5344CB8AC3E}">
+        <p14:creationId xmlns:p14="http://schemas.microsoft.com/office/powerpoint/2010/main" val="1579866099"/>
+      </p:ext>
+    </p:extLst>
+  </p:cSld>
+  <p:clrMapOvr>
+    <a:masterClrMapping/>
+  </p:clrMapOvr>
+</p:sld>
+</file>
+
+<file path=ppt/slides/slide11.xml><?xml version="1.0" encoding="utf-8"?>
+<p:sld xmlns:a="http://schemas.openxmlformats.org/drawingml/2006/main" xmlns:r="http://schemas.openxmlformats.org/officeDocument/2006/relationships" xmlns:p="http://schemas.openxmlformats.org/presentationml/2006/main">
+  <p:cSld>
+    <p:spTree>
+      <p:nvGrpSpPr>
+        <p:cNvPr id="1" name=""/>
+        <p:cNvGrpSpPr/>
+        <p:nvPr/>
+      </p:nvGrpSpPr>
+      <p:grpSpPr>
+        <a:xfrm>
+          <a:off x="0" y="0"/>
+          <a:ext cx="0" cy="0"/>
+          <a:chOff x="0" y="0"/>
+          <a:chExt cx="0" cy="0"/>
+        </a:xfrm>
+      </p:grpSpPr>
+      <p:sp>
+        <p:nvSpPr>
+          <p:cNvPr id="2" name="Title 1"/>
+          <p:cNvSpPr>
+            <a:spLocks noGrp="1"/>
+          </p:cNvSpPr>
+          <p:nvPr>
+            <p:ph type="title"/>
+          </p:nvPr>
+        </p:nvSpPr>
+        <p:spPr/>
+        <p:txBody>
+          <a:bodyPr/>
+          <a:lstStyle/>
+          <a:p>
+            <a:r>
+              <a:t>Detailed progress</a:t>
+            </a:r>
+          </a:p>
+        </p:txBody>
+      </p:sp>
+      <p:sp>
+        <p:nvSpPr>
+          <p:cNvPr id="3" name="Content Placeholder 2"/>
+          <p:cNvSpPr>
+            <a:spLocks noGrp="1"/>
+          </p:cNvSpPr>
+          <p:nvPr>
+            <p:ph idx="1"/>
+          </p:nvPr>
+        </p:nvSpPr>
+        <p:spPr/>
+        <p:txBody>
+          <a:bodyPr wrap="square"/>
+          <a:lstStyle/>
+          <a:p>
+            <a:r>
+              <a:rPr b="1" dirty="0"/>
+              <a:t>Stage-2: </a:t>
+            </a:r>
+            <a:r>
+              <a:rPr b="1" dirty="0" err="1"/>
+              <a:t>자체</a:t>
+            </a:r>
+            <a:r>
+              <a:rPr b="1" dirty="0"/>
+              <a:t> </a:t>
+            </a:r>
+            <a:r>
+              <a:rPr b="1" dirty="0" err="1"/>
+              <a:t>학습</a:t>
+            </a:r>
+            <a:r>
+              <a:rPr b="1" dirty="0"/>
+              <a:t>(5-fold OOF) — Threshold-shift-only </a:t>
+            </a:r>
+            <a:r>
+              <a:rPr b="1" dirty="0" err="1"/>
+              <a:t>대비</a:t>
+            </a:r>
+            <a:r>
+              <a:rPr b="1" dirty="0"/>
+              <a:t> AEC </a:t>
+            </a:r>
+            <a:r>
+              <a:rPr b="1" dirty="0" err="1"/>
+              <a:t>효과는</a:t>
+            </a:r>
+            <a:r>
+              <a:rPr b="1" dirty="0"/>
+              <a:t> </a:t>
+            </a:r>
+            <a:r>
+              <a:rPr b="1" dirty="0" err="1"/>
+              <a:t>코호트마다</a:t>
+            </a:r>
+            <a:r>
+              <a:rPr b="1" dirty="0"/>
+              <a:t> </a:t>
+            </a:r>
+            <a:r>
+              <a:rPr b="1" dirty="0" err="1"/>
+              <a:t>다름</a:t>
+            </a:r>
+            <a:endParaRPr lang="en-US" b="1" dirty="0"/>
+          </a:p>
+          <a:p>
+            <a:pPr lvl="1"/>
+            <a:r>
+              <a:rPr lang="ko-KR" altLang="en-US" sz="1400" b="1" dirty="0"/>
+              <a:t>자체 학습</a:t>
+            </a:r>
+            <a:r>
+              <a:rPr lang="en-US" altLang="ko-KR" sz="1400" b="1" dirty="0"/>
+              <a:t>(self-trained): Threshold-shift-only vs. AEC-CNN — </a:t>
+            </a:r>
+            <a:r>
+              <a:rPr lang="ko-KR" altLang="en-US" sz="1400" b="1" dirty="0"/>
+              <a:t>동일 </a:t>
+            </a:r>
+            <a:r>
+              <a:rPr lang="en-US" altLang="ko-KR" sz="1400" b="1" dirty="0"/>
+              <a:t>sensitivity</a:t>
+            </a:r>
+            <a:r>
+              <a:rPr lang="ko-KR" altLang="en-US" sz="1400" b="1" dirty="0"/>
+              <a:t>에서 </a:t>
+            </a:r>
+            <a:r>
+              <a:rPr lang="en-US" altLang="ko-KR" sz="1400" b="1" dirty="0"/>
+              <a:t>specificity </a:t>
+            </a:r>
+            <a:r>
+              <a:rPr lang="ko-KR" altLang="en-US" sz="1400" b="1" dirty="0"/>
+              <a:t>비교</a:t>
+            </a:r>
+            <a:endParaRPr lang="en-US" altLang="ko-KR" sz="1400" b="1" dirty="0"/>
+          </a:p>
+          <a:p>
+            <a:pPr lvl="1"/>
+            <a:endParaRPr lang="en-US" altLang="ko-KR" sz="1400" b="1" dirty="0"/>
+          </a:p>
+          <a:p>
+            <a:pPr lvl="1"/>
+            <a:endParaRPr lang="en-US" altLang="ko-KR" sz="1400" b="1" dirty="0"/>
+          </a:p>
+          <a:p>
+            <a:pPr lvl="1"/>
+            <a:endParaRPr lang="en-US" altLang="ko-KR" sz="1400" b="1" dirty="0"/>
+          </a:p>
+          <a:p>
+            <a:pPr lvl="1"/>
+            <a:endParaRPr lang="en-US" altLang="ko-KR" sz="1400" b="1" dirty="0"/>
+          </a:p>
+          <a:p>
+            <a:pPr lvl="1"/>
+            <a:endParaRPr lang="en-US" altLang="ko-KR" sz="1400" b="1" dirty="0"/>
+          </a:p>
+          <a:p>
+            <a:pPr lvl="1"/>
+            <a:r>
+              <a:rPr lang="en-US" altLang="ko-KR" sz="1400" b="1" dirty="0"/>
+              <a:t>External transfer: </a:t>
+            </a:r>
+            <a:r>
+              <a:rPr lang="ko-KR" altLang="en-US" sz="1400" b="1" dirty="0"/>
+              <a:t>자체 학습된 모델을 다른 코호트에 그대로 적용</a:t>
+            </a:r>
+          </a:p>
+          <a:p>
+            <a:pPr lvl="1"/>
+            <a:endParaRPr b="1" dirty="0"/>
+          </a:p>
+        </p:txBody>
+      </p:sp>
+      <p:graphicFrame>
+        <p:nvGraphicFramePr>
+          <p:cNvPr id="5" name="Table 4"/>
+          <p:cNvGraphicFramePr>
+            <a:graphicFrameLocks noGrp="1"/>
+          </p:cNvGraphicFramePr>
+          <p:nvPr/>
+        </p:nvGraphicFramePr>
+        <p:xfrm>
+          <a:off x="1594578" y="2025000"/>
+          <a:ext cx="8642985" cy="1350000"/>
+        </p:xfrm>
+        <a:graphic>
+          <a:graphicData uri="http://schemas.openxmlformats.org/drawingml/2006/table">
+            <a:tbl>
+              <a:tblPr firstRow="1" bandRow="1">
+                <a:tableStyleId>{9D7B26C5-4107-4FEC-AEDC-1716B250A1EF}</a:tableStyleId>
+              </a:tblPr>
+              <a:tblGrid>
+                <a:gridCol w="926395">
+                  <a:extLst>
+                    <a:ext uri="{9D8B030D-6E8A-4147-A177-3AD203B41FA5}">
+                      <a16:colId xmlns:a16="http://schemas.microsoft.com/office/drawing/2014/main" val="20000"/>
+                    </a:ext>
+                  </a:extLst>
+                </a:gridCol>
+                <a:gridCol w="1879393">
+                  <a:extLst>
+                    <a:ext uri="{9D8B030D-6E8A-4147-A177-3AD203B41FA5}">
+                      <a16:colId xmlns:a16="http://schemas.microsoft.com/office/drawing/2014/main" val="20001"/>
+                    </a:ext>
+                  </a:extLst>
+                </a:gridCol>
+                <a:gridCol w="1099820">
+                  <a:extLst>
+                    <a:ext uri="{9D8B030D-6E8A-4147-A177-3AD203B41FA5}">
+                      <a16:colId xmlns:a16="http://schemas.microsoft.com/office/drawing/2014/main" val="20002"/>
+                    </a:ext>
+                  </a:extLst>
+                </a:gridCol>
+                <a:gridCol w="788328">
+                  <a:extLst>
+                    <a:ext uri="{9D8B030D-6E8A-4147-A177-3AD203B41FA5}">
+                      <a16:colId xmlns:a16="http://schemas.microsoft.com/office/drawing/2014/main" val="20003"/>
+                    </a:ext>
+                  </a:extLst>
+                </a:gridCol>
+                <a:gridCol w="769807">
+                  <a:extLst>
+                    <a:ext uri="{9D8B030D-6E8A-4147-A177-3AD203B41FA5}">
+                      <a16:colId xmlns:a16="http://schemas.microsoft.com/office/drawing/2014/main" val="20004"/>
+                    </a:ext>
+                  </a:extLst>
+                </a:gridCol>
+                <a:gridCol w="3179242">
+                  <a:extLst>
+                    <a:ext uri="{9D8B030D-6E8A-4147-A177-3AD203B41FA5}">
+                      <a16:colId xmlns:a16="http://schemas.microsoft.com/office/drawing/2014/main" val="20005"/>
+                    </a:ext>
+                  </a:extLst>
+                </a:gridCol>
+              </a:tblGrid>
+              <a:tr h="270000">
+                <a:tc>
+                  <a:txBody>
+                    <a:bodyPr/>
+                    <a:lstStyle/>
+                    <a:p>
+                      <a:r>
+                        <a:rPr sz="1050" b="1"/>
+                        <a:t>Cohort</a:t>
+                      </a:r>
+                    </a:p>
+                  </a:txBody>
+                  <a:tcPr/>
+                </a:tc>
+                <a:tc>
+                  <a:txBody>
+                    <a:bodyPr/>
+                    <a:lstStyle/>
+                    <a:p>
+                      <a:r>
+                        <a:rPr sz="1050" b="1"/>
+                        <a:t>Stage-2 input</a:t>
+                      </a:r>
+                    </a:p>
+                  </a:txBody>
+                  <a:tcPr/>
+                </a:tc>
+                <a:tc>
+                  <a:txBody>
+                    <a:bodyPr/>
+                    <a:lstStyle/>
+                    <a:p>
+                      <a:r>
+                        <a:rPr sz="1050" b="1"/>
+                        <a:t>spec p-value</a:t>
+                      </a:r>
+                    </a:p>
+                  </a:txBody>
+                  <a:tcPr/>
+                </a:tc>
+                <a:tc>
+                  <a:txBody>
+                    <a:bodyPr/>
+                    <a:lstStyle/>
+                    <a:p>
+                      <a:r>
+                        <a:rPr sz="1050" b="1"/>
+                        <a:t>Net NRI</a:t>
+                      </a:r>
+                    </a:p>
+                  </a:txBody>
+                  <a:tcPr/>
+                </a:tc>
+                <a:tc>
+                  <a:txBody>
+                    <a:bodyPr/>
+                    <a:lstStyle/>
+                    <a:p>
+                      <a:r>
+                        <a:rPr sz="1050" b="1"/>
+                        <a:t>n_deesc</a:t>
+                      </a:r>
+                    </a:p>
+                  </a:txBody>
+                  <a:tcPr/>
+                </a:tc>
+                <a:tc>
+                  <a:txBody>
+                    <a:bodyPr/>
+                    <a:lstStyle/>
+                    <a:p>
+                      <a:r>
+                        <a:rPr sz="1050" b="1"/>
+                        <a:t>Full-pipeline AUC (Δ vs Stage-1, DeLong p)</a:t>
+                      </a:r>
+                    </a:p>
+                  </a:txBody>
+                  <a:tcPr/>
+                </a:tc>
+                <a:extLst>
+                  <a:ext uri="{0D108BD9-81ED-4DB2-BD59-A6C34878D82A}">
+                    <a16:rowId xmlns:a16="http://schemas.microsoft.com/office/drawing/2014/main" val="10000"/>
+                  </a:ext>
+                </a:extLst>
+              </a:tr>
+              <a:tr h="270000">
+                <a:tc>
+                  <a:txBody>
+                    <a:bodyPr/>
+                    <a:lstStyle/>
+                    <a:p>
+                      <a:r>
+                        <a:rPr sz="1100" b="0" dirty="0"/>
+                        <a:t>Sinchon</a:t>
+                      </a:r>
+                    </a:p>
+                  </a:txBody>
+                  <a:tcPr>
+                    <a:solidFill>
+                      <a:schemeClr val="bg1"/>
+                    </a:solidFill>
+                  </a:tcPr>
+                </a:tc>
+                <a:tc>
+                  <a:txBody>
+                    <a:bodyPr/>
+                    <a:lstStyle/>
+                    <a:p>
+                      <a:r>
+                        <a:rPr sz="1100" b="0" dirty="0"/>
+                        <a:t>Threshold-shift only</a:t>
+                      </a:r>
+                    </a:p>
+                  </a:txBody>
+                  <a:tcPr>
+                    <a:solidFill>
+                      <a:schemeClr val="bg1"/>
+                    </a:solidFill>
+                  </a:tcPr>
+                </a:tc>
+                <a:tc>
+                  <a:txBody>
+                    <a:bodyPr/>
+                    <a:lstStyle/>
+                    <a:p>
+                      <a:r>
+                        <a:rPr sz="1100" b="0" dirty="0"/>
+                        <a:t>3.4e-21</a:t>
+                      </a:r>
+                    </a:p>
+                  </a:txBody>
+                  <a:tcPr>
+                    <a:solidFill>
+                      <a:schemeClr val="bg1"/>
+                    </a:solidFill>
+                  </a:tcPr>
+                </a:tc>
+                <a:tc>
+                  <a:txBody>
+                    <a:bodyPr/>
+                    <a:lstStyle/>
+                    <a:p>
+                      <a:r>
+                        <a:rPr sz="1100" b="0"/>
+                        <a:t>+63</a:t>
+                      </a:r>
+                    </a:p>
+                  </a:txBody>
+                  <a:tcPr>
+                    <a:solidFill>
+                      <a:schemeClr val="bg1"/>
+                    </a:solidFill>
+                  </a:tcPr>
+                </a:tc>
+                <a:tc>
+                  <a:txBody>
+                    <a:bodyPr/>
+                    <a:lstStyle/>
+                    <a:p>
+                      <a:r>
+                        <a:rPr sz="1100" b="0"/>
+                        <a:t>75</a:t>
+                      </a:r>
+                    </a:p>
+                  </a:txBody>
+                  <a:tcPr>
+                    <a:solidFill>
+                      <a:schemeClr val="bg1"/>
+                    </a:solidFill>
+                  </a:tcPr>
+                </a:tc>
+                <a:tc>
+                  <a:txBody>
+                    <a:bodyPr/>
+                    <a:lstStyle/>
+                    <a:p>
+                      <a:r>
+                        <a:rPr sz="1100" b="0"/>
+                        <a:t>-</a:t>
+                      </a:r>
+                    </a:p>
+                  </a:txBody>
+                  <a:tcPr>
+                    <a:solidFill>
+                      <a:schemeClr val="bg1"/>
+                    </a:solidFill>
+                  </a:tcPr>
+                </a:tc>
+                <a:extLst>
+                  <a:ext uri="{0D108BD9-81ED-4DB2-BD59-A6C34878D82A}">
+                    <a16:rowId xmlns:a16="http://schemas.microsoft.com/office/drawing/2014/main" val="10001"/>
+                  </a:ext>
+                </a:extLst>
+              </a:tr>
+              <a:tr h="270000">
+                <a:tc>
+                  <a:txBody>
+                    <a:bodyPr/>
+                    <a:lstStyle/>
+                    <a:p>
+                      <a:r>
+                        <a:rPr sz="1100" b="1"/>
+                        <a:t>Sinchon</a:t>
+                      </a:r>
+                    </a:p>
+                  </a:txBody>
+                  <a:tcPr>
+                    <a:solidFill>
+                      <a:schemeClr val="bg1"/>
+                    </a:solidFill>
+                  </a:tcPr>
+                </a:tc>
+                <a:tc>
+                  <a:txBody>
+                    <a:bodyPr/>
+                    <a:lstStyle/>
+                    <a:p>
+                      <a:r>
+                        <a:rPr sz="1100" b="1" dirty="0"/>
+                        <a:t>AEC-CNN (self-trained)</a:t>
+                      </a:r>
+                    </a:p>
+                  </a:txBody>
+                  <a:tcPr>
+                    <a:solidFill>
+                      <a:schemeClr val="bg1"/>
+                    </a:solidFill>
+                  </a:tcPr>
+                </a:tc>
+                <a:tc>
+                  <a:txBody>
+                    <a:bodyPr/>
+                    <a:lstStyle/>
+                    <a:p>
+                      <a:r>
+                        <a:rPr sz="1100" b="1"/>
+                        <a:t>4.0e-28</a:t>
+                      </a:r>
+                    </a:p>
+                  </a:txBody>
+                  <a:tcPr>
+                    <a:solidFill>
+                      <a:schemeClr val="bg1"/>
+                    </a:solidFill>
+                  </a:tcPr>
+                </a:tc>
+                <a:tc>
+                  <a:txBody>
+                    <a:bodyPr/>
+                    <a:lstStyle/>
+                    <a:p>
+                      <a:r>
+                        <a:rPr sz="1100" b="1" dirty="0"/>
+                        <a:t>+86</a:t>
+                      </a:r>
+                    </a:p>
+                  </a:txBody>
+                  <a:tcPr>
+                    <a:solidFill>
+                      <a:schemeClr val="bg1"/>
+                    </a:solidFill>
+                  </a:tcPr>
+                </a:tc>
+                <a:tc>
+                  <a:txBody>
+                    <a:bodyPr/>
+                    <a:lstStyle/>
+                    <a:p>
+                      <a:r>
+                        <a:rPr sz="1100" b="1"/>
+                        <a:t>98</a:t>
+                      </a:r>
+                    </a:p>
+                  </a:txBody>
+                  <a:tcPr>
+                    <a:solidFill>
+                      <a:schemeClr val="bg1"/>
+                    </a:solidFill>
+                  </a:tcPr>
+                </a:tc>
+                <a:tc>
+                  <a:txBody>
+                    <a:bodyPr/>
+                    <a:lstStyle/>
+                    <a:p>
+                      <a:r>
+                        <a:rPr sz="1100" b="1" dirty="0"/>
+                        <a:t>0.829 (Δ-0.003, p=0.256)</a:t>
+                      </a:r>
+                    </a:p>
+                  </a:txBody>
+                  <a:tcPr>
+                    <a:solidFill>
+                      <a:schemeClr val="bg1"/>
+                    </a:solidFill>
+                  </a:tcPr>
+                </a:tc>
+                <a:extLst>
+                  <a:ext uri="{0D108BD9-81ED-4DB2-BD59-A6C34878D82A}">
+                    <a16:rowId xmlns:a16="http://schemas.microsoft.com/office/drawing/2014/main" val="10002"/>
+                  </a:ext>
+                </a:extLst>
+              </a:tr>
+              <a:tr h="270000">
+                <a:tc>
+                  <a:txBody>
+                    <a:bodyPr/>
+                    <a:lstStyle/>
+                    <a:p>
+                      <a:r>
+                        <a:rPr sz="1100" b="0"/>
+                        <a:t>Gangnam</a:t>
+                      </a:r>
+                    </a:p>
+                  </a:txBody>
+                  <a:tcPr>
+                    <a:solidFill>
+                      <a:schemeClr val="bg1"/>
+                    </a:solidFill>
+                  </a:tcPr>
+                </a:tc>
+                <a:tc>
+                  <a:txBody>
+                    <a:bodyPr/>
+                    <a:lstStyle/>
+                    <a:p>
+                      <a:r>
+                        <a:rPr sz="1100" b="0"/>
+                        <a:t>Threshold-shift only</a:t>
+                      </a:r>
+                    </a:p>
+                  </a:txBody>
+                  <a:tcPr>
+                    <a:solidFill>
+                      <a:schemeClr val="bg1"/>
+                    </a:solidFill>
+                  </a:tcPr>
+                </a:tc>
+                <a:tc>
+                  <a:txBody>
+                    <a:bodyPr/>
+                    <a:lstStyle/>
+                    <a:p>
+                      <a:r>
+                        <a:rPr sz="1100" b="0"/>
+                        <a:t>4.1e-25</a:t>
+                      </a:r>
+                    </a:p>
+                  </a:txBody>
+                  <a:tcPr>
+                    <a:solidFill>
+                      <a:schemeClr val="bg1"/>
+                    </a:solidFill>
+                  </a:tcPr>
+                </a:tc>
+                <a:tc>
+                  <a:txBody>
+                    <a:bodyPr/>
+                    <a:lstStyle/>
+                    <a:p>
+                      <a:r>
+                        <a:rPr sz="1100" b="0"/>
+                        <a:t>+77</a:t>
+                      </a:r>
+                    </a:p>
+                  </a:txBody>
+                  <a:tcPr>
+                    <a:solidFill>
+                      <a:schemeClr val="bg1"/>
+                    </a:solidFill>
+                  </a:tcPr>
+                </a:tc>
+                <a:tc>
+                  <a:txBody>
+                    <a:bodyPr/>
+                    <a:lstStyle/>
+                    <a:p>
+                      <a:r>
+                        <a:rPr sz="1100" b="0"/>
+                        <a:t>87</a:t>
+                      </a:r>
+                    </a:p>
+                  </a:txBody>
+                  <a:tcPr>
+                    <a:solidFill>
+                      <a:schemeClr val="bg1"/>
+                    </a:solidFill>
+                  </a:tcPr>
+                </a:tc>
+                <a:tc>
+                  <a:txBody>
+                    <a:bodyPr/>
+                    <a:lstStyle/>
+                    <a:p>
+                      <a:r>
+                        <a:rPr sz="1100" b="0" dirty="0"/>
+                        <a:t>-</a:t>
+                      </a:r>
+                    </a:p>
+                  </a:txBody>
+                  <a:tcPr>
+                    <a:solidFill>
+                      <a:schemeClr val="bg1"/>
+                    </a:solidFill>
+                  </a:tcPr>
+                </a:tc>
+                <a:extLst>
+                  <a:ext uri="{0D108BD9-81ED-4DB2-BD59-A6C34878D82A}">
+                    <a16:rowId xmlns:a16="http://schemas.microsoft.com/office/drawing/2014/main" val="10003"/>
+                  </a:ext>
+                </a:extLst>
+              </a:tr>
+              <a:tr h="270000">
+                <a:tc>
+                  <a:txBody>
+                    <a:bodyPr/>
+                    <a:lstStyle/>
+                    <a:p>
+                      <a:r>
+                        <a:rPr sz="1100" b="1"/>
+                        <a:t>Gangnam</a:t>
+                      </a:r>
+                    </a:p>
+                  </a:txBody>
+                  <a:tcPr/>
+                </a:tc>
+                <a:tc>
+                  <a:txBody>
+                    <a:bodyPr/>
+                    <a:lstStyle/>
+                    <a:p>
+                      <a:r>
+                        <a:rPr sz="1100" b="1" dirty="0"/>
+                        <a:t>AEC-CNN (self-trained)</a:t>
+                      </a:r>
+                    </a:p>
+                  </a:txBody>
+                  <a:tcPr/>
+                </a:tc>
+                <a:tc>
+                  <a:txBody>
+                    <a:bodyPr/>
+                    <a:lstStyle/>
+                    <a:p>
+                      <a:r>
+                        <a:rPr sz="1100" b="1"/>
+                        <a:t>5.3e-23</a:t>
+                      </a:r>
+                    </a:p>
+                  </a:txBody>
+                  <a:tcPr/>
+                </a:tc>
+                <a:tc>
+                  <a:txBody>
+                    <a:bodyPr/>
+                    <a:lstStyle/>
+                    <a:p>
+                      <a:r>
+                        <a:rPr sz="1100" b="1"/>
+                        <a:t>+70</a:t>
+                      </a:r>
+                    </a:p>
+                  </a:txBody>
+                  <a:tcPr/>
+                </a:tc>
+                <a:tc>
+                  <a:txBody>
+                    <a:bodyPr/>
+                    <a:lstStyle/>
+                    <a:p>
+                      <a:r>
+                        <a:rPr sz="1100" b="1"/>
+                        <a:t>80</a:t>
+                      </a:r>
+                    </a:p>
+                  </a:txBody>
+                  <a:tcPr/>
+                </a:tc>
+                <a:tc>
+                  <a:txBody>
+                    <a:bodyPr/>
+                    <a:lstStyle/>
+                    <a:p>
+                      <a:r>
+                        <a:rPr sz="1100" b="1" dirty="0"/>
+                        <a:t>0.827 (Δ-0.002, p=0.632)</a:t>
+                      </a:r>
+                    </a:p>
+                  </a:txBody>
+                  <a:tcPr/>
+                </a:tc>
+                <a:extLst>
+                  <a:ext uri="{0D108BD9-81ED-4DB2-BD59-A6C34878D82A}">
+                    <a16:rowId xmlns:a16="http://schemas.microsoft.com/office/drawing/2014/main" val="10004"/>
+                  </a:ext>
+                </a:extLst>
+              </a:tr>
+            </a:tbl>
+          </a:graphicData>
+        </a:graphic>
+      </p:graphicFrame>
+      <p:sp>
+        <p:nvSpPr>
+          <p:cNvPr id="6" name="TextBox 5"/>
+          <p:cNvSpPr txBox="1"/>
+          <p:nvPr/>
+        </p:nvSpPr>
+        <p:spPr>
+          <a:xfrm>
+            <a:off x="1594578" y="3357939"/>
+            <a:ext cx="8642986" cy="430887"/>
+          </a:xfrm>
+          <a:prstGeom prst="rect">
+            <a:avLst/>
+          </a:prstGeom>
+          <a:noFill/>
+        </p:spPr>
+        <p:txBody>
+          <a:bodyPr wrap="square">
+            <a:spAutoFit/>
+          </a:bodyPr>
+          <a:lstStyle/>
+          <a:p>
+            <a:r>
+              <a:rPr sz="1100" b="0" i="1" dirty="0">
+                <a:solidFill>
+                  <a:srgbClr val="606060"/>
+                </a:solidFill>
+              </a:rPr>
+              <a:t>→ Sinchon: AEC-CNN(+86)이 threshold-shift(+63)를 </a:t>
+            </a:r>
+            <a:r>
+              <a:rPr sz="1100" b="0" i="1" dirty="0" err="1">
+                <a:solidFill>
+                  <a:srgbClr val="606060"/>
+                </a:solidFill>
+              </a:rPr>
+              <a:t>유의하게</a:t>
+            </a:r>
+            <a:r>
+              <a:rPr sz="1100" b="0" i="1" dirty="0">
+                <a:solidFill>
+                  <a:srgbClr val="606060"/>
+                </a:solidFill>
+              </a:rPr>
+              <a:t> </a:t>
+            </a:r>
+            <a:r>
+              <a:rPr sz="1100" b="0" i="1" dirty="0" err="1">
+                <a:solidFill>
+                  <a:srgbClr val="606060"/>
+                </a:solidFill>
+              </a:rPr>
+              <a:t>초과</a:t>
+            </a:r>
+            <a:r>
+              <a:rPr sz="1100" b="0" i="1" dirty="0">
+                <a:solidFill>
+                  <a:srgbClr val="606060"/>
+                </a:solidFill>
+              </a:rPr>
+              <a:t> / Gangnam: threshold-shift(+77)가 </a:t>
+            </a:r>
+            <a:r>
+              <a:rPr sz="1100" b="0" i="1" dirty="0" err="1">
+                <a:solidFill>
+                  <a:srgbClr val="606060"/>
+                </a:solidFill>
+              </a:rPr>
+              <a:t>오히려</a:t>
+            </a:r>
+            <a:r>
+              <a:rPr sz="1100" b="0" i="1" dirty="0">
+                <a:solidFill>
+                  <a:srgbClr val="606060"/>
+                </a:solidFill>
+              </a:rPr>
+              <a:t> AEC-CNN(+70)</a:t>
+            </a:r>
+            <a:r>
+              <a:rPr sz="1100" b="0" i="1" dirty="0" err="1">
+                <a:solidFill>
+                  <a:srgbClr val="606060"/>
+                </a:solidFill>
+              </a:rPr>
+              <a:t>보다</a:t>
+            </a:r>
+            <a:r>
+              <a:rPr sz="1100" b="0" i="1" dirty="0">
+                <a:solidFill>
+                  <a:srgbClr val="606060"/>
+                </a:solidFill>
+              </a:rPr>
+              <a:t> </a:t>
+            </a:r>
+            <a:r>
+              <a:rPr sz="1100" b="0" i="1" dirty="0" err="1">
+                <a:solidFill>
+                  <a:srgbClr val="606060"/>
+                </a:solidFill>
+              </a:rPr>
+              <a:t>높음</a:t>
+            </a:r>
+            <a:r>
+              <a:rPr sz="1100" b="0" i="1" dirty="0">
+                <a:solidFill>
+                  <a:srgbClr val="606060"/>
+                </a:solidFill>
+              </a:rPr>
+              <a:t> — AEC </a:t>
+            </a:r>
+            <a:r>
+              <a:rPr sz="1100" b="0" i="1" dirty="0" err="1">
+                <a:solidFill>
+                  <a:srgbClr val="606060"/>
+                </a:solidFill>
+              </a:rPr>
+              <a:t>효과가</a:t>
+            </a:r>
+            <a:r>
+              <a:rPr sz="1100" b="0" i="1" dirty="0">
+                <a:solidFill>
+                  <a:srgbClr val="606060"/>
+                </a:solidFill>
+              </a:rPr>
+              <a:t> </a:t>
+            </a:r>
+            <a:r>
+              <a:rPr sz="1100" b="0" i="1" dirty="0" err="1">
+                <a:solidFill>
+                  <a:srgbClr val="606060"/>
+                </a:solidFill>
+              </a:rPr>
+              <a:t>코호트</a:t>
+            </a:r>
+            <a:r>
+              <a:rPr sz="1100" b="0" i="1" dirty="0">
+                <a:solidFill>
+                  <a:srgbClr val="606060"/>
+                </a:solidFill>
+              </a:rPr>
+              <a:t> 간 </a:t>
+            </a:r>
+            <a:r>
+              <a:rPr sz="1100" b="0" i="1" dirty="0" err="1">
+                <a:solidFill>
+                  <a:srgbClr val="606060"/>
+                </a:solidFill>
+              </a:rPr>
+              <a:t>반대</a:t>
+            </a:r>
+            <a:r>
+              <a:rPr sz="1100" b="0" i="1" dirty="0">
+                <a:solidFill>
+                  <a:srgbClr val="606060"/>
+                </a:solidFill>
+              </a:rPr>
+              <a:t>. </a:t>
+            </a:r>
+            <a:r>
+              <a:rPr sz="1100" b="0" i="1" dirty="0" err="1">
+                <a:solidFill>
+                  <a:srgbClr val="606060"/>
+                </a:solidFill>
+              </a:rPr>
+              <a:t>AUC는</a:t>
+            </a:r>
+            <a:r>
+              <a:rPr sz="1100" b="0" i="1" dirty="0">
+                <a:solidFill>
+                  <a:srgbClr val="606060"/>
+                </a:solidFill>
+              </a:rPr>
+              <a:t> 둘 다 baseline </a:t>
+            </a:r>
+            <a:r>
+              <a:rPr sz="1100" b="0" i="1" dirty="0" err="1">
+                <a:solidFill>
+                  <a:srgbClr val="606060"/>
+                </a:solidFill>
+              </a:rPr>
+              <a:t>대비</a:t>
+            </a:r>
+            <a:r>
+              <a:rPr sz="1100" b="0" i="1" dirty="0">
+                <a:solidFill>
+                  <a:srgbClr val="606060"/>
+                </a:solidFill>
+              </a:rPr>
+              <a:t> </a:t>
+            </a:r>
+            <a:r>
+              <a:rPr sz="1100" b="0" i="1" dirty="0" err="1">
+                <a:solidFill>
+                  <a:srgbClr val="606060"/>
+                </a:solidFill>
+              </a:rPr>
+              <a:t>유의한</a:t>
+            </a:r>
+            <a:r>
+              <a:rPr sz="1100" b="0" i="1" dirty="0">
+                <a:solidFill>
+                  <a:srgbClr val="606060"/>
+                </a:solidFill>
+              </a:rPr>
+              <a:t> </a:t>
+            </a:r>
+            <a:r>
+              <a:rPr sz="1100" b="0" i="1" dirty="0" err="1">
+                <a:solidFill>
+                  <a:srgbClr val="606060"/>
+                </a:solidFill>
+              </a:rPr>
+              <a:t>상승</a:t>
+            </a:r>
+            <a:r>
+              <a:rPr sz="1100" b="0" i="1" dirty="0">
+                <a:solidFill>
+                  <a:srgbClr val="606060"/>
+                </a:solidFill>
+              </a:rPr>
+              <a:t> </a:t>
+            </a:r>
+            <a:r>
+              <a:rPr sz="1100" b="0" i="1" dirty="0" err="1">
+                <a:solidFill>
+                  <a:srgbClr val="606060"/>
+                </a:solidFill>
+              </a:rPr>
+              <a:t>없음</a:t>
+            </a:r>
+            <a:r>
+              <a:rPr sz="1100" b="0" i="1" dirty="0">
+                <a:solidFill>
+                  <a:srgbClr val="606060"/>
+                </a:solidFill>
+              </a:rPr>
+              <a:t>(</a:t>
+            </a:r>
+            <a:r>
+              <a:rPr sz="1100" b="0" i="1" dirty="0" err="1">
+                <a:solidFill>
+                  <a:srgbClr val="606060"/>
+                </a:solidFill>
+              </a:rPr>
+              <a:t>오히려</a:t>
+            </a:r>
+            <a:r>
+              <a:rPr sz="1100" b="0" i="1" dirty="0">
+                <a:solidFill>
+                  <a:srgbClr val="606060"/>
+                </a:solidFill>
+              </a:rPr>
+              <a:t> </a:t>
+            </a:r>
+            <a:r>
+              <a:rPr sz="1100" b="0" i="1" dirty="0" err="1">
+                <a:solidFill>
+                  <a:srgbClr val="606060"/>
+                </a:solidFill>
+              </a:rPr>
+              <a:t>소폭</a:t>
+            </a:r>
+            <a:r>
+              <a:rPr sz="1100" b="0" i="1" dirty="0">
+                <a:solidFill>
+                  <a:srgbClr val="606060"/>
+                </a:solidFill>
+              </a:rPr>
+              <a:t> </a:t>
+            </a:r>
+            <a:r>
+              <a:rPr sz="1100" b="0" i="1" dirty="0" err="1">
+                <a:solidFill>
+                  <a:srgbClr val="606060"/>
+                </a:solidFill>
+              </a:rPr>
+              <a:t>하락</a:t>
+            </a:r>
+            <a:r>
+              <a:rPr sz="1100" b="0" i="1" dirty="0">
+                <a:solidFill>
+                  <a:srgbClr val="606060"/>
+                </a:solidFill>
+              </a:rPr>
+              <a:t>, </a:t>
+            </a:r>
+            <a:r>
+              <a:rPr sz="1100" b="0" i="1" dirty="0" err="1">
+                <a:solidFill>
+                  <a:srgbClr val="606060"/>
+                </a:solidFill>
+              </a:rPr>
+              <a:t>비유의</a:t>
+            </a:r>
+            <a:r>
+              <a:rPr sz="1100" b="0" i="1" dirty="0">
+                <a:solidFill>
+                  <a:srgbClr val="606060"/>
+                </a:solidFill>
+              </a:rPr>
+              <a:t>)</a:t>
+            </a:r>
+          </a:p>
+        </p:txBody>
+      </p:sp>
+      <p:graphicFrame>
+        <p:nvGraphicFramePr>
+          <p:cNvPr id="8" name="Table 7"/>
+          <p:cNvGraphicFramePr>
+            <a:graphicFrameLocks noGrp="1"/>
+          </p:cNvGraphicFramePr>
+          <p:nvPr/>
+        </p:nvGraphicFramePr>
+        <p:xfrm>
+          <a:off x="1594578" y="4266501"/>
+          <a:ext cx="8642986" cy="950000"/>
+        </p:xfrm>
+        <a:graphic>
+          <a:graphicData uri="http://schemas.openxmlformats.org/drawingml/2006/table">
+            <a:tbl>
+              <a:tblPr firstRow="1" bandRow="1">
+                <a:tableStyleId>{9D7B26C5-4107-4FEC-AEDC-1716B250A1EF}</a:tableStyleId>
+              </a:tblPr>
+              <a:tblGrid>
+                <a:gridCol w="919480">
+                  <a:extLst>
+                    <a:ext uri="{9D8B030D-6E8A-4147-A177-3AD203B41FA5}">
+                      <a16:colId xmlns:a16="http://schemas.microsoft.com/office/drawing/2014/main" val="20000"/>
+                    </a:ext>
+                  </a:extLst>
+                </a:gridCol>
+                <a:gridCol w="1557655">
+                  <a:extLst>
+                    <a:ext uri="{9D8B030D-6E8A-4147-A177-3AD203B41FA5}">
+                      <a16:colId xmlns:a16="http://schemas.microsoft.com/office/drawing/2014/main" val="20001"/>
+                    </a:ext>
+                  </a:extLst>
+                </a:gridCol>
+                <a:gridCol w="1036955">
+                  <a:extLst>
+                    <a:ext uri="{9D8B030D-6E8A-4147-A177-3AD203B41FA5}">
+                      <a16:colId xmlns:a16="http://schemas.microsoft.com/office/drawing/2014/main" val="20002"/>
+                    </a:ext>
+                  </a:extLst>
+                </a:gridCol>
+                <a:gridCol w="743268">
+                  <a:extLst>
+                    <a:ext uri="{9D8B030D-6E8A-4147-A177-3AD203B41FA5}">
+                      <a16:colId xmlns:a16="http://schemas.microsoft.com/office/drawing/2014/main" val="20003"/>
+                    </a:ext>
+                  </a:extLst>
+                </a:gridCol>
+                <a:gridCol w="725805">
+                  <a:extLst>
+                    <a:ext uri="{9D8B030D-6E8A-4147-A177-3AD203B41FA5}">
+                      <a16:colId xmlns:a16="http://schemas.microsoft.com/office/drawing/2014/main" val="20004"/>
+                    </a:ext>
+                  </a:extLst>
+                </a:gridCol>
+                <a:gridCol w="662305">
+                  <a:extLst>
+                    <a:ext uri="{9D8B030D-6E8A-4147-A177-3AD203B41FA5}">
+                      <a16:colId xmlns:a16="http://schemas.microsoft.com/office/drawing/2014/main" val="20005"/>
+                    </a:ext>
+                  </a:extLst>
+                </a:gridCol>
+                <a:gridCol w="2997518">
+                  <a:extLst>
+                    <a:ext uri="{9D8B030D-6E8A-4147-A177-3AD203B41FA5}">
+                      <a16:colId xmlns:a16="http://schemas.microsoft.com/office/drawing/2014/main" val="20006"/>
+                    </a:ext>
+                  </a:extLst>
+                </a:gridCol>
+              </a:tblGrid>
+              <a:tr h="316666">
+                <a:tc>
+                  <a:txBody>
+                    <a:bodyPr/>
+                    <a:lstStyle/>
+                    <a:p>
+                      <a:r>
+                        <a:rPr sz="1050" b="1"/>
+                        <a:t>Trained on</a:t>
+                      </a:r>
+                    </a:p>
+                  </a:txBody>
+                  <a:tcPr/>
+                </a:tc>
+                <a:tc>
+                  <a:txBody>
+                    <a:bodyPr/>
+                    <a:lstStyle/>
+                    <a:p>
+                      <a:r>
+                        <a:rPr sz="1050" b="1"/>
+                        <a:t>Tested on</a:t>
+                      </a:r>
+                    </a:p>
+                  </a:txBody>
+                  <a:tcPr/>
+                </a:tc>
+                <a:tc>
+                  <a:txBody>
+                    <a:bodyPr/>
+                    <a:lstStyle/>
+                    <a:p>
+                      <a:r>
+                        <a:rPr sz="1050" b="1"/>
+                        <a:t>spec p-value</a:t>
+                      </a:r>
+                    </a:p>
+                  </a:txBody>
+                  <a:tcPr/>
+                </a:tc>
+                <a:tc>
+                  <a:txBody>
+                    <a:bodyPr/>
+                    <a:lstStyle/>
+                    <a:p>
+                      <a:r>
+                        <a:rPr sz="1050" b="1"/>
+                        <a:t>Net NRI</a:t>
+                      </a:r>
+                    </a:p>
+                  </a:txBody>
+                  <a:tcPr/>
+                </a:tc>
+                <a:tc>
+                  <a:txBody>
+                    <a:bodyPr/>
+                    <a:lstStyle/>
+                    <a:p>
+                      <a:r>
+                        <a:rPr sz="1050" b="1"/>
+                        <a:t>n_deesc</a:t>
+                      </a:r>
+                    </a:p>
+                  </a:txBody>
+                  <a:tcPr/>
+                </a:tc>
+                <a:tc>
+                  <a:txBody>
+                    <a:bodyPr/>
+                    <a:lstStyle/>
+                    <a:p>
+                      <a:r>
+                        <a:rPr sz="1050" b="1"/>
+                        <a:t>NI test</a:t>
+                      </a:r>
+                    </a:p>
+                  </a:txBody>
+                  <a:tcPr/>
+                </a:tc>
+                <a:tc>
+                  <a:txBody>
+                    <a:bodyPr/>
+                    <a:lstStyle/>
+                    <a:p>
+                      <a:r>
+                        <a:rPr sz="1050" b="1" dirty="0"/>
+                        <a:t>Full-pipeline AUC (Δ vs Stage-1, DeLong p)</a:t>
+                      </a:r>
+                    </a:p>
+                  </a:txBody>
+                  <a:tcPr/>
+                </a:tc>
+                <a:extLst>
+                  <a:ext uri="{0D108BD9-81ED-4DB2-BD59-A6C34878D82A}">
+                    <a16:rowId xmlns:a16="http://schemas.microsoft.com/office/drawing/2014/main" val="10000"/>
+                  </a:ext>
+                </a:extLst>
+              </a:tr>
+              <a:tr h="316666">
+                <a:tc>
+                  <a:txBody>
+                    <a:bodyPr/>
+                    <a:lstStyle/>
+                    <a:p>
+                      <a:r>
+                        <a:rPr sz="1100" b="0" dirty="0"/>
+                        <a:t>Sinchon</a:t>
+                      </a:r>
+                    </a:p>
+                  </a:txBody>
+                  <a:tcPr>
+                    <a:solidFill>
+                      <a:schemeClr val="bg1">
+                        <a:alpha val="20000"/>
+                      </a:schemeClr>
+                    </a:solidFill>
+                  </a:tcPr>
+                </a:tc>
+                <a:tc>
+                  <a:txBody>
+                    <a:bodyPr/>
+                    <a:lstStyle/>
+                    <a:p>
+                      <a:r>
+                        <a:rPr sz="1100" b="1" dirty="0"/>
+                        <a:t>Gangnam (external)</a:t>
+                      </a:r>
+                    </a:p>
+                  </a:txBody>
+                  <a:tcPr>
+                    <a:solidFill>
+                      <a:schemeClr val="bg1">
+                        <a:alpha val="20000"/>
+                      </a:schemeClr>
+                    </a:solidFill>
+                  </a:tcPr>
+                </a:tc>
+                <a:tc>
+                  <a:txBody>
+                    <a:bodyPr/>
+                    <a:lstStyle/>
+                    <a:p>
+                      <a:r>
+                        <a:rPr sz="1100" b="1" dirty="0"/>
+                        <a:t>3.1e-33</a:t>
+                      </a:r>
+                    </a:p>
+                  </a:txBody>
+                  <a:tcPr>
+                    <a:solidFill>
+                      <a:schemeClr val="bg1">
+                        <a:alpha val="20000"/>
+                      </a:schemeClr>
+                    </a:solidFill>
+                  </a:tcPr>
+                </a:tc>
+                <a:tc>
+                  <a:txBody>
+                    <a:bodyPr/>
+                    <a:lstStyle/>
+                    <a:p>
+                      <a:r>
+                        <a:rPr sz="1100" b="1" dirty="0"/>
+                        <a:t>+95</a:t>
+                      </a:r>
+                    </a:p>
+                  </a:txBody>
+                  <a:tcPr>
+                    <a:solidFill>
+                      <a:schemeClr val="bg1">
+                        <a:alpha val="20000"/>
+                      </a:schemeClr>
+                    </a:solidFill>
+                  </a:tcPr>
+                </a:tc>
+                <a:tc>
+                  <a:txBody>
+                    <a:bodyPr/>
+                    <a:lstStyle/>
+                    <a:p>
+                      <a:r>
+                        <a:rPr sz="1100" b="1" dirty="0"/>
+                        <a:t>123</a:t>
+                      </a:r>
+                    </a:p>
+                  </a:txBody>
+                  <a:tcPr>
+                    <a:solidFill>
+                      <a:schemeClr val="bg1">
+                        <a:alpha val="20000"/>
+                      </a:schemeClr>
+                    </a:solidFill>
+                  </a:tcPr>
+                </a:tc>
+                <a:tc>
+                  <a:txBody>
+                    <a:bodyPr/>
+                    <a:lstStyle/>
+                    <a:p>
+                      <a:r>
+                        <a:rPr sz="1100" b="1" dirty="0"/>
+                        <a:t>FAIL</a:t>
+                      </a:r>
+                    </a:p>
+                  </a:txBody>
+                  <a:tcPr>
+                    <a:solidFill>
+                      <a:schemeClr val="bg1">
+                        <a:alpha val="20000"/>
+                      </a:schemeClr>
+                    </a:solidFill>
+                  </a:tcPr>
+                </a:tc>
+                <a:tc>
+                  <a:txBody>
+                    <a:bodyPr/>
+                    <a:lstStyle/>
+                    <a:p>
+                      <a:r>
+                        <a:rPr sz="1100" b="1" dirty="0"/>
+                        <a:t>0.827 (Δ-0.005, p=0.010)</a:t>
+                      </a:r>
+                    </a:p>
+                  </a:txBody>
+                  <a:tcPr>
+                    <a:solidFill>
+                      <a:schemeClr val="bg1">
+                        <a:alpha val="20000"/>
+                      </a:schemeClr>
+                    </a:solidFill>
+                  </a:tcPr>
+                </a:tc>
+                <a:extLst>
+                  <a:ext uri="{0D108BD9-81ED-4DB2-BD59-A6C34878D82A}">
+                    <a16:rowId xmlns:a16="http://schemas.microsoft.com/office/drawing/2014/main" val="10001"/>
+                  </a:ext>
+                </a:extLst>
+              </a:tr>
+              <a:tr h="316668">
+                <a:tc>
+                  <a:txBody>
+                    <a:bodyPr/>
+                    <a:lstStyle/>
+                    <a:p>
+                      <a:r>
+                        <a:rPr sz="1100" b="0"/>
+                        <a:t>Gangnam</a:t>
+                      </a:r>
+                    </a:p>
+                  </a:txBody>
+                  <a:tcPr/>
+                </a:tc>
+                <a:tc>
+                  <a:txBody>
+                    <a:bodyPr/>
+                    <a:lstStyle/>
+                    <a:p>
+                      <a:r>
+                        <a:rPr sz="1100" b="0"/>
+                        <a:t>Sinchon (external)</a:t>
+                      </a:r>
+                    </a:p>
+                  </a:txBody>
+                  <a:tcPr/>
+                </a:tc>
+                <a:tc>
+                  <a:txBody>
+                    <a:bodyPr/>
+                    <a:lstStyle/>
+                    <a:p>
+                      <a:r>
+                        <a:rPr sz="1100" b="0"/>
+                        <a:t>2.7e-20</a:t>
+                      </a:r>
+                    </a:p>
+                  </a:txBody>
+                  <a:tcPr/>
+                </a:tc>
+                <a:tc>
+                  <a:txBody>
+                    <a:bodyPr/>
+                    <a:lstStyle/>
+                    <a:p>
+                      <a:r>
+                        <a:rPr sz="1100" b="0"/>
+                        <a:t>+61</a:t>
+                      </a:r>
+                    </a:p>
+                  </a:txBody>
+                  <a:tcPr/>
+                </a:tc>
+                <a:tc>
+                  <a:txBody>
+                    <a:bodyPr/>
+                    <a:lstStyle/>
+                    <a:p>
+                      <a:r>
+                        <a:rPr sz="1100" b="0"/>
+                        <a:t>71</a:t>
+                      </a:r>
+                    </a:p>
+                  </a:txBody>
+                  <a:tcPr/>
+                </a:tc>
+                <a:tc>
+                  <a:txBody>
+                    <a:bodyPr/>
+                    <a:lstStyle/>
+                    <a:p>
+                      <a:r>
+                        <a:rPr sz="1100" b="0"/>
+                        <a:t>PASS</a:t>
+                      </a:r>
+                    </a:p>
+                  </a:txBody>
+                  <a:tcPr/>
+                </a:tc>
+                <a:tc>
+                  <a:txBody>
+                    <a:bodyPr/>
+                    <a:lstStyle/>
+                    <a:p>
+                      <a:r>
+                        <a:rPr sz="1100" b="0" dirty="0"/>
+                        <a:t>0.829 (Δ-0.006, p=0.053)</a:t>
+                      </a:r>
+                    </a:p>
+                  </a:txBody>
+                  <a:tcPr/>
+                </a:tc>
+                <a:extLst>
+                  <a:ext uri="{0D108BD9-81ED-4DB2-BD59-A6C34878D82A}">
+                    <a16:rowId xmlns:a16="http://schemas.microsoft.com/office/drawing/2014/main" val="10002"/>
+                  </a:ext>
+                </a:extLst>
+              </a:tr>
+            </a:tbl>
+          </a:graphicData>
+        </a:graphic>
+      </p:graphicFrame>
+      <p:sp>
+        <p:nvSpPr>
+          <p:cNvPr id="9" name="TextBox 8"/>
+          <p:cNvSpPr txBox="1"/>
+          <p:nvPr/>
+        </p:nvSpPr>
+        <p:spPr>
+          <a:xfrm>
+            <a:off x="1594578" y="5300000"/>
+            <a:ext cx="8642985" cy="430887"/>
+          </a:xfrm>
+          <a:prstGeom prst="rect">
+            <a:avLst/>
+          </a:prstGeom>
+          <a:noFill/>
+        </p:spPr>
+        <p:txBody>
+          <a:bodyPr wrap="square">
+            <a:spAutoFit/>
+          </a:bodyPr>
+          <a:lstStyle/>
+          <a:p>
+            <a:r>
+              <a:rPr sz="1100" b="0" i="1" dirty="0">
+                <a:solidFill>
+                  <a:srgbClr val="606060"/>
+                </a:solidFill>
+              </a:rPr>
+              <a:t>→ </a:t>
+            </a:r>
+            <a:r>
+              <a:rPr sz="1100" b="0" i="1" dirty="0" err="1">
+                <a:solidFill>
+                  <a:srgbClr val="606060"/>
+                </a:solidFill>
+              </a:rPr>
+              <a:t>Sinchon→Gangnam은</a:t>
+            </a:r>
+            <a:r>
+              <a:rPr sz="1100" b="0" i="1" dirty="0">
+                <a:solidFill>
+                  <a:srgbClr val="606060"/>
+                </a:solidFill>
+              </a:rPr>
+              <a:t> </a:t>
+            </a:r>
+            <a:r>
+              <a:rPr sz="1100" b="0" i="1" dirty="0" err="1">
+                <a:solidFill>
+                  <a:srgbClr val="606060"/>
+                </a:solidFill>
+              </a:rPr>
+              <a:t>NRI가</a:t>
+            </a:r>
+            <a:r>
+              <a:rPr sz="1100" b="0" i="1" dirty="0">
+                <a:solidFill>
+                  <a:srgbClr val="606060"/>
+                </a:solidFill>
+              </a:rPr>
+              <a:t> </a:t>
+            </a:r>
+            <a:r>
+              <a:rPr sz="1100" b="0" i="1" dirty="0" err="1">
+                <a:solidFill>
+                  <a:srgbClr val="606060"/>
+                </a:solidFill>
+              </a:rPr>
+              <a:t>가장</a:t>
+            </a:r>
+            <a:r>
+              <a:rPr sz="1100" b="0" i="1" dirty="0">
+                <a:solidFill>
+                  <a:srgbClr val="606060"/>
+                </a:solidFill>
+              </a:rPr>
+              <a:t> </a:t>
+            </a:r>
+            <a:r>
+              <a:rPr sz="1100" b="0" i="1" dirty="0" err="1">
+                <a:solidFill>
+                  <a:srgbClr val="606060"/>
+                </a:solidFill>
+              </a:rPr>
+              <a:t>크지만</a:t>
+            </a:r>
+            <a:r>
+              <a:rPr sz="1100" b="0" i="1" dirty="0">
+                <a:solidFill>
+                  <a:srgbClr val="606060"/>
+                </a:solidFill>
+              </a:rPr>
+              <a:t>(+95) </a:t>
+            </a:r>
+            <a:r>
+              <a:rPr sz="1100" b="0" i="1" dirty="0" err="1">
+                <a:solidFill>
+                  <a:srgbClr val="606060"/>
+                </a:solidFill>
+              </a:rPr>
+              <a:t>sensitivity가</a:t>
+            </a:r>
+            <a:r>
+              <a:rPr sz="1100" b="0" i="1" dirty="0">
+                <a:solidFill>
+                  <a:srgbClr val="606060"/>
+                </a:solidFill>
+              </a:rPr>
+              <a:t> </a:t>
+            </a:r>
+            <a:r>
+              <a:rPr sz="1100" b="0" i="1" dirty="0" err="1">
+                <a:solidFill>
+                  <a:srgbClr val="606060"/>
+                </a:solidFill>
+              </a:rPr>
+              <a:t>과도하게</a:t>
+            </a:r>
+            <a:r>
+              <a:rPr sz="1100" b="0" i="1" dirty="0">
+                <a:solidFill>
+                  <a:srgbClr val="606060"/>
+                </a:solidFill>
+              </a:rPr>
+              <a:t> </a:t>
+            </a:r>
+            <a:r>
+              <a:rPr sz="1100" b="0" i="1" dirty="0" err="1">
+                <a:solidFill>
+                  <a:srgbClr val="606060"/>
+                </a:solidFill>
+              </a:rPr>
+              <a:t>떨어져</a:t>
+            </a:r>
+            <a:r>
+              <a:rPr sz="1100" b="0" i="1" dirty="0">
+                <a:solidFill>
+                  <a:srgbClr val="606060"/>
+                </a:solidFill>
+              </a:rPr>
+              <a:t> NI test FAIL — </a:t>
+            </a:r>
+            <a:r>
+              <a:rPr sz="1100" b="0" i="1" dirty="0" err="1">
+                <a:solidFill>
+                  <a:srgbClr val="606060"/>
+                </a:solidFill>
+              </a:rPr>
+              <a:t>AUC도</a:t>
+            </a:r>
+            <a:r>
+              <a:rPr sz="1100" b="0" i="1" dirty="0">
+                <a:solidFill>
+                  <a:srgbClr val="606060"/>
+                </a:solidFill>
+              </a:rPr>
+              <a:t> </a:t>
+            </a:r>
+            <a:r>
+              <a:rPr sz="1100" b="0" i="1" dirty="0" err="1">
+                <a:solidFill>
+                  <a:srgbClr val="606060"/>
+                </a:solidFill>
+              </a:rPr>
+              <a:t>baseline보다</a:t>
+            </a:r>
+            <a:r>
+              <a:rPr sz="1100" b="0" i="1" dirty="0">
+                <a:solidFill>
+                  <a:srgbClr val="606060"/>
+                </a:solidFill>
+              </a:rPr>
+              <a:t> </a:t>
+            </a:r>
+            <a:r>
+              <a:rPr sz="1100" b="0" i="1" dirty="0" err="1">
+                <a:solidFill>
+                  <a:srgbClr val="606060"/>
+                </a:solidFill>
+              </a:rPr>
+              <a:t>유의하게</a:t>
+            </a:r>
+            <a:r>
+              <a:rPr sz="1100" b="0" i="1" dirty="0">
+                <a:solidFill>
+                  <a:srgbClr val="606060"/>
+                </a:solidFill>
+              </a:rPr>
+              <a:t> </a:t>
+            </a:r>
+            <a:r>
+              <a:rPr sz="1100" b="0" i="1" dirty="0" err="1">
+                <a:solidFill>
+                  <a:srgbClr val="606060"/>
+                </a:solidFill>
+              </a:rPr>
+              <a:t>하락</a:t>
+            </a:r>
+            <a:r>
+              <a:rPr sz="1100" b="0" i="1" dirty="0">
+                <a:solidFill>
+                  <a:srgbClr val="606060"/>
+                </a:solidFill>
+              </a:rPr>
+              <a:t>(p=0.010), </a:t>
+            </a:r>
+            <a:r>
+              <a:rPr sz="1100" b="0" i="1" dirty="0" err="1">
+                <a:solidFill>
+                  <a:srgbClr val="606060"/>
+                </a:solidFill>
+              </a:rPr>
+              <a:t>숫자만</a:t>
+            </a:r>
+            <a:r>
+              <a:rPr sz="1100" b="0" i="1" dirty="0">
+                <a:solidFill>
+                  <a:srgbClr val="606060"/>
+                </a:solidFill>
+              </a:rPr>
+              <a:t> </a:t>
+            </a:r>
+            <a:r>
+              <a:rPr sz="1100" b="0" i="1" dirty="0" err="1">
+                <a:solidFill>
+                  <a:srgbClr val="606060"/>
+                </a:solidFill>
+              </a:rPr>
+              <a:t>좋아</a:t>
+            </a:r>
+            <a:r>
+              <a:rPr sz="1100" b="0" i="1" dirty="0">
+                <a:solidFill>
+                  <a:srgbClr val="606060"/>
+                </a:solidFill>
+              </a:rPr>
+              <a:t> </a:t>
+            </a:r>
+            <a:r>
+              <a:rPr sz="1100" b="0" i="1" dirty="0" err="1">
+                <a:solidFill>
+                  <a:srgbClr val="606060"/>
+                </a:solidFill>
+              </a:rPr>
+              <a:t>보이는</a:t>
+            </a:r>
+            <a:r>
+              <a:rPr sz="1100" b="0" i="1" dirty="0">
+                <a:solidFill>
+                  <a:srgbClr val="606060"/>
+                </a:solidFill>
+              </a:rPr>
+              <a:t> </a:t>
+            </a:r>
+            <a:r>
+              <a:rPr sz="1100" b="0" i="1" dirty="0" err="1">
+                <a:solidFill>
+                  <a:srgbClr val="606060"/>
+                </a:solidFill>
+              </a:rPr>
+              <a:t>함정</a:t>
+            </a:r>
+            <a:r>
+              <a:rPr sz="1100" b="0" i="1" dirty="0">
+                <a:solidFill>
+                  <a:srgbClr val="606060"/>
+                </a:solidFill>
+              </a:rPr>
+              <a:t>. </a:t>
+            </a:r>
+            <a:r>
+              <a:rPr sz="1100" b="0" i="1" dirty="0" err="1">
+                <a:solidFill>
+                  <a:srgbClr val="606060"/>
+                </a:solidFill>
+              </a:rPr>
+              <a:t>Gangnam→Sinchon</a:t>
+            </a:r>
+            <a:r>
+              <a:rPr sz="1100" b="0" i="1" dirty="0">
+                <a:solidFill>
+                  <a:srgbClr val="606060"/>
+                </a:solidFill>
+              </a:rPr>
+              <a:t>(+61)은 NI PASS, AUC </a:t>
+            </a:r>
+            <a:r>
+              <a:rPr sz="1100" b="0" i="1" dirty="0" err="1">
+                <a:solidFill>
+                  <a:srgbClr val="606060"/>
+                </a:solidFill>
+              </a:rPr>
+              <a:t>하락은</a:t>
+            </a:r>
+            <a:r>
+              <a:rPr sz="1100" b="0" i="1" dirty="0">
+                <a:solidFill>
+                  <a:srgbClr val="606060"/>
+                </a:solidFill>
+              </a:rPr>
+              <a:t> </a:t>
+            </a:r>
+            <a:r>
+              <a:rPr sz="1100" b="0" i="1" dirty="0" err="1">
+                <a:solidFill>
+                  <a:srgbClr val="606060"/>
+                </a:solidFill>
+              </a:rPr>
+              <a:t>경계선</a:t>
+            </a:r>
+            <a:r>
+              <a:rPr sz="1100" b="0" i="1" dirty="0">
+                <a:solidFill>
+                  <a:srgbClr val="606060"/>
+                </a:solidFill>
+              </a:rPr>
+              <a:t> </a:t>
+            </a:r>
+            <a:r>
+              <a:rPr sz="1100" b="0" i="1" dirty="0" err="1">
+                <a:solidFill>
+                  <a:srgbClr val="606060"/>
+                </a:solidFill>
+              </a:rPr>
+              <a:t>수준</a:t>
+            </a:r>
+            <a:r>
+              <a:rPr sz="1100" b="0" i="1" dirty="0">
+                <a:solidFill>
+                  <a:srgbClr val="606060"/>
+                </a:solidFill>
+              </a:rPr>
+              <a:t>(p=0.053)</a:t>
+            </a:r>
+          </a:p>
+        </p:txBody>
+      </p:sp>
+      <p:sp>
+        <p:nvSpPr>
+          <p:cNvPr id="10" name="TextBox 9"/>
+          <p:cNvSpPr txBox="1"/>
+          <p:nvPr/>
+        </p:nvSpPr>
+        <p:spPr>
+          <a:xfrm>
+            <a:off x="1009996" y="5900000"/>
+            <a:ext cx="9559637" cy="430887"/>
+          </a:xfrm>
+          <a:prstGeom prst="rect">
+            <a:avLst/>
+          </a:prstGeom>
+          <a:noFill/>
+        </p:spPr>
+        <p:txBody>
+          <a:bodyPr wrap="square">
+            <a:spAutoFit/>
+          </a:bodyPr>
+          <a:lstStyle/>
+          <a:p>
+            <a:r>
+              <a:rPr sz="1100" i="1" dirty="0">
+                <a:solidFill>
+                  <a:srgbClr val="606060"/>
+                </a:solidFill>
+              </a:rPr>
+              <a:t>→ Gangnam AEC-CNN </a:t>
+            </a:r>
+            <a:r>
+              <a:rPr sz="1100" i="1" dirty="0" err="1">
+                <a:solidFill>
+                  <a:srgbClr val="606060"/>
+                </a:solidFill>
+              </a:rPr>
+              <a:t>자체</a:t>
+            </a:r>
+            <a:r>
+              <a:rPr sz="1100" i="1" dirty="0">
+                <a:solidFill>
+                  <a:srgbClr val="606060"/>
+                </a:solidFill>
+              </a:rPr>
+              <a:t> OOF AUC=0.52(</a:t>
+            </a:r>
+            <a:r>
+              <a:rPr sz="1100" i="1" dirty="0" err="1">
+                <a:solidFill>
+                  <a:srgbClr val="606060"/>
+                </a:solidFill>
+              </a:rPr>
+              <a:t>노이즈</a:t>
+            </a:r>
+            <a:r>
+              <a:rPr sz="1100" i="1" dirty="0">
+                <a:solidFill>
+                  <a:srgbClr val="606060"/>
+                </a:solidFill>
+              </a:rPr>
+              <a:t> </a:t>
+            </a:r>
+            <a:r>
+              <a:rPr sz="1100" i="1" dirty="0" err="1">
+                <a:solidFill>
+                  <a:srgbClr val="606060"/>
+                </a:solidFill>
+              </a:rPr>
+              <a:t>수준</a:t>
+            </a:r>
+            <a:r>
+              <a:rPr sz="1100" i="1" dirty="0">
+                <a:solidFill>
+                  <a:srgbClr val="606060"/>
+                </a:solidFill>
+              </a:rPr>
+              <a:t>) — Gangnam raw curve TP-vs-FP </a:t>
+            </a:r>
+            <a:r>
+              <a:rPr sz="1100" i="1" dirty="0" err="1">
+                <a:solidFill>
+                  <a:srgbClr val="606060"/>
+                </a:solidFill>
+              </a:rPr>
+              <a:t>비유의</a:t>
+            </a:r>
+            <a:r>
+              <a:rPr sz="1100" i="1" dirty="0">
+                <a:solidFill>
+                  <a:srgbClr val="606060"/>
+                </a:solidFill>
+              </a:rPr>
+              <a:t>(p=0.227)와 </a:t>
+            </a:r>
+            <a:r>
+              <a:rPr sz="1100" i="1" dirty="0" err="1">
+                <a:solidFill>
+                  <a:srgbClr val="606060"/>
+                </a:solidFill>
+              </a:rPr>
+              <a:t>일치</a:t>
+            </a:r>
+            <a:r>
+              <a:rPr sz="1100" i="1" dirty="0">
+                <a:solidFill>
+                  <a:srgbClr val="606060"/>
+                </a:solidFill>
+              </a:rPr>
+              <a:t>, </a:t>
+            </a:r>
+            <a:r>
+              <a:rPr sz="1100" i="1" dirty="0" err="1">
+                <a:solidFill>
+                  <a:srgbClr val="606060"/>
+                </a:solidFill>
+              </a:rPr>
+              <a:t>AEC가</a:t>
+            </a:r>
+            <a:r>
+              <a:rPr sz="1100" i="1" dirty="0">
+                <a:solidFill>
+                  <a:srgbClr val="606060"/>
+                </a:solidFill>
+              </a:rPr>
+              <a:t> </a:t>
+            </a:r>
+            <a:r>
+              <a:rPr sz="1100" i="1" dirty="0" err="1">
+                <a:solidFill>
+                  <a:srgbClr val="606060"/>
+                </a:solidFill>
+              </a:rPr>
+              <a:t>Gangnam에서는</a:t>
+            </a:r>
+            <a:r>
+              <a:rPr sz="1100" i="1" dirty="0">
+                <a:solidFill>
+                  <a:srgbClr val="606060"/>
+                </a:solidFill>
+              </a:rPr>
+              <a:t> </a:t>
+            </a:r>
+            <a:r>
+              <a:rPr sz="1100" i="1" dirty="0" err="1">
+                <a:solidFill>
+                  <a:srgbClr val="606060"/>
+                </a:solidFill>
+              </a:rPr>
+              <a:t>애초에</a:t>
+            </a:r>
+            <a:r>
+              <a:rPr sz="1100" i="1" dirty="0">
+                <a:solidFill>
+                  <a:srgbClr val="606060"/>
+                </a:solidFill>
+              </a:rPr>
+              <a:t> </a:t>
+            </a:r>
+            <a:r>
+              <a:rPr sz="1100" i="1" dirty="0" err="1">
+                <a:solidFill>
+                  <a:srgbClr val="606060"/>
+                </a:solidFill>
+              </a:rPr>
+              <a:t>분리</a:t>
+            </a:r>
+            <a:r>
+              <a:rPr sz="1100" i="1" dirty="0">
+                <a:solidFill>
+                  <a:srgbClr val="606060"/>
+                </a:solidFill>
+              </a:rPr>
+              <a:t> </a:t>
+            </a:r>
+            <a:r>
+              <a:rPr sz="1100" i="1" dirty="0" err="1">
+                <a:solidFill>
+                  <a:srgbClr val="606060"/>
+                </a:solidFill>
+              </a:rPr>
+              <a:t>신호를</a:t>
+            </a:r>
+            <a:r>
+              <a:rPr sz="1100" i="1" dirty="0">
+                <a:solidFill>
+                  <a:srgbClr val="606060"/>
+                </a:solidFill>
+              </a:rPr>
+              <a:t> </a:t>
+            </a:r>
+            <a:r>
+              <a:rPr sz="1100" i="1" dirty="0" err="1">
+                <a:solidFill>
+                  <a:srgbClr val="606060"/>
+                </a:solidFill>
+              </a:rPr>
+              <a:t>담고</a:t>
+            </a:r>
+            <a:r>
+              <a:rPr sz="1100" i="1" dirty="0">
+                <a:solidFill>
+                  <a:srgbClr val="606060"/>
+                </a:solidFill>
+              </a:rPr>
+              <a:t> </a:t>
+            </a:r>
+            <a:r>
+              <a:rPr sz="1100" i="1" dirty="0" err="1">
+                <a:solidFill>
+                  <a:srgbClr val="606060"/>
+                </a:solidFill>
+              </a:rPr>
+              <a:t>있지</a:t>
+            </a:r>
+            <a:r>
+              <a:rPr sz="1100" i="1" dirty="0">
+                <a:solidFill>
+                  <a:srgbClr val="606060"/>
+                </a:solidFill>
+              </a:rPr>
+              <a:t> </a:t>
+            </a:r>
+            <a:r>
+              <a:rPr sz="1100" i="1" dirty="0" err="1">
+                <a:solidFill>
+                  <a:srgbClr val="606060"/>
+                </a:solidFill>
+              </a:rPr>
+              <a:t>않음</a:t>
+            </a:r>
+            <a:endParaRPr sz="1100" i="1" dirty="0">
+              <a:solidFill>
+                <a:srgbClr val="606060"/>
+              </a:solidFill>
+            </a:endParaRPr>
+          </a:p>
+        </p:txBody>
+      </p:sp>
+    </p:spTree>
+    <p:extLst>
+      <p:ext uri="{BB962C8B-B14F-4D97-AF65-F5344CB8AC3E}">
+        <p14:creationId xmlns:p14="http://schemas.microsoft.com/office/powerpoint/2010/main" val="4012494835"/>
+      </p:ext>
+    </p:extLst>
+  </p:cSld>
+  <p:clrMapOvr>
+    <a:masterClrMapping/>
+  </p:clrMapOvr>
+</p:sld>
+</file>
+
 <file path=ppt/slides/slide2.xml><?xml version="1.0" encoding="utf-8"?>
 <p:sld xmlns:a="http://schemas.openxmlformats.org/drawingml/2006/main" xmlns:r="http://schemas.openxmlformats.org/officeDocument/2006/relationships" xmlns:p="http://schemas.openxmlformats.org/presentationml/2006/main">
   <p:cSld>
@@ -12966,8 +15065,8 @@
         </p:blipFill>
         <p:spPr>
           <a:xfrm>
-            <a:off x="1878740" y="3429000"/>
-            <a:ext cx="4209137" cy="2875110"/>
+            <a:off x="750631" y="1550000"/>
+            <a:ext cx="5270369" cy="3600000"/>
           </a:xfrm>
           <a:prstGeom prst="rect">
             <a:avLst/>
@@ -13021,269 +15120,16 @@
             </a:pPr>
             <a:r>
               <a:rPr lang="en-US" altLang="ko-KR" b="1" dirty="0"/>
-              <a:t>Stage-1 TP vs FP AEC-128 </a:t>
+              <a:t>Stage-1 TP vs FP AEC-128 비교 </a:t>
             </a:r>
             <a:r>
               <a:rPr lang="ko-KR" altLang="en-US" b="1" dirty="0"/>
-              <a:t>비교</a:t>
+              <a:t>(raw)</a:t>
             </a:r>
             <a:endParaRPr b="1" dirty="0"/>
           </a:p>
         </p:txBody>
       </p:sp>
-      <p:graphicFrame>
-        <p:nvGraphicFramePr>
-          <p:cNvPr id="9" name="Table 8"/>
-          <p:cNvGraphicFramePr>
-            <a:graphicFrameLocks noGrp="1"/>
-          </p:cNvGraphicFramePr>
-          <p:nvPr>
-            <p:extLst>
-              <p:ext uri="{D42A27DB-BD31-4B8C-83A1-F6EECF244321}">
-                <p14:modId xmlns:p14="http://schemas.microsoft.com/office/powerpoint/2010/main" val="2487695188"/>
-              </p:ext>
-            </p:extLst>
-          </p:nvPr>
-        </p:nvGraphicFramePr>
-        <p:xfrm>
-          <a:off x="4373546" y="1821709"/>
-          <a:ext cx="3682318" cy="1341120"/>
-        </p:xfrm>
-        <a:graphic>
-          <a:graphicData uri="http://schemas.openxmlformats.org/drawingml/2006/table">
-            <a:tbl>
-              <a:tblPr firstRow="1" bandRow="1">
-                <a:tableStyleId>{9D7B26C5-4107-4FEC-AEDC-1716B250A1EF}</a:tableStyleId>
-              </a:tblPr>
-              <a:tblGrid>
-                <a:gridCol w="1212955">
-                  <a:extLst>
-                    <a:ext uri="{9D8B030D-6E8A-4147-A177-3AD203B41FA5}">
-                      <a16:colId xmlns:a16="http://schemas.microsoft.com/office/drawing/2014/main" val="20000"/>
-                    </a:ext>
-                  </a:extLst>
-                </a:gridCol>
-                <a:gridCol w="1291907">
-                  <a:extLst>
-                    <a:ext uri="{9D8B030D-6E8A-4147-A177-3AD203B41FA5}">
-                      <a16:colId xmlns:a16="http://schemas.microsoft.com/office/drawing/2014/main" val="20001"/>
-                    </a:ext>
-                  </a:extLst>
-                </a:gridCol>
-                <a:gridCol w="1177456">
-                  <a:extLst>
-                    <a:ext uri="{9D8B030D-6E8A-4147-A177-3AD203B41FA5}">
-                      <a16:colId xmlns:a16="http://schemas.microsoft.com/office/drawing/2014/main" val="20002"/>
-                    </a:ext>
-                  </a:extLst>
-                </a:gridCol>
-              </a:tblGrid>
-              <a:tr h="164361">
-                <a:tc>
-                  <a:txBody>
-                    <a:bodyPr/>
-                    <a:lstStyle/>
-                    <a:p>
-                      <a:pPr algn="ctr"/>
-                      <a:r>
-                        <a:rPr sz="1400" b="1"/>
-                        <a:t>Cohort</a:t>
-                      </a:r>
-                    </a:p>
-                  </a:txBody>
-                  <a:tcPr anchor="ctr"/>
-                </a:tc>
-                <a:tc>
-                  <a:txBody>
-                    <a:bodyPr/>
-                    <a:lstStyle/>
-                    <a:p>
-                      <a:pPr algn="ctr"/>
-                      <a:r>
-                        <a:rPr sz="1400" b="1"/>
-                        <a:t>curve RMSD</a:t>
-                      </a:r>
-                    </a:p>
-                  </a:txBody>
-                  <a:tcPr anchor="ctr"/>
-                </a:tc>
-                <a:tc>
-                  <a:txBody>
-                    <a:bodyPr/>
-                    <a:lstStyle/>
-                    <a:p>
-                      <a:pPr algn="ctr"/>
-                      <a:r>
-                        <a:rPr sz="1400" b="1"/>
-                        <a:t>P-value</a:t>
-                      </a:r>
-                    </a:p>
-                  </a:txBody>
-                  <a:tcPr anchor="ctr"/>
-                </a:tc>
-                <a:extLst>
-                  <a:ext uri="{0D108BD9-81ED-4DB2-BD59-A6C34878D82A}">
-                    <a16:rowId xmlns:a16="http://schemas.microsoft.com/office/drawing/2014/main" val="10000"/>
-                  </a:ext>
-                </a:extLst>
-              </a:tr>
-              <a:tr h="276818">
-                <a:tc>
-                  <a:txBody>
-                    <a:bodyPr/>
-                    <a:lstStyle/>
-                    <a:p>
-                      <a:pPr algn="ctr"/>
-                      <a:r>
-                        <a:rPr sz="1400" b="0" dirty="0"/>
-                        <a:t>Gangnam</a:t>
-                      </a:r>
-                    </a:p>
-                    <a:p>
-                      <a:pPr algn="ctr"/>
-                      <a:r>
-                        <a:rPr sz="1400" dirty="0"/>
-                        <a:t>(internal)</a:t>
-                      </a:r>
-                    </a:p>
-                  </a:txBody>
-                  <a:tcPr anchor="ctr">
-                    <a:solidFill>
-                      <a:schemeClr val="bg1">
-                        <a:alpha val="20000"/>
-                      </a:schemeClr>
-                    </a:solidFill>
-                  </a:tcPr>
-                </a:tc>
-                <a:tc>
-                  <a:txBody>
-                    <a:bodyPr/>
-                    <a:lstStyle/>
-                    <a:p>
-                      <a:pPr algn="ctr"/>
-                      <a:r>
-                        <a:rPr sz="1400" b="0" dirty="0"/>
-                        <a:t>0.0</a:t>
-                      </a:r>
-                      <a:r>
-                        <a:rPr lang="en-US" sz="1400" b="0" dirty="0"/>
-                        <a:t>155</a:t>
-                      </a:r>
-                      <a:endParaRPr sz="1400" b="0" dirty="0"/>
-                    </a:p>
-                  </a:txBody>
-                  <a:tcPr anchor="ctr">
-                    <a:solidFill>
-                      <a:schemeClr val="bg1">
-                        <a:alpha val="20000"/>
-                      </a:schemeClr>
-                    </a:solidFill>
-                  </a:tcPr>
-                </a:tc>
-                <a:tc>
-                  <a:txBody>
-                    <a:bodyPr/>
-                    <a:lstStyle/>
-                    <a:p>
-                      <a:pPr algn="ctr"/>
-                      <a:r>
-                        <a:rPr sz="1400" b="0" dirty="0"/>
-                        <a:t>0.</a:t>
-                      </a:r>
-                      <a:r>
-                        <a:rPr lang="en-US" sz="1400" b="0" dirty="0"/>
-                        <a:t>227 (</a:t>
-                      </a:r>
-                      <a:r>
-                        <a:rPr lang="en-US" sz="1400" b="0" dirty="0" err="1"/>
-                        <a:t>n.s</a:t>
-                      </a:r>
-                      <a:r>
-                        <a:rPr lang="en-US" sz="1400" b="0" dirty="0"/>
-                        <a:t>.)</a:t>
-                      </a:r>
-                      <a:endParaRPr sz="1400" b="0" dirty="0"/>
-                    </a:p>
-                  </a:txBody>
-                  <a:tcPr anchor="ctr">
-                    <a:solidFill>
-                      <a:schemeClr val="bg1">
-                        <a:alpha val="20000"/>
-                      </a:schemeClr>
-                    </a:solidFill>
-                  </a:tcPr>
-                </a:tc>
-                <a:extLst>
-                  <a:ext uri="{0D108BD9-81ED-4DB2-BD59-A6C34878D82A}">
-                    <a16:rowId xmlns:a16="http://schemas.microsoft.com/office/drawing/2014/main" val="10001"/>
-                  </a:ext>
-                </a:extLst>
-              </a:tr>
-              <a:tr h="276818">
-                <a:tc>
-                  <a:txBody>
-                    <a:bodyPr/>
-                    <a:lstStyle/>
-                    <a:p>
-                      <a:pPr algn="ctr"/>
-                      <a:r>
-                        <a:rPr sz="1400" b="0"/>
-                        <a:t>Sinchon</a:t>
-                      </a:r>
-                    </a:p>
-                    <a:p>
-                      <a:pPr algn="ctr"/>
-                      <a:r>
-                        <a:rPr sz="1400"/>
-                        <a:t>(external)</a:t>
-                      </a:r>
-                    </a:p>
-                  </a:txBody>
-                  <a:tcPr anchor="ctr"/>
-                </a:tc>
-                <a:tc>
-                  <a:txBody>
-                    <a:bodyPr/>
-                    <a:lstStyle/>
-                    <a:p>
-                      <a:pPr algn="ctr"/>
-                      <a:r>
-                        <a:rPr lang="en-US" sz="1400" b="0" dirty="0"/>
-                        <a:t>0.0274</a:t>
-                      </a:r>
-                      <a:endParaRPr sz="1400" b="0" dirty="0"/>
-                    </a:p>
-                  </a:txBody>
-                  <a:tcPr anchor="ctr"/>
-                </a:tc>
-                <a:tc>
-                  <a:txBody>
-                    <a:bodyPr/>
-                    <a:lstStyle/>
-                    <a:p>
-                      <a:pPr algn="ctr"/>
-                      <a:r>
-                        <a:rPr sz="1400" b="0" dirty="0"/>
-                        <a:t>0.01</a:t>
-                      </a:r>
-                      <a:r>
-                        <a:rPr lang="en-US" sz="1400" b="0" dirty="0"/>
-                        <a:t>75</a:t>
-                      </a:r>
-                    </a:p>
-                  </a:txBody>
-                  <a:tcPr anchor="ctr"/>
-                </a:tc>
-                <a:extLst>
-                  <a:ext uri="{0D108BD9-81ED-4DB2-BD59-A6C34878D82A}">
-                    <a16:rowId xmlns:a16="http://schemas.microsoft.com/office/drawing/2014/main" val="10002"/>
-                  </a:ext>
-                </a:extLst>
-              </a:tr>
-            </a:tbl>
-          </a:graphicData>
-        </a:graphic>
-      </p:graphicFrame>
       <p:pic>
         <p:nvPicPr>
           <p:cNvPr id="7" name="그림 6">
@@ -13306,14 +15152,47 @@
         </p:blipFill>
         <p:spPr>
           <a:xfrm>
-            <a:off x="6104125" y="3429000"/>
-            <a:ext cx="4209137" cy="2875110"/>
+            <a:off x="6171000" y="1550000"/>
+            <a:ext cx="5270369" cy="3600000"/>
           </a:xfrm>
           <a:prstGeom prst="rect">
             <a:avLst/>
           </a:prstGeom>
         </p:spPr>
       </p:pic>
+      <p:sp>
+        <p:nvSpPr>
+          <p:cNvPr id="10" name="TextBox 9"/>
+          <p:cNvSpPr txBox="1"/>
+          <p:nvPr/>
+        </p:nvSpPr>
+        <p:spPr>
+          <a:xfrm>
+            <a:off x="508000" y="5900000"/>
+            <a:ext cx="11176000" cy="450000"/>
+          </a:xfrm>
+          <a:prstGeom prst="rect">
+            <a:avLst/>
+          </a:prstGeom>
+          <a:noFill/>
+        </p:spPr>
+        <p:txBody>
+          <a:bodyPr wrap="square">
+            <a:spAutoFit/>
+          </a:bodyPr>
+          <a:lstStyle/>
+          <a:p>
+            <a:r>
+              <a:rPr sz="1200" i="1">
+                <a:solidFill>
+                  <a:srgbClr val="606060"/>
+                </a:solidFill>
+              </a:rPr>
+              <a:t>→ Raw curve: 강남(internal) 비유의, 신촌(external) 유의 — 코호트 간 불일치 (matched 결과는 다음 슬라이드)</a:t>
+            </a:r>
+          </a:p>
+        </p:txBody>
+      </p:sp>
     </p:spTree>
     <p:extLst>
       <p:ext uri="{BB962C8B-B14F-4D97-AF65-F5344CB8AC3E}">
@@ -13328,6 +15207,155 @@
 </file>
 
 <file path=ppt/slides/slide8.xml><?xml version="1.0" encoding="utf-8"?>
+<p:sld xmlns:a="http://schemas.openxmlformats.org/drawingml/2006/main" xmlns:r="http://schemas.openxmlformats.org/officeDocument/2006/relationships" xmlns:p="http://schemas.openxmlformats.org/presentationml/2006/main">
+  <p:cSld>
+    <p:spTree>
+      <p:nvGrpSpPr>
+        <p:cNvPr id="1" name=""/>
+        <p:cNvGrpSpPr/>
+        <p:nvPr/>
+      </p:nvGrpSpPr>
+      <p:grpSpPr>
+        <a:xfrm>
+          <a:off x="0" y="0"/>
+          <a:ext cx="0" cy="0"/>
+          <a:chOff x="0" y="0"/>
+          <a:chExt cx="0" cy="0"/>
+        </a:xfrm>
+      </p:grpSpPr>
+      <p:sp>
+        <p:nvSpPr>
+          <p:cNvPr id="2" name="Title 1"/>
+          <p:cNvSpPr>
+            <a:spLocks noGrp="1"/>
+          </p:cNvSpPr>
+          <p:nvPr>
+            <p:ph type="title"/>
+          </p:nvPr>
+        </p:nvSpPr>
+        <p:spPr/>
+        <p:txBody>
+          <a:bodyPr/>
+          <a:lstStyle/>
+          <a:p>
+            <a:r>
+              <a:t>Detailed progress</a:t>
+            </a:r>
+          </a:p>
+        </p:txBody>
+      </p:sp>
+      <p:sp>
+        <p:nvSpPr>
+          <p:cNvPr id="3" name="Content Placeholder 2"/>
+          <p:cNvSpPr>
+            <a:spLocks noGrp="1"/>
+          </p:cNvSpPr>
+          <p:nvPr>
+            <p:ph idx="1"/>
+          </p:nvPr>
+        </p:nvSpPr>
+        <p:spPr/>
+        <p:txBody>
+          <a:bodyPr wrap="square"/>
+          <a:lstStyle/>
+          <a:p>
+            <a:r>
+              <a:rPr b="1"/>
+              <a:t>Stage-1 TP vs FP AEC-128 비교 (Propensity-matched)</a:t>
+            </a:r>
+          </a:p>
+        </p:txBody>
+      </p:sp>
+      <p:pic>
+        <p:nvPicPr>
+          <p:cNvPr id="5" name="Picture 4" descr="19_aec_curve_tp_vs_fp_matched.png"/>
+          <p:cNvPicPr>
+            <a:picLocks noChangeAspect="1"/>
+          </p:cNvPicPr>
+          <p:nvPr/>
+        </p:nvPicPr>
+        <p:blipFill>
+          <a:blip r:embed="rId2"/>
+          <a:stretch>
+            <a:fillRect/>
+          </a:stretch>
+        </p:blipFill>
+        <p:spPr>
+          <a:xfrm>
+            <a:off x="750631" y="1550000"/>
+            <a:ext cx="5270369" cy="3600000"/>
+          </a:xfrm>
+          <a:prstGeom prst="rect">
+            <a:avLst/>
+          </a:prstGeom>
+        </p:spPr>
+      </p:pic>
+      <p:pic>
+        <p:nvPicPr>
+          <p:cNvPr id="6" name="Picture 5" descr="19_aec_curve_tp_vs_fp_matched.png"/>
+          <p:cNvPicPr>
+            <a:picLocks noChangeAspect="1"/>
+          </p:cNvPicPr>
+          <p:nvPr/>
+        </p:nvPicPr>
+        <p:blipFill>
+          <a:blip r:embed="rId3"/>
+          <a:stretch>
+            <a:fillRect/>
+          </a:stretch>
+        </p:blipFill>
+        <p:spPr>
+          <a:xfrm>
+            <a:off x="6171000" y="1550000"/>
+            <a:ext cx="5270369" cy="3600000"/>
+          </a:xfrm>
+          <a:prstGeom prst="rect">
+            <a:avLst/>
+          </a:prstGeom>
+        </p:spPr>
+      </p:pic>
+      <p:sp>
+        <p:nvSpPr>
+          <p:cNvPr id="7" name="TextBox 6"/>
+          <p:cNvSpPr txBox="1"/>
+          <p:nvPr/>
+        </p:nvSpPr>
+        <p:spPr>
+          <a:xfrm>
+            <a:off x="508000" y="5900000"/>
+            <a:ext cx="11176000" cy="450000"/>
+          </a:xfrm>
+          <a:prstGeom prst="rect">
+            <a:avLst/>
+          </a:prstGeom>
+          <a:noFill/>
+        </p:spPr>
+        <p:txBody>
+          <a:bodyPr wrap="square">
+            <a:spAutoFit/>
+          </a:bodyPr>
+          <a:lstStyle/>
+          <a:p>
+            <a:r>
+              <a:rPr sz="1200" i="1">
+                <a:solidFill>
+                  <a:srgbClr val="606060"/>
+                </a:solidFill>
+              </a:rPr>
+              <a:t>→ Propensity-matching 후에도 코호트 간 불일치: 강남(internal) 비유의, 신촌(external)만 유의 — 재현 가능한 신호 아님</a:t>
+            </a:r>
+          </a:p>
+        </p:txBody>
+      </p:sp>
+    </p:spTree>
+  </p:cSld>
+  <p:clrMapOvr>
+    <a:masterClrMapping/>
+  </p:clrMapOvr>
+</p:sld>
+</file>
+
+<file path=ppt/slides/slide9.xml><?xml version="1.0" encoding="utf-8"?>
 <p:sld xmlns:a="http://schemas.openxmlformats.org/drawingml/2006/main" xmlns:r="http://schemas.openxmlformats.org/officeDocument/2006/relationships" xmlns:p="http://schemas.openxmlformats.org/presentationml/2006/main">
   <p:cSld>
     <p:spTree>
@@ -13409,19 +15437,7 @@
             </a:pPr>
             <a:r>
               <a:rPr lang="en-US" b="1" dirty="0"/>
-              <a:t>TP/FP </a:t>
-            </a:r>
-            <a:r>
-              <a:rPr lang="ko-KR" altLang="en-US" b="1" dirty="0"/>
-              <a:t>간의 차이가 유의한 </a:t>
-            </a:r>
-            <a:r>
-              <a:rPr lang="en-US" altLang="ko-KR" b="1" dirty="0"/>
-              <a:t>Feature</a:t>
-            </a:r>
-            <a:r>
-              <a:rPr lang="ko-KR" altLang="en-US" b="1" dirty="0"/>
-              <a:t> 찾기</a:t>
+              <a:t>AEC-128 raw curve만으로는 TP/FP 구분 불가 (코호트 간 결과 불일치) → 새로운 접근 필요</a:t>
             </a:r>
             <a:endParaRPr lang="en-US" altLang="ko-KR" b="1" dirty="0"/>
           </a:p>
@@ -13479,64 +15495,6 @@
     <p:extLst>
       <p:ext uri="{BB962C8B-B14F-4D97-AF65-F5344CB8AC3E}">
         <p14:creationId xmlns:p14="http://schemas.microsoft.com/office/powerpoint/2010/main" val="2022533225"/>
-      </p:ext>
-    </p:extLst>
-  </p:cSld>
-  <p:clrMapOvr>
-    <a:masterClrMapping/>
-  </p:clrMapOvr>
-</p:sld>
-</file>
-
-<file path=ppt/slides/slide9.xml><?xml version="1.0" encoding="utf-8"?>
-<p:sld xmlns:a="http://schemas.openxmlformats.org/drawingml/2006/main" xmlns:r="http://schemas.openxmlformats.org/officeDocument/2006/relationships" xmlns:p="http://schemas.openxmlformats.org/presentationml/2006/main">
-  <p:cSld>
-    <p:spTree>
-      <p:nvGrpSpPr>
-        <p:cNvPr id="1" name="Shape 1175"/>
-        <p:cNvGrpSpPr/>
-        <p:nvPr/>
-      </p:nvGrpSpPr>
-      <p:grpSpPr>
-        <a:xfrm>
-          <a:off x="0" y="0"/>
-          <a:ext cx="0" cy="0"/>
-          <a:chOff x="0" y="0"/>
-          <a:chExt cx="0" cy="0"/>
-        </a:xfrm>
-      </p:grpSpPr>
-      <p:pic>
-        <p:nvPicPr>
-          <p:cNvPr id="1176" name="Google Shape;1176;g3d412ffb079_0_61"/>
-          <p:cNvPicPr preferRelativeResize="0"/>
-          <p:nvPr/>
-        </p:nvPicPr>
-        <p:blipFill>
-          <a:blip r:embed="rId3">
-            <a:alphaModFix/>
-          </a:blip>
-          <a:stretch>
-            <a:fillRect/>
-          </a:stretch>
-        </p:blipFill>
-        <p:spPr>
-          <a:xfrm>
-            <a:off x="0" y="0"/>
-            <a:ext cx="12192000" cy="6858000"/>
-          </a:xfrm>
-          <a:prstGeom prst="rect">
-            <a:avLst/>
-          </a:prstGeom>
-          <a:noFill/>
-          <a:ln>
-            <a:noFill/>
-          </a:ln>
-        </p:spPr>
-      </p:pic>
-    </p:spTree>
-    <p:extLst>
-      <p:ext uri="{BB962C8B-B14F-4D97-AF65-F5344CB8AC3E}">
-        <p14:creationId xmlns:p14="http://schemas.microsoft.com/office/powerpoint/2010/main" val="1579866099"/>
       </p:ext>
     </p:extLst>
   </p:cSld>

--- a/docs/260724_Comparison of AECs between groups after low-smi classification with clinic data.pptx
+++ b/docs/260724_Comparison of AECs between groups after low-smi classification with clinic data.pptx
@@ -5,7 +5,7 @@
     <p:sldMasterId id="2147483648" r:id="rId1"/>
   </p:sldMasterIdLst>
   <p:notesMasterIdLst>
-    <p:notesMasterId r:id="rId13"/>
+    <p:notesMasterId r:id="rId19"/>
   </p:notesMasterIdLst>
   <p:sldIdLst>
     <p:sldId id="256" r:id="rId2"/>
@@ -13,23 +13,29 @@
     <p:sldId id="507" r:id="rId4"/>
     <p:sldId id="481" r:id="rId5"/>
     <p:sldId id="534" r:id="rId6"/>
-    <p:sldId id="514" r:id="rId7"/>
-    <p:sldId id="519" r:id="rId8"/>
-    <p:sldId id="536" r:id="rId9"/>
-    <p:sldId id="535" r:id="rId10"/>
-    <p:sldId id="479" r:id="rId11"/>
-    <p:sldId id="537" r:id="rId12"/>
+    <p:sldId id="519" r:id="rId7"/>
+    <p:sldId id="536" r:id="rId8"/>
+    <p:sldId id="535" r:id="rId9"/>
+    <p:sldId id="479" r:id="rId10"/>
+    <p:sldId id="544" r:id="rId11"/>
+    <p:sldId id="538" r:id="rId12"/>
+    <p:sldId id="539" r:id="rId13"/>
+    <p:sldId id="540" r:id="rId14"/>
+    <p:sldId id="541" r:id="rId15"/>
+    <p:sldId id="542" r:id="rId16"/>
+    <p:sldId id="543" r:id="rId17"/>
+    <p:sldId id="537" r:id="rId18"/>
   </p:sldIdLst>
   <p:sldSz cx="12192000" cy="6858000"/>
   <p:notesSz cx="6858000" cy="9144000"/>
   <p:embeddedFontLst>
     <p:embeddedFont>
       <p:font typeface="KoPub돋움체 Bold" panose="00000800000000000000" pitchFamily="2" charset="-127"/>
-      <p:bold r:id="rId14"/>
+      <p:bold r:id="rId20"/>
     </p:embeddedFont>
     <p:embeddedFont>
       <p:font typeface="KoPub돋움체 Medium" panose="00000600000000000000" pitchFamily="2" charset="-127"/>
-      <p:regular r:id="rId15"/>
+      <p:regular r:id="rId21"/>
     </p:embeddedFont>
   </p:embeddedFontLst>
   <p:defaultTextStyle>
@@ -137,11 +143,17 @@
             <p14:sldId id="507"/>
             <p14:sldId id="481"/>
             <p14:sldId id="534"/>
-            <p14:sldId id="514"/>
             <p14:sldId id="519"/>
             <p14:sldId id="536"/>
             <p14:sldId id="535"/>
             <p14:sldId id="479"/>
+            <p14:sldId id="544"/>
+            <p14:sldId id="538"/>
+            <p14:sldId id="539"/>
+            <p14:sldId id="540"/>
+            <p14:sldId id="541"/>
+            <p14:sldId id="542"/>
+            <p14:sldId id="543"/>
             <p14:sldId id="537"/>
           </p14:sldIdLst>
         </p14:section>
@@ -2765,26 +2777,414 @@
           <a:bodyPr/>
           <a:lstStyle/>
           <a:p>
-            <a:pPr marL="0" marR="0" lvl="0" indent="0" algn="l" defTabSz="914400" rtl="0" eaLnBrk="1" fontAlgn="auto" latinLnBrk="1" hangingPunct="1">
-              <a:lnSpc>
-                <a:spcPct val="100000"/>
-              </a:lnSpc>
-              <a:spcBef>
-                <a:spcPts val="0"/>
-              </a:spcBef>
-              <a:spcAft>
-                <a:spcPts val="0"/>
-              </a:spcAft>
-              <a:buClrTx/>
-              <a:buSzTx/>
-              <a:buFontTx/>
-              <a:buNone/>
-              <a:tabLst/>
-              <a:defRPr/>
-            </a:pPr>
-            <a:r>
-              <a:rPr dirty="0" err="1"/>
-              <a:t>표지</a:t>
+            <a:r>
+              <a:t>이 발표는 CT 촬영 시 자동으로 조절되는 X선량 정보(AEC)를 활용해서, 저근감소증(근육량이 적은 상태) 위험군을 더 정확하게 가려낼 수 있는지, 그리고 그 결과가 체형 차이 같은 다른 요인 때문에 생긴 착시는 아닌지 검증한 내용입니다. 발표자: 전장훈(JangHoon Chun), 강남세브란스병원 의료기기산업학과.</a:t>
+            </a:r>
+          </a:p>
+        </p:txBody>
+      </p:sp>
+      <p:sp>
+        <p:nvSpPr>
+          <p:cNvPr id="4" name="Slide Number Placeholder 3"/>
+          <p:cNvSpPr>
+            <a:spLocks noGrp="1"/>
+          </p:cNvSpPr>
+          <p:nvPr>
+            <p:ph type="sldNum" sz="quarter" idx="5"/>
+          </p:nvPr>
+        </p:nvSpPr>
+        <p:spPr/>
+      </p:sp>
+    </p:spTree>
+  </p:cSld>
+  <p:clrMapOvr>
+    <a:masterClrMapping/>
+  </p:clrMapOvr>
+</p:notes>
+</file>
+
+<file path=ppt/notesSlides/notesSlide10.xml><?xml version="1.0" encoding="utf-8"?>
+<p:notes xmlns:a="http://schemas.openxmlformats.org/drawingml/2006/main" xmlns:r="http://schemas.openxmlformats.org/officeDocument/2006/relationships" xmlns:p="http://schemas.openxmlformats.org/presentationml/2006/main">
+  <p:cSld>
+    <p:spTree>
+      <p:nvGrpSpPr>
+        <p:cNvPr id="1" name="">
+          <a:extLst>
+            <a:ext uri="{FF2B5EF4-FFF2-40B4-BE49-F238E27FC236}">
+              <a16:creationId xmlns:a16="http://schemas.microsoft.com/office/drawing/2014/main" id="{78520728-737C-849C-4D31-0A16EA20CC1C}"/>
+            </a:ext>
+          </a:extLst>
+        </p:cNvPr>
+        <p:cNvGrpSpPr/>
+        <p:nvPr/>
+      </p:nvGrpSpPr>
+      <p:grpSpPr>
+        <a:xfrm>
+          <a:off x="0" y="0"/>
+          <a:ext cx="0" cy="0"/>
+          <a:chOff x="0" y="0"/>
+          <a:chExt cx="0" cy="0"/>
+        </a:xfrm>
+      </p:grpSpPr>
+      <p:sp>
+        <p:nvSpPr>
+          <p:cNvPr id="2" name="Slide Image Placeholder 1">
+            <a:extLst>
+              <a:ext uri="{FF2B5EF4-FFF2-40B4-BE49-F238E27FC236}">
+                <a16:creationId xmlns:a16="http://schemas.microsoft.com/office/drawing/2014/main" id="{C8C5E37B-DDAC-A92A-C7AB-4B71527EE1BC}"/>
+              </a:ext>
+            </a:extLst>
+          </p:cNvPr>
+          <p:cNvSpPr>
+            <a:spLocks noGrp="1" noRot="1" noChangeAspect="1"/>
+          </p:cNvSpPr>
+          <p:nvPr>
+            <p:ph type="sldImg" idx="2"/>
+          </p:nvPr>
+        </p:nvSpPr>
+        <p:spPr/>
+      </p:sp>
+      <p:sp>
+        <p:nvSpPr>
+          <p:cNvPr id="3" name="Notes Placeholder 2">
+            <a:extLst>
+              <a:ext uri="{FF2B5EF4-FFF2-40B4-BE49-F238E27FC236}">
+                <a16:creationId xmlns:a16="http://schemas.microsoft.com/office/drawing/2014/main" id="{DC4277A6-CE1F-CE0F-CFC0-DBC9953C1CC4}"/>
+              </a:ext>
+            </a:extLst>
+          </p:cNvPr>
+          <p:cNvSpPr>
+            <a:spLocks noGrp="1"/>
+          </p:cNvSpPr>
+          <p:nvPr>
+            <p:ph type="body" sz="quarter" idx="3"/>
+          </p:nvPr>
+        </p:nvSpPr>
+        <p:spPr/>
+        <p:txBody>
+          <a:bodyPr/>
+          <a:lstStyle/>
+          <a:p>
+            <a:r>
+              <a:t>TP vs TN(왼쪽 위 표, TP=진짜 위험군 vs TN=정상)과 FP vs TN(오른쪽 아래 표, FP=가짜 위험군 vs TN=정상)의 AEC 곡선을 그림으로 겹쳐 비교한 것입니다. 두 그림 모두 곡선이 눈에 띄게 다르고, 통계 검정도 강남·신촌 둘 다 유의합니다(강남 TP-TN p=0.002, FP-TN p=0.0005 / 신촌 TP-TN p=0.0135, FP-TN p=0.0045). 즉 Positive(TP·FP 모두)와 Negative(TN)는 CT 촬영 조건(AEC)부터가 서로 다르다는 뜻입니다 -- 체형이나 촬영 조건이 근육량과 관련 있기 때문으로 보입니다.</a:t>
+            </a:r>
+          </a:p>
+        </p:txBody>
+      </p:sp>
+      <p:sp>
+        <p:nvSpPr>
+          <p:cNvPr id="4" name="Slide Number Placeholder 3">
+            <a:extLst>
+              <a:ext uri="{FF2B5EF4-FFF2-40B4-BE49-F238E27FC236}">
+                <a16:creationId xmlns:a16="http://schemas.microsoft.com/office/drawing/2014/main" id="{A89BC6B4-E78A-8CBB-05A9-8C3AEE73D0E8}"/>
+              </a:ext>
+            </a:extLst>
+          </p:cNvPr>
+          <p:cNvSpPr>
+            <a:spLocks noGrp="1"/>
+          </p:cNvSpPr>
+          <p:nvPr>
+            <p:ph type="sldNum" sz="quarter" idx="5"/>
+          </p:nvPr>
+        </p:nvSpPr>
+        <p:spPr/>
+      </p:sp>
+    </p:spTree>
+    <p:extLst>
+      <p:ext uri="{BB962C8B-B14F-4D97-AF65-F5344CB8AC3E}">
+        <p14:creationId xmlns:p14="http://schemas.microsoft.com/office/powerpoint/2010/main" val="570776263"/>
+      </p:ext>
+    </p:extLst>
+  </p:cSld>
+  <p:clrMapOvr>
+    <a:masterClrMapping/>
+  </p:clrMapOvr>
+</p:notes>
+</file>
+
+<file path=ppt/notesSlides/notesSlide11.xml><?xml version="1.0" encoding="utf-8"?>
+<p:notes xmlns:a="http://schemas.openxmlformats.org/drawingml/2006/main" xmlns:r="http://schemas.openxmlformats.org/officeDocument/2006/relationships" xmlns:p="http://schemas.openxmlformats.org/presentationml/2006/main">
+  <p:cSld>
+    <p:spTree>
+      <p:nvGrpSpPr>
+        <p:cNvPr id="1" name=""/>
+        <p:cNvGrpSpPr/>
+        <p:nvPr/>
+      </p:nvGrpSpPr>
+      <p:grpSpPr>
+        <a:xfrm>
+          <a:off x="0" y="0"/>
+          <a:ext cx="0" cy="0"/>
+          <a:chOff x="0" y="0"/>
+          <a:chExt cx="0" cy="0"/>
+        </a:xfrm>
+      </p:grpSpPr>
+      <p:sp>
+        <p:nvSpPr>
+          <p:cNvPr id="2" name="Slide Image Placeholder 1"/>
+          <p:cNvSpPr>
+            <a:spLocks noGrp="1" noRot="1" noChangeAspect="1"/>
+          </p:cNvSpPr>
+          <p:nvPr>
+            <p:ph type="sldImg" idx="2"/>
+          </p:nvPr>
+        </p:nvSpPr>
+        <p:spPr/>
+      </p:sp>
+      <p:sp>
+        <p:nvSpPr>
+          <p:cNvPr id="3" name="Notes Placeholder 2"/>
+          <p:cNvSpPr>
+            <a:spLocks noGrp="1"/>
+          </p:cNvSpPr>
+          <p:nvPr>
+            <p:ph type="body" sz="quarter" idx="3"/>
+          </p:nvPr>
+        </p:nvSpPr>
+        <p:spPr/>
+        <p:txBody>
+          <a:bodyPr/>
+          <a:lstStyle/>
+          <a:p>
+            <a:r>
+              <a:rPr dirty="0"/>
+              <a:t>AEC </a:t>
+            </a:r>
+            <a:r>
+              <a:rPr dirty="0" err="1"/>
+              <a:t>곡선</a:t>
+            </a:r>
+            <a:r>
+              <a:rPr dirty="0"/>
+              <a:t> 128개 </a:t>
+            </a:r>
+            <a:r>
+              <a:rPr dirty="0" err="1"/>
+              <a:t>지점을</a:t>
+            </a:r>
+            <a:r>
+              <a:rPr dirty="0"/>
+              <a:t> </a:t>
+            </a:r>
+            <a:r>
+              <a:rPr dirty="0" err="1"/>
+              <a:t>통째로</a:t>
+            </a:r>
+            <a:r>
+              <a:rPr dirty="0"/>
+              <a:t> </a:t>
+            </a:r>
+            <a:r>
+              <a:rPr dirty="0" err="1"/>
+              <a:t>비교하는</a:t>
+            </a:r>
+            <a:r>
+              <a:rPr dirty="0"/>
+              <a:t> </a:t>
+            </a:r>
+            <a:r>
+              <a:rPr dirty="0" err="1"/>
+              <a:t>대신</a:t>
+            </a:r>
+            <a:r>
+              <a:rPr dirty="0"/>
+              <a:t>, '</a:t>
+            </a:r>
+            <a:r>
+              <a:rPr dirty="0" err="1"/>
+              <a:t>곡선의</a:t>
+            </a:r>
+            <a:r>
+              <a:rPr dirty="0"/>
+              <a:t> </a:t>
+            </a:r>
+            <a:r>
+              <a:rPr dirty="0" err="1"/>
+              <a:t>생김새'를</a:t>
+            </a:r>
+            <a:r>
+              <a:rPr dirty="0"/>
+              <a:t> </a:t>
+            </a:r>
+            <a:r>
+              <a:rPr dirty="0" err="1"/>
+              <a:t>요약하는</a:t>
+            </a:r>
+            <a:r>
+              <a:rPr dirty="0"/>
+              <a:t> 14가지 </a:t>
+            </a:r>
+            <a:r>
+              <a:rPr dirty="0" err="1"/>
+              <a:t>숫자</a:t>
+            </a:r>
+            <a:r>
+              <a:rPr dirty="0"/>
+              <a:t>(예: </a:t>
+            </a:r>
+            <a:r>
+              <a:rPr dirty="0" err="1"/>
+              <a:t>곡선이</a:t>
+            </a:r>
+            <a:r>
+              <a:rPr dirty="0"/>
+              <a:t> </a:t>
+            </a:r>
+            <a:r>
+              <a:rPr dirty="0" err="1"/>
+              <a:t>얼마나</a:t>
+            </a:r>
+            <a:r>
+              <a:rPr dirty="0"/>
+              <a:t> </a:t>
+            </a:r>
+            <a:r>
+              <a:rPr dirty="0" err="1"/>
+              <a:t>들쭉날쭉한지</a:t>
+            </a:r>
+            <a:r>
+              <a:rPr dirty="0"/>
+              <a:t>, </a:t>
+            </a:r>
+            <a:r>
+              <a:rPr dirty="0" err="1"/>
+              <a:t>어디서</a:t>
+            </a:r>
+            <a:r>
+              <a:rPr dirty="0"/>
+              <a:t> </a:t>
+            </a:r>
+            <a:r>
+              <a:rPr dirty="0" err="1"/>
+              <a:t>가장</a:t>
+            </a:r>
+            <a:r>
+              <a:rPr dirty="0"/>
+              <a:t> </a:t>
+            </a:r>
+            <a:r>
+              <a:rPr dirty="0" err="1"/>
+              <a:t>높고</a:t>
+            </a:r>
+            <a:r>
+              <a:rPr dirty="0"/>
+              <a:t> </a:t>
+            </a:r>
+            <a:r>
+              <a:rPr dirty="0" err="1"/>
+              <a:t>낮은지</a:t>
+            </a:r>
+            <a:r>
+              <a:rPr dirty="0"/>
+              <a:t>, </a:t>
+            </a:r>
+            <a:r>
+              <a:rPr dirty="0" err="1"/>
+              <a:t>앞부분과</a:t>
+            </a:r>
+            <a:r>
+              <a:rPr dirty="0"/>
+              <a:t> </a:t>
+            </a:r>
+            <a:r>
+              <a:rPr dirty="0" err="1"/>
+              <a:t>뒷부분</a:t>
+            </a:r>
+            <a:r>
+              <a:rPr dirty="0"/>
+              <a:t> </a:t>
+            </a:r>
+            <a:r>
+              <a:rPr dirty="0" err="1"/>
+              <a:t>기울기가</a:t>
+            </a:r>
+            <a:r>
+              <a:rPr dirty="0"/>
+              <a:t> </a:t>
+            </a:r>
+            <a:r>
+              <a:rPr dirty="0" err="1"/>
+              <a:t>얼마나</a:t>
+            </a:r>
+            <a:r>
+              <a:rPr dirty="0"/>
+              <a:t> </a:t>
+            </a:r>
+            <a:r>
+              <a:rPr dirty="0" err="1"/>
+              <a:t>다른지</a:t>
+            </a:r>
+            <a:r>
+              <a:rPr dirty="0"/>
+              <a:t> 등)를 </a:t>
+            </a:r>
+            <a:r>
+              <a:rPr dirty="0" err="1"/>
+              <a:t>각각</a:t>
+            </a:r>
+            <a:r>
+              <a:rPr dirty="0"/>
+              <a:t> </a:t>
+            </a:r>
+            <a:r>
+              <a:rPr dirty="0" err="1"/>
+              <a:t>따로</a:t>
+            </a:r>
+            <a:r>
+              <a:rPr dirty="0"/>
+              <a:t> </a:t>
+            </a:r>
+            <a:r>
+              <a:rPr dirty="0" err="1"/>
+              <a:t>뽑아서</a:t>
+            </a:r>
+            <a:r>
+              <a:rPr dirty="0"/>
+              <a:t> </a:t>
+            </a:r>
+            <a:r>
+              <a:rPr dirty="0" err="1"/>
+              <a:t>TP와</a:t>
+            </a:r>
+            <a:r>
+              <a:rPr dirty="0"/>
+              <a:t> FP </a:t>
+            </a:r>
+            <a:r>
+              <a:rPr dirty="0" err="1"/>
+              <a:t>사이에</a:t>
+            </a:r>
+            <a:r>
+              <a:rPr dirty="0"/>
+              <a:t> </a:t>
+            </a:r>
+            <a:r>
+              <a:rPr dirty="0" err="1"/>
+              <a:t>차이가</a:t>
+            </a:r>
+            <a:r>
+              <a:rPr dirty="0"/>
+              <a:t> </a:t>
+            </a:r>
+            <a:r>
+              <a:rPr dirty="0" err="1"/>
+              <a:t>있는지</a:t>
+            </a:r>
+            <a:r>
+              <a:rPr dirty="0"/>
+              <a:t> </a:t>
+            </a:r>
+            <a:r>
+              <a:rPr dirty="0" err="1"/>
+              <a:t>하나하나</a:t>
+            </a:r>
+            <a:r>
+              <a:rPr dirty="0"/>
+              <a:t> </a:t>
+            </a:r>
+            <a:r>
+              <a:rPr dirty="0" err="1"/>
+              <a:t>검정했습니다</a:t>
             </a:r>
             <a:r>
               <a:rPr dirty="0"/>
@@ -2792,105 +3192,1343 @@
             </a:r>
             <a:r>
               <a:rPr dirty="0" err="1"/>
-              <a:t>발표자</a:t>
-            </a:r>
-            <a:r>
-              <a:rPr dirty="0"/>
-              <a:t>: 전장훈(</a:t>
-            </a:r>
-            <a:r>
-              <a:rPr dirty="0" err="1"/>
-              <a:t>JangHoon</a:t>
-            </a:r>
-            <a:r>
-              <a:rPr dirty="0"/>
-              <a:t> Chun), </a:t>
-            </a:r>
-            <a:r>
-              <a:rPr dirty="0" err="1"/>
-              <a:t>강남세브란스병원</a:t>
-            </a:r>
-            <a:r>
-              <a:rPr dirty="0"/>
-              <a:t> </a:t>
-            </a:r>
-            <a:r>
-              <a:rPr dirty="0" err="1"/>
-              <a:t>의료기기산업학과</a:t>
-            </a:r>
-            <a:r>
-              <a:rPr dirty="0"/>
-              <a:t>. </a:t>
-            </a:r>
-            <a:r>
-              <a:rPr lang="en-US" altLang="ko-KR" sz="1200" b="0" dirty="0">
-                <a:solidFill>
-                  <a:schemeClr val="bg1"/>
-                </a:solidFill>
-                <a:latin typeface="KoPub돋움체 Bold" panose="00000800000000000000" pitchFamily="2" charset="-127"/>
-                <a:ea typeface="KoPub돋움체 Bold" panose="00000800000000000000" pitchFamily="2" charset="-127"/>
-              </a:rPr>
-              <a:t>Stage-2 AEC-Clinical Fusion: </a:t>
-            </a:r>
-            <a:r>
-              <a:rPr lang="ko-KR" altLang="en-US" sz="1200" b="0" dirty="0" err="1">
-                <a:solidFill>
-                  <a:schemeClr val="bg1"/>
-                </a:solidFill>
-                <a:latin typeface="KoPub돋움체 Bold" panose="00000800000000000000" pitchFamily="2" charset="-127"/>
-                <a:ea typeface="KoPub돋움체 Bold" panose="00000800000000000000" pitchFamily="2" charset="-127"/>
-              </a:rPr>
-              <a:t>재분류</a:t>
-            </a:r>
-            <a:r>
-              <a:rPr lang="ko-KR" altLang="en-US" sz="1200" b="0" dirty="0">
-                <a:solidFill>
-                  <a:schemeClr val="bg1"/>
-                </a:solidFill>
-                <a:latin typeface="KoPub돋움체 Bold" panose="00000800000000000000" pitchFamily="2" charset="-127"/>
-                <a:ea typeface="KoPub돋움체 Bold" panose="00000800000000000000" pitchFamily="2" charset="-127"/>
-              </a:rPr>
-              <a:t> 성능 및 </a:t>
-            </a:r>
-            <a:r>
-              <a:rPr lang="en-US" altLang="ko-KR" sz="1200" b="0" dirty="0">
-                <a:solidFill>
-                  <a:schemeClr val="bg1"/>
-                </a:solidFill>
-                <a:latin typeface="KoPub돋움체 Bold" panose="00000800000000000000" pitchFamily="2" charset="-127"/>
-                <a:ea typeface="KoPub돋움체 Bold" panose="00000800000000000000" pitchFamily="2" charset="-127"/>
-              </a:rPr>
-              <a:t>Confound </a:t>
-            </a:r>
-            <a:r>
-              <a:rPr lang="ko-KR" altLang="en-US" sz="1200" b="0" dirty="0">
-                <a:solidFill>
-                  <a:schemeClr val="bg1"/>
-                </a:solidFill>
-                <a:latin typeface="KoPub돋움체 Bold" panose="00000800000000000000" pitchFamily="2" charset="-127"/>
-                <a:ea typeface="KoPub돋움체 Bold" panose="00000800000000000000" pitchFamily="2" charset="-127"/>
-              </a:rPr>
-              <a:t>검증</a:t>
-            </a:r>
-            <a:r>
-              <a:rPr b="0" dirty="0"/>
-              <a:t> </a:t>
-            </a:r>
+              <a:t>사람</a:t>
+            </a:r>
+            <a:r>
+              <a:rPr dirty="0"/>
+              <a:t> </a:t>
+            </a:r>
+            <a:r>
+              <a:rPr dirty="0" err="1"/>
+              <a:t>눈에는</a:t>
+            </a:r>
+            <a:r>
+              <a:rPr dirty="0"/>
+              <a:t> 안 </a:t>
+            </a:r>
+            <a:r>
+              <a:rPr dirty="0" err="1"/>
+              <a:t>보이는</a:t>
+            </a:r>
+            <a:r>
+              <a:rPr dirty="0"/>
+              <a:t> </a:t>
+            </a:r>
+            <a:r>
+              <a:rPr dirty="0" err="1"/>
+              <a:t>미세한</a:t>
+            </a:r>
+            <a:r>
+              <a:rPr dirty="0"/>
+              <a:t> </a:t>
+            </a:r>
+            <a:r>
+              <a:rPr dirty="0" err="1"/>
+              <a:t>형태</a:t>
+            </a:r>
+            <a:r>
+              <a:rPr dirty="0"/>
+              <a:t> </a:t>
+            </a:r>
+            <a:r>
+              <a:rPr dirty="0" err="1"/>
+              <a:t>차이를</a:t>
+            </a:r>
+            <a:r>
+              <a:rPr dirty="0"/>
+              <a:t> </a:t>
+            </a:r>
+            <a:r>
+              <a:rPr dirty="0" err="1"/>
+              <a:t>잡아낼</a:t>
+            </a:r>
+            <a:r>
+              <a:rPr dirty="0"/>
+              <a:t> </a:t>
+            </a:r>
+            <a:r>
+              <a:rPr dirty="0" err="1"/>
+              <a:t>수도</a:t>
+            </a:r>
+            <a:r>
+              <a:rPr dirty="0"/>
+              <a:t> </a:t>
+            </a:r>
+            <a:r>
+              <a:rPr dirty="0" err="1"/>
+              <a:t>있다는</a:t>
+            </a:r>
+            <a:r>
+              <a:rPr dirty="0"/>
+              <a:t> </a:t>
+            </a:r>
+            <a:r>
+              <a:rPr dirty="0" err="1"/>
+              <a:t>생각에서입니다</a:t>
+            </a:r>
+            <a:r>
+              <a:rPr dirty="0"/>
+              <a:t>.</a:t>
+            </a:r>
+          </a:p>
+          <a:p>
+            <a:endParaRPr dirty="0"/>
+          </a:p>
+          <a:p>
+            <a:r>
+              <a:rPr dirty="0" err="1"/>
+              <a:t>주의할</a:t>
+            </a:r>
+            <a:r>
+              <a:rPr dirty="0"/>
+              <a:t> 점: </a:t>
+            </a:r>
+            <a:r>
+              <a:rPr dirty="0" err="1"/>
+              <a:t>검정을</a:t>
+            </a:r>
+            <a:r>
+              <a:rPr dirty="0"/>
+              <a:t> 한 </a:t>
+            </a:r>
+            <a:r>
+              <a:rPr dirty="0" err="1"/>
+              <a:t>번만</a:t>
+            </a:r>
+            <a:r>
+              <a:rPr dirty="0"/>
+              <a:t> </a:t>
+            </a:r>
+            <a:r>
+              <a:rPr dirty="0" err="1"/>
+              <a:t>하면</a:t>
+            </a:r>
+            <a:r>
+              <a:rPr dirty="0"/>
+              <a:t> </a:t>
+            </a:r>
+            <a:r>
+              <a:rPr dirty="0" err="1"/>
+              <a:t>우연히</a:t>
+            </a:r>
+            <a:r>
+              <a:rPr dirty="0"/>
+              <a:t> </a:t>
+            </a:r>
+            <a:r>
+              <a:rPr dirty="0" err="1"/>
+              <a:t>유의하게</a:t>
+            </a:r>
+            <a:r>
+              <a:rPr dirty="0"/>
+              <a:t> </a:t>
+            </a:r>
+            <a:r>
+              <a:rPr dirty="0" err="1"/>
+              <a:t>나올</a:t>
+            </a:r>
+            <a:r>
+              <a:rPr dirty="0"/>
+              <a:t> </a:t>
+            </a:r>
+            <a:r>
+              <a:rPr dirty="0" err="1"/>
+              <a:t>확률이</a:t>
+            </a:r>
+            <a:r>
+              <a:rPr dirty="0"/>
+              <a:t> 5%지만, </a:t>
+            </a:r>
+            <a:r>
+              <a:rPr dirty="0" err="1"/>
+              <a:t>여기서는</a:t>
+            </a:r>
+            <a:r>
+              <a:rPr dirty="0"/>
+              <a:t> 14개(+</a:t>
+            </a:r>
+            <a:r>
+              <a:rPr dirty="0" err="1"/>
+              <a:t>비교용</a:t>
+            </a:r>
+            <a:r>
+              <a:rPr dirty="0"/>
+              <a:t> clinic </a:t>
+            </a:r>
+            <a:r>
+              <a:rPr dirty="0" err="1"/>
+              <a:t>변수</a:t>
+            </a:r>
+            <a:r>
+              <a:rPr dirty="0"/>
+              <a:t> 4개=18개)를 </a:t>
+            </a:r>
+            <a:r>
+              <a:rPr dirty="0" err="1"/>
+              <a:t>한꺼번에</a:t>
+            </a:r>
+            <a:r>
+              <a:rPr dirty="0"/>
+              <a:t> </a:t>
+            </a:r>
+            <a:r>
+              <a:rPr dirty="0" err="1"/>
+              <a:t>검정하기</a:t>
+            </a:r>
+            <a:r>
+              <a:rPr dirty="0"/>
+              <a:t> </a:t>
+            </a:r>
+            <a:r>
+              <a:rPr dirty="0" err="1"/>
+              <a:t>때문에</a:t>
+            </a:r>
+            <a:r>
+              <a:rPr dirty="0"/>
+              <a:t>, </a:t>
+            </a:r>
+            <a:r>
+              <a:rPr dirty="0" err="1"/>
+              <a:t>개별</a:t>
+            </a:r>
+            <a:r>
+              <a:rPr dirty="0"/>
+              <a:t> p&lt;0.05만 </a:t>
+            </a:r>
+            <a:r>
+              <a:rPr dirty="0" err="1"/>
+              <a:t>보면</a:t>
+            </a:r>
+            <a:r>
+              <a:rPr dirty="0"/>
+              <a:t> </a:t>
+            </a:r>
+            <a:r>
+              <a:rPr dirty="0" err="1"/>
+              <a:t>우연히</a:t>
+            </a:r>
+            <a:r>
+              <a:rPr dirty="0"/>
+              <a:t> 몇 </a:t>
+            </a:r>
+            <a:r>
+              <a:rPr dirty="0" err="1"/>
+              <a:t>개는</a:t>
+            </a:r>
+            <a:r>
+              <a:rPr dirty="0"/>
+              <a:t> '</a:t>
+            </a:r>
+            <a:r>
+              <a:rPr dirty="0" err="1"/>
+              <a:t>유의'하게</a:t>
+            </a:r>
+            <a:r>
+              <a:rPr dirty="0"/>
+              <a:t> </a:t>
+            </a:r>
+            <a:r>
+              <a:rPr dirty="0" err="1"/>
+              <a:t>나올</a:t>
+            </a:r>
+            <a:r>
+              <a:rPr dirty="0"/>
+              <a:t> </a:t>
+            </a:r>
+            <a:r>
+              <a:rPr dirty="0" err="1"/>
+              <a:t>수밖에</a:t>
+            </a:r>
+            <a:r>
+              <a:rPr dirty="0"/>
+              <a:t> </a:t>
+            </a:r>
+            <a:r>
+              <a:rPr dirty="0" err="1"/>
+              <a:t>없습니다</a:t>
+            </a:r>
+            <a:r>
+              <a:rPr dirty="0"/>
+              <a:t>(</a:t>
+            </a:r>
+            <a:r>
+              <a:rPr dirty="0" err="1"/>
+              <a:t>로또를</a:t>
+            </a:r>
+            <a:r>
+              <a:rPr dirty="0"/>
+              <a:t> 18번 </a:t>
+            </a:r>
+            <a:r>
+              <a:rPr dirty="0" err="1"/>
+              <a:t>사면</a:t>
+            </a:r>
+            <a:r>
+              <a:rPr dirty="0"/>
+              <a:t> </a:t>
+            </a:r>
+            <a:r>
+              <a:rPr dirty="0" err="1"/>
+              <a:t>그럴듯한</a:t>
+            </a:r>
+            <a:r>
+              <a:rPr dirty="0"/>
+              <a:t> 게 </a:t>
+            </a:r>
+            <a:r>
+              <a:rPr dirty="0" err="1"/>
+              <a:t>하나쯤은</a:t>
+            </a:r>
+            <a:r>
+              <a:rPr dirty="0"/>
+              <a:t> </a:t>
+            </a:r>
+            <a:r>
+              <a:rPr dirty="0" err="1"/>
+              <a:t>나오는</a:t>
+            </a:r>
+            <a:r>
+              <a:rPr dirty="0"/>
+              <a:t> </a:t>
+            </a:r>
+            <a:r>
+              <a:rPr dirty="0" err="1"/>
+              <a:t>것과</a:t>
+            </a:r>
+            <a:r>
+              <a:rPr dirty="0"/>
+              <a:t> </a:t>
+            </a:r>
+            <a:r>
+              <a:rPr dirty="0" err="1"/>
+              <a:t>비슷한</a:t>
+            </a:r>
+            <a:r>
+              <a:rPr dirty="0"/>
+              <a:t> </a:t>
+            </a:r>
+            <a:r>
+              <a:rPr dirty="0" err="1"/>
+              <a:t>이치</a:t>
+            </a:r>
+            <a:r>
+              <a:rPr dirty="0"/>
+              <a:t>). 이 '</a:t>
+            </a:r>
+            <a:r>
+              <a:rPr dirty="0" err="1"/>
+              <a:t>우연히</a:t>
+            </a:r>
+            <a:r>
+              <a:rPr dirty="0"/>
+              <a:t> </a:t>
+            </a:r>
+            <a:r>
+              <a:rPr dirty="0" err="1"/>
+              <a:t>유의해</a:t>
+            </a:r>
+            <a:r>
+              <a:rPr dirty="0"/>
+              <a:t> </a:t>
+            </a:r>
+            <a:r>
+              <a:rPr dirty="0" err="1"/>
+              <a:t>보이는</a:t>
+            </a:r>
+            <a:r>
+              <a:rPr dirty="0"/>
+              <a:t> </a:t>
+            </a:r>
+            <a:r>
+              <a:rPr dirty="0" err="1"/>
+              <a:t>것'을</a:t>
+            </a:r>
+            <a:r>
+              <a:rPr dirty="0"/>
+              <a:t> </a:t>
+            </a:r>
+            <a:r>
+              <a:rPr dirty="0" err="1"/>
+              <a:t>걸러내는</a:t>
+            </a:r>
+            <a:r>
+              <a:rPr dirty="0"/>
+              <a:t> </a:t>
+            </a:r>
+            <a:r>
+              <a:rPr dirty="0" err="1"/>
+              <a:t>보정된</a:t>
+            </a:r>
+            <a:r>
+              <a:rPr dirty="0"/>
+              <a:t> </a:t>
+            </a:r>
+            <a:r>
+              <a:rPr dirty="0" err="1"/>
+              <a:t>기준이</a:t>
+            </a:r>
+            <a:r>
+              <a:rPr dirty="0"/>
+              <a:t> q-</a:t>
+            </a:r>
+            <a:r>
+              <a:rPr dirty="0" err="1"/>
+              <a:t>value입니다</a:t>
+            </a:r>
+            <a:r>
+              <a:rPr dirty="0"/>
+              <a:t>. q&lt;0.05는 '이 </a:t>
+            </a:r>
+            <a:r>
+              <a:rPr dirty="0" err="1"/>
+              <a:t>안에서</a:t>
+            </a:r>
+            <a:r>
+              <a:rPr dirty="0"/>
+              <a:t> </a:t>
+            </a:r>
+            <a:r>
+              <a:rPr dirty="0" err="1"/>
+              <a:t>유의하다고</a:t>
+            </a:r>
+            <a:r>
+              <a:rPr dirty="0"/>
+              <a:t> </a:t>
+            </a:r>
+            <a:r>
+              <a:rPr dirty="0" err="1"/>
+              <a:t>뽑은</a:t>
+            </a:r>
+            <a:r>
+              <a:rPr dirty="0"/>
+              <a:t> </a:t>
+            </a:r>
+            <a:r>
+              <a:rPr dirty="0" err="1"/>
+              <a:t>것들</a:t>
+            </a:r>
+            <a:r>
+              <a:rPr dirty="0"/>
+              <a:t> 중 </a:t>
+            </a:r>
+            <a:r>
+              <a:rPr dirty="0" err="1"/>
+              <a:t>실제로</a:t>
+            </a:r>
+            <a:r>
+              <a:rPr dirty="0"/>
+              <a:t> </a:t>
+            </a:r>
+            <a:r>
+              <a:rPr dirty="0" err="1"/>
+              <a:t>우연이</a:t>
+            </a:r>
+            <a:r>
+              <a:rPr dirty="0"/>
+              <a:t> </a:t>
+            </a:r>
+            <a:r>
+              <a:rPr dirty="0" err="1"/>
+              <a:t>섞여</a:t>
+            </a:r>
+            <a:r>
+              <a:rPr dirty="0"/>
+              <a:t> </a:t>
+            </a:r>
+            <a:r>
+              <a:rPr dirty="0" err="1"/>
+              <a:t>있을</a:t>
+            </a:r>
+            <a:r>
+              <a:rPr dirty="0"/>
+              <a:t> </a:t>
+            </a:r>
+            <a:r>
+              <a:rPr dirty="0" err="1"/>
+              <a:t>비율이</a:t>
+            </a:r>
+            <a:r>
+              <a:rPr dirty="0"/>
+              <a:t> 5% </a:t>
+            </a:r>
+            <a:r>
+              <a:rPr dirty="0" err="1"/>
+              <a:t>이하로</a:t>
+            </a:r>
+            <a:r>
+              <a:rPr dirty="0"/>
+              <a:t> </a:t>
+            </a:r>
+            <a:r>
+              <a:rPr dirty="0" err="1"/>
+              <a:t>통제된</a:t>
+            </a:r>
+            <a:r>
+              <a:rPr dirty="0"/>
+              <a:t> </a:t>
+            </a:r>
+            <a:r>
+              <a:rPr dirty="0" err="1"/>
+              <a:t>상태'라는</a:t>
+            </a:r>
+            <a:r>
+              <a:rPr dirty="0"/>
+              <a:t> </a:t>
+            </a:r>
+            <a:r>
+              <a:rPr dirty="0" err="1"/>
+              <a:t>뜻으로</a:t>
+            </a:r>
+            <a:r>
+              <a:rPr dirty="0"/>
+              <a:t>, </a:t>
+            </a:r>
+            <a:r>
+              <a:rPr dirty="0" err="1"/>
+              <a:t>개별</a:t>
+            </a:r>
+            <a:r>
+              <a:rPr dirty="0"/>
+              <a:t> p-</a:t>
+            </a:r>
+            <a:r>
+              <a:rPr dirty="0" err="1"/>
+              <a:t>value보다</a:t>
+            </a:r>
+            <a:r>
+              <a:rPr dirty="0"/>
+              <a:t> 더 </a:t>
+            </a:r>
+            <a:r>
+              <a:rPr dirty="0" err="1"/>
+              <a:t>엄격하고</a:t>
+            </a:r>
+            <a:r>
+              <a:rPr dirty="0"/>
+              <a:t> </a:t>
+            </a:r>
+            <a:r>
+              <a:rPr dirty="0" err="1"/>
+              <a:t>믿을</a:t>
+            </a:r>
+            <a:r>
+              <a:rPr dirty="0"/>
+              <a:t> </a:t>
+            </a:r>
+            <a:r>
+              <a:rPr dirty="0" err="1"/>
+              <a:t>만한</a:t>
+            </a:r>
+            <a:r>
+              <a:rPr dirty="0"/>
+              <a:t> </a:t>
+            </a:r>
+            <a:r>
+              <a:rPr dirty="0" err="1"/>
+              <a:t>기준입니다</a:t>
+            </a:r>
+            <a:r>
+              <a:rPr dirty="0"/>
+              <a:t>.</a:t>
+            </a:r>
+          </a:p>
+          <a:p>
+            <a:endParaRPr dirty="0"/>
+          </a:p>
+          <a:p>
             <a:r>
               <a:rPr dirty="0" err="1"/>
               <a:t>결과</a:t>
             </a:r>
             <a:r>
               <a:rPr dirty="0"/>
-              <a:t> </a:t>
-            </a:r>
-            <a:r>
-              <a:rPr dirty="0" err="1"/>
-              <a:t>발표</a:t>
+              <a:t>: raw(</a:t>
+            </a:r>
+            <a:r>
+              <a:rPr dirty="0" err="1"/>
+              <a:t>원표본</a:t>
+            </a:r>
+            <a:r>
+              <a:rPr dirty="0"/>
+              <a:t>) / matched(</a:t>
+            </a:r>
+            <a:r>
+              <a:rPr dirty="0" err="1"/>
+              <a:t>비슷한</a:t>
+            </a:r>
+            <a:r>
+              <a:rPr dirty="0"/>
+              <a:t> </a:t>
+            </a:r>
+            <a:r>
+              <a:rPr dirty="0" err="1"/>
+              <a:t>환자끼리</a:t>
+            </a:r>
+            <a:r>
+              <a:rPr dirty="0"/>
+              <a:t> </a:t>
+            </a:r>
+            <a:r>
+              <a:rPr dirty="0" err="1"/>
+              <a:t>매칭</a:t>
+            </a:r>
+            <a:r>
+              <a:rPr dirty="0"/>
+              <a:t>) / </a:t>
+            </a:r>
+            <a:r>
+              <a:rPr dirty="0" err="1"/>
+              <a:t>residualized</a:t>
+            </a:r>
+            <a:r>
+              <a:rPr dirty="0"/>
+              <a:t>(</a:t>
+            </a:r>
+            <a:r>
+              <a:rPr dirty="0" err="1"/>
+              <a:t>체형</a:t>
+            </a:r>
+            <a:r>
+              <a:rPr dirty="0"/>
+              <a:t> </a:t>
+            </a:r>
+            <a:r>
+              <a:rPr dirty="0" err="1"/>
+              <a:t>영향을</a:t>
+            </a:r>
+            <a:r>
+              <a:rPr dirty="0"/>
+              <a:t> </a:t>
+            </a:r>
+            <a:r>
+              <a:rPr dirty="0" err="1"/>
+              <a:t>통계적으로</a:t>
+            </a:r>
+            <a:r>
+              <a:rPr dirty="0"/>
+              <a:t> </a:t>
+            </a:r>
+            <a:r>
+              <a:rPr dirty="0" err="1"/>
+              <a:t>미리</a:t>
+            </a:r>
+            <a:r>
+              <a:rPr dirty="0"/>
+              <a:t> </a:t>
+            </a:r>
+            <a:r>
+              <a:rPr dirty="0" err="1"/>
+              <a:t>빼고</a:t>
+            </a:r>
+            <a:r>
+              <a:rPr dirty="0"/>
+              <a:t> </a:t>
+            </a:r>
+            <a:r>
+              <a:rPr dirty="0" err="1"/>
+              <a:t>비교</a:t>
+            </a:r>
+            <a:r>
+              <a:rPr dirty="0"/>
+              <a:t>) 세 </a:t>
+            </a:r>
+            <a:r>
+              <a:rPr dirty="0" err="1"/>
+              <a:t>가지</a:t>
+            </a:r>
+            <a:r>
+              <a:rPr dirty="0"/>
+              <a:t> </a:t>
+            </a:r>
+            <a:r>
+              <a:rPr dirty="0" err="1"/>
+              <a:t>방법</a:t>
+            </a:r>
+            <a:r>
+              <a:rPr dirty="0"/>
+              <a:t>, </a:t>
+            </a:r>
+            <a:r>
+              <a:rPr dirty="0" err="1"/>
+              <a:t>강남·신촌</a:t>
+            </a:r>
+            <a:r>
+              <a:rPr dirty="0"/>
+              <a:t> 두 </a:t>
+            </a:r>
+            <a:r>
+              <a:rPr dirty="0" err="1"/>
+              <a:t>코호트</a:t>
+            </a:r>
+            <a:r>
+              <a:rPr dirty="0"/>
+              <a:t>, 84번의 </a:t>
+            </a:r>
+            <a:r>
+              <a:rPr dirty="0" err="1"/>
+              <a:t>검정</a:t>
+            </a:r>
+            <a:r>
+              <a:rPr dirty="0"/>
+              <a:t>(14개 feature x 3방법 x 2코호트) </a:t>
+            </a:r>
+            <a:r>
+              <a:rPr dirty="0" err="1"/>
+              <a:t>전부</a:t>
+            </a:r>
+            <a:r>
+              <a:rPr dirty="0"/>
+              <a:t> q-value </a:t>
+            </a:r>
+            <a:r>
+              <a:rPr dirty="0" err="1"/>
+              <a:t>기준으로는</a:t>
+            </a:r>
+            <a:r>
+              <a:rPr dirty="0"/>
+              <a:t> </a:t>
+            </a:r>
+            <a:r>
+              <a:rPr dirty="0" err="1"/>
+              <a:t>유의한</a:t>
+            </a:r>
+            <a:r>
+              <a:rPr dirty="0"/>
+              <a:t> </a:t>
+            </a:r>
+            <a:r>
+              <a:rPr dirty="0" err="1"/>
+              <a:t>것이</a:t>
+            </a:r>
+            <a:r>
+              <a:rPr dirty="0"/>
+              <a:t> </a:t>
+            </a:r>
+            <a:r>
+              <a:rPr dirty="0" err="1"/>
+              <a:t>하나도</a:t>
+            </a:r>
+            <a:r>
+              <a:rPr dirty="0"/>
+              <a:t> </a:t>
+            </a:r>
+            <a:r>
+              <a:rPr dirty="0" err="1"/>
+              <a:t>없었습니다</a:t>
+            </a:r>
+            <a:r>
+              <a:rPr dirty="0"/>
+              <a:t>(0/84). </a:t>
+            </a:r>
+            <a:r>
+              <a:rPr dirty="0" err="1"/>
+              <a:t>보정</a:t>
+            </a:r>
+            <a:r>
+              <a:rPr dirty="0"/>
+              <a:t> 전 p&lt;0.05만 </a:t>
+            </a:r>
+            <a:r>
+              <a:rPr dirty="0" err="1"/>
+              <a:t>보면</a:t>
+            </a:r>
+            <a:r>
+              <a:rPr dirty="0"/>
+              <a:t> </a:t>
+            </a:r>
+            <a:r>
+              <a:rPr dirty="0" err="1"/>
+              <a:t>조합마다</a:t>
+            </a:r>
+            <a:r>
+              <a:rPr dirty="0"/>
+              <a:t> 0~3개씩 </a:t>
+            </a:r>
+            <a:r>
+              <a:rPr dirty="0" err="1"/>
+              <a:t>나오지만</a:t>
+            </a:r>
+            <a:r>
+              <a:rPr dirty="0"/>
+              <a:t>, </a:t>
+            </a:r>
+            <a:r>
+              <a:rPr dirty="0" err="1"/>
+              <a:t>매번</a:t>
+            </a:r>
+            <a:r>
+              <a:rPr dirty="0"/>
+              <a:t> </a:t>
+            </a:r>
+            <a:r>
+              <a:rPr dirty="0" err="1"/>
+              <a:t>다른</a:t>
+            </a:r>
+            <a:r>
+              <a:rPr dirty="0"/>
+              <a:t> </a:t>
+            </a:r>
+            <a:r>
+              <a:rPr dirty="0" err="1"/>
+              <a:t>지표가</a:t>
+            </a:r>
+            <a:r>
+              <a:rPr dirty="0"/>
+              <a:t> </a:t>
+            </a:r>
+            <a:r>
+              <a:rPr dirty="0" err="1"/>
+              <a:t>걸리고</a:t>
+            </a:r>
+            <a:r>
+              <a:rPr dirty="0"/>
+              <a:t> </a:t>
+            </a:r>
+            <a:r>
+              <a:rPr dirty="0" err="1"/>
+              <a:t>보정하면</a:t>
+            </a:r>
+            <a:r>
+              <a:rPr dirty="0"/>
+              <a:t> </a:t>
+            </a:r>
+            <a:r>
+              <a:rPr dirty="0" err="1"/>
+              <a:t>사라지므로</a:t>
+            </a:r>
+            <a:r>
+              <a:rPr dirty="0"/>
+              <a:t> '</a:t>
+            </a:r>
+            <a:r>
+              <a:rPr dirty="0" err="1"/>
+              <a:t>진짜</a:t>
+            </a:r>
+            <a:r>
+              <a:rPr dirty="0"/>
+              <a:t> </a:t>
+            </a:r>
+            <a:r>
+              <a:rPr dirty="0" err="1"/>
+              <a:t>신호'가</a:t>
+            </a:r>
+            <a:r>
+              <a:rPr dirty="0"/>
+              <a:t> </a:t>
+            </a:r>
+            <a:r>
+              <a:rPr dirty="0" err="1"/>
+              <a:t>아니라</a:t>
+            </a:r>
+            <a:r>
+              <a:rPr dirty="0"/>
+              <a:t> '</a:t>
+            </a:r>
+            <a:r>
+              <a:rPr dirty="0" err="1"/>
+              <a:t>우연'으로</a:t>
+            </a:r>
+            <a:r>
+              <a:rPr dirty="0"/>
+              <a:t> </a:t>
+            </a:r>
+            <a:r>
+              <a:rPr dirty="0" err="1"/>
+              <a:t>판단합니다</a:t>
             </a:r>
             <a:r>
               <a:rPr dirty="0"/>
               <a:t>.</a:t>
+            </a:r>
+          </a:p>
+        </p:txBody>
+      </p:sp>
+      <p:sp>
+        <p:nvSpPr>
+          <p:cNvPr id="4" name="Slide Number Placeholder 3"/>
+          <p:cNvSpPr>
+            <a:spLocks noGrp="1"/>
+          </p:cNvSpPr>
+          <p:nvPr>
+            <p:ph type="sldNum" sz="quarter" idx="5"/>
+          </p:nvPr>
+        </p:nvSpPr>
+        <p:spPr/>
+      </p:sp>
+    </p:spTree>
+    <p:extLst>
+      <p:ext uri="{BB962C8B-B14F-4D97-AF65-F5344CB8AC3E}">
+        <p14:creationId xmlns:p14="http://schemas.microsoft.com/office/powerpoint/2010/main" val="2650842457"/>
+      </p:ext>
+    </p:extLst>
+  </p:cSld>
+  <p:clrMapOvr>
+    <a:masterClrMapping/>
+  </p:clrMapOvr>
+</p:notes>
+</file>
+
+<file path=ppt/notesSlides/notesSlide12.xml><?xml version="1.0" encoding="utf-8"?>
+<p:notes xmlns:a="http://schemas.openxmlformats.org/drawingml/2006/main" xmlns:r="http://schemas.openxmlformats.org/officeDocument/2006/relationships" xmlns:p="http://schemas.openxmlformats.org/presentationml/2006/main">
+  <p:cSld>
+    <p:spTree>
+      <p:nvGrpSpPr>
+        <p:cNvPr id="1" name=""/>
+        <p:cNvGrpSpPr/>
+        <p:nvPr/>
+      </p:nvGrpSpPr>
+      <p:grpSpPr>
+        <a:xfrm>
+          <a:off x="0" y="0"/>
+          <a:ext cx="0" cy="0"/>
+          <a:chOff x="0" y="0"/>
+          <a:chExt cx="0" cy="0"/>
+        </a:xfrm>
+      </p:grpSpPr>
+      <p:sp>
+        <p:nvSpPr>
+          <p:cNvPr id="2" name="Slide Image Placeholder 1"/>
+          <p:cNvSpPr>
+            <a:spLocks noGrp="1" noRot="1" noChangeAspect="1"/>
+          </p:cNvSpPr>
+          <p:nvPr>
+            <p:ph type="sldImg" idx="2"/>
+          </p:nvPr>
+        </p:nvSpPr>
+        <p:spPr/>
+      </p:sp>
+      <p:sp>
+        <p:nvSpPr>
+          <p:cNvPr id="3" name="Notes Placeholder 2"/>
+          <p:cNvSpPr>
+            <a:spLocks noGrp="1"/>
+          </p:cNvSpPr>
+          <p:nvPr>
+            <p:ph type="body" sz="quarter" idx="3"/>
+          </p:nvPr>
+        </p:nvSpPr>
+        <p:spPr/>
+        <p:txBody>
+          <a:bodyPr/>
+          <a:lstStyle/>
+          <a:p>
+            <a:r>
+              <a:t>강남 데이터에서 14개 곡선-형태 지표 각각의 p-value를 막대그래프로 그린 그림입니다(왼쪽부터 원표본/매칭/체형보정 3가지 방법). 막대가 길수록(오른쪽으로 갈수록) '우연이 아닐 가능성'이 높다는 뜻이고, 점선(p=0.05 위치)을 넘어야 최소한의 기준을 만족합니다. 강남은 3가지 방법 모두에서 진짜로 믿을 만한 차이(q&lt;0.05)가 하나도 없었습니다.</a:t>
+            </a:r>
+          </a:p>
+        </p:txBody>
+      </p:sp>
+      <p:sp>
+        <p:nvSpPr>
+          <p:cNvPr id="4" name="Slide Number Placeholder 3"/>
+          <p:cNvSpPr>
+            <a:spLocks noGrp="1"/>
+          </p:cNvSpPr>
+          <p:nvPr>
+            <p:ph type="sldNum" sz="quarter" idx="5"/>
+          </p:nvPr>
+        </p:nvSpPr>
+        <p:spPr/>
+      </p:sp>
+    </p:spTree>
+    <p:extLst>
+      <p:ext uri="{BB962C8B-B14F-4D97-AF65-F5344CB8AC3E}">
+        <p14:creationId xmlns:p14="http://schemas.microsoft.com/office/powerpoint/2010/main" val="3575994740"/>
+      </p:ext>
+    </p:extLst>
+  </p:cSld>
+  <p:clrMapOvr>
+    <a:masterClrMapping/>
+  </p:clrMapOvr>
+</p:notes>
+</file>
+
+<file path=ppt/notesSlides/notesSlide13.xml><?xml version="1.0" encoding="utf-8"?>
+<p:notes xmlns:a="http://schemas.openxmlformats.org/drawingml/2006/main" xmlns:r="http://schemas.openxmlformats.org/officeDocument/2006/relationships" xmlns:p="http://schemas.openxmlformats.org/presentationml/2006/main">
+  <p:cSld>
+    <p:spTree>
+      <p:nvGrpSpPr>
+        <p:cNvPr id="1" name=""/>
+        <p:cNvGrpSpPr/>
+        <p:nvPr/>
+      </p:nvGrpSpPr>
+      <p:grpSpPr>
+        <a:xfrm>
+          <a:off x="0" y="0"/>
+          <a:ext cx="0" cy="0"/>
+          <a:chOff x="0" y="0"/>
+          <a:chExt cx="0" cy="0"/>
+        </a:xfrm>
+      </p:grpSpPr>
+      <p:sp>
+        <p:nvSpPr>
+          <p:cNvPr id="2" name="Slide Image Placeholder 1"/>
+          <p:cNvSpPr>
+            <a:spLocks noGrp="1" noRot="1" noChangeAspect="1"/>
+          </p:cNvSpPr>
+          <p:nvPr>
+            <p:ph type="sldImg" idx="2"/>
+          </p:nvPr>
+        </p:nvSpPr>
+        <p:spPr/>
+      </p:sp>
+      <p:sp>
+        <p:nvSpPr>
+          <p:cNvPr id="3" name="Notes Placeholder 2"/>
+          <p:cNvSpPr>
+            <a:spLocks noGrp="1"/>
+          </p:cNvSpPr>
+          <p:nvPr>
+            <p:ph type="body" sz="quarter" idx="3"/>
+          </p:nvPr>
+        </p:nvSpPr>
+        <p:spPr/>
+        <p:txBody>
+          <a:bodyPr/>
+          <a:lstStyle/>
+          <a:p>
+            <a:r>
+              <a:t>신촌 데이터의 같은 그림입니다. 강남과 마찬가지로 14개 지표 중 진짜로 믿을 만한 차이(q&lt;0.05)는 없습니다. 다만 슬라이드5에서 봤던 '신촌은 원곡선 전체로 보면 약하게 차이가 남아있다'는 결과와는 대비됩니다 -- 곡선을 14개 요약 지표로 압축해서 보면 그 미세한 차이가 사라진다는 뜻으로, 특정한 하나의 형태 특징으로 설명되는 게 아니라 곡선 전체에 아주 옅게 퍼져 있는 잡음에 가깝다는 뜻일 수 있습니다.</a:t>
+            </a:r>
+          </a:p>
+        </p:txBody>
+      </p:sp>
+      <p:sp>
+        <p:nvSpPr>
+          <p:cNvPr id="4" name="Slide Number Placeholder 3"/>
+          <p:cNvSpPr>
+            <a:spLocks noGrp="1"/>
+          </p:cNvSpPr>
+          <p:nvPr>
+            <p:ph type="sldNum" sz="quarter" idx="5"/>
+          </p:nvPr>
+        </p:nvSpPr>
+        <p:spPr/>
+      </p:sp>
+    </p:spTree>
+    <p:extLst>
+      <p:ext uri="{BB962C8B-B14F-4D97-AF65-F5344CB8AC3E}">
+        <p14:creationId xmlns:p14="http://schemas.microsoft.com/office/powerpoint/2010/main" val="2475671323"/>
+      </p:ext>
+    </p:extLst>
+  </p:cSld>
+  <p:clrMapOvr>
+    <a:masterClrMapping/>
+  </p:clrMapOvr>
+</p:notes>
+</file>
+
+<file path=ppt/notesSlides/notesSlide14.xml><?xml version="1.0" encoding="utf-8"?>
+<p:notes xmlns:a="http://schemas.openxmlformats.org/drawingml/2006/main" xmlns:r="http://schemas.openxmlformats.org/officeDocument/2006/relationships" xmlns:p="http://schemas.openxmlformats.org/presentationml/2006/main">
+  <p:cSld>
+    <p:spTree>
+      <p:nvGrpSpPr>
+        <p:cNvPr id="1" name=""/>
+        <p:cNvGrpSpPr/>
+        <p:nvPr/>
+      </p:nvGrpSpPr>
+      <p:grpSpPr>
+        <a:xfrm>
+          <a:off x="0" y="0"/>
+          <a:ext cx="0" cy="0"/>
+          <a:chOff x="0" y="0"/>
+          <a:chExt cx="0" cy="0"/>
+        </a:xfrm>
+      </p:grpSpPr>
+      <p:sp>
+        <p:nvSpPr>
+          <p:cNvPr id="2" name="Slide Image Placeholder 1"/>
+          <p:cNvSpPr>
+            <a:spLocks noGrp="1" noRot="1" noChangeAspect="1"/>
+          </p:cNvSpPr>
+          <p:nvPr>
+            <p:ph type="sldImg" idx="2"/>
+          </p:nvPr>
+        </p:nvSpPr>
+        <p:spPr/>
+      </p:sp>
+      <p:sp>
+        <p:nvSpPr>
+          <p:cNvPr id="3" name="Notes Placeholder 2"/>
+          <p:cNvSpPr>
+            <a:spLocks noGrp="1"/>
+          </p:cNvSpPr>
+          <p:nvPr>
+            <p:ph type="body" sz="quarter" idx="3"/>
+          </p:nvPr>
+        </p:nvSpPr>
+        <p:spPr/>
+        <p:txBody>
+          <a:bodyPr/>
+          <a:lstStyle/>
+          <a:p>
+            <a:r>
+              <a:t>사람이 직접 정의한 14개 지표 말고, 이번에는 컴퓨터가 데이터를 보고 스스로 '가장 차이가 많이 나는 방향'을 찾아내는 방법(PCA, 주성분분석)으로도 같은 질문(TP와 FP 곡선이 다른가)을 확인했습니다. 128개 구간짜리 곡선을 5개의 숫자(주성분 1~5)로 압축했는데, 이 5개만으로도 원래 곡선 정보의 대부분(원곡선 기준 96.8%, 체형보정 곡선 기준 94.7%)을 담고 있습니다.</a:t>
+            </a:r>
+          </a:p>
+          <a:p>
+            <a:endParaRPr/>
+          </a:p>
+          <a:p>
+            <a:r>
+              <a:t>결과: 강남은 이번에도 15번의 검정(주성분 5개 x 3가지 방법) 전부 믿을 만한 차이가 없었습니다. 신촌은 원표본과 매칭 방법에서는 역시 차이가 없었지만, '체형 영향을 미리 뺀' 방법에서만 주성분 1번 하나가 아슬아슬하게 기준을 넘었습니다(q=0.045, 기준 0.05보다 살짝 낮음). 다만 이 차이의 크기 자체는 작고(효과크기 작음), 신촌 표본이 커서(TP 131명, FP 398명) 작은 차이도 통계적으로 잡힌 것으로 보입니다. 즉 강남은 어떤 방법으로 봐도 깨끗하게 차이가 없고, 신촌은 아주 미세하고 일관되지 않은 흔적만 남아있는 정도입니다.</a:t>
+            </a:r>
+          </a:p>
+        </p:txBody>
+      </p:sp>
+      <p:sp>
+        <p:nvSpPr>
+          <p:cNvPr id="4" name="Slide Number Placeholder 3"/>
+          <p:cNvSpPr>
+            <a:spLocks noGrp="1"/>
+          </p:cNvSpPr>
+          <p:nvPr>
+            <p:ph type="sldNum" sz="quarter" idx="5"/>
+          </p:nvPr>
+        </p:nvSpPr>
+        <p:spPr/>
+      </p:sp>
+    </p:spTree>
+    <p:extLst>
+      <p:ext uri="{BB962C8B-B14F-4D97-AF65-F5344CB8AC3E}">
+        <p14:creationId xmlns:p14="http://schemas.microsoft.com/office/powerpoint/2010/main" val="3020728336"/>
+      </p:ext>
+    </p:extLst>
+  </p:cSld>
+  <p:clrMapOvr>
+    <a:masterClrMapping/>
+  </p:clrMapOvr>
+</p:notes>
+</file>
+
+<file path=ppt/notesSlides/notesSlide15.xml><?xml version="1.0" encoding="utf-8"?>
+<p:notes xmlns:a="http://schemas.openxmlformats.org/drawingml/2006/main" xmlns:r="http://schemas.openxmlformats.org/officeDocument/2006/relationships" xmlns:p="http://schemas.openxmlformats.org/presentationml/2006/main">
+  <p:cSld>
+    <p:spTree>
+      <p:nvGrpSpPr>
+        <p:cNvPr id="1" name=""/>
+        <p:cNvGrpSpPr/>
+        <p:nvPr/>
+      </p:nvGrpSpPr>
+      <p:grpSpPr>
+        <a:xfrm>
+          <a:off x="0" y="0"/>
+          <a:ext cx="0" cy="0"/>
+          <a:chOff x="0" y="0"/>
+          <a:chExt cx="0" cy="0"/>
+        </a:xfrm>
+      </p:grpSpPr>
+      <p:sp>
+        <p:nvSpPr>
+          <p:cNvPr id="2" name="Slide Image Placeholder 1"/>
+          <p:cNvSpPr>
+            <a:spLocks noGrp="1" noRot="1" noChangeAspect="1"/>
+          </p:cNvSpPr>
+          <p:nvPr>
+            <p:ph type="sldImg" idx="2"/>
+          </p:nvPr>
+        </p:nvSpPr>
+        <p:spPr/>
+      </p:sp>
+      <p:sp>
+        <p:nvSpPr>
+          <p:cNvPr id="3" name="Notes Placeholder 2"/>
+          <p:cNvSpPr>
+            <a:spLocks noGrp="1"/>
+          </p:cNvSpPr>
+          <p:nvPr>
+            <p:ph type="body" sz="quarter" idx="3"/>
+          </p:nvPr>
+        </p:nvSpPr>
+        <p:spPr/>
+        <p:txBody>
+          <a:bodyPr/>
+          <a:lstStyle/>
+          <a:p>
+            <a:r>
+              <a:t>강남의 주성분별 p-value 그림입니다. 5개 주성분 x 3가지 방법 모두에서 믿을 만한 차이가 없었습니다.</a:t>
+            </a:r>
+          </a:p>
+        </p:txBody>
+      </p:sp>
+      <p:sp>
+        <p:nvSpPr>
+          <p:cNvPr id="4" name="Slide Number Placeholder 3"/>
+          <p:cNvSpPr>
+            <a:spLocks noGrp="1"/>
+          </p:cNvSpPr>
+          <p:nvPr>
+            <p:ph type="sldNum" sz="quarter" idx="5"/>
+          </p:nvPr>
+        </p:nvSpPr>
+        <p:spPr/>
+      </p:sp>
+    </p:spTree>
+    <p:extLst>
+      <p:ext uri="{BB962C8B-B14F-4D97-AF65-F5344CB8AC3E}">
+        <p14:creationId xmlns:p14="http://schemas.microsoft.com/office/powerpoint/2010/main" val="3056053792"/>
+      </p:ext>
+    </p:extLst>
+  </p:cSld>
+  <p:clrMapOvr>
+    <a:masterClrMapping/>
+  </p:clrMapOvr>
+</p:notes>
+</file>
+
+<file path=ppt/notesSlides/notesSlide16.xml><?xml version="1.0" encoding="utf-8"?>
+<p:notes xmlns:a="http://schemas.openxmlformats.org/drawingml/2006/main" xmlns:r="http://schemas.openxmlformats.org/officeDocument/2006/relationships" xmlns:p="http://schemas.openxmlformats.org/presentationml/2006/main">
+  <p:cSld>
+    <p:spTree>
+      <p:nvGrpSpPr>
+        <p:cNvPr id="1" name=""/>
+        <p:cNvGrpSpPr/>
+        <p:nvPr/>
+      </p:nvGrpSpPr>
+      <p:grpSpPr>
+        <a:xfrm>
+          <a:off x="0" y="0"/>
+          <a:ext cx="0" cy="0"/>
+          <a:chOff x="0" y="0"/>
+          <a:chExt cx="0" cy="0"/>
+        </a:xfrm>
+      </p:grpSpPr>
+      <p:sp>
+        <p:nvSpPr>
+          <p:cNvPr id="2" name="Slide Image Placeholder 1"/>
+          <p:cNvSpPr>
+            <a:spLocks noGrp="1" noRot="1" noChangeAspect="1"/>
+          </p:cNvSpPr>
+          <p:nvPr>
+            <p:ph type="sldImg" idx="2"/>
+          </p:nvPr>
+        </p:nvSpPr>
+        <p:spPr/>
+      </p:sp>
+      <p:sp>
+        <p:nvSpPr>
+          <p:cNvPr id="3" name="Notes Placeholder 2"/>
+          <p:cNvSpPr>
+            <a:spLocks noGrp="1"/>
+          </p:cNvSpPr>
+          <p:nvPr>
+            <p:ph type="body" sz="quarter" idx="3"/>
+          </p:nvPr>
+        </p:nvSpPr>
+        <p:spPr/>
+        <p:txBody>
+          <a:bodyPr/>
+          <a:lstStyle/>
+          <a:p>
+            <a:r>
+              <a:t>신촌의 같은 그림입니다. 원표본과 매칭 방법에서는 주성분 1번이 점선(p=0.05)을 살짝 넘지만 보정 후에는 유의하지 않고, '체형 영향을 미리 뺀' 방법에서만 주성분 1번이 보정 후에도 살짝 유의합니다(그림에서 'q&lt;0.05' 표시가 붙은 유일한 막대).</a:t>
+            </a:r>
+          </a:p>
+        </p:txBody>
+      </p:sp>
+      <p:sp>
+        <p:nvSpPr>
+          <p:cNvPr id="4" name="Slide Number Placeholder 3"/>
+          <p:cNvSpPr>
+            <a:spLocks noGrp="1"/>
+          </p:cNvSpPr>
+          <p:nvPr>
+            <p:ph type="sldNum" sz="quarter" idx="5"/>
+          </p:nvPr>
+        </p:nvSpPr>
+        <p:spPr/>
+      </p:sp>
+    </p:spTree>
+    <p:extLst>
+      <p:ext uri="{BB962C8B-B14F-4D97-AF65-F5344CB8AC3E}">
+        <p14:creationId xmlns:p14="http://schemas.microsoft.com/office/powerpoint/2010/main" val="866072478"/>
+      </p:ext>
+    </p:extLst>
+  </p:cSld>
+  <p:clrMapOvr>
+    <a:masterClrMapping/>
+  </p:clrMapOvr>
+</p:notes>
+</file>
+
+<file path=ppt/notesSlides/notesSlide17.xml><?xml version="1.0" encoding="utf-8"?>
+<p:notes xmlns:a="http://schemas.openxmlformats.org/drawingml/2006/main" xmlns:r="http://schemas.openxmlformats.org/officeDocument/2006/relationships" xmlns:p="http://schemas.openxmlformats.org/presentationml/2006/main">
+  <p:cSld>
+    <p:spTree>
+      <p:nvGrpSpPr>
+        <p:cNvPr id="1" name=""/>
+        <p:cNvGrpSpPr/>
+        <p:nvPr/>
+      </p:nvGrpSpPr>
+      <p:grpSpPr>
+        <a:xfrm>
+          <a:off x="0" y="0"/>
+          <a:ext cx="0" cy="0"/>
+          <a:chOff x="0" y="0"/>
+          <a:chExt cx="0" cy="0"/>
+        </a:xfrm>
+      </p:grpSpPr>
+      <p:sp>
+        <p:nvSpPr>
+          <p:cNvPr id="2" name="Slide Image Placeholder 1"/>
+          <p:cNvSpPr>
+            <a:spLocks noGrp="1" noRot="1" noChangeAspect="1"/>
+          </p:cNvSpPr>
+          <p:nvPr>
+            <p:ph type="sldImg" idx="2"/>
+          </p:nvPr>
+        </p:nvSpPr>
+        <p:spPr/>
+      </p:sp>
+      <p:sp>
+        <p:nvSpPr>
+          <p:cNvPr id="3" name="Notes Placeholder 2"/>
+          <p:cNvSpPr>
+            <a:spLocks noGrp="1"/>
+          </p:cNvSpPr>
+          <p:nvPr>
+            <p:ph type="body" sz="quarter" idx="3"/>
+          </p:nvPr>
+        </p:nvSpPr>
+        <p:spPr/>
+        <p:txBody>
+          <a:bodyPr/>
+          <a:lstStyle/>
+          <a:p>
+            <a:r>
+              <a:t>이 슬라이드는 AEC 정보를 딥러닝(CNN)에 넣어 만든 Stage-2 모델의 실제 성능을 보여줍니다. 비교 대상(대조군)은 AEC 없이 그냥 기준선만 재조정한 경우(threshold-shift only)입니다 -- AEC가 정말 도움이 되는지, 아니면 기준선만 바꿔도 비슷한 효과가 나는지 확인하기 위해서입니다.</a:t>
+            </a:r>
+          </a:p>
+          <a:p>
+            <a:endParaRPr/>
+          </a:p>
+          <a:p>
+            <a:r>
+              <a:t>Net NRI(순재분류개선지수)는 기존보다 올바르게 재분류된 사람 수 - 잘못 재분류된 사람 수로, 클수록 좋습니다. spec p-value는 Specificity(특이도) 개선이 우연이 아닌지 검정한 값(전부 매우 작아 확실히 유의). n_deesc는 Positive(위험군)에서 Negative(정상군)로 재분류된(de-escalate, 불필요한 정밀검사를 피한) 사람 수입니다.</a:t>
+            </a:r>
+          </a:p>
+          <a:p>
+            <a:endParaRPr/>
+          </a:p>
+          <a:p>
+            <a:r>
+              <a:t>자체 학습 결과(위 표): 신촌에서는 AEC-CNN(+86명 개선)이 기준선 조정만 한 경우(+63명)보다 확실히 낫지만, 강남에서는 오히려 기준선 조정(+77명)이 AEC-CNN(+70명)보다 낫습니다 -- 코호트마다 결과가 반대로 나옵니다. 두 코호트 모두 전체 모델 구별력(AUC)은 Stage-1보다 유의하게 좋아지지 않았습니다(오히려 아주 조금 떨어졌지만 통계적으로는 차이 없음, DeLong 검정).</a:t>
+            </a:r>
+          </a:p>
+          <a:p>
+            <a:endParaRPr/>
+          </a:p>
+          <a:p>
+            <a:r>
+              <a:t>다른 병원에 그대로 적용한 결과(아래 표, external transfer): 신촌에서 학습해 강남에 적용하면 개선 폭(+95명)은 가장 크지만, Sensitivity(민감도, 위험군을 잡아내는 능력)가 너무 떨어져서 '기존보다 나쁘지 않다'는 안전성 검정(NI test)을 통과하지 못했습니다(FAIL) -- 숫자만 보면 좋아 보이지만 실제로는 위험한 결과입니다. AUC도 유의하게 떨어졌습니다(p=0.010). 반대로 강남에서 학습해 신촌에 적용한 경우는 안전성 검정을 통과했습니다(PASS).</a:t>
+            </a:r>
+          </a:p>
+          <a:p>
+            <a:endParaRPr/>
+          </a:p>
+          <a:p>
+            <a:r>
+              <a:t>강남 데이터에서 AEC-CNN 자체의 구별력(자체 검증 AUC)이 0.52로 거의 '동전 던지기' 수준이었는데, 이는 슬라이드7에서 봤던 '강남은 원곡선 자체에서 TP-FP 차이가 유의하지 않았다(p=0.227)'는 결과와 일치합니다 -- 애초에 강남 AEC 곡선에는 구별할 신호 자체가 거의 없었다는 뜻입니다.</a:t>
             </a:r>
           </a:p>
         </p:txBody>
@@ -2978,243 +4616,24 @@
           <a:lstStyle/>
           <a:p>
             <a:r>
-              <a:rPr dirty="0"/>
-              <a:t>Low-</a:t>
-            </a:r>
-            <a:r>
-              <a:rPr dirty="0" err="1"/>
-              <a:t>SMI는</a:t>
-            </a:r>
-            <a:r>
-              <a:rPr dirty="0"/>
-              <a:t> </a:t>
-            </a:r>
-            <a:r>
-              <a:rPr dirty="0" err="1"/>
-              <a:t>노쇠·수술</a:t>
-            </a:r>
-            <a:r>
-              <a:rPr dirty="0"/>
-              <a:t> 후 </a:t>
-            </a:r>
-            <a:r>
-              <a:rPr dirty="0" err="1"/>
-              <a:t>합병증·사망률과</a:t>
-            </a:r>
-            <a:r>
-              <a:rPr dirty="0"/>
-              <a:t> </a:t>
-            </a:r>
-            <a:r>
-              <a:rPr dirty="0" err="1"/>
-              <a:t>연관</a:t>
-            </a:r>
-            <a:r>
-              <a:rPr dirty="0"/>
-              <a:t>(Prado 2008; Martin 2013). Stage-1 LR(</a:t>
-            </a:r>
-            <a:r>
-              <a:rPr dirty="0" err="1"/>
-              <a:t>성별·나이·키·체중</a:t>
-            </a:r>
-            <a:r>
-              <a:rPr dirty="0"/>
-              <a:t>) AUC internal 0.828 / external 0.835 -- Hosmer-Lemeshow </a:t>
-            </a:r>
-            <a:r>
-              <a:rPr dirty="0" err="1"/>
-              <a:t>기준</a:t>
-            </a:r>
-            <a:r>
-              <a:rPr dirty="0"/>
-              <a:t> acceptable(0.7-0.8)~excellent(0.8-0.9) </a:t>
-            </a:r>
-            <a:r>
-              <a:rPr dirty="0" err="1"/>
-              <a:t>경계</a:t>
-            </a:r>
-            <a:r>
-              <a:rPr dirty="0"/>
-              <a:t>.</a:t>
-            </a:r>
-          </a:p>
-          <a:p>
-            <a:endParaRPr dirty="0"/>
-          </a:p>
-          <a:p>
-            <a:r>
-              <a:rPr dirty="0"/>
-              <a:t>왜 Sens 90%인가:</a:t>
-            </a:r>
-          </a:p>
-          <a:p>
-            <a:r>
-              <a:rPr dirty="0"/>
-              <a:t>- 100% </a:t>
-            </a:r>
-            <a:r>
-              <a:rPr dirty="0" err="1"/>
-              <a:t>cutoff는</a:t>
-            </a:r>
-            <a:r>
-              <a:rPr dirty="0"/>
-              <a:t> </a:t>
-            </a:r>
-            <a:r>
-              <a:rPr dirty="0" err="1"/>
-              <a:t>양성</a:t>
-            </a:r>
-            <a:r>
-              <a:rPr dirty="0"/>
-              <a:t> n=129 order </a:t>
-            </a:r>
-            <a:r>
-              <a:rPr dirty="0" err="1"/>
-              <a:t>statistic이라</a:t>
-            </a:r>
-            <a:r>
-              <a:rPr dirty="0"/>
-              <a:t> </a:t>
-            </a:r>
-            <a:r>
-              <a:rPr dirty="0" err="1"/>
-              <a:t>분산</a:t>
-            </a:r>
-            <a:r>
-              <a:rPr dirty="0"/>
-              <a:t> </a:t>
-            </a:r>
-            <a:r>
-              <a:rPr dirty="0" err="1"/>
-              <a:t>추정</a:t>
-            </a:r>
-            <a:r>
-              <a:rPr dirty="0"/>
-              <a:t> </a:t>
-            </a:r>
-            <a:r>
-              <a:rPr dirty="0" err="1"/>
-              <a:t>불가</a:t>
-            </a:r>
-            <a:endParaRPr dirty="0"/>
-          </a:p>
-          <a:p>
-            <a:r>
-              <a:rPr dirty="0"/>
-              <a:t>- Sens 90→95%p </a:t>
-            </a:r>
-            <a:r>
-              <a:rPr dirty="0" err="1"/>
-              <a:t>구간</a:t>
-            </a:r>
-            <a:r>
-              <a:rPr dirty="0"/>
-              <a:t> </a:t>
-            </a:r>
-            <a:r>
-              <a:rPr dirty="0" err="1"/>
-              <a:t>Sp</a:t>
-            </a:r>
-            <a:r>
-              <a:rPr dirty="0"/>
-              <a:t> </a:t>
-            </a:r>
-            <a:r>
-              <a:rPr dirty="0" err="1"/>
-              <a:t>손실</a:t>
-            </a:r>
-            <a:r>
-              <a:rPr dirty="0"/>
-              <a:t> </a:t>
-            </a:r>
-            <a:r>
-              <a:rPr dirty="0" err="1"/>
-              <a:t>기울기가</a:t>
-            </a:r>
-            <a:r>
-              <a:rPr dirty="0"/>
-              <a:t> 85→90%p </a:t>
-            </a:r>
-            <a:r>
-              <a:rPr dirty="0" err="1"/>
-              <a:t>대비</a:t>
-            </a:r>
-            <a:r>
-              <a:rPr dirty="0"/>
-              <a:t> internal 1.17배/external 1.66배로 </a:t>
-            </a:r>
-            <a:r>
-              <a:rPr dirty="0" err="1"/>
-              <a:t>급증</a:t>
-            </a:r>
-            <a:endParaRPr dirty="0"/>
-          </a:p>
-          <a:p>
-            <a:r>
-              <a:rPr dirty="0"/>
-              <a:t>- FN(</a:t>
-            </a:r>
-            <a:r>
-              <a:rPr dirty="0" err="1"/>
-              <a:t>누락</a:t>
-            </a:r>
-            <a:r>
-              <a:rPr dirty="0"/>
-              <a:t>) </a:t>
-            </a:r>
-            <a:r>
-              <a:rPr dirty="0" err="1"/>
-              <a:t>비용이</a:t>
-            </a:r>
-            <a:r>
-              <a:rPr dirty="0"/>
-              <a:t> FP보다 </a:t>
-            </a:r>
-            <a:r>
-              <a:rPr dirty="0" err="1"/>
-              <a:t>크다고</a:t>
-            </a:r>
-            <a:r>
-              <a:rPr dirty="0"/>
-              <a:t> </a:t>
-            </a:r>
-            <a:r>
-              <a:rPr dirty="0" err="1"/>
-              <a:t>가정</a:t>
-            </a:r>
-            <a:r>
-              <a:rPr dirty="0"/>
-              <a:t> → </a:t>
-            </a:r>
-            <a:r>
-              <a:rPr dirty="0" err="1"/>
-              <a:t>한계비용</a:t>
-            </a:r>
-            <a:r>
-              <a:rPr dirty="0"/>
-              <a:t> </a:t>
-            </a:r>
-            <a:r>
-              <a:rPr dirty="0" err="1"/>
-              <a:t>급증</a:t>
-            </a:r>
-            <a:r>
-              <a:rPr dirty="0"/>
-              <a:t> </a:t>
-            </a:r>
-            <a:r>
-              <a:rPr dirty="0" err="1"/>
-              <a:t>직전인</a:t>
-            </a:r>
-            <a:r>
-              <a:rPr dirty="0"/>
-              <a:t> 90%p까지 </a:t>
-            </a:r>
-            <a:r>
-              <a:rPr dirty="0" err="1"/>
-              <a:t>확보</a:t>
-            </a:r>
-            <a:endParaRPr dirty="0"/>
+              <a:t>이 슬라이드는 1단계(Stage-1) 모델을 소개합니다. 저근감소증(low-SMI, 근육량이 적은 상태)은 나이가 들수록 낙상·수술 후 합병증·사망 위험을 높이는 것으로 알려져 있습니다(Prado 2008, Martin 2013). CT를 찍지 않고도 병원에 이미 있는 간단한 정보 4가지(성별/나이/키/체중)만으로 저근감소증일 확률을 예측하는 간단한 통계 모델(로지스틱 회귀)을 만들었습니다.</a:t>
+            </a:r>
+          </a:p>
+          <a:p>
+            <a:endParaRPr/>
+          </a:p>
+          <a:p>
+            <a:r>
+              <a:t>이 모델이 환자를 얼마나 잘 구별하는지 나타내는 점수(AUC -- 0.5면 동전 던지기 수준, 1.0이면 완벽 구별)가 내부 병원 데이터에서 0.828, 외부(신촌) 병원 데이터에서 0.835로 나왔습니다. 둘 다 '꽤 쓸만한 수준(0.8 이상)'이고, 모델이 실제 데이터에 잘 들어맞는지 보는 별도 검정(Hosmer-Lemeshow)도 양호~우수 경계로 통과했습니다.</a:t>
+            </a:r>
+          </a:p>
+          <a:p>
+            <a:endParaRPr/>
+          </a:p>
+          <a:p>
+            <a:r>
+              <a:t>이 모델을 쓰려면 몇 점 이상을 Positive(위험군)로 볼지 기준선(cutoff)을 정해야 합니다. 저희는 Sensitivity(민감도, 실제 위험군 환자 중 모델이 Positive로 잡아내는 비율) 90%를 기준으로 골랐습니다. Sensitivity 100%는 표본이 너무 작아 통계적으로 믿을 수 없고, Sensitivity를 90%에서 95%로 더 올리면 반대로 Specificity(특이도, 실제 정상인 사람을 Negative로 잘 구별하는 비율)가 급격히 나빠지기 시작하는 지점이라 90%에서 멈췄습니다. FN(놓친 위험군 환자)의 비용이 FP(잘못 Positive로 분류된 정상인)보다 크다고 가정했습니다.</a:t>
+            </a:r>
           </a:p>
         </p:txBody>
       </p:sp>
@@ -3311,81 +4730,470 @@
           <a:bodyPr/>
           <a:lstStyle/>
           <a:p>
-            <a:pPr>
-              <a:lnSpc>
-                <a:spcPct val="150000"/>
-              </a:lnSpc>
-            </a:pPr>
-            <a:r>
-              <a:rPr lang="en-US" altLang="ko-KR" sz="1200" dirty="0"/>
-              <a:t>FN 1</a:t>
-            </a:r>
-            <a:r>
-              <a:rPr lang="ko-KR" altLang="en-US" sz="1200" dirty="0"/>
-              <a:t>명당 드는 </a:t>
-            </a:r>
-            <a:r>
-              <a:rPr lang="en-US" altLang="ko-KR" sz="1200" dirty="0"/>
-              <a:t>FP </a:t>
-            </a:r>
-            <a:r>
-              <a:rPr lang="ko-KR" altLang="en-US" sz="1200" dirty="0"/>
-              <a:t>비용은 </a:t>
-            </a:r>
-            <a:r>
-              <a:rPr lang="en-US" altLang="ko-KR" sz="1200" dirty="0"/>
-              <a:t>85→90%p </a:t>
-            </a:r>
-            <a:r>
-              <a:rPr lang="ko-KR" altLang="en-US" sz="1200" dirty="0"/>
-              <a:t>구간보다 </a:t>
-            </a:r>
-            <a:r>
-              <a:rPr lang="en-US" altLang="ko-KR" sz="1200" dirty="0"/>
-              <a:t>90→95%p </a:t>
-            </a:r>
-            <a:r>
-              <a:rPr lang="ko-KR" altLang="en-US" sz="1200" dirty="0"/>
-              <a:t>구간에서 </a:t>
-            </a:r>
-            <a:r>
-              <a:rPr lang="en-US" altLang="ko-KR" sz="1200" dirty="0"/>
-              <a:t>1.6~3</a:t>
-            </a:r>
-            <a:r>
-              <a:rPr lang="ko-KR" altLang="en-US" sz="1200" dirty="0"/>
-              <a:t>배 증가</a:t>
-            </a:r>
-          </a:p>
-          <a:p>
-            <a:pPr>
-              <a:lnSpc>
-                <a:spcPct val="150000"/>
-              </a:lnSpc>
-            </a:pPr>
-            <a:r>
-              <a:rPr lang="ko-KR" altLang="en-US" sz="1200" b="1" dirty="0"/>
-              <a:t>→ </a:t>
-            </a:r>
-            <a:r>
-              <a:rPr lang="en-US" altLang="ko-KR" sz="1200" b="1" dirty="0" err="1"/>
-              <a:t>Sp</a:t>
-            </a:r>
-            <a:r>
-              <a:rPr lang="ko-KR" altLang="en-US" sz="1200" b="1" dirty="0"/>
-              <a:t> 손실이 급격히 커지기 직전인 </a:t>
-            </a:r>
-            <a:r>
-              <a:rPr lang="en-US" altLang="ko-KR" sz="1200" b="1" dirty="0"/>
-              <a:t>90%p</a:t>
-            </a:r>
-            <a:r>
-              <a:rPr lang="ko-KR" altLang="en-US" sz="1200" b="1" dirty="0"/>
-              <a:t>가 비용 대비 효율적인 </a:t>
-            </a:r>
-            <a:r>
-              <a:rPr lang="en-US" altLang="ko-KR" sz="1200" b="1" dirty="0"/>
-              <a:t>cutoff</a:t>
+            <a:r>
+              <a:rPr dirty="0"/>
+              <a:t>이 </a:t>
+            </a:r>
+            <a:r>
+              <a:rPr dirty="0" err="1"/>
+              <a:t>표는</a:t>
+            </a:r>
+            <a:r>
+              <a:rPr dirty="0"/>
+              <a:t> </a:t>
+            </a:r>
+            <a:r>
+              <a:rPr dirty="0" err="1"/>
+              <a:t>기준선</a:t>
+            </a:r>
+            <a:r>
+              <a:rPr dirty="0"/>
+              <a:t>(cutoff)을 85%→90%→95%로 </a:t>
+            </a:r>
+            <a:r>
+              <a:rPr dirty="0" err="1"/>
+              <a:t>올릴</a:t>
+            </a:r>
+            <a:r>
+              <a:rPr dirty="0"/>
+              <a:t> 때 </a:t>
+            </a:r>
+            <a:r>
+              <a:rPr dirty="0" err="1"/>
+              <a:t>무엇을</a:t>
+            </a:r>
+            <a:r>
+              <a:rPr dirty="0"/>
+              <a:t> </a:t>
+            </a:r>
+            <a:r>
+              <a:rPr dirty="0" err="1"/>
+              <a:t>얻고</a:t>
+            </a:r>
+            <a:r>
+              <a:rPr dirty="0"/>
+              <a:t> </a:t>
+            </a:r>
+            <a:r>
+              <a:rPr dirty="0" err="1"/>
+              <a:t>무엇을</a:t>
+            </a:r>
+            <a:r>
+              <a:rPr dirty="0"/>
+              <a:t> </a:t>
+            </a:r>
+            <a:r>
+              <a:rPr dirty="0" err="1"/>
+              <a:t>잃는지</a:t>
+            </a:r>
+            <a:r>
+              <a:rPr dirty="0"/>
+              <a:t> </a:t>
+            </a:r>
+            <a:r>
+              <a:rPr dirty="0" err="1"/>
+              <a:t>보여줍니다</a:t>
+            </a:r>
+            <a:r>
+              <a:rPr dirty="0"/>
+              <a:t>. </a:t>
+            </a:r>
+            <a:r>
+              <a:rPr dirty="0" err="1"/>
+              <a:t>기준선을</a:t>
+            </a:r>
+            <a:r>
+              <a:rPr dirty="0"/>
+              <a:t> </a:t>
+            </a:r>
+            <a:r>
+              <a:rPr dirty="0" err="1"/>
+              <a:t>높일수록</a:t>
+            </a:r>
+            <a:r>
+              <a:rPr dirty="0"/>
+              <a:t> '</a:t>
+            </a:r>
+            <a:r>
+              <a:rPr dirty="0" err="1"/>
+              <a:t>놓치는</a:t>
+            </a:r>
+            <a:r>
+              <a:rPr dirty="0"/>
+              <a:t> </a:t>
+            </a:r>
+            <a:r>
+              <a:rPr dirty="0" err="1"/>
+              <a:t>위험군</a:t>
+            </a:r>
+            <a:r>
+              <a:rPr dirty="0"/>
+              <a:t> </a:t>
+            </a:r>
+            <a:r>
+              <a:rPr dirty="0" err="1"/>
+              <a:t>환자</a:t>
+            </a:r>
+            <a:r>
+              <a:rPr dirty="0"/>
+              <a:t>(FN)'는 </a:t>
+            </a:r>
+            <a:r>
+              <a:rPr dirty="0" err="1"/>
+              <a:t>줄어들지만</a:t>
+            </a:r>
+            <a:r>
+              <a:rPr dirty="0"/>
+              <a:t>, 그 </a:t>
+            </a:r>
+            <a:r>
+              <a:rPr dirty="0" err="1"/>
+              <a:t>대신</a:t>
+            </a:r>
+            <a:r>
+              <a:rPr dirty="0"/>
+              <a:t> '</a:t>
+            </a:r>
+            <a:r>
+              <a:rPr dirty="0" err="1"/>
+              <a:t>정상인데</a:t>
+            </a:r>
+            <a:r>
+              <a:rPr dirty="0"/>
+              <a:t> </a:t>
+            </a:r>
+            <a:r>
+              <a:rPr dirty="0" err="1"/>
+              <a:t>위험군으로</a:t>
+            </a:r>
+            <a:r>
+              <a:rPr dirty="0"/>
+              <a:t> </a:t>
+            </a:r>
+            <a:r>
+              <a:rPr dirty="0" err="1"/>
+              <a:t>잘못</a:t>
+            </a:r>
+            <a:r>
+              <a:rPr dirty="0"/>
+              <a:t> </a:t>
+            </a:r>
+            <a:r>
+              <a:rPr dirty="0" err="1"/>
+              <a:t>분류되는</a:t>
+            </a:r>
+            <a:r>
+              <a:rPr dirty="0"/>
+              <a:t> </a:t>
+            </a:r>
+            <a:r>
+              <a:rPr dirty="0" err="1"/>
+              <a:t>사람</a:t>
+            </a:r>
+            <a:r>
+              <a:rPr dirty="0"/>
+              <a:t>(FP)'이 </a:t>
+            </a:r>
+            <a:r>
+              <a:rPr dirty="0" err="1"/>
+              <a:t>훨씬</a:t>
+            </a:r>
+            <a:r>
+              <a:rPr dirty="0"/>
+              <a:t> </a:t>
+            </a:r>
+            <a:r>
+              <a:rPr dirty="0" err="1"/>
+              <a:t>많이</a:t>
+            </a:r>
+            <a:r>
+              <a:rPr dirty="0"/>
+              <a:t> </a:t>
+            </a:r>
+            <a:r>
+              <a:rPr dirty="0" err="1"/>
+              <a:t>늘어납니다</a:t>
+            </a:r>
+            <a:r>
+              <a:rPr dirty="0"/>
+              <a:t>.</a:t>
+            </a:r>
+          </a:p>
+          <a:p>
+            <a:endParaRPr dirty="0"/>
+          </a:p>
+          <a:p>
+            <a:r>
+              <a:rPr dirty="0" err="1"/>
+              <a:t>예를</a:t>
+            </a:r>
+            <a:r>
+              <a:rPr dirty="0"/>
+              <a:t> </a:t>
+            </a:r>
+            <a:r>
+              <a:rPr dirty="0" err="1"/>
+              <a:t>들어</a:t>
+            </a:r>
+            <a:r>
+              <a:rPr dirty="0"/>
+              <a:t> </a:t>
+            </a:r>
+            <a:r>
+              <a:rPr dirty="0" err="1"/>
+              <a:t>내부</a:t>
+            </a:r>
+            <a:r>
+              <a:rPr dirty="0"/>
+              <a:t> </a:t>
+            </a:r>
+            <a:r>
+              <a:rPr dirty="0" err="1"/>
+              <a:t>데이터에서</a:t>
+            </a:r>
+            <a:r>
+              <a:rPr dirty="0"/>
+              <a:t> 85%→90%로 </a:t>
+            </a:r>
+            <a:r>
+              <a:rPr dirty="0" err="1"/>
+              <a:t>올리면</a:t>
+            </a:r>
+            <a:r>
+              <a:rPr dirty="0"/>
+              <a:t> </a:t>
+            </a:r>
+            <a:r>
+              <a:rPr dirty="0" err="1"/>
+              <a:t>놓치는</a:t>
+            </a:r>
+            <a:r>
+              <a:rPr dirty="0"/>
+              <a:t> </a:t>
+            </a:r>
+            <a:r>
+              <a:rPr dirty="0" err="1"/>
+              <a:t>환자는</a:t>
+            </a:r>
+            <a:r>
+              <a:rPr dirty="0"/>
+              <a:t> 7명 </a:t>
+            </a:r>
+            <a:r>
+              <a:rPr dirty="0" err="1"/>
+              <a:t>줄지만</a:t>
+            </a:r>
+            <a:r>
+              <a:rPr dirty="0"/>
+              <a:t> </a:t>
+            </a:r>
+            <a:r>
+              <a:rPr dirty="0" err="1"/>
+              <a:t>잘못</a:t>
+            </a:r>
+            <a:r>
+              <a:rPr dirty="0"/>
+              <a:t> </a:t>
+            </a:r>
+            <a:r>
+              <a:rPr dirty="0" err="1"/>
+              <a:t>분류되는</a:t>
+            </a:r>
+            <a:r>
+              <a:rPr dirty="0"/>
+              <a:t> </a:t>
+            </a:r>
+            <a:r>
+              <a:rPr dirty="0" err="1"/>
+              <a:t>사람은</a:t>
+            </a:r>
+            <a:r>
+              <a:rPr dirty="0"/>
+              <a:t> 97명 </a:t>
+            </a:r>
+            <a:r>
+              <a:rPr dirty="0" err="1"/>
+              <a:t>늘어나서</a:t>
+            </a:r>
+            <a:r>
+              <a:rPr dirty="0"/>
+              <a:t>, </a:t>
+            </a:r>
+            <a:r>
+              <a:rPr dirty="0" err="1"/>
+              <a:t>환자</a:t>
+            </a:r>
+            <a:r>
+              <a:rPr dirty="0"/>
+              <a:t> 1명을 덜 </a:t>
+            </a:r>
+            <a:r>
+              <a:rPr dirty="0" err="1"/>
+              <a:t>놓치려고</a:t>
+            </a:r>
+            <a:r>
+              <a:rPr dirty="0"/>
+              <a:t> 13.9명을 더 </a:t>
+            </a:r>
+            <a:r>
+              <a:rPr dirty="0" err="1"/>
+              <a:t>검사해야</a:t>
+            </a:r>
+            <a:r>
+              <a:rPr dirty="0"/>
+              <a:t> </a:t>
+            </a:r>
+            <a:r>
+              <a:rPr dirty="0" err="1"/>
+              <a:t>하는</a:t>
+            </a:r>
+            <a:r>
+              <a:rPr dirty="0"/>
+              <a:t> </a:t>
+            </a:r>
+            <a:r>
+              <a:rPr dirty="0" err="1"/>
+              <a:t>셈입니다</a:t>
+            </a:r>
+            <a:r>
+              <a:rPr dirty="0"/>
+              <a:t>. 90%→95%로 한 번 더 </a:t>
+            </a:r>
+            <a:r>
+              <a:rPr dirty="0" err="1"/>
+              <a:t>올리면</a:t>
+            </a:r>
+            <a:r>
+              <a:rPr dirty="0"/>
+              <a:t> 이 '</a:t>
+            </a:r>
+            <a:r>
+              <a:rPr dirty="0" err="1"/>
+              <a:t>대가'가</a:t>
+            </a:r>
+            <a:r>
+              <a:rPr dirty="0"/>
+              <a:t> 22.5명으로 더 </a:t>
+            </a:r>
+            <a:r>
+              <a:rPr dirty="0" err="1"/>
+              <a:t>커집니다</a:t>
+            </a:r>
+            <a:r>
+              <a:rPr dirty="0"/>
+              <a:t>. 즉 </a:t>
+            </a:r>
+            <a:r>
+              <a:rPr dirty="0" err="1"/>
+              <a:t>기준선을</a:t>
+            </a:r>
+            <a:r>
+              <a:rPr dirty="0"/>
+              <a:t> </a:t>
+            </a:r>
+            <a:r>
+              <a:rPr dirty="0" err="1"/>
+              <a:t>높일수록</a:t>
+            </a:r>
+            <a:r>
+              <a:rPr dirty="0"/>
+              <a:t> </a:t>
+            </a:r>
+            <a:r>
+              <a:rPr dirty="0" err="1"/>
+              <a:t>효율이</a:t>
+            </a:r>
+            <a:r>
+              <a:rPr dirty="0"/>
+              <a:t> </a:t>
+            </a:r>
+            <a:r>
+              <a:rPr dirty="0" err="1"/>
+              <a:t>나빠지는</a:t>
+            </a:r>
+            <a:r>
+              <a:rPr dirty="0"/>
+              <a:t> </a:t>
+            </a:r>
+            <a:r>
+              <a:rPr dirty="0" err="1"/>
+              <a:t>속도가</a:t>
+            </a:r>
+            <a:r>
+              <a:rPr dirty="0"/>
+              <a:t> 더 </a:t>
+            </a:r>
+            <a:r>
+              <a:rPr dirty="0" err="1"/>
+              <a:t>빨라집니다</a:t>
+            </a:r>
+            <a:r>
+              <a:rPr dirty="0"/>
+              <a:t>. </a:t>
+            </a:r>
+            <a:r>
+              <a:rPr dirty="0" err="1"/>
+              <a:t>그래서</a:t>
+            </a:r>
+            <a:r>
+              <a:rPr dirty="0"/>
+              <a:t> </a:t>
+            </a:r>
+            <a:r>
+              <a:rPr dirty="0" err="1"/>
+              <a:t>손해가</a:t>
+            </a:r>
+            <a:r>
+              <a:rPr dirty="0"/>
+              <a:t> </a:t>
+            </a:r>
+            <a:r>
+              <a:rPr dirty="0" err="1"/>
+              <a:t>급격히</a:t>
+            </a:r>
+            <a:r>
+              <a:rPr dirty="0"/>
+              <a:t> </a:t>
+            </a:r>
+            <a:r>
+              <a:rPr dirty="0" err="1"/>
+              <a:t>커지기</a:t>
+            </a:r>
+            <a:r>
+              <a:rPr dirty="0"/>
+              <a:t> </a:t>
+            </a:r>
+            <a:r>
+              <a:rPr dirty="0" err="1"/>
+              <a:t>직전인</a:t>
+            </a:r>
+            <a:r>
+              <a:rPr dirty="0"/>
+              <a:t> 90%에서 </a:t>
+            </a:r>
+            <a:r>
+              <a:rPr dirty="0" err="1"/>
+              <a:t>멈추는</a:t>
+            </a:r>
+            <a:r>
+              <a:rPr dirty="0"/>
+              <a:t> </a:t>
+            </a:r>
+            <a:r>
+              <a:rPr dirty="0" err="1"/>
+              <a:t>것이</a:t>
+            </a:r>
+            <a:r>
+              <a:rPr dirty="0"/>
+              <a:t> </a:t>
+            </a:r>
+            <a:r>
+              <a:rPr dirty="0" err="1"/>
+              <a:t>합리적입니다</a:t>
+            </a:r>
+            <a:r>
+              <a:rPr dirty="0"/>
+              <a:t>.</a:t>
             </a:r>
           </a:p>
         </p:txBody>
@@ -3484,176 +5292,368 @@
           <a:lstStyle/>
           <a:p>
             <a:r>
-              <a:rPr lang="en-US" altLang="ko-KR" dirty="0"/>
-              <a:t>S90 confusion matrix </a:t>
+              <a:rPr dirty="0"/>
+              <a:t>Sensitivity(</a:t>
+            </a:r>
+            <a:r>
+              <a:rPr dirty="0" err="1"/>
+              <a:t>민감도</a:t>
+            </a:r>
+            <a:r>
+              <a:rPr dirty="0"/>
+              <a:t>) 90% </a:t>
+            </a:r>
+            <a:r>
+              <a:rPr dirty="0" err="1"/>
+              <a:t>기준선으로</a:t>
+            </a:r>
+            <a:r>
+              <a:rPr dirty="0"/>
+              <a:t> </a:t>
+            </a:r>
+            <a:r>
+              <a:rPr dirty="0" err="1"/>
+              <a:t>환자를</a:t>
+            </a:r>
+            <a:r>
+              <a:rPr dirty="0"/>
+              <a:t> Positive(</a:t>
+            </a:r>
+            <a:r>
+              <a:rPr dirty="0" err="1"/>
+              <a:t>위험군</a:t>
+            </a:r>
+            <a:r>
+              <a:rPr dirty="0"/>
+              <a:t>)와 Negative(</a:t>
+            </a:r>
+            <a:r>
+              <a:rPr dirty="0" err="1"/>
+              <a:t>정상군</a:t>
+            </a:r>
+            <a:r>
+              <a:rPr dirty="0"/>
+              <a:t>)로 </a:t>
+            </a:r>
+            <a:r>
+              <a:rPr dirty="0" err="1"/>
+              <a:t>나눈</a:t>
+            </a:r>
+            <a:r>
+              <a:rPr dirty="0"/>
+              <a:t> </a:t>
+            </a:r>
+            <a:r>
+              <a:rPr dirty="0" err="1"/>
+              <a:t>결과표</a:t>
+            </a:r>
+            <a:r>
+              <a:rPr dirty="0"/>
+              <a:t>, confusion </a:t>
+            </a:r>
+            <a:r>
+              <a:rPr dirty="0" err="1"/>
+              <a:t>matrix입니다</a:t>
+            </a:r>
+            <a:r>
+              <a:rPr dirty="0"/>
+              <a:t>. </a:t>
             </a:r>
             <a:r>
               <a:rPr lang="ko-KR" altLang="en-US" dirty="0"/>
-              <a:t>확인 후 </a:t>
-            </a:r>
-            <a:r>
-              <a:rPr lang="en-US" altLang="ko-KR" dirty="0"/>
-              <a:t>Predicted Positive</a:t>
-            </a:r>
-            <a:r>
-              <a:rPr lang="ko-KR" altLang="en-US" dirty="0"/>
-              <a:t>만 </a:t>
-            </a:r>
-            <a:r>
-              <a:rPr lang="en-US" altLang="ko-KR" dirty="0"/>
-              <a:t>Stage-2</a:t>
-            </a:r>
-            <a:r>
-              <a:rPr lang="ko-KR" altLang="en-US" dirty="0"/>
-              <a:t>로 사용</a:t>
-            </a:r>
-            <a:r>
-              <a:rPr lang="en-US" altLang="ko-KR" dirty="0"/>
+              <a:t>이상태에서의 </a:t>
+            </a:r>
+            <a:r>
+              <a:rPr dirty="0" err="1"/>
+              <a:t>NPV가</a:t>
+            </a:r>
+            <a:r>
+              <a:rPr dirty="0"/>
+              <a:t> </a:t>
+            </a:r>
+            <a:r>
+              <a:rPr dirty="0" err="1"/>
+              <a:t>내부</a:t>
+            </a:r>
+            <a:r>
+              <a:rPr dirty="0"/>
+              <a:t> 97.7%, </a:t>
+            </a:r>
+            <a:r>
+              <a:rPr dirty="0" err="1"/>
+              <a:t>외부</a:t>
+            </a:r>
+            <a:r>
+              <a:rPr dirty="0"/>
+              <a:t> 97.5%로 </a:t>
+            </a:r>
+            <a:r>
+              <a:rPr dirty="0" err="1"/>
+              <a:t>이미</a:t>
+            </a:r>
+            <a:r>
+              <a:rPr dirty="0"/>
+              <a:t> </a:t>
+            </a:r>
+            <a:r>
+              <a:rPr dirty="0" err="1"/>
+              <a:t>충분히</a:t>
+            </a:r>
+            <a:r>
+              <a:rPr dirty="0"/>
+              <a:t> </a:t>
+            </a:r>
+            <a:r>
+              <a:rPr dirty="0" err="1"/>
+              <a:t>높아</a:t>
+            </a:r>
+            <a:r>
+              <a:rPr dirty="0"/>
+              <a:t> 이 </a:t>
+            </a:r>
+            <a:r>
+              <a:rPr dirty="0" err="1"/>
+              <a:t>그룹은</a:t>
+            </a:r>
+            <a:r>
+              <a:rPr dirty="0"/>
+              <a:t> 더 </a:t>
+            </a:r>
+            <a:r>
+              <a:rPr dirty="0" err="1"/>
+              <a:t>손댈</a:t>
+            </a:r>
+            <a:r>
+              <a:rPr dirty="0"/>
+              <a:t> </a:t>
+            </a:r>
+            <a:r>
+              <a:rPr dirty="0" err="1"/>
+              <a:t>필요가</a:t>
+            </a:r>
+            <a:r>
+              <a:rPr dirty="0"/>
+              <a:t> </a:t>
+            </a:r>
+            <a:r>
+              <a:rPr dirty="0" err="1"/>
+              <a:t>없습니다</a:t>
+            </a:r>
+            <a:r>
+              <a:rPr dirty="0"/>
               <a:t>.</a:t>
             </a:r>
-            <a:endParaRPr lang="ko-KR" altLang="en-US" dirty="0"/>
-          </a:p>
-          <a:p>
-            <a:endParaRPr lang="ko-KR" altLang="en-US" dirty="0"/>
-          </a:p>
-          <a:p>
-            <a:r>
-              <a:rPr lang="en-US" altLang="ko-KR" dirty="0" err="1"/>
-              <a:t>Neg:Pos</a:t>
-            </a:r>
-            <a:r>
-              <a:rPr lang="en-US" altLang="ko-KR" dirty="0"/>
-              <a:t>=961:129(internal)/785:141(external) </a:t>
-            </a:r>
-            <a:r>
-              <a:rPr lang="ko-KR" altLang="en-US" dirty="0"/>
-              <a:t>불균형 </a:t>
-            </a:r>
-            <a:r>
-              <a:rPr lang="en-US" altLang="ko-KR" dirty="0"/>
-              <a:t>+ Sens90 cutoff → </a:t>
-            </a:r>
-            <a:r>
-              <a:rPr lang="ko-KR" altLang="en-US" dirty="0"/>
-              <a:t>구조적으로 </a:t>
-            </a:r>
-            <a:r>
-              <a:rPr lang="en-US" altLang="ko-KR" dirty="0"/>
-              <a:t>FP≫FN(</a:t>
-            </a:r>
-            <a:r>
-              <a:rPr lang="ko-KR" altLang="en-US" dirty="0"/>
-              <a:t>설계상 예상된 결과</a:t>
-            </a:r>
-            <a:r>
-              <a:rPr lang="en-US" altLang="ko-KR" dirty="0"/>
-              <a:t>).</a:t>
-            </a:r>
-            <a:endParaRPr lang="ko-KR" altLang="en-US" dirty="0"/>
-          </a:p>
-          <a:p>
-            <a:endParaRPr lang="ko-KR" altLang="en-US" dirty="0"/>
-          </a:p>
-          <a:p>
-            <a:r>
-              <a:rPr lang="en-US" altLang="ko-KR" dirty="0"/>
-              <a:t>Predicted Negative</a:t>
-            </a:r>
-            <a:r>
-              <a:rPr lang="ko-KR" altLang="en-US" dirty="0"/>
-              <a:t>는 </a:t>
-            </a:r>
-            <a:r>
-              <a:rPr lang="en-US" altLang="ko-KR" dirty="0"/>
-              <a:t>NPV 97.7%/97.5%</a:t>
-            </a:r>
-            <a:r>
-              <a:rPr lang="ko-KR" altLang="en-US" dirty="0"/>
-              <a:t>로 이미 충분히 신뢰 가능해 제외</a:t>
-            </a:r>
-            <a:r>
-              <a:rPr lang="en-US" altLang="ko-KR" dirty="0"/>
-              <a:t>.</a:t>
-            </a:r>
-            <a:endParaRPr lang="ko-KR" altLang="en-US" dirty="0"/>
-          </a:p>
-          <a:p>
-            <a:r>
-              <a:rPr lang="en-US" altLang="ko-KR" dirty="0"/>
-              <a:t>Predicted Positive</a:t>
-            </a:r>
-            <a:r>
-              <a:rPr lang="ko-KR" altLang="en-US" dirty="0"/>
-              <a:t>는 </a:t>
-            </a:r>
-            <a:r>
-              <a:rPr lang="en-US" altLang="ko-KR" dirty="0"/>
-              <a:t>PPV 20.7%/24.8%</a:t>
-            </a:r>
-            <a:r>
-              <a:rPr lang="ko-KR" altLang="en-US" dirty="0"/>
-              <a:t>로 낮아 이 군에만 </a:t>
-            </a:r>
-            <a:r>
-              <a:rPr lang="en-US" altLang="ko-KR" dirty="0"/>
-              <a:t>Stage-2</a:t>
-            </a:r>
-            <a:r>
-              <a:rPr lang="ko-KR" altLang="en-US" dirty="0"/>
-              <a:t>를 적용해 </a:t>
-            </a:r>
-            <a:r>
-              <a:rPr lang="en-US" altLang="ko-KR" dirty="0"/>
-              <a:t>PPV </a:t>
-            </a:r>
-            <a:r>
-              <a:rPr lang="ko-KR" altLang="en-US" dirty="0"/>
-              <a:t>개선</a:t>
-            </a:r>
-            <a:r>
-              <a:rPr lang="en-US" altLang="ko-KR" dirty="0"/>
-              <a:t>/FP </a:t>
-            </a:r>
-            <a:r>
-              <a:rPr lang="ko-KR" altLang="en-US" dirty="0"/>
-              <a:t>감소를 목표로 함</a:t>
-            </a:r>
-            <a:r>
-              <a:rPr lang="en-US" altLang="ko-KR" dirty="0"/>
-              <a:t>.</a:t>
-            </a:r>
-            <a:endParaRPr lang="ko-KR" altLang="en-US" dirty="0"/>
-          </a:p>
-          <a:p>
-            <a:endParaRPr lang="ko-KR" altLang="en-US" dirty="0"/>
-          </a:p>
-          <a:p>
-            <a:r>
-              <a:rPr lang="en-US" altLang="ko-KR" dirty="0"/>
-              <a:t>Stage-1 AUC</a:t>
-            </a:r>
-            <a:r>
-              <a:rPr lang="ko-KR" altLang="en-US" dirty="0"/>
-              <a:t>를 높이면 이 트레이드오프 자체가 완화됨 </a:t>
-            </a:r>
-            <a:r>
-              <a:rPr lang="en-US" altLang="ko-KR" dirty="0"/>
-              <a:t>-- Stage-2</a:t>
-            </a:r>
-            <a:r>
-              <a:rPr lang="ko-KR" altLang="en-US" dirty="0"/>
-              <a:t>가 필요한 </a:t>
-            </a:r>
-            <a:r>
-              <a:rPr lang="en-US" altLang="ko-KR" dirty="0"/>
-              <a:t>1</a:t>
-            </a:r>
-            <a:r>
-              <a:rPr lang="ko-KR" altLang="en-US" dirty="0"/>
-              <a:t>차 근거</a:t>
-            </a:r>
-            <a:r>
-              <a:rPr lang="en-US" altLang="ko-KR" dirty="0"/>
+          </a:p>
+          <a:p>
+            <a:endParaRPr dirty="0"/>
+          </a:p>
+          <a:p>
+            <a:r>
+              <a:rPr dirty="0" err="1"/>
+              <a:t>문제는</a:t>
+            </a:r>
+            <a:r>
+              <a:rPr dirty="0"/>
+              <a:t> </a:t>
+            </a:r>
+            <a:r>
+              <a:rPr dirty="0" err="1"/>
+              <a:t>Positive로</a:t>
+            </a:r>
+            <a:r>
+              <a:rPr dirty="0"/>
+              <a:t> </a:t>
+            </a:r>
+            <a:r>
+              <a:rPr dirty="0" err="1"/>
+              <a:t>분류된</a:t>
+            </a:r>
+            <a:r>
+              <a:rPr dirty="0"/>
+              <a:t> </a:t>
+            </a:r>
+            <a:r>
+              <a:rPr dirty="0" err="1"/>
+              <a:t>쪽입니다</a:t>
+            </a:r>
+            <a:r>
+              <a:rPr dirty="0"/>
+              <a:t>. 이 중 </a:t>
+            </a:r>
+            <a:r>
+              <a:rPr dirty="0" err="1"/>
+              <a:t>실제로</a:t>
+            </a:r>
+            <a:r>
+              <a:rPr dirty="0"/>
+              <a:t> </a:t>
+            </a:r>
+            <a:r>
+              <a:rPr dirty="0" err="1"/>
+              <a:t>위험군</a:t>
+            </a:r>
+            <a:r>
+              <a:rPr dirty="0"/>
+              <a:t>(TP)인 </a:t>
+            </a:r>
+            <a:r>
+              <a:rPr dirty="0" err="1"/>
+              <a:t>사람의</a:t>
+            </a:r>
+            <a:r>
+              <a:rPr dirty="0"/>
+              <a:t> </a:t>
+            </a:r>
+            <a:r>
+              <a:rPr dirty="0" err="1"/>
+              <a:t>비율</a:t>
+            </a:r>
+            <a:r>
+              <a:rPr dirty="0"/>
+              <a:t>, PPV(Positive Predictive Value)가 </a:t>
+            </a:r>
+            <a:r>
+              <a:rPr dirty="0" err="1"/>
+              <a:t>내부</a:t>
+            </a:r>
+            <a:r>
+              <a:rPr dirty="0"/>
+              <a:t> 20.7%, </a:t>
+            </a:r>
+            <a:r>
+              <a:rPr dirty="0" err="1"/>
+              <a:t>외부</a:t>
+            </a:r>
+            <a:r>
+              <a:rPr dirty="0"/>
+              <a:t> 24.8%밖에 안 </a:t>
+            </a:r>
+            <a:r>
+              <a:rPr dirty="0" err="1"/>
+              <a:t>됩니다</a:t>
+            </a:r>
+            <a:r>
+              <a:rPr dirty="0"/>
+              <a:t>. </a:t>
+            </a:r>
+            <a:r>
+              <a:rPr dirty="0" err="1"/>
+              <a:t>그래서</a:t>
+            </a:r>
+            <a:r>
+              <a:rPr dirty="0"/>
+              <a:t> </a:t>
+            </a:r>
+            <a:r>
+              <a:rPr dirty="0" err="1"/>
+              <a:t>이후</a:t>
+            </a:r>
+            <a:r>
+              <a:rPr dirty="0"/>
+              <a:t> </a:t>
+            </a:r>
+            <a:r>
+              <a:rPr dirty="0" err="1"/>
+              <a:t>분석</a:t>
+            </a:r>
+            <a:r>
+              <a:rPr dirty="0"/>
+              <a:t>(Stage-2)은 </a:t>
+            </a:r>
+            <a:r>
+              <a:rPr dirty="0" err="1"/>
+              <a:t>Positive로</a:t>
+            </a:r>
+            <a:r>
+              <a:rPr dirty="0"/>
+              <a:t> </a:t>
+            </a:r>
+            <a:r>
+              <a:rPr dirty="0" err="1"/>
+              <a:t>분류된</a:t>
+            </a:r>
+            <a:r>
+              <a:rPr dirty="0"/>
+              <a:t> </a:t>
+            </a:r>
+            <a:r>
+              <a:rPr dirty="0" err="1"/>
+              <a:t>사람들만</a:t>
+            </a:r>
+            <a:r>
+              <a:rPr dirty="0"/>
+              <a:t> </a:t>
+            </a:r>
+            <a:r>
+              <a:rPr dirty="0" err="1"/>
+              <a:t>대상으로</a:t>
+            </a:r>
+            <a:r>
+              <a:rPr dirty="0"/>
+              <a:t>, 그 </a:t>
+            </a:r>
+            <a:r>
+              <a:rPr dirty="0" err="1"/>
+              <a:t>안에서</a:t>
+            </a:r>
+            <a:r>
+              <a:rPr dirty="0"/>
+              <a:t> </a:t>
+            </a:r>
+            <a:r>
+              <a:rPr dirty="0" err="1"/>
+              <a:t>TP와</a:t>
+            </a:r>
+            <a:r>
+              <a:rPr dirty="0"/>
+              <a:t> </a:t>
+            </a:r>
+            <a:r>
+              <a:rPr dirty="0" err="1"/>
+              <a:t>FP를</a:t>
+            </a:r>
+            <a:r>
+              <a:rPr dirty="0"/>
+              <a:t> 더 </a:t>
+            </a:r>
+            <a:r>
+              <a:rPr dirty="0" err="1"/>
+              <a:t>정확히</a:t>
+            </a:r>
+            <a:r>
+              <a:rPr dirty="0"/>
+              <a:t> </a:t>
+            </a:r>
+            <a:r>
+              <a:rPr dirty="0" err="1"/>
+              <a:t>가려내는</a:t>
+            </a:r>
+            <a:r>
+              <a:rPr dirty="0"/>
+              <a:t> </a:t>
+            </a:r>
+            <a:r>
+              <a:rPr dirty="0" err="1"/>
+              <a:t>것을</a:t>
+            </a:r>
+            <a:r>
+              <a:rPr dirty="0"/>
+              <a:t> </a:t>
+            </a:r>
+            <a:r>
+              <a:rPr dirty="0" err="1"/>
+              <a:t>목표로</a:t>
+            </a:r>
+            <a:r>
+              <a:rPr dirty="0"/>
+              <a:t> </a:t>
+            </a:r>
+            <a:r>
+              <a:rPr dirty="0" err="1"/>
+              <a:t>합니다</a:t>
+            </a:r>
+            <a:r>
+              <a:rPr dirty="0"/>
               <a:t>.</a:t>
             </a:r>
           </a:p>
@@ -3752,7 +5752,735 @@
           <a:bodyPr/>
           <a:lstStyle/>
           <a:p>
+            <a:r>
+              <a:rPr dirty="0"/>
+              <a:t>이 </a:t>
+            </a:r>
+            <a:r>
+              <a:rPr dirty="0" err="1"/>
+              <a:t>표는</a:t>
+            </a:r>
+            <a:r>
+              <a:rPr dirty="0"/>
+              <a:t> TP·FP·TN </a:t>
+            </a:r>
+            <a:r>
+              <a:rPr dirty="0" err="1"/>
+              <a:t>그룹</a:t>
+            </a:r>
+            <a:r>
+              <a:rPr dirty="0"/>
+              <a:t> </a:t>
+            </a:r>
+            <a:r>
+              <a:rPr dirty="0" err="1"/>
+              <a:t>간에</a:t>
+            </a:r>
+            <a:r>
+              <a:rPr dirty="0"/>
+              <a:t> AEC </a:t>
+            </a:r>
+            <a:r>
+              <a:rPr dirty="0" err="1"/>
+              <a:t>곡선의</a:t>
+            </a:r>
+            <a:r>
+              <a:rPr dirty="0"/>
+              <a:t> </a:t>
+            </a:r>
+            <a:r>
+              <a:rPr dirty="0" err="1"/>
+              <a:t>모양이</a:t>
+            </a:r>
+            <a:r>
+              <a:rPr dirty="0"/>
+              <a:t> </a:t>
+            </a:r>
+            <a:r>
+              <a:rPr dirty="0" err="1"/>
+              <a:t>통계적으로</a:t>
+            </a:r>
+            <a:r>
+              <a:rPr dirty="0"/>
+              <a:t> </a:t>
+            </a:r>
+            <a:r>
+              <a:rPr dirty="0" err="1"/>
+              <a:t>다른지</a:t>
+            </a:r>
+            <a:r>
+              <a:rPr dirty="0"/>
+              <a:t> </a:t>
+            </a:r>
+            <a:r>
+              <a:rPr dirty="0" err="1"/>
+              <a:t>검정한</a:t>
+            </a:r>
+            <a:r>
+              <a:rPr dirty="0"/>
+              <a:t> </a:t>
+            </a:r>
+            <a:r>
+              <a:rPr dirty="0" err="1"/>
+              <a:t>결과입니다</a:t>
+            </a:r>
+            <a:r>
+              <a:rPr dirty="0"/>
+              <a:t>. p=</a:t>
+            </a:r>
+            <a:r>
+              <a:rPr dirty="0" err="1"/>
+              <a:t>원곡선</a:t>
+            </a:r>
+            <a:r>
+              <a:rPr dirty="0"/>
+              <a:t> </a:t>
+            </a:r>
+            <a:r>
+              <a:rPr dirty="0" err="1"/>
+              <a:t>그대로</a:t>
+            </a:r>
+            <a:r>
+              <a:rPr dirty="0"/>
+              <a:t> </a:t>
+            </a:r>
+            <a:r>
+              <a:rPr dirty="0" err="1"/>
+              <a:t>비교</a:t>
+            </a:r>
+            <a:r>
+              <a:rPr dirty="0"/>
+              <a:t>, </a:t>
+            </a:r>
+            <a:r>
+              <a:rPr dirty="0" err="1"/>
+              <a:t>dp</a:t>
+            </a:r>
+            <a:r>
+              <a:rPr dirty="0"/>
+              <a:t>=</a:t>
+            </a:r>
+            <a:r>
+              <a:rPr dirty="0" err="1"/>
+              <a:t>곡선의</a:t>
+            </a:r>
+            <a:r>
+              <a:rPr dirty="0"/>
+              <a:t> </a:t>
+            </a:r>
+            <a:r>
+              <a:rPr dirty="0" err="1"/>
+              <a:t>기울기</a:t>
+            </a:r>
+            <a:r>
+              <a:rPr dirty="0"/>
+              <a:t>(</a:t>
+            </a:r>
+            <a:r>
+              <a:rPr dirty="0" err="1"/>
+              <a:t>변화율</a:t>
+            </a:r>
+            <a:r>
+              <a:rPr dirty="0"/>
+              <a:t>) </a:t>
+            </a:r>
+            <a:r>
+              <a:rPr dirty="0" err="1"/>
+              <a:t>비교</a:t>
+            </a:r>
+            <a:r>
+              <a:rPr dirty="0"/>
+              <a:t>, d2p=</a:t>
+            </a:r>
+            <a:r>
+              <a:rPr dirty="0" err="1"/>
+              <a:t>기울기의</a:t>
+            </a:r>
+            <a:r>
+              <a:rPr dirty="0"/>
+              <a:t> </a:t>
+            </a:r>
+            <a:r>
+              <a:rPr dirty="0" err="1"/>
+              <a:t>변화</a:t>
+            </a:r>
+            <a:r>
+              <a:rPr dirty="0"/>
+              <a:t>(</a:t>
+            </a:r>
+            <a:r>
+              <a:rPr dirty="0" err="1"/>
+              <a:t>곡률</a:t>
+            </a:r>
+            <a:r>
+              <a:rPr dirty="0"/>
+              <a:t>) </a:t>
+            </a:r>
+            <a:r>
+              <a:rPr dirty="0" err="1"/>
+              <a:t>비교</a:t>
+            </a:r>
+            <a:r>
+              <a:rPr dirty="0"/>
+              <a:t>. </a:t>
+            </a:r>
+            <a:r>
+              <a:rPr dirty="0" err="1"/>
+              <a:t>RMSD는</a:t>
+            </a:r>
+            <a:r>
+              <a:rPr dirty="0"/>
+              <a:t> 두 </a:t>
+            </a:r>
+            <a:r>
+              <a:rPr dirty="0" err="1"/>
+              <a:t>그룹</a:t>
+            </a:r>
+            <a:r>
+              <a:rPr dirty="0"/>
+              <a:t> </a:t>
+            </a:r>
+            <a:r>
+              <a:rPr dirty="0" err="1"/>
+              <a:t>평균</a:t>
+            </a:r>
+            <a:r>
+              <a:rPr dirty="0"/>
+              <a:t> </a:t>
+            </a:r>
+            <a:r>
+              <a:rPr dirty="0" err="1"/>
+              <a:t>곡선이</a:t>
+            </a:r>
+            <a:r>
+              <a:rPr dirty="0"/>
+              <a:t> </a:t>
+            </a:r>
+            <a:r>
+              <a:rPr dirty="0" err="1"/>
+              <a:t>얼마나</a:t>
+            </a:r>
+            <a:r>
+              <a:rPr dirty="0"/>
+              <a:t> </a:t>
+            </a:r>
+            <a:r>
+              <a:rPr dirty="0" err="1"/>
+              <a:t>차이</a:t>
+            </a:r>
+            <a:r>
+              <a:rPr dirty="0"/>
+              <a:t> </a:t>
+            </a:r>
+            <a:r>
+              <a:rPr dirty="0" err="1"/>
+              <a:t>나는지를</a:t>
+            </a:r>
+            <a:r>
+              <a:rPr dirty="0"/>
+              <a:t> </a:t>
+            </a:r>
+            <a:r>
+              <a:rPr dirty="0" err="1"/>
+              <a:t>나타내는</a:t>
+            </a:r>
+            <a:r>
+              <a:rPr dirty="0"/>
+              <a:t> </a:t>
+            </a:r>
+            <a:r>
+              <a:rPr dirty="0" err="1"/>
+              <a:t>숫자</a:t>
+            </a:r>
+            <a:r>
+              <a:rPr dirty="0"/>
+              <a:t>(</a:t>
+            </a:r>
+            <a:r>
+              <a:rPr dirty="0" err="1"/>
+              <a:t>클수록</a:t>
+            </a:r>
+            <a:r>
+              <a:rPr dirty="0"/>
+              <a:t> </a:t>
+            </a:r>
+            <a:r>
+              <a:rPr dirty="0" err="1"/>
+              <a:t>다름</a:t>
+            </a:r>
+            <a:r>
+              <a:rPr dirty="0"/>
+              <a:t>)</a:t>
+            </a:r>
+            <a:r>
+              <a:rPr dirty="0" err="1"/>
+              <a:t>이고</a:t>
+            </a:r>
+            <a:r>
+              <a:rPr dirty="0"/>
+              <a:t>, p-</a:t>
+            </a:r>
+            <a:r>
+              <a:rPr dirty="0" err="1"/>
+              <a:t>value는</a:t>
+            </a:r>
+            <a:r>
+              <a:rPr dirty="0"/>
+              <a:t> '이 </a:t>
+            </a:r>
+            <a:r>
+              <a:rPr dirty="0" err="1"/>
+              <a:t>정도</a:t>
+            </a:r>
+            <a:r>
+              <a:rPr dirty="0"/>
+              <a:t> </a:t>
+            </a:r>
+            <a:r>
+              <a:rPr dirty="0" err="1"/>
+              <a:t>차이가</a:t>
+            </a:r>
+            <a:r>
+              <a:rPr dirty="0"/>
+              <a:t> </a:t>
+            </a:r>
+            <a:r>
+              <a:rPr dirty="0" err="1"/>
+              <a:t>우연히</a:t>
+            </a:r>
+            <a:r>
+              <a:rPr dirty="0"/>
+              <a:t> </a:t>
+            </a:r>
+            <a:r>
+              <a:rPr dirty="0" err="1"/>
+              <a:t>나올</a:t>
+            </a:r>
+            <a:r>
+              <a:rPr dirty="0"/>
+              <a:t> </a:t>
+            </a:r>
+            <a:r>
+              <a:rPr dirty="0" err="1"/>
+              <a:t>확률'입니다</a:t>
+            </a:r>
+            <a:r>
+              <a:rPr dirty="0"/>
+              <a:t>(0.05보다 </a:t>
+            </a:r>
+            <a:r>
+              <a:rPr dirty="0" err="1"/>
+              <a:t>작으면</a:t>
+            </a:r>
+            <a:r>
+              <a:rPr dirty="0"/>
+              <a:t> </a:t>
+            </a:r>
+            <a:r>
+              <a:rPr dirty="0" err="1"/>
+              <a:t>우연이</a:t>
+            </a:r>
+            <a:r>
+              <a:rPr dirty="0"/>
+              <a:t> </a:t>
+            </a:r>
+            <a:r>
+              <a:rPr dirty="0" err="1"/>
+              <a:t>아니라고</a:t>
+            </a:r>
+            <a:r>
+              <a:rPr dirty="0"/>
+              <a:t> </a:t>
+            </a:r>
+            <a:r>
+              <a:rPr dirty="0" err="1"/>
+              <a:t>보고</a:t>
+            </a:r>
+            <a:r>
+              <a:rPr dirty="0"/>
+              <a:t> '</a:t>
+            </a:r>
+            <a:r>
+              <a:rPr dirty="0" err="1"/>
+              <a:t>유의'하다고</a:t>
+            </a:r>
+            <a:r>
+              <a:rPr dirty="0"/>
+              <a:t> </a:t>
+            </a:r>
+            <a:r>
+              <a:rPr dirty="0" err="1"/>
+              <a:t>부릅니다</a:t>
+            </a:r>
+            <a:r>
+              <a:rPr dirty="0"/>
+              <a:t>).</a:t>
+            </a:r>
+          </a:p>
+          <a:p>
             <a:endParaRPr dirty="0"/>
+          </a:p>
+          <a:p>
+            <a:r>
+              <a:rPr dirty="0" err="1"/>
+              <a:t>핵심</a:t>
+            </a:r>
+            <a:r>
+              <a:rPr dirty="0"/>
+              <a:t> </a:t>
+            </a:r>
+            <a:r>
+              <a:rPr dirty="0" err="1"/>
+              <a:t>결과</a:t>
+            </a:r>
+            <a:r>
+              <a:rPr dirty="0"/>
+              <a:t>: </a:t>
+            </a:r>
+            <a:r>
+              <a:rPr dirty="0" err="1"/>
+              <a:t>위험군</a:t>
+            </a:r>
+            <a:r>
+              <a:rPr dirty="0"/>
+              <a:t>(TP·FP)을 </a:t>
+            </a:r>
+            <a:r>
+              <a:rPr dirty="0" err="1"/>
+              <a:t>각각</a:t>
+            </a:r>
+            <a:r>
+              <a:rPr dirty="0"/>
+              <a:t> </a:t>
+            </a:r>
+            <a:r>
+              <a:rPr dirty="0" err="1"/>
+              <a:t>정상군</a:t>
+            </a:r>
+            <a:r>
+              <a:rPr dirty="0"/>
+              <a:t>(TN)과 </a:t>
+            </a:r>
+            <a:r>
+              <a:rPr dirty="0" err="1"/>
+              <a:t>비교하면</a:t>
+            </a:r>
+            <a:r>
+              <a:rPr dirty="0"/>
+              <a:t> </a:t>
+            </a:r>
+            <a:r>
+              <a:rPr dirty="0" err="1"/>
+              <a:t>뚜렷하게</a:t>
+            </a:r>
+            <a:r>
+              <a:rPr dirty="0"/>
+              <a:t> </a:t>
+            </a:r>
+            <a:r>
+              <a:rPr dirty="0" err="1"/>
+              <a:t>다릅니다</a:t>
+            </a:r>
+            <a:r>
+              <a:rPr dirty="0"/>
+              <a:t>(p&lt;0.01, 각 표 첫 두 줄). </a:t>
+            </a:r>
+            <a:r>
+              <a:rPr dirty="0" err="1"/>
+              <a:t>그런데</a:t>
+            </a:r>
+            <a:r>
+              <a:rPr dirty="0"/>
+              <a:t> </a:t>
+            </a:r>
+            <a:r>
+              <a:rPr dirty="0" err="1"/>
+              <a:t>정작</a:t>
+            </a:r>
+            <a:r>
+              <a:rPr dirty="0"/>
+              <a:t> </a:t>
+            </a:r>
+            <a:r>
+              <a:rPr dirty="0" err="1"/>
+              <a:t>구별하고</a:t>
+            </a:r>
+            <a:r>
+              <a:rPr dirty="0"/>
+              <a:t> </a:t>
+            </a:r>
+            <a:r>
+              <a:rPr dirty="0" err="1"/>
+              <a:t>싶은</a:t>
+            </a:r>
+            <a:r>
+              <a:rPr dirty="0"/>
+              <a:t> 'TP vs FP'(</a:t>
+            </a:r>
+            <a:r>
+              <a:rPr dirty="0" err="1"/>
+              <a:t>진짜</a:t>
+            </a:r>
+            <a:r>
+              <a:rPr dirty="0"/>
+              <a:t> </a:t>
+            </a:r>
+            <a:r>
+              <a:rPr dirty="0" err="1"/>
+              <a:t>위험군</a:t>
+            </a:r>
+            <a:r>
+              <a:rPr dirty="0"/>
+              <a:t> vs </a:t>
+            </a:r>
+            <a:r>
+              <a:rPr dirty="0" err="1"/>
+              <a:t>가짜</a:t>
+            </a:r>
+            <a:r>
+              <a:rPr dirty="0"/>
+              <a:t> </a:t>
+            </a:r>
+            <a:r>
+              <a:rPr dirty="0" err="1"/>
+              <a:t>위험군</a:t>
+            </a:r>
+            <a:r>
+              <a:rPr dirty="0"/>
+              <a:t>)는 </a:t>
+            </a:r>
+            <a:r>
+              <a:rPr dirty="0" err="1"/>
+              <a:t>강남에서는</a:t>
+            </a:r>
+            <a:r>
+              <a:rPr dirty="0"/>
+              <a:t> </a:t>
+            </a:r>
+            <a:r>
+              <a:rPr dirty="0" err="1"/>
+              <a:t>원곡선</a:t>
+            </a:r>
+            <a:r>
+              <a:rPr dirty="0"/>
+              <a:t>/</a:t>
+            </a:r>
+            <a:r>
+              <a:rPr dirty="0" err="1"/>
+              <a:t>기울기</a:t>
+            </a:r>
+            <a:r>
+              <a:rPr dirty="0"/>
+              <a:t>/</a:t>
+            </a:r>
+            <a:r>
+              <a:rPr dirty="0" err="1"/>
+              <a:t>곡률</a:t>
+            </a:r>
+            <a:r>
+              <a:rPr dirty="0"/>
+              <a:t> 셋 다 </a:t>
+            </a:r>
+            <a:r>
+              <a:rPr dirty="0" err="1"/>
+              <a:t>유의하지</a:t>
+            </a:r>
+            <a:r>
+              <a:rPr dirty="0"/>
+              <a:t> </a:t>
+            </a:r>
+            <a:r>
+              <a:rPr dirty="0" err="1"/>
+              <a:t>않고</a:t>
+            </a:r>
+            <a:r>
+              <a:rPr dirty="0"/>
+              <a:t>(p=0.227/0.155/0.199), </a:t>
+            </a:r>
+            <a:r>
+              <a:rPr dirty="0" err="1"/>
+              <a:t>신촌에서는</a:t>
+            </a:r>
+            <a:r>
+              <a:rPr dirty="0"/>
+              <a:t> </a:t>
+            </a:r>
+            <a:r>
+              <a:rPr dirty="0" err="1"/>
+              <a:t>원곡선과</a:t>
+            </a:r>
+            <a:r>
+              <a:rPr dirty="0"/>
+              <a:t> </a:t>
+            </a:r>
+            <a:r>
+              <a:rPr dirty="0" err="1"/>
+              <a:t>기울기만</a:t>
+            </a:r>
+            <a:r>
+              <a:rPr dirty="0"/>
+              <a:t> </a:t>
+            </a:r>
+            <a:r>
+              <a:rPr dirty="0" err="1"/>
+              <a:t>약하게</a:t>
+            </a:r>
+            <a:r>
+              <a:rPr dirty="0"/>
+              <a:t> </a:t>
+            </a:r>
+            <a:r>
+              <a:rPr dirty="0" err="1"/>
+              <a:t>유의합니다</a:t>
+            </a:r>
+            <a:r>
+              <a:rPr dirty="0"/>
+              <a:t>(p=0.0175/0.005). '(</a:t>
+            </a:r>
+            <a:r>
+              <a:rPr dirty="0" err="1"/>
+              <a:t>psm</a:t>
+            </a:r>
+            <a:r>
+              <a:rPr dirty="0"/>
+              <a:t>)' </a:t>
+            </a:r>
+            <a:r>
+              <a:rPr dirty="0" err="1"/>
+              <a:t>표시는</a:t>
+            </a:r>
+            <a:r>
+              <a:rPr dirty="0"/>
+              <a:t> </a:t>
+            </a:r>
+            <a:r>
+              <a:rPr dirty="0" err="1"/>
+              <a:t>성별·나이·키·체중이</a:t>
+            </a:r>
+            <a:r>
+              <a:rPr dirty="0"/>
+              <a:t> </a:t>
+            </a:r>
+            <a:r>
+              <a:rPr dirty="0" err="1"/>
+              <a:t>비슷한</a:t>
+            </a:r>
+            <a:r>
+              <a:rPr dirty="0"/>
+              <a:t> </a:t>
+            </a:r>
+            <a:r>
+              <a:rPr dirty="0" err="1"/>
+              <a:t>환자끼리</a:t>
+            </a:r>
+            <a:r>
+              <a:rPr dirty="0"/>
+              <a:t> </a:t>
+            </a:r>
+            <a:r>
+              <a:rPr dirty="0" err="1"/>
+              <a:t>미리</a:t>
+            </a:r>
+            <a:r>
+              <a:rPr dirty="0"/>
+              <a:t> </a:t>
+            </a:r>
+            <a:r>
+              <a:rPr dirty="0" err="1"/>
+              <a:t>짝지어</a:t>
+            </a:r>
+            <a:r>
+              <a:rPr dirty="0"/>
+              <a:t>(propensity matching) </a:t>
+            </a:r>
+            <a:r>
+              <a:rPr dirty="0" err="1"/>
+              <a:t>비교한</a:t>
+            </a:r>
+            <a:r>
+              <a:rPr dirty="0"/>
+              <a:t> </a:t>
+            </a:r>
+            <a:r>
+              <a:rPr dirty="0" err="1"/>
+              <a:t>결과인데</a:t>
+            </a:r>
+            <a:r>
+              <a:rPr dirty="0"/>
+              <a:t>, </a:t>
+            </a:r>
+            <a:r>
+              <a:rPr dirty="0" err="1"/>
+              <a:t>짝지은</a:t>
+            </a:r>
+            <a:r>
+              <a:rPr dirty="0"/>
+              <a:t> </a:t>
+            </a:r>
+            <a:r>
+              <a:rPr dirty="0" err="1"/>
+              <a:t>뒤에도</a:t>
+            </a:r>
+            <a:r>
+              <a:rPr dirty="0"/>
+              <a:t> </a:t>
+            </a:r>
+            <a:r>
+              <a:rPr dirty="0" err="1"/>
+              <a:t>신촌은</a:t>
+            </a:r>
+            <a:r>
+              <a:rPr dirty="0"/>
+              <a:t> </a:t>
+            </a:r>
+            <a:r>
+              <a:rPr dirty="0" err="1"/>
+              <a:t>여전히</a:t>
+            </a:r>
+            <a:r>
+              <a:rPr dirty="0"/>
+              <a:t> </a:t>
+            </a:r>
+            <a:r>
+              <a:rPr dirty="0" err="1"/>
+              <a:t>유의하게</a:t>
+            </a:r>
+            <a:r>
+              <a:rPr dirty="0"/>
+              <a:t> </a:t>
+            </a:r>
+            <a:r>
+              <a:rPr dirty="0" err="1"/>
+              <a:t>남아</a:t>
+            </a:r>
+            <a:r>
+              <a:rPr dirty="0"/>
+              <a:t> </a:t>
+            </a:r>
+            <a:r>
+              <a:rPr dirty="0" err="1"/>
+              <a:t>있습니다</a:t>
+            </a:r>
+            <a:r>
+              <a:rPr dirty="0"/>
+              <a:t>(슬라이드8에서 더 </a:t>
+            </a:r>
+            <a:r>
+              <a:rPr dirty="0" err="1"/>
+              <a:t>자세히</a:t>
+            </a:r>
+            <a:r>
+              <a:rPr dirty="0"/>
+              <a:t> </a:t>
+            </a:r>
+            <a:r>
+              <a:rPr dirty="0" err="1"/>
+              <a:t>다룸</a:t>
+            </a:r>
+            <a:r>
+              <a:rPr dirty="0"/>
+              <a:t>).</a:t>
+            </a:r>
           </a:p>
         </p:txBody>
       </p:sp>
@@ -3792,13 +6520,7 @@
   <p:cSld>
     <p:spTree>
       <p:nvGrpSpPr>
-        <p:cNvPr id="1" name="">
-          <a:extLst>
-            <a:ext uri="{FF2B5EF4-FFF2-40B4-BE49-F238E27FC236}">
-              <a16:creationId xmlns:a16="http://schemas.microsoft.com/office/drawing/2014/main" id="{54488A4A-BF4E-A68A-5F1E-D49EEEC9C6DD}"/>
-            </a:ext>
-          </a:extLst>
-        </p:cNvPr>
+        <p:cNvPr id="1" name=""/>
         <p:cNvGrpSpPr/>
         <p:nvPr/>
       </p:nvGrpSpPr>
@@ -3812,13 +6534,7 @@
       </p:grpSpPr>
       <p:sp>
         <p:nvSpPr>
-          <p:cNvPr id="2" name="Slide Image Placeholder 1">
-            <a:extLst>
-              <a:ext uri="{FF2B5EF4-FFF2-40B4-BE49-F238E27FC236}">
-                <a16:creationId xmlns:a16="http://schemas.microsoft.com/office/drawing/2014/main" id="{3F1F0313-5111-4925-AA40-28B406CA5BB5}"/>
-              </a:ext>
-            </a:extLst>
-          </p:cNvPr>
+          <p:cNvPr id="2" name="Slide Image Placeholder 1"/>
           <p:cNvSpPr>
             <a:spLocks noGrp="1" noRot="1" noChangeAspect="1"/>
           </p:cNvSpPr>
@@ -3830,13 +6546,7 @@
       </p:sp>
       <p:sp>
         <p:nvSpPr>
-          <p:cNvPr id="3" name="Notes Placeholder 2">
-            <a:extLst>
-              <a:ext uri="{FF2B5EF4-FFF2-40B4-BE49-F238E27FC236}">
-                <a16:creationId xmlns:a16="http://schemas.microsoft.com/office/drawing/2014/main" id="{46A319D1-9A0E-DBAD-CCE8-E1B5256FFDFD}"/>
-              </a:ext>
-            </a:extLst>
-          </p:cNvPr>
+          <p:cNvPr id="3" name="Notes Placeholder 2"/>
           <p:cNvSpPr>
             <a:spLocks noGrp="1"/>
           </p:cNvSpPr>
@@ -3849,19 +6559,15 @@
           <a:bodyPr/>
           <a:lstStyle/>
           <a:p>
-            <a:endParaRPr dirty="0"/>
+            <a:r>
+              <a:t>TP(True Positive)와 FP(False Positive)의 AEC 곡선을 원본 그대로(매칭 없이) 겹쳐 그린 그림입니다. 슬라이드5에서 본 것처럼 두 곡선이 육안으로도 비슷해 보이고 통계적으로도 뚜렷한 차이가 없습니다(강남 p=0.227, 신촌 p=0.0175로 신촌만 약하게 유의). 즉 AEC 곡선 하나만 봐서는 TP인지 FP인지 구별하기 어렵다는 것을 보여주는 그림입니다.</a:t>
+            </a:r>
           </a:p>
         </p:txBody>
       </p:sp>
       <p:sp>
         <p:nvSpPr>
-          <p:cNvPr id="4" name="Slide Number Placeholder 3">
-            <a:extLst>
-              <a:ext uri="{FF2B5EF4-FFF2-40B4-BE49-F238E27FC236}">
-                <a16:creationId xmlns:a16="http://schemas.microsoft.com/office/drawing/2014/main" id="{569A9B80-65F7-EA25-0B41-27D5436077A0}"/>
-              </a:ext>
-            </a:extLst>
-          </p:cNvPr>
+          <p:cNvPr id="4" name="Slide Number Placeholder 3"/>
           <p:cNvSpPr>
             <a:spLocks noGrp="1"/>
           </p:cNvSpPr>
@@ -3874,7 +6580,7 @@
     </p:spTree>
     <p:extLst>
       <p:ext uri="{BB962C8B-B14F-4D97-AF65-F5344CB8AC3E}">
-        <p14:creationId xmlns:p14="http://schemas.microsoft.com/office/powerpoint/2010/main" val="2650486702"/>
+        <p14:creationId xmlns:p14="http://schemas.microsoft.com/office/powerpoint/2010/main" val="508260566"/>
       </p:ext>
     </p:extLst>
   </p:cSld>
@@ -3928,7 +6634,9 @@
           <a:bodyPr/>
           <a:lstStyle/>
           <a:p>
-            <a:endParaRPr dirty="0"/>
+            <a:r>
+              <a:t>위 슬라이드와 같은 TP vs FP 비교인데, 이번에는 '성별·나이·키·체중이 비슷한 환자끼리' 미리 짝을 지은 뒤(propensity matching -- 쌍둥이처럼 비슷한 사람끼리 골라 비교하는 방법) 곡선을 비교했습니다. 혹시 '체형 차이' 때문에 곡선이 달라 보이는 착시가 있었던 건 아닌지 확인하기 위해서입니다. 짝을 지은 뒤에도 강남은 여전히 차이가 없고(p=0.983), 신촌은 여전히 약한 차이가 남아 있습니다(p=0.0165) -- 체형 차이 때문에 생긴 착시는 아니라는 뜻입니다.</a:t>
+            </a:r>
           </a:p>
         </p:txBody>
       </p:sp>
@@ -3945,11 +6653,6 @@
         <p:spPr/>
       </p:sp>
     </p:spTree>
-    <p:extLst>
-      <p:ext uri="{BB962C8B-B14F-4D97-AF65-F5344CB8AC3E}">
-        <p14:creationId xmlns:p14="http://schemas.microsoft.com/office/powerpoint/2010/main" val="508260566"/>
-      </p:ext>
-    </p:extLst>
   </p:cSld>
   <p:clrMapOvr>
     <a:masterClrMapping/>
@@ -4019,7 +6722,9 @@
           <a:bodyPr/>
           <a:lstStyle/>
           <a:p>
-            <a:endParaRPr dirty="0"/>
+            <a:r>
+              <a:t>지금까지의 결과를 정리하면, AEC 곡선 하나만으로는(원곡선이든, 요약 지표든, 주성분이든) TP와 FP를 뚜렷하게 구별하기 어렵습니다. 다만 강남과 신촌 결과가 완전히 같지는 않아서(신촌에 미세한 흔적이 남음) 좀 더 정교한 접근이 필요합니다. 다음 단계로는 임상 정보(성별/나이/키/체중)와 AEC 곡선 정보를 딥러닝 모델(멀티모달 구조)로 함께 학습시켜서 사람이 놓칠 수 있는 복합적인 패턴을 잡아낼 수 있는지 시도하고, Stage-1 모델 자체의 성능(AUC)을 높이는 방법도 함께 연구할 계획입니다.</a:t>
+            </a:r>
           </a:p>
         </p:txBody>
       </p:sp>
@@ -4191,7 +6896,7 @@
             </a:pPr>
             <a:fld id="{00000000-1234-1234-1234-123412341234}" type="slidenum">
               <a:rPr lang="en-US"/>
-              <a:t>10</a:t>
+              <a:t>9</a:t>
             </a:fld>
             <a:endParaRPr/>
           </a:p>
@@ -7998,7 +10703,13 @@
   <p:cSld>
     <p:spTree>
       <p:nvGrpSpPr>
-        <p:cNvPr id="1" name="Shape 1175"/>
+        <p:cNvPr id="1" name="">
+          <a:extLst>
+            <a:ext uri="{FF2B5EF4-FFF2-40B4-BE49-F238E27FC236}">
+              <a16:creationId xmlns:a16="http://schemas.microsoft.com/office/drawing/2014/main" id="{10012059-9B33-147B-1677-BDD8E142BC46}"/>
+            </a:ext>
+          </a:extLst>
+        </p:cNvPr>
         <p:cNvGrpSpPr/>
         <p:nvPr/>
       </p:nvGrpSpPr>
@@ -8010,38 +10721,264 @@
           <a:chExt cx="0" cy="0"/>
         </a:xfrm>
       </p:grpSpPr>
-      <p:pic>
-        <p:nvPicPr>
-          <p:cNvPr id="1176" name="Google Shape;1176;g3d412ffb079_0_61"/>
-          <p:cNvPicPr preferRelativeResize="0"/>
+      <p:sp>
+        <p:nvSpPr>
+          <p:cNvPr id="2" name="Title 1">
+            <a:extLst>
+              <a:ext uri="{FF2B5EF4-FFF2-40B4-BE49-F238E27FC236}">
+                <a16:creationId xmlns:a16="http://schemas.microsoft.com/office/drawing/2014/main" id="{33032DBA-7ACB-349D-035C-185AE1578F6A}"/>
+              </a:ext>
+            </a:extLst>
+          </p:cNvPr>
+          <p:cNvSpPr>
+            <a:spLocks noGrp="1"/>
+          </p:cNvSpPr>
+          <p:nvPr>
+            <p:ph type="title"/>
+          </p:nvPr>
+        </p:nvSpPr>
+        <p:spPr/>
+        <p:txBody>
+          <a:bodyPr/>
+          <a:lstStyle/>
+          <a:p>
+            <a:r>
+              <a:rPr lang="en-US" altLang="ko-KR" dirty="0"/>
+              <a:t>Detailed progress</a:t>
+            </a:r>
+            <a:endParaRPr dirty="0"/>
+          </a:p>
+        </p:txBody>
+      </p:sp>
+      <p:grpSp>
+        <p:nvGrpSpPr>
+          <p:cNvPr id="3" name="그룹 2">
+            <a:extLst>
+              <a:ext uri="{FF2B5EF4-FFF2-40B4-BE49-F238E27FC236}">
+                <a16:creationId xmlns:a16="http://schemas.microsoft.com/office/drawing/2014/main" id="{1402A4FB-6A63-7B41-1C02-E547118B1112}"/>
+              </a:ext>
+            </a:extLst>
+          </p:cNvPr>
+          <p:cNvGrpSpPr/>
           <p:nvPr/>
-        </p:nvPicPr>
-        <p:blipFill>
-          <a:blip r:embed="rId3">
-            <a:alphaModFix/>
-          </a:blip>
-          <a:stretch>
-            <a:fillRect/>
-          </a:stretch>
-        </p:blipFill>
+        </p:nvGrpSpPr>
+        <p:grpSpPr>
+          <a:xfrm>
+            <a:off x="2596460" y="1429810"/>
+            <a:ext cx="7164232" cy="2516126"/>
+            <a:chOff x="4627854" y="3428998"/>
+            <a:chExt cx="6823199" cy="2341976"/>
+          </a:xfrm>
+        </p:grpSpPr>
+        <p:pic>
+          <p:nvPicPr>
+            <p:cNvPr id="6" name="Picture 5" descr="18_aec_curve_tp_vs_tn.png">
+              <a:extLst>
+                <a:ext uri="{FF2B5EF4-FFF2-40B4-BE49-F238E27FC236}">
+                  <a16:creationId xmlns:a16="http://schemas.microsoft.com/office/drawing/2014/main" id="{219595BA-40AA-C995-BF1C-BAF002B99CB9}"/>
+                </a:ext>
+              </a:extLst>
+            </p:cNvPr>
+            <p:cNvPicPr>
+              <a:picLocks noChangeAspect="1"/>
+            </p:cNvPicPr>
+            <p:nvPr/>
+          </p:nvPicPr>
+          <p:blipFill>
+            <a:blip r:embed="rId3"/>
+            <a:stretch>
+              <a:fillRect/>
+            </a:stretch>
+          </p:blipFill>
+          <p:spPr>
+            <a:xfrm>
+              <a:off x="4627854" y="3428998"/>
+              <a:ext cx="3428632" cy="2341976"/>
+            </a:xfrm>
+            <a:prstGeom prst="rect">
+              <a:avLst/>
+            </a:prstGeom>
+          </p:spPr>
+        </p:pic>
+        <p:pic>
+          <p:nvPicPr>
+            <p:cNvPr id="7" name="Picture 6" descr="18_aec_curve_tp_vs_tn.png">
+              <a:extLst>
+                <a:ext uri="{FF2B5EF4-FFF2-40B4-BE49-F238E27FC236}">
+                  <a16:creationId xmlns:a16="http://schemas.microsoft.com/office/drawing/2014/main" id="{76CBEDA8-7B81-5940-E62B-12A548078CC4}"/>
+                </a:ext>
+              </a:extLst>
+            </p:cNvPr>
+            <p:cNvPicPr>
+              <a:picLocks noChangeAspect="1"/>
+            </p:cNvPicPr>
+            <p:nvPr/>
+          </p:nvPicPr>
+          <p:blipFill>
+            <a:blip r:embed="rId4"/>
+            <a:stretch>
+              <a:fillRect/>
+            </a:stretch>
+          </p:blipFill>
+          <p:spPr>
+            <a:xfrm>
+              <a:off x="8022421" y="3428998"/>
+              <a:ext cx="3428632" cy="2341976"/>
+            </a:xfrm>
+            <a:prstGeom prst="rect">
+              <a:avLst/>
+            </a:prstGeom>
+          </p:spPr>
+        </p:pic>
+      </p:grpSp>
+      <p:grpSp>
+        <p:nvGrpSpPr>
+          <p:cNvPr id="11" name="그룹 10">
+            <a:extLst>
+              <a:ext uri="{FF2B5EF4-FFF2-40B4-BE49-F238E27FC236}">
+                <a16:creationId xmlns:a16="http://schemas.microsoft.com/office/drawing/2014/main" id="{28F4725D-1246-2F07-135D-C5618C58541A}"/>
+              </a:ext>
+            </a:extLst>
+          </p:cNvPr>
+          <p:cNvGrpSpPr>
+            <a:grpSpLocks noChangeAspect="1"/>
+          </p:cNvGrpSpPr>
+          <p:nvPr/>
+        </p:nvGrpSpPr>
+        <p:grpSpPr>
+          <a:xfrm>
+            <a:off x="2616985" y="3945936"/>
+            <a:ext cx="7161590" cy="2459030"/>
+            <a:chOff x="5225965" y="3550000"/>
+            <a:chExt cx="6981342" cy="2397139"/>
+          </a:xfrm>
+        </p:grpSpPr>
+        <p:pic>
+          <p:nvPicPr>
+            <p:cNvPr id="12" name="Picture 5" descr="17_aec_curve_fp_vs_tn.png">
+              <a:extLst>
+                <a:ext uri="{FF2B5EF4-FFF2-40B4-BE49-F238E27FC236}">
+                  <a16:creationId xmlns:a16="http://schemas.microsoft.com/office/drawing/2014/main" id="{1CBD24E7-F6C5-A104-78A0-5AD44C0EB43C}"/>
+                </a:ext>
+              </a:extLst>
+            </p:cNvPr>
+            <p:cNvPicPr>
+              <a:picLocks noChangeAspect="1"/>
+            </p:cNvPicPr>
+            <p:nvPr/>
+          </p:nvPicPr>
+          <p:blipFill>
+            <a:blip r:embed="rId5"/>
+            <a:stretch>
+              <a:fillRect/>
+            </a:stretch>
+          </p:blipFill>
+          <p:spPr>
+            <a:xfrm>
+              <a:off x="5225965" y="3550000"/>
+              <a:ext cx="3509392" cy="2397139"/>
+            </a:xfrm>
+            <a:prstGeom prst="rect">
+              <a:avLst/>
+            </a:prstGeom>
+          </p:spPr>
+        </p:pic>
+        <p:pic>
+          <p:nvPicPr>
+            <p:cNvPr id="13" name="Picture 6" descr="17_aec_curve_fp_vs_tn.png">
+              <a:extLst>
+                <a:ext uri="{FF2B5EF4-FFF2-40B4-BE49-F238E27FC236}">
+                  <a16:creationId xmlns:a16="http://schemas.microsoft.com/office/drawing/2014/main" id="{7E4EA72D-82B2-332D-9E61-042D95CD6E4E}"/>
+                </a:ext>
+              </a:extLst>
+            </p:cNvPr>
+            <p:cNvPicPr>
+              <a:picLocks noChangeAspect="1"/>
+            </p:cNvPicPr>
+            <p:nvPr/>
+          </p:nvPicPr>
+          <p:blipFill>
+            <a:blip r:embed="rId6"/>
+            <a:stretch>
+              <a:fillRect/>
+            </a:stretch>
+          </p:blipFill>
+          <p:spPr>
+            <a:xfrm>
+              <a:off x="8697915" y="3550000"/>
+              <a:ext cx="3509392" cy="2397139"/>
+            </a:xfrm>
+            <a:prstGeom prst="rect">
+              <a:avLst/>
+            </a:prstGeom>
+          </p:spPr>
+        </p:pic>
+      </p:grpSp>
+      <p:sp>
+        <p:nvSpPr>
+          <p:cNvPr id="17" name="내용 개체 틀 3">
+            <a:extLst>
+              <a:ext uri="{FF2B5EF4-FFF2-40B4-BE49-F238E27FC236}">
+                <a16:creationId xmlns:a16="http://schemas.microsoft.com/office/drawing/2014/main" id="{E46FAD5E-DB3B-0FA4-33D2-0D3E295B9B07}"/>
+              </a:ext>
+            </a:extLst>
+          </p:cNvPr>
+          <p:cNvSpPr>
+            <a:spLocks noGrp="1"/>
+          </p:cNvSpPr>
+          <p:nvPr>
+            <p:ph idx="1"/>
+          </p:nvPr>
+        </p:nvSpPr>
         <p:spPr>
           <a:xfrm>
-            <a:off x="0" y="0"/>
-            <a:ext cx="12192000" cy="6858000"/>
+            <a:off x="508000" y="897468"/>
+            <a:ext cx="11176000" cy="5063066"/>
           </a:xfrm>
-          <a:prstGeom prst="rect">
-            <a:avLst/>
-          </a:prstGeom>
-          <a:noFill/>
-          <a:ln>
-            <a:noFill/>
-          </a:ln>
         </p:spPr>
-      </p:pic>
+        <p:txBody>
+          <a:bodyPr>
+            <a:normAutofit/>
+          </a:bodyPr>
+          <a:lstStyle/>
+          <a:p>
+            <a:pPr>
+              <a:lnSpc>
+                <a:spcPct val="150000"/>
+              </a:lnSpc>
+            </a:pPr>
+            <a:r>
+              <a:rPr lang="en-US" altLang="ko-KR" b="1" dirty="0"/>
+              <a:t>Stage-1 AEC-128 </a:t>
+            </a:r>
+            <a:r>
+              <a:rPr lang="ko-KR" altLang="en-US" b="1" dirty="0"/>
+              <a:t>곡선 비교 </a:t>
+            </a:r>
+            <a:r>
+              <a:rPr lang="en-US" altLang="ko-KR" b="1" dirty="0"/>
+              <a:t>: TP/FP vs TN </a:t>
+            </a:r>
+            <a:r>
+              <a:rPr lang="ko-KR" altLang="en-US" b="1" dirty="0"/>
+              <a:t>모두 유의 </a:t>
+            </a:r>
+            <a:r>
+              <a:rPr lang="en-US" altLang="ko-KR" b="1" dirty="0"/>
+              <a:t>(p&lt;</a:t>
+            </a:r>
+            <a:r>
+              <a:rPr lang="en-US" altLang="ko-KR" b="1"/>
+              <a:t>0.01)</a:t>
+            </a:r>
+            <a:endParaRPr lang="en-US" altLang="ko-KR" b="1" dirty="0"/>
+          </a:p>
+        </p:txBody>
+      </p:sp>
     </p:spTree>
     <p:extLst>
       <p:ext uri="{BB962C8B-B14F-4D97-AF65-F5344CB8AC3E}">
-        <p14:creationId xmlns:p14="http://schemas.microsoft.com/office/powerpoint/2010/main" val="1579866099"/>
+        <p14:creationId xmlns:p14="http://schemas.microsoft.com/office/powerpoint/2010/main" val="1329737543"/>
       </p:ext>
     </p:extLst>
   </p:cSld>
@@ -8052,6 +10989,1390 @@
 </file>
 
 <file path=ppt/slides/slide11.xml><?xml version="1.0" encoding="utf-8"?>
+<p:sld xmlns:a="http://schemas.openxmlformats.org/drawingml/2006/main" xmlns:r="http://schemas.openxmlformats.org/officeDocument/2006/relationships" xmlns:p="http://schemas.openxmlformats.org/presentationml/2006/main">
+  <p:cSld>
+    <p:spTree>
+      <p:nvGrpSpPr>
+        <p:cNvPr id="1" name=""/>
+        <p:cNvGrpSpPr/>
+        <p:nvPr/>
+      </p:nvGrpSpPr>
+      <p:grpSpPr>
+        <a:xfrm>
+          <a:off x="0" y="0"/>
+          <a:ext cx="0" cy="0"/>
+          <a:chOff x="0" y="0"/>
+          <a:chExt cx="0" cy="0"/>
+        </a:xfrm>
+      </p:grpSpPr>
+      <p:sp>
+        <p:nvSpPr>
+          <p:cNvPr id="2" name="Title 1"/>
+          <p:cNvSpPr>
+            <a:spLocks noGrp="1"/>
+          </p:cNvSpPr>
+          <p:nvPr>
+            <p:ph type="title"/>
+          </p:nvPr>
+        </p:nvSpPr>
+        <p:spPr/>
+        <p:txBody>
+          <a:bodyPr/>
+          <a:lstStyle/>
+          <a:p>
+            <a:r>
+              <a:rPr lang="en-US" altLang="ko-KR" dirty="0"/>
+              <a:t>Detailed progress</a:t>
+            </a:r>
+          </a:p>
+        </p:txBody>
+      </p:sp>
+      <p:sp>
+        <p:nvSpPr>
+          <p:cNvPr id="3" name="Content Placeholder 2"/>
+          <p:cNvSpPr>
+            <a:spLocks noGrp="1"/>
+          </p:cNvSpPr>
+          <p:nvPr>
+            <p:ph idx="1"/>
+          </p:nvPr>
+        </p:nvSpPr>
+        <p:spPr/>
+        <p:txBody>
+          <a:bodyPr/>
+          <a:lstStyle/>
+          <a:p>
+            <a:pPr>
+              <a:lnSpc>
+                <a:spcPct val="150000"/>
+              </a:lnSpc>
+            </a:pPr>
+            <a:r>
+              <a:rPr lang="ko-KR" altLang="en-US" b="1" dirty="0"/>
+              <a:t>일반적인 곡선 </a:t>
+            </a:r>
+            <a:r>
+              <a:rPr lang="en-US" altLang="ko-KR" b="1" dirty="0"/>
+              <a:t>Feature(14</a:t>
+            </a:r>
+            <a:r>
+              <a:rPr lang="ko-KR" altLang="en-US" b="1" dirty="0"/>
+              <a:t>개</a:t>
+            </a:r>
+            <a:r>
+              <a:rPr lang="en-US" altLang="ko-KR" b="1" dirty="0"/>
+              <a:t>) </a:t>
+            </a:r>
+            <a:r>
+              <a:rPr lang="ko-KR" altLang="en-US" b="1" dirty="0"/>
+              <a:t>추출하여 비교</a:t>
+            </a:r>
+            <a:endParaRPr lang="en-US" b="1" dirty="0"/>
+          </a:p>
+          <a:p>
+            <a:pPr lvl="1"/>
+            <a:r>
+              <a:rPr lang="en-US" dirty="0" err="1"/>
+              <a:t>분포</a:t>
+            </a:r>
+            <a:r>
+              <a:rPr lang="en-US" dirty="0"/>
+              <a:t>: std, skew, kurtosis</a:t>
+            </a:r>
+          </a:p>
+          <a:p>
+            <a:pPr lvl="1"/>
+            <a:r>
+              <a:rPr lang="en-US" dirty="0"/>
+              <a:t>피크·트로프: peak_pos, peak_val, trough_pos, trough_val, range</a:t>
+            </a:r>
+          </a:p>
+          <a:p>
+            <a:pPr lvl="1"/>
+            <a:r>
+              <a:rPr lang="en-US" dirty="0"/>
+              <a:t>형태·기울기: centroid, early_late_diff, slope_early, slope_late</a:t>
+            </a:r>
+          </a:p>
+          <a:p>
+            <a:pPr lvl="1"/>
+            <a:r>
+              <a:rPr lang="en-US" dirty="0"/>
+              <a:t>편차: total_abs_dev, frac_above_center</a:t>
+            </a:r>
+          </a:p>
+          <a:p>
+            <a:pPr>
+              <a:lnSpc>
+                <a:spcPct val="150000"/>
+              </a:lnSpc>
+            </a:pPr>
+            <a:r>
+              <a:rPr lang="en-US" b="1" dirty="0"/>
+              <a:t>FDR-q: 다중검정(84개) 보정 후 오탐 기대비율 — 유의 0/14</a:t>
+            </a:r>
+          </a:p>
+        </p:txBody>
+      </p:sp>
+      <p:graphicFrame>
+        <p:nvGraphicFramePr>
+          <p:cNvPr id="4" name="Table 3"/>
+          <p:cNvGraphicFramePr>
+            <a:graphicFrameLocks noGrp="1"/>
+          </p:cNvGraphicFramePr>
+          <p:nvPr/>
+        </p:nvGraphicFramePr>
+        <p:xfrm>
+          <a:off x="1312092" y="4070991"/>
+          <a:ext cx="9567816" cy="1400000"/>
+        </p:xfrm>
+        <a:graphic>
+          <a:graphicData uri="http://schemas.openxmlformats.org/drawingml/2006/table">
+            <a:tbl>
+              <a:tblPr firstRow="1" bandRow="1">
+                <a:tableStyleId>{9D7B26C5-4107-4FEC-AEDC-1716B250A1EF}</a:tableStyleId>
+              </a:tblPr>
+              <a:tblGrid>
+                <a:gridCol w="2391954">
+                  <a:extLst>
+                    <a:ext uri="{9D8B030D-6E8A-4147-A177-3AD203B41FA5}">
+                      <a16:colId xmlns:a16="http://schemas.microsoft.com/office/drawing/2014/main" val="20000"/>
+                    </a:ext>
+                  </a:extLst>
+                </a:gridCol>
+                <a:gridCol w="2391954">
+                  <a:extLst>
+                    <a:ext uri="{9D8B030D-6E8A-4147-A177-3AD203B41FA5}">
+                      <a16:colId xmlns:a16="http://schemas.microsoft.com/office/drawing/2014/main" val="20001"/>
+                    </a:ext>
+                  </a:extLst>
+                </a:gridCol>
+                <a:gridCol w="2391954">
+                  <a:extLst>
+                    <a:ext uri="{9D8B030D-6E8A-4147-A177-3AD203B41FA5}">
+                      <a16:colId xmlns:a16="http://schemas.microsoft.com/office/drawing/2014/main" val="20002"/>
+                    </a:ext>
+                  </a:extLst>
+                </a:gridCol>
+                <a:gridCol w="2391954">
+                  <a:extLst>
+                    <a:ext uri="{9D8B030D-6E8A-4147-A177-3AD203B41FA5}">
+                      <a16:colId xmlns:a16="http://schemas.microsoft.com/office/drawing/2014/main" val="20003"/>
+                    </a:ext>
+                  </a:extLst>
+                </a:gridCol>
+              </a:tblGrid>
+              <a:tr h="466666">
+                <a:tc>
+                  <a:txBody>
+                    <a:bodyPr/>
+                    <a:lstStyle/>
+                    <a:p>
+                      <a:pPr algn="ctr" latinLnBrk="1"/>
+                      <a:r>
+                        <a:rPr lang="ko-KR" altLang="en-US" sz="1200" b="0" dirty="0">
+                          <a:solidFill>
+                            <a:schemeClr val="tx1"/>
+                          </a:solidFill>
+                          <a:latin typeface="KoPub돋움체 Bold"/>
+                        </a:rPr>
+                        <a:t>코호트</a:t>
+                      </a:r>
+                    </a:p>
+                  </a:txBody>
+                  <a:tcPr anchor="ctr"/>
+                </a:tc>
+                <a:tc>
+                  <a:txBody>
+                    <a:bodyPr/>
+                    <a:lstStyle/>
+                    <a:p>
+                      <a:pPr algn="ctr" latinLnBrk="1"/>
+                      <a:r>
+                        <a:rPr lang="ko-KR" altLang="en-US" sz="1200" b="0" dirty="0">
+                          <a:solidFill>
+                            <a:schemeClr val="tx1"/>
+                          </a:solidFill>
+                          <a:latin typeface="KoPub돋움체 Bold"/>
+                        </a:rPr>
+                        <a:t>raw</a:t>
+                      </a:r>
+                    </a:p>
+                  </a:txBody>
+                  <a:tcPr anchor="ctr"/>
+                </a:tc>
+                <a:tc>
+                  <a:txBody>
+                    <a:bodyPr/>
+                    <a:lstStyle/>
+                    <a:p>
+                      <a:pPr algn="ctr" latinLnBrk="1"/>
+                      <a:r>
+                        <a:rPr lang="ko-KR" altLang="en-US" sz="1200" b="0" dirty="0">
+                          <a:solidFill>
+                            <a:schemeClr val="tx1"/>
+                          </a:solidFill>
+                          <a:latin typeface="KoPub돋움체 Bold"/>
+                        </a:rPr>
+                        <a:t>propensity-matched</a:t>
+                      </a:r>
+                    </a:p>
+                  </a:txBody>
+                  <a:tcPr anchor="ctr"/>
+                </a:tc>
+                <a:tc>
+                  <a:txBody>
+                    <a:bodyPr/>
+                    <a:lstStyle/>
+                    <a:p>
+                      <a:pPr algn="ctr" latinLnBrk="1"/>
+                      <a:r>
+                        <a:rPr lang="ko-KR" altLang="en-US" sz="1200" b="0" dirty="0">
+                          <a:solidFill>
+                            <a:schemeClr val="tx1"/>
+                          </a:solidFill>
+                          <a:latin typeface="KoPub돋움체 Bold"/>
+                        </a:rPr>
+                        <a:t>clinic-residualized</a:t>
+                      </a:r>
+                    </a:p>
+                  </a:txBody>
+                  <a:tcPr anchor="ctr"/>
+                </a:tc>
+                <a:extLst>
+                  <a:ext uri="{0D108BD9-81ED-4DB2-BD59-A6C34878D82A}">
+                    <a16:rowId xmlns:a16="http://schemas.microsoft.com/office/drawing/2014/main" val="10000"/>
+                  </a:ext>
+                </a:extLst>
+              </a:tr>
+              <a:tr h="466666">
+                <a:tc>
+                  <a:txBody>
+                    <a:bodyPr/>
+                    <a:lstStyle/>
+                    <a:p>
+                      <a:pPr algn="ctr" latinLnBrk="1"/>
+                      <a:r>
+                        <a:rPr lang="ko-KR" altLang="en-US" sz="1200" b="0" dirty="0">
+                          <a:solidFill>
+                            <a:schemeClr val="tx1"/>
+                          </a:solidFill>
+                          <a:latin typeface="KoPub돋움체 Medium"/>
+                        </a:rPr>
+                        <a:t>강남 (internal)</a:t>
+                      </a:r>
+                    </a:p>
+                  </a:txBody>
+                  <a:tcPr anchor="ctr">
+                    <a:solidFill>
+                      <a:schemeClr val="bg1"/>
+                    </a:solidFill>
+                  </a:tcPr>
+                </a:tc>
+                <a:tc>
+                  <a:txBody>
+                    <a:bodyPr/>
+                    <a:lstStyle/>
+                    <a:p>
+                      <a:pPr algn="ctr" latinLnBrk="1"/>
+                      <a:r>
+                        <a:rPr lang="ko-KR" altLang="en-US" sz="1200" b="0" dirty="0">
+                          <a:solidFill>
+                            <a:schemeClr val="tx1"/>
+                          </a:solidFill>
+                          <a:latin typeface="KoPub돋움체 Medium"/>
+                        </a:rPr>
+                        <a:t>0/14 (p&lt;.05: 2)</a:t>
+                      </a:r>
+                    </a:p>
+                  </a:txBody>
+                  <a:tcPr anchor="ctr">
+                    <a:solidFill>
+                      <a:schemeClr val="bg1"/>
+                    </a:solidFill>
+                  </a:tcPr>
+                </a:tc>
+                <a:tc>
+                  <a:txBody>
+                    <a:bodyPr/>
+                    <a:lstStyle/>
+                    <a:p>
+                      <a:pPr algn="ctr" latinLnBrk="1"/>
+                      <a:r>
+                        <a:rPr lang="ko-KR" altLang="en-US" sz="1200" b="0" dirty="0">
+                          <a:solidFill>
+                            <a:schemeClr val="tx1"/>
+                          </a:solidFill>
+                          <a:latin typeface="KoPub돋움체 Medium"/>
+                        </a:rPr>
+                        <a:t>0/14 (p&lt;.05: 0)</a:t>
+                      </a:r>
+                    </a:p>
+                  </a:txBody>
+                  <a:tcPr anchor="ctr">
+                    <a:solidFill>
+                      <a:schemeClr val="bg1"/>
+                    </a:solidFill>
+                  </a:tcPr>
+                </a:tc>
+                <a:tc>
+                  <a:txBody>
+                    <a:bodyPr/>
+                    <a:lstStyle/>
+                    <a:p>
+                      <a:pPr algn="ctr" latinLnBrk="1"/>
+                      <a:r>
+                        <a:rPr lang="ko-KR" altLang="en-US" sz="1200" b="0" dirty="0">
+                          <a:solidFill>
+                            <a:schemeClr val="tx1"/>
+                          </a:solidFill>
+                          <a:latin typeface="KoPub돋움체 Medium"/>
+                        </a:rPr>
+                        <a:t>0/14 (p&lt;.05: 2)</a:t>
+                      </a:r>
+                    </a:p>
+                  </a:txBody>
+                  <a:tcPr anchor="ctr">
+                    <a:solidFill>
+                      <a:schemeClr val="bg1"/>
+                    </a:solidFill>
+                  </a:tcPr>
+                </a:tc>
+                <a:extLst>
+                  <a:ext uri="{0D108BD9-81ED-4DB2-BD59-A6C34878D82A}">
+                    <a16:rowId xmlns:a16="http://schemas.microsoft.com/office/drawing/2014/main" val="10001"/>
+                  </a:ext>
+                </a:extLst>
+              </a:tr>
+              <a:tr h="466668">
+                <a:tc>
+                  <a:txBody>
+                    <a:bodyPr/>
+                    <a:lstStyle/>
+                    <a:p>
+                      <a:pPr algn="ctr" latinLnBrk="1"/>
+                      <a:r>
+                        <a:rPr lang="ko-KR" altLang="en-US" sz="1200" b="0" dirty="0">
+                          <a:solidFill>
+                            <a:schemeClr val="tx1"/>
+                          </a:solidFill>
+                          <a:latin typeface="KoPub돋움체 Medium"/>
+                        </a:rPr>
+                        <a:t>신촌 (external)</a:t>
+                      </a:r>
+                    </a:p>
+                  </a:txBody>
+                  <a:tcPr anchor="ctr">
+                    <a:solidFill>
+                      <a:schemeClr val="bg1"/>
+                    </a:solidFill>
+                  </a:tcPr>
+                </a:tc>
+                <a:tc>
+                  <a:txBody>
+                    <a:bodyPr/>
+                    <a:lstStyle/>
+                    <a:p>
+                      <a:pPr algn="ctr" latinLnBrk="1"/>
+                      <a:r>
+                        <a:rPr lang="ko-KR" altLang="en-US" sz="1200" b="0" dirty="0">
+                          <a:solidFill>
+                            <a:schemeClr val="tx1"/>
+                          </a:solidFill>
+                          <a:latin typeface="KoPub돋움체 Medium"/>
+                        </a:rPr>
+                        <a:t>0/14 (p&lt;.05: 2)</a:t>
+                      </a:r>
+                    </a:p>
+                  </a:txBody>
+                  <a:tcPr anchor="ctr">
+                    <a:solidFill>
+                      <a:schemeClr val="bg1"/>
+                    </a:solidFill>
+                  </a:tcPr>
+                </a:tc>
+                <a:tc>
+                  <a:txBody>
+                    <a:bodyPr/>
+                    <a:lstStyle/>
+                    <a:p>
+                      <a:pPr algn="ctr" latinLnBrk="1"/>
+                      <a:r>
+                        <a:rPr lang="ko-KR" altLang="en-US" sz="1200" b="0" dirty="0">
+                          <a:solidFill>
+                            <a:schemeClr val="tx1"/>
+                          </a:solidFill>
+                          <a:latin typeface="KoPub돋움체 Medium"/>
+                        </a:rPr>
+                        <a:t>0/14 (p&lt;.05: 2)</a:t>
+                      </a:r>
+                    </a:p>
+                  </a:txBody>
+                  <a:tcPr anchor="ctr">
+                    <a:solidFill>
+                      <a:schemeClr val="bg1"/>
+                    </a:solidFill>
+                  </a:tcPr>
+                </a:tc>
+                <a:tc>
+                  <a:txBody>
+                    <a:bodyPr/>
+                    <a:lstStyle/>
+                    <a:p>
+                      <a:pPr algn="ctr" latinLnBrk="1"/>
+                      <a:r>
+                        <a:rPr lang="ko-KR" altLang="en-US" sz="1200" b="0" dirty="0">
+                          <a:solidFill>
+                            <a:schemeClr val="tx1"/>
+                          </a:solidFill>
+                          <a:latin typeface="KoPub돋움체 Medium"/>
+                        </a:rPr>
+                        <a:t>0/14 (p&lt;.05: 3)</a:t>
+                      </a:r>
+                    </a:p>
+                  </a:txBody>
+                  <a:tcPr anchor="ctr">
+                    <a:solidFill>
+                      <a:schemeClr val="bg1"/>
+                    </a:solidFill>
+                  </a:tcPr>
+                </a:tc>
+                <a:extLst>
+                  <a:ext uri="{0D108BD9-81ED-4DB2-BD59-A6C34878D82A}">
+                    <a16:rowId xmlns:a16="http://schemas.microsoft.com/office/drawing/2014/main" val="10002"/>
+                  </a:ext>
+                </a:extLst>
+              </a:tr>
+            </a:tbl>
+          </a:graphicData>
+        </a:graphic>
+      </p:graphicFrame>
+    </p:spTree>
+    <p:extLst>
+      <p:ext uri="{BB962C8B-B14F-4D97-AF65-F5344CB8AC3E}">
+        <p14:creationId xmlns:p14="http://schemas.microsoft.com/office/powerpoint/2010/main" val="3193206441"/>
+      </p:ext>
+    </p:extLst>
+  </p:cSld>
+  <p:clrMapOvr>
+    <a:masterClrMapping/>
+  </p:clrMapOvr>
+</p:sld>
+</file>
+
+<file path=ppt/slides/slide12.xml><?xml version="1.0" encoding="utf-8"?>
+<p:sld xmlns:a="http://schemas.openxmlformats.org/drawingml/2006/main" xmlns:r="http://schemas.openxmlformats.org/officeDocument/2006/relationships" xmlns:p="http://schemas.openxmlformats.org/presentationml/2006/main">
+  <p:cSld>
+    <p:spTree>
+      <p:nvGrpSpPr>
+        <p:cNvPr id="1" name=""/>
+        <p:cNvGrpSpPr/>
+        <p:nvPr/>
+      </p:nvGrpSpPr>
+      <p:grpSpPr>
+        <a:xfrm>
+          <a:off x="0" y="0"/>
+          <a:ext cx="0" cy="0"/>
+          <a:chOff x="0" y="0"/>
+          <a:chExt cx="0" cy="0"/>
+        </a:xfrm>
+      </p:grpSpPr>
+      <p:sp>
+        <p:nvSpPr>
+          <p:cNvPr id="2" name="Title 1"/>
+          <p:cNvSpPr>
+            <a:spLocks noGrp="1"/>
+          </p:cNvSpPr>
+          <p:nvPr>
+            <p:ph type="title"/>
+          </p:nvPr>
+        </p:nvSpPr>
+        <p:spPr/>
+        <p:txBody>
+          <a:bodyPr/>
+          <a:lstStyle/>
+          <a:p>
+            <a:r>
+              <a:rPr lang="en-US" altLang="ko-KR" dirty="0"/>
+              <a:t>Detailed progress</a:t>
+            </a:r>
+          </a:p>
+        </p:txBody>
+      </p:sp>
+      <p:sp>
+        <p:nvSpPr>
+          <p:cNvPr id="3" name="Content Placeholder 2"/>
+          <p:cNvSpPr>
+            <a:spLocks noGrp="1"/>
+          </p:cNvSpPr>
+          <p:nvPr>
+            <p:ph idx="1"/>
+          </p:nvPr>
+        </p:nvSpPr>
+        <p:spPr/>
+        <p:txBody>
+          <a:bodyPr/>
+          <a:lstStyle/>
+          <a:p>
+            <a:pPr>
+              <a:lnSpc>
+                <a:spcPct val="150000"/>
+              </a:lnSpc>
+            </a:pPr>
+            <a:r>
+              <a:rPr lang="en-US" b="1" dirty="0"/>
+              <a:t>강남(internal): raw/matched/residualized 전부 14개 feature 유의 없음 (q&lt;0.05 0/14)</a:t>
+            </a:r>
+          </a:p>
+          <a:p>
+            <a:pPr>
+              <a:lnSpc>
+                <a:spcPct val="150000"/>
+              </a:lnSpc>
+            </a:pPr>
+            <a:r>
+              <a:rPr lang="en-US" b="1" dirty="0"/>
+              <a:t>가로축 -log10(p) — 점선(p=0.05) 오른쪽으로 넘어가야 유의, 왼쪽은 비유의</a:t>
+            </a:r>
+          </a:p>
+        </p:txBody>
+      </p:sp>
+      <p:pic>
+        <p:nvPicPr>
+          <p:cNvPr id="4" name="Picture 3" descr="20_feature_pvalue_comparison.png"/>
+          <p:cNvPicPr>
+            <a:picLocks noChangeAspect="1"/>
+          </p:cNvPicPr>
+          <p:nvPr/>
+        </p:nvPicPr>
+        <p:blipFill>
+          <a:blip r:embed="rId3"/>
+          <a:stretch>
+            <a:fillRect/>
+          </a:stretch>
+        </p:blipFill>
+        <p:spPr>
+          <a:xfrm>
+            <a:off x="1066800" y="2450000"/>
+            <a:ext cx="10058400" cy="3088105"/>
+          </a:xfrm>
+          <a:prstGeom prst="rect">
+            <a:avLst/>
+          </a:prstGeom>
+        </p:spPr>
+      </p:pic>
+    </p:spTree>
+    <p:extLst>
+      <p:ext uri="{BB962C8B-B14F-4D97-AF65-F5344CB8AC3E}">
+        <p14:creationId xmlns:p14="http://schemas.microsoft.com/office/powerpoint/2010/main" val="2518625841"/>
+      </p:ext>
+    </p:extLst>
+  </p:cSld>
+  <p:clrMapOvr>
+    <a:masterClrMapping/>
+  </p:clrMapOvr>
+</p:sld>
+</file>
+
+<file path=ppt/slides/slide13.xml><?xml version="1.0" encoding="utf-8"?>
+<p:sld xmlns:a="http://schemas.openxmlformats.org/drawingml/2006/main" xmlns:r="http://schemas.openxmlformats.org/officeDocument/2006/relationships" xmlns:p="http://schemas.openxmlformats.org/presentationml/2006/main">
+  <p:cSld>
+    <p:spTree>
+      <p:nvGrpSpPr>
+        <p:cNvPr id="1" name=""/>
+        <p:cNvGrpSpPr/>
+        <p:nvPr/>
+      </p:nvGrpSpPr>
+      <p:grpSpPr>
+        <a:xfrm>
+          <a:off x="0" y="0"/>
+          <a:ext cx="0" cy="0"/>
+          <a:chOff x="0" y="0"/>
+          <a:chExt cx="0" cy="0"/>
+        </a:xfrm>
+      </p:grpSpPr>
+      <p:sp>
+        <p:nvSpPr>
+          <p:cNvPr id="2" name="Title 1"/>
+          <p:cNvSpPr>
+            <a:spLocks noGrp="1"/>
+          </p:cNvSpPr>
+          <p:nvPr>
+            <p:ph type="title"/>
+          </p:nvPr>
+        </p:nvSpPr>
+        <p:spPr/>
+        <p:txBody>
+          <a:bodyPr/>
+          <a:lstStyle/>
+          <a:p>
+            <a:r>
+              <a:rPr lang="en-US" altLang="ko-KR" dirty="0"/>
+              <a:t>Detailed progress</a:t>
+            </a:r>
+          </a:p>
+        </p:txBody>
+      </p:sp>
+      <p:sp>
+        <p:nvSpPr>
+          <p:cNvPr id="3" name="Content Placeholder 2"/>
+          <p:cNvSpPr>
+            <a:spLocks noGrp="1"/>
+          </p:cNvSpPr>
+          <p:nvPr>
+            <p:ph idx="1"/>
+          </p:nvPr>
+        </p:nvSpPr>
+        <p:spPr/>
+        <p:txBody>
+          <a:bodyPr/>
+          <a:lstStyle/>
+          <a:p>
+            <a:pPr>
+              <a:lnSpc>
+                <a:spcPct val="150000"/>
+              </a:lnSpc>
+            </a:pPr>
+            <a:r>
+              <a:rPr lang="en-US" b="1" dirty="0"/>
+              <a:t>신촌(external): raw/matched/residualized 전부 14개 feature 유의 없음 (q&lt;0.05 0/14)</a:t>
+            </a:r>
+          </a:p>
+          <a:p>
+            <a:pPr>
+              <a:lnSpc>
+                <a:spcPct val="150000"/>
+              </a:lnSpc>
+            </a:pPr>
+            <a:r>
+              <a:rPr lang="en-US" b="1" dirty="0"/>
+              <a:t>가로축 -log10(p) — 점선(p=0.05) 오른쪽으로 넘어가야 유의, 왼쪽은 비유의</a:t>
+            </a:r>
+          </a:p>
+        </p:txBody>
+      </p:sp>
+      <p:pic>
+        <p:nvPicPr>
+          <p:cNvPr id="4" name="Picture 3" descr="20_feature_pvalue_comparison.png"/>
+          <p:cNvPicPr>
+            <a:picLocks noChangeAspect="1"/>
+          </p:cNvPicPr>
+          <p:nvPr/>
+        </p:nvPicPr>
+        <p:blipFill>
+          <a:blip r:embed="rId3"/>
+          <a:stretch>
+            <a:fillRect/>
+          </a:stretch>
+        </p:blipFill>
+        <p:spPr>
+          <a:xfrm>
+            <a:off x="1066800" y="2450000"/>
+            <a:ext cx="10058400" cy="3088105"/>
+          </a:xfrm>
+          <a:prstGeom prst="rect">
+            <a:avLst/>
+          </a:prstGeom>
+        </p:spPr>
+      </p:pic>
+    </p:spTree>
+    <p:extLst>
+      <p:ext uri="{BB962C8B-B14F-4D97-AF65-F5344CB8AC3E}">
+        <p14:creationId xmlns:p14="http://schemas.microsoft.com/office/powerpoint/2010/main" val="4183399897"/>
+      </p:ext>
+    </p:extLst>
+  </p:cSld>
+  <p:clrMapOvr>
+    <a:masterClrMapping/>
+  </p:clrMapOvr>
+</p:sld>
+</file>
+
+<file path=ppt/slides/slide14.xml><?xml version="1.0" encoding="utf-8"?>
+<p:sld xmlns:a="http://schemas.openxmlformats.org/drawingml/2006/main" xmlns:r="http://schemas.openxmlformats.org/officeDocument/2006/relationships" xmlns:p="http://schemas.openxmlformats.org/presentationml/2006/main">
+  <p:cSld>
+    <p:spTree>
+      <p:nvGrpSpPr>
+        <p:cNvPr id="1" name=""/>
+        <p:cNvGrpSpPr/>
+        <p:nvPr/>
+      </p:nvGrpSpPr>
+      <p:grpSpPr>
+        <a:xfrm>
+          <a:off x="0" y="0"/>
+          <a:ext cx="0" cy="0"/>
+          <a:chOff x="0" y="0"/>
+          <a:chExt cx="0" cy="0"/>
+        </a:xfrm>
+      </p:grpSpPr>
+      <p:sp>
+        <p:nvSpPr>
+          <p:cNvPr id="2" name="Title 1"/>
+          <p:cNvSpPr>
+            <a:spLocks noGrp="1"/>
+          </p:cNvSpPr>
+          <p:nvPr>
+            <p:ph type="title"/>
+          </p:nvPr>
+        </p:nvSpPr>
+        <p:spPr/>
+        <p:txBody>
+          <a:bodyPr/>
+          <a:lstStyle/>
+          <a:p>
+            <a:r>
+              <a:rPr lang="en-US" altLang="ko-KR" dirty="0"/>
+              <a:t>Detailed progress</a:t>
+            </a:r>
+          </a:p>
+        </p:txBody>
+      </p:sp>
+      <p:sp>
+        <p:nvSpPr>
+          <p:cNvPr id="3" name="Content Placeholder 2"/>
+          <p:cNvSpPr>
+            <a:spLocks noGrp="1"/>
+          </p:cNvSpPr>
+          <p:nvPr>
+            <p:ph idx="1"/>
+          </p:nvPr>
+        </p:nvSpPr>
+        <p:spPr/>
+        <p:txBody>
+          <a:bodyPr/>
+          <a:lstStyle/>
+          <a:p>
+            <a:pPr>
+              <a:lnSpc>
+                <a:spcPct val="150000"/>
+              </a:lnSpc>
+            </a:pPr>
+            <a:r>
+              <a:rPr lang="en-US" b="1" dirty="0"/>
+              <a:t>AEC-128 곡선 PCA: PC1-PC5 (raw 누적분산 96.8%, residualized 94.7%)</a:t>
+            </a:r>
+          </a:p>
+          <a:p>
+            <a:pPr>
+              <a:lnSpc>
+                <a:spcPct val="150000"/>
+              </a:lnSpc>
+            </a:pPr>
+            <a:r>
+              <a:rPr lang="en-US" b="1" dirty="0"/>
+              <a:t>internal(n=1090) 적합, external frozen — 잔차화 회귀와 동일 관례</a:t>
+            </a:r>
+          </a:p>
+          <a:p>
+            <a:pPr>
+              <a:lnSpc>
+                <a:spcPct val="150000"/>
+              </a:lnSpc>
+            </a:pPr>
+            <a:r>
+              <a:rPr lang="en-US" b="1" dirty="0"/>
+              <a:t>raw / propensity-matched / clinic-residualized 3방법 × 강남·신촌 × PC1-5</a:t>
+            </a:r>
+          </a:p>
+          <a:p>
+            <a:pPr>
+              <a:lnSpc>
+                <a:spcPct val="150000"/>
+              </a:lnSpc>
+            </a:pPr>
+            <a:r>
+              <a:rPr lang="en-US" b="1" dirty="0"/>
+              <a:t>강남: 15개 PC-검정 전부 비유의 (q&lt;0.05 0/15)</a:t>
+            </a:r>
+          </a:p>
+          <a:p>
+            <a:pPr>
+              <a:lnSpc>
+                <a:spcPct val="150000"/>
+              </a:lnSpc>
+            </a:pPr>
+            <a:r>
+              <a:rPr lang="en-US" b="1" dirty="0"/>
+              <a:t>신촌: raw/matched 비유의, residualized PC1만 경계선 유의 (q=0.045)</a:t>
+            </a:r>
+          </a:p>
+        </p:txBody>
+      </p:sp>
+      <p:graphicFrame>
+        <p:nvGraphicFramePr>
+          <p:cNvPr id="4" name="Table 3"/>
+          <p:cNvGraphicFramePr>
+            <a:graphicFrameLocks noGrp="1"/>
+          </p:cNvGraphicFramePr>
+          <p:nvPr/>
+        </p:nvGraphicFramePr>
+        <p:xfrm>
+          <a:off x="1312092" y="4113487"/>
+          <a:ext cx="9567816" cy="1400000"/>
+        </p:xfrm>
+        <a:graphic>
+          <a:graphicData uri="http://schemas.openxmlformats.org/drawingml/2006/table">
+            <a:tbl>
+              <a:tblPr firstRow="1" bandRow="1">
+                <a:tableStyleId>{9D7B26C5-4107-4FEC-AEDC-1716B250A1EF}</a:tableStyleId>
+              </a:tblPr>
+              <a:tblGrid>
+                <a:gridCol w="2391954">
+                  <a:extLst>
+                    <a:ext uri="{9D8B030D-6E8A-4147-A177-3AD203B41FA5}">
+                      <a16:colId xmlns:a16="http://schemas.microsoft.com/office/drawing/2014/main" val="20000"/>
+                    </a:ext>
+                  </a:extLst>
+                </a:gridCol>
+                <a:gridCol w="2391954">
+                  <a:extLst>
+                    <a:ext uri="{9D8B030D-6E8A-4147-A177-3AD203B41FA5}">
+                      <a16:colId xmlns:a16="http://schemas.microsoft.com/office/drawing/2014/main" val="20001"/>
+                    </a:ext>
+                  </a:extLst>
+                </a:gridCol>
+                <a:gridCol w="2391954">
+                  <a:extLst>
+                    <a:ext uri="{9D8B030D-6E8A-4147-A177-3AD203B41FA5}">
+                      <a16:colId xmlns:a16="http://schemas.microsoft.com/office/drawing/2014/main" val="20002"/>
+                    </a:ext>
+                  </a:extLst>
+                </a:gridCol>
+                <a:gridCol w="2391954">
+                  <a:extLst>
+                    <a:ext uri="{9D8B030D-6E8A-4147-A177-3AD203B41FA5}">
+                      <a16:colId xmlns:a16="http://schemas.microsoft.com/office/drawing/2014/main" val="20003"/>
+                    </a:ext>
+                  </a:extLst>
+                </a:gridCol>
+              </a:tblGrid>
+              <a:tr h="466666">
+                <a:tc>
+                  <a:txBody>
+                    <a:bodyPr/>
+                    <a:lstStyle/>
+                    <a:p>
+                      <a:pPr algn="ctr" latinLnBrk="1"/>
+                      <a:r>
+                        <a:rPr lang="ko-KR" altLang="en-US" sz="1200" b="0" dirty="0">
+                          <a:solidFill>
+                            <a:schemeClr val="tx1"/>
+                          </a:solidFill>
+                          <a:latin typeface="KoPub돋움체 Bold"/>
+                        </a:rPr>
+                        <a:t>코호트</a:t>
+                      </a:r>
+                    </a:p>
+                  </a:txBody>
+                  <a:tcPr anchor="ctr"/>
+                </a:tc>
+                <a:tc>
+                  <a:txBody>
+                    <a:bodyPr/>
+                    <a:lstStyle/>
+                    <a:p>
+                      <a:pPr algn="ctr" latinLnBrk="1"/>
+                      <a:r>
+                        <a:rPr lang="ko-KR" altLang="en-US" sz="1200" b="0" dirty="0">
+                          <a:solidFill>
+                            <a:schemeClr val="tx1"/>
+                          </a:solidFill>
+                          <a:latin typeface="KoPub돋움체 Bold"/>
+                        </a:rPr>
+                        <a:t>raw</a:t>
+                      </a:r>
+                    </a:p>
+                  </a:txBody>
+                  <a:tcPr anchor="ctr"/>
+                </a:tc>
+                <a:tc>
+                  <a:txBody>
+                    <a:bodyPr/>
+                    <a:lstStyle/>
+                    <a:p>
+                      <a:pPr algn="ctr" latinLnBrk="1"/>
+                      <a:r>
+                        <a:rPr lang="ko-KR" altLang="en-US" sz="1200" b="0" dirty="0">
+                          <a:solidFill>
+                            <a:schemeClr val="tx1"/>
+                          </a:solidFill>
+                          <a:latin typeface="KoPub돋움체 Bold"/>
+                        </a:rPr>
+                        <a:t>propensity-matched</a:t>
+                      </a:r>
+                    </a:p>
+                  </a:txBody>
+                  <a:tcPr anchor="ctr"/>
+                </a:tc>
+                <a:tc>
+                  <a:txBody>
+                    <a:bodyPr/>
+                    <a:lstStyle/>
+                    <a:p>
+                      <a:pPr algn="ctr" latinLnBrk="1"/>
+                      <a:r>
+                        <a:rPr lang="ko-KR" altLang="en-US" sz="1200" b="0" dirty="0">
+                          <a:solidFill>
+                            <a:schemeClr val="tx1"/>
+                          </a:solidFill>
+                          <a:latin typeface="KoPub돋움체 Bold"/>
+                        </a:rPr>
+                        <a:t>clinic-residualized</a:t>
+                      </a:r>
+                    </a:p>
+                  </a:txBody>
+                  <a:tcPr anchor="ctr"/>
+                </a:tc>
+                <a:extLst>
+                  <a:ext uri="{0D108BD9-81ED-4DB2-BD59-A6C34878D82A}">
+                    <a16:rowId xmlns:a16="http://schemas.microsoft.com/office/drawing/2014/main" val="10000"/>
+                  </a:ext>
+                </a:extLst>
+              </a:tr>
+              <a:tr h="466666">
+                <a:tc>
+                  <a:txBody>
+                    <a:bodyPr/>
+                    <a:lstStyle/>
+                    <a:p>
+                      <a:pPr algn="ctr" latinLnBrk="1"/>
+                      <a:r>
+                        <a:rPr lang="ko-KR" altLang="en-US" sz="1200" b="0" dirty="0">
+                          <a:solidFill>
+                            <a:schemeClr val="tx1"/>
+                          </a:solidFill>
+                          <a:latin typeface="KoPub돋움체 Medium"/>
+                        </a:rPr>
+                        <a:t>강남 (internal)</a:t>
+                      </a:r>
+                    </a:p>
+                  </a:txBody>
+                  <a:tcPr anchor="ctr">
+                    <a:solidFill>
+                      <a:schemeClr val="bg1"/>
+                    </a:solidFill>
+                  </a:tcPr>
+                </a:tc>
+                <a:tc>
+                  <a:txBody>
+                    <a:bodyPr/>
+                    <a:lstStyle/>
+                    <a:p>
+                      <a:pPr algn="ctr" latinLnBrk="1"/>
+                      <a:r>
+                        <a:rPr lang="ko-KR" altLang="en-US" sz="1200" b="0" dirty="0">
+                          <a:solidFill>
+                            <a:schemeClr val="tx1"/>
+                          </a:solidFill>
+                          <a:latin typeface="KoPub돋움체 Medium"/>
+                        </a:rPr>
+                        <a:t>0/5</a:t>
+                      </a:r>
+                    </a:p>
+                  </a:txBody>
+                  <a:tcPr anchor="ctr">
+                    <a:solidFill>
+                      <a:schemeClr val="bg1"/>
+                    </a:solidFill>
+                  </a:tcPr>
+                </a:tc>
+                <a:tc>
+                  <a:txBody>
+                    <a:bodyPr/>
+                    <a:lstStyle/>
+                    <a:p>
+                      <a:pPr algn="ctr" latinLnBrk="1"/>
+                      <a:r>
+                        <a:rPr lang="ko-KR" altLang="en-US" sz="1200" b="0" dirty="0">
+                          <a:solidFill>
+                            <a:schemeClr val="tx1"/>
+                          </a:solidFill>
+                          <a:latin typeface="KoPub돋움체 Medium"/>
+                        </a:rPr>
+                        <a:t>0/5</a:t>
+                      </a:r>
+                    </a:p>
+                  </a:txBody>
+                  <a:tcPr anchor="ctr">
+                    <a:solidFill>
+                      <a:schemeClr val="bg1"/>
+                    </a:solidFill>
+                  </a:tcPr>
+                </a:tc>
+                <a:tc>
+                  <a:txBody>
+                    <a:bodyPr/>
+                    <a:lstStyle/>
+                    <a:p>
+                      <a:pPr algn="ctr" latinLnBrk="1"/>
+                      <a:r>
+                        <a:rPr lang="ko-KR" altLang="en-US" sz="1200" b="0" dirty="0">
+                          <a:solidFill>
+                            <a:schemeClr val="tx1"/>
+                          </a:solidFill>
+                          <a:latin typeface="KoPub돋움체 Medium"/>
+                        </a:rPr>
+                        <a:t>0/5</a:t>
+                      </a:r>
+                    </a:p>
+                  </a:txBody>
+                  <a:tcPr anchor="ctr">
+                    <a:solidFill>
+                      <a:schemeClr val="bg1"/>
+                    </a:solidFill>
+                  </a:tcPr>
+                </a:tc>
+                <a:extLst>
+                  <a:ext uri="{0D108BD9-81ED-4DB2-BD59-A6C34878D82A}">
+                    <a16:rowId xmlns:a16="http://schemas.microsoft.com/office/drawing/2014/main" val="10001"/>
+                  </a:ext>
+                </a:extLst>
+              </a:tr>
+              <a:tr h="466668">
+                <a:tc>
+                  <a:txBody>
+                    <a:bodyPr/>
+                    <a:lstStyle/>
+                    <a:p>
+                      <a:pPr algn="ctr" latinLnBrk="1"/>
+                      <a:r>
+                        <a:rPr lang="ko-KR" altLang="en-US" sz="1200" b="0" dirty="0">
+                          <a:solidFill>
+                            <a:schemeClr val="tx1"/>
+                          </a:solidFill>
+                          <a:latin typeface="KoPub돋움체 Medium"/>
+                        </a:rPr>
+                        <a:t>신촌 (external)</a:t>
+                      </a:r>
+                    </a:p>
+                  </a:txBody>
+                  <a:tcPr anchor="ctr">
+                    <a:solidFill>
+                      <a:schemeClr val="bg1"/>
+                    </a:solidFill>
+                  </a:tcPr>
+                </a:tc>
+                <a:tc>
+                  <a:txBody>
+                    <a:bodyPr/>
+                    <a:lstStyle/>
+                    <a:p>
+                      <a:pPr algn="ctr" latinLnBrk="1"/>
+                      <a:r>
+                        <a:rPr lang="ko-KR" altLang="en-US" sz="1200" b="0" dirty="0">
+                          <a:solidFill>
+                            <a:schemeClr val="tx1"/>
+                          </a:solidFill>
+                          <a:latin typeface="KoPub돋움체 Medium"/>
+                        </a:rPr>
+                        <a:t>0/5</a:t>
+                      </a:r>
+                    </a:p>
+                  </a:txBody>
+                  <a:tcPr anchor="ctr">
+                    <a:solidFill>
+                      <a:schemeClr val="bg1"/>
+                    </a:solidFill>
+                  </a:tcPr>
+                </a:tc>
+                <a:tc>
+                  <a:txBody>
+                    <a:bodyPr/>
+                    <a:lstStyle/>
+                    <a:p>
+                      <a:pPr algn="ctr" latinLnBrk="1"/>
+                      <a:r>
+                        <a:rPr lang="ko-KR" altLang="en-US" sz="1200" b="0" dirty="0">
+                          <a:solidFill>
+                            <a:schemeClr val="tx1"/>
+                          </a:solidFill>
+                          <a:latin typeface="KoPub돋움체 Medium"/>
+                        </a:rPr>
+                        <a:t>0/5</a:t>
+                      </a:r>
+                    </a:p>
+                  </a:txBody>
+                  <a:tcPr anchor="ctr">
+                    <a:solidFill>
+                      <a:schemeClr val="bg1"/>
+                    </a:solidFill>
+                  </a:tcPr>
+                </a:tc>
+                <a:tc>
+                  <a:txBody>
+                    <a:bodyPr/>
+                    <a:lstStyle/>
+                    <a:p>
+                      <a:pPr algn="ctr" latinLnBrk="1"/>
+                      <a:r>
+                        <a:rPr lang="ko-KR" altLang="en-US" sz="1200" b="0" dirty="0">
+                          <a:solidFill>
+                            <a:schemeClr val="tx1"/>
+                          </a:solidFill>
+                          <a:latin typeface="KoPub돋움체 Medium"/>
+                        </a:rPr>
+                        <a:t>1/5 (PC1, q=.045)</a:t>
+                      </a:r>
+                    </a:p>
+                  </a:txBody>
+                  <a:tcPr anchor="ctr">
+                    <a:solidFill>
+                      <a:schemeClr val="bg1"/>
+                    </a:solidFill>
+                  </a:tcPr>
+                </a:tc>
+                <a:extLst>
+                  <a:ext uri="{0D108BD9-81ED-4DB2-BD59-A6C34878D82A}">
+                    <a16:rowId xmlns:a16="http://schemas.microsoft.com/office/drawing/2014/main" val="10002"/>
+                  </a:ext>
+                </a:extLst>
+              </a:tr>
+            </a:tbl>
+          </a:graphicData>
+        </a:graphic>
+      </p:graphicFrame>
+    </p:spTree>
+    <p:extLst>
+      <p:ext uri="{BB962C8B-B14F-4D97-AF65-F5344CB8AC3E}">
+        <p14:creationId xmlns:p14="http://schemas.microsoft.com/office/powerpoint/2010/main" val="4067884130"/>
+      </p:ext>
+    </p:extLst>
+  </p:cSld>
+  <p:clrMapOvr>
+    <a:masterClrMapping/>
+  </p:clrMapOvr>
+</p:sld>
+</file>
+
+<file path=ppt/slides/slide15.xml><?xml version="1.0" encoding="utf-8"?>
+<p:sld xmlns:a="http://schemas.openxmlformats.org/drawingml/2006/main" xmlns:r="http://schemas.openxmlformats.org/officeDocument/2006/relationships" xmlns:p="http://schemas.openxmlformats.org/presentationml/2006/main">
+  <p:cSld>
+    <p:spTree>
+      <p:nvGrpSpPr>
+        <p:cNvPr id="1" name=""/>
+        <p:cNvGrpSpPr/>
+        <p:nvPr/>
+      </p:nvGrpSpPr>
+      <p:grpSpPr>
+        <a:xfrm>
+          <a:off x="0" y="0"/>
+          <a:ext cx="0" cy="0"/>
+          <a:chOff x="0" y="0"/>
+          <a:chExt cx="0" cy="0"/>
+        </a:xfrm>
+      </p:grpSpPr>
+      <p:sp>
+        <p:nvSpPr>
+          <p:cNvPr id="2" name="Title 1"/>
+          <p:cNvSpPr>
+            <a:spLocks noGrp="1"/>
+          </p:cNvSpPr>
+          <p:nvPr>
+            <p:ph type="title"/>
+          </p:nvPr>
+        </p:nvSpPr>
+        <p:spPr/>
+        <p:txBody>
+          <a:bodyPr/>
+          <a:lstStyle/>
+          <a:p>
+            <a:r>
+              <a:rPr lang="en-US" altLang="ko-KR" dirty="0"/>
+              <a:t>Detailed progress</a:t>
+            </a:r>
+          </a:p>
+        </p:txBody>
+      </p:sp>
+      <p:sp>
+        <p:nvSpPr>
+          <p:cNvPr id="3" name="Content Placeholder 2"/>
+          <p:cNvSpPr>
+            <a:spLocks noGrp="1"/>
+          </p:cNvSpPr>
+          <p:nvPr>
+            <p:ph idx="1"/>
+          </p:nvPr>
+        </p:nvSpPr>
+        <p:spPr/>
+        <p:txBody>
+          <a:bodyPr/>
+          <a:lstStyle/>
+          <a:p>
+            <a:pPr>
+              <a:lnSpc>
+                <a:spcPct val="150000"/>
+              </a:lnSpc>
+            </a:pPr>
+            <a:r>
+              <a:rPr lang="en-US" b="1" dirty="0"/>
+              <a:t>강남(internal): PC1-5 raw/matched/residualized 전부 유의 없음 (q&lt;0.05 0/15)</a:t>
+            </a:r>
+          </a:p>
+          <a:p>
+            <a:pPr>
+              <a:lnSpc>
+                <a:spcPct val="150000"/>
+              </a:lnSpc>
+            </a:pPr>
+            <a:r>
+              <a:rPr lang="en-US" b="1" dirty="0"/>
+              <a:t>가로축 -log10(p) — 점선(p=0.05) 오른쪽으로 넘어가야 유의, 왼쪽은 비유의</a:t>
+            </a:r>
+          </a:p>
+        </p:txBody>
+      </p:sp>
+      <p:pic>
+        <p:nvPicPr>
+          <p:cNvPr id="4" name="Picture 3" descr="23_pca_pvalue_comparison.png"/>
+          <p:cNvPicPr>
+            <a:picLocks noChangeAspect="1"/>
+          </p:cNvPicPr>
+          <p:nvPr/>
+        </p:nvPicPr>
+        <p:blipFill>
+          <a:blip r:embed="rId3"/>
+          <a:stretch>
+            <a:fillRect/>
+          </a:stretch>
+        </p:blipFill>
+        <p:spPr>
+          <a:xfrm>
+            <a:off x="1066800" y="2450000"/>
+            <a:ext cx="10058400" cy="3088105"/>
+          </a:xfrm>
+          <a:prstGeom prst="rect">
+            <a:avLst/>
+          </a:prstGeom>
+        </p:spPr>
+      </p:pic>
+    </p:spTree>
+    <p:extLst>
+      <p:ext uri="{BB962C8B-B14F-4D97-AF65-F5344CB8AC3E}">
+        <p14:creationId xmlns:p14="http://schemas.microsoft.com/office/powerpoint/2010/main" val="1643199595"/>
+      </p:ext>
+    </p:extLst>
+  </p:cSld>
+  <p:clrMapOvr>
+    <a:masterClrMapping/>
+  </p:clrMapOvr>
+</p:sld>
+</file>
+
+<file path=ppt/slides/slide16.xml><?xml version="1.0" encoding="utf-8"?>
+<p:sld xmlns:a="http://schemas.openxmlformats.org/drawingml/2006/main" xmlns:r="http://schemas.openxmlformats.org/officeDocument/2006/relationships" xmlns:p="http://schemas.openxmlformats.org/presentationml/2006/main">
+  <p:cSld>
+    <p:spTree>
+      <p:nvGrpSpPr>
+        <p:cNvPr id="1" name=""/>
+        <p:cNvGrpSpPr/>
+        <p:nvPr/>
+      </p:nvGrpSpPr>
+      <p:grpSpPr>
+        <a:xfrm>
+          <a:off x="0" y="0"/>
+          <a:ext cx="0" cy="0"/>
+          <a:chOff x="0" y="0"/>
+          <a:chExt cx="0" cy="0"/>
+        </a:xfrm>
+      </p:grpSpPr>
+      <p:sp>
+        <p:nvSpPr>
+          <p:cNvPr id="2" name="Title 1"/>
+          <p:cNvSpPr>
+            <a:spLocks noGrp="1"/>
+          </p:cNvSpPr>
+          <p:nvPr>
+            <p:ph type="title"/>
+          </p:nvPr>
+        </p:nvSpPr>
+        <p:spPr/>
+        <p:txBody>
+          <a:bodyPr/>
+          <a:lstStyle/>
+          <a:p>
+            <a:r>
+              <a:rPr lang="en-US" altLang="ko-KR" dirty="0"/>
+              <a:t>Detailed progress</a:t>
+            </a:r>
+          </a:p>
+        </p:txBody>
+      </p:sp>
+      <p:sp>
+        <p:nvSpPr>
+          <p:cNvPr id="3" name="Content Placeholder 2"/>
+          <p:cNvSpPr>
+            <a:spLocks noGrp="1"/>
+          </p:cNvSpPr>
+          <p:nvPr>
+            <p:ph idx="1"/>
+          </p:nvPr>
+        </p:nvSpPr>
+        <p:spPr/>
+        <p:txBody>
+          <a:bodyPr/>
+          <a:lstStyle/>
+          <a:p>
+            <a:pPr>
+              <a:lnSpc>
+                <a:spcPct val="150000"/>
+              </a:lnSpc>
+            </a:pPr>
+            <a:r>
+              <a:rPr lang="en-US" b="1" dirty="0"/>
+              <a:t>신촌(external): raw/matched 유의 없음, residualized PC1만 경계선 유의 (q=0.045)</a:t>
+            </a:r>
+          </a:p>
+          <a:p>
+            <a:pPr>
+              <a:lnSpc>
+                <a:spcPct val="150000"/>
+              </a:lnSpc>
+            </a:pPr>
+            <a:r>
+              <a:rPr lang="en-US" b="1" dirty="0"/>
+              <a:t>가로축 -log10(p) — 점선(p=0.05) 오른쪽으로 넘어가야 유의, 왼쪽은 비유의</a:t>
+            </a:r>
+          </a:p>
+        </p:txBody>
+      </p:sp>
+      <p:pic>
+        <p:nvPicPr>
+          <p:cNvPr id="4" name="Picture 3" descr="23_pca_pvalue_comparison.png"/>
+          <p:cNvPicPr>
+            <a:picLocks noChangeAspect="1"/>
+          </p:cNvPicPr>
+          <p:nvPr/>
+        </p:nvPicPr>
+        <p:blipFill>
+          <a:blip r:embed="rId3"/>
+          <a:stretch>
+            <a:fillRect/>
+          </a:stretch>
+        </p:blipFill>
+        <p:spPr>
+          <a:xfrm>
+            <a:off x="1066800" y="2450000"/>
+            <a:ext cx="10058400" cy="3088105"/>
+          </a:xfrm>
+          <a:prstGeom prst="rect">
+            <a:avLst/>
+          </a:prstGeom>
+        </p:spPr>
+      </p:pic>
+    </p:spTree>
+    <p:extLst>
+      <p:ext uri="{BB962C8B-B14F-4D97-AF65-F5344CB8AC3E}">
+        <p14:creationId xmlns:p14="http://schemas.microsoft.com/office/powerpoint/2010/main" val="2194210721"/>
+      </p:ext>
+    </p:extLst>
+  </p:cSld>
+  <p:clrMapOvr>
+    <a:masterClrMapping/>
+  </p:clrMapOvr>
+</p:sld>
+</file>
+
+<file path=ppt/slides/slide17.xml><?xml version="1.0" encoding="utf-8"?>
 <p:sld xmlns:a="http://schemas.openxmlformats.org/drawingml/2006/main" xmlns:r="http://schemas.openxmlformats.org/officeDocument/2006/relationships" xmlns:p="http://schemas.openxmlformats.org/presentationml/2006/main">
   <p:cSld>
     <p:spTree>
@@ -14208,13 +18529,7 @@
   <p:cSld>
     <p:spTree>
       <p:nvGrpSpPr>
-        <p:cNvPr id="1" name="">
-          <a:extLst>
-            <a:ext uri="{FF2B5EF4-FFF2-40B4-BE49-F238E27FC236}">
-              <a16:creationId xmlns:a16="http://schemas.microsoft.com/office/drawing/2014/main" id="{6A773A45-53DB-1D03-067B-82EF4C5C0722}"/>
-            </a:ext>
-          </a:extLst>
-        </p:cNvPr>
+        <p:cNvPr id="1" name=""/>
         <p:cNvGrpSpPr/>
         <p:nvPr/>
       </p:nvGrpSpPr>
@@ -14228,13 +18543,7 @@
       </p:grpSpPr>
       <p:sp>
         <p:nvSpPr>
-          <p:cNvPr id="2" name="Title 1">
-            <a:extLst>
-              <a:ext uri="{FF2B5EF4-FFF2-40B4-BE49-F238E27FC236}">
-                <a16:creationId xmlns:a16="http://schemas.microsoft.com/office/drawing/2014/main" id="{C0FA5240-5DFE-FDF5-63B9-272153AD3469}"/>
-              </a:ext>
-            </a:extLst>
-          </p:cNvPr>
+          <p:cNvPr id="2" name="Title 1"/>
           <p:cNvSpPr>
             <a:spLocks noGrp="1"/>
           </p:cNvSpPr>
@@ -14255,247 +18564,46 @@
           </a:p>
         </p:txBody>
       </p:sp>
-      <p:graphicFrame>
-        <p:nvGraphicFramePr>
-          <p:cNvPr id="5" name="Table 4"/>
-          <p:cNvGraphicFramePr>
-            <a:graphicFrameLocks noGrp="1"/>
-          </p:cNvGraphicFramePr>
+      <p:sp>
+        <p:nvSpPr>
+          <p:cNvPr id="3" name="Content Placeholder 2"/>
+          <p:cNvSpPr>
+            <a:spLocks noGrp="1"/>
+          </p:cNvSpPr>
           <p:nvPr>
-            <p:extLst>
-              <p:ext uri="{D42A27DB-BD31-4B8C-83A1-F6EECF244321}">
-                <p14:modId xmlns:p14="http://schemas.microsoft.com/office/powerpoint/2010/main" val="553787508"/>
-              </p:ext>
-            </p:extLst>
+            <p:ph idx="1"/>
           </p:nvPr>
-        </p:nvGraphicFramePr>
-        <p:xfrm>
-          <a:off x="954628" y="2289797"/>
-          <a:ext cx="3053533" cy="1431360"/>
-        </p:xfrm>
-        <a:graphic>
-          <a:graphicData uri="http://schemas.openxmlformats.org/drawingml/2006/table">
-            <a:tbl>
-              <a:tblPr firstRow="1" bandRow="1">
-                <a:tableStyleId>{9D7B26C5-4107-4FEC-AEDC-1716B250A1EF}</a:tableStyleId>
-              </a:tblPr>
-              <a:tblGrid>
-                <a:gridCol w="1015120">
-                  <a:extLst>
-                    <a:ext uri="{9D8B030D-6E8A-4147-A177-3AD203B41FA5}">
-                      <a16:colId xmlns:a16="http://schemas.microsoft.com/office/drawing/2014/main" val="20000"/>
-                    </a:ext>
-                  </a:extLst>
-                </a:gridCol>
-                <a:gridCol w="1215326">
-                  <a:extLst>
-                    <a:ext uri="{9D8B030D-6E8A-4147-A177-3AD203B41FA5}">
-                      <a16:colId xmlns:a16="http://schemas.microsoft.com/office/drawing/2014/main" val="20001"/>
-                    </a:ext>
-                  </a:extLst>
-                </a:gridCol>
-                <a:gridCol w="823087">
-                  <a:extLst>
-                    <a:ext uri="{9D8B030D-6E8A-4147-A177-3AD203B41FA5}">
-                      <a16:colId xmlns:a16="http://schemas.microsoft.com/office/drawing/2014/main" val="20002"/>
-                    </a:ext>
-                  </a:extLst>
-                </a:gridCol>
-              </a:tblGrid>
-              <a:tr h="456000">
-                <a:tc>
-                  <a:txBody>
-                    <a:bodyPr/>
-                    <a:lstStyle/>
-                    <a:p>
-                      <a:pPr algn="ctr"/>
-                      <a:r>
-                        <a:rPr sz="1300" b="1"/>
-                        <a:t>Cohort</a:t>
-                      </a:r>
-                    </a:p>
-                  </a:txBody>
-                  <a:tcPr anchor="ctr"/>
-                </a:tc>
-                <a:tc>
-                  <a:txBody>
-                    <a:bodyPr/>
-                    <a:lstStyle/>
-                    <a:p>
-                      <a:pPr algn="ctr"/>
-                      <a:r>
-                        <a:rPr sz="1300" b="1"/>
-                        <a:t>curve RMSD</a:t>
-                      </a:r>
-                    </a:p>
-                  </a:txBody>
-                  <a:tcPr anchor="ctr"/>
-                </a:tc>
-                <a:tc>
-                  <a:txBody>
-                    <a:bodyPr/>
-                    <a:lstStyle/>
-                    <a:p>
-                      <a:pPr algn="ctr"/>
-                      <a:r>
-                        <a:rPr sz="1300" b="1"/>
-                        <a:t>P-value</a:t>
-                      </a:r>
-                    </a:p>
-                  </a:txBody>
-                  <a:tcPr anchor="ctr"/>
-                </a:tc>
-                <a:extLst>
-                  <a:ext uri="{0D108BD9-81ED-4DB2-BD59-A6C34878D82A}">
-                    <a16:rowId xmlns:a16="http://schemas.microsoft.com/office/drawing/2014/main" val="10000"/>
-                  </a:ext>
-                </a:extLst>
-              </a:tr>
-              <a:tr h="456000">
-                <a:tc>
-                  <a:txBody>
-                    <a:bodyPr/>
-                    <a:lstStyle/>
-                    <a:p>
-                      <a:pPr algn="ctr"/>
-                      <a:r>
-                        <a:rPr sz="1300" dirty="0"/>
-                        <a:t>Gangna</a:t>
-                      </a:r>
-                      <a:r>
-                        <a:rPr lang="en-US" sz="1300" dirty="0"/>
-                        <a:t>m</a:t>
-                      </a:r>
-                    </a:p>
-                    <a:p>
-                      <a:pPr algn="ctr"/>
-                      <a:r>
-                        <a:rPr sz="1300" dirty="0"/>
-                        <a:t>(internal)</a:t>
-                      </a:r>
-                    </a:p>
-                  </a:txBody>
-                  <a:tcPr anchor="ctr">
-                    <a:solidFill>
-                      <a:schemeClr val="bg1">
-                        <a:alpha val="20000"/>
-                      </a:schemeClr>
-                    </a:solidFill>
-                  </a:tcPr>
-                </a:tc>
-                <a:tc>
-                  <a:txBody>
-                    <a:bodyPr/>
-                    <a:lstStyle/>
-                    <a:p>
-                      <a:pPr algn="ctr"/>
-                      <a:r>
-                        <a:rPr sz="1300" dirty="0"/>
-                        <a:t>0.0325</a:t>
-                      </a:r>
-                    </a:p>
-                  </a:txBody>
-                  <a:tcPr anchor="ctr">
-                    <a:solidFill>
-                      <a:schemeClr val="bg1">
-                        <a:alpha val="20000"/>
-                      </a:schemeClr>
-                    </a:solidFill>
-                  </a:tcPr>
-                </a:tc>
-                <a:tc>
-                  <a:txBody>
-                    <a:bodyPr/>
-                    <a:lstStyle/>
-                    <a:p>
-                      <a:pPr algn="ctr"/>
-                      <a:r>
-                        <a:rPr sz="1300" dirty="0"/>
-                        <a:t>0.002</a:t>
-                      </a:r>
-                    </a:p>
-                  </a:txBody>
-                  <a:tcPr anchor="ctr">
-                    <a:solidFill>
-                      <a:schemeClr val="bg1">
-                        <a:alpha val="20000"/>
-                      </a:schemeClr>
-                    </a:solidFill>
-                  </a:tcPr>
-                </a:tc>
-                <a:extLst>
-                  <a:ext uri="{0D108BD9-81ED-4DB2-BD59-A6C34878D82A}">
-                    <a16:rowId xmlns:a16="http://schemas.microsoft.com/office/drawing/2014/main" val="10001"/>
-                  </a:ext>
-                </a:extLst>
-              </a:tr>
-              <a:tr h="456000">
-                <a:tc>
-                  <a:txBody>
-                    <a:bodyPr/>
-                    <a:lstStyle/>
-                    <a:p>
-                      <a:pPr algn="ctr"/>
-                      <a:r>
-                        <a:rPr sz="1300" dirty="0"/>
-                        <a:t>Sinchon</a:t>
-                      </a:r>
-                      <a:endParaRPr lang="en-US" sz="1300" dirty="0"/>
-                    </a:p>
-                    <a:p>
-                      <a:pPr algn="ctr"/>
-                      <a:r>
-                        <a:rPr sz="1300" dirty="0"/>
-                        <a:t>(external)</a:t>
-                      </a:r>
-                    </a:p>
-                  </a:txBody>
-                  <a:tcPr anchor="ctr"/>
-                </a:tc>
-                <a:tc>
-                  <a:txBody>
-                    <a:bodyPr/>
-                    <a:lstStyle/>
-                    <a:p>
-                      <a:pPr algn="ctr"/>
-                      <a:r>
-                        <a:rPr sz="1300" dirty="0"/>
-                        <a:t>0.0289</a:t>
-                      </a:r>
-                    </a:p>
-                  </a:txBody>
-                  <a:tcPr anchor="ctr"/>
-                </a:tc>
-                <a:tc>
-                  <a:txBody>
-                    <a:bodyPr/>
-                    <a:lstStyle/>
-                    <a:p>
-                      <a:pPr algn="ctr"/>
-                      <a:r>
-                        <a:rPr sz="1300" dirty="0"/>
-                        <a:t>0.0135</a:t>
-                      </a:r>
-                    </a:p>
-                  </a:txBody>
-                  <a:tcPr anchor="ctr"/>
-                </a:tc>
-                <a:extLst>
-                  <a:ext uri="{0D108BD9-81ED-4DB2-BD59-A6C34878D82A}">
-                    <a16:rowId xmlns:a16="http://schemas.microsoft.com/office/drawing/2014/main" val="10002"/>
-                  </a:ext>
-                </a:extLst>
-              </a:tr>
-            </a:tbl>
-          </a:graphicData>
-        </a:graphic>
-      </p:graphicFrame>
+        </p:nvSpPr>
+        <p:spPr/>
+        <p:txBody>
+          <a:bodyPr>
+            <a:normAutofit/>
+          </a:bodyPr>
+          <a:lstStyle/>
+          <a:p>
+            <a:pPr>
+              <a:lnSpc>
+                <a:spcPct val="150000"/>
+              </a:lnSpc>
+            </a:pPr>
+            <a:r>
+              <a:rPr lang="en-US" altLang="ko-KR" b="1" dirty="0"/>
+              <a:t>Stage-1 TP vs FP AEC-128 비교 </a:t>
+            </a:r>
+            <a:r>
+              <a:rPr lang="ko-KR" altLang="en-US" b="1" dirty="0"/>
+              <a:t>(raw)</a:t>
+            </a:r>
+            <a:endParaRPr b="1" dirty="0"/>
+          </a:p>
+        </p:txBody>
+      </p:sp>
       <p:grpSp>
         <p:nvGrpSpPr>
-          <p:cNvPr id="3" name="그룹 2">
+          <p:cNvPr id="4" name="그룹 3">
             <a:extLst>
               <a:ext uri="{FF2B5EF4-FFF2-40B4-BE49-F238E27FC236}">
-                <a16:creationId xmlns:a16="http://schemas.microsoft.com/office/drawing/2014/main" id="{B4C709C8-B4D6-D3DA-ED41-F356D9CE1067}"/>
+                <a16:creationId xmlns:a16="http://schemas.microsoft.com/office/drawing/2014/main" id="{1F2985AC-77DB-112C-BA4D-4D96C3A39B78}"/>
               </a:ext>
             </a:extLst>
           </p:cNvPr>
@@ -14504,15 +18612,21 @@
         </p:nvGrpSpPr>
         <p:grpSpPr>
           <a:xfrm>
-            <a:off x="4673601" y="1919627"/>
-            <a:ext cx="6070600" cy="2171700"/>
-            <a:chOff x="4627854" y="3428999"/>
-            <a:chExt cx="6632024" cy="2318707"/>
+            <a:off x="334871" y="1773882"/>
+            <a:ext cx="11522257" cy="3934449"/>
+            <a:chOff x="750631" y="1907809"/>
+            <a:chExt cx="10838615" cy="3701009"/>
           </a:xfrm>
         </p:grpSpPr>
         <p:pic>
           <p:nvPicPr>
-            <p:cNvPr id="6" name="Picture 5" descr="18_aec_curve_tp_vs_tn.png"/>
+            <p:cNvPr id="5" name="그림 4">
+              <a:extLst>
+                <a:ext uri="{FF2B5EF4-FFF2-40B4-BE49-F238E27FC236}">
+                  <a16:creationId xmlns:a16="http://schemas.microsoft.com/office/drawing/2014/main" id="{208045E6-AB4B-8191-87F4-9D786FB05D65}"/>
+                </a:ext>
+              </a:extLst>
+            </p:cNvPr>
             <p:cNvPicPr>
               <a:picLocks noChangeAspect="1"/>
             </p:cNvPicPr>
@@ -14526,8 +18640,8 @@
           </p:blipFill>
           <p:spPr>
             <a:xfrm>
-              <a:off x="4627854" y="3428999"/>
-              <a:ext cx="3394567" cy="2318707"/>
+              <a:off x="750631" y="1907809"/>
+              <a:ext cx="5418246" cy="3701009"/>
             </a:xfrm>
             <a:prstGeom prst="rect">
               <a:avLst/>
@@ -14536,7 +18650,13 @@
         </p:pic>
         <p:pic>
           <p:nvPicPr>
-            <p:cNvPr id="7" name="Picture 6" descr="18_aec_curve_tp_vs_tn.png"/>
+            <p:cNvPr id="7" name="그림 6">
+              <a:extLst>
+                <a:ext uri="{FF2B5EF4-FFF2-40B4-BE49-F238E27FC236}">
+                  <a16:creationId xmlns:a16="http://schemas.microsoft.com/office/drawing/2014/main" id="{F6BCAC1A-71D7-F33B-BBC4-F66D65788912}"/>
+                </a:ext>
+              </a:extLst>
+            </p:cNvPr>
             <p:cNvPicPr>
               <a:picLocks noChangeAspect="1"/>
             </p:cNvPicPr>
@@ -14550,8 +18670,8 @@
           </p:blipFill>
           <p:spPr>
             <a:xfrm>
-              <a:off x="7865311" y="3428999"/>
-              <a:ext cx="3394567" cy="2318707"/>
+              <a:off x="6171000" y="1907809"/>
+              <a:ext cx="5418246" cy="3701009"/>
             </a:xfrm>
             <a:prstGeom prst="rect">
               <a:avLst/>
@@ -14559,464 +18679,10 @@
           </p:spPr>
         </p:pic>
       </p:grpSp>
-      <p:graphicFrame>
-        <p:nvGraphicFramePr>
-          <p:cNvPr id="10" name="Table 4">
-            <a:extLst>
-              <a:ext uri="{FF2B5EF4-FFF2-40B4-BE49-F238E27FC236}">
-                <a16:creationId xmlns:a16="http://schemas.microsoft.com/office/drawing/2014/main" id="{BF4D3371-029E-CBE3-E038-FE8F04EF52C4}"/>
-              </a:ext>
-            </a:extLst>
-          </p:cNvPr>
-          <p:cNvGraphicFramePr>
-            <a:graphicFrameLocks noGrp="1"/>
-          </p:cNvGraphicFramePr>
-          <p:nvPr>
-            <p:extLst>
-              <p:ext uri="{D42A27DB-BD31-4B8C-83A1-F6EECF244321}">
-                <p14:modId xmlns:p14="http://schemas.microsoft.com/office/powerpoint/2010/main" val="527674307"/>
-              </p:ext>
-            </p:extLst>
-          </p:nvPr>
-        </p:nvGraphicFramePr>
-        <p:xfrm>
-          <a:off x="940230" y="4615547"/>
-          <a:ext cx="3067931" cy="1432560"/>
-        </p:xfrm>
-        <a:graphic>
-          <a:graphicData uri="http://schemas.openxmlformats.org/drawingml/2006/table">
-            <a:tbl>
-              <a:tblPr firstRow="1" bandRow="1">
-                <a:tableStyleId>{9D7B26C5-4107-4FEC-AEDC-1716B250A1EF}</a:tableStyleId>
-              </a:tblPr>
-              <a:tblGrid>
-                <a:gridCol w="995500">
-                  <a:extLst>
-                    <a:ext uri="{9D8B030D-6E8A-4147-A177-3AD203B41FA5}">
-                      <a16:colId xmlns:a16="http://schemas.microsoft.com/office/drawing/2014/main" val="20000"/>
-                    </a:ext>
-                  </a:extLst>
-                </a:gridCol>
-                <a:gridCol w="1235608">
-                  <a:extLst>
-                    <a:ext uri="{9D8B030D-6E8A-4147-A177-3AD203B41FA5}">
-                      <a16:colId xmlns:a16="http://schemas.microsoft.com/office/drawing/2014/main" val="20001"/>
-                    </a:ext>
-                  </a:extLst>
-                </a:gridCol>
-                <a:gridCol w="836823">
-                  <a:extLst>
-                    <a:ext uri="{9D8B030D-6E8A-4147-A177-3AD203B41FA5}">
-                      <a16:colId xmlns:a16="http://schemas.microsoft.com/office/drawing/2014/main" val="20002"/>
-                    </a:ext>
-                  </a:extLst>
-                </a:gridCol>
-              </a:tblGrid>
-              <a:tr h="457200">
-                <a:tc>
-                  <a:txBody>
-                    <a:bodyPr/>
-                    <a:lstStyle/>
-                    <a:p>
-                      <a:pPr algn="ctr"/>
-                      <a:r>
-                        <a:rPr sz="1300" b="1"/>
-                        <a:t>Cohort</a:t>
-                      </a:r>
-                    </a:p>
-                  </a:txBody>
-                  <a:tcPr anchor="ctr"/>
-                </a:tc>
-                <a:tc>
-                  <a:txBody>
-                    <a:bodyPr/>
-                    <a:lstStyle/>
-                    <a:p>
-                      <a:pPr algn="ctr"/>
-                      <a:r>
-                        <a:rPr sz="1300" b="1" dirty="0"/>
-                        <a:t>curve RMSD</a:t>
-                      </a:r>
-                    </a:p>
-                  </a:txBody>
-                  <a:tcPr anchor="ctr"/>
-                </a:tc>
-                <a:tc>
-                  <a:txBody>
-                    <a:bodyPr/>
-                    <a:lstStyle/>
-                    <a:p>
-                      <a:pPr algn="ctr"/>
-                      <a:r>
-                        <a:rPr sz="1300" b="1"/>
-                        <a:t>P-value</a:t>
-                      </a:r>
-                    </a:p>
-                  </a:txBody>
-                  <a:tcPr anchor="ctr"/>
-                </a:tc>
-                <a:extLst>
-                  <a:ext uri="{0D108BD9-81ED-4DB2-BD59-A6C34878D82A}">
-                    <a16:rowId xmlns:a16="http://schemas.microsoft.com/office/drawing/2014/main" val="10000"/>
-                  </a:ext>
-                </a:extLst>
-              </a:tr>
-              <a:tr h="487680">
-                <a:tc>
-                  <a:txBody>
-                    <a:bodyPr/>
-                    <a:lstStyle/>
-                    <a:p>
-                      <a:pPr algn="ctr"/>
-                      <a:r>
-                        <a:rPr sz="1300" dirty="0"/>
-                        <a:t>Gangnam
-(internal)</a:t>
-                      </a:r>
-                    </a:p>
-                  </a:txBody>
-                  <a:tcPr anchor="ctr">
-                    <a:solidFill>
-                      <a:schemeClr val="bg1">
-                        <a:alpha val="20000"/>
-                      </a:schemeClr>
-                    </a:solidFill>
-                  </a:tcPr>
-                </a:tc>
-                <a:tc>
-                  <a:txBody>
-                    <a:bodyPr/>
-                    <a:lstStyle/>
-                    <a:p>
-                      <a:pPr algn="ctr"/>
-                      <a:r>
-                        <a:rPr sz="1300" dirty="0"/>
-                        <a:t>0.0287</a:t>
-                      </a:r>
-                    </a:p>
-                  </a:txBody>
-                  <a:tcPr anchor="ctr">
-                    <a:solidFill>
-                      <a:schemeClr val="bg1">
-                        <a:alpha val="20000"/>
-                      </a:schemeClr>
-                    </a:solidFill>
-                  </a:tcPr>
-                </a:tc>
-                <a:tc>
-                  <a:txBody>
-                    <a:bodyPr/>
-                    <a:lstStyle/>
-                    <a:p>
-                      <a:pPr algn="ctr"/>
-                      <a:r>
-                        <a:rPr sz="1300" dirty="0"/>
-                        <a:t>0.0005</a:t>
-                      </a:r>
-                    </a:p>
-                  </a:txBody>
-                  <a:tcPr anchor="ctr">
-                    <a:solidFill>
-                      <a:schemeClr val="bg1">
-                        <a:alpha val="20000"/>
-                      </a:schemeClr>
-                    </a:solidFill>
-                  </a:tcPr>
-                </a:tc>
-                <a:extLst>
-                  <a:ext uri="{0D108BD9-81ED-4DB2-BD59-A6C34878D82A}">
-                    <a16:rowId xmlns:a16="http://schemas.microsoft.com/office/drawing/2014/main" val="10001"/>
-                  </a:ext>
-                </a:extLst>
-              </a:tr>
-              <a:tr h="487680">
-                <a:tc>
-                  <a:txBody>
-                    <a:bodyPr/>
-                    <a:lstStyle/>
-                    <a:p>
-                      <a:pPr algn="ctr"/>
-                      <a:r>
-                        <a:rPr sz="1300"/>
-                        <a:t>Sinchon
-(external)</a:t>
-                      </a:r>
-                    </a:p>
-                  </a:txBody>
-                  <a:tcPr anchor="ctr"/>
-                </a:tc>
-                <a:tc>
-                  <a:txBody>
-                    <a:bodyPr/>
-                    <a:lstStyle/>
-                    <a:p>
-                      <a:pPr algn="ctr"/>
-                      <a:r>
-                        <a:rPr sz="1300" dirty="0"/>
-                        <a:t>0.0226</a:t>
-                      </a:r>
-                    </a:p>
-                  </a:txBody>
-                  <a:tcPr anchor="ctr"/>
-                </a:tc>
-                <a:tc>
-                  <a:txBody>
-                    <a:bodyPr/>
-                    <a:lstStyle/>
-                    <a:p>
-                      <a:pPr algn="ctr"/>
-                      <a:r>
-                        <a:rPr sz="1300" dirty="0"/>
-                        <a:t>0.0045</a:t>
-                      </a:r>
-                    </a:p>
-                  </a:txBody>
-                  <a:tcPr anchor="ctr"/>
-                </a:tc>
-                <a:extLst>
-                  <a:ext uri="{0D108BD9-81ED-4DB2-BD59-A6C34878D82A}">
-                    <a16:rowId xmlns:a16="http://schemas.microsoft.com/office/drawing/2014/main" val="10002"/>
-                  </a:ext>
-                </a:extLst>
-              </a:tr>
-            </a:tbl>
-          </a:graphicData>
-        </a:graphic>
-      </p:graphicFrame>
-      <p:grpSp>
-        <p:nvGrpSpPr>
-          <p:cNvPr id="11" name="그룹 10">
-            <a:extLst>
-              <a:ext uri="{FF2B5EF4-FFF2-40B4-BE49-F238E27FC236}">
-                <a16:creationId xmlns:a16="http://schemas.microsoft.com/office/drawing/2014/main" id="{C642C770-CC23-8B19-F687-EDD106359F7B}"/>
-              </a:ext>
-            </a:extLst>
-          </p:cNvPr>
-          <p:cNvGrpSpPr>
-            <a:grpSpLocks noChangeAspect="1"/>
-          </p:cNvGrpSpPr>
-          <p:nvPr/>
-        </p:nvGrpSpPr>
-        <p:grpSpPr>
-          <a:xfrm>
-            <a:off x="4578599" y="4296777"/>
-            <a:ext cx="6061219" cy="2070100"/>
-            <a:chOff x="5185763" y="3550000"/>
-            <a:chExt cx="6788238" cy="2318400"/>
-          </a:xfrm>
-        </p:grpSpPr>
-        <p:pic>
-          <p:nvPicPr>
-            <p:cNvPr id="12" name="Picture 5" descr="17_aec_curve_fp_vs_tn.png">
-              <a:extLst>
-                <a:ext uri="{FF2B5EF4-FFF2-40B4-BE49-F238E27FC236}">
-                  <a16:creationId xmlns:a16="http://schemas.microsoft.com/office/drawing/2014/main" id="{D8AEA2E2-E549-45E9-54B7-897ADFD59E05}"/>
-                </a:ext>
-              </a:extLst>
-            </p:cNvPr>
-            <p:cNvPicPr>
-              <a:picLocks noChangeAspect="1"/>
-            </p:cNvPicPr>
-            <p:nvPr/>
-          </p:nvPicPr>
-          <p:blipFill>
-            <a:blip r:embed="rId5"/>
-            <a:stretch>
-              <a:fillRect/>
-            </a:stretch>
-          </p:blipFill>
-          <p:spPr>
-            <a:xfrm>
-              <a:off x="5185763" y="3550000"/>
-              <a:ext cx="3394119" cy="2318400"/>
-            </a:xfrm>
-            <a:prstGeom prst="rect">
-              <a:avLst/>
-            </a:prstGeom>
-          </p:spPr>
-        </p:pic>
-        <p:pic>
-          <p:nvPicPr>
-            <p:cNvPr id="13" name="Picture 6" descr="17_aec_curve_fp_vs_tn.png">
-              <a:extLst>
-                <a:ext uri="{FF2B5EF4-FFF2-40B4-BE49-F238E27FC236}">
-                  <a16:creationId xmlns:a16="http://schemas.microsoft.com/office/drawing/2014/main" id="{A067D7BC-8B07-4215-580C-7B547CD1E725}"/>
-                </a:ext>
-              </a:extLst>
-            </p:cNvPr>
-            <p:cNvPicPr>
-              <a:picLocks noChangeAspect="1"/>
-            </p:cNvPicPr>
-            <p:nvPr/>
-          </p:nvPicPr>
-          <p:blipFill>
-            <a:blip r:embed="rId6"/>
-            <a:stretch>
-              <a:fillRect/>
-            </a:stretch>
-          </p:blipFill>
-          <p:spPr>
-            <a:xfrm>
-              <a:off x="8579882" y="3550000"/>
-              <a:ext cx="3394119" cy="2318400"/>
-            </a:xfrm>
-            <a:prstGeom prst="rect">
-              <a:avLst/>
-            </a:prstGeom>
-          </p:spPr>
-        </p:pic>
-      </p:grpSp>
-      <p:sp>
-        <p:nvSpPr>
-          <p:cNvPr id="15" name="TextBox 14">
-            <a:extLst>
-              <a:ext uri="{FF2B5EF4-FFF2-40B4-BE49-F238E27FC236}">
-                <a16:creationId xmlns:a16="http://schemas.microsoft.com/office/drawing/2014/main" id="{3E3CE72B-5F74-4979-D0F9-4FC1DCECCB27}"/>
-              </a:ext>
-            </a:extLst>
-          </p:cNvPr>
-          <p:cNvSpPr txBox="1"/>
-          <p:nvPr/>
-        </p:nvSpPr>
-        <p:spPr>
-          <a:xfrm>
-            <a:off x="1814288" y="1866900"/>
-            <a:ext cx="1310463" cy="338554"/>
-          </a:xfrm>
-          <a:prstGeom prst="rect">
-            <a:avLst/>
-          </a:prstGeom>
-          <a:noFill/>
-        </p:spPr>
-        <p:txBody>
-          <a:bodyPr wrap="square">
-            <a:spAutoFit/>
-          </a:bodyPr>
-          <a:lstStyle/>
-          <a:p>
-            <a:pPr algn="ctr"/>
-            <a:r>
-              <a:rPr lang="en-US" altLang="ko-KR" sz="1600" dirty="0">
-                <a:latin typeface="KoPub돋움체 Bold" panose="00000800000000000000" pitchFamily="2" charset="-127"/>
-                <a:ea typeface="KoPub돋움체 Bold" panose="00000800000000000000" pitchFamily="2" charset="-127"/>
-              </a:rPr>
-              <a:t>TP vs TN </a:t>
-            </a:r>
-            <a:endParaRPr lang="ko-KR" altLang="en-US" sz="2400" dirty="0">
-              <a:latin typeface="KoPub돋움체 Bold" panose="00000800000000000000" pitchFamily="2" charset="-127"/>
-              <a:ea typeface="KoPub돋움체 Bold" panose="00000800000000000000" pitchFamily="2" charset="-127"/>
-            </a:endParaRPr>
-          </a:p>
-        </p:txBody>
-      </p:sp>
-      <p:sp>
-        <p:nvSpPr>
-          <p:cNvPr id="16" name="TextBox 15">
-            <a:extLst>
-              <a:ext uri="{FF2B5EF4-FFF2-40B4-BE49-F238E27FC236}">
-                <a16:creationId xmlns:a16="http://schemas.microsoft.com/office/drawing/2014/main" id="{87E32C4F-DDD1-2E8C-02C2-6F317C240BC8}"/>
-              </a:ext>
-            </a:extLst>
-          </p:cNvPr>
-          <p:cNvSpPr txBox="1"/>
-          <p:nvPr/>
-        </p:nvSpPr>
-        <p:spPr>
-          <a:xfrm>
-            <a:off x="1807089" y="4127500"/>
-            <a:ext cx="1310463" cy="338554"/>
-          </a:xfrm>
-          <a:prstGeom prst="rect">
-            <a:avLst/>
-          </a:prstGeom>
-          <a:noFill/>
-        </p:spPr>
-        <p:txBody>
-          <a:bodyPr wrap="square">
-            <a:spAutoFit/>
-          </a:bodyPr>
-          <a:lstStyle/>
-          <a:p>
-            <a:pPr algn="ctr"/>
-            <a:r>
-              <a:rPr lang="en-US" altLang="ko-KR" sz="1600" dirty="0">
-                <a:latin typeface="KoPub돋움체 Bold" panose="00000800000000000000" pitchFamily="2" charset="-127"/>
-                <a:ea typeface="KoPub돋움체 Bold" panose="00000800000000000000" pitchFamily="2" charset="-127"/>
-              </a:rPr>
-              <a:t>FP vs TN </a:t>
-            </a:r>
-            <a:endParaRPr lang="ko-KR" altLang="en-US" sz="2400" dirty="0">
-              <a:latin typeface="KoPub돋움체 Bold" panose="00000800000000000000" pitchFamily="2" charset="-127"/>
-              <a:ea typeface="KoPub돋움체 Bold" panose="00000800000000000000" pitchFamily="2" charset="-127"/>
-            </a:endParaRPr>
-          </a:p>
-        </p:txBody>
-      </p:sp>
-      <p:sp>
-        <p:nvSpPr>
-          <p:cNvPr id="17" name="내용 개체 틀 3">
-            <a:extLst>
-              <a:ext uri="{FF2B5EF4-FFF2-40B4-BE49-F238E27FC236}">
-                <a16:creationId xmlns:a16="http://schemas.microsoft.com/office/drawing/2014/main" id="{213DA017-BC77-8FC8-CC9F-A5957B4DA47F}"/>
-              </a:ext>
-            </a:extLst>
-          </p:cNvPr>
-          <p:cNvSpPr>
-            <a:spLocks noGrp="1"/>
-          </p:cNvSpPr>
-          <p:nvPr>
-            <p:ph idx="1"/>
-          </p:nvPr>
-        </p:nvSpPr>
-        <p:spPr>
-          <a:xfrm>
-            <a:off x="508000" y="897468"/>
-            <a:ext cx="11176000" cy="5063066"/>
-          </a:xfrm>
-        </p:spPr>
-        <p:txBody>
-          <a:bodyPr>
-            <a:normAutofit/>
-          </a:bodyPr>
-          <a:lstStyle/>
-          <a:p>
-            <a:pPr>
-              <a:lnSpc>
-                <a:spcPct val="150000"/>
-              </a:lnSpc>
-            </a:pPr>
-            <a:r>
-              <a:rPr lang="en-US" altLang="ko-KR" b="1" dirty="0"/>
-              <a:t>Stage-1 AEC-128 </a:t>
-            </a:r>
-            <a:r>
-              <a:rPr lang="ko-KR" altLang="en-US" b="1" dirty="0"/>
-              <a:t>곡선 비교 </a:t>
-            </a:r>
-            <a:r>
-              <a:rPr lang="en-US" altLang="ko-KR" b="1" dirty="0"/>
-              <a:t>: TP/FP vs TN </a:t>
-            </a:r>
-            <a:r>
-              <a:rPr lang="ko-KR" altLang="en-US" b="1" dirty="0"/>
-              <a:t>모두 유의 </a:t>
-            </a:r>
-            <a:r>
-              <a:rPr lang="en-US" altLang="ko-KR" b="1" dirty="0"/>
-              <a:t>(p&lt;</a:t>
-            </a:r>
-            <a:r>
-              <a:rPr lang="en-US" altLang="ko-KR" b="1"/>
-              <a:t>0.01)</a:t>
-            </a:r>
-            <a:endParaRPr lang="en-US" altLang="ko-KR" b="1" dirty="0"/>
-          </a:p>
-        </p:txBody>
-      </p:sp>
     </p:spTree>
     <p:extLst>
       <p:ext uri="{BB962C8B-B14F-4D97-AF65-F5344CB8AC3E}">
-        <p14:creationId xmlns:p14="http://schemas.microsoft.com/office/powerpoint/2010/main" val="736506365"/>
+        <p14:creationId xmlns:p14="http://schemas.microsoft.com/office/powerpoint/2010/main" val="4040032724"/>
       </p:ext>
     </p:extLst>
   </p:cSld>
@@ -15043,186 +18709,75 @@
           <a:chExt cx="0" cy="0"/>
         </a:xfrm>
       </p:grpSpPr>
-      <p:pic>
-        <p:nvPicPr>
-          <p:cNvPr id="5" name="그림 4">
+      <p:grpSp>
+        <p:nvGrpSpPr>
+          <p:cNvPr id="4" name="그룹 3">
             <a:extLst>
               <a:ext uri="{FF2B5EF4-FFF2-40B4-BE49-F238E27FC236}">
-                <a16:creationId xmlns:a16="http://schemas.microsoft.com/office/drawing/2014/main" id="{208045E6-AB4B-8191-87F4-9D786FB05D65}"/>
+                <a16:creationId xmlns:a16="http://schemas.microsoft.com/office/drawing/2014/main" id="{E9C18E90-97D7-840F-3BCE-0411187CB0E9}"/>
               </a:ext>
             </a:extLst>
           </p:cNvPr>
-          <p:cNvPicPr>
-            <a:picLocks noChangeAspect="1"/>
-          </p:cNvPicPr>
+          <p:cNvGrpSpPr/>
           <p:nvPr/>
-        </p:nvPicPr>
-        <p:blipFill>
-          <a:blip r:embed="rId3"/>
-          <a:stretch>
-            <a:fillRect/>
-          </a:stretch>
-        </p:blipFill>
-        <p:spPr>
+        </p:nvGrpSpPr>
+        <p:grpSpPr>
           <a:xfrm>
-            <a:off x="750631" y="1550000"/>
-            <a:ext cx="5270369" cy="3600000"/>
+            <a:off x="334870" y="1773882"/>
+            <a:ext cx="11520001" cy="3934449"/>
+            <a:chOff x="681471" y="1550000"/>
+            <a:chExt cx="10979056" cy="3749699"/>
           </a:xfrm>
-          <a:prstGeom prst="rect">
-            <a:avLst/>
-          </a:prstGeom>
-        </p:spPr>
-      </p:pic>
-      <p:sp>
-        <p:nvSpPr>
-          <p:cNvPr id="2" name="Title 1"/>
-          <p:cNvSpPr>
-            <a:spLocks noGrp="1"/>
-          </p:cNvSpPr>
-          <p:nvPr>
-            <p:ph type="title"/>
-          </p:nvPr>
-        </p:nvSpPr>
-        <p:spPr/>
-        <p:txBody>
-          <a:bodyPr/>
-          <a:lstStyle/>
-          <a:p>
-            <a:r>
-              <a:rPr lang="en-US" altLang="ko-KR" dirty="0"/>
-              <a:t>Detailed progress</a:t>
-            </a:r>
-            <a:endParaRPr dirty="0"/>
-          </a:p>
-        </p:txBody>
-      </p:sp>
-      <p:sp>
-        <p:nvSpPr>
-          <p:cNvPr id="3" name="Content Placeholder 2"/>
-          <p:cNvSpPr>
-            <a:spLocks noGrp="1"/>
-          </p:cNvSpPr>
-          <p:nvPr>
-            <p:ph idx="1"/>
-          </p:nvPr>
-        </p:nvSpPr>
-        <p:spPr/>
-        <p:txBody>
-          <a:bodyPr>
-            <a:normAutofit/>
-          </a:bodyPr>
-          <a:lstStyle/>
-          <a:p>
-            <a:pPr>
-              <a:lnSpc>
-                <a:spcPct val="150000"/>
-              </a:lnSpc>
-            </a:pPr>
-            <a:r>
-              <a:rPr lang="en-US" altLang="ko-KR" b="1" dirty="0"/>
-              <a:t>Stage-1 TP vs FP AEC-128 비교 </a:t>
-            </a:r>
-            <a:r>
-              <a:rPr lang="ko-KR" altLang="en-US" b="1" dirty="0"/>
-              <a:t>(raw)</a:t>
-            </a:r>
-            <a:endParaRPr b="1" dirty="0"/>
-          </a:p>
-        </p:txBody>
-      </p:sp>
-      <p:pic>
-        <p:nvPicPr>
-          <p:cNvPr id="7" name="그림 6">
-            <a:extLst>
-              <a:ext uri="{FF2B5EF4-FFF2-40B4-BE49-F238E27FC236}">
-                <a16:creationId xmlns:a16="http://schemas.microsoft.com/office/drawing/2014/main" id="{F6BCAC1A-71D7-F33B-BBC4-F66D65788912}"/>
-              </a:ext>
-            </a:extLst>
-          </p:cNvPr>
-          <p:cNvPicPr>
-            <a:picLocks noChangeAspect="1"/>
-          </p:cNvPicPr>
-          <p:nvPr/>
-        </p:nvPicPr>
-        <p:blipFill>
-          <a:blip r:embed="rId4"/>
-          <a:stretch>
-            <a:fillRect/>
-          </a:stretch>
-        </p:blipFill>
-        <p:spPr>
-          <a:xfrm>
-            <a:off x="6171000" y="1550000"/>
-            <a:ext cx="5270369" cy="3600000"/>
-          </a:xfrm>
-          <a:prstGeom prst="rect">
-            <a:avLst/>
-          </a:prstGeom>
-        </p:spPr>
-      </p:pic>
-      <p:sp>
-        <p:nvSpPr>
-          <p:cNvPr id="10" name="TextBox 9"/>
-          <p:cNvSpPr txBox="1"/>
-          <p:nvPr/>
-        </p:nvSpPr>
-        <p:spPr>
-          <a:xfrm>
-            <a:off x="508000" y="5900000"/>
-            <a:ext cx="11176000" cy="450000"/>
-          </a:xfrm>
-          <a:prstGeom prst="rect">
-            <a:avLst/>
-          </a:prstGeom>
-          <a:noFill/>
-        </p:spPr>
-        <p:txBody>
-          <a:bodyPr wrap="square">
-            <a:spAutoFit/>
-          </a:bodyPr>
-          <a:lstStyle/>
-          <a:p>
-            <a:r>
-              <a:rPr sz="1200" i="1">
-                <a:solidFill>
-                  <a:srgbClr val="606060"/>
-                </a:solidFill>
-              </a:rPr>
-              <a:t>→ Raw curve: 강남(internal) 비유의, 신촌(external) 유의 — 코호트 간 불일치 (matched 결과는 다음 슬라이드)</a:t>
-            </a:r>
-          </a:p>
-        </p:txBody>
-      </p:sp>
-    </p:spTree>
-    <p:extLst>
-      <p:ext uri="{BB962C8B-B14F-4D97-AF65-F5344CB8AC3E}">
-        <p14:creationId xmlns:p14="http://schemas.microsoft.com/office/powerpoint/2010/main" val="4040032724"/>
-      </p:ext>
-    </p:extLst>
-  </p:cSld>
-  <p:clrMapOvr>
-    <a:masterClrMapping/>
-  </p:clrMapOvr>
-</p:sld>
-</file>
-
-<file path=ppt/slides/slide8.xml><?xml version="1.0" encoding="utf-8"?>
-<p:sld xmlns:a="http://schemas.openxmlformats.org/drawingml/2006/main" xmlns:r="http://schemas.openxmlformats.org/officeDocument/2006/relationships" xmlns:p="http://schemas.openxmlformats.org/presentationml/2006/main">
-  <p:cSld>
-    <p:spTree>
-      <p:nvGrpSpPr>
-        <p:cNvPr id="1" name=""/>
-        <p:cNvGrpSpPr/>
-        <p:nvPr/>
-      </p:nvGrpSpPr>
-      <p:grpSpPr>
-        <a:xfrm>
-          <a:off x="0" y="0"/>
-          <a:ext cx="0" cy="0"/>
-          <a:chOff x="0" y="0"/>
-          <a:chExt cx="0" cy="0"/>
-        </a:xfrm>
-      </p:grpSpPr>
+        </p:grpSpPr>
+        <p:pic>
+          <p:nvPicPr>
+            <p:cNvPr id="5" name="Picture 4" descr="19_aec_curve_tp_vs_fp_matched.png"/>
+            <p:cNvPicPr>
+              <a:picLocks noChangeAspect="1"/>
+            </p:cNvPicPr>
+            <p:nvPr/>
+          </p:nvPicPr>
+          <p:blipFill>
+            <a:blip r:embed="rId3"/>
+            <a:stretch>
+              <a:fillRect/>
+            </a:stretch>
+          </p:blipFill>
+          <p:spPr>
+            <a:xfrm>
+              <a:off x="681471" y="1550000"/>
+              <a:ext cx="5489528" cy="3749699"/>
+            </a:xfrm>
+            <a:prstGeom prst="rect">
+              <a:avLst/>
+            </a:prstGeom>
+          </p:spPr>
+        </p:pic>
+        <p:pic>
+          <p:nvPicPr>
+            <p:cNvPr id="6" name="Picture 5" descr="19_aec_curve_tp_vs_fp_matched.png"/>
+            <p:cNvPicPr>
+              <a:picLocks noChangeAspect="1"/>
+            </p:cNvPicPr>
+            <p:nvPr/>
+          </p:nvPicPr>
+          <p:blipFill>
+            <a:blip r:embed="rId4"/>
+            <a:stretch>
+              <a:fillRect/>
+            </a:stretch>
+          </p:blipFill>
+          <p:spPr>
+            <a:xfrm>
+              <a:off x="6170999" y="1550000"/>
+              <a:ext cx="5489528" cy="3749699"/>
+            </a:xfrm>
+            <a:prstGeom prst="rect">
+              <a:avLst/>
+            </a:prstGeom>
+          </p:spPr>
+        </p:pic>
+      </p:grpSp>
       <p:sp>
         <p:nvSpPr>
           <p:cNvPr id="2" name="Title 1"/>
@@ -15266,87 +18821,6 @@
           </a:p>
         </p:txBody>
       </p:sp>
-      <p:pic>
-        <p:nvPicPr>
-          <p:cNvPr id="5" name="Picture 4" descr="19_aec_curve_tp_vs_fp_matched.png"/>
-          <p:cNvPicPr>
-            <a:picLocks noChangeAspect="1"/>
-          </p:cNvPicPr>
-          <p:nvPr/>
-        </p:nvPicPr>
-        <p:blipFill>
-          <a:blip r:embed="rId2"/>
-          <a:stretch>
-            <a:fillRect/>
-          </a:stretch>
-        </p:blipFill>
-        <p:spPr>
-          <a:xfrm>
-            <a:off x="750631" y="1550000"/>
-            <a:ext cx="5270369" cy="3600000"/>
-          </a:xfrm>
-          <a:prstGeom prst="rect">
-            <a:avLst/>
-          </a:prstGeom>
-        </p:spPr>
-      </p:pic>
-      <p:pic>
-        <p:nvPicPr>
-          <p:cNvPr id="6" name="Picture 5" descr="19_aec_curve_tp_vs_fp_matched.png"/>
-          <p:cNvPicPr>
-            <a:picLocks noChangeAspect="1"/>
-          </p:cNvPicPr>
-          <p:nvPr/>
-        </p:nvPicPr>
-        <p:blipFill>
-          <a:blip r:embed="rId3"/>
-          <a:stretch>
-            <a:fillRect/>
-          </a:stretch>
-        </p:blipFill>
-        <p:spPr>
-          <a:xfrm>
-            <a:off x="6171000" y="1550000"/>
-            <a:ext cx="5270369" cy="3600000"/>
-          </a:xfrm>
-          <a:prstGeom prst="rect">
-            <a:avLst/>
-          </a:prstGeom>
-        </p:spPr>
-      </p:pic>
-      <p:sp>
-        <p:nvSpPr>
-          <p:cNvPr id="7" name="TextBox 6"/>
-          <p:cNvSpPr txBox="1"/>
-          <p:nvPr/>
-        </p:nvSpPr>
-        <p:spPr>
-          <a:xfrm>
-            <a:off x="508000" y="5900000"/>
-            <a:ext cx="11176000" cy="450000"/>
-          </a:xfrm>
-          <a:prstGeom prst="rect">
-            <a:avLst/>
-          </a:prstGeom>
-          <a:noFill/>
-        </p:spPr>
-        <p:txBody>
-          <a:bodyPr wrap="square">
-            <a:spAutoFit/>
-          </a:bodyPr>
-          <a:lstStyle/>
-          <a:p>
-            <a:r>
-              <a:rPr sz="1200" i="1">
-                <a:solidFill>
-                  <a:srgbClr val="606060"/>
-                </a:solidFill>
-              </a:rPr>
-              <a:t>→ Propensity-matching 후에도 코호트 간 불일치: 강남(internal) 비유의, 신촌(external)만 유의 — 재현 가능한 신호 아님</a:t>
-            </a:r>
-          </a:p>
-        </p:txBody>
-      </p:sp>
     </p:spTree>
   </p:cSld>
   <p:clrMapOvr>
@@ -15355,7 +18829,7 @@
 </p:sld>
 </file>
 
-<file path=ppt/slides/slide9.xml><?xml version="1.0" encoding="utf-8"?>
+<file path=ppt/slides/slide8.xml><?xml version="1.0" encoding="utf-8"?>
 <p:sld xmlns:a="http://schemas.openxmlformats.org/drawingml/2006/main" xmlns:r="http://schemas.openxmlformats.org/officeDocument/2006/relationships" xmlns:p="http://schemas.openxmlformats.org/presentationml/2006/main">
   <p:cSld>
     <p:spTree>
@@ -15495,6 +18969,64 @@
     <p:extLst>
       <p:ext uri="{BB962C8B-B14F-4D97-AF65-F5344CB8AC3E}">
         <p14:creationId xmlns:p14="http://schemas.microsoft.com/office/powerpoint/2010/main" val="2022533225"/>
+      </p:ext>
+    </p:extLst>
+  </p:cSld>
+  <p:clrMapOvr>
+    <a:masterClrMapping/>
+  </p:clrMapOvr>
+</p:sld>
+</file>
+
+<file path=ppt/slides/slide9.xml><?xml version="1.0" encoding="utf-8"?>
+<p:sld xmlns:a="http://schemas.openxmlformats.org/drawingml/2006/main" xmlns:r="http://schemas.openxmlformats.org/officeDocument/2006/relationships" xmlns:p="http://schemas.openxmlformats.org/presentationml/2006/main">
+  <p:cSld>
+    <p:spTree>
+      <p:nvGrpSpPr>
+        <p:cNvPr id="1" name="Shape 1175"/>
+        <p:cNvGrpSpPr/>
+        <p:nvPr/>
+      </p:nvGrpSpPr>
+      <p:grpSpPr>
+        <a:xfrm>
+          <a:off x="0" y="0"/>
+          <a:ext cx="0" cy="0"/>
+          <a:chOff x="0" y="0"/>
+          <a:chExt cx="0" cy="0"/>
+        </a:xfrm>
+      </p:grpSpPr>
+      <p:pic>
+        <p:nvPicPr>
+          <p:cNvPr id="1176" name="Google Shape;1176;g3d412ffb079_0_61"/>
+          <p:cNvPicPr preferRelativeResize="0"/>
+          <p:nvPr/>
+        </p:nvPicPr>
+        <p:blipFill>
+          <a:blip r:embed="rId3">
+            <a:alphaModFix/>
+          </a:blip>
+          <a:stretch>
+            <a:fillRect/>
+          </a:stretch>
+        </p:blipFill>
+        <p:spPr>
+          <a:xfrm>
+            <a:off x="0" y="0"/>
+            <a:ext cx="12192000" cy="6858000"/>
+          </a:xfrm>
+          <a:prstGeom prst="rect">
+            <a:avLst/>
+          </a:prstGeom>
+          <a:noFill/>
+          <a:ln>
+            <a:noFill/>
+          </a:ln>
+        </p:spPr>
+      </p:pic>
+    </p:spTree>
+    <p:extLst>
+      <p:ext uri="{BB962C8B-B14F-4D97-AF65-F5344CB8AC3E}">
+        <p14:creationId xmlns:p14="http://schemas.microsoft.com/office/powerpoint/2010/main" val="1579866099"/>
       </p:ext>
     </p:extLst>
   </p:cSld>

--- a/docs/260724_Comparison of AECs between groups after low-smi classification with clinic data.pptx
+++ b/docs/260724_Comparison of AECs between groups after low-smi classification with clinic data.pptx
@@ -5,7 +5,7 @@
     <p:sldMasterId id="2147483648" r:id="rId1"/>
   </p:sldMasterIdLst>
   <p:notesMasterIdLst>
-    <p:notesMasterId r:id="rId19"/>
+    <p:notesMasterId r:id="rId22"/>
   </p:notesMasterIdLst>
   <p:sldIdLst>
     <p:sldId id="256" r:id="rId2"/>
@@ -15,27 +15,30 @@
     <p:sldId id="534" r:id="rId6"/>
     <p:sldId id="519" r:id="rId7"/>
     <p:sldId id="536" r:id="rId8"/>
-    <p:sldId id="535" r:id="rId9"/>
-    <p:sldId id="479" r:id="rId10"/>
-    <p:sldId id="544" r:id="rId11"/>
-    <p:sldId id="538" r:id="rId12"/>
-    <p:sldId id="539" r:id="rId13"/>
-    <p:sldId id="540" r:id="rId14"/>
-    <p:sldId id="541" r:id="rId15"/>
-    <p:sldId id="542" r:id="rId16"/>
-    <p:sldId id="543" r:id="rId17"/>
-    <p:sldId id="537" r:id="rId18"/>
+    <p:sldId id="546" r:id="rId9"/>
+    <p:sldId id="547" r:id="rId10"/>
+    <p:sldId id="545" r:id="rId11"/>
+    <p:sldId id="535" r:id="rId12"/>
+    <p:sldId id="479" r:id="rId13"/>
+    <p:sldId id="544" r:id="rId14"/>
+    <p:sldId id="538" r:id="rId15"/>
+    <p:sldId id="539" r:id="rId16"/>
+    <p:sldId id="540" r:id="rId17"/>
+    <p:sldId id="541" r:id="rId18"/>
+    <p:sldId id="542" r:id="rId19"/>
+    <p:sldId id="543" r:id="rId20"/>
+    <p:sldId id="537" r:id="rId21"/>
   </p:sldIdLst>
   <p:sldSz cx="12192000" cy="6858000"/>
   <p:notesSz cx="6858000" cy="9144000"/>
   <p:embeddedFontLst>
     <p:embeddedFont>
-      <p:font typeface="KoPub돋움체 Bold" panose="00000800000000000000" pitchFamily="2" charset="-127"/>
-      <p:bold r:id="rId20"/>
+      <p:font typeface="KoPub돋움체 Bold" panose="020B0600000101010101" charset="-127"/>
+      <p:bold r:id="rId23"/>
     </p:embeddedFont>
     <p:embeddedFont>
-      <p:font typeface="KoPub돋움체 Medium" panose="00000600000000000000" pitchFamily="2" charset="-127"/>
-      <p:regular r:id="rId21"/>
+      <p:font typeface="KoPub돋움체 Medium" panose="020B0600000101010101" charset="-127"/>
+      <p:regular r:id="rId24"/>
     </p:embeddedFont>
   </p:embeddedFontLst>
   <p:defaultTextStyle>
@@ -145,6 +148,9 @@
             <p14:sldId id="534"/>
             <p14:sldId id="519"/>
             <p14:sldId id="536"/>
+            <p14:sldId id="546"/>
+            <p14:sldId id="547"/>
+            <p14:sldId id="545"/>
             <p14:sldId id="535"/>
             <p14:sldId id="479"/>
             <p14:sldId id="544"/>
@@ -179,2275 +185,6 @@
     </p:extLst>
   </p:cmAuthor>
 </p:cmAuthorLst>
-</file>
-
-<file path=ppt/changesInfos/changesInfo1.xml><?xml version="1.0" encoding="utf-8"?>
-<pc:chgInfo xmlns:a="http://schemas.openxmlformats.org/drawingml/2006/main" xmlns:r="http://schemas.openxmlformats.org/officeDocument/2006/relationships" xmlns:ac="http://schemas.microsoft.com/office/drawing/2013/main/command" xmlns:pc="http://schemas.microsoft.com/office/powerpoint/2013/main/command">
-  <pc:docChgLst>
-    <pc:chgData name="janghoon jun" userId="056a5883350c2f5e" providerId="LiveId" clId="{6DA654A6-03B0-40F7-A259-B276216985A6}"/>
-    <pc:docChg chg="undo redo custSel addSld delSld modSld modSection">
-      <pc:chgData name="janghoon jun" userId="056a5883350c2f5e" providerId="LiveId" clId="{6DA654A6-03B0-40F7-A259-B276216985A6}" dt="2026-07-08T06:46:14.575" v="5364"/>
-      <pc:docMkLst>
-        <pc:docMk/>
-      </pc:docMkLst>
-      <pc:sldChg chg="modSp mod">
-        <pc:chgData name="janghoon jun" userId="056a5883350c2f5e" providerId="LiveId" clId="{6DA654A6-03B0-40F7-A259-B276216985A6}" dt="2026-07-08T05:33:53.531" v="3728" actId="207"/>
-        <pc:sldMkLst>
-          <pc:docMk/>
-          <pc:sldMk cId="0" sldId="256"/>
-        </pc:sldMkLst>
-        <pc:spChg chg="mod">
-          <ac:chgData name="janghoon jun" userId="056a5883350c2f5e" providerId="LiveId" clId="{6DA654A6-03B0-40F7-A259-B276216985A6}" dt="2026-07-08T05:33:53.531" v="3728" actId="207"/>
-          <ac:spMkLst>
-            <pc:docMk/>
-            <pc:sldMk cId="0" sldId="256"/>
-            <ac:spMk id="2" creationId="{00000000-0000-0000-0000-000000000000}"/>
-          </ac:spMkLst>
-        </pc:spChg>
-        <pc:spChg chg="mod">
-          <ac:chgData name="janghoon jun" userId="056a5883350c2f5e" providerId="LiveId" clId="{6DA654A6-03B0-40F7-A259-B276216985A6}" dt="2026-07-08T05:33:53.531" v="3728" actId="207"/>
-          <ac:spMkLst>
-            <pc:docMk/>
-            <pc:sldMk cId="0" sldId="256"/>
-            <ac:spMk id="3" creationId="{00000000-0000-0000-0000-000000000000}"/>
-          </ac:spMkLst>
-        </pc:spChg>
-      </pc:sldChg>
-      <pc:sldChg chg="modSp mod modNotesTx">
-        <pc:chgData name="janghoon jun" userId="056a5883350c2f5e" providerId="LiveId" clId="{6DA654A6-03B0-40F7-A259-B276216985A6}" dt="2026-07-07T05:53:01.136" v="2952" actId="20577"/>
-        <pc:sldMkLst>
-          <pc:docMk/>
-          <pc:sldMk cId="1998851532" sldId="256"/>
-        </pc:sldMkLst>
-        <pc:spChg chg="mod">
-          <ac:chgData name="janghoon jun" userId="056a5883350c2f5e" providerId="LiveId" clId="{6DA654A6-03B0-40F7-A259-B276216985A6}" dt="2026-07-07T05:52:56.148" v="2948" actId="20577"/>
-          <ac:spMkLst>
-            <pc:docMk/>
-            <pc:sldMk cId="1998851532" sldId="256"/>
-            <ac:spMk id="4" creationId="{4C14D9A0-1BB9-428F-B273-3CE24758593B}"/>
-          </ac:spMkLst>
-        </pc:spChg>
-        <pc:spChg chg="mod">
-          <ac:chgData name="janghoon jun" userId="056a5883350c2f5e" providerId="LiveId" clId="{6DA654A6-03B0-40F7-A259-B276216985A6}" dt="2026-07-07T05:53:01.136" v="2952" actId="20577"/>
-          <ac:spMkLst>
-            <pc:docMk/>
-            <pc:sldMk cId="1998851532" sldId="256"/>
-            <ac:spMk id="5" creationId="{94B21C1C-F3A0-440B-961E-968F2C77FB2A}"/>
-          </ac:spMkLst>
-        </pc:spChg>
-      </pc:sldChg>
-      <pc:sldChg chg="addSp delSp modSp mod">
-        <pc:chgData name="janghoon jun" userId="056a5883350c2f5e" providerId="LiveId" clId="{6DA654A6-03B0-40F7-A259-B276216985A6}" dt="2026-07-08T05:43:45.659" v="4097" actId="15"/>
-        <pc:sldMkLst>
-          <pc:docMk/>
-          <pc:sldMk cId="0" sldId="257"/>
-        </pc:sldMkLst>
-        <pc:spChg chg="mod">
-          <ac:chgData name="janghoon jun" userId="056a5883350c2f5e" providerId="LiveId" clId="{6DA654A6-03B0-40F7-A259-B276216985A6}" dt="2026-07-08T05:34:40.941" v="3768" actId="20577"/>
-          <ac:spMkLst>
-            <pc:docMk/>
-            <pc:sldMk cId="0" sldId="257"/>
-            <ac:spMk id="2" creationId="{00000000-0000-0000-0000-000000000000}"/>
-          </ac:spMkLst>
-        </pc:spChg>
-        <pc:spChg chg="del">
-          <ac:chgData name="janghoon jun" userId="056a5883350c2f5e" providerId="LiveId" clId="{6DA654A6-03B0-40F7-A259-B276216985A6}" dt="2026-07-08T05:34:32.979" v="3753" actId="478"/>
-          <ac:spMkLst>
-            <pc:docMk/>
-            <pc:sldMk cId="0" sldId="257"/>
-            <ac:spMk id="3" creationId="{00000000-0000-0000-0000-000000000000}"/>
-          </ac:spMkLst>
-        </pc:spChg>
-        <pc:spChg chg="del">
-          <ac:chgData name="janghoon jun" userId="056a5883350c2f5e" providerId="LiveId" clId="{6DA654A6-03B0-40F7-A259-B276216985A6}" dt="2026-07-08T05:34:29.459" v="3752" actId="478"/>
-          <ac:spMkLst>
-            <pc:docMk/>
-            <pc:sldMk cId="0" sldId="257"/>
-            <ac:spMk id="4" creationId="{00000000-0000-0000-0000-000000000000}"/>
-          </ac:spMkLst>
-        </pc:spChg>
-        <pc:spChg chg="del">
-          <ac:chgData name="janghoon jun" userId="056a5883350c2f5e" providerId="LiveId" clId="{6DA654A6-03B0-40F7-A259-B276216985A6}" dt="2026-07-08T05:34:29.459" v="3752" actId="478"/>
-          <ac:spMkLst>
-            <pc:docMk/>
-            <pc:sldMk cId="0" sldId="257"/>
-            <ac:spMk id="5" creationId="{00000000-0000-0000-0000-000000000000}"/>
-          </ac:spMkLst>
-        </pc:spChg>
-        <pc:spChg chg="del">
-          <ac:chgData name="janghoon jun" userId="056a5883350c2f5e" providerId="LiveId" clId="{6DA654A6-03B0-40F7-A259-B276216985A6}" dt="2026-07-08T05:34:29.459" v="3752" actId="478"/>
-          <ac:spMkLst>
-            <pc:docMk/>
-            <pc:sldMk cId="0" sldId="257"/>
-            <ac:spMk id="6" creationId="{00000000-0000-0000-0000-000000000000}"/>
-          </ac:spMkLst>
-        </pc:spChg>
-        <pc:spChg chg="del">
-          <ac:chgData name="janghoon jun" userId="056a5883350c2f5e" providerId="LiveId" clId="{6DA654A6-03B0-40F7-A259-B276216985A6}" dt="2026-07-08T05:34:29.459" v="3752" actId="478"/>
-          <ac:spMkLst>
-            <pc:docMk/>
-            <pc:sldMk cId="0" sldId="257"/>
-            <ac:spMk id="7" creationId="{00000000-0000-0000-0000-000000000000}"/>
-          </ac:spMkLst>
-        </pc:spChg>
-        <pc:spChg chg="add mod">
-          <ac:chgData name="janghoon jun" userId="056a5883350c2f5e" providerId="LiveId" clId="{6DA654A6-03B0-40F7-A259-B276216985A6}" dt="2026-07-08T05:43:45.659" v="4097" actId="15"/>
-          <ac:spMkLst>
-            <pc:docMk/>
-            <pc:sldMk cId="0" sldId="257"/>
-            <ac:spMk id="9" creationId="{CDE98734-B61B-52A9-4AC8-3A3A0C7E6EAE}"/>
-          </ac:spMkLst>
-        </pc:spChg>
-      </pc:sldChg>
-      <pc:sldChg chg="addSp delSp modSp del mod">
-        <pc:chgData name="janghoon jun" userId="056a5883350c2f5e" providerId="LiveId" clId="{6DA654A6-03B0-40F7-A259-B276216985A6}" dt="2026-07-08T05:51:26.233" v="4277" actId="47"/>
-        <pc:sldMkLst>
-          <pc:docMk/>
-          <pc:sldMk cId="0" sldId="258"/>
-        </pc:sldMkLst>
-        <pc:spChg chg="mod">
-          <ac:chgData name="janghoon jun" userId="056a5883350c2f5e" providerId="LiveId" clId="{6DA654A6-03B0-40F7-A259-B276216985A6}" dt="2026-07-08T05:45:13.417" v="4173" actId="20577"/>
-          <ac:spMkLst>
-            <pc:docMk/>
-            <pc:sldMk cId="0" sldId="258"/>
-            <ac:spMk id="2" creationId="{00000000-0000-0000-0000-000000000000}"/>
-          </ac:spMkLst>
-        </pc:spChg>
-        <pc:spChg chg="del mod">
-          <ac:chgData name="janghoon jun" userId="056a5883350c2f5e" providerId="LiveId" clId="{6DA654A6-03B0-40F7-A259-B276216985A6}" dt="2026-07-08T05:51:16.445" v="4274" actId="478"/>
-          <ac:spMkLst>
-            <pc:docMk/>
-            <pc:sldMk cId="0" sldId="258"/>
-            <ac:spMk id="3" creationId="{00000000-0000-0000-0000-000000000000}"/>
-          </ac:spMkLst>
-        </pc:spChg>
-        <pc:spChg chg="mod">
-          <ac:chgData name="janghoon jun" userId="056a5883350c2f5e" providerId="LiveId" clId="{6DA654A6-03B0-40F7-A259-B276216985A6}" dt="2026-07-08T05:51:23.393" v="4276" actId="1076"/>
-          <ac:spMkLst>
-            <pc:docMk/>
-            <pc:sldMk cId="0" sldId="258"/>
-            <ac:spMk id="4" creationId="{00000000-0000-0000-0000-000000000000}"/>
-          </ac:spMkLst>
-        </pc:spChg>
-        <pc:spChg chg="mod">
-          <ac:chgData name="janghoon jun" userId="056a5883350c2f5e" providerId="LiveId" clId="{6DA654A6-03B0-40F7-A259-B276216985A6}" dt="2026-07-08T05:51:23.393" v="4276" actId="1076"/>
-          <ac:spMkLst>
-            <pc:docMk/>
-            <pc:sldMk cId="0" sldId="258"/>
-            <ac:spMk id="6" creationId="{00000000-0000-0000-0000-000000000000}"/>
-          </ac:spMkLst>
-        </pc:spChg>
-        <pc:spChg chg="mod">
-          <ac:chgData name="janghoon jun" userId="056a5883350c2f5e" providerId="LiveId" clId="{6DA654A6-03B0-40F7-A259-B276216985A6}" dt="2026-07-08T05:51:23.393" v="4276" actId="1076"/>
-          <ac:spMkLst>
-            <pc:docMk/>
-            <pc:sldMk cId="0" sldId="258"/>
-            <ac:spMk id="7" creationId="{00000000-0000-0000-0000-000000000000}"/>
-          </ac:spMkLst>
-        </pc:spChg>
-        <pc:spChg chg="add del mod">
-          <ac:chgData name="janghoon jun" userId="056a5883350c2f5e" providerId="LiveId" clId="{6DA654A6-03B0-40F7-A259-B276216985A6}" dt="2026-07-08T05:51:18.243" v="4275" actId="478"/>
-          <ac:spMkLst>
-            <pc:docMk/>
-            <pc:sldMk cId="0" sldId="258"/>
-            <ac:spMk id="9" creationId="{EC8AC9C5-BC86-B8DF-827C-DAFEE8EE56B9}"/>
-          </ac:spMkLst>
-        </pc:spChg>
-        <pc:graphicFrameChg chg="mod">
-          <ac:chgData name="janghoon jun" userId="056a5883350c2f5e" providerId="LiveId" clId="{6DA654A6-03B0-40F7-A259-B276216985A6}" dt="2026-07-08T05:51:23.393" v="4276" actId="1076"/>
-          <ac:graphicFrameMkLst>
-            <pc:docMk/>
-            <pc:sldMk cId="0" sldId="258"/>
-            <ac:graphicFrameMk id="5" creationId="{00000000-0000-0000-0000-000000000000}"/>
-          </ac:graphicFrameMkLst>
-        </pc:graphicFrameChg>
-      </pc:sldChg>
-      <pc:sldChg chg="modSp add del mod">
-        <pc:chgData name="janghoon jun" userId="056a5883350c2f5e" providerId="LiveId" clId="{6DA654A6-03B0-40F7-A259-B276216985A6}" dt="2026-07-08T05:45:43.786" v="4178" actId="47"/>
-        <pc:sldMkLst>
-          <pc:docMk/>
-          <pc:sldMk cId="0" sldId="259"/>
-        </pc:sldMkLst>
-        <pc:spChg chg="mod">
-          <ac:chgData name="janghoon jun" userId="056a5883350c2f5e" providerId="LiveId" clId="{6DA654A6-03B0-40F7-A259-B276216985A6}" dt="2026-07-08T05:45:29.838" v="4175" actId="20577"/>
-          <ac:spMkLst>
-            <pc:docMk/>
-            <pc:sldMk cId="0" sldId="259"/>
-            <ac:spMk id="2" creationId="{00000000-0000-0000-0000-000000000000}"/>
-          </ac:spMkLst>
-        </pc:spChg>
-      </pc:sldChg>
-      <pc:sldChg chg="modSp del mod">
-        <pc:chgData name="janghoon jun" userId="056a5883350c2f5e" providerId="LiveId" clId="{6DA654A6-03B0-40F7-A259-B276216985A6}" dt="2026-07-08T05:46:52.228" v="4185" actId="47"/>
-        <pc:sldMkLst>
-          <pc:docMk/>
-          <pc:sldMk cId="0" sldId="260"/>
-        </pc:sldMkLst>
-        <pc:spChg chg="mod">
-          <ac:chgData name="janghoon jun" userId="056a5883350c2f5e" providerId="LiveId" clId="{6DA654A6-03B0-40F7-A259-B276216985A6}" dt="2026-07-08T05:45:49.064" v="4180" actId="20577"/>
-          <ac:spMkLst>
-            <pc:docMk/>
-            <pc:sldMk cId="0" sldId="260"/>
-            <ac:spMk id="2" creationId="{00000000-0000-0000-0000-000000000000}"/>
-          </ac:spMkLst>
-        </pc:spChg>
-        <pc:spChg chg="mod">
-          <ac:chgData name="janghoon jun" userId="056a5883350c2f5e" providerId="LiveId" clId="{6DA654A6-03B0-40F7-A259-B276216985A6}" dt="2026-07-08T05:46:11.423" v="4184" actId="14100"/>
-          <ac:spMkLst>
-            <pc:docMk/>
-            <pc:sldMk cId="0" sldId="260"/>
-            <ac:spMk id="4" creationId="{00000000-0000-0000-0000-000000000000}"/>
-          </ac:spMkLst>
-        </pc:spChg>
-        <pc:spChg chg="mod">
-          <ac:chgData name="janghoon jun" userId="056a5883350c2f5e" providerId="LiveId" clId="{6DA654A6-03B0-40F7-A259-B276216985A6}" dt="2026-07-08T05:46:06.972" v="4183" actId="1076"/>
-          <ac:spMkLst>
-            <pc:docMk/>
-            <pc:sldMk cId="0" sldId="260"/>
-            <ac:spMk id="13" creationId="{00000000-0000-0000-0000-000000000000}"/>
-          </ac:spMkLst>
-        </pc:spChg>
-        <pc:spChg chg="mod">
-          <ac:chgData name="janghoon jun" userId="056a5883350c2f5e" providerId="LiveId" clId="{6DA654A6-03B0-40F7-A259-B276216985A6}" dt="2026-07-08T05:46:06.972" v="4183" actId="1076"/>
-          <ac:spMkLst>
-            <pc:docMk/>
-            <pc:sldMk cId="0" sldId="260"/>
-            <ac:spMk id="14" creationId="{00000000-0000-0000-0000-000000000000}"/>
-          </ac:spMkLst>
-        </pc:spChg>
-        <pc:spChg chg="mod">
-          <ac:chgData name="janghoon jun" userId="056a5883350c2f5e" providerId="LiveId" clId="{6DA654A6-03B0-40F7-A259-B276216985A6}" dt="2026-07-08T05:46:06.972" v="4183" actId="1076"/>
-          <ac:spMkLst>
-            <pc:docMk/>
-            <pc:sldMk cId="0" sldId="260"/>
-            <ac:spMk id="15" creationId="{00000000-0000-0000-0000-000000000000}"/>
-          </ac:spMkLst>
-        </pc:spChg>
-      </pc:sldChg>
-      <pc:sldChg chg="addSp delSp modSp mod">
-        <pc:chgData name="janghoon jun" userId="056a5883350c2f5e" providerId="LiveId" clId="{6DA654A6-03B0-40F7-A259-B276216985A6}" dt="2026-07-08T06:00:00.079" v="4418" actId="20577"/>
-        <pc:sldMkLst>
-          <pc:docMk/>
-          <pc:sldMk cId="0" sldId="261"/>
-        </pc:sldMkLst>
-        <pc:spChg chg="mod">
-          <ac:chgData name="janghoon jun" userId="056a5883350c2f5e" providerId="LiveId" clId="{6DA654A6-03B0-40F7-A259-B276216985A6}" dt="2026-07-08T06:00:00.079" v="4418" actId="20577"/>
-          <ac:spMkLst>
-            <pc:docMk/>
-            <pc:sldMk cId="0" sldId="261"/>
-            <ac:spMk id="2" creationId="{00000000-0000-0000-0000-000000000000}"/>
-          </ac:spMkLst>
-        </pc:spChg>
-        <pc:spChg chg="mod">
-          <ac:chgData name="janghoon jun" userId="056a5883350c2f5e" providerId="LiveId" clId="{6DA654A6-03B0-40F7-A259-B276216985A6}" dt="2026-07-08T05:48:47.021" v="4222" actId="20577"/>
-          <ac:spMkLst>
-            <pc:docMk/>
-            <pc:sldMk cId="0" sldId="261"/>
-            <ac:spMk id="3" creationId="{00000000-0000-0000-0000-000000000000}"/>
-          </ac:spMkLst>
-        </pc:spChg>
-        <pc:spChg chg="mod">
-          <ac:chgData name="janghoon jun" userId="056a5883350c2f5e" providerId="LiveId" clId="{6DA654A6-03B0-40F7-A259-B276216985A6}" dt="2026-07-08T05:51:44.611" v="4278" actId="164"/>
-          <ac:spMkLst>
-            <pc:docMk/>
-            <pc:sldMk cId="0" sldId="261"/>
-            <ac:spMk id="4" creationId="{00000000-0000-0000-0000-000000000000}"/>
-          </ac:spMkLst>
-        </pc:spChg>
-        <pc:spChg chg="mod">
-          <ac:chgData name="janghoon jun" userId="056a5883350c2f5e" providerId="LiveId" clId="{6DA654A6-03B0-40F7-A259-B276216985A6}" dt="2026-07-08T05:51:44.611" v="4278" actId="164"/>
-          <ac:spMkLst>
-            <pc:docMk/>
-            <pc:sldMk cId="0" sldId="261"/>
-            <ac:spMk id="5" creationId="{00000000-0000-0000-0000-000000000000}"/>
-          </ac:spMkLst>
-        </pc:spChg>
-        <pc:spChg chg="mod">
-          <ac:chgData name="janghoon jun" userId="056a5883350c2f5e" providerId="LiveId" clId="{6DA654A6-03B0-40F7-A259-B276216985A6}" dt="2026-07-08T05:51:44.611" v="4278" actId="164"/>
-          <ac:spMkLst>
-            <pc:docMk/>
-            <pc:sldMk cId="0" sldId="261"/>
-            <ac:spMk id="6" creationId="{00000000-0000-0000-0000-000000000000}"/>
-          </ac:spMkLst>
-        </pc:spChg>
-        <pc:spChg chg="mod">
-          <ac:chgData name="janghoon jun" userId="056a5883350c2f5e" providerId="LiveId" clId="{6DA654A6-03B0-40F7-A259-B276216985A6}" dt="2026-07-08T05:51:44.611" v="4278" actId="164"/>
-          <ac:spMkLst>
-            <pc:docMk/>
-            <pc:sldMk cId="0" sldId="261"/>
-            <ac:spMk id="7" creationId="{00000000-0000-0000-0000-000000000000}"/>
-          </ac:spMkLst>
-        </pc:spChg>
-        <pc:spChg chg="mod">
-          <ac:chgData name="janghoon jun" userId="056a5883350c2f5e" providerId="LiveId" clId="{6DA654A6-03B0-40F7-A259-B276216985A6}" dt="2026-07-08T05:51:44.611" v="4278" actId="164"/>
-          <ac:spMkLst>
-            <pc:docMk/>
-            <pc:sldMk cId="0" sldId="261"/>
-            <ac:spMk id="8" creationId="{00000000-0000-0000-0000-000000000000}"/>
-          </ac:spMkLst>
-        </pc:spChg>
-        <pc:spChg chg="mod">
-          <ac:chgData name="janghoon jun" userId="056a5883350c2f5e" providerId="LiveId" clId="{6DA654A6-03B0-40F7-A259-B276216985A6}" dt="2026-07-08T05:51:44.611" v="4278" actId="164"/>
-          <ac:spMkLst>
-            <pc:docMk/>
-            <pc:sldMk cId="0" sldId="261"/>
-            <ac:spMk id="9" creationId="{00000000-0000-0000-0000-000000000000}"/>
-          </ac:spMkLst>
-        </pc:spChg>
-        <pc:spChg chg="mod">
-          <ac:chgData name="janghoon jun" userId="056a5883350c2f5e" providerId="LiveId" clId="{6DA654A6-03B0-40F7-A259-B276216985A6}" dt="2026-07-08T05:51:44.611" v="4278" actId="164"/>
-          <ac:spMkLst>
-            <pc:docMk/>
-            <pc:sldMk cId="0" sldId="261"/>
-            <ac:spMk id="10" creationId="{00000000-0000-0000-0000-000000000000}"/>
-          </ac:spMkLst>
-        </pc:spChg>
-        <pc:spChg chg="mod">
-          <ac:chgData name="janghoon jun" userId="056a5883350c2f5e" providerId="LiveId" clId="{6DA654A6-03B0-40F7-A259-B276216985A6}" dt="2026-07-08T05:51:44.611" v="4278" actId="164"/>
-          <ac:spMkLst>
-            <pc:docMk/>
-            <pc:sldMk cId="0" sldId="261"/>
-            <ac:spMk id="11" creationId="{00000000-0000-0000-0000-000000000000}"/>
-          </ac:spMkLst>
-        </pc:spChg>
-        <pc:spChg chg="mod">
-          <ac:chgData name="janghoon jun" userId="056a5883350c2f5e" providerId="LiveId" clId="{6DA654A6-03B0-40F7-A259-B276216985A6}" dt="2026-07-08T05:48:23.941" v="4215" actId="1076"/>
-          <ac:spMkLst>
-            <pc:docMk/>
-            <pc:sldMk cId="0" sldId="261"/>
-            <ac:spMk id="12" creationId="{00000000-0000-0000-0000-000000000000}"/>
-          </ac:spMkLst>
-        </pc:spChg>
-        <pc:spChg chg="del">
-          <ac:chgData name="janghoon jun" userId="056a5883350c2f5e" providerId="LiveId" clId="{6DA654A6-03B0-40F7-A259-B276216985A6}" dt="2026-07-08T05:48:11.777" v="4212" actId="478"/>
-          <ac:spMkLst>
-            <pc:docMk/>
-            <pc:sldMk cId="0" sldId="261"/>
-            <ac:spMk id="13" creationId="{00000000-0000-0000-0000-000000000000}"/>
-          </ac:spMkLst>
-        </pc:spChg>
-        <pc:spChg chg="mod">
-          <ac:chgData name="janghoon jun" userId="056a5883350c2f5e" providerId="LiveId" clId="{6DA654A6-03B0-40F7-A259-B276216985A6}" dt="2026-07-08T05:48:20.454" v="4214" actId="1076"/>
-          <ac:spMkLst>
-            <pc:docMk/>
-            <pc:sldMk cId="0" sldId="261"/>
-            <ac:spMk id="14" creationId="{00000000-0000-0000-0000-000000000000}"/>
-          </ac:spMkLst>
-        </pc:spChg>
-        <pc:grpChg chg="add mod">
-          <ac:chgData name="janghoon jun" userId="056a5883350c2f5e" providerId="LiveId" clId="{6DA654A6-03B0-40F7-A259-B276216985A6}" dt="2026-07-08T05:51:55.537" v="4280" actId="1076"/>
-          <ac:grpSpMkLst>
-            <pc:docMk/>
-            <pc:sldMk cId="0" sldId="261"/>
-            <ac:grpSpMk id="15" creationId="{8225C597-6B75-9D97-650E-7B4F65A7A9DF}"/>
-          </ac:grpSpMkLst>
-        </pc:grpChg>
-      </pc:sldChg>
-      <pc:sldChg chg="addSp modSp mod">
-        <pc:chgData name="janghoon jun" userId="056a5883350c2f5e" providerId="LiveId" clId="{6DA654A6-03B0-40F7-A259-B276216985A6}" dt="2026-07-08T06:00:08.652" v="4442" actId="20577"/>
-        <pc:sldMkLst>
-          <pc:docMk/>
-          <pc:sldMk cId="0" sldId="262"/>
-        </pc:sldMkLst>
-        <pc:spChg chg="mod">
-          <ac:chgData name="janghoon jun" userId="056a5883350c2f5e" providerId="LiveId" clId="{6DA654A6-03B0-40F7-A259-B276216985A6}" dt="2026-07-08T06:00:08.652" v="4442" actId="20577"/>
-          <ac:spMkLst>
-            <pc:docMk/>
-            <pc:sldMk cId="0" sldId="262"/>
-            <ac:spMk id="2" creationId="{00000000-0000-0000-0000-000000000000}"/>
-          </ac:spMkLst>
-        </pc:spChg>
-        <pc:spChg chg="mod">
-          <ac:chgData name="janghoon jun" userId="056a5883350c2f5e" providerId="LiveId" clId="{6DA654A6-03B0-40F7-A259-B276216985A6}" dt="2026-07-08T05:50:44.035" v="4253" actId="403"/>
-          <ac:spMkLst>
-            <pc:docMk/>
-            <pc:sldMk cId="0" sldId="262"/>
-            <ac:spMk id="3" creationId="{00000000-0000-0000-0000-000000000000}"/>
-          </ac:spMkLst>
-        </pc:spChg>
-        <pc:spChg chg="mod">
-          <ac:chgData name="janghoon jun" userId="056a5883350c2f5e" providerId="LiveId" clId="{6DA654A6-03B0-40F7-A259-B276216985A6}" dt="2026-07-08T05:49:40.729" v="4233" actId="164"/>
-          <ac:spMkLst>
-            <pc:docMk/>
-            <pc:sldMk cId="0" sldId="262"/>
-            <ac:spMk id="4" creationId="{00000000-0000-0000-0000-000000000000}"/>
-          </ac:spMkLst>
-        </pc:spChg>
-        <pc:spChg chg="mod">
-          <ac:chgData name="janghoon jun" userId="056a5883350c2f5e" providerId="LiveId" clId="{6DA654A6-03B0-40F7-A259-B276216985A6}" dt="2026-07-08T05:49:40.729" v="4233" actId="164"/>
-          <ac:spMkLst>
-            <pc:docMk/>
-            <pc:sldMk cId="0" sldId="262"/>
-            <ac:spMk id="5" creationId="{00000000-0000-0000-0000-000000000000}"/>
-          </ac:spMkLst>
-        </pc:spChg>
-        <pc:spChg chg="mod">
-          <ac:chgData name="janghoon jun" userId="056a5883350c2f5e" providerId="LiveId" clId="{6DA654A6-03B0-40F7-A259-B276216985A6}" dt="2026-07-08T05:50:05.153" v="4240" actId="164"/>
-          <ac:spMkLst>
-            <pc:docMk/>
-            <pc:sldMk cId="0" sldId="262"/>
-            <ac:spMk id="6" creationId="{00000000-0000-0000-0000-000000000000}"/>
-          </ac:spMkLst>
-        </pc:spChg>
-        <pc:spChg chg="mod">
-          <ac:chgData name="janghoon jun" userId="056a5883350c2f5e" providerId="LiveId" clId="{6DA654A6-03B0-40F7-A259-B276216985A6}" dt="2026-07-08T05:50:05.153" v="4240" actId="164"/>
-          <ac:spMkLst>
-            <pc:docMk/>
-            <pc:sldMk cId="0" sldId="262"/>
-            <ac:spMk id="7" creationId="{00000000-0000-0000-0000-000000000000}"/>
-          </ac:spMkLst>
-        </pc:spChg>
-        <pc:spChg chg="mod">
-          <ac:chgData name="janghoon jun" userId="056a5883350c2f5e" providerId="LiveId" clId="{6DA654A6-03B0-40F7-A259-B276216985A6}" dt="2026-07-08T05:50:10.135" v="4242" actId="164"/>
-          <ac:spMkLst>
-            <pc:docMk/>
-            <pc:sldMk cId="0" sldId="262"/>
-            <ac:spMk id="8" creationId="{00000000-0000-0000-0000-000000000000}"/>
-          </ac:spMkLst>
-        </pc:spChg>
-        <pc:spChg chg="mod">
-          <ac:chgData name="janghoon jun" userId="056a5883350c2f5e" providerId="LiveId" clId="{6DA654A6-03B0-40F7-A259-B276216985A6}" dt="2026-07-08T05:50:10.135" v="4242" actId="164"/>
-          <ac:spMkLst>
-            <pc:docMk/>
-            <pc:sldMk cId="0" sldId="262"/>
-            <ac:spMk id="9" creationId="{00000000-0000-0000-0000-000000000000}"/>
-          </ac:spMkLst>
-        </pc:spChg>
-        <pc:spChg chg="mod">
-          <ac:chgData name="janghoon jun" userId="056a5883350c2f5e" providerId="LiveId" clId="{6DA654A6-03B0-40F7-A259-B276216985A6}" dt="2026-07-08T05:50:15.213" v="4244" actId="164"/>
-          <ac:spMkLst>
-            <pc:docMk/>
-            <pc:sldMk cId="0" sldId="262"/>
-            <ac:spMk id="10" creationId="{00000000-0000-0000-0000-000000000000}"/>
-          </ac:spMkLst>
-        </pc:spChg>
-        <pc:spChg chg="mod">
-          <ac:chgData name="janghoon jun" userId="056a5883350c2f5e" providerId="LiveId" clId="{6DA654A6-03B0-40F7-A259-B276216985A6}" dt="2026-07-08T05:50:15.213" v="4244" actId="164"/>
-          <ac:spMkLst>
-            <pc:docMk/>
-            <pc:sldMk cId="0" sldId="262"/>
-            <ac:spMk id="11" creationId="{00000000-0000-0000-0000-000000000000}"/>
-          </ac:spMkLst>
-        </pc:spChg>
-        <pc:spChg chg="mod">
-          <ac:chgData name="janghoon jun" userId="056a5883350c2f5e" providerId="LiveId" clId="{6DA654A6-03B0-40F7-A259-B276216985A6}" dt="2026-07-08T05:50:18.768" v="4246" actId="164"/>
-          <ac:spMkLst>
-            <pc:docMk/>
-            <pc:sldMk cId="0" sldId="262"/>
-            <ac:spMk id="12" creationId="{00000000-0000-0000-0000-000000000000}"/>
-          </ac:spMkLst>
-        </pc:spChg>
-        <pc:spChg chg="mod">
-          <ac:chgData name="janghoon jun" userId="056a5883350c2f5e" providerId="LiveId" clId="{6DA654A6-03B0-40F7-A259-B276216985A6}" dt="2026-07-08T05:50:18.768" v="4246" actId="164"/>
-          <ac:spMkLst>
-            <pc:docMk/>
-            <pc:sldMk cId="0" sldId="262"/>
-            <ac:spMk id="13" creationId="{00000000-0000-0000-0000-000000000000}"/>
-          </ac:spMkLst>
-        </pc:spChg>
-        <pc:spChg chg="mod">
-          <ac:chgData name="janghoon jun" userId="056a5883350c2f5e" providerId="LiveId" clId="{6DA654A6-03B0-40F7-A259-B276216985A6}" dt="2026-07-08T05:50:22.367" v="4248" actId="164"/>
-          <ac:spMkLst>
-            <pc:docMk/>
-            <pc:sldMk cId="0" sldId="262"/>
-            <ac:spMk id="14" creationId="{00000000-0000-0000-0000-000000000000}"/>
-          </ac:spMkLst>
-        </pc:spChg>
-        <pc:spChg chg="mod">
-          <ac:chgData name="janghoon jun" userId="056a5883350c2f5e" providerId="LiveId" clId="{6DA654A6-03B0-40F7-A259-B276216985A6}" dt="2026-07-08T05:50:22.367" v="4248" actId="164"/>
-          <ac:spMkLst>
-            <pc:docMk/>
-            <pc:sldMk cId="0" sldId="262"/>
-            <ac:spMk id="15" creationId="{00000000-0000-0000-0000-000000000000}"/>
-          </ac:spMkLst>
-        </pc:spChg>
-        <pc:grpChg chg="add mod">
-          <ac:chgData name="janghoon jun" userId="056a5883350c2f5e" providerId="LiveId" clId="{6DA654A6-03B0-40F7-A259-B276216985A6}" dt="2026-07-08T05:50:40.974" v="4251" actId="1076"/>
-          <ac:grpSpMkLst>
-            <pc:docMk/>
-            <pc:sldMk cId="0" sldId="262"/>
-            <ac:grpSpMk id="16" creationId="{3A29F5B8-D1C5-25C1-4019-E66D4D1DB8F8}"/>
-          </ac:grpSpMkLst>
-        </pc:grpChg>
-        <pc:grpChg chg="add mod">
-          <ac:chgData name="janghoon jun" userId="056a5883350c2f5e" providerId="LiveId" clId="{6DA654A6-03B0-40F7-A259-B276216985A6}" dt="2026-07-08T05:50:40.974" v="4251" actId="1076"/>
-          <ac:grpSpMkLst>
-            <pc:docMk/>
-            <pc:sldMk cId="0" sldId="262"/>
-            <ac:grpSpMk id="17" creationId="{E075743F-97EA-F673-8801-05CDDD711D66}"/>
-          </ac:grpSpMkLst>
-        </pc:grpChg>
-        <pc:grpChg chg="add mod">
-          <ac:chgData name="janghoon jun" userId="056a5883350c2f5e" providerId="LiveId" clId="{6DA654A6-03B0-40F7-A259-B276216985A6}" dt="2026-07-08T05:50:40.974" v="4251" actId="1076"/>
-          <ac:grpSpMkLst>
-            <pc:docMk/>
-            <pc:sldMk cId="0" sldId="262"/>
-            <ac:grpSpMk id="18" creationId="{E46E2EE2-AC54-9926-16F3-618116102200}"/>
-          </ac:grpSpMkLst>
-        </pc:grpChg>
-        <pc:grpChg chg="add mod">
-          <ac:chgData name="janghoon jun" userId="056a5883350c2f5e" providerId="LiveId" clId="{6DA654A6-03B0-40F7-A259-B276216985A6}" dt="2026-07-08T05:50:40.974" v="4251" actId="1076"/>
-          <ac:grpSpMkLst>
-            <pc:docMk/>
-            <pc:sldMk cId="0" sldId="262"/>
-            <ac:grpSpMk id="19" creationId="{8B7A0DFD-AD14-A910-3A97-B14AE80A740D}"/>
-          </ac:grpSpMkLst>
-        </pc:grpChg>
-        <pc:grpChg chg="add mod">
-          <ac:chgData name="janghoon jun" userId="056a5883350c2f5e" providerId="LiveId" clId="{6DA654A6-03B0-40F7-A259-B276216985A6}" dt="2026-07-08T05:50:40.974" v="4251" actId="1076"/>
-          <ac:grpSpMkLst>
-            <pc:docMk/>
-            <pc:sldMk cId="0" sldId="262"/>
-            <ac:grpSpMk id="20" creationId="{A7102F49-B215-59FC-E07F-7F7931BAEA32}"/>
-          </ac:grpSpMkLst>
-        </pc:grpChg>
-        <pc:grpChg chg="add mod">
-          <ac:chgData name="janghoon jun" userId="056a5883350c2f5e" providerId="LiveId" clId="{6DA654A6-03B0-40F7-A259-B276216985A6}" dt="2026-07-08T05:50:40.974" v="4251" actId="1076"/>
-          <ac:grpSpMkLst>
-            <pc:docMk/>
-            <pc:sldMk cId="0" sldId="262"/>
-            <ac:grpSpMk id="21" creationId="{28228C55-A1D9-5786-00C9-90F6880B21EA}"/>
-          </ac:grpSpMkLst>
-        </pc:grpChg>
-      </pc:sldChg>
-      <pc:sldChg chg="modSp mod">
-        <pc:chgData name="janghoon jun" userId="056a5883350c2f5e" providerId="LiveId" clId="{6DA654A6-03B0-40F7-A259-B276216985A6}" dt="2026-07-08T06:12:06.137" v="4457" actId="6549"/>
-        <pc:sldMkLst>
-          <pc:docMk/>
-          <pc:sldMk cId="0" sldId="263"/>
-        </pc:sldMkLst>
-        <pc:spChg chg="mod">
-          <ac:chgData name="janghoon jun" userId="056a5883350c2f5e" providerId="LiveId" clId="{6DA654A6-03B0-40F7-A259-B276216985A6}" dt="2026-07-08T06:12:06.137" v="4457" actId="6549"/>
-          <ac:spMkLst>
-            <pc:docMk/>
-            <pc:sldMk cId="0" sldId="263"/>
-            <ac:spMk id="2" creationId="{00000000-0000-0000-0000-000000000000}"/>
-          </ac:spMkLst>
-        </pc:spChg>
-        <pc:spChg chg="mod">
-          <ac:chgData name="janghoon jun" userId="056a5883350c2f5e" providerId="LiveId" clId="{6DA654A6-03B0-40F7-A259-B276216985A6}" dt="2026-07-08T05:56:15.638" v="4353" actId="403"/>
-          <ac:spMkLst>
-            <pc:docMk/>
-            <pc:sldMk cId="0" sldId="263"/>
-            <ac:spMk id="3" creationId="{00000000-0000-0000-0000-000000000000}"/>
-          </ac:spMkLst>
-        </pc:spChg>
-        <pc:spChg chg="mod">
-          <ac:chgData name="janghoon jun" userId="056a5883350c2f5e" providerId="LiveId" clId="{6DA654A6-03B0-40F7-A259-B276216985A6}" dt="2026-07-08T05:54:27.414" v="4336" actId="20577"/>
-          <ac:spMkLst>
-            <pc:docMk/>
-            <pc:sldMk cId="0" sldId="263"/>
-            <ac:spMk id="4" creationId="{00000000-0000-0000-0000-000000000000}"/>
-          </ac:spMkLst>
-        </pc:spChg>
-        <pc:spChg chg="mod">
-          <ac:chgData name="janghoon jun" userId="056a5883350c2f5e" providerId="LiveId" clId="{6DA654A6-03B0-40F7-A259-B276216985A6}" dt="2026-07-08T05:54:25.067" v="4335" actId="20577"/>
-          <ac:spMkLst>
-            <pc:docMk/>
-            <pc:sldMk cId="0" sldId="263"/>
-            <ac:spMk id="5" creationId="{00000000-0000-0000-0000-000000000000}"/>
-          </ac:spMkLst>
-        </pc:spChg>
-        <pc:spChg chg="mod">
-          <ac:chgData name="janghoon jun" userId="056a5883350c2f5e" providerId="LiveId" clId="{6DA654A6-03B0-40F7-A259-B276216985A6}" dt="2026-07-08T05:54:15.690" v="4334" actId="20577"/>
-          <ac:spMkLst>
-            <pc:docMk/>
-            <pc:sldMk cId="0" sldId="263"/>
-            <ac:spMk id="6" creationId="{00000000-0000-0000-0000-000000000000}"/>
-          </ac:spMkLst>
-        </pc:spChg>
-        <pc:spChg chg="mod">
-          <ac:chgData name="janghoon jun" userId="056a5883350c2f5e" providerId="LiveId" clId="{6DA654A6-03B0-40F7-A259-B276216985A6}" dt="2026-07-08T05:53:47.129" v="4318" actId="1076"/>
-          <ac:spMkLst>
-            <pc:docMk/>
-            <pc:sldMk cId="0" sldId="263"/>
-            <ac:spMk id="7" creationId="{00000000-0000-0000-0000-000000000000}"/>
-          </ac:spMkLst>
-        </pc:spChg>
-        <pc:spChg chg="mod">
-          <ac:chgData name="janghoon jun" userId="056a5883350c2f5e" providerId="LiveId" clId="{6DA654A6-03B0-40F7-A259-B276216985A6}" dt="2026-07-08T05:55:39.223" v="4346" actId="403"/>
-          <ac:spMkLst>
-            <pc:docMk/>
-            <pc:sldMk cId="0" sldId="263"/>
-            <ac:spMk id="8" creationId="{00000000-0000-0000-0000-000000000000}"/>
-          </ac:spMkLst>
-        </pc:spChg>
-      </pc:sldChg>
-      <pc:sldChg chg="modSp mod">
-        <pc:chgData name="janghoon jun" userId="056a5883350c2f5e" providerId="LiveId" clId="{6DA654A6-03B0-40F7-A259-B276216985A6}" dt="2026-07-08T06:12:15.086" v="4460" actId="6549"/>
-        <pc:sldMkLst>
-          <pc:docMk/>
-          <pc:sldMk cId="0" sldId="264"/>
-        </pc:sldMkLst>
-        <pc:spChg chg="mod">
-          <ac:chgData name="janghoon jun" userId="056a5883350c2f5e" providerId="LiveId" clId="{6DA654A6-03B0-40F7-A259-B276216985A6}" dt="2026-07-08T06:12:15.086" v="4460" actId="6549"/>
-          <ac:spMkLst>
-            <pc:docMk/>
-            <pc:sldMk cId="0" sldId="264"/>
-            <ac:spMk id="2" creationId="{00000000-0000-0000-0000-000000000000}"/>
-          </ac:spMkLst>
-        </pc:spChg>
-      </pc:sldChg>
-      <pc:sldChg chg="modSp mod">
-        <pc:chgData name="janghoon jun" userId="056a5883350c2f5e" providerId="LiveId" clId="{6DA654A6-03B0-40F7-A259-B276216985A6}" dt="2026-07-08T06:13:33.196" v="4488" actId="403"/>
-        <pc:sldMkLst>
-          <pc:docMk/>
-          <pc:sldMk cId="0" sldId="265"/>
-        </pc:sldMkLst>
-        <pc:spChg chg="mod">
-          <ac:chgData name="janghoon jun" userId="056a5883350c2f5e" providerId="LiveId" clId="{6DA654A6-03B0-40F7-A259-B276216985A6}" dt="2026-07-08T05:58:26.645" v="4403" actId="21"/>
-          <ac:spMkLst>
-            <pc:docMk/>
-            <pc:sldMk cId="0" sldId="265"/>
-            <ac:spMk id="2" creationId="{00000000-0000-0000-0000-000000000000}"/>
-          </ac:spMkLst>
-        </pc:spChg>
-        <pc:spChg chg="mod">
-          <ac:chgData name="janghoon jun" userId="056a5883350c2f5e" providerId="LiveId" clId="{6DA654A6-03B0-40F7-A259-B276216985A6}" dt="2026-07-08T06:13:33.196" v="4488" actId="403"/>
-          <ac:spMkLst>
-            <pc:docMk/>
-            <pc:sldMk cId="0" sldId="265"/>
-            <ac:spMk id="3" creationId="{00000000-0000-0000-0000-000000000000}"/>
-          </ac:spMkLst>
-        </pc:spChg>
-        <pc:spChg chg="mod">
-          <ac:chgData name="janghoon jun" userId="056a5883350c2f5e" providerId="LiveId" clId="{6DA654A6-03B0-40F7-A259-B276216985A6}" dt="2026-07-08T05:58:45.261" v="4411" actId="1076"/>
-          <ac:spMkLst>
-            <pc:docMk/>
-            <pc:sldMk cId="0" sldId="265"/>
-            <ac:spMk id="4" creationId="{00000000-0000-0000-0000-000000000000}"/>
-          </ac:spMkLst>
-        </pc:spChg>
-        <pc:spChg chg="mod">
-          <ac:chgData name="janghoon jun" userId="056a5883350c2f5e" providerId="LiveId" clId="{6DA654A6-03B0-40F7-A259-B276216985A6}" dt="2026-07-08T05:58:45.261" v="4411" actId="1076"/>
-          <ac:spMkLst>
-            <pc:docMk/>
-            <pc:sldMk cId="0" sldId="265"/>
-            <ac:spMk id="5" creationId="{00000000-0000-0000-0000-000000000000}"/>
-          </ac:spMkLst>
-        </pc:spChg>
-        <pc:spChg chg="mod">
-          <ac:chgData name="janghoon jun" userId="056a5883350c2f5e" providerId="LiveId" clId="{6DA654A6-03B0-40F7-A259-B276216985A6}" dt="2026-07-08T05:58:45.261" v="4411" actId="1076"/>
-          <ac:spMkLst>
-            <pc:docMk/>
-            <pc:sldMk cId="0" sldId="265"/>
-            <ac:spMk id="6" creationId="{00000000-0000-0000-0000-000000000000}"/>
-          </ac:spMkLst>
-        </pc:spChg>
-        <pc:spChg chg="mod">
-          <ac:chgData name="janghoon jun" userId="056a5883350c2f5e" providerId="LiveId" clId="{6DA654A6-03B0-40F7-A259-B276216985A6}" dt="2026-07-08T05:58:45.261" v="4411" actId="1076"/>
-          <ac:spMkLst>
-            <pc:docMk/>
-            <pc:sldMk cId="0" sldId="265"/>
-            <ac:spMk id="7" creationId="{00000000-0000-0000-0000-000000000000}"/>
-          </ac:spMkLst>
-        </pc:spChg>
-        <pc:spChg chg="mod">
-          <ac:chgData name="janghoon jun" userId="056a5883350c2f5e" providerId="LiveId" clId="{6DA654A6-03B0-40F7-A259-B276216985A6}" dt="2026-07-08T05:58:45.261" v="4411" actId="1076"/>
-          <ac:spMkLst>
-            <pc:docMk/>
-            <pc:sldMk cId="0" sldId="265"/>
-            <ac:spMk id="8" creationId="{00000000-0000-0000-0000-000000000000}"/>
-          </ac:spMkLst>
-        </pc:spChg>
-        <pc:spChg chg="mod">
-          <ac:chgData name="janghoon jun" userId="056a5883350c2f5e" providerId="LiveId" clId="{6DA654A6-03B0-40F7-A259-B276216985A6}" dt="2026-07-08T05:58:45.261" v="4411" actId="1076"/>
-          <ac:spMkLst>
-            <pc:docMk/>
-            <pc:sldMk cId="0" sldId="265"/>
-            <ac:spMk id="9" creationId="{00000000-0000-0000-0000-000000000000}"/>
-          </ac:spMkLst>
-        </pc:spChg>
-        <pc:spChg chg="mod">
-          <ac:chgData name="janghoon jun" userId="056a5883350c2f5e" providerId="LiveId" clId="{6DA654A6-03B0-40F7-A259-B276216985A6}" dt="2026-07-08T05:58:45.261" v="4411" actId="1076"/>
-          <ac:spMkLst>
-            <pc:docMk/>
-            <pc:sldMk cId="0" sldId="265"/>
-            <ac:spMk id="10" creationId="{00000000-0000-0000-0000-000000000000}"/>
-          </ac:spMkLst>
-        </pc:spChg>
-        <pc:spChg chg="mod">
-          <ac:chgData name="janghoon jun" userId="056a5883350c2f5e" providerId="LiveId" clId="{6DA654A6-03B0-40F7-A259-B276216985A6}" dt="2026-07-08T05:58:45.261" v="4411" actId="1076"/>
-          <ac:spMkLst>
-            <pc:docMk/>
-            <pc:sldMk cId="0" sldId="265"/>
-            <ac:spMk id="11" creationId="{00000000-0000-0000-0000-000000000000}"/>
-          </ac:spMkLst>
-        </pc:spChg>
-        <pc:spChg chg="mod">
-          <ac:chgData name="janghoon jun" userId="056a5883350c2f5e" providerId="LiveId" clId="{6DA654A6-03B0-40F7-A259-B276216985A6}" dt="2026-07-08T05:58:45.261" v="4411" actId="1076"/>
-          <ac:spMkLst>
-            <pc:docMk/>
-            <pc:sldMk cId="0" sldId="265"/>
-            <ac:spMk id="12" creationId="{00000000-0000-0000-0000-000000000000}"/>
-          </ac:spMkLst>
-        </pc:spChg>
-      </pc:sldChg>
-      <pc:sldChg chg="modSp mod">
-        <pc:chgData name="janghoon jun" userId="056a5883350c2f5e" providerId="LiveId" clId="{6DA654A6-03B0-40F7-A259-B276216985A6}" dt="2026-07-08T06:12:30.207" v="4466" actId="6549"/>
-        <pc:sldMkLst>
-          <pc:docMk/>
-          <pc:sldMk cId="0" sldId="266"/>
-        </pc:sldMkLst>
-        <pc:spChg chg="mod">
-          <ac:chgData name="janghoon jun" userId="056a5883350c2f5e" providerId="LiveId" clId="{6DA654A6-03B0-40F7-A259-B276216985A6}" dt="2026-07-08T06:12:30.207" v="4466" actId="6549"/>
-          <ac:spMkLst>
-            <pc:docMk/>
-            <pc:sldMk cId="0" sldId="266"/>
-            <ac:spMk id="2" creationId="{00000000-0000-0000-0000-000000000000}"/>
-          </ac:spMkLst>
-        </pc:spChg>
-      </pc:sldChg>
-      <pc:sldChg chg="modSp mod">
-        <pc:chgData name="janghoon jun" userId="056a5883350c2f5e" providerId="LiveId" clId="{6DA654A6-03B0-40F7-A259-B276216985A6}" dt="2026-07-08T06:13:10.717" v="4485" actId="1076"/>
-        <pc:sldMkLst>
-          <pc:docMk/>
-          <pc:sldMk cId="0" sldId="267"/>
-        </pc:sldMkLst>
-        <pc:spChg chg="mod">
-          <ac:chgData name="janghoon jun" userId="056a5883350c2f5e" providerId="LiveId" clId="{6DA654A6-03B0-40F7-A259-B276216985A6}" dt="2026-07-08T06:12:58.529" v="4479" actId="20577"/>
-          <ac:spMkLst>
-            <pc:docMk/>
-            <pc:sldMk cId="0" sldId="267"/>
-            <ac:spMk id="2" creationId="{00000000-0000-0000-0000-000000000000}"/>
-          </ac:spMkLst>
-        </pc:spChg>
-        <pc:spChg chg="mod">
-          <ac:chgData name="janghoon jun" userId="056a5883350c2f5e" providerId="LiveId" clId="{6DA654A6-03B0-40F7-A259-B276216985A6}" dt="2026-07-08T06:13:05.102" v="4484" actId="403"/>
-          <ac:spMkLst>
-            <pc:docMk/>
-            <pc:sldMk cId="0" sldId="267"/>
-            <ac:spMk id="3" creationId="{00000000-0000-0000-0000-000000000000}"/>
-          </ac:spMkLst>
-        </pc:spChg>
-        <pc:spChg chg="mod">
-          <ac:chgData name="janghoon jun" userId="056a5883350c2f5e" providerId="LiveId" clId="{6DA654A6-03B0-40F7-A259-B276216985A6}" dt="2026-07-08T06:13:10.717" v="4485" actId="1076"/>
-          <ac:spMkLst>
-            <pc:docMk/>
-            <pc:sldMk cId="0" sldId="267"/>
-            <ac:spMk id="4" creationId="{00000000-0000-0000-0000-000000000000}"/>
-          </ac:spMkLst>
-        </pc:spChg>
-        <pc:spChg chg="mod">
-          <ac:chgData name="janghoon jun" userId="056a5883350c2f5e" providerId="LiveId" clId="{6DA654A6-03B0-40F7-A259-B276216985A6}" dt="2026-07-08T06:13:10.717" v="4485" actId="1076"/>
-          <ac:spMkLst>
-            <pc:docMk/>
-            <pc:sldMk cId="0" sldId="267"/>
-            <ac:spMk id="5" creationId="{00000000-0000-0000-0000-000000000000}"/>
-          </ac:spMkLst>
-        </pc:spChg>
-        <pc:spChg chg="mod">
-          <ac:chgData name="janghoon jun" userId="056a5883350c2f5e" providerId="LiveId" clId="{6DA654A6-03B0-40F7-A259-B276216985A6}" dt="2026-07-08T06:13:10.717" v="4485" actId="1076"/>
-          <ac:spMkLst>
-            <pc:docMk/>
-            <pc:sldMk cId="0" sldId="267"/>
-            <ac:spMk id="6" creationId="{00000000-0000-0000-0000-000000000000}"/>
-          </ac:spMkLst>
-        </pc:spChg>
-        <pc:spChg chg="mod">
-          <ac:chgData name="janghoon jun" userId="056a5883350c2f5e" providerId="LiveId" clId="{6DA654A6-03B0-40F7-A259-B276216985A6}" dt="2026-07-08T06:13:10.717" v="4485" actId="1076"/>
-          <ac:spMkLst>
-            <pc:docMk/>
-            <pc:sldMk cId="0" sldId="267"/>
-            <ac:spMk id="7" creationId="{00000000-0000-0000-0000-000000000000}"/>
-          </ac:spMkLst>
-        </pc:spChg>
-        <pc:spChg chg="mod">
-          <ac:chgData name="janghoon jun" userId="056a5883350c2f5e" providerId="LiveId" clId="{6DA654A6-03B0-40F7-A259-B276216985A6}" dt="2026-07-08T06:13:10.717" v="4485" actId="1076"/>
-          <ac:spMkLst>
-            <pc:docMk/>
-            <pc:sldMk cId="0" sldId="267"/>
-            <ac:spMk id="8" creationId="{00000000-0000-0000-0000-000000000000}"/>
-          </ac:spMkLst>
-        </pc:spChg>
-        <pc:spChg chg="mod">
-          <ac:chgData name="janghoon jun" userId="056a5883350c2f5e" providerId="LiveId" clId="{6DA654A6-03B0-40F7-A259-B276216985A6}" dt="2026-07-08T06:13:10.717" v="4485" actId="1076"/>
-          <ac:spMkLst>
-            <pc:docMk/>
-            <pc:sldMk cId="0" sldId="267"/>
-            <ac:spMk id="9" creationId="{00000000-0000-0000-0000-000000000000}"/>
-          </ac:spMkLst>
-        </pc:spChg>
-        <pc:spChg chg="mod">
-          <ac:chgData name="janghoon jun" userId="056a5883350c2f5e" providerId="LiveId" clId="{6DA654A6-03B0-40F7-A259-B276216985A6}" dt="2026-07-08T06:13:10.717" v="4485" actId="1076"/>
-          <ac:spMkLst>
-            <pc:docMk/>
-            <pc:sldMk cId="0" sldId="267"/>
-            <ac:spMk id="10" creationId="{00000000-0000-0000-0000-000000000000}"/>
-          </ac:spMkLst>
-        </pc:spChg>
-        <pc:spChg chg="mod">
-          <ac:chgData name="janghoon jun" userId="056a5883350c2f5e" providerId="LiveId" clId="{6DA654A6-03B0-40F7-A259-B276216985A6}" dt="2026-07-08T06:13:10.717" v="4485" actId="1076"/>
-          <ac:spMkLst>
-            <pc:docMk/>
-            <pc:sldMk cId="0" sldId="267"/>
-            <ac:spMk id="11" creationId="{00000000-0000-0000-0000-000000000000}"/>
-          </ac:spMkLst>
-        </pc:spChg>
-        <pc:spChg chg="mod">
-          <ac:chgData name="janghoon jun" userId="056a5883350c2f5e" providerId="LiveId" clId="{6DA654A6-03B0-40F7-A259-B276216985A6}" dt="2026-07-08T06:13:10.717" v="4485" actId="1076"/>
-          <ac:spMkLst>
-            <pc:docMk/>
-            <pc:sldMk cId="0" sldId="267"/>
-            <ac:spMk id="12" creationId="{00000000-0000-0000-0000-000000000000}"/>
-          </ac:spMkLst>
-        </pc:spChg>
-        <pc:spChg chg="mod">
-          <ac:chgData name="janghoon jun" userId="056a5883350c2f5e" providerId="LiveId" clId="{6DA654A6-03B0-40F7-A259-B276216985A6}" dt="2026-07-08T06:13:10.717" v="4485" actId="1076"/>
-          <ac:spMkLst>
-            <pc:docMk/>
-            <pc:sldMk cId="0" sldId="267"/>
-            <ac:spMk id="13" creationId="{00000000-0000-0000-0000-000000000000}"/>
-          </ac:spMkLst>
-        </pc:spChg>
-      </pc:sldChg>
-      <pc:sldChg chg="delSp modSp mod">
-        <pc:chgData name="janghoon jun" userId="056a5883350c2f5e" providerId="LiveId" clId="{6DA654A6-03B0-40F7-A259-B276216985A6}" dt="2026-07-08T06:15:18.875" v="4513" actId="20577"/>
-        <pc:sldMkLst>
-          <pc:docMk/>
-          <pc:sldMk cId="0" sldId="268"/>
-        </pc:sldMkLst>
-        <pc:spChg chg="mod">
-          <ac:chgData name="janghoon jun" userId="056a5883350c2f5e" providerId="LiveId" clId="{6DA654A6-03B0-40F7-A259-B276216985A6}" dt="2026-07-08T06:13:46.853" v="4492" actId="21"/>
-          <ac:spMkLst>
-            <pc:docMk/>
-            <pc:sldMk cId="0" sldId="268"/>
-            <ac:spMk id="2" creationId="{00000000-0000-0000-0000-000000000000}"/>
-          </ac:spMkLst>
-        </pc:spChg>
-        <pc:spChg chg="mod">
-          <ac:chgData name="janghoon jun" userId="056a5883350c2f5e" providerId="LiveId" clId="{6DA654A6-03B0-40F7-A259-B276216985A6}" dt="2026-07-08T06:13:59.199" v="4500" actId="403"/>
-          <ac:spMkLst>
-            <pc:docMk/>
-            <pc:sldMk cId="0" sldId="268"/>
-            <ac:spMk id="3" creationId="{00000000-0000-0000-0000-000000000000}"/>
-          </ac:spMkLst>
-        </pc:spChg>
-        <pc:spChg chg="mod">
-          <ac:chgData name="janghoon jun" userId="056a5883350c2f5e" providerId="LiveId" clId="{6DA654A6-03B0-40F7-A259-B276216985A6}" dt="2026-07-08T06:15:18.875" v="4513" actId="20577"/>
-          <ac:spMkLst>
-            <pc:docMk/>
-            <pc:sldMk cId="0" sldId="268"/>
-            <ac:spMk id="4" creationId="{00000000-0000-0000-0000-000000000000}"/>
-          </ac:spMkLst>
-        </pc:spChg>
-        <pc:spChg chg="mod">
-          <ac:chgData name="janghoon jun" userId="056a5883350c2f5e" providerId="LiveId" clId="{6DA654A6-03B0-40F7-A259-B276216985A6}" dt="2026-07-08T06:15:06.442" v="4509" actId="1076"/>
-          <ac:spMkLst>
-            <pc:docMk/>
-            <pc:sldMk cId="0" sldId="268"/>
-            <ac:spMk id="5" creationId="{00000000-0000-0000-0000-000000000000}"/>
-          </ac:spMkLst>
-        </pc:spChg>
-        <pc:spChg chg="mod">
-          <ac:chgData name="janghoon jun" userId="056a5883350c2f5e" providerId="LiveId" clId="{6DA654A6-03B0-40F7-A259-B276216985A6}" dt="2026-07-08T06:15:06.442" v="4509" actId="1076"/>
-          <ac:spMkLst>
-            <pc:docMk/>
-            <pc:sldMk cId="0" sldId="268"/>
-            <ac:spMk id="6" creationId="{00000000-0000-0000-0000-000000000000}"/>
-          </ac:spMkLst>
-        </pc:spChg>
-        <pc:spChg chg="mod">
-          <ac:chgData name="janghoon jun" userId="056a5883350c2f5e" providerId="LiveId" clId="{6DA654A6-03B0-40F7-A259-B276216985A6}" dt="2026-07-08T06:15:06.442" v="4509" actId="1076"/>
-          <ac:spMkLst>
-            <pc:docMk/>
-            <pc:sldMk cId="0" sldId="268"/>
-            <ac:spMk id="7" creationId="{00000000-0000-0000-0000-000000000000}"/>
-          </ac:spMkLst>
-        </pc:spChg>
-        <pc:spChg chg="mod">
-          <ac:chgData name="janghoon jun" userId="056a5883350c2f5e" providerId="LiveId" clId="{6DA654A6-03B0-40F7-A259-B276216985A6}" dt="2026-07-08T06:15:06.442" v="4509" actId="1076"/>
-          <ac:spMkLst>
-            <pc:docMk/>
-            <pc:sldMk cId="0" sldId="268"/>
-            <ac:spMk id="8" creationId="{00000000-0000-0000-0000-000000000000}"/>
-          </ac:spMkLst>
-        </pc:spChg>
-        <pc:spChg chg="mod">
-          <ac:chgData name="janghoon jun" userId="056a5883350c2f5e" providerId="LiveId" clId="{6DA654A6-03B0-40F7-A259-B276216985A6}" dt="2026-07-08T06:15:02.593" v="4508" actId="1076"/>
-          <ac:spMkLst>
-            <pc:docMk/>
-            <pc:sldMk cId="0" sldId="268"/>
-            <ac:spMk id="9" creationId="{00000000-0000-0000-0000-000000000000}"/>
-          </ac:spMkLst>
-        </pc:spChg>
-        <pc:spChg chg="mod">
-          <ac:chgData name="janghoon jun" userId="056a5883350c2f5e" providerId="LiveId" clId="{6DA654A6-03B0-40F7-A259-B276216985A6}" dt="2026-07-08T06:15:02.593" v="4508" actId="1076"/>
-          <ac:spMkLst>
-            <pc:docMk/>
-            <pc:sldMk cId="0" sldId="268"/>
-            <ac:spMk id="10" creationId="{00000000-0000-0000-0000-000000000000}"/>
-          </ac:spMkLst>
-        </pc:spChg>
-        <pc:spChg chg="del mod">
-          <ac:chgData name="janghoon jun" userId="056a5883350c2f5e" providerId="LiveId" clId="{6DA654A6-03B0-40F7-A259-B276216985A6}" dt="2026-07-08T06:14:40.272" v="4506" actId="478"/>
-          <ac:spMkLst>
-            <pc:docMk/>
-            <pc:sldMk cId="0" sldId="268"/>
-            <ac:spMk id="11" creationId="{00000000-0000-0000-0000-000000000000}"/>
-          </ac:spMkLst>
-        </pc:spChg>
-        <pc:spChg chg="del mod">
-          <ac:chgData name="janghoon jun" userId="056a5883350c2f5e" providerId="LiveId" clId="{6DA654A6-03B0-40F7-A259-B276216985A6}" dt="2026-07-08T06:14:40.272" v="4506" actId="478"/>
-          <ac:spMkLst>
-            <pc:docMk/>
-            <pc:sldMk cId="0" sldId="268"/>
-            <ac:spMk id="12" creationId="{00000000-0000-0000-0000-000000000000}"/>
-          </ac:spMkLst>
-        </pc:spChg>
-      </pc:sldChg>
-      <pc:sldChg chg="modSp mod">
-        <pc:chgData name="janghoon jun" userId="056a5883350c2f5e" providerId="LiveId" clId="{6DA654A6-03B0-40F7-A259-B276216985A6}" dt="2026-07-08T06:16:12.063" v="4530" actId="20577"/>
-        <pc:sldMkLst>
-          <pc:docMk/>
-          <pc:sldMk cId="0" sldId="269"/>
-        </pc:sldMkLst>
-        <pc:spChg chg="mod">
-          <ac:chgData name="janghoon jun" userId="056a5883350c2f5e" providerId="LiveId" clId="{6DA654A6-03B0-40F7-A259-B276216985A6}" dt="2026-07-08T06:16:12.063" v="4530" actId="20577"/>
-          <ac:spMkLst>
-            <pc:docMk/>
-            <pc:sldMk cId="0" sldId="269"/>
-            <ac:spMk id="2" creationId="{00000000-0000-0000-0000-000000000000}"/>
-          </ac:spMkLst>
-        </pc:spChg>
-      </pc:sldChg>
-      <pc:sldChg chg="modSp mod">
-        <pc:chgData name="janghoon jun" userId="056a5883350c2f5e" providerId="LiveId" clId="{6DA654A6-03B0-40F7-A259-B276216985A6}" dt="2026-07-08T06:16:30.386" v="4541" actId="20577"/>
-        <pc:sldMkLst>
-          <pc:docMk/>
-          <pc:sldMk cId="0" sldId="270"/>
-        </pc:sldMkLst>
-        <pc:spChg chg="mod">
-          <ac:chgData name="janghoon jun" userId="056a5883350c2f5e" providerId="LiveId" clId="{6DA654A6-03B0-40F7-A259-B276216985A6}" dt="2026-07-08T06:16:30.386" v="4541" actId="20577"/>
-          <ac:spMkLst>
-            <pc:docMk/>
-            <pc:sldMk cId="0" sldId="270"/>
-            <ac:spMk id="2" creationId="{00000000-0000-0000-0000-000000000000}"/>
-          </ac:spMkLst>
-        </pc:spChg>
-      </pc:sldChg>
-      <pc:sldChg chg="delSp modSp mod">
-        <pc:chgData name="janghoon jun" userId="056a5883350c2f5e" providerId="LiveId" clId="{6DA654A6-03B0-40F7-A259-B276216985A6}" dt="2026-07-08T06:22:15.352" v="4772" actId="14100"/>
-        <pc:sldMkLst>
-          <pc:docMk/>
-          <pc:sldMk cId="0" sldId="271"/>
-        </pc:sldMkLst>
-        <pc:spChg chg="mod">
-          <ac:chgData name="janghoon jun" userId="056a5883350c2f5e" providerId="LiveId" clId="{6DA654A6-03B0-40F7-A259-B276216985A6}" dt="2026-07-08T06:21:52.005" v="4770" actId="6549"/>
-          <ac:spMkLst>
-            <pc:docMk/>
-            <pc:sldMk cId="0" sldId="271"/>
-            <ac:spMk id="2" creationId="{00000000-0000-0000-0000-000000000000}"/>
-          </ac:spMkLst>
-        </pc:spChg>
-        <pc:spChg chg="del">
-          <ac:chgData name="janghoon jun" userId="056a5883350c2f5e" providerId="LiveId" clId="{6DA654A6-03B0-40F7-A259-B276216985A6}" dt="2026-07-08T06:22:09.905" v="4771" actId="478"/>
-          <ac:spMkLst>
-            <pc:docMk/>
-            <pc:sldMk cId="0" sldId="271"/>
-            <ac:spMk id="8" creationId="{00000000-0000-0000-0000-000000000000}"/>
-          </ac:spMkLst>
-        </pc:spChg>
-        <pc:graphicFrameChg chg="mod modGraphic">
-          <ac:chgData name="janghoon jun" userId="056a5883350c2f5e" providerId="LiveId" clId="{6DA654A6-03B0-40F7-A259-B276216985A6}" dt="2026-07-08T06:22:15.352" v="4772" actId="14100"/>
-          <ac:graphicFrameMkLst>
-            <pc:docMk/>
-            <pc:sldMk cId="0" sldId="271"/>
-            <ac:graphicFrameMk id="4" creationId="{00000000-0000-0000-0000-000000000000}"/>
-          </ac:graphicFrameMkLst>
-        </pc:graphicFrameChg>
-      </pc:sldChg>
-      <pc:sldChg chg="modSp del mod">
-        <pc:chgData name="janghoon jun" userId="056a5883350c2f5e" providerId="LiveId" clId="{6DA654A6-03B0-40F7-A259-B276216985A6}" dt="2026-07-08T06:30:34.289" v="5114" actId="47"/>
-        <pc:sldMkLst>
-          <pc:docMk/>
-          <pc:sldMk cId="0" sldId="272"/>
-        </pc:sldMkLst>
-        <pc:spChg chg="mod">
-          <ac:chgData name="janghoon jun" userId="056a5883350c2f5e" providerId="LiveId" clId="{6DA654A6-03B0-40F7-A259-B276216985A6}" dt="2026-07-08T06:29:53.099" v="5113" actId="20577"/>
-          <ac:spMkLst>
-            <pc:docMk/>
-            <pc:sldMk cId="0" sldId="272"/>
-            <ac:spMk id="2" creationId="{00000000-0000-0000-0000-000000000000}"/>
-          </ac:spMkLst>
-        </pc:spChg>
-      </pc:sldChg>
-      <pc:sldChg chg="del">
-        <pc:chgData name="janghoon jun" userId="056a5883350c2f5e" providerId="LiveId" clId="{6DA654A6-03B0-40F7-A259-B276216985A6}" dt="2026-07-08T06:30:35.450" v="5115" actId="47"/>
-        <pc:sldMkLst>
-          <pc:docMk/>
-          <pc:sldMk cId="0" sldId="273"/>
-        </pc:sldMkLst>
-      </pc:sldChg>
-      <pc:sldChg chg="modSp del mod">
-        <pc:chgData name="janghoon jun" userId="056a5883350c2f5e" providerId="LiveId" clId="{6DA654A6-03B0-40F7-A259-B276216985A6}" dt="2026-07-08T06:31:08.620" v="5160" actId="2696"/>
-        <pc:sldMkLst>
-          <pc:docMk/>
-          <pc:sldMk cId="0" sldId="274"/>
-        </pc:sldMkLst>
-        <pc:spChg chg="mod">
-          <ac:chgData name="janghoon jun" userId="056a5883350c2f5e" providerId="LiveId" clId="{6DA654A6-03B0-40F7-A259-B276216985A6}" dt="2026-07-08T06:31:04.889" v="5159" actId="6549"/>
-          <ac:spMkLst>
-            <pc:docMk/>
-            <pc:sldMk cId="0" sldId="274"/>
-            <ac:spMk id="2" creationId="{00000000-0000-0000-0000-000000000000}"/>
-          </ac:spMkLst>
-        </pc:spChg>
-        <pc:spChg chg="mod">
-          <ac:chgData name="janghoon jun" userId="056a5883350c2f5e" providerId="LiveId" clId="{6DA654A6-03B0-40F7-A259-B276216985A6}" dt="2026-07-08T06:30:57.206" v="5116" actId="20577"/>
-          <ac:spMkLst>
-            <pc:docMk/>
-            <pc:sldMk cId="0" sldId="274"/>
-            <ac:spMk id="6" creationId="{00000000-0000-0000-0000-000000000000}"/>
-          </ac:spMkLst>
-        </pc:spChg>
-      </pc:sldChg>
-      <pc:sldChg chg="add del">
-        <pc:chgData name="janghoon jun" userId="056a5883350c2f5e" providerId="LiveId" clId="{6DA654A6-03B0-40F7-A259-B276216985A6}" dt="2026-07-08T06:31:56.362" v="5162" actId="47"/>
-        <pc:sldMkLst>
-          <pc:docMk/>
-          <pc:sldMk cId="2204465617" sldId="274"/>
-        </pc:sldMkLst>
-      </pc:sldChg>
-      <pc:sldChg chg="modSp mod">
-        <pc:chgData name="janghoon jun" userId="056a5883350c2f5e" providerId="LiveId" clId="{6DA654A6-03B0-40F7-A259-B276216985A6}" dt="2026-07-08T06:36:05.251" v="5259" actId="6549"/>
-        <pc:sldMkLst>
-          <pc:docMk/>
-          <pc:sldMk cId="0" sldId="275"/>
-        </pc:sldMkLst>
-        <pc:spChg chg="mod">
-          <ac:chgData name="janghoon jun" userId="056a5883350c2f5e" providerId="LiveId" clId="{6DA654A6-03B0-40F7-A259-B276216985A6}" dt="2026-07-08T06:36:05.251" v="5259" actId="6549"/>
-          <ac:spMkLst>
-            <pc:docMk/>
-            <pc:sldMk cId="0" sldId="275"/>
-            <ac:spMk id="2" creationId="{00000000-0000-0000-0000-000000000000}"/>
-          </ac:spMkLst>
-        </pc:spChg>
-        <pc:spChg chg="mod">
-          <ac:chgData name="janghoon jun" userId="056a5883350c2f5e" providerId="LiveId" clId="{6DA654A6-03B0-40F7-A259-B276216985A6}" dt="2026-07-08T06:34:55.107" v="5229" actId="403"/>
-          <ac:spMkLst>
-            <pc:docMk/>
-            <pc:sldMk cId="0" sldId="275"/>
-            <ac:spMk id="5" creationId="{00000000-0000-0000-0000-000000000000}"/>
-          </ac:spMkLst>
-        </pc:spChg>
-        <pc:spChg chg="mod">
-          <ac:chgData name="janghoon jun" userId="056a5883350c2f5e" providerId="LiveId" clId="{6DA654A6-03B0-40F7-A259-B276216985A6}" dt="2026-07-08T06:11:42.349" v="4456" actId="2710"/>
-          <ac:spMkLst>
-            <pc:docMk/>
-            <pc:sldMk cId="0" sldId="275"/>
-            <ac:spMk id="6" creationId="{00000000-0000-0000-0000-000000000000}"/>
-          </ac:spMkLst>
-        </pc:spChg>
-      </pc:sldChg>
-      <pc:sldChg chg="modSp mod">
-        <pc:chgData name="janghoon jun" userId="056a5883350c2f5e" providerId="LiveId" clId="{6DA654A6-03B0-40F7-A259-B276216985A6}" dt="2026-07-08T06:36:41.780" v="5282" actId="6549"/>
-        <pc:sldMkLst>
-          <pc:docMk/>
-          <pc:sldMk cId="0" sldId="276"/>
-        </pc:sldMkLst>
-        <pc:spChg chg="mod">
-          <ac:chgData name="janghoon jun" userId="056a5883350c2f5e" providerId="LiveId" clId="{6DA654A6-03B0-40F7-A259-B276216985A6}" dt="2026-07-08T06:36:41.780" v="5282" actId="6549"/>
-          <ac:spMkLst>
-            <pc:docMk/>
-            <pc:sldMk cId="0" sldId="276"/>
-            <ac:spMk id="2" creationId="{00000000-0000-0000-0000-000000000000}"/>
-          </ac:spMkLst>
-        </pc:spChg>
-        <pc:spChg chg="mod">
-          <ac:chgData name="janghoon jun" userId="056a5883350c2f5e" providerId="LiveId" clId="{6DA654A6-03B0-40F7-A259-B276216985A6}" dt="2026-07-08T06:35:32.213" v="5235" actId="12789"/>
-          <ac:spMkLst>
-            <pc:docMk/>
-            <pc:sldMk cId="0" sldId="276"/>
-            <ac:spMk id="4" creationId="{00000000-0000-0000-0000-000000000000}"/>
-          </ac:spMkLst>
-        </pc:spChg>
-        <pc:spChg chg="mod">
-          <ac:chgData name="janghoon jun" userId="056a5883350c2f5e" providerId="LiveId" clId="{6DA654A6-03B0-40F7-A259-B276216985A6}" dt="2026-07-08T06:35:34.851" v="5236" actId="408"/>
-          <ac:spMkLst>
-            <pc:docMk/>
-            <pc:sldMk cId="0" sldId="276"/>
-            <ac:spMk id="5" creationId="{00000000-0000-0000-0000-000000000000}"/>
-          </ac:spMkLst>
-        </pc:spChg>
-        <pc:spChg chg="mod">
-          <ac:chgData name="janghoon jun" userId="056a5883350c2f5e" providerId="LiveId" clId="{6DA654A6-03B0-40F7-A259-B276216985A6}" dt="2026-07-08T06:35:34.851" v="5236" actId="408"/>
-          <ac:spMkLst>
-            <pc:docMk/>
-            <pc:sldMk cId="0" sldId="276"/>
-            <ac:spMk id="6" creationId="{00000000-0000-0000-0000-000000000000}"/>
-          </ac:spMkLst>
-        </pc:spChg>
-        <pc:spChg chg="mod">
-          <ac:chgData name="janghoon jun" userId="056a5883350c2f5e" providerId="LiveId" clId="{6DA654A6-03B0-40F7-A259-B276216985A6}" dt="2026-07-08T06:35:34.851" v="5236" actId="408"/>
-          <ac:spMkLst>
-            <pc:docMk/>
-            <pc:sldMk cId="0" sldId="276"/>
-            <ac:spMk id="7" creationId="{00000000-0000-0000-0000-000000000000}"/>
-          </ac:spMkLst>
-        </pc:spChg>
-        <pc:spChg chg="mod">
-          <ac:chgData name="janghoon jun" userId="056a5883350c2f5e" providerId="LiveId" clId="{6DA654A6-03B0-40F7-A259-B276216985A6}" dt="2026-07-08T06:35:34.851" v="5236" actId="408"/>
-          <ac:spMkLst>
-            <pc:docMk/>
-            <pc:sldMk cId="0" sldId="276"/>
-            <ac:spMk id="8" creationId="{00000000-0000-0000-0000-000000000000}"/>
-          </ac:spMkLst>
-        </pc:spChg>
-        <pc:spChg chg="mod">
-          <ac:chgData name="janghoon jun" userId="056a5883350c2f5e" providerId="LiveId" clId="{6DA654A6-03B0-40F7-A259-B276216985A6}" dt="2026-07-08T06:35:34.851" v="5236" actId="408"/>
-          <ac:spMkLst>
-            <pc:docMk/>
-            <pc:sldMk cId="0" sldId="276"/>
-            <ac:spMk id="9" creationId="{00000000-0000-0000-0000-000000000000}"/>
-          </ac:spMkLst>
-        </pc:spChg>
-        <pc:spChg chg="mod">
-          <ac:chgData name="janghoon jun" userId="056a5883350c2f5e" providerId="LiveId" clId="{6DA654A6-03B0-40F7-A259-B276216985A6}" dt="2026-07-08T06:35:32.213" v="5235" actId="12789"/>
-          <ac:spMkLst>
-            <pc:docMk/>
-            <pc:sldMk cId="0" sldId="276"/>
-            <ac:spMk id="10" creationId="{00000000-0000-0000-0000-000000000000}"/>
-          </ac:spMkLst>
-        </pc:spChg>
-        <pc:spChg chg="mod">
-          <ac:chgData name="janghoon jun" userId="056a5883350c2f5e" providerId="LiveId" clId="{6DA654A6-03B0-40F7-A259-B276216985A6}" dt="2026-07-08T06:35:53.551" v="5241" actId="14100"/>
-          <ac:spMkLst>
-            <pc:docMk/>
-            <pc:sldMk cId="0" sldId="276"/>
-            <ac:spMk id="11" creationId="{00000000-0000-0000-0000-000000000000}"/>
-          </ac:spMkLst>
-        </pc:spChg>
-        <pc:spChg chg="mod">
-          <ac:chgData name="janghoon jun" userId="056a5883350c2f5e" providerId="LiveId" clId="{6DA654A6-03B0-40F7-A259-B276216985A6}" dt="2026-07-08T06:35:45.853" v="5240" actId="5793"/>
-          <ac:spMkLst>
-            <pc:docMk/>
-            <pc:sldMk cId="0" sldId="276"/>
-            <ac:spMk id="12" creationId="{00000000-0000-0000-0000-000000000000}"/>
-          </ac:spMkLst>
-        </pc:spChg>
-      </pc:sldChg>
-      <pc:sldChg chg="modSp del mod">
-        <pc:chgData name="janghoon jun" userId="056a5883350c2f5e" providerId="LiveId" clId="{6DA654A6-03B0-40F7-A259-B276216985A6}" dt="2026-07-08T06:36:55.041" v="5301" actId="47"/>
-        <pc:sldMkLst>
-          <pc:docMk/>
-          <pc:sldMk cId="0" sldId="277"/>
-        </pc:sldMkLst>
-        <pc:spChg chg="mod">
-          <ac:chgData name="janghoon jun" userId="056a5883350c2f5e" providerId="LiveId" clId="{6DA654A6-03B0-40F7-A259-B276216985A6}" dt="2026-07-08T06:36:49.167" v="5300" actId="6549"/>
-          <ac:spMkLst>
-            <pc:docMk/>
-            <pc:sldMk cId="0" sldId="277"/>
-            <ac:spMk id="2" creationId="{00000000-0000-0000-0000-000000000000}"/>
-          </ac:spMkLst>
-        </pc:spChg>
-      </pc:sldChg>
-      <pc:sldChg chg="del">
-        <pc:chgData name="janghoon jun" userId="056a5883350c2f5e" providerId="LiveId" clId="{6DA654A6-03B0-40F7-A259-B276216985A6}" dt="2026-07-08T06:37:02.521" v="5302" actId="47"/>
-        <pc:sldMkLst>
-          <pc:docMk/>
-          <pc:sldMk cId="0" sldId="278"/>
-        </pc:sldMkLst>
-      </pc:sldChg>
-      <pc:sldChg chg="del">
-        <pc:chgData name="janghoon jun" userId="056a5883350c2f5e" providerId="LiveId" clId="{6DA654A6-03B0-40F7-A259-B276216985A6}" dt="2026-07-08T06:37:15.023" v="5303" actId="47"/>
-        <pc:sldMkLst>
-          <pc:docMk/>
-          <pc:sldMk cId="0" sldId="279"/>
-        </pc:sldMkLst>
-      </pc:sldChg>
-      <pc:sldChg chg="del">
-        <pc:chgData name="janghoon jun" userId="056a5883350c2f5e" providerId="LiveId" clId="{6DA654A6-03B0-40F7-A259-B276216985A6}" dt="2026-07-08T06:37:30.780" v="5304" actId="47"/>
-        <pc:sldMkLst>
-          <pc:docMk/>
-          <pc:sldMk cId="0" sldId="280"/>
-        </pc:sldMkLst>
-      </pc:sldChg>
-      <pc:sldChg chg="del">
-        <pc:chgData name="janghoon jun" userId="056a5883350c2f5e" providerId="LiveId" clId="{6DA654A6-03B0-40F7-A259-B276216985A6}" dt="2026-07-08T06:38:06.004" v="5305" actId="47"/>
-        <pc:sldMkLst>
-          <pc:docMk/>
-          <pc:sldMk cId="0" sldId="281"/>
-        </pc:sldMkLst>
-      </pc:sldChg>
-      <pc:sldChg chg="modSp mod">
-        <pc:chgData name="janghoon jun" userId="056a5883350c2f5e" providerId="LiveId" clId="{6DA654A6-03B0-40F7-A259-B276216985A6}" dt="2026-07-08T06:41:08.663" v="5342"/>
-        <pc:sldMkLst>
-          <pc:docMk/>
-          <pc:sldMk cId="0" sldId="282"/>
-        </pc:sldMkLst>
-        <pc:spChg chg="mod">
-          <ac:chgData name="janghoon jun" userId="056a5883350c2f5e" providerId="LiveId" clId="{6DA654A6-03B0-40F7-A259-B276216985A6}" dt="2026-07-08T06:41:08.663" v="5342"/>
-          <ac:spMkLst>
-            <pc:docMk/>
-            <pc:sldMk cId="0" sldId="282"/>
-            <ac:spMk id="3" creationId="{00000000-0000-0000-0000-000000000000}"/>
-          </ac:spMkLst>
-        </pc:spChg>
-        <pc:spChg chg="mod">
-          <ac:chgData name="janghoon jun" userId="056a5883350c2f5e" providerId="LiveId" clId="{6DA654A6-03B0-40F7-A259-B276216985A6}" dt="2026-07-08T06:38:41.232" v="5311" actId="403"/>
-          <ac:spMkLst>
-            <pc:docMk/>
-            <pc:sldMk cId="0" sldId="282"/>
-            <ac:spMk id="4" creationId="{00000000-0000-0000-0000-000000000000}"/>
-          </ac:spMkLst>
-        </pc:spChg>
-        <pc:spChg chg="mod">
-          <ac:chgData name="janghoon jun" userId="056a5883350c2f5e" providerId="LiveId" clId="{6DA654A6-03B0-40F7-A259-B276216985A6}" dt="2026-07-08T06:38:33.897" v="5307" actId="1076"/>
-          <ac:spMkLst>
-            <pc:docMk/>
-            <pc:sldMk cId="0" sldId="282"/>
-            <ac:spMk id="5" creationId="{00000000-0000-0000-0000-000000000000}"/>
-          </ac:spMkLst>
-        </pc:spChg>
-        <pc:spChg chg="mod">
-          <ac:chgData name="janghoon jun" userId="056a5883350c2f5e" providerId="LiveId" clId="{6DA654A6-03B0-40F7-A259-B276216985A6}" dt="2026-07-08T06:38:33.897" v="5307" actId="1076"/>
-          <ac:spMkLst>
-            <pc:docMk/>
-            <pc:sldMk cId="0" sldId="282"/>
-            <ac:spMk id="6" creationId="{00000000-0000-0000-0000-000000000000}"/>
-          </ac:spMkLst>
-        </pc:spChg>
-        <pc:spChg chg="mod">
-          <ac:chgData name="janghoon jun" userId="056a5883350c2f5e" providerId="LiveId" clId="{6DA654A6-03B0-40F7-A259-B276216985A6}" dt="2026-07-08T06:38:33.897" v="5307" actId="1076"/>
-          <ac:spMkLst>
-            <pc:docMk/>
-            <pc:sldMk cId="0" sldId="282"/>
-            <ac:spMk id="7" creationId="{00000000-0000-0000-0000-000000000000}"/>
-          </ac:spMkLst>
-        </pc:spChg>
-        <pc:spChg chg="mod">
-          <ac:chgData name="janghoon jun" userId="056a5883350c2f5e" providerId="LiveId" clId="{6DA654A6-03B0-40F7-A259-B276216985A6}" dt="2026-07-08T06:38:33.897" v="5307" actId="1076"/>
-          <ac:spMkLst>
-            <pc:docMk/>
-            <pc:sldMk cId="0" sldId="282"/>
-            <ac:spMk id="8" creationId="{00000000-0000-0000-0000-000000000000}"/>
-          </ac:spMkLst>
-        </pc:spChg>
-        <pc:spChg chg="mod">
-          <ac:chgData name="janghoon jun" userId="056a5883350c2f5e" providerId="LiveId" clId="{6DA654A6-03B0-40F7-A259-B276216985A6}" dt="2026-07-08T06:38:33.897" v="5307" actId="1076"/>
-          <ac:spMkLst>
-            <pc:docMk/>
-            <pc:sldMk cId="0" sldId="282"/>
-            <ac:spMk id="9" creationId="{00000000-0000-0000-0000-000000000000}"/>
-          </ac:spMkLst>
-        </pc:spChg>
-        <pc:spChg chg="mod">
-          <ac:chgData name="janghoon jun" userId="056a5883350c2f5e" providerId="LiveId" clId="{6DA654A6-03B0-40F7-A259-B276216985A6}" dt="2026-07-08T06:38:33.897" v="5307" actId="1076"/>
-          <ac:spMkLst>
-            <pc:docMk/>
-            <pc:sldMk cId="0" sldId="282"/>
-            <ac:spMk id="10" creationId="{00000000-0000-0000-0000-000000000000}"/>
-          </ac:spMkLst>
-        </pc:spChg>
-      </pc:sldChg>
-      <pc:sldChg chg="addSp modSp mod">
-        <pc:chgData name="janghoon jun" userId="056a5883350c2f5e" providerId="LiveId" clId="{6DA654A6-03B0-40F7-A259-B276216985A6}" dt="2026-07-08T06:40:59.091" v="5338"/>
-        <pc:sldMkLst>
-          <pc:docMk/>
-          <pc:sldMk cId="0" sldId="283"/>
-        </pc:sldMkLst>
-        <pc:spChg chg="mod">
-          <ac:chgData name="janghoon jun" userId="056a5883350c2f5e" providerId="LiveId" clId="{6DA654A6-03B0-40F7-A259-B276216985A6}" dt="2026-07-08T06:40:59.091" v="5338"/>
-          <ac:spMkLst>
-            <pc:docMk/>
-            <pc:sldMk cId="0" sldId="283"/>
-            <ac:spMk id="3" creationId="{00000000-0000-0000-0000-000000000000}"/>
-          </ac:spMkLst>
-        </pc:spChg>
-        <pc:spChg chg="mod">
-          <ac:chgData name="janghoon jun" userId="056a5883350c2f5e" providerId="LiveId" clId="{6DA654A6-03B0-40F7-A259-B276216985A6}" dt="2026-07-08T06:39:55.884" v="5315" actId="164"/>
-          <ac:spMkLst>
-            <pc:docMk/>
-            <pc:sldMk cId="0" sldId="283"/>
-            <ac:spMk id="4" creationId="{00000000-0000-0000-0000-000000000000}"/>
-          </ac:spMkLst>
-        </pc:spChg>
-        <pc:spChg chg="mod">
-          <ac:chgData name="janghoon jun" userId="056a5883350c2f5e" providerId="LiveId" clId="{6DA654A6-03B0-40F7-A259-B276216985A6}" dt="2026-07-08T06:39:55.884" v="5315" actId="164"/>
-          <ac:spMkLst>
-            <pc:docMk/>
-            <pc:sldMk cId="0" sldId="283"/>
-            <ac:spMk id="5" creationId="{00000000-0000-0000-0000-000000000000}"/>
-          </ac:spMkLst>
-        </pc:spChg>
-        <pc:spChg chg="mod">
-          <ac:chgData name="janghoon jun" userId="056a5883350c2f5e" providerId="LiveId" clId="{6DA654A6-03B0-40F7-A259-B276216985A6}" dt="2026-07-08T06:40:00.187" v="5317" actId="164"/>
-          <ac:spMkLst>
-            <pc:docMk/>
-            <pc:sldMk cId="0" sldId="283"/>
-            <ac:spMk id="6" creationId="{00000000-0000-0000-0000-000000000000}"/>
-          </ac:spMkLst>
-        </pc:spChg>
-        <pc:spChg chg="mod">
-          <ac:chgData name="janghoon jun" userId="056a5883350c2f5e" providerId="LiveId" clId="{6DA654A6-03B0-40F7-A259-B276216985A6}" dt="2026-07-08T06:40:00.187" v="5317" actId="164"/>
-          <ac:spMkLst>
-            <pc:docMk/>
-            <pc:sldMk cId="0" sldId="283"/>
-            <ac:spMk id="7" creationId="{00000000-0000-0000-0000-000000000000}"/>
-          </ac:spMkLst>
-        </pc:spChg>
-        <pc:spChg chg="mod">
-          <ac:chgData name="janghoon jun" userId="056a5883350c2f5e" providerId="LiveId" clId="{6DA654A6-03B0-40F7-A259-B276216985A6}" dt="2026-07-08T06:40:03.737" v="5319" actId="164"/>
-          <ac:spMkLst>
-            <pc:docMk/>
-            <pc:sldMk cId="0" sldId="283"/>
-            <ac:spMk id="8" creationId="{00000000-0000-0000-0000-000000000000}"/>
-          </ac:spMkLst>
-        </pc:spChg>
-        <pc:spChg chg="mod">
-          <ac:chgData name="janghoon jun" userId="056a5883350c2f5e" providerId="LiveId" clId="{6DA654A6-03B0-40F7-A259-B276216985A6}" dt="2026-07-08T06:40:03.737" v="5319" actId="164"/>
-          <ac:spMkLst>
-            <pc:docMk/>
-            <pc:sldMk cId="0" sldId="283"/>
-            <ac:spMk id="9" creationId="{00000000-0000-0000-0000-000000000000}"/>
-          </ac:spMkLst>
-        </pc:spChg>
-        <pc:spChg chg="mod">
-          <ac:chgData name="janghoon jun" userId="056a5883350c2f5e" providerId="LiveId" clId="{6DA654A6-03B0-40F7-A259-B276216985A6}" dt="2026-07-08T06:40:09.808" v="5321" actId="164"/>
-          <ac:spMkLst>
-            <pc:docMk/>
-            <pc:sldMk cId="0" sldId="283"/>
-            <ac:spMk id="10" creationId="{00000000-0000-0000-0000-000000000000}"/>
-          </ac:spMkLst>
-        </pc:spChg>
-        <pc:spChg chg="mod">
-          <ac:chgData name="janghoon jun" userId="056a5883350c2f5e" providerId="LiveId" clId="{6DA654A6-03B0-40F7-A259-B276216985A6}" dt="2026-07-08T06:40:09.808" v="5321" actId="164"/>
-          <ac:spMkLst>
-            <pc:docMk/>
-            <pc:sldMk cId="0" sldId="283"/>
-            <ac:spMk id="11" creationId="{00000000-0000-0000-0000-000000000000}"/>
-          </ac:spMkLst>
-        </pc:spChg>
-        <pc:spChg chg="mod">
-          <ac:chgData name="janghoon jun" userId="056a5883350c2f5e" providerId="LiveId" clId="{6DA654A6-03B0-40F7-A259-B276216985A6}" dt="2026-07-08T06:39:36.356" v="5312" actId="1076"/>
-          <ac:spMkLst>
-            <pc:docMk/>
-            <pc:sldMk cId="0" sldId="283"/>
-            <ac:spMk id="12" creationId="{00000000-0000-0000-0000-000000000000}"/>
-          </ac:spMkLst>
-        </pc:spChg>
-        <pc:spChg chg="mod">
-          <ac:chgData name="janghoon jun" userId="056a5883350c2f5e" providerId="LiveId" clId="{6DA654A6-03B0-40F7-A259-B276216985A6}" dt="2026-07-08T06:40:41.737" v="5326" actId="20577"/>
-          <ac:spMkLst>
-            <pc:docMk/>
-            <pc:sldMk cId="0" sldId="283"/>
-            <ac:spMk id="13" creationId="{00000000-0000-0000-0000-000000000000}"/>
-          </ac:spMkLst>
-        </pc:spChg>
-        <pc:grpChg chg="add mod">
-          <ac:chgData name="janghoon jun" userId="056a5883350c2f5e" providerId="LiveId" clId="{6DA654A6-03B0-40F7-A259-B276216985A6}" dt="2026-07-08T06:40:20.569" v="5323" actId="1076"/>
-          <ac:grpSpMkLst>
-            <pc:docMk/>
-            <pc:sldMk cId="0" sldId="283"/>
-            <ac:grpSpMk id="14" creationId="{1526DC77-B94F-5DC1-77AA-EB37A21DD695}"/>
-          </ac:grpSpMkLst>
-        </pc:grpChg>
-        <pc:grpChg chg="add mod">
-          <ac:chgData name="janghoon jun" userId="056a5883350c2f5e" providerId="LiveId" clId="{6DA654A6-03B0-40F7-A259-B276216985A6}" dt="2026-07-08T06:40:28.066" v="5324" actId="465"/>
-          <ac:grpSpMkLst>
-            <pc:docMk/>
-            <pc:sldMk cId="0" sldId="283"/>
-            <ac:grpSpMk id="15" creationId="{D89762BC-1660-7353-3BA2-1C09994F8069}"/>
-          </ac:grpSpMkLst>
-        </pc:grpChg>
-        <pc:grpChg chg="add mod">
-          <ac:chgData name="janghoon jun" userId="056a5883350c2f5e" providerId="LiveId" clId="{6DA654A6-03B0-40F7-A259-B276216985A6}" dt="2026-07-08T06:40:28.066" v="5324" actId="465"/>
-          <ac:grpSpMkLst>
-            <pc:docMk/>
-            <pc:sldMk cId="0" sldId="283"/>
-            <ac:grpSpMk id="16" creationId="{BA5ACF98-7484-5EE4-B39C-702A950D75BB}"/>
-          </ac:grpSpMkLst>
-        </pc:grpChg>
-        <pc:grpChg chg="add mod">
-          <ac:chgData name="janghoon jun" userId="056a5883350c2f5e" providerId="LiveId" clId="{6DA654A6-03B0-40F7-A259-B276216985A6}" dt="2026-07-08T06:40:17.822" v="5322" actId="1076"/>
-          <ac:grpSpMkLst>
-            <pc:docMk/>
-            <pc:sldMk cId="0" sldId="283"/>
-            <ac:grpSpMk id="17" creationId="{8AE7EEDC-7CE2-D441-BDB3-00FE91FA3918}"/>
-          </ac:grpSpMkLst>
-        </pc:grpChg>
-      </pc:sldChg>
-      <pc:sldChg chg="modSp mod">
-        <pc:chgData name="janghoon jun" userId="056a5883350c2f5e" providerId="LiveId" clId="{6DA654A6-03B0-40F7-A259-B276216985A6}" dt="2026-07-08T06:45:01.692" v="5359" actId="20577"/>
-        <pc:sldMkLst>
-          <pc:docMk/>
-          <pc:sldMk cId="0" sldId="285"/>
-        </pc:sldMkLst>
-        <pc:spChg chg="mod">
-          <ac:chgData name="janghoon jun" userId="056a5883350c2f5e" providerId="LiveId" clId="{6DA654A6-03B0-40F7-A259-B276216985A6}" dt="2026-07-08T06:45:01.692" v="5359" actId="20577"/>
-          <ac:spMkLst>
-            <pc:docMk/>
-            <pc:sldMk cId="0" sldId="285"/>
-            <ac:spMk id="2" creationId="{00000000-0000-0000-0000-000000000000}"/>
-          </ac:spMkLst>
-        </pc:spChg>
-      </pc:sldChg>
-      <pc:sldChg chg="modSp mod">
-        <pc:chgData name="janghoon jun" userId="056a5883350c2f5e" providerId="LiveId" clId="{6DA654A6-03B0-40F7-A259-B276216985A6}" dt="2026-07-08T06:45:55.135" v="5362"/>
-        <pc:sldMkLst>
-          <pc:docMk/>
-          <pc:sldMk cId="0" sldId="286"/>
-        </pc:sldMkLst>
-        <pc:spChg chg="mod">
-          <ac:chgData name="janghoon jun" userId="056a5883350c2f5e" providerId="LiveId" clId="{6DA654A6-03B0-40F7-A259-B276216985A6}" dt="2026-07-08T06:45:55.135" v="5362"/>
-          <ac:spMkLst>
-            <pc:docMk/>
-            <pc:sldMk cId="0" sldId="286"/>
-            <ac:spMk id="2" creationId="{00000000-0000-0000-0000-000000000000}"/>
-          </ac:spMkLst>
-        </pc:spChg>
-      </pc:sldChg>
-      <pc:sldChg chg="modSp">
-        <pc:chgData name="janghoon jun" userId="056a5883350c2f5e" providerId="LiveId" clId="{6DA654A6-03B0-40F7-A259-B276216985A6}" dt="2026-07-08T06:42:19.372" v="5344"/>
-        <pc:sldMkLst>
-          <pc:docMk/>
-          <pc:sldMk cId="0" sldId="287"/>
-        </pc:sldMkLst>
-        <pc:spChg chg="mod">
-          <ac:chgData name="janghoon jun" userId="056a5883350c2f5e" providerId="LiveId" clId="{6DA654A6-03B0-40F7-A259-B276216985A6}" dt="2026-07-08T06:42:19.372" v="5344"/>
-          <ac:spMkLst>
-            <pc:docMk/>
-            <pc:sldMk cId="0" sldId="287"/>
-            <ac:spMk id="3" creationId="{00000000-0000-0000-0000-000000000000}"/>
-          </ac:spMkLst>
-        </pc:spChg>
-      </pc:sldChg>
-      <pc:sldChg chg="modSp">
-        <pc:chgData name="janghoon jun" userId="056a5883350c2f5e" providerId="LiveId" clId="{6DA654A6-03B0-40F7-A259-B276216985A6}" dt="2026-07-08T06:42:42.763" v="5345"/>
-        <pc:sldMkLst>
-          <pc:docMk/>
-          <pc:sldMk cId="0" sldId="288"/>
-        </pc:sldMkLst>
-        <pc:spChg chg="mod">
-          <ac:chgData name="janghoon jun" userId="056a5883350c2f5e" providerId="LiveId" clId="{6DA654A6-03B0-40F7-A259-B276216985A6}" dt="2026-07-08T06:42:42.763" v="5345"/>
-          <ac:spMkLst>
-            <pc:docMk/>
-            <pc:sldMk cId="0" sldId="288"/>
-            <ac:spMk id="8" creationId="{00000000-0000-0000-0000-000000000000}"/>
-          </ac:spMkLst>
-        </pc:spChg>
-      </pc:sldChg>
-      <pc:sldChg chg="delSp modSp mod">
-        <pc:chgData name="janghoon jun" userId="056a5883350c2f5e" providerId="LiveId" clId="{6DA654A6-03B0-40F7-A259-B276216985A6}" dt="2026-07-08T06:45:07.791" v="5361" actId="20577"/>
-        <pc:sldMkLst>
-          <pc:docMk/>
-          <pc:sldMk cId="0" sldId="289"/>
-        </pc:sldMkLst>
-        <pc:spChg chg="mod">
-          <ac:chgData name="janghoon jun" userId="056a5883350c2f5e" providerId="LiveId" clId="{6DA654A6-03B0-40F7-A259-B276216985A6}" dt="2026-07-08T06:45:07.791" v="5361" actId="20577"/>
-          <ac:spMkLst>
-            <pc:docMk/>
-            <pc:sldMk cId="0" sldId="289"/>
-            <ac:spMk id="2" creationId="{00000000-0000-0000-0000-000000000000}"/>
-          </ac:spMkLst>
-        </pc:spChg>
-        <pc:spChg chg="del">
-          <ac:chgData name="janghoon jun" userId="056a5883350c2f5e" providerId="LiveId" clId="{6DA654A6-03B0-40F7-A259-B276216985A6}" dt="2026-07-08T06:10:24.633" v="4446" actId="478"/>
-          <ac:spMkLst>
-            <pc:docMk/>
-            <pc:sldMk cId="0" sldId="289"/>
-            <ac:spMk id="5" creationId="{00000000-0000-0000-0000-000000000000}"/>
-          </ac:spMkLst>
-        </pc:spChg>
-        <pc:picChg chg="mod">
-          <ac:chgData name="janghoon jun" userId="056a5883350c2f5e" providerId="LiveId" clId="{6DA654A6-03B0-40F7-A259-B276216985A6}" dt="2026-07-08T06:10:57.158" v="4448" actId="1076"/>
-          <ac:picMkLst>
-            <pc:docMk/>
-            <pc:sldMk cId="0" sldId="289"/>
-            <ac:picMk id="4" creationId="{00000000-0000-0000-0000-000000000000}"/>
-          </ac:picMkLst>
-        </pc:picChg>
-      </pc:sldChg>
-      <pc:sldChg chg="modSp mod">
-        <pc:chgData name="janghoon jun" userId="056a5883350c2f5e" providerId="LiveId" clId="{6DA654A6-03B0-40F7-A259-B276216985A6}" dt="2026-07-08T06:46:01.241" v="5363"/>
-        <pc:sldMkLst>
-          <pc:docMk/>
-          <pc:sldMk cId="0" sldId="290"/>
-        </pc:sldMkLst>
-        <pc:spChg chg="mod">
-          <ac:chgData name="janghoon jun" userId="056a5883350c2f5e" providerId="LiveId" clId="{6DA654A6-03B0-40F7-A259-B276216985A6}" dt="2026-07-08T06:46:01.241" v="5363"/>
-          <ac:spMkLst>
-            <pc:docMk/>
-            <pc:sldMk cId="0" sldId="290"/>
-            <ac:spMk id="2" creationId="{00000000-0000-0000-0000-000000000000}"/>
-          </ac:spMkLst>
-        </pc:spChg>
-      </pc:sldChg>
-      <pc:sldChg chg="modSp">
-        <pc:chgData name="janghoon jun" userId="056a5883350c2f5e" providerId="LiveId" clId="{6DA654A6-03B0-40F7-A259-B276216985A6}" dt="2026-07-08T06:43:20.110" v="5347"/>
-        <pc:sldMkLst>
-          <pc:docMk/>
-          <pc:sldMk cId="0" sldId="291"/>
-        </pc:sldMkLst>
-        <pc:spChg chg="mod">
-          <ac:chgData name="janghoon jun" userId="056a5883350c2f5e" providerId="LiveId" clId="{6DA654A6-03B0-40F7-A259-B276216985A6}" dt="2026-07-08T06:43:20.110" v="5347"/>
-          <ac:spMkLst>
-            <pc:docMk/>
-            <pc:sldMk cId="0" sldId="291"/>
-            <ac:spMk id="3" creationId="{00000000-0000-0000-0000-000000000000}"/>
-          </ac:spMkLst>
-        </pc:spChg>
-      </pc:sldChg>
-      <pc:sldChg chg="delSp mod">
-        <pc:chgData name="janghoon jun" userId="056a5883350c2f5e" providerId="LiveId" clId="{6DA654A6-03B0-40F7-A259-B276216985A6}" dt="2026-07-08T06:10:32.573" v="4447" actId="478"/>
-        <pc:sldMkLst>
-          <pc:docMk/>
-          <pc:sldMk cId="0" sldId="292"/>
-        </pc:sldMkLst>
-        <pc:spChg chg="del">
-          <ac:chgData name="janghoon jun" userId="056a5883350c2f5e" providerId="LiveId" clId="{6DA654A6-03B0-40F7-A259-B276216985A6}" dt="2026-07-08T06:10:32.573" v="4447" actId="478"/>
-          <ac:spMkLst>
-            <pc:docMk/>
-            <pc:sldMk cId="0" sldId="292"/>
-            <ac:spMk id="9" creationId="{00000000-0000-0000-0000-000000000000}"/>
-          </ac:spMkLst>
-        </pc:spChg>
-      </pc:sldChg>
-      <pc:sldChg chg="modSp mod">
-        <pc:chgData name="janghoon jun" userId="056a5883350c2f5e" providerId="LiveId" clId="{6DA654A6-03B0-40F7-A259-B276216985A6}" dt="2026-07-08T06:46:14.575" v="5364"/>
-        <pc:sldMkLst>
-          <pc:docMk/>
-          <pc:sldMk cId="0" sldId="293"/>
-        </pc:sldMkLst>
-        <pc:spChg chg="mod">
-          <ac:chgData name="janghoon jun" userId="056a5883350c2f5e" providerId="LiveId" clId="{6DA654A6-03B0-40F7-A259-B276216985A6}" dt="2026-07-08T06:46:14.575" v="5364"/>
-          <ac:spMkLst>
-            <pc:docMk/>
-            <pc:sldMk cId="0" sldId="293"/>
-            <ac:spMk id="2" creationId="{00000000-0000-0000-0000-000000000000}"/>
-          </ac:spMkLst>
-        </pc:spChg>
-      </pc:sldChg>
-      <pc:sldChg chg="delSp modSp mod">
-        <pc:chgData name="janghoon jun" userId="056a5883350c2f5e" providerId="LiveId" clId="{6DA654A6-03B0-40F7-A259-B276216985A6}" dt="2026-07-08T06:09:52.283" v="4445" actId="2710"/>
-        <pc:sldMkLst>
-          <pc:docMk/>
-          <pc:sldMk cId="0" sldId="296"/>
-        </pc:sldMkLst>
-        <pc:spChg chg="del">
-          <ac:chgData name="janghoon jun" userId="056a5883350c2f5e" providerId="LiveId" clId="{6DA654A6-03B0-40F7-A259-B276216985A6}" dt="2026-07-08T06:09:42.529" v="4443" actId="478"/>
-          <ac:spMkLst>
-            <pc:docMk/>
-            <pc:sldMk cId="0" sldId="296"/>
-            <ac:spMk id="5" creationId="{00000000-0000-0000-0000-000000000000}"/>
-          </ac:spMkLst>
-        </pc:spChg>
-        <pc:spChg chg="mod">
-          <ac:chgData name="janghoon jun" userId="056a5883350c2f5e" providerId="LiveId" clId="{6DA654A6-03B0-40F7-A259-B276216985A6}" dt="2026-07-08T06:09:52.283" v="4445" actId="2710"/>
-          <ac:spMkLst>
-            <pc:docMk/>
-            <pc:sldMk cId="0" sldId="296"/>
-            <ac:spMk id="6" creationId="{00000000-0000-0000-0000-000000000000}"/>
-          </ac:spMkLst>
-        </pc:spChg>
-        <pc:spChg chg="mod">
-          <ac:chgData name="janghoon jun" userId="056a5883350c2f5e" providerId="LiveId" clId="{6DA654A6-03B0-40F7-A259-B276216985A6}" dt="2026-07-08T06:09:52.283" v="4445" actId="2710"/>
-          <ac:spMkLst>
-            <pc:docMk/>
-            <pc:sldMk cId="0" sldId="296"/>
-            <ac:spMk id="7" creationId="{00000000-0000-0000-0000-000000000000}"/>
-          </ac:spMkLst>
-        </pc:spChg>
-      </pc:sldChg>
-      <pc:sldChg chg="delSp modSp mod">
-        <pc:chgData name="janghoon jun" userId="056a5883350c2f5e" providerId="LiveId" clId="{6DA654A6-03B0-40F7-A259-B276216985A6}" dt="2026-07-08T05:57:14.406" v="4396" actId="14100"/>
-        <pc:sldMkLst>
-          <pc:docMk/>
-          <pc:sldMk cId="0" sldId="301"/>
-        </pc:sldMkLst>
-        <pc:spChg chg="mod">
-          <ac:chgData name="janghoon jun" userId="056a5883350c2f5e" providerId="LiveId" clId="{6DA654A6-03B0-40F7-A259-B276216985A6}" dt="2026-07-08T05:56:39.966" v="4378" actId="20577"/>
-          <ac:spMkLst>
-            <pc:docMk/>
-            <pc:sldMk cId="0" sldId="301"/>
-            <ac:spMk id="2" creationId="{00000000-0000-0000-0000-000000000000}"/>
-          </ac:spMkLst>
-        </pc:spChg>
-        <pc:spChg chg="mod">
-          <ac:chgData name="janghoon jun" userId="056a5883350c2f5e" providerId="LiveId" clId="{6DA654A6-03B0-40F7-A259-B276216985A6}" dt="2026-07-08T05:56:48.318" v="4394" actId="20577"/>
-          <ac:spMkLst>
-            <pc:docMk/>
-            <pc:sldMk cId="0" sldId="301"/>
-            <ac:spMk id="3" creationId="{00000000-0000-0000-0000-000000000000}"/>
-          </ac:spMkLst>
-        </pc:spChg>
-        <pc:spChg chg="del">
-          <ac:chgData name="janghoon jun" userId="056a5883350c2f5e" providerId="LiveId" clId="{6DA654A6-03B0-40F7-A259-B276216985A6}" dt="2026-07-08T05:57:08.602" v="4395" actId="478"/>
-          <ac:spMkLst>
-            <pc:docMk/>
-            <pc:sldMk cId="0" sldId="301"/>
-            <ac:spMk id="5" creationId="{00000000-0000-0000-0000-000000000000}"/>
-          </ac:spMkLst>
-        </pc:spChg>
-        <pc:picChg chg="mod">
-          <ac:chgData name="janghoon jun" userId="056a5883350c2f5e" providerId="LiveId" clId="{6DA654A6-03B0-40F7-A259-B276216985A6}" dt="2026-07-08T05:57:14.406" v="4396" actId="14100"/>
-          <ac:picMkLst>
-            <pc:docMk/>
-            <pc:sldMk cId="0" sldId="301"/>
-            <ac:picMk id="4" creationId="{00000000-0000-0000-0000-000000000000}"/>
-          </ac:picMkLst>
-        </pc:picChg>
-      </pc:sldChg>
-      <pc:sldChg chg="addSp delSp modSp del mod">
-        <pc:chgData name="janghoon jun" userId="056a5883350c2f5e" providerId="LiveId" clId="{6DA654A6-03B0-40F7-A259-B276216985A6}" dt="2026-07-08T06:27:45.584" v="4932" actId="47"/>
-        <pc:sldMkLst>
-          <pc:docMk/>
-          <pc:sldMk cId="0" sldId="302"/>
-        </pc:sldMkLst>
-        <pc:spChg chg="mod">
-          <ac:chgData name="janghoon jun" userId="056a5883350c2f5e" providerId="LiveId" clId="{6DA654A6-03B0-40F7-A259-B276216985A6}" dt="2026-07-08T06:19:24.013" v="4637" actId="6549"/>
-          <ac:spMkLst>
-            <pc:docMk/>
-            <pc:sldMk cId="0" sldId="302"/>
-            <ac:spMk id="2" creationId="{00000000-0000-0000-0000-000000000000}"/>
-          </ac:spMkLst>
-        </pc:spChg>
-        <pc:spChg chg="del">
-          <ac:chgData name="janghoon jun" userId="056a5883350c2f5e" providerId="LiveId" clId="{6DA654A6-03B0-40F7-A259-B276216985A6}" dt="2026-07-08T06:19:08.485" v="4618" actId="478"/>
-          <ac:spMkLst>
-            <pc:docMk/>
-            <pc:sldMk cId="0" sldId="302"/>
-            <ac:spMk id="3" creationId="{00000000-0000-0000-0000-000000000000}"/>
-          </ac:spMkLst>
-        </pc:spChg>
-        <pc:spChg chg="del mod">
-          <ac:chgData name="janghoon jun" userId="056a5883350c2f5e" providerId="LiveId" clId="{6DA654A6-03B0-40F7-A259-B276216985A6}" dt="2026-07-08T06:19:00.023" v="4617" actId="478"/>
-          <ac:spMkLst>
-            <pc:docMk/>
-            <pc:sldMk cId="0" sldId="302"/>
-            <ac:spMk id="5" creationId="{00000000-0000-0000-0000-000000000000}"/>
-          </ac:spMkLst>
-        </pc:spChg>
-        <pc:spChg chg="add del">
-          <ac:chgData name="janghoon jun" userId="056a5883350c2f5e" providerId="LiveId" clId="{6DA654A6-03B0-40F7-A259-B276216985A6}" dt="2026-07-08T06:18:01.855" v="4596" actId="22"/>
-          <ac:spMkLst>
-            <pc:docMk/>
-            <pc:sldMk cId="0" sldId="302"/>
-            <ac:spMk id="7" creationId="{4D0B7067-2F2C-B4D1-B964-BB3091F7100E}"/>
-          </ac:spMkLst>
-        </pc:spChg>
-        <pc:spChg chg="add del">
-          <ac:chgData name="janghoon jun" userId="056a5883350c2f5e" providerId="LiveId" clId="{6DA654A6-03B0-40F7-A259-B276216985A6}" dt="2026-07-08T06:18:05.174" v="4598" actId="22"/>
-          <ac:spMkLst>
-            <pc:docMk/>
-            <pc:sldMk cId="0" sldId="302"/>
-            <ac:spMk id="9" creationId="{90AE4397-6E88-EF55-6058-CECD6E1B22B1}"/>
-          </ac:spMkLst>
-        </pc:spChg>
-        <pc:spChg chg="add del">
-          <ac:chgData name="janghoon jun" userId="056a5883350c2f5e" providerId="LiveId" clId="{6DA654A6-03B0-40F7-A259-B276216985A6}" dt="2026-07-08T06:18:09.004" v="4600" actId="22"/>
-          <ac:spMkLst>
-            <pc:docMk/>
-            <pc:sldMk cId="0" sldId="302"/>
-            <ac:spMk id="11" creationId="{EB0726DC-1879-C3B5-03DE-5D7285B59570}"/>
-          </ac:spMkLst>
-        </pc:spChg>
-        <pc:spChg chg="add del mod">
-          <ac:chgData name="janghoon jun" userId="056a5883350c2f5e" providerId="LiveId" clId="{6DA654A6-03B0-40F7-A259-B276216985A6}" dt="2026-07-08T06:19:10.303" v="4619" actId="478"/>
-          <ac:spMkLst>
-            <pc:docMk/>
-            <pc:sldMk cId="0" sldId="302"/>
-            <ac:spMk id="15" creationId="{DE602069-E841-6843-0251-C1E838FA0448}"/>
-          </ac:spMkLst>
-        </pc:spChg>
-        <pc:picChg chg="del mod">
-          <ac:chgData name="janghoon jun" userId="056a5883350c2f5e" providerId="LiveId" clId="{6DA654A6-03B0-40F7-A259-B276216985A6}" dt="2026-07-08T06:18:00.114" v="4594" actId="478"/>
-          <ac:picMkLst>
-            <pc:docMk/>
-            <pc:sldMk cId="0" sldId="302"/>
-            <ac:picMk id="4" creationId="{00000000-0000-0000-0000-000000000000}"/>
-          </ac:picMkLst>
-        </pc:picChg>
-        <pc:picChg chg="add mod">
-          <ac:chgData name="janghoon jun" userId="056a5883350c2f5e" providerId="LiveId" clId="{6DA654A6-03B0-40F7-A259-B276216985A6}" dt="2026-07-08T06:18:54.186" v="4616" actId="1036"/>
-          <ac:picMkLst>
-            <pc:docMk/>
-            <pc:sldMk cId="0" sldId="302"/>
-            <ac:picMk id="13" creationId="{7BE12C74-C17F-507A-605A-AAC7B24D561A}"/>
-          </ac:picMkLst>
-        </pc:picChg>
-      </pc:sldChg>
-      <pc:sldChg chg="delSp modSp mod">
-        <pc:chgData name="janghoon jun" userId="056a5883350c2f5e" providerId="LiveId" clId="{6DA654A6-03B0-40F7-A259-B276216985A6}" dt="2026-07-08T06:20:38.445" v="4699" actId="1076"/>
-        <pc:sldMkLst>
-          <pc:docMk/>
-          <pc:sldMk cId="0" sldId="303"/>
-        </pc:sldMkLst>
-        <pc:spChg chg="mod">
-          <ac:chgData name="janghoon jun" userId="056a5883350c2f5e" providerId="LiveId" clId="{6DA654A6-03B0-40F7-A259-B276216985A6}" dt="2026-07-08T06:20:28.929" v="4693" actId="21"/>
-          <ac:spMkLst>
-            <pc:docMk/>
-            <pc:sldMk cId="0" sldId="303"/>
-            <ac:spMk id="2" creationId="{00000000-0000-0000-0000-000000000000}"/>
-          </ac:spMkLst>
-        </pc:spChg>
-        <pc:spChg chg="mod">
-          <ac:chgData name="janghoon jun" userId="056a5883350c2f5e" providerId="LiveId" clId="{6DA654A6-03B0-40F7-A259-B276216985A6}" dt="2026-07-08T06:20:35.369" v="4698" actId="403"/>
-          <ac:spMkLst>
-            <pc:docMk/>
-            <pc:sldMk cId="0" sldId="303"/>
-            <ac:spMk id="3" creationId="{00000000-0000-0000-0000-000000000000}"/>
-          </ac:spMkLst>
-        </pc:spChg>
-        <pc:spChg chg="del">
-          <ac:chgData name="janghoon jun" userId="056a5883350c2f5e" providerId="LiveId" clId="{6DA654A6-03B0-40F7-A259-B276216985A6}" dt="2026-07-08T06:19:52.897" v="4644" actId="478"/>
-          <ac:spMkLst>
-            <pc:docMk/>
-            <pc:sldMk cId="0" sldId="303"/>
-            <ac:spMk id="5" creationId="{00000000-0000-0000-0000-000000000000}"/>
-          </ac:spMkLst>
-        </pc:spChg>
-        <pc:picChg chg="mod">
-          <ac:chgData name="janghoon jun" userId="056a5883350c2f5e" providerId="LiveId" clId="{6DA654A6-03B0-40F7-A259-B276216985A6}" dt="2026-07-08T06:20:38.445" v="4699" actId="1076"/>
-          <ac:picMkLst>
-            <pc:docMk/>
-            <pc:sldMk cId="0" sldId="303"/>
-            <ac:picMk id="4" creationId="{00000000-0000-0000-0000-000000000000}"/>
-          </ac:picMkLst>
-        </pc:picChg>
-      </pc:sldChg>
-      <pc:sldChg chg="addSp delSp modSp mod">
-        <pc:chgData name="janghoon jun" userId="056a5883350c2f5e" providerId="LiveId" clId="{6DA654A6-03B0-40F7-A259-B276216985A6}" dt="2026-07-08T06:21:02.551" v="4712" actId="478"/>
-        <pc:sldMkLst>
-          <pc:docMk/>
-          <pc:sldMk cId="0" sldId="304"/>
-        </pc:sldMkLst>
-        <pc:spChg chg="mod">
-          <ac:chgData name="janghoon jun" userId="056a5883350c2f5e" providerId="LiveId" clId="{6DA654A6-03B0-40F7-A259-B276216985A6}" dt="2026-07-08T06:20:42.676" v="4700" actId="21"/>
-          <ac:spMkLst>
-            <pc:docMk/>
-            <pc:sldMk cId="0" sldId="304"/>
-            <ac:spMk id="2" creationId="{00000000-0000-0000-0000-000000000000}"/>
-          </ac:spMkLst>
-        </pc:spChg>
-        <pc:spChg chg="mod">
-          <ac:chgData name="janghoon jun" userId="056a5883350c2f5e" providerId="LiveId" clId="{6DA654A6-03B0-40F7-A259-B276216985A6}" dt="2026-07-08T06:20:50.584" v="4708" actId="404"/>
-          <ac:spMkLst>
-            <pc:docMk/>
-            <pc:sldMk cId="0" sldId="304"/>
-            <ac:spMk id="3" creationId="{00000000-0000-0000-0000-000000000000}"/>
-          </ac:spMkLst>
-        </pc:spChg>
-        <pc:spChg chg="del">
-          <ac:chgData name="janghoon jun" userId="056a5883350c2f5e" providerId="LiveId" clId="{6DA654A6-03B0-40F7-A259-B276216985A6}" dt="2026-07-08T06:20:07.089" v="4646" actId="478"/>
-          <ac:spMkLst>
-            <pc:docMk/>
-            <pc:sldMk cId="0" sldId="304"/>
-            <ac:spMk id="5" creationId="{00000000-0000-0000-0000-000000000000}"/>
-          </ac:spMkLst>
-        </pc:spChg>
-        <pc:picChg chg="mod">
-          <ac:chgData name="janghoon jun" userId="056a5883350c2f5e" providerId="LiveId" clId="{6DA654A6-03B0-40F7-A259-B276216985A6}" dt="2026-07-08T06:21:00.065" v="4711" actId="1076"/>
-          <ac:picMkLst>
-            <pc:docMk/>
-            <pc:sldMk cId="0" sldId="304"/>
-            <ac:picMk id="4" creationId="{00000000-0000-0000-0000-000000000000}"/>
-          </ac:picMkLst>
-        </pc:picChg>
-        <pc:picChg chg="add del">
-          <ac:chgData name="janghoon jun" userId="056a5883350c2f5e" providerId="LiveId" clId="{6DA654A6-03B0-40F7-A259-B276216985A6}" dt="2026-07-08T06:21:02.551" v="4712" actId="478"/>
-          <ac:picMkLst>
-            <pc:docMk/>
-            <pc:sldMk cId="0" sldId="304"/>
-            <ac:picMk id="7" creationId="{FCCDCE3F-2C84-6C25-5A22-31E5576DE7BE}"/>
-          </ac:picMkLst>
-        </pc:picChg>
-      </pc:sldChg>
-      <pc:sldChg chg="delSp modSp del mod">
-        <pc:chgData name="janghoon jun" userId="056a5883350c2f5e" providerId="LiveId" clId="{6DA654A6-03B0-40F7-A259-B276216985A6}" dt="2026-07-08T06:23:20.432" v="4820" actId="47"/>
-        <pc:sldMkLst>
-          <pc:docMk/>
-          <pc:sldMk cId="0" sldId="305"/>
-        </pc:sldMkLst>
-        <pc:spChg chg="mod">
-          <ac:chgData name="janghoon jun" userId="056a5883350c2f5e" providerId="LiveId" clId="{6DA654A6-03B0-40F7-A259-B276216985A6}" dt="2026-07-08T06:22:56.584" v="4814" actId="6549"/>
-          <ac:spMkLst>
-            <pc:docMk/>
-            <pc:sldMk cId="0" sldId="305"/>
-            <ac:spMk id="2" creationId="{00000000-0000-0000-0000-000000000000}"/>
-          </ac:spMkLst>
-        </pc:spChg>
-        <pc:spChg chg="del">
-          <ac:chgData name="janghoon jun" userId="056a5883350c2f5e" providerId="LiveId" clId="{6DA654A6-03B0-40F7-A259-B276216985A6}" dt="2026-07-08T06:23:00.678" v="4815" actId="478"/>
-          <ac:spMkLst>
-            <pc:docMk/>
-            <pc:sldMk cId="0" sldId="305"/>
-            <ac:spMk id="6" creationId="{00000000-0000-0000-0000-000000000000}"/>
-          </ac:spMkLst>
-        </pc:spChg>
-        <pc:picChg chg="mod">
-          <ac:chgData name="janghoon jun" userId="056a5883350c2f5e" providerId="LiveId" clId="{6DA654A6-03B0-40F7-A259-B276216985A6}" dt="2026-07-08T06:23:04.129" v="4816" actId="14100"/>
-          <ac:picMkLst>
-            <pc:docMk/>
-            <pc:sldMk cId="0" sldId="305"/>
-            <ac:picMk id="4" creationId="{00000000-0000-0000-0000-000000000000}"/>
-          </ac:picMkLst>
-        </pc:picChg>
-        <pc:picChg chg="mod">
-          <ac:chgData name="janghoon jun" userId="056a5883350c2f5e" providerId="LiveId" clId="{6DA654A6-03B0-40F7-A259-B276216985A6}" dt="2026-07-08T06:23:10.546" v="4819" actId="14100"/>
-          <ac:picMkLst>
-            <pc:docMk/>
-            <pc:sldMk cId="0" sldId="305"/>
-            <ac:picMk id="5" creationId="{00000000-0000-0000-0000-000000000000}"/>
-          </ac:picMkLst>
-        </pc:picChg>
-      </pc:sldChg>
-      <pc:sldChg chg="delSp modSp mod">
-        <pc:chgData name="janghoon jun" userId="056a5883350c2f5e" providerId="LiveId" clId="{6DA654A6-03B0-40F7-A259-B276216985A6}" dt="2026-07-08T06:28:25.796" v="4936" actId="20577"/>
-        <pc:sldMkLst>
-          <pc:docMk/>
-          <pc:sldMk cId="0" sldId="306"/>
-        </pc:sldMkLst>
-        <pc:spChg chg="mod">
-          <ac:chgData name="janghoon jun" userId="056a5883350c2f5e" providerId="LiveId" clId="{6DA654A6-03B0-40F7-A259-B276216985A6}" dt="2026-07-08T06:28:25.796" v="4936" actId="20577"/>
-          <ac:spMkLst>
-            <pc:docMk/>
-            <pc:sldMk cId="0" sldId="306"/>
-            <ac:spMk id="2" creationId="{00000000-0000-0000-0000-000000000000}"/>
-          </ac:spMkLst>
-        </pc:spChg>
-        <pc:spChg chg="del">
-          <ac:chgData name="janghoon jun" userId="056a5883350c2f5e" providerId="LiveId" clId="{6DA654A6-03B0-40F7-A259-B276216985A6}" dt="2026-07-08T06:23:33.656" v="4821" actId="478"/>
-          <ac:spMkLst>
-            <pc:docMk/>
-            <pc:sldMk cId="0" sldId="306"/>
-            <ac:spMk id="5" creationId="{00000000-0000-0000-0000-000000000000}"/>
-          </ac:spMkLst>
-        </pc:spChg>
-      </pc:sldChg>
-      <pc:sldChg chg="addSp delSp modSp del mod">
-        <pc:chgData name="janghoon jun" userId="056a5883350c2f5e" providerId="LiveId" clId="{6DA654A6-03B0-40F7-A259-B276216985A6}" dt="2026-07-08T06:25:18.838" v="4929" actId="47"/>
-        <pc:sldMkLst>
-          <pc:docMk/>
-          <pc:sldMk cId="0" sldId="307"/>
-        </pc:sldMkLst>
-        <pc:spChg chg="mod">
-          <ac:chgData name="janghoon jun" userId="056a5883350c2f5e" providerId="LiveId" clId="{6DA654A6-03B0-40F7-A259-B276216985A6}" dt="2026-07-08T06:23:52.993" v="4907" actId="6549"/>
-          <ac:spMkLst>
-            <pc:docMk/>
-            <pc:sldMk cId="0" sldId="307"/>
-            <ac:spMk id="2" creationId="{00000000-0000-0000-0000-000000000000}"/>
-          </ac:spMkLst>
-        </pc:spChg>
-        <pc:spChg chg="del mod">
-          <ac:chgData name="janghoon jun" userId="056a5883350c2f5e" providerId="LiveId" clId="{6DA654A6-03B0-40F7-A259-B276216985A6}" dt="2026-07-08T06:24:01.441" v="4918" actId="478"/>
-          <ac:spMkLst>
-            <pc:docMk/>
-            <pc:sldMk cId="0" sldId="307"/>
-            <ac:spMk id="3" creationId="{00000000-0000-0000-0000-000000000000}"/>
-          </ac:spMkLst>
-        </pc:spChg>
-        <pc:spChg chg="del">
-          <ac:chgData name="janghoon jun" userId="056a5883350c2f5e" providerId="LiveId" clId="{6DA654A6-03B0-40F7-A259-B276216985A6}" dt="2026-07-08T06:24:03.555" v="4920" actId="478"/>
-          <ac:spMkLst>
-            <pc:docMk/>
-            <pc:sldMk cId="0" sldId="307"/>
-            <ac:spMk id="5" creationId="{00000000-0000-0000-0000-000000000000}"/>
-          </ac:spMkLst>
-        </pc:spChg>
-        <pc:spChg chg="add del mod">
-          <ac:chgData name="janghoon jun" userId="056a5883350c2f5e" providerId="LiveId" clId="{6DA654A6-03B0-40F7-A259-B276216985A6}" dt="2026-07-08T06:24:02.292" v="4919" actId="478"/>
-          <ac:spMkLst>
-            <pc:docMk/>
-            <pc:sldMk cId="0" sldId="307"/>
-            <ac:spMk id="7" creationId="{80589D9D-D937-A28F-F45F-6161331CE005}"/>
-          </ac:spMkLst>
-        </pc:spChg>
-        <pc:picChg chg="mod">
-          <ac:chgData name="janghoon jun" userId="056a5883350c2f5e" providerId="LiveId" clId="{6DA654A6-03B0-40F7-A259-B276216985A6}" dt="2026-07-08T06:24:12.513" v="4922" actId="1076"/>
-          <ac:picMkLst>
-            <pc:docMk/>
-            <pc:sldMk cId="0" sldId="307"/>
-            <ac:picMk id="4" creationId="{00000000-0000-0000-0000-000000000000}"/>
-          </ac:picMkLst>
-        </pc:picChg>
-        <pc:picChg chg="add mod modCrop">
-          <ac:chgData name="janghoon jun" userId="056a5883350c2f5e" providerId="LiveId" clId="{6DA654A6-03B0-40F7-A259-B276216985A6}" dt="2026-07-08T06:25:00.478" v="4928" actId="1076"/>
-          <ac:picMkLst>
-            <pc:docMk/>
-            <pc:sldMk cId="0" sldId="307"/>
-            <ac:picMk id="9" creationId="{DF9DC526-FEAB-8E33-98AD-AB55ED1274EE}"/>
-          </ac:picMkLst>
-        </pc:picChg>
-      </pc:sldChg>
-      <pc:sldChg chg="modSp del mod">
-        <pc:chgData name="janghoon jun" userId="056a5883350c2f5e" providerId="LiveId" clId="{6DA654A6-03B0-40F7-A259-B276216985A6}" dt="2026-07-08T06:25:20.532" v="4930" actId="47"/>
-        <pc:sldMkLst>
-          <pc:docMk/>
-          <pc:sldMk cId="0" sldId="308"/>
-        </pc:sldMkLst>
-        <pc:spChg chg="mod">
-          <ac:chgData name="janghoon jun" userId="056a5883350c2f5e" providerId="LiveId" clId="{6DA654A6-03B0-40F7-A259-B276216985A6}" dt="2026-07-08T05:34:25.445" v="3746" actId="27636"/>
-          <ac:spMkLst>
-            <pc:docMk/>
-            <pc:sldMk cId="0" sldId="308"/>
-            <ac:spMk id="2" creationId="{00000000-0000-0000-0000-000000000000}"/>
-          </ac:spMkLst>
-        </pc:spChg>
-      </pc:sldChg>
-      <pc:sldChg chg="delSp modSp mod">
-        <pc:chgData name="janghoon jun" userId="056a5883350c2f5e" providerId="LiveId" clId="{6DA654A6-03B0-40F7-A259-B276216985A6}" dt="2026-07-08T06:28:34.549" v="4939" actId="20577"/>
-        <pc:sldMkLst>
-          <pc:docMk/>
-          <pc:sldMk cId="0" sldId="309"/>
-        </pc:sldMkLst>
-        <pc:spChg chg="mod">
-          <ac:chgData name="janghoon jun" userId="056a5883350c2f5e" providerId="LiveId" clId="{6DA654A6-03B0-40F7-A259-B276216985A6}" dt="2026-07-08T06:28:34.549" v="4939" actId="20577"/>
-          <ac:spMkLst>
-            <pc:docMk/>
-            <pc:sldMk cId="0" sldId="309"/>
-            <ac:spMk id="2" creationId="{00000000-0000-0000-0000-000000000000}"/>
-          </ac:spMkLst>
-        </pc:spChg>
-        <pc:spChg chg="del">
-          <ac:chgData name="janghoon jun" userId="056a5883350c2f5e" providerId="LiveId" clId="{6DA654A6-03B0-40F7-A259-B276216985A6}" dt="2026-07-08T06:26:01.838" v="4931" actId="478"/>
-          <ac:spMkLst>
-            <pc:docMk/>
-            <pc:sldMk cId="0" sldId="309"/>
-            <ac:spMk id="5" creationId="{00000000-0000-0000-0000-000000000000}"/>
-          </ac:spMkLst>
-        </pc:spChg>
-      </pc:sldChg>
-      <pc:sldChg chg="delSp modSp mod">
-        <pc:chgData name="janghoon jun" userId="056a5883350c2f5e" providerId="LiveId" clId="{6DA654A6-03B0-40F7-A259-B276216985A6}" dt="2026-07-08T06:28:58.742" v="5021" actId="478"/>
-        <pc:sldMkLst>
-          <pc:docMk/>
-          <pc:sldMk cId="0" sldId="310"/>
-        </pc:sldMkLst>
-        <pc:spChg chg="mod">
-          <ac:chgData name="janghoon jun" userId="056a5883350c2f5e" providerId="LiveId" clId="{6DA654A6-03B0-40F7-A259-B276216985A6}" dt="2026-07-08T06:28:41.357" v="4979" actId="6549"/>
-          <ac:spMkLst>
-            <pc:docMk/>
-            <pc:sldMk cId="0" sldId="310"/>
-            <ac:spMk id="2" creationId="{00000000-0000-0000-0000-000000000000}"/>
-          </ac:spMkLst>
-        </pc:spChg>
-        <pc:spChg chg="del">
-          <ac:chgData name="janghoon jun" userId="056a5883350c2f5e" providerId="LiveId" clId="{6DA654A6-03B0-40F7-A259-B276216985A6}" dt="2026-07-08T06:28:58.742" v="5021" actId="478"/>
-          <ac:spMkLst>
-            <pc:docMk/>
-            <pc:sldMk cId="0" sldId="310"/>
-            <ac:spMk id="5" creationId="{00000000-0000-0000-0000-000000000000}"/>
-          </ac:spMkLst>
-        </pc:spChg>
-      </pc:sldChg>
-      <pc:sldChg chg="delSp modSp mod">
-        <pc:chgData name="janghoon jun" userId="056a5883350c2f5e" providerId="LiveId" clId="{6DA654A6-03B0-40F7-A259-B276216985A6}" dt="2026-07-08T06:28:56.236" v="5020" actId="478"/>
-        <pc:sldMkLst>
-          <pc:docMk/>
-          <pc:sldMk cId="0" sldId="311"/>
-        </pc:sldMkLst>
-        <pc:spChg chg="mod">
-          <ac:chgData name="janghoon jun" userId="056a5883350c2f5e" providerId="LiveId" clId="{6DA654A6-03B0-40F7-A259-B276216985A6}" dt="2026-07-08T06:28:52.390" v="5019" actId="6549"/>
-          <ac:spMkLst>
-            <pc:docMk/>
-            <pc:sldMk cId="0" sldId="311"/>
-            <ac:spMk id="2" creationId="{00000000-0000-0000-0000-000000000000}"/>
-          </ac:spMkLst>
-        </pc:spChg>
-        <pc:spChg chg="del">
-          <ac:chgData name="janghoon jun" userId="056a5883350c2f5e" providerId="LiveId" clId="{6DA654A6-03B0-40F7-A259-B276216985A6}" dt="2026-07-08T06:28:56.236" v="5020" actId="478"/>
-          <ac:spMkLst>
-            <pc:docMk/>
-            <pc:sldMk cId="0" sldId="311"/>
-            <ac:spMk id="5" creationId="{00000000-0000-0000-0000-000000000000}"/>
-          </ac:spMkLst>
-        </pc:spChg>
-      </pc:sldChg>
-      <pc:sldChg chg="modSp mod">
-        <pc:chgData name="janghoon jun" userId="056a5883350c2f5e" providerId="LiveId" clId="{6DA654A6-03B0-40F7-A259-B276216985A6}" dt="2026-07-08T06:29:38.996" v="5061" actId="6549"/>
-        <pc:sldMkLst>
-          <pc:docMk/>
-          <pc:sldMk cId="0" sldId="312"/>
-        </pc:sldMkLst>
-        <pc:spChg chg="mod">
-          <ac:chgData name="janghoon jun" userId="056a5883350c2f5e" providerId="LiveId" clId="{6DA654A6-03B0-40F7-A259-B276216985A6}" dt="2026-07-08T06:29:38.996" v="5061" actId="6549"/>
-          <ac:spMkLst>
-            <pc:docMk/>
-            <pc:sldMk cId="0" sldId="312"/>
-            <ac:spMk id="2" creationId="{00000000-0000-0000-0000-000000000000}"/>
-          </ac:spMkLst>
-        </pc:spChg>
-      </pc:sldChg>
-      <pc:sldChg chg="modSp mod">
-        <pc:chgData name="janghoon jun" userId="056a5883350c2f5e" providerId="LiveId" clId="{6DA654A6-03B0-40F7-A259-B276216985A6}" dt="2026-07-08T06:33:14.694" v="5223" actId="2711"/>
-        <pc:sldMkLst>
-          <pc:docMk/>
-          <pc:sldMk cId="0" sldId="313"/>
-        </pc:sldMkLst>
-        <pc:graphicFrameChg chg="modGraphic">
-          <ac:chgData name="janghoon jun" userId="056a5883350c2f5e" providerId="LiveId" clId="{6DA654A6-03B0-40F7-A259-B276216985A6}" dt="2026-07-08T06:33:14.694" v="5223" actId="2711"/>
-          <ac:graphicFrameMkLst>
-            <pc:docMk/>
-            <pc:sldMk cId="0" sldId="313"/>
-            <ac:graphicFrameMk id="4" creationId="{00000000-0000-0000-0000-000000000000}"/>
-          </ac:graphicFrameMkLst>
-        </pc:graphicFrameChg>
-      </pc:sldChg>
-      <pc:sldChg chg="delSp modSp mod">
-        <pc:chgData name="janghoon jun" userId="056a5883350c2f5e" providerId="LiveId" clId="{6DA654A6-03B0-40F7-A259-B276216985A6}" dt="2026-07-08T06:33:44.719" v="5228" actId="478"/>
-        <pc:sldMkLst>
-          <pc:docMk/>
-          <pc:sldMk cId="0" sldId="314"/>
-        </pc:sldMkLst>
-        <pc:spChg chg="del mod">
-          <ac:chgData name="janghoon jun" userId="056a5883350c2f5e" providerId="LiveId" clId="{6DA654A6-03B0-40F7-A259-B276216985A6}" dt="2026-07-08T06:33:44.719" v="5228" actId="478"/>
-          <ac:spMkLst>
-            <pc:docMk/>
-            <pc:sldMk cId="0" sldId="314"/>
-            <ac:spMk id="5" creationId="{00000000-0000-0000-0000-000000000000}"/>
-          </ac:spMkLst>
-        </pc:spChg>
-      </pc:sldChg>
-      <pc:sldChg chg="addSp delSp modSp add del mod">
-        <pc:chgData name="janghoon jun" userId="056a5883350c2f5e" providerId="LiveId" clId="{6DA654A6-03B0-40F7-A259-B276216985A6}" dt="2026-07-08T05:44:53.427" v="4108" actId="47"/>
-        <pc:sldMkLst>
-          <pc:docMk/>
-          <pc:sldMk cId="3040168571" sldId="315"/>
-        </pc:sldMkLst>
-        <pc:spChg chg="mod">
-          <ac:chgData name="janghoon jun" userId="056a5883350c2f5e" providerId="LiveId" clId="{6DA654A6-03B0-40F7-A259-B276216985A6}" dt="2026-07-08T05:44:36.150" v="4104" actId="20577"/>
-          <ac:spMkLst>
-            <pc:docMk/>
-            <pc:sldMk cId="3040168571" sldId="315"/>
-            <ac:spMk id="4" creationId="{5C1159C3-0DBA-3776-19CD-A028CCA8A5B5}"/>
-          </ac:spMkLst>
-        </pc:spChg>
-        <pc:spChg chg="mod">
-          <ac:chgData name="janghoon jun" userId="056a5883350c2f5e" providerId="LiveId" clId="{6DA654A6-03B0-40F7-A259-B276216985A6}" dt="2026-07-08T05:44:37.631" v="4106" actId="20577"/>
-          <ac:spMkLst>
-            <pc:docMk/>
-            <pc:sldMk cId="3040168571" sldId="315"/>
-            <ac:spMk id="5" creationId="{ED61727B-1D68-D0AE-A162-78CFCF7DCEAD}"/>
-          </ac:spMkLst>
-        </pc:spChg>
-        <pc:spChg chg="mod">
-          <ac:chgData name="janghoon jun" userId="056a5883350c2f5e" providerId="LiveId" clId="{6DA654A6-03B0-40F7-A259-B276216985A6}" dt="2026-07-08T05:44:25.185" v="4101" actId="164"/>
-          <ac:spMkLst>
-            <pc:docMk/>
-            <pc:sldMk cId="3040168571" sldId="315"/>
-            <ac:spMk id="6" creationId="{197E1DD0-7F36-5BE9-1551-B6C6D0980C6C}"/>
-          </ac:spMkLst>
-        </pc:spChg>
-        <pc:spChg chg="del">
-          <ac:chgData name="janghoon jun" userId="056a5883350c2f5e" providerId="LiveId" clId="{6DA654A6-03B0-40F7-A259-B276216985A6}" dt="2026-07-08T05:44:06.128" v="4098" actId="478"/>
-          <ac:spMkLst>
-            <pc:docMk/>
-            <pc:sldMk cId="3040168571" sldId="315"/>
-            <ac:spMk id="7" creationId="{5737FCF3-0772-0AB4-9091-4164478F3A0F}"/>
-          </ac:spMkLst>
-        </pc:spChg>
-        <pc:grpChg chg="add mod">
-          <ac:chgData name="janghoon jun" userId="056a5883350c2f5e" providerId="LiveId" clId="{6DA654A6-03B0-40F7-A259-B276216985A6}" dt="2026-07-08T05:44:42.768" v="4107" actId="1076"/>
-          <ac:grpSpMkLst>
-            <pc:docMk/>
-            <pc:sldMk cId="3040168571" sldId="315"/>
-            <ac:grpSpMk id="8" creationId="{4D48FF70-B7C3-7DD0-7C99-EBB6B4EF433D}"/>
-          </ac:grpSpMkLst>
-        </pc:grpChg>
-      </pc:sldChg>
-      <pc:sldChg chg="modSp mod modNotesTx">
-        <pc:chgData name="janghoon jun" userId="056a5883350c2f5e" providerId="LiveId" clId="{6DA654A6-03B0-40F7-A259-B276216985A6}" dt="2026-07-07T05:53:07.441" v="2954" actId="27636"/>
-        <pc:sldMkLst>
-          <pc:docMk/>
-          <pc:sldMk cId="4271007981" sldId="524"/>
-        </pc:sldMkLst>
-        <pc:spChg chg="mod">
-          <ac:chgData name="janghoon jun" userId="056a5883350c2f5e" providerId="LiveId" clId="{6DA654A6-03B0-40F7-A259-B276216985A6}" dt="2026-07-07T05:53:07.441" v="2954" actId="27636"/>
-          <ac:spMkLst>
-            <pc:docMk/>
-            <pc:sldMk cId="4271007981" sldId="524"/>
-            <ac:spMk id="3" creationId="{B2A4B13E-D4FF-F6EF-0421-904F6E47B818}"/>
-          </ac:spMkLst>
-        </pc:spChg>
-      </pc:sldChg>
-      <pc:sldChg chg="modSp mod modNotesTx">
-        <pc:chgData name="janghoon jun" userId="056a5883350c2f5e" providerId="LiveId" clId="{6DA654A6-03B0-40F7-A259-B276216985A6}" dt="2026-07-07T06:20:30.284" v="3349" actId="20577"/>
-        <pc:sldMkLst>
-          <pc:docMk/>
-          <pc:sldMk cId="217966962" sldId="551"/>
-        </pc:sldMkLst>
-        <pc:spChg chg="mod">
-          <ac:chgData name="janghoon jun" userId="056a5883350c2f5e" providerId="LiveId" clId="{6DA654A6-03B0-40F7-A259-B276216985A6}" dt="2026-07-07T06:20:30.284" v="3349" actId="20577"/>
-          <ac:spMkLst>
-            <pc:docMk/>
-            <pc:sldMk cId="217966962" sldId="551"/>
-            <ac:spMk id="7" creationId="{1085DB8A-F2FD-AB70-F0B6-F5E8612C16E3}"/>
-          </ac:spMkLst>
-        </pc:spChg>
-      </pc:sldChg>
-      <pc:sldChg chg="addSp delSp modSp mod modNotesTx">
-        <pc:chgData name="janghoon jun" userId="056a5883350c2f5e" providerId="LiveId" clId="{6DA654A6-03B0-40F7-A259-B276216985A6}" dt="2026-07-07T06:27:42.391" v="3726" actId="20577"/>
-        <pc:sldMkLst>
-          <pc:docMk/>
-          <pc:sldMk cId="862864859" sldId="584"/>
-        </pc:sldMkLst>
-        <pc:spChg chg="add del mod">
-          <ac:chgData name="janghoon jun" userId="056a5883350c2f5e" providerId="LiveId" clId="{6DA654A6-03B0-40F7-A259-B276216985A6}" dt="2026-07-07T06:02:23.247" v="3232" actId="478"/>
-          <ac:spMkLst>
-            <pc:docMk/>
-            <pc:sldMk cId="862864859" sldId="584"/>
-            <ac:spMk id="5" creationId="{28370CC8-5180-4116-2C69-517CC8C77A8D}"/>
-          </ac:spMkLst>
-        </pc:spChg>
-        <pc:spChg chg="add mod">
-          <ac:chgData name="janghoon jun" userId="056a5883350c2f5e" providerId="LiveId" clId="{6DA654A6-03B0-40F7-A259-B276216985A6}" dt="2026-07-07T06:21:01.467" v="3352" actId="20577"/>
-          <ac:spMkLst>
-            <pc:docMk/>
-            <pc:sldMk cId="862864859" sldId="584"/>
-            <ac:spMk id="6" creationId="{D62C2986-0880-73A6-0030-011944A6C073}"/>
-          </ac:spMkLst>
-        </pc:spChg>
-        <pc:spChg chg="add mod">
-          <ac:chgData name="janghoon jun" userId="056a5883350c2f5e" providerId="LiveId" clId="{6DA654A6-03B0-40F7-A259-B276216985A6}" dt="2026-07-07T06:21:59.539" v="3433" actId="20577"/>
-          <ac:spMkLst>
-            <pc:docMk/>
-            <pc:sldMk cId="862864859" sldId="584"/>
-            <ac:spMk id="7" creationId="{1BB855DF-B6D6-F963-7960-07D55D35BC6B}"/>
-          </ac:spMkLst>
-        </pc:spChg>
-        <pc:spChg chg="add mod">
-          <ac:chgData name="janghoon jun" userId="056a5883350c2f5e" providerId="LiveId" clId="{6DA654A6-03B0-40F7-A259-B276216985A6}" dt="2026-07-07T06:27:13.315" v="3577" actId="1076"/>
-          <ac:spMkLst>
-            <pc:docMk/>
-            <pc:sldMk cId="862864859" sldId="584"/>
-            <ac:spMk id="8" creationId="{40F74CA7-2F41-1E0A-0766-642D831862A7}"/>
-          </ac:spMkLst>
-        </pc:spChg>
-        <pc:spChg chg="add mod">
-          <ac:chgData name="janghoon jun" userId="056a5883350c2f5e" providerId="LiveId" clId="{6DA654A6-03B0-40F7-A259-B276216985A6}" dt="2026-07-07T06:27:42.391" v="3726" actId="20577"/>
-          <ac:spMkLst>
-            <pc:docMk/>
-            <pc:sldMk cId="862864859" sldId="584"/>
-            <ac:spMk id="9" creationId="{E233841F-ECA5-7C95-3F36-3EC2D4BA9590}"/>
-          </ac:spMkLst>
-        </pc:spChg>
-      </pc:sldChg>
-      <pc:sldChg chg="addSp delSp modSp add del mod modNotesTx">
-        <pc:chgData name="janghoon jun" userId="056a5883350c2f5e" providerId="LiveId" clId="{6DA654A6-03B0-40F7-A259-B276216985A6}" dt="2026-07-07T06:02:24.296" v="3233" actId="47"/>
-        <pc:sldMkLst>
-          <pc:docMk/>
-          <pc:sldMk cId="789029597" sldId="585"/>
-        </pc:sldMkLst>
-      </pc:sldChg>
-      <pc:sldChg chg="addSp delSp modSp add del mod modNotesTx">
-        <pc:chgData name="janghoon jun" userId="056a5883350c2f5e" providerId="LiveId" clId="{6DA654A6-03B0-40F7-A259-B276216985A6}" dt="2026-07-07T06:02:26.061" v="3235" actId="47"/>
-        <pc:sldMkLst>
-          <pc:docMk/>
-          <pc:sldMk cId="2035868554" sldId="586"/>
-        </pc:sldMkLst>
-      </pc:sldChg>
-      <pc:sldChg chg="addSp delSp modSp add del mod modNotesTx">
-        <pc:chgData name="janghoon jun" userId="056a5883350c2f5e" providerId="LiveId" clId="{6DA654A6-03B0-40F7-A259-B276216985A6}" dt="2026-07-07T06:02:26.715" v="3236" actId="47"/>
-        <pc:sldMkLst>
-          <pc:docMk/>
-          <pc:sldMk cId="3194503239" sldId="587"/>
-        </pc:sldMkLst>
-      </pc:sldChg>
-      <pc:sldChg chg="addSp delSp modSp add del mod modNotesTx">
-        <pc:chgData name="janghoon jun" userId="056a5883350c2f5e" providerId="LiveId" clId="{6DA654A6-03B0-40F7-A259-B276216985A6}" dt="2026-07-07T06:02:27.390" v="3237" actId="47"/>
-        <pc:sldMkLst>
-          <pc:docMk/>
-          <pc:sldMk cId="1704474408" sldId="588"/>
-        </pc:sldMkLst>
-      </pc:sldChg>
-      <pc:sldChg chg="addSp modSp add del mod modNotesTx">
-        <pc:chgData name="janghoon jun" userId="056a5883350c2f5e" providerId="LiveId" clId="{6DA654A6-03B0-40F7-A259-B276216985A6}" dt="2026-07-07T06:02:28.071" v="3238" actId="47"/>
-        <pc:sldMkLst>
-          <pc:docMk/>
-          <pc:sldMk cId="2813930619" sldId="589"/>
-        </pc:sldMkLst>
-      </pc:sldChg>
-      <pc:sldChg chg="modSp add del mod modNotesTx">
-        <pc:chgData name="janghoon jun" userId="056a5883350c2f5e" providerId="LiveId" clId="{6DA654A6-03B0-40F7-A259-B276216985A6}" dt="2026-07-07T06:02:28.703" v="3239" actId="47"/>
-        <pc:sldMkLst>
-          <pc:docMk/>
-          <pc:sldMk cId="397103809" sldId="590"/>
-        </pc:sldMkLst>
-      </pc:sldChg>
-      <pc:sldChg chg="addSp modSp add del mod modNotesTx">
-        <pc:chgData name="janghoon jun" userId="056a5883350c2f5e" providerId="LiveId" clId="{6DA654A6-03B0-40F7-A259-B276216985A6}" dt="2026-07-07T06:02:29.327" v="3240" actId="47"/>
-        <pc:sldMkLst>
-          <pc:docMk/>
-          <pc:sldMk cId="1793991331" sldId="591"/>
-        </pc:sldMkLst>
-      </pc:sldChg>
-      <pc:sldChg chg="addSp delSp modSp add del mod modNotesTx">
-        <pc:chgData name="janghoon jun" userId="056a5883350c2f5e" providerId="LiveId" clId="{6DA654A6-03B0-40F7-A259-B276216985A6}" dt="2026-07-07T06:02:29.958" v="3241" actId="47"/>
-        <pc:sldMkLst>
-          <pc:docMk/>
-          <pc:sldMk cId="2857516297" sldId="592"/>
-        </pc:sldMkLst>
-      </pc:sldChg>
-      <pc:sldChg chg="addSp delSp modSp add del mod modNotesTx">
-        <pc:chgData name="janghoon jun" userId="056a5883350c2f5e" providerId="LiveId" clId="{6DA654A6-03B0-40F7-A259-B276216985A6}" dt="2026-07-07T06:02:30.666" v="3242" actId="47"/>
-        <pc:sldMkLst>
-          <pc:docMk/>
-          <pc:sldMk cId="264417426" sldId="593"/>
-        </pc:sldMkLst>
-      </pc:sldChg>
-      <pc:sldChg chg="addSp modSp add del mod modNotesTx">
-        <pc:chgData name="janghoon jun" userId="056a5883350c2f5e" providerId="LiveId" clId="{6DA654A6-03B0-40F7-A259-B276216985A6}" dt="2026-07-07T06:02:31.412" v="3243" actId="47"/>
-        <pc:sldMkLst>
-          <pc:docMk/>
-          <pc:sldMk cId="1066384288" sldId="594"/>
-        </pc:sldMkLst>
-      </pc:sldChg>
-      <pc:sldChg chg="addSp modSp add del mod modNotesTx">
-        <pc:chgData name="janghoon jun" userId="056a5883350c2f5e" providerId="LiveId" clId="{6DA654A6-03B0-40F7-A259-B276216985A6}" dt="2026-07-07T06:02:32.098" v="3244" actId="47"/>
-        <pc:sldMkLst>
-          <pc:docMk/>
-          <pc:sldMk cId="3674311941" sldId="595"/>
-        </pc:sldMkLst>
-      </pc:sldChg>
-      <pc:sldChg chg="modSp add del mod modNotesTx">
-        <pc:chgData name="janghoon jun" userId="056a5883350c2f5e" providerId="LiveId" clId="{6DA654A6-03B0-40F7-A259-B276216985A6}" dt="2026-07-07T06:02:32.801" v="3245" actId="47"/>
-        <pc:sldMkLst>
-          <pc:docMk/>
-          <pc:sldMk cId="1262180545" sldId="596"/>
-        </pc:sldMkLst>
-      </pc:sldChg>
-      <pc:sldChg chg="addSp delSp modSp add mod modNotesTx">
-        <pc:chgData name="janghoon jun" userId="056a5883350c2f5e" providerId="LiveId" clId="{6DA654A6-03B0-40F7-A259-B276216985A6}" dt="2026-07-07T06:02:36.272" v="3246" actId="478"/>
-        <pc:sldMkLst>
-          <pc:docMk/>
-          <pc:sldMk cId="2313877190" sldId="597"/>
-        </pc:sldMkLst>
-        <pc:spChg chg="del mod">
-          <ac:chgData name="janghoon jun" userId="056a5883350c2f5e" providerId="LiveId" clId="{6DA654A6-03B0-40F7-A259-B276216985A6}" dt="2026-07-07T06:02:36.272" v="3246" actId="478"/>
-          <ac:spMkLst>
-            <pc:docMk/>
-            <pc:sldMk cId="2313877190" sldId="597"/>
-            <ac:spMk id="5" creationId="{47F256C7-7695-EA58-29A7-614CC7465766}"/>
-          </ac:spMkLst>
-        </pc:spChg>
-        <pc:spChg chg="add mod">
-          <ac:chgData name="janghoon jun" userId="056a5883350c2f5e" providerId="LiveId" clId="{6DA654A6-03B0-40F7-A259-B276216985A6}" dt="2026-07-07T06:02:36.272" v="3246" actId="478"/>
-          <ac:spMkLst>
-            <pc:docMk/>
-            <pc:sldMk cId="2313877190" sldId="597"/>
-            <ac:spMk id="6" creationId="{2277A352-DBDD-00CE-BE2E-4167D2776516}"/>
-          </ac:spMkLst>
-        </pc:spChg>
-      </pc:sldChg>
-      <pc:sldChg chg="modSp add del mod modNotesTx">
-        <pc:chgData name="janghoon jun" userId="056a5883350c2f5e" providerId="LiveId" clId="{6DA654A6-03B0-40F7-A259-B276216985A6}" dt="2026-07-07T05:52:26.398" v="2919" actId="47"/>
-        <pc:sldMkLst>
-          <pc:docMk/>
-          <pc:sldMk cId="1376043223" sldId="598"/>
-        </pc:sldMkLst>
-      </pc:sldChg>
-      <pc:sldChg chg="addSp modSp add del mod modNotesTx">
-        <pc:chgData name="janghoon jun" userId="056a5883350c2f5e" providerId="LiveId" clId="{6DA654A6-03B0-40F7-A259-B276216985A6}" dt="2026-07-07T06:02:25.336" v="3234" actId="47"/>
-        <pc:sldMkLst>
-          <pc:docMk/>
-          <pc:sldMk cId="1647113666" sldId="599"/>
-        </pc:sldMkLst>
-      </pc:sldChg>
-    </pc:docChg>
-  </pc:docChgLst>
-</pc:chgInfo>
 </file>
 
 <file path=ppt/notesMasters/notesMaster1.xml><?xml version="1.0" encoding="utf-8"?>
@@ -2811,6 +548,360 @@
         <p:cNvPr id="1" name="">
           <a:extLst>
             <a:ext uri="{FF2B5EF4-FFF2-40B4-BE49-F238E27FC236}">
+              <a16:creationId xmlns:a16="http://schemas.microsoft.com/office/drawing/2014/main" id="{16EF0381-810E-464D-B1EB-A43C8D9D8156}"/>
+            </a:ext>
+          </a:extLst>
+        </p:cNvPr>
+        <p:cNvGrpSpPr/>
+        <p:nvPr/>
+      </p:nvGrpSpPr>
+      <p:grpSpPr>
+        <a:xfrm>
+          <a:off x="0" y="0"/>
+          <a:ext cx="0" cy="0"/>
+          <a:chOff x="0" y="0"/>
+          <a:chExt cx="0" cy="0"/>
+        </a:xfrm>
+      </p:grpSpPr>
+      <p:sp>
+        <p:nvSpPr>
+          <p:cNvPr id="2" name="Slide Image Placeholder 1">
+            <a:extLst>
+              <a:ext uri="{FF2B5EF4-FFF2-40B4-BE49-F238E27FC236}">
+                <a16:creationId xmlns:a16="http://schemas.microsoft.com/office/drawing/2014/main" id="{EE4CFA89-1768-738F-4715-92372F639CD5}"/>
+              </a:ext>
+            </a:extLst>
+          </p:cNvPr>
+          <p:cNvSpPr>
+            <a:spLocks noGrp="1" noRot="1" noChangeAspect="1"/>
+          </p:cNvSpPr>
+          <p:nvPr>
+            <p:ph type="sldImg" idx="2"/>
+          </p:nvPr>
+        </p:nvSpPr>
+        <p:spPr/>
+      </p:sp>
+      <p:sp>
+        <p:nvSpPr>
+          <p:cNvPr id="3" name="Notes Placeholder 2">
+            <a:extLst>
+              <a:ext uri="{FF2B5EF4-FFF2-40B4-BE49-F238E27FC236}">
+                <a16:creationId xmlns:a16="http://schemas.microsoft.com/office/drawing/2014/main" id="{F368C8B6-A6CC-A6D5-3BFA-E49282170CEE}"/>
+              </a:ext>
+            </a:extLst>
+          </p:cNvPr>
+          <p:cNvSpPr>
+            <a:spLocks noGrp="1"/>
+          </p:cNvSpPr>
+          <p:nvPr>
+            <p:ph type="body" sz="quarter" idx="3"/>
+          </p:nvPr>
+        </p:nvSpPr>
+        <p:spPr/>
+        <p:txBody>
+          <a:bodyPr/>
+          <a:lstStyle/>
+          <a:p>
+            <a:r>
+              <a:t>위 슬라이드와 같은 TP vs FP 비교인데, 이번에는 '성별·나이·키·체중이 비슷한 환자끼리' 미리 짝을 지은 뒤(propensity matching -- 쌍둥이처럼 비슷한 사람끼리 골라 비교하는 방법) 곡선을 비교했습니다. 혹시 '체형 차이' 때문에 곡선이 달라 보이는 착시가 있었던 건 아닌지 확인하기 위해서입니다. 짝을 지은 뒤에도 강남은 여전히 차이가 없고(p=0.983), 신촌은 여전히 약한 차이가 남아 있습니다(p=0.0165) -- 체형 차이 때문에 생긴 착시는 아니라는 뜻입니다.</a:t>
+            </a:r>
+          </a:p>
+        </p:txBody>
+      </p:sp>
+      <p:sp>
+        <p:nvSpPr>
+          <p:cNvPr id="4" name="Slide Number Placeholder 3">
+            <a:extLst>
+              <a:ext uri="{FF2B5EF4-FFF2-40B4-BE49-F238E27FC236}">
+                <a16:creationId xmlns:a16="http://schemas.microsoft.com/office/drawing/2014/main" id="{2B516025-4491-8FCC-B5D8-9E45A96A3D1E}"/>
+              </a:ext>
+            </a:extLst>
+          </p:cNvPr>
+          <p:cNvSpPr>
+            <a:spLocks noGrp="1"/>
+          </p:cNvSpPr>
+          <p:nvPr>
+            <p:ph type="sldNum" sz="quarter" idx="5"/>
+          </p:nvPr>
+        </p:nvSpPr>
+        <p:spPr/>
+      </p:sp>
+    </p:spTree>
+    <p:extLst>
+      <p:ext uri="{BB962C8B-B14F-4D97-AF65-F5344CB8AC3E}">
+        <p14:creationId xmlns:p14="http://schemas.microsoft.com/office/powerpoint/2010/main" val="2376449927"/>
+      </p:ext>
+    </p:extLst>
+  </p:cSld>
+  <p:clrMapOvr>
+    <a:masterClrMapping/>
+  </p:clrMapOvr>
+</p:notes>
+</file>
+
+<file path=ppt/notesSlides/notesSlide11.xml><?xml version="1.0" encoding="utf-8"?>
+<p:notes xmlns:a="http://schemas.openxmlformats.org/drawingml/2006/main" xmlns:r="http://schemas.openxmlformats.org/officeDocument/2006/relationships" xmlns:p="http://schemas.openxmlformats.org/presentationml/2006/main">
+  <p:cSld>
+    <p:spTree>
+      <p:nvGrpSpPr>
+        <p:cNvPr id="1" name="">
+          <a:extLst>
+            <a:ext uri="{FF2B5EF4-FFF2-40B4-BE49-F238E27FC236}">
+              <a16:creationId xmlns:a16="http://schemas.microsoft.com/office/drawing/2014/main" id="{47A0344B-725A-F24C-70BD-475446FDCB5F}"/>
+            </a:ext>
+          </a:extLst>
+        </p:cNvPr>
+        <p:cNvGrpSpPr/>
+        <p:nvPr/>
+      </p:nvGrpSpPr>
+      <p:grpSpPr>
+        <a:xfrm>
+          <a:off x="0" y="0"/>
+          <a:ext cx="0" cy="0"/>
+          <a:chOff x="0" y="0"/>
+          <a:chExt cx="0" cy="0"/>
+        </a:xfrm>
+      </p:grpSpPr>
+      <p:sp>
+        <p:nvSpPr>
+          <p:cNvPr id="2" name="Slide Image Placeholder 1">
+            <a:extLst>
+              <a:ext uri="{FF2B5EF4-FFF2-40B4-BE49-F238E27FC236}">
+                <a16:creationId xmlns:a16="http://schemas.microsoft.com/office/drawing/2014/main" id="{24BAC708-998B-CF8A-8C87-3767BF180915}"/>
+              </a:ext>
+            </a:extLst>
+          </p:cNvPr>
+          <p:cNvSpPr>
+            <a:spLocks noGrp="1" noRot="1" noChangeAspect="1"/>
+          </p:cNvSpPr>
+          <p:nvPr>
+            <p:ph type="sldImg" idx="2"/>
+          </p:nvPr>
+        </p:nvSpPr>
+        <p:spPr/>
+      </p:sp>
+      <p:sp>
+        <p:nvSpPr>
+          <p:cNvPr id="3" name="Notes Placeholder 2">
+            <a:extLst>
+              <a:ext uri="{FF2B5EF4-FFF2-40B4-BE49-F238E27FC236}">
+                <a16:creationId xmlns:a16="http://schemas.microsoft.com/office/drawing/2014/main" id="{258D1B52-3F75-4EE0-B52D-7E29EE64D08C}"/>
+              </a:ext>
+            </a:extLst>
+          </p:cNvPr>
+          <p:cNvSpPr>
+            <a:spLocks noGrp="1"/>
+          </p:cNvSpPr>
+          <p:nvPr>
+            <p:ph type="body" sz="quarter" idx="3"/>
+          </p:nvPr>
+        </p:nvSpPr>
+        <p:spPr/>
+        <p:txBody>
+          <a:bodyPr/>
+          <a:lstStyle/>
+          <a:p>
+            <a:r>
+              <a:t>지금까지의 결과를 정리하면, AEC 곡선 하나만으로는(원곡선이든, 요약 지표든, 주성분이든) TP와 FP를 뚜렷하게 구별하기 어렵습니다. 다만 강남과 신촌 결과가 완전히 같지는 않아서(신촌에 미세한 흔적이 남음) 좀 더 정교한 접근이 필요합니다. 다음 단계로는 임상 정보(성별/나이/키/체중)와 AEC 곡선 정보를 딥러닝 모델(멀티모달 구조)로 함께 학습시켜서 사람이 놓칠 수 있는 복합적인 패턴을 잡아낼 수 있는지 시도하고, Stage-1 모델 자체의 성능(AUC)을 높이는 방법도 함께 연구할 계획입니다.</a:t>
+            </a:r>
+          </a:p>
+        </p:txBody>
+      </p:sp>
+      <p:sp>
+        <p:nvSpPr>
+          <p:cNvPr id="4" name="Slide Number Placeholder 3">
+            <a:extLst>
+              <a:ext uri="{FF2B5EF4-FFF2-40B4-BE49-F238E27FC236}">
+                <a16:creationId xmlns:a16="http://schemas.microsoft.com/office/drawing/2014/main" id="{24E0675F-AB5A-2AC6-A453-932F57D74234}"/>
+              </a:ext>
+            </a:extLst>
+          </p:cNvPr>
+          <p:cNvSpPr>
+            <a:spLocks noGrp="1"/>
+          </p:cNvSpPr>
+          <p:nvPr>
+            <p:ph type="sldNum" sz="quarter" idx="5"/>
+          </p:nvPr>
+        </p:nvSpPr>
+        <p:spPr/>
+      </p:sp>
+    </p:spTree>
+    <p:extLst>
+      <p:ext uri="{BB962C8B-B14F-4D97-AF65-F5344CB8AC3E}">
+        <p14:creationId xmlns:p14="http://schemas.microsoft.com/office/powerpoint/2010/main" val="739262899"/>
+      </p:ext>
+    </p:extLst>
+  </p:cSld>
+  <p:clrMapOvr>
+    <a:masterClrMapping/>
+  </p:clrMapOvr>
+</p:notes>
+</file>
+
+<file path=ppt/notesSlides/notesSlide12.xml><?xml version="1.0" encoding="utf-8"?>
+<p:notes xmlns:a="http://schemas.openxmlformats.org/drawingml/2006/main" xmlns:r="http://schemas.openxmlformats.org/officeDocument/2006/relationships" xmlns:p="http://schemas.openxmlformats.org/presentationml/2006/main" showMasterSp="0" showMasterPhAnim="0">
+  <p:cSld>
+    <p:spTree>
+      <p:nvGrpSpPr>
+        <p:cNvPr id="1" name="Shape 1171"/>
+        <p:cNvGrpSpPr/>
+        <p:nvPr/>
+      </p:nvGrpSpPr>
+      <p:grpSpPr>
+        <a:xfrm>
+          <a:off x="0" y="0"/>
+          <a:ext cx="0" cy="0"/>
+          <a:chOff x="0" y="0"/>
+          <a:chExt cx="0" cy="0"/>
+        </a:xfrm>
+      </p:grpSpPr>
+      <p:sp>
+        <p:nvSpPr>
+          <p:cNvPr id="1172" name="Google Shape;1172;g3d412ffb079_0_61:notes"/>
+          <p:cNvSpPr>
+            <a:spLocks noGrp="1" noRot="1" noChangeAspect="1"/>
+          </p:cNvSpPr>
+          <p:nvPr>
+            <p:ph type="sldImg" idx="2"/>
+          </p:nvPr>
+        </p:nvSpPr>
+        <p:spPr>
+          <a:xfrm>
+            <a:off x="4040188" y="857250"/>
+            <a:ext cx="4113212" cy="2314575"/>
+          </a:xfrm>
+          <a:custGeom>
+            <a:avLst/>
+            <a:gdLst/>
+            <a:ahLst/>
+            <a:cxnLst/>
+            <a:rect l="l" t="t" r="r" b="b"/>
+            <a:pathLst>
+              <a:path w="120000" h="120000" extrusionOk="0">
+                <a:moveTo>
+                  <a:pt x="0" y="0"/>
+                </a:moveTo>
+                <a:lnTo>
+                  <a:pt x="120000" y="0"/>
+                </a:lnTo>
+                <a:lnTo>
+                  <a:pt x="120000" y="120000"/>
+                </a:lnTo>
+                <a:lnTo>
+                  <a:pt x="0" y="120000"/>
+                </a:lnTo>
+                <a:close/>
+              </a:path>
+            </a:pathLst>
+          </a:custGeom>
+        </p:spPr>
+      </p:sp>
+      <p:sp>
+        <p:nvSpPr>
+          <p:cNvPr id="1173" name="Google Shape;1173;g3d412ffb079_0_61:notes"/>
+          <p:cNvSpPr txBox="1">
+            <a:spLocks noGrp="1"/>
+          </p:cNvSpPr>
+          <p:nvPr>
+            <p:ph type="body" idx="1"/>
+          </p:nvPr>
+        </p:nvSpPr>
+        <p:spPr>
+          <a:xfrm>
+            <a:off x="1219200" y="3300413"/>
+            <a:ext cx="9753600" cy="2700300"/>
+          </a:xfrm>
+          <a:prstGeom prst="rect">
+            <a:avLst/>
+          </a:prstGeom>
+        </p:spPr>
+        <p:txBody>
+          <a:bodyPr spcFirstLastPara="1" wrap="square" lIns="91425" tIns="45700" rIns="91425" bIns="45700" anchor="t" anchorCtr="0">
+            <a:noAutofit/>
+          </a:bodyPr>
+          <a:lstStyle/>
+          <a:p>
+            <a:pPr marL="0" lvl="0" indent="0" algn="l" rtl="0">
+              <a:spcBef>
+                <a:spcPts val="0"/>
+              </a:spcBef>
+              <a:spcAft>
+                <a:spcPts val="0"/>
+              </a:spcAft>
+              <a:buNone/>
+            </a:pPr>
+            <a:endParaRPr/>
+          </a:p>
+        </p:txBody>
+      </p:sp>
+      <p:sp>
+        <p:nvSpPr>
+          <p:cNvPr id="1174" name="Google Shape;1174;g3d412ffb079_0_61:notes"/>
+          <p:cNvSpPr txBox="1">
+            <a:spLocks noGrp="1"/>
+          </p:cNvSpPr>
+          <p:nvPr>
+            <p:ph type="sldNum" idx="12"/>
+          </p:nvPr>
+        </p:nvSpPr>
+        <p:spPr>
+          <a:xfrm>
+            <a:off x="6905625" y="6513513"/>
+            <a:ext cx="5283300" cy="344400"/>
+          </a:xfrm>
+          <a:prstGeom prst="rect">
+            <a:avLst/>
+          </a:prstGeom>
+        </p:spPr>
+        <p:txBody>
+          <a:bodyPr spcFirstLastPara="1" wrap="square" lIns="91425" tIns="45700" rIns="91425" bIns="45700" anchor="b" anchorCtr="0">
+            <a:noAutofit/>
+          </a:bodyPr>
+          <a:lstStyle/>
+          <a:p>
+            <a:pPr marL="0" lvl="0" indent="0" algn="r" rtl="0">
+              <a:spcBef>
+                <a:spcPts val="0"/>
+              </a:spcBef>
+              <a:spcAft>
+                <a:spcPts val="0"/>
+              </a:spcAft>
+              <a:buClr>
+                <a:srgbClr val="000000"/>
+              </a:buClr>
+              <a:buSzPts val="1200"/>
+              <a:buFont typeface="Arial"/>
+              <a:buNone/>
+            </a:pPr>
+            <a:fld id="{00000000-1234-1234-1234-123412341234}" type="slidenum">
+              <a:rPr lang="en-US"/>
+              <a:t>12</a:t>
+            </a:fld>
+            <a:endParaRPr/>
+          </a:p>
+        </p:txBody>
+      </p:sp>
+    </p:spTree>
+    <p:extLst>
+      <p:ext uri="{BB962C8B-B14F-4D97-AF65-F5344CB8AC3E}">
+        <p14:creationId xmlns:p14="http://schemas.microsoft.com/office/powerpoint/2010/main" val="1263641952"/>
+      </p:ext>
+    </p:extLst>
+  </p:cSld>
+  <p:clrMapOvr>
+    <a:masterClrMapping/>
+  </p:clrMapOvr>
+</p:notes>
+</file>
+
+<file path=ppt/notesSlides/notesSlide13.xml><?xml version="1.0" encoding="utf-8"?>
+<p:notes xmlns:a="http://schemas.openxmlformats.org/drawingml/2006/main" xmlns:r="http://schemas.openxmlformats.org/officeDocument/2006/relationships" xmlns:p="http://schemas.openxmlformats.org/presentationml/2006/main">
+  <p:cSld>
+    <p:spTree>
+      <p:nvGrpSpPr>
+        <p:cNvPr id="1" name="">
+          <a:extLst>
+            <a:ext uri="{FF2B5EF4-FFF2-40B4-BE49-F238E27FC236}">
               <a16:creationId xmlns:a16="http://schemas.microsoft.com/office/drawing/2014/main" id="{78520728-737C-849C-4D31-0A16EA20CC1C}"/>
             </a:ext>
           </a:extLst>
@@ -2902,1322 +993,6 @@
 </p:notes>
 </file>
 
-<file path=ppt/notesSlides/notesSlide11.xml><?xml version="1.0" encoding="utf-8"?>
-<p:notes xmlns:a="http://schemas.openxmlformats.org/drawingml/2006/main" xmlns:r="http://schemas.openxmlformats.org/officeDocument/2006/relationships" xmlns:p="http://schemas.openxmlformats.org/presentationml/2006/main">
-  <p:cSld>
-    <p:spTree>
-      <p:nvGrpSpPr>
-        <p:cNvPr id="1" name=""/>
-        <p:cNvGrpSpPr/>
-        <p:nvPr/>
-      </p:nvGrpSpPr>
-      <p:grpSpPr>
-        <a:xfrm>
-          <a:off x="0" y="0"/>
-          <a:ext cx="0" cy="0"/>
-          <a:chOff x="0" y="0"/>
-          <a:chExt cx="0" cy="0"/>
-        </a:xfrm>
-      </p:grpSpPr>
-      <p:sp>
-        <p:nvSpPr>
-          <p:cNvPr id="2" name="Slide Image Placeholder 1"/>
-          <p:cNvSpPr>
-            <a:spLocks noGrp="1" noRot="1" noChangeAspect="1"/>
-          </p:cNvSpPr>
-          <p:nvPr>
-            <p:ph type="sldImg" idx="2"/>
-          </p:nvPr>
-        </p:nvSpPr>
-        <p:spPr/>
-      </p:sp>
-      <p:sp>
-        <p:nvSpPr>
-          <p:cNvPr id="3" name="Notes Placeholder 2"/>
-          <p:cNvSpPr>
-            <a:spLocks noGrp="1"/>
-          </p:cNvSpPr>
-          <p:nvPr>
-            <p:ph type="body" sz="quarter" idx="3"/>
-          </p:nvPr>
-        </p:nvSpPr>
-        <p:spPr/>
-        <p:txBody>
-          <a:bodyPr/>
-          <a:lstStyle/>
-          <a:p>
-            <a:r>
-              <a:rPr dirty="0"/>
-              <a:t>AEC </a:t>
-            </a:r>
-            <a:r>
-              <a:rPr dirty="0" err="1"/>
-              <a:t>곡선</a:t>
-            </a:r>
-            <a:r>
-              <a:rPr dirty="0"/>
-              <a:t> 128개 </a:t>
-            </a:r>
-            <a:r>
-              <a:rPr dirty="0" err="1"/>
-              <a:t>지점을</a:t>
-            </a:r>
-            <a:r>
-              <a:rPr dirty="0"/>
-              <a:t> </a:t>
-            </a:r>
-            <a:r>
-              <a:rPr dirty="0" err="1"/>
-              <a:t>통째로</a:t>
-            </a:r>
-            <a:r>
-              <a:rPr dirty="0"/>
-              <a:t> </a:t>
-            </a:r>
-            <a:r>
-              <a:rPr dirty="0" err="1"/>
-              <a:t>비교하는</a:t>
-            </a:r>
-            <a:r>
-              <a:rPr dirty="0"/>
-              <a:t> </a:t>
-            </a:r>
-            <a:r>
-              <a:rPr dirty="0" err="1"/>
-              <a:t>대신</a:t>
-            </a:r>
-            <a:r>
-              <a:rPr dirty="0"/>
-              <a:t>, '</a:t>
-            </a:r>
-            <a:r>
-              <a:rPr dirty="0" err="1"/>
-              <a:t>곡선의</a:t>
-            </a:r>
-            <a:r>
-              <a:rPr dirty="0"/>
-              <a:t> </a:t>
-            </a:r>
-            <a:r>
-              <a:rPr dirty="0" err="1"/>
-              <a:t>생김새'를</a:t>
-            </a:r>
-            <a:r>
-              <a:rPr dirty="0"/>
-              <a:t> </a:t>
-            </a:r>
-            <a:r>
-              <a:rPr dirty="0" err="1"/>
-              <a:t>요약하는</a:t>
-            </a:r>
-            <a:r>
-              <a:rPr dirty="0"/>
-              <a:t> 14가지 </a:t>
-            </a:r>
-            <a:r>
-              <a:rPr dirty="0" err="1"/>
-              <a:t>숫자</a:t>
-            </a:r>
-            <a:r>
-              <a:rPr dirty="0"/>
-              <a:t>(예: </a:t>
-            </a:r>
-            <a:r>
-              <a:rPr dirty="0" err="1"/>
-              <a:t>곡선이</a:t>
-            </a:r>
-            <a:r>
-              <a:rPr dirty="0"/>
-              <a:t> </a:t>
-            </a:r>
-            <a:r>
-              <a:rPr dirty="0" err="1"/>
-              <a:t>얼마나</a:t>
-            </a:r>
-            <a:r>
-              <a:rPr dirty="0"/>
-              <a:t> </a:t>
-            </a:r>
-            <a:r>
-              <a:rPr dirty="0" err="1"/>
-              <a:t>들쭉날쭉한지</a:t>
-            </a:r>
-            <a:r>
-              <a:rPr dirty="0"/>
-              <a:t>, </a:t>
-            </a:r>
-            <a:r>
-              <a:rPr dirty="0" err="1"/>
-              <a:t>어디서</a:t>
-            </a:r>
-            <a:r>
-              <a:rPr dirty="0"/>
-              <a:t> </a:t>
-            </a:r>
-            <a:r>
-              <a:rPr dirty="0" err="1"/>
-              <a:t>가장</a:t>
-            </a:r>
-            <a:r>
-              <a:rPr dirty="0"/>
-              <a:t> </a:t>
-            </a:r>
-            <a:r>
-              <a:rPr dirty="0" err="1"/>
-              <a:t>높고</a:t>
-            </a:r>
-            <a:r>
-              <a:rPr dirty="0"/>
-              <a:t> </a:t>
-            </a:r>
-            <a:r>
-              <a:rPr dirty="0" err="1"/>
-              <a:t>낮은지</a:t>
-            </a:r>
-            <a:r>
-              <a:rPr dirty="0"/>
-              <a:t>, </a:t>
-            </a:r>
-            <a:r>
-              <a:rPr dirty="0" err="1"/>
-              <a:t>앞부분과</a:t>
-            </a:r>
-            <a:r>
-              <a:rPr dirty="0"/>
-              <a:t> </a:t>
-            </a:r>
-            <a:r>
-              <a:rPr dirty="0" err="1"/>
-              <a:t>뒷부분</a:t>
-            </a:r>
-            <a:r>
-              <a:rPr dirty="0"/>
-              <a:t> </a:t>
-            </a:r>
-            <a:r>
-              <a:rPr dirty="0" err="1"/>
-              <a:t>기울기가</a:t>
-            </a:r>
-            <a:r>
-              <a:rPr dirty="0"/>
-              <a:t> </a:t>
-            </a:r>
-            <a:r>
-              <a:rPr dirty="0" err="1"/>
-              <a:t>얼마나</a:t>
-            </a:r>
-            <a:r>
-              <a:rPr dirty="0"/>
-              <a:t> </a:t>
-            </a:r>
-            <a:r>
-              <a:rPr dirty="0" err="1"/>
-              <a:t>다른지</a:t>
-            </a:r>
-            <a:r>
-              <a:rPr dirty="0"/>
-              <a:t> 등)를 </a:t>
-            </a:r>
-            <a:r>
-              <a:rPr dirty="0" err="1"/>
-              <a:t>각각</a:t>
-            </a:r>
-            <a:r>
-              <a:rPr dirty="0"/>
-              <a:t> </a:t>
-            </a:r>
-            <a:r>
-              <a:rPr dirty="0" err="1"/>
-              <a:t>따로</a:t>
-            </a:r>
-            <a:r>
-              <a:rPr dirty="0"/>
-              <a:t> </a:t>
-            </a:r>
-            <a:r>
-              <a:rPr dirty="0" err="1"/>
-              <a:t>뽑아서</a:t>
-            </a:r>
-            <a:r>
-              <a:rPr dirty="0"/>
-              <a:t> </a:t>
-            </a:r>
-            <a:r>
-              <a:rPr dirty="0" err="1"/>
-              <a:t>TP와</a:t>
-            </a:r>
-            <a:r>
-              <a:rPr dirty="0"/>
-              <a:t> FP </a:t>
-            </a:r>
-            <a:r>
-              <a:rPr dirty="0" err="1"/>
-              <a:t>사이에</a:t>
-            </a:r>
-            <a:r>
-              <a:rPr dirty="0"/>
-              <a:t> </a:t>
-            </a:r>
-            <a:r>
-              <a:rPr dirty="0" err="1"/>
-              <a:t>차이가</a:t>
-            </a:r>
-            <a:r>
-              <a:rPr dirty="0"/>
-              <a:t> </a:t>
-            </a:r>
-            <a:r>
-              <a:rPr dirty="0" err="1"/>
-              <a:t>있는지</a:t>
-            </a:r>
-            <a:r>
-              <a:rPr dirty="0"/>
-              <a:t> </a:t>
-            </a:r>
-            <a:r>
-              <a:rPr dirty="0" err="1"/>
-              <a:t>하나하나</a:t>
-            </a:r>
-            <a:r>
-              <a:rPr dirty="0"/>
-              <a:t> </a:t>
-            </a:r>
-            <a:r>
-              <a:rPr dirty="0" err="1"/>
-              <a:t>검정했습니다</a:t>
-            </a:r>
-            <a:r>
-              <a:rPr dirty="0"/>
-              <a:t>. </a:t>
-            </a:r>
-            <a:r>
-              <a:rPr dirty="0" err="1"/>
-              <a:t>사람</a:t>
-            </a:r>
-            <a:r>
-              <a:rPr dirty="0"/>
-              <a:t> </a:t>
-            </a:r>
-            <a:r>
-              <a:rPr dirty="0" err="1"/>
-              <a:t>눈에는</a:t>
-            </a:r>
-            <a:r>
-              <a:rPr dirty="0"/>
-              <a:t> 안 </a:t>
-            </a:r>
-            <a:r>
-              <a:rPr dirty="0" err="1"/>
-              <a:t>보이는</a:t>
-            </a:r>
-            <a:r>
-              <a:rPr dirty="0"/>
-              <a:t> </a:t>
-            </a:r>
-            <a:r>
-              <a:rPr dirty="0" err="1"/>
-              <a:t>미세한</a:t>
-            </a:r>
-            <a:r>
-              <a:rPr dirty="0"/>
-              <a:t> </a:t>
-            </a:r>
-            <a:r>
-              <a:rPr dirty="0" err="1"/>
-              <a:t>형태</a:t>
-            </a:r>
-            <a:r>
-              <a:rPr dirty="0"/>
-              <a:t> </a:t>
-            </a:r>
-            <a:r>
-              <a:rPr dirty="0" err="1"/>
-              <a:t>차이를</a:t>
-            </a:r>
-            <a:r>
-              <a:rPr dirty="0"/>
-              <a:t> </a:t>
-            </a:r>
-            <a:r>
-              <a:rPr dirty="0" err="1"/>
-              <a:t>잡아낼</a:t>
-            </a:r>
-            <a:r>
-              <a:rPr dirty="0"/>
-              <a:t> </a:t>
-            </a:r>
-            <a:r>
-              <a:rPr dirty="0" err="1"/>
-              <a:t>수도</a:t>
-            </a:r>
-            <a:r>
-              <a:rPr dirty="0"/>
-              <a:t> </a:t>
-            </a:r>
-            <a:r>
-              <a:rPr dirty="0" err="1"/>
-              <a:t>있다는</a:t>
-            </a:r>
-            <a:r>
-              <a:rPr dirty="0"/>
-              <a:t> </a:t>
-            </a:r>
-            <a:r>
-              <a:rPr dirty="0" err="1"/>
-              <a:t>생각에서입니다</a:t>
-            </a:r>
-            <a:r>
-              <a:rPr dirty="0"/>
-              <a:t>.</a:t>
-            </a:r>
-          </a:p>
-          <a:p>
-            <a:endParaRPr dirty="0"/>
-          </a:p>
-          <a:p>
-            <a:r>
-              <a:rPr dirty="0" err="1"/>
-              <a:t>주의할</a:t>
-            </a:r>
-            <a:r>
-              <a:rPr dirty="0"/>
-              <a:t> 점: </a:t>
-            </a:r>
-            <a:r>
-              <a:rPr dirty="0" err="1"/>
-              <a:t>검정을</a:t>
-            </a:r>
-            <a:r>
-              <a:rPr dirty="0"/>
-              <a:t> 한 </a:t>
-            </a:r>
-            <a:r>
-              <a:rPr dirty="0" err="1"/>
-              <a:t>번만</a:t>
-            </a:r>
-            <a:r>
-              <a:rPr dirty="0"/>
-              <a:t> </a:t>
-            </a:r>
-            <a:r>
-              <a:rPr dirty="0" err="1"/>
-              <a:t>하면</a:t>
-            </a:r>
-            <a:r>
-              <a:rPr dirty="0"/>
-              <a:t> </a:t>
-            </a:r>
-            <a:r>
-              <a:rPr dirty="0" err="1"/>
-              <a:t>우연히</a:t>
-            </a:r>
-            <a:r>
-              <a:rPr dirty="0"/>
-              <a:t> </a:t>
-            </a:r>
-            <a:r>
-              <a:rPr dirty="0" err="1"/>
-              <a:t>유의하게</a:t>
-            </a:r>
-            <a:r>
-              <a:rPr dirty="0"/>
-              <a:t> </a:t>
-            </a:r>
-            <a:r>
-              <a:rPr dirty="0" err="1"/>
-              <a:t>나올</a:t>
-            </a:r>
-            <a:r>
-              <a:rPr dirty="0"/>
-              <a:t> </a:t>
-            </a:r>
-            <a:r>
-              <a:rPr dirty="0" err="1"/>
-              <a:t>확률이</a:t>
-            </a:r>
-            <a:r>
-              <a:rPr dirty="0"/>
-              <a:t> 5%지만, </a:t>
-            </a:r>
-            <a:r>
-              <a:rPr dirty="0" err="1"/>
-              <a:t>여기서는</a:t>
-            </a:r>
-            <a:r>
-              <a:rPr dirty="0"/>
-              <a:t> 14개(+</a:t>
-            </a:r>
-            <a:r>
-              <a:rPr dirty="0" err="1"/>
-              <a:t>비교용</a:t>
-            </a:r>
-            <a:r>
-              <a:rPr dirty="0"/>
-              <a:t> clinic </a:t>
-            </a:r>
-            <a:r>
-              <a:rPr dirty="0" err="1"/>
-              <a:t>변수</a:t>
-            </a:r>
-            <a:r>
-              <a:rPr dirty="0"/>
-              <a:t> 4개=18개)를 </a:t>
-            </a:r>
-            <a:r>
-              <a:rPr dirty="0" err="1"/>
-              <a:t>한꺼번에</a:t>
-            </a:r>
-            <a:r>
-              <a:rPr dirty="0"/>
-              <a:t> </a:t>
-            </a:r>
-            <a:r>
-              <a:rPr dirty="0" err="1"/>
-              <a:t>검정하기</a:t>
-            </a:r>
-            <a:r>
-              <a:rPr dirty="0"/>
-              <a:t> </a:t>
-            </a:r>
-            <a:r>
-              <a:rPr dirty="0" err="1"/>
-              <a:t>때문에</a:t>
-            </a:r>
-            <a:r>
-              <a:rPr dirty="0"/>
-              <a:t>, </a:t>
-            </a:r>
-            <a:r>
-              <a:rPr dirty="0" err="1"/>
-              <a:t>개별</a:t>
-            </a:r>
-            <a:r>
-              <a:rPr dirty="0"/>
-              <a:t> p&lt;0.05만 </a:t>
-            </a:r>
-            <a:r>
-              <a:rPr dirty="0" err="1"/>
-              <a:t>보면</a:t>
-            </a:r>
-            <a:r>
-              <a:rPr dirty="0"/>
-              <a:t> </a:t>
-            </a:r>
-            <a:r>
-              <a:rPr dirty="0" err="1"/>
-              <a:t>우연히</a:t>
-            </a:r>
-            <a:r>
-              <a:rPr dirty="0"/>
-              <a:t> 몇 </a:t>
-            </a:r>
-            <a:r>
-              <a:rPr dirty="0" err="1"/>
-              <a:t>개는</a:t>
-            </a:r>
-            <a:r>
-              <a:rPr dirty="0"/>
-              <a:t> '</a:t>
-            </a:r>
-            <a:r>
-              <a:rPr dirty="0" err="1"/>
-              <a:t>유의'하게</a:t>
-            </a:r>
-            <a:r>
-              <a:rPr dirty="0"/>
-              <a:t> </a:t>
-            </a:r>
-            <a:r>
-              <a:rPr dirty="0" err="1"/>
-              <a:t>나올</a:t>
-            </a:r>
-            <a:r>
-              <a:rPr dirty="0"/>
-              <a:t> </a:t>
-            </a:r>
-            <a:r>
-              <a:rPr dirty="0" err="1"/>
-              <a:t>수밖에</a:t>
-            </a:r>
-            <a:r>
-              <a:rPr dirty="0"/>
-              <a:t> </a:t>
-            </a:r>
-            <a:r>
-              <a:rPr dirty="0" err="1"/>
-              <a:t>없습니다</a:t>
-            </a:r>
-            <a:r>
-              <a:rPr dirty="0"/>
-              <a:t>(</a:t>
-            </a:r>
-            <a:r>
-              <a:rPr dirty="0" err="1"/>
-              <a:t>로또를</a:t>
-            </a:r>
-            <a:r>
-              <a:rPr dirty="0"/>
-              <a:t> 18번 </a:t>
-            </a:r>
-            <a:r>
-              <a:rPr dirty="0" err="1"/>
-              <a:t>사면</a:t>
-            </a:r>
-            <a:r>
-              <a:rPr dirty="0"/>
-              <a:t> </a:t>
-            </a:r>
-            <a:r>
-              <a:rPr dirty="0" err="1"/>
-              <a:t>그럴듯한</a:t>
-            </a:r>
-            <a:r>
-              <a:rPr dirty="0"/>
-              <a:t> 게 </a:t>
-            </a:r>
-            <a:r>
-              <a:rPr dirty="0" err="1"/>
-              <a:t>하나쯤은</a:t>
-            </a:r>
-            <a:r>
-              <a:rPr dirty="0"/>
-              <a:t> </a:t>
-            </a:r>
-            <a:r>
-              <a:rPr dirty="0" err="1"/>
-              <a:t>나오는</a:t>
-            </a:r>
-            <a:r>
-              <a:rPr dirty="0"/>
-              <a:t> </a:t>
-            </a:r>
-            <a:r>
-              <a:rPr dirty="0" err="1"/>
-              <a:t>것과</a:t>
-            </a:r>
-            <a:r>
-              <a:rPr dirty="0"/>
-              <a:t> </a:t>
-            </a:r>
-            <a:r>
-              <a:rPr dirty="0" err="1"/>
-              <a:t>비슷한</a:t>
-            </a:r>
-            <a:r>
-              <a:rPr dirty="0"/>
-              <a:t> </a:t>
-            </a:r>
-            <a:r>
-              <a:rPr dirty="0" err="1"/>
-              <a:t>이치</a:t>
-            </a:r>
-            <a:r>
-              <a:rPr dirty="0"/>
-              <a:t>). 이 '</a:t>
-            </a:r>
-            <a:r>
-              <a:rPr dirty="0" err="1"/>
-              <a:t>우연히</a:t>
-            </a:r>
-            <a:r>
-              <a:rPr dirty="0"/>
-              <a:t> </a:t>
-            </a:r>
-            <a:r>
-              <a:rPr dirty="0" err="1"/>
-              <a:t>유의해</a:t>
-            </a:r>
-            <a:r>
-              <a:rPr dirty="0"/>
-              <a:t> </a:t>
-            </a:r>
-            <a:r>
-              <a:rPr dirty="0" err="1"/>
-              <a:t>보이는</a:t>
-            </a:r>
-            <a:r>
-              <a:rPr dirty="0"/>
-              <a:t> </a:t>
-            </a:r>
-            <a:r>
-              <a:rPr dirty="0" err="1"/>
-              <a:t>것'을</a:t>
-            </a:r>
-            <a:r>
-              <a:rPr dirty="0"/>
-              <a:t> </a:t>
-            </a:r>
-            <a:r>
-              <a:rPr dirty="0" err="1"/>
-              <a:t>걸러내는</a:t>
-            </a:r>
-            <a:r>
-              <a:rPr dirty="0"/>
-              <a:t> </a:t>
-            </a:r>
-            <a:r>
-              <a:rPr dirty="0" err="1"/>
-              <a:t>보정된</a:t>
-            </a:r>
-            <a:r>
-              <a:rPr dirty="0"/>
-              <a:t> </a:t>
-            </a:r>
-            <a:r>
-              <a:rPr dirty="0" err="1"/>
-              <a:t>기준이</a:t>
-            </a:r>
-            <a:r>
-              <a:rPr dirty="0"/>
-              <a:t> q-</a:t>
-            </a:r>
-            <a:r>
-              <a:rPr dirty="0" err="1"/>
-              <a:t>value입니다</a:t>
-            </a:r>
-            <a:r>
-              <a:rPr dirty="0"/>
-              <a:t>. q&lt;0.05는 '이 </a:t>
-            </a:r>
-            <a:r>
-              <a:rPr dirty="0" err="1"/>
-              <a:t>안에서</a:t>
-            </a:r>
-            <a:r>
-              <a:rPr dirty="0"/>
-              <a:t> </a:t>
-            </a:r>
-            <a:r>
-              <a:rPr dirty="0" err="1"/>
-              <a:t>유의하다고</a:t>
-            </a:r>
-            <a:r>
-              <a:rPr dirty="0"/>
-              <a:t> </a:t>
-            </a:r>
-            <a:r>
-              <a:rPr dirty="0" err="1"/>
-              <a:t>뽑은</a:t>
-            </a:r>
-            <a:r>
-              <a:rPr dirty="0"/>
-              <a:t> </a:t>
-            </a:r>
-            <a:r>
-              <a:rPr dirty="0" err="1"/>
-              <a:t>것들</a:t>
-            </a:r>
-            <a:r>
-              <a:rPr dirty="0"/>
-              <a:t> 중 </a:t>
-            </a:r>
-            <a:r>
-              <a:rPr dirty="0" err="1"/>
-              <a:t>실제로</a:t>
-            </a:r>
-            <a:r>
-              <a:rPr dirty="0"/>
-              <a:t> </a:t>
-            </a:r>
-            <a:r>
-              <a:rPr dirty="0" err="1"/>
-              <a:t>우연이</a:t>
-            </a:r>
-            <a:r>
-              <a:rPr dirty="0"/>
-              <a:t> </a:t>
-            </a:r>
-            <a:r>
-              <a:rPr dirty="0" err="1"/>
-              <a:t>섞여</a:t>
-            </a:r>
-            <a:r>
-              <a:rPr dirty="0"/>
-              <a:t> </a:t>
-            </a:r>
-            <a:r>
-              <a:rPr dirty="0" err="1"/>
-              <a:t>있을</a:t>
-            </a:r>
-            <a:r>
-              <a:rPr dirty="0"/>
-              <a:t> </a:t>
-            </a:r>
-            <a:r>
-              <a:rPr dirty="0" err="1"/>
-              <a:t>비율이</a:t>
-            </a:r>
-            <a:r>
-              <a:rPr dirty="0"/>
-              <a:t> 5% </a:t>
-            </a:r>
-            <a:r>
-              <a:rPr dirty="0" err="1"/>
-              <a:t>이하로</a:t>
-            </a:r>
-            <a:r>
-              <a:rPr dirty="0"/>
-              <a:t> </a:t>
-            </a:r>
-            <a:r>
-              <a:rPr dirty="0" err="1"/>
-              <a:t>통제된</a:t>
-            </a:r>
-            <a:r>
-              <a:rPr dirty="0"/>
-              <a:t> </a:t>
-            </a:r>
-            <a:r>
-              <a:rPr dirty="0" err="1"/>
-              <a:t>상태'라는</a:t>
-            </a:r>
-            <a:r>
-              <a:rPr dirty="0"/>
-              <a:t> </a:t>
-            </a:r>
-            <a:r>
-              <a:rPr dirty="0" err="1"/>
-              <a:t>뜻으로</a:t>
-            </a:r>
-            <a:r>
-              <a:rPr dirty="0"/>
-              <a:t>, </a:t>
-            </a:r>
-            <a:r>
-              <a:rPr dirty="0" err="1"/>
-              <a:t>개별</a:t>
-            </a:r>
-            <a:r>
-              <a:rPr dirty="0"/>
-              <a:t> p-</a:t>
-            </a:r>
-            <a:r>
-              <a:rPr dirty="0" err="1"/>
-              <a:t>value보다</a:t>
-            </a:r>
-            <a:r>
-              <a:rPr dirty="0"/>
-              <a:t> 더 </a:t>
-            </a:r>
-            <a:r>
-              <a:rPr dirty="0" err="1"/>
-              <a:t>엄격하고</a:t>
-            </a:r>
-            <a:r>
-              <a:rPr dirty="0"/>
-              <a:t> </a:t>
-            </a:r>
-            <a:r>
-              <a:rPr dirty="0" err="1"/>
-              <a:t>믿을</a:t>
-            </a:r>
-            <a:r>
-              <a:rPr dirty="0"/>
-              <a:t> </a:t>
-            </a:r>
-            <a:r>
-              <a:rPr dirty="0" err="1"/>
-              <a:t>만한</a:t>
-            </a:r>
-            <a:r>
-              <a:rPr dirty="0"/>
-              <a:t> </a:t>
-            </a:r>
-            <a:r>
-              <a:rPr dirty="0" err="1"/>
-              <a:t>기준입니다</a:t>
-            </a:r>
-            <a:r>
-              <a:rPr dirty="0"/>
-              <a:t>.</a:t>
-            </a:r>
-          </a:p>
-          <a:p>
-            <a:endParaRPr dirty="0"/>
-          </a:p>
-          <a:p>
-            <a:r>
-              <a:rPr dirty="0" err="1"/>
-              <a:t>결과</a:t>
-            </a:r>
-            <a:r>
-              <a:rPr dirty="0"/>
-              <a:t>: raw(</a:t>
-            </a:r>
-            <a:r>
-              <a:rPr dirty="0" err="1"/>
-              <a:t>원표본</a:t>
-            </a:r>
-            <a:r>
-              <a:rPr dirty="0"/>
-              <a:t>) / matched(</a:t>
-            </a:r>
-            <a:r>
-              <a:rPr dirty="0" err="1"/>
-              <a:t>비슷한</a:t>
-            </a:r>
-            <a:r>
-              <a:rPr dirty="0"/>
-              <a:t> </a:t>
-            </a:r>
-            <a:r>
-              <a:rPr dirty="0" err="1"/>
-              <a:t>환자끼리</a:t>
-            </a:r>
-            <a:r>
-              <a:rPr dirty="0"/>
-              <a:t> </a:t>
-            </a:r>
-            <a:r>
-              <a:rPr dirty="0" err="1"/>
-              <a:t>매칭</a:t>
-            </a:r>
-            <a:r>
-              <a:rPr dirty="0"/>
-              <a:t>) / </a:t>
-            </a:r>
-            <a:r>
-              <a:rPr dirty="0" err="1"/>
-              <a:t>residualized</a:t>
-            </a:r>
-            <a:r>
-              <a:rPr dirty="0"/>
-              <a:t>(</a:t>
-            </a:r>
-            <a:r>
-              <a:rPr dirty="0" err="1"/>
-              <a:t>체형</a:t>
-            </a:r>
-            <a:r>
-              <a:rPr dirty="0"/>
-              <a:t> </a:t>
-            </a:r>
-            <a:r>
-              <a:rPr dirty="0" err="1"/>
-              <a:t>영향을</a:t>
-            </a:r>
-            <a:r>
-              <a:rPr dirty="0"/>
-              <a:t> </a:t>
-            </a:r>
-            <a:r>
-              <a:rPr dirty="0" err="1"/>
-              <a:t>통계적으로</a:t>
-            </a:r>
-            <a:r>
-              <a:rPr dirty="0"/>
-              <a:t> </a:t>
-            </a:r>
-            <a:r>
-              <a:rPr dirty="0" err="1"/>
-              <a:t>미리</a:t>
-            </a:r>
-            <a:r>
-              <a:rPr dirty="0"/>
-              <a:t> </a:t>
-            </a:r>
-            <a:r>
-              <a:rPr dirty="0" err="1"/>
-              <a:t>빼고</a:t>
-            </a:r>
-            <a:r>
-              <a:rPr dirty="0"/>
-              <a:t> </a:t>
-            </a:r>
-            <a:r>
-              <a:rPr dirty="0" err="1"/>
-              <a:t>비교</a:t>
-            </a:r>
-            <a:r>
-              <a:rPr dirty="0"/>
-              <a:t>) 세 </a:t>
-            </a:r>
-            <a:r>
-              <a:rPr dirty="0" err="1"/>
-              <a:t>가지</a:t>
-            </a:r>
-            <a:r>
-              <a:rPr dirty="0"/>
-              <a:t> </a:t>
-            </a:r>
-            <a:r>
-              <a:rPr dirty="0" err="1"/>
-              <a:t>방법</a:t>
-            </a:r>
-            <a:r>
-              <a:rPr dirty="0"/>
-              <a:t>, </a:t>
-            </a:r>
-            <a:r>
-              <a:rPr dirty="0" err="1"/>
-              <a:t>강남·신촌</a:t>
-            </a:r>
-            <a:r>
-              <a:rPr dirty="0"/>
-              <a:t> 두 </a:t>
-            </a:r>
-            <a:r>
-              <a:rPr dirty="0" err="1"/>
-              <a:t>코호트</a:t>
-            </a:r>
-            <a:r>
-              <a:rPr dirty="0"/>
-              <a:t>, 84번의 </a:t>
-            </a:r>
-            <a:r>
-              <a:rPr dirty="0" err="1"/>
-              <a:t>검정</a:t>
-            </a:r>
-            <a:r>
-              <a:rPr dirty="0"/>
-              <a:t>(14개 feature x 3방법 x 2코호트) </a:t>
-            </a:r>
-            <a:r>
-              <a:rPr dirty="0" err="1"/>
-              <a:t>전부</a:t>
-            </a:r>
-            <a:r>
-              <a:rPr dirty="0"/>
-              <a:t> q-value </a:t>
-            </a:r>
-            <a:r>
-              <a:rPr dirty="0" err="1"/>
-              <a:t>기준으로는</a:t>
-            </a:r>
-            <a:r>
-              <a:rPr dirty="0"/>
-              <a:t> </a:t>
-            </a:r>
-            <a:r>
-              <a:rPr dirty="0" err="1"/>
-              <a:t>유의한</a:t>
-            </a:r>
-            <a:r>
-              <a:rPr dirty="0"/>
-              <a:t> </a:t>
-            </a:r>
-            <a:r>
-              <a:rPr dirty="0" err="1"/>
-              <a:t>것이</a:t>
-            </a:r>
-            <a:r>
-              <a:rPr dirty="0"/>
-              <a:t> </a:t>
-            </a:r>
-            <a:r>
-              <a:rPr dirty="0" err="1"/>
-              <a:t>하나도</a:t>
-            </a:r>
-            <a:r>
-              <a:rPr dirty="0"/>
-              <a:t> </a:t>
-            </a:r>
-            <a:r>
-              <a:rPr dirty="0" err="1"/>
-              <a:t>없었습니다</a:t>
-            </a:r>
-            <a:r>
-              <a:rPr dirty="0"/>
-              <a:t>(0/84). </a:t>
-            </a:r>
-            <a:r>
-              <a:rPr dirty="0" err="1"/>
-              <a:t>보정</a:t>
-            </a:r>
-            <a:r>
-              <a:rPr dirty="0"/>
-              <a:t> 전 p&lt;0.05만 </a:t>
-            </a:r>
-            <a:r>
-              <a:rPr dirty="0" err="1"/>
-              <a:t>보면</a:t>
-            </a:r>
-            <a:r>
-              <a:rPr dirty="0"/>
-              <a:t> </a:t>
-            </a:r>
-            <a:r>
-              <a:rPr dirty="0" err="1"/>
-              <a:t>조합마다</a:t>
-            </a:r>
-            <a:r>
-              <a:rPr dirty="0"/>
-              <a:t> 0~3개씩 </a:t>
-            </a:r>
-            <a:r>
-              <a:rPr dirty="0" err="1"/>
-              <a:t>나오지만</a:t>
-            </a:r>
-            <a:r>
-              <a:rPr dirty="0"/>
-              <a:t>, </a:t>
-            </a:r>
-            <a:r>
-              <a:rPr dirty="0" err="1"/>
-              <a:t>매번</a:t>
-            </a:r>
-            <a:r>
-              <a:rPr dirty="0"/>
-              <a:t> </a:t>
-            </a:r>
-            <a:r>
-              <a:rPr dirty="0" err="1"/>
-              <a:t>다른</a:t>
-            </a:r>
-            <a:r>
-              <a:rPr dirty="0"/>
-              <a:t> </a:t>
-            </a:r>
-            <a:r>
-              <a:rPr dirty="0" err="1"/>
-              <a:t>지표가</a:t>
-            </a:r>
-            <a:r>
-              <a:rPr dirty="0"/>
-              <a:t> </a:t>
-            </a:r>
-            <a:r>
-              <a:rPr dirty="0" err="1"/>
-              <a:t>걸리고</a:t>
-            </a:r>
-            <a:r>
-              <a:rPr dirty="0"/>
-              <a:t> </a:t>
-            </a:r>
-            <a:r>
-              <a:rPr dirty="0" err="1"/>
-              <a:t>보정하면</a:t>
-            </a:r>
-            <a:r>
-              <a:rPr dirty="0"/>
-              <a:t> </a:t>
-            </a:r>
-            <a:r>
-              <a:rPr dirty="0" err="1"/>
-              <a:t>사라지므로</a:t>
-            </a:r>
-            <a:r>
-              <a:rPr dirty="0"/>
-              <a:t> '</a:t>
-            </a:r>
-            <a:r>
-              <a:rPr dirty="0" err="1"/>
-              <a:t>진짜</a:t>
-            </a:r>
-            <a:r>
-              <a:rPr dirty="0"/>
-              <a:t> </a:t>
-            </a:r>
-            <a:r>
-              <a:rPr dirty="0" err="1"/>
-              <a:t>신호'가</a:t>
-            </a:r>
-            <a:r>
-              <a:rPr dirty="0"/>
-              <a:t> </a:t>
-            </a:r>
-            <a:r>
-              <a:rPr dirty="0" err="1"/>
-              <a:t>아니라</a:t>
-            </a:r>
-            <a:r>
-              <a:rPr dirty="0"/>
-              <a:t> '</a:t>
-            </a:r>
-            <a:r>
-              <a:rPr dirty="0" err="1"/>
-              <a:t>우연'으로</a:t>
-            </a:r>
-            <a:r>
-              <a:rPr dirty="0"/>
-              <a:t> </a:t>
-            </a:r>
-            <a:r>
-              <a:rPr dirty="0" err="1"/>
-              <a:t>판단합니다</a:t>
-            </a:r>
-            <a:r>
-              <a:rPr dirty="0"/>
-              <a:t>.</a:t>
-            </a:r>
-          </a:p>
-        </p:txBody>
-      </p:sp>
-      <p:sp>
-        <p:nvSpPr>
-          <p:cNvPr id="4" name="Slide Number Placeholder 3"/>
-          <p:cNvSpPr>
-            <a:spLocks noGrp="1"/>
-          </p:cNvSpPr>
-          <p:nvPr>
-            <p:ph type="sldNum" sz="quarter" idx="5"/>
-          </p:nvPr>
-        </p:nvSpPr>
-        <p:spPr/>
-      </p:sp>
-    </p:spTree>
-    <p:extLst>
-      <p:ext uri="{BB962C8B-B14F-4D97-AF65-F5344CB8AC3E}">
-        <p14:creationId xmlns:p14="http://schemas.microsoft.com/office/powerpoint/2010/main" val="2650842457"/>
-      </p:ext>
-    </p:extLst>
-  </p:cSld>
-  <p:clrMapOvr>
-    <a:masterClrMapping/>
-  </p:clrMapOvr>
-</p:notes>
-</file>
-
-<file path=ppt/notesSlides/notesSlide12.xml><?xml version="1.0" encoding="utf-8"?>
-<p:notes xmlns:a="http://schemas.openxmlformats.org/drawingml/2006/main" xmlns:r="http://schemas.openxmlformats.org/officeDocument/2006/relationships" xmlns:p="http://schemas.openxmlformats.org/presentationml/2006/main">
-  <p:cSld>
-    <p:spTree>
-      <p:nvGrpSpPr>
-        <p:cNvPr id="1" name=""/>
-        <p:cNvGrpSpPr/>
-        <p:nvPr/>
-      </p:nvGrpSpPr>
-      <p:grpSpPr>
-        <a:xfrm>
-          <a:off x="0" y="0"/>
-          <a:ext cx="0" cy="0"/>
-          <a:chOff x="0" y="0"/>
-          <a:chExt cx="0" cy="0"/>
-        </a:xfrm>
-      </p:grpSpPr>
-      <p:sp>
-        <p:nvSpPr>
-          <p:cNvPr id="2" name="Slide Image Placeholder 1"/>
-          <p:cNvSpPr>
-            <a:spLocks noGrp="1" noRot="1" noChangeAspect="1"/>
-          </p:cNvSpPr>
-          <p:nvPr>
-            <p:ph type="sldImg" idx="2"/>
-          </p:nvPr>
-        </p:nvSpPr>
-        <p:spPr/>
-      </p:sp>
-      <p:sp>
-        <p:nvSpPr>
-          <p:cNvPr id="3" name="Notes Placeholder 2"/>
-          <p:cNvSpPr>
-            <a:spLocks noGrp="1"/>
-          </p:cNvSpPr>
-          <p:nvPr>
-            <p:ph type="body" sz="quarter" idx="3"/>
-          </p:nvPr>
-        </p:nvSpPr>
-        <p:spPr/>
-        <p:txBody>
-          <a:bodyPr/>
-          <a:lstStyle/>
-          <a:p>
-            <a:r>
-              <a:t>강남 데이터에서 14개 곡선-형태 지표 각각의 p-value를 막대그래프로 그린 그림입니다(왼쪽부터 원표본/매칭/체형보정 3가지 방법). 막대가 길수록(오른쪽으로 갈수록) '우연이 아닐 가능성'이 높다는 뜻이고, 점선(p=0.05 위치)을 넘어야 최소한의 기준을 만족합니다. 강남은 3가지 방법 모두에서 진짜로 믿을 만한 차이(q&lt;0.05)가 하나도 없었습니다.</a:t>
-            </a:r>
-          </a:p>
-        </p:txBody>
-      </p:sp>
-      <p:sp>
-        <p:nvSpPr>
-          <p:cNvPr id="4" name="Slide Number Placeholder 3"/>
-          <p:cNvSpPr>
-            <a:spLocks noGrp="1"/>
-          </p:cNvSpPr>
-          <p:nvPr>
-            <p:ph type="sldNum" sz="quarter" idx="5"/>
-          </p:nvPr>
-        </p:nvSpPr>
-        <p:spPr/>
-      </p:sp>
-    </p:spTree>
-    <p:extLst>
-      <p:ext uri="{BB962C8B-B14F-4D97-AF65-F5344CB8AC3E}">
-        <p14:creationId xmlns:p14="http://schemas.microsoft.com/office/powerpoint/2010/main" val="3575994740"/>
-      </p:ext>
-    </p:extLst>
-  </p:cSld>
-  <p:clrMapOvr>
-    <a:masterClrMapping/>
-  </p:clrMapOvr>
-</p:notes>
-</file>
-
-<file path=ppt/notesSlides/notesSlide13.xml><?xml version="1.0" encoding="utf-8"?>
-<p:notes xmlns:a="http://schemas.openxmlformats.org/drawingml/2006/main" xmlns:r="http://schemas.openxmlformats.org/officeDocument/2006/relationships" xmlns:p="http://schemas.openxmlformats.org/presentationml/2006/main">
-  <p:cSld>
-    <p:spTree>
-      <p:nvGrpSpPr>
-        <p:cNvPr id="1" name=""/>
-        <p:cNvGrpSpPr/>
-        <p:nvPr/>
-      </p:nvGrpSpPr>
-      <p:grpSpPr>
-        <a:xfrm>
-          <a:off x="0" y="0"/>
-          <a:ext cx="0" cy="0"/>
-          <a:chOff x="0" y="0"/>
-          <a:chExt cx="0" cy="0"/>
-        </a:xfrm>
-      </p:grpSpPr>
-      <p:sp>
-        <p:nvSpPr>
-          <p:cNvPr id="2" name="Slide Image Placeholder 1"/>
-          <p:cNvSpPr>
-            <a:spLocks noGrp="1" noRot="1" noChangeAspect="1"/>
-          </p:cNvSpPr>
-          <p:nvPr>
-            <p:ph type="sldImg" idx="2"/>
-          </p:nvPr>
-        </p:nvSpPr>
-        <p:spPr/>
-      </p:sp>
-      <p:sp>
-        <p:nvSpPr>
-          <p:cNvPr id="3" name="Notes Placeholder 2"/>
-          <p:cNvSpPr>
-            <a:spLocks noGrp="1"/>
-          </p:cNvSpPr>
-          <p:nvPr>
-            <p:ph type="body" sz="quarter" idx="3"/>
-          </p:nvPr>
-        </p:nvSpPr>
-        <p:spPr/>
-        <p:txBody>
-          <a:bodyPr/>
-          <a:lstStyle/>
-          <a:p>
-            <a:r>
-              <a:t>신촌 데이터의 같은 그림입니다. 강남과 마찬가지로 14개 지표 중 진짜로 믿을 만한 차이(q&lt;0.05)는 없습니다. 다만 슬라이드5에서 봤던 '신촌은 원곡선 전체로 보면 약하게 차이가 남아있다'는 결과와는 대비됩니다 -- 곡선을 14개 요약 지표로 압축해서 보면 그 미세한 차이가 사라진다는 뜻으로, 특정한 하나의 형태 특징으로 설명되는 게 아니라 곡선 전체에 아주 옅게 퍼져 있는 잡음에 가깝다는 뜻일 수 있습니다.</a:t>
-            </a:r>
-          </a:p>
-        </p:txBody>
-      </p:sp>
-      <p:sp>
-        <p:nvSpPr>
-          <p:cNvPr id="4" name="Slide Number Placeholder 3"/>
-          <p:cNvSpPr>
-            <a:spLocks noGrp="1"/>
-          </p:cNvSpPr>
-          <p:nvPr>
-            <p:ph type="sldNum" sz="quarter" idx="5"/>
-          </p:nvPr>
-        </p:nvSpPr>
-        <p:spPr/>
-      </p:sp>
-    </p:spTree>
-    <p:extLst>
-      <p:ext uri="{BB962C8B-B14F-4D97-AF65-F5344CB8AC3E}">
-        <p14:creationId xmlns:p14="http://schemas.microsoft.com/office/powerpoint/2010/main" val="2475671323"/>
-      </p:ext>
-    </p:extLst>
-  </p:cSld>
-  <p:clrMapOvr>
-    <a:masterClrMapping/>
-  </p:clrMapOvr>
-</p:notes>
-</file>
-
 <file path=ppt/notesSlides/notesSlide14.xml><?xml version="1.0" encoding="utf-8"?>
 <p:notes xmlns:a="http://schemas.openxmlformats.org/drawingml/2006/main" xmlns:r="http://schemas.openxmlformats.org/officeDocument/2006/relationships" xmlns:p="http://schemas.openxmlformats.org/presentationml/2006/main">
   <p:cSld>
@@ -4263,15 +1038,1098 @@
           <a:lstStyle/>
           <a:p>
             <a:r>
-              <a:t>사람이 직접 정의한 14개 지표 말고, 이번에는 컴퓨터가 데이터를 보고 스스로 '가장 차이가 많이 나는 방향'을 찾아내는 방법(PCA, 주성분분석)으로도 같은 질문(TP와 FP 곡선이 다른가)을 확인했습니다. 128개 구간짜리 곡선을 5개의 숫자(주성분 1~5)로 압축했는데, 이 5개만으로도 원래 곡선 정보의 대부분(원곡선 기준 96.8%, 체형보정 곡선 기준 94.7%)을 담고 있습니다.</a:t>
-            </a:r>
-          </a:p>
-          <a:p>
-            <a:endParaRPr/>
-          </a:p>
-          <a:p>
-            <a:r>
-              <a:t>결과: 강남은 이번에도 15번의 검정(주성분 5개 x 3가지 방법) 전부 믿을 만한 차이가 없었습니다. 신촌은 원표본과 매칭 방법에서는 역시 차이가 없었지만, '체형 영향을 미리 뺀' 방법에서만 주성분 1번 하나가 아슬아슬하게 기준을 넘었습니다(q=0.045, 기준 0.05보다 살짝 낮음). 다만 이 차이의 크기 자체는 작고(효과크기 작음), 신촌 표본이 커서(TP 131명, FP 398명) 작은 차이도 통계적으로 잡힌 것으로 보입니다. 즉 강남은 어떤 방법으로 봐도 깨끗하게 차이가 없고, 신촌은 아주 미세하고 일관되지 않은 흔적만 남아있는 정도입니다.</a:t>
+              <a:rPr dirty="0"/>
+              <a:t>AEC </a:t>
+            </a:r>
+            <a:r>
+              <a:rPr dirty="0" err="1"/>
+              <a:t>곡선</a:t>
+            </a:r>
+            <a:r>
+              <a:rPr dirty="0"/>
+              <a:t> 128개 </a:t>
+            </a:r>
+            <a:r>
+              <a:rPr dirty="0" err="1"/>
+              <a:t>지점을</a:t>
+            </a:r>
+            <a:r>
+              <a:rPr dirty="0"/>
+              <a:t> </a:t>
+            </a:r>
+            <a:r>
+              <a:rPr dirty="0" err="1"/>
+              <a:t>통째로</a:t>
+            </a:r>
+            <a:r>
+              <a:rPr dirty="0"/>
+              <a:t> </a:t>
+            </a:r>
+            <a:r>
+              <a:rPr dirty="0" err="1"/>
+              <a:t>비교하는</a:t>
+            </a:r>
+            <a:r>
+              <a:rPr dirty="0"/>
+              <a:t> </a:t>
+            </a:r>
+            <a:r>
+              <a:rPr dirty="0" err="1"/>
+              <a:t>대신</a:t>
+            </a:r>
+            <a:r>
+              <a:rPr dirty="0"/>
+              <a:t>, '</a:t>
+            </a:r>
+            <a:r>
+              <a:rPr dirty="0" err="1"/>
+              <a:t>곡선의</a:t>
+            </a:r>
+            <a:r>
+              <a:rPr dirty="0"/>
+              <a:t> </a:t>
+            </a:r>
+            <a:r>
+              <a:rPr dirty="0" err="1"/>
+              <a:t>생김새'를</a:t>
+            </a:r>
+            <a:r>
+              <a:rPr dirty="0"/>
+              <a:t> </a:t>
+            </a:r>
+            <a:r>
+              <a:rPr dirty="0" err="1"/>
+              <a:t>요약하는</a:t>
+            </a:r>
+            <a:r>
+              <a:rPr dirty="0"/>
+              <a:t> 14가지 </a:t>
+            </a:r>
+            <a:r>
+              <a:rPr dirty="0" err="1"/>
+              <a:t>숫자</a:t>
+            </a:r>
+            <a:r>
+              <a:rPr dirty="0"/>
+              <a:t>(예: </a:t>
+            </a:r>
+            <a:r>
+              <a:rPr dirty="0" err="1"/>
+              <a:t>곡선이</a:t>
+            </a:r>
+            <a:r>
+              <a:rPr dirty="0"/>
+              <a:t> </a:t>
+            </a:r>
+            <a:r>
+              <a:rPr dirty="0" err="1"/>
+              <a:t>얼마나</a:t>
+            </a:r>
+            <a:r>
+              <a:rPr dirty="0"/>
+              <a:t> </a:t>
+            </a:r>
+            <a:r>
+              <a:rPr dirty="0" err="1"/>
+              <a:t>들쭉날쭉한지</a:t>
+            </a:r>
+            <a:r>
+              <a:rPr dirty="0"/>
+              <a:t>, </a:t>
+            </a:r>
+            <a:r>
+              <a:rPr dirty="0" err="1"/>
+              <a:t>어디서</a:t>
+            </a:r>
+            <a:r>
+              <a:rPr dirty="0"/>
+              <a:t> </a:t>
+            </a:r>
+            <a:r>
+              <a:rPr dirty="0" err="1"/>
+              <a:t>가장</a:t>
+            </a:r>
+            <a:r>
+              <a:rPr dirty="0"/>
+              <a:t> </a:t>
+            </a:r>
+            <a:r>
+              <a:rPr dirty="0" err="1"/>
+              <a:t>높고</a:t>
+            </a:r>
+            <a:r>
+              <a:rPr dirty="0"/>
+              <a:t> </a:t>
+            </a:r>
+            <a:r>
+              <a:rPr dirty="0" err="1"/>
+              <a:t>낮은지</a:t>
+            </a:r>
+            <a:r>
+              <a:rPr dirty="0"/>
+              <a:t>, </a:t>
+            </a:r>
+            <a:r>
+              <a:rPr dirty="0" err="1"/>
+              <a:t>앞부분과</a:t>
+            </a:r>
+            <a:r>
+              <a:rPr dirty="0"/>
+              <a:t> </a:t>
+            </a:r>
+            <a:r>
+              <a:rPr dirty="0" err="1"/>
+              <a:t>뒷부분</a:t>
+            </a:r>
+            <a:r>
+              <a:rPr dirty="0"/>
+              <a:t> </a:t>
+            </a:r>
+            <a:r>
+              <a:rPr dirty="0" err="1"/>
+              <a:t>기울기가</a:t>
+            </a:r>
+            <a:r>
+              <a:rPr dirty="0"/>
+              <a:t> </a:t>
+            </a:r>
+            <a:r>
+              <a:rPr dirty="0" err="1"/>
+              <a:t>얼마나</a:t>
+            </a:r>
+            <a:r>
+              <a:rPr dirty="0"/>
+              <a:t> </a:t>
+            </a:r>
+            <a:r>
+              <a:rPr dirty="0" err="1"/>
+              <a:t>다른지</a:t>
+            </a:r>
+            <a:r>
+              <a:rPr dirty="0"/>
+              <a:t> 등)를 </a:t>
+            </a:r>
+            <a:r>
+              <a:rPr dirty="0" err="1"/>
+              <a:t>각각</a:t>
+            </a:r>
+            <a:r>
+              <a:rPr dirty="0"/>
+              <a:t> </a:t>
+            </a:r>
+            <a:r>
+              <a:rPr dirty="0" err="1"/>
+              <a:t>따로</a:t>
+            </a:r>
+            <a:r>
+              <a:rPr dirty="0"/>
+              <a:t> </a:t>
+            </a:r>
+            <a:r>
+              <a:rPr dirty="0" err="1"/>
+              <a:t>뽑아서</a:t>
+            </a:r>
+            <a:r>
+              <a:rPr dirty="0"/>
+              <a:t> </a:t>
+            </a:r>
+            <a:r>
+              <a:rPr dirty="0" err="1"/>
+              <a:t>TP와</a:t>
+            </a:r>
+            <a:r>
+              <a:rPr dirty="0"/>
+              <a:t> FP </a:t>
+            </a:r>
+            <a:r>
+              <a:rPr dirty="0" err="1"/>
+              <a:t>사이에</a:t>
+            </a:r>
+            <a:r>
+              <a:rPr dirty="0"/>
+              <a:t> </a:t>
+            </a:r>
+            <a:r>
+              <a:rPr dirty="0" err="1"/>
+              <a:t>차이가</a:t>
+            </a:r>
+            <a:r>
+              <a:rPr dirty="0"/>
+              <a:t> </a:t>
+            </a:r>
+            <a:r>
+              <a:rPr dirty="0" err="1"/>
+              <a:t>있는지</a:t>
+            </a:r>
+            <a:r>
+              <a:rPr dirty="0"/>
+              <a:t> </a:t>
+            </a:r>
+            <a:r>
+              <a:rPr dirty="0" err="1"/>
+              <a:t>하나하나</a:t>
+            </a:r>
+            <a:r>
+              <a:rPr dirty="0"/>
+              <a:t> </a:t>
+            </a:r>
+            <a:r>
+              <a:rPr dirty="0" err="1"/>
+              <a:t>검정했습니다</a:t>
+            </a:r>
+            <a:r>
+              <a:rPr dirty="0"/>
+              <a:t>. </a:t>
+            </a:r>
+            <a:r>
+              <a:rPr dirty="0" err="1"/>
+              <a:t>사람</a:t>
+            </a:r>
+            <a:r>
+              <a:rPr dirty="0"/>
+              <a:t> </a:t>
+            </a:r>
+            <a:r>
+              <a:rPr dirty="0" err="1"/>
+              <a:t>눈에는</a:t>
+            </a:r>
+            <a:r>
+              <a:rPr dirty="0"/>
+              <a:t> 안 </a:t>
+            </a:r>
+            <a:r>
+              <a:rPr dirty="0" err="1"/>
+              <a:t>보이는</a:t>
+            </a:r>
+            <a:r>
+              <a:rPr dirty="0"/>
+              <a:t> </a:t>
+            </a:r>
+            <a:r>
+              <a:rPr dirty="0" err="1"/>
+              <a:t>미세한</a:t>
+            </a:r>
+            <a:r>
+              <a:rPr dirty="0"/>
+              <a:t> </a:t>
+            </a:r>
+            <a:r>
+              <a:rPr dirty="0" err="1"/>
+              <a:t>형태</a:t>
+            </a:r>
+            <a:r>
+              <a:rPr dirty="0"/>
+              <a:t> </a:t>
+            </a:r>
+            <a:r>
+              <a:rPr dirty="0" err="1"/>
+              <a:t>차이를</a:t>
+            </a:r>
+            <a:r>
+              <a:rPr dirty="0"/>
+              <a:t> </a:t>
+            </a:r>
+            <a:r>
+              <a:rPr dirty="0" err="1"/>
+              <a:t>잡아낼</a:t>
+            </a:r>
+            <a:r>
+              <a:rPr dirty="0"/>
+              <a:t> </a:t>
+            </a:r>
+            <a:r>
+              <a:rPr dirty="0" err="1"/>
+              <a:t>수도</a:t>
+            </a:r>
+            <a:r>
+              <a:rPr dirty="0"/>
+              <a:t> </a:t>
+            </a:r>
+            <a:r>
+              <a:rPr dirty="0" err="1"/>
+              <a:t>있다는</a:t>
+            </a:r>
+            <a:r>
+              <a:rPr dirty="0"/>
+              <a:t> </a:t>
+            </a:r>
+            <a:r>
+              <a:rPr dirty="0" err="1"/>
+              <a:t>생각에서입니다</a:t>
+            </a:r>
+            <a:r>
+              <a:rPr dirty="0"/>
+              <a:t>.</a:t>
+            </a:r>
+          </a:p>
+          <a:p>
+            <a:endParaRPr dirty="0"/>
+          </a:p>
+          <a:p>
+            <a:r>
+              <a:rPr dirty="0" err="1"/>
+              <a:t>주의할</a:t>
+            </a:r>
+            <a:r>
+              <a:rPr dirty="0"/>
+              <a:t> 점: </a:t>
+            </a:r>
+            <a:r>
+              <a:rPr dirty="0" err="1"/>
+              <a:t>검정을</a:t>
+            </a:r>
+            <a:r>
+              <a:rPr dirty="0"/>
+              <a:t> 한 </a:t>
+            </a:r>
+            <a:r>
+              <a:rPr dirty="0" err="1"/>
+              <a:t>번만</a:t>
+            </a:r>
+            <a:r>
+              <a:rPr dirty="0"/>
+              <a:t> </a:t>
+            </a:r>
+            <a:r>
+              <a:rPr dirty="0" err="1"/>
+              <a:t>하면</a:t>
+            </a:r>
+            <a:r>
+              <a:rPr dirty="0"/>
+              <a:t> </a:t>
+            </a:r>
+            <a:r>
+              <a:rPr dirty="0" err="1"/>
+              <a:t>우연히</a:t>
+            </a:r>
+            <a:r>
+              <a:rPr dirty="0"/>
+              <a:t> </a:t>
+            </a:r>
+            <a:r>
+              <a:rPr dirty="0" err="1"/>
+              <a:t>유의하게</a:t>
+            </a:r>
+            <a:r>
+              <a:rPr dirty="0"/>
+              <a:t> </a:t>
+            </a:r>
+            <a:r>
+              <a:rPr dirty="0" err="1"/>
+              <a:t>나올</a:t>
+            </a:r>
+            <a:r>
+              <a:rPr dirty="0"/>
+              <a:t> </a:t>
+            </a:r>
+            <a:r>
+              <a:rPr dirty="0" err="1"/>
+              <a:t>확률이</a:t>
+            </a:r>
+            <a:r>
+              <a:rPr dirty="0"/>
+              <a:t> 5%지만, </a:t>
+            </a:r>
+            <a:r>
+              <a:rPr dirty="0" err="1"/>
+              <a:t>여기서는</a:t>
+            </a:r>
+            <a:r>
+              <a:rPr dirty="0"/>
+              <a:t> 14개(+</a:t>
+            </a:r>
+            <a:r>
+              <a:rPr dirty="0" err="1"/>
+              <a:t>비교용</a:t>
+            </a:r>
+            <a:r>
+              <a:rPr dirty="0"/>
+              <a:t> clinic </a:t>
+            </a:r>
+            <a:r>
+              <a:rPr dirty="0" err="1"/>
+              <a:t>변수</a:t>
+            </a:r>
+            <a:r>
+              <a:rPr dirty="0"/>
+              <a:t> 4개=18개)를 </a:t>
+            </a:r>
+            <a:r>
+              <a:rPr dirty="0" err="1"/>
+              <a:t>한꺼번에</a:t>
+            </a:r>
+            <a:r>
+              <a:rPr dirty="0"/>
+              <a:t> </a:t>
+            </a:r>
+            <a:r>
+              <a:rPr dirty="0" err="1"/>
+              <a:t>검정하기</a:t>
+            </a:r>
+            <a:r>
+              <a:rPr dirty="0"/>
+              <a:t> </a:t>
+            </a:r>
+            <a:r>
+              <a:rPr dirty="0" err="1"/>
+              <a:t>때문에</a:t>
+            </a:r>
+            <a:r>
+              <a:rPr dirty="0"/>
+              <a:t>, </a:t>
+            </a:r>
+            <a:r>
+              <a:rPr dirty="0" err="1"/>
+              <a:t>개별</a:t>
+            </a:r>
+            <a:r>
+              <a:rPr dirty="0"/>
+              <a:t> p&lt;0.05만 </a:t>
+            </a:r>
+            <a:r>
+              <a:rPr dirty="0" err="1"/>
+              <a:t>보면</a:t>
+            </a:r>
+            <a:r>
+              <a:rPr dirty="0"/>
+              <a:t> </a:t>
+            </a:r>
+            <a:r>
+              <a:rPr dirty="0" err="1"/>
+              <a:t>우연히</a:t>
+            </a:r>
+            <a:r>
+              <a:rPr dirty="0"/>
+              <a:t> 몇 </a:t>
+            </a:r>
+            <a:r>
+              <a:rPr dirty="0" err="1"/>
+              <a:t>개는</a:t>
+            </a:r>
+            <a:r>
+              <a:rPr dirty="0"/>
+              <a:t> '</a:t>
+            </a:r>
+            <a:r>
+              <a:rPr dirty="0" err="1"/>
+              <a:t>유의'하게</a:t>
+            </a:r>
+            <a:r>
+              <a:rPr dirty="0"/>
+              <a:t> </a:t>
+            </a:r>
+            <a:r>
+              <a:rPr dirty="0" err="1"/>
+              <a:t>나올</a:t>
+            </a:r>
+            <a:r>
+              <a:rPr dirty="0"/>
+              <a:t> </a:t>
+            </a:r>
+            <a:r>
+              <a:rPr dirty="0" err="1"/>
+              <a:t>수밖에</a:t>
+            </a:r>
+            <a:r>
+              <a:rPr dirty="0"/>
+              <a:t> </a:t>
+            </a:r>
+            <a:r>
+              <a:rPr dirty="0" err="1"/>
+              <a:t>없습니다</a:t>
+            </a:r>
+            <a:r>
+              <a:rPr dirty="0"/>
+              <a:t>(</a:t>
+            </a:r>
+            <a:r>
+              <a:rPr dirty="0" err="1"/>
+              <a:t>로또를</a:t>
+            </a:r>
+            <a:r>
+              <a:rPr dirty="0"/>
+              <a:t> 18번 </a:t>
+            </a:r>
+            <a:r>
+              <a:rPr dirty="0" err="1"/>
+              <a:t>사면</a:t>
+            </a:r>
+            <a:r>
+              <a:rPr dirty="0"/>
+              <a:t> </a:t>
+            </a:r>
+            <a:r>
+              <a:rPr dirty="0" err="1"/>
+              <a:t>그럴듯한</a:t>
+            </a:r>
+            <a:r>
+              <a:rPr dirty="0"/>
+              <a:t> 게 </a:t>
+            </a:r>
+            <a:r>
+              <a:rPr dirty="0" err="1"/>
+              <a:t>하나쯤은</a:t>
+            </a:r>
+            <a:r>
+              <a:rPr dirty="0"/>
+              <a:t> </a:t>
+            </a:r>
+            <a:r>
+              <a:rPr dirty="0" err="1"/>
+              <a:t>나오는</a:t>
+            </a:r>
+            <a:r>
+              <a:rPr dirty="0"/>
+              <a:t> </a:t>
+            </a:r>
+            <a:r>
+              <a:rPr dirty="0" err="1"/>
+              <a:t>것과</a:t>
+            </a:r>
+            <a:r>
+              <a:rPr dirty="0"/>
+              <a:t> </a:t>
+            </a:r>
+            <a:r>
+              <a:rPr dirty="0" err="1"/>
+              <a:t>비슷한</a:t>
+            </a:r>
+            <a:r>
+              <a:rPr dirty="0"/>
+              <a:t> </a:t>
+            </a:r>
+            <a:r>
+              <a:rPr dirty="0" err="1"/>
+              <a:t>이치</a:t>
+            </a:r>
+            <a:r>
+              <a:rPr dirty="0"/>
+              <a:t>). 이 '</a:t>
+            </a:r>
+            <a:r>
+              <a:rPr dirty="0" err="1"/>
+              <a:t>우연히</a:t>
+            </a:r>
+            <a:r>
+              <a:rPr dirty="0"/>
+              <a:t> </a:t>
+            </a:r>
+            <a:r>
+              <a:rPr dirty="0" err="1"/>
+              <a:t>유의해</a:t>
+            </a:r>
+            <a:r>
+              <a:rPr dirty="0"/>
+              <a:t> </a:t>
+            </a:r>
+            <a:r>
+              <a:rPr dirty="0" err="1"/>
+              <a:t>보이는</a:t>
+            </a:r>
+            <a:r>
+              <a:rPr dirty="0"/>
+              <a:t> </a:t>
+            </a:r>
+            <a:r>
+              <a:rPr dirty="0" err="1"/>
+              <a:t>것'을</a:t>
+            </a:r>
+            <a:r>
+              <a:rPr dirty="0"/>
+              <a:t> </a:t>
+            </a:r>
+            <a:r>
+              <a:rPr dirty="0" err="1"/>
+              <a:t>걸러내는</a:t>
+            </a:r>
+            <a:r>
+              <a:rPr dirty="0"/>
+              <a:t> </a:t>
+            </a:r>
+            <a:r>
+              <a:rPr dirty="0" err="1"/>
+              <a:t>보정된</a:t>
+            </a:r>
+            <a:r>
+              <a:rPr dirty="0"/>
+              <a:t> </a:t>
+            </a:r>
+            <a:r>
+              <a:rPr dirty="0" err="1"/>
+              <a:t>기준이</a:t>
+            </a:r>
+            <a:r>
+              <a:rPr dirty="0"/>
+              <a:t> q-</a:t>
+            </a:r>
+            <a:r>
+              <a:rPr dirty="0" err="1"/>
+              <a:t>value입니다</a:t>
+            </a:r>
+            <a:r>
+              <a:rPr dirty="0"/>
+              <a:t>. q&lt;0.05는 '이 </a:t>
+            </a:r>
+            <a:r>
+              <a:rPr dirty="0" err="1"/>
+              <a:t>안에서</a:t>
+            </a:r>
+            <a:r>
+              <a:rPr dirty="0"/>
+              <a:t> </a:t>
+            </a:r>
+            <a:r>
+              <a:rPr dirty="0" err="1"/>
+              <a:t>유의하다고</a:t>
+            </a:r>
+            <a:r>
+              <a:rPr dirty="0"/>
+              <a:t> </a:t>
+            </a:r>
+            <a:r>
+              <a:rPr dirty="0" err="1"/>
+              <a:t>뽑은</a:t>
+            </a:r>
+            <a:r>
+              <a:rPr dirty="0"/>
+              <a:t> </a:t>
+            </a:r>
+            <a:r>
+              <a:rPr dirty="0" err="1"/>
+              <a:t>것들</a:t>
+            </a:r>
+            <a:r>
+              <a:rPr dirty="0"/>
+              <a:t> 중 </a:t>
+            </a:r>
+            <a:r>
+              <a:rPr dirty="0" err="1"/>
+              <a:t>실제로</a:t>
+            </a:r>
+            <a:r>
+              <a:rPr dirty="0"/>
+              <a:t> </a:t>
+            </a:r>
+            <a:r>
+              <a:rPr dirty="0" err="1"/>
+              <a:t>우연이</a:t>
+            </a:r>
+            <a:r>
+              <a:rPr dirty="0"/>
+              <a:t> </a:t>
+            </a:r>
+            <a:r>
+              <a:rPr dirty="0" err="1"/>
+              <a:t>섞여</a:t>
+            </a:r>
+            <a:r>
+              <a:rPr dirty="0"/>
+              <a:t> </a:t>
+            </a:r>
+            <a:r>
+              <a:rPr dirty="0" err="1"/>
+              <a:t>있을</a:t>
+            </a:r>
+            <a:r>
+              <a:rPr dirty="0"/>
+              <a:t> </a:t>
+            </a:r>
+            <a:r>
+              <a:rPr dirty="0" err="1"/>
+              <a:t>비율이</a:t>
+            </a:r>
+            <a:r>
+              <a:rPr dirty="0"/>
+              <a:t> 5% </a:t>
+            </a:r>
+            <a:r>
+              <a:rPr dirty="0" err="1"/>
+              <a:t>이하로</a:t>
+            </a:r>
+            <a:r>
+              <a:rPr dirty="0"/>
+              <a:t> </a:t>
+            </a:r>
+            <a:r>
+              <a:rPr dirty="0" err="1"/>
+              <a:t>통제된</a:t>
+            </a:r>
+            <a:r>
+              <a:rPr dirty="0"/>
+              <a:t> </a:t>
+            </a:r>
+            <a:r>
+              <a:rPr dirty="0" err="1"/>
+              <a:t>상태'라는</a:t>
+            </a:r>
+            <a:r>
+              <a:rPr dirty="0"/>
+              <a:t> </a:t>
+            </a:r>
+            <a:r>
+              <a:rPr dirty="0" err="1"/>
+              <a:t>뜻으로</a:t>
+            </a:r>
+            <a:r>
+              <a:rPr dirty="0"/>
+              <a:t>, </a:t>
+            </a:r>
+            <a:r>
+              <a:rPr dirty="0" err="1"/>
+              <a:t>개별</a:t>
+            </a:r>
+            <a:r>
+              <a:rPr dirty="0"/>
+              <a:t> p-</a:t>
+            </a:r>
+            <a:r>
+              <a:rPr dirty="0" err="1"/>
+              <a:t>value보다</a:t>
+            </a:r>
+            <a:r>
+              <a:rPr dirty="0"/>
+              <a:t> 더 </a:t>
+            </a:r>
+            <a:r>
+              <a:rPr dirty="0" err="1"/>
+              <a:t>엄격하고</a:t>
+            </a:r>
+            <a:r>
+              <a:rPr dirty="0"/>
+              <a:t> </a:t>
+            </a:r>
+            <a:r>
+              <a:rPr dirty="0" err="1"/>
+              <a:t>믿을</a:t>
+            </a:r>
+            <a:r>
+              <a:rPr dirty="0"/>
+              <a:t> </a:t>
+            </a:r>
+            <a:r>
+              <a:rPr dirty="0" err="1"/>
+              <a:t>만한</a:t>
+            </a:r>
+            <a:r>
+              <a:rPr dirty="0"/>
+              <a:t> </a:t>
+            </a:r>
+            <a:r>
+              <a:rPr dirty="0" err="1"/>
+              <a:t>기준입니다</a:t>
+            </a:r>
+            <a:r>
+              <a:rPr dirty="0"/>
+              <a:t>.</a:t>
+            </a:r>
+          </a:p>
+          <a:p>
+            <a:endParaRPr dirty="0"/>
+          </a:p>
+          <a:p>
+            <a:r>
+              <a:rPr dirty="0" err="1"/>
+              <a:t>결과</a:t>
+            </a:r>
+            <a:r>
+              <a:rPr dirty="0"/>
+              <a:t>: raw(</a:t>
+            </a:r>
+            <a:r>
+              <a:rPr dirty="0" err="1"/>
+              <a:t>원표본</a:t>
+            </a:r>
+            <a:r>
+              <a:rPr dirty="0"/>
+              <a:t>) / matched(</a:t>
+            </a:r>
+            <a:r>
+              <a:rPr dirty="0" err="1"/>
+              <a:t>비슷한</a:t>
+            </a:r>
+            <a:r>
+              <a:rPr dirty="0"/>
+              <a:t> </a:t>
+            </a:r>
+            <a:r>
+              <a:rPr dirty="0" err="1"/>
+              <a:t>환자끼리</a:t>
+            </a:r>
+            <a:r>
+              <a:rPr dirty="0"/>
+              <a:t> </a:t>
+            </a:r>
+            <a:r>
+              <a:rPr dirty="0" err="1"/>
+              <a:t>매칭</a:t>
+            </a:r>
+            <a:r>
+              <a:rPr dirty="0"/>
+              <a:t>) / </a:t>
+            </a:r>
+            <a:r>
+              <a:rPr dirty="0" err="1"/>
+              <a:t>residualized</a:t>
+            </a:r>
+            <a:r>
+              <a:rPr dirty="0"/>
+              <a:t>(</a:t>
+            </a:r>
+            <a:r>
+              <a:rPr dirty="0" err="1"/>
+              <a:t>체형</a:t>
+            </a:r>
+            <a:r>
+              <a:rPr dirty="0"/>
+              <a:t> </a:t>
+            </a:r>
+            <a:r>
+              <a:rPr dirty="0" err="1"/>
+              <a:t>영향을</a:t>
+            </a:r>
+            <a:r>
+              <a:rPr dirty="0"/>
+              <a:t> </a:t>
+            </a:r>
+            <a:r>
+              <a:rPr dirty="0" err="1"/>
+              <a:t>통계적으로</a:t>
+            </a:r>
+            <a:r>
+              <a:rPr dirty="0"/>
+              <a:t> </a:t>
+            </a:r>
+            <a:r>
+              <a:rPr dirty="0" err="1"/>
+              <a:t>미리</a:t>
+            </a:r>
+            <a:r>
+              <a:rPr dirty="0"/>
+              <a:t> </a:t>
+            </a:r>
+            <a:r>
+              <a:rPr dirty="0" err="1"/>
+              <a:t>빼고</a:t>
+            </a:r>
+            <a:r>
+              <a:rPr dirty="0"/>
+              <a:t> </a:t>
+            </a:r>
+            <a:r>
+              <a:rPr dirty="0" err="1"/>
+              <a:t>비교</a:t>
+            </a:r>
+            <a:r>
+              <a:rPr dirty="0"/>
+              <a:t>) 세 </a:t>
+            </a:r>
+            <a:r>
+              <a:rPr dirty="0" err="1"/>
+              <a:t>가지</a:t>
+            </a:r>
+            <a:r>
+              <a:rPr dirty="0"/>
+              <a:t> </a:t>
+            </a:r>
+            <a:r>
+              <a:rPr dirty="0" err="1"/>
+              <a:t>방법</a:t>
+            </a:r>
+            <a:r>
+              <a:rPr dirty="0"/>
+              <a:t>, </a:t>
+            </a:r>
+            <a:r>
+              <a:rPr dirty="0" err="1"/>
+              <a:t>강남·신촌</a:t>
+            </a:r>
+            <a:r>
+              <a:rPr dirty="0"/>
+              <a:t> 두 </a:t>
+            </a:r>
+            <a:r>
+              <a:rPr dirty="0" err="1"/>
+              <a:t>코호트</a:t>
+            </a:r>
+            <a:r>
+              <a:rPr dirty="0"/>
+              <a:t>, 84번의 </a:t>
+            </a:r>
+            <a:r>
+              <a:rPr dirty="0" err="1"/>
+              <a:t>검정</a:t>
+            </a:r>
+            <a:r>
+              <a:rPr dirty="0"/>
+              <a:t>(14개 feature x 3방법 x 2코호트) </a:t>
+            </a:r>
+            <a:r>
+              <a:rPr dirty="0" err="1"/>
+              <a:t>전부</a:t>
+            </a:r>
+            <a:r>
+              <a:rPr dirty="0"/>
+              <a:t> q-value </a:t>
+            </a:r>
+            <a:r>
+              <a:rPr dirty="0" err="1"/>
+              <a:t>기준으로는</a:t>
+            </a:r>
+            <a:r>
+              <a:rPr dirty="0"/>
+              <a:t> </a:t>
+            </a:r>
+            <a:r>
+              <a:rPr dirty="0" err="1"/>
+              <a:t>유의한</a:t>
+            </a:r>
+            <a:r>
+              <a:rPr dirty="0"/>
+              <a:t> </a:t>
+            </a:r>
+            <a:r>
+              <a:rPr dirty="0" err="1"/>
+              <a:t>것이</a:t>
+            </a:r>
+            <a:r>
+              <a:rPr dirty="0"/>
+              <a:t> </a:t>
+            </a:r>
+            <a:r>
+              <a:rPr dirty="0" err="1"/>
+              <a:t>하나도</a:t>
+            </a:r>
+            <a:r>
+              <a:rPr dirty="0"/>
+              <a:t> </a:t>
+            </a:r>
+            <a:r>
+              <a:rPr dirty="0" err="1"/>
+              <a:t>없었습니다</a:t>
+            </a:r>
+            <a:r>
+              <a:rPr dirty="0"/>
+              <a:t>(0/84). </a:t>
+            </a:r>
+            <a:r>
+              <a:rPr dirty="0" err="1"/>
+              <a:t>보정</a:t>
+            </a:r>
+            <a:r>
+              <a:rPr dirty="0"/>
+              <a:t> 전 p&lt;0.05만 </a:t>
+            </a:r>
+            <a:r>
+              <a:rPr dirty="0" err="1"/>
+              <a:t>보면</a:t>
+            </a:r>
+            <a:r>
+              <a:rPr dirty="0"/>
+              <a:t> </a:t>
+            </a:r>
+            <a:r>
+              <a:rPr dirty="0" err="1"/>
+              <a:t>조합마다</a:t>
+            </a:r>
+            <a:r>
+              <a:rPr dirty="0"/>
+              <a:t> 0~3개씩 </a:t>
+            </a:r>
+            <a:r>
+              <a:rPr dirty="0" err="1"/>
+              <a:t>나오지만</a:t>
+            </a:r>
+            <a:r>
+              <a:rPr dirty="0"/>
+              <a:t>, </a:t>
+            </a:r>
+            <a:r>
+              <a:rPr dirty="0" err="1"/>
+              <a:t>매번</a:t>
+            </a:r>
+            <a:r>
+              <a:rPr dirty="0"/>
+              <a:t> </a:t>
+            </a:r>
+            <a:r>
+              <a:rPr dirty="0" err="1"/>
+              <a:t>다른</a:t>
+            </a:r>
+            <a:r>
+              <a:rPr dirty="0"/>
+              <a:t> </a:t>
+            </a:r>
+            <a:r>
+              <a:rPr dirty="0" err="1"/>
+              <a:t>지표가</a:t>
+            </a:r>
+            <a:r>
+              <a:rPr dirty="0"/>
+              <a:t> </a:t>
+            </a:r>
+            <a:r>
+              <a:rPr dirty="0" err="1"/>
+              <a:t>걸리고</a:t>
+            </a:r>
+            <a:r>
+              <a:rPr dirty="0"/>
+              <a:t> </a:t>
+            </a:r>
+            <a:r>
+              <a:rPr dirty="0" err="1"/>
+              <a:t>보정하면</a:t>
+            </a:r>
+            <a:r>
+              <a:rPr dirty="0"/>
+              <a:t> </a:t>
+            </a:r>
+            <a:r>
+              <a:rPr dirty="0" err="1"/>
+              <a:t>사라지므로</a:t>
+            </a:r>
+            <a:r>
+              <a:rPr dirty="0"/>
+              <a:t> '</a:t>
+            </a:r>
+            <a:r>
+              <a:rPr dirty="0" err="1"/>
+              <a:t>진짜</a:t>
+            </a:r>
+            <a:r>
+              <a:rPr dirty="0"/>
+              <a:t> </a:t>
+            </a:r>
+            <a:r>
+              <a:rPr dirty="0" err="1"/>
+              <a:t>신호'가</a:t>
+            </a:r>
+            <a:r>
+              <a:rPr dirty="0"/>
+              <a:t> </a:t>
+            </a:r>
+            <a:r>
+              <a:rPr dirty="0" err="1"/>
+              <a:t>아니라</a:t>
+            </a:r>
+            <a:r>
+              <a:rPr dirty="0"/>
+              <a:t> '</a:t>
+            </a:r>
+            <a:r>
+              <a:rPr dirty="0" err="1"/>
+              <a:t>우연'으로</a:t>
+            </a:r>
+            <a:r>
+              <a:rPr dirty="0"/>
+              <a:t> </a:t>
+            </a:r>
+            <a:r>
+              <a:rPr dirty="0" err="1"/>
+              <a:t>판단합니다</a:t>
+            </a:r>
+            <a:r>
+              <a:rPr dirty="0"/>
+              <a:t>.</a:t>
             </a:r>
           </a:p>
         </p:txBody>
@@ -4291,7 +2149,7 @@
     </p:spTree>
     <p:extLst>
       <p:ext uri="{BB962C8B-B14F-4D97-AF65-F5344CB8AC3E}">
-        <p14:creationId xmlns:p14="http://schemas.microsoft.com/office/powerpoint/2010/main" val="3020728336"/>
+        <p14:creationId xmlns:p14="http://schemas.microsoft.com/office/powerpoint/2010/main" val="2650842457"/>
       </p:ext>
     </p:extLst>
   </p:cSld>
@@ -4346,7 +2204,7 @@
           <a:lstStyle/>
           <a:p>
             <a:r>
-              <a:t>강남의 주성분별 p-value 그림입니다. 5개 주성분 x 3가지 방법 모두에서 믿을 만한 차이가 없었습니다.</a:t>
+              <a:t>강남 데이터에서 14개 곡선-형태 지표 각각의 p-value를 막대그래프로 그린 그림입니다(왼쪽부터 원표본/매칭/체형보정 3가지 방법). 막대가 길수록(오른쪽으로 갈수록) '우연이 아닐 가능성'이 높다는 뜻이고, 점선(p=0.05 위치)을 넘어야 최소한의 기준을 만족합니다. 강남은 3가지 방법 모두에서 진짜로 믿을 만한 차이(q&lt;0.05)가 하나도 없었습니다.</a:t>
             </a:r>
           </a:p>
         </p:txBody>
@@ -4366,7 +2224,7 @@
     </p:spTree>
     <p:extLst>
       <p:ext uri="{BB962C8B-B14F-4D97-AF65-F5344CB8AC3E}">
-        <p14:creationId xmlns:p14="http://schemas.microsoft.com/office/powerpoint/2010/main" val="3056053792"/>
+        <p14:creationId xmlns:p14="http://schemas.microsoft.com/office/powerpoint/2010/main" val="3575994740"/>
       </p:ext>
     </p:extLst>
   </p:cSld>
@@ -4421,7 +2279,7 @@
           <a:lstStyle/>
           <a:p>
             <a:r>
-              <a:t>신촌의 같은 그림입니다. 원표본과 매칭 방법에서는 주성분 1번이 점선(p=0.05)을 살짝 넘지만 보정 후에는 유의하지 않고, '체형 영향을 미리 뺀' 방법에서만 주성분 1번이 보정 후에도 살짝 유의합니다(그림에서 'q&lt;0.05' 표시가 붙은 유일한 막대).</a:t>
+              <a:t>신촌 데이터의 같은 그림입니다. 강남과 마찬가지로 14개 지표 중 진짜로 믿을 만한 차이(q&lt;0.05)는 없습니다. 다만 슬라이드5에서 봤던 '신촌은 원곡선 전체로 보면 약하게 차이가 남아있다'는 결과와는 대비됩니다 -- 곡선을 14개 요약 지표로 압축해서 보면 그 미세한 차이가 사라진다는 뜻으로, 특정한 하나의 형태 특징으로 설명되는 게 아니라 곡선 전체에 아주 옅게 퍼져 있는 잡음에 가깝다는 뜻일 수 있습니다.</a:t>
             </a:r>
           </a:p>
         </p:txBody>
@@ -4441,7 +2299,7 @@
     </p:spTree>
     <p:extLst>
       <p:ext uri="{BB962C8B-B14F-4D97-AF65-F5344CB8AC3E}">
-        <p14:creationId xmlns:p14="http://schemas.microsoft.com/office/powerpoint/2010/main" val="866072478"/>
+        <p14:creationId xmlns:p14="http://schemas.microsoft.com/office/powerpoint/2010/main" val="2475671323"/>
       </p:ext>
     </p:extLst>
   </p:cSld>
@@ -4496,7 +2354,7 @@
           <a:lstStyle/>
           <a:p>
             <a:r>
-              <a:t>이 슬라이드는 AEC 정보를 딥러닝(CNN)에 넣어 만든 Stage-2 모델의 실제 성능을 보여줍니다. 비교 대상(대조군)은 AEC 없이 그냥 기준선만 재조정한 경우(threshold-shift only)입니다 -- AEC가 정말 도움이 되는지, 아니면 기준선만 바꿔도 비슷한 효과가 나는지 확인하기 위해서입니다.</a:t>
+              <a:t>사람이 직접 정의한 14개 지표 말고, 이번에는 컴퓨터가 데이터를 보고 스스로 '가장 차이가 많이 나는 방향'을 찾아내는 방법(PCA, 주성분분석)으로도 같은 질문(TP와 FP 곡선이 다른가)을 확인했습니다. 128개 구간짜리 곡선을 5개의 숫자(주성분 1~5)로 압축했는데, 이 5개만으로도 원래 곡선 정보의 대부분(원곡선 기준 96.8%, 체형보정 곡선 기준 94.7%)을 담고 있습니다.</a:t>
             </a:r>
           </a:p>
           <a:p>
@@ -4504,31 +2362,7 @@
           </a:p>
           <a:p>
             <a:r>
-              <a:t>Net NRI(순재분류개선지수)는 기존보다 올바르게 재분류된 사람 수 - 잘못 재분류된 사람 수로, 클수록 좋습니다. spec p-value는 Specificity(특이도) 개선이 우연이 아닌지 검정한 값(전부 매우 작아 확실히 유의). n_deesc는 Positive(위험군)에서 Negative(정상군)로 재분류된(de-escalate, 불필요한 정밀검사를 피한) 사람 수입니다.</a:t>
-            </a:r>
-          </a:p>
-          <a:p>
-            <a:endParaRPr/>
-          </a:p>
-          <a:p>
-            <a:r>
-              <a:t>자체 학습 결과(위 표): 신촌에서는 AEC-CNN(+86명 개선)이 기준선 조정만 한 경우(+63명)보다 확실히 낫지만, 강남에서는 오히려 기준선 조정(+77명)이 AEC-CNN(+70명)보다 낫습니다 -- 코호트마다 결과가 반대로 나옵니다. 두 코호트 모두 전체 모델 구별력(AUC)은 Stage-1보다 유의하게 좋아지지 않았습니다(오히려 아주 조금 떨어졌지만 통계적으로는 차이 없음, DeLong 검정).</a:t>
-            </a:r>
-          </a:p>
-          <a:p>
-            <a:endParaRPr/>
-          </a:p>
-          <a:p>
-            <a:r>
-              <a:t>다른 병원에 그대로 적용한 결과(아래 표, external transfer): 신촌에서 학습해 강남에 적용하면 개선 폭(+95명)은 가장 크지만, Sensitivity(민감도, 위험군을 잡아내는 능력)가 너무 떨어져서 '기존보다 나쁘지 않다'는 안전성 검정(NI test)을 통과하지 못했습니다(FAIL) -- 숫자만 보면 좋아 보이지만 실제로는 위험한 결과입니다. AUC도 유의하게 떨어졌습니다(p=0.010). 반대로 강남에서 학습해 신촌에 적용한 경우는 안전성 검정을 통과했습니다(PASS).</a:t>
-            </a:r>
-          </a:p>
-          <a:p>
-            <a:endParaRPr/>
-          </a:p>
-          <a:p>
-            <a:r>
-              <a:t>강남 데이터에서 AEC-CNN 자체의 구별력(자체 검증 AUC)이 0.52로 거의 '동전 던지기' 수준이었는데, 이는 슬라이드7에서 봤던 '강남은 원곡선 자체에서 TP-FP 차이가 유의하지 않았다(p=0.227)'는 결과와 일치합니다 -- 애초에 강남 AEC 곡선에는 구별할 신호 자체가 거의 없었다는 뜻입니다.</a:t>
+              <a:t>결과: 강남은 이번에도 15번의 검정(주성분 5개 x 3가지 방법) 전부 믿을 만한 차이가 없었습니다. 신촌은 원표본과 매칭 방법에서는 역시 차이가 없었지만, '체형 영향을 미리 뺀' 방법에서만 주성분 1번 하나가 아슬아슬하게 기준을 넘었습니다(q=0.045, 기준 0.05보다 살짝 낮음). 다만 이 차이의 크기 자체는 작고(효과크기 작음), 신촌 표본이 커서(TP 131명, FP 398명) 작은 차이도 통계적으로 잡힌 것으로 보입니다. 즉 강남은 어떤 방법으로 봐도 깨끗하게 차이가 없고, 신촌은 아주 미세하고 일관되지 않은 흔적만 남아있는 정도입니다.</a:t>
             </a:r>
           </a:p>
         </p:txBody>
@@ -4546,6 +2380,161 @@
         <p:spPr/>
       </p:sp>
     </p:spTree>
+    <p:extLst>
+      <p:ext uri="{BB962C8B-B14F-4D97-AF65-F5344CB8AC3E}">
+        <p14:creationId xmlns:p14="http://schemas.microsoft.com/office/powerpoint/2010/main" val="3020728336"/>
+      </p:ext>
+    </p:extLst>
+  </p:cSld>
+  <p:clrMapOvr>
+    <a:masterClrMapping/>
+  </p:clrMapOvr>
+</p:notes>
+</file>
+
+<file path=ppt/notesSlides/notesSlide18.xml><?xml version="1.0" encoding="utf-8"?>
+<p:notes xmlns:a="http://schemas.openxmlformats.org/drawingml/2006/main" xmlns:r="http://schemas.openxmlformats.org/officeDocument/2006/relationships" xmlns:p="http://schemas.openxmlformats.org/presentationml/2006/main">
+  <p:cSld>
+    <p:spTree>
+      <p:nvGrpSpPr>
+        <p:cNvPr id="1" name=""/>
+        <p:cNvGrpSpPr/>
+        <p:nvPr/>
+      </p:nvGrpSpPr>
+      <p:grpSpPr>
+        <a:xfrm>
+          <a:off x="0" y="0"/>
+          <a:ext cx="0" cy="0"/>
+          <a:chOff x="0" y="0"/>
+          <a:chExt cx="0" cy="0"/>
+        </a:xfrm>
+      </p:grpSpPr>
+      <p:sp>
+        <p:nvSpPr>
+          <p:cNvPr id="2" name="Slide Image Placeholder 1"/>
+          <p:cNvSpPr>
+            <a:spLocks noGrp="1" noRot="1" noChangeAspect="1"/>
+          </p:cNvSpPr>
+          <p:nvPr>
+            <p:ph type="sldImg" idx="2"/>
+          </p:nvPr>
+        </p:nvSpPr>
+        <p:spPr/>
+      </p:sp>
+      <p:sp>
+        <p:nvSpPr>
+          <p:cNvPr id="3" name="Notes Placeholder 2"/>
+          <p:cNvSpPr>
+            <a:spLocks noGrp="1"/>
+          </p:cNvSpPr>
+          <p:nvPr>
+            <p:ph type="body" sz="quarter" idx="3"/>
+          </p:nvPr>
+        </p:nvSpPr>
+        <p:spPr/>
+        <p:txBody>
+          <a:bodyPr/>
+          <a:lstStyle/>
+          <a:p>
+            <a:r>
+              <a:t>강남의 주성분별 p-value 그림입니다. 5개 주성분 x 3가지 방법 모두에서 믿을 만한 차이가 없었습니다.</a:t>
+            </a:r>
+          </a:p>
+        </p:txBody>
+      </p:sp>
+      <p:sp>
+        <p:nvSpPr>
+          <p:cNvPr id="4" name="Slide Number Placeholder 3"/>
+          <p:cNvSpPr>
+            <a:spLocks noGrp="1"/>
+          </p:cNvSpPr>
+          <p:nvPr>
+            <p:ph type="sldNum" sz="quarter" idx="5"/>
+          </p:nvPr>
+        </p:nvSpPr>
+        <p:spPr/>
+      </p:sp>
+    </p:spTree>
+    <p:extLst>
+      <p:ext uri="{BB962C8B-B14F-4D97-AF65-F5344CB8AC3E}">
+        <p14:creationId xmlns:p14="http://schemas.microsoft.com/office/powerpoint/2010/main" val="3056053792"/>
+      </p:ext>
+    </p:extLst>
+  </p:cSld>
+  <p:clrMapOvr>
+    <a:masterClrMapping/>
+  </p:clrMapOvr>
+</p:notes>
+</file>
+
+<file path=ppt/notesSlides/notesSlide19.xml><?xml version="1.0" encoding="utf-8"?>
+<p:notes xmlns:a="http://schemas.openxmlformats.org/drawingml/2006/main" xmlns:r="http://schemas.openxmlformats.org/officeDocument/2006/relationships" xmlns:p="http://schemas.openxmlformats.org/presentationml/2006/main">
+  <p:cSld>
+    <p:spTree>
+      <p:nvGrpSpPr>
+        <p:cNvPr id="1" name=""/>
+        <p:cNvGrpSpPr/>
+        <p:nvPr/>
+      </p:nvGrpSpPr>
+      <p:grpSpPr>
+        <a:xfrm>
+          <a:off x="0" y="0"/>
+          <a:ext cx="0" cy="0"/>
+          <a:chOff x="0" y="0"/>
+          <a:chExt cx="0" cy="0"/>
+        </a:xfrm>
+      </p:grpSpPr>
+      <p:sp>
+        <p:nvSpPr>
+          <p:cNvPr id="2" name="Slide Image Placeholder 1"/>
+          <p:cNvSpPr>
+            <a:spLocks noGrp="1" noRot="1" noChangeAspect="1"/>
+          </p:cNvSpPr>
+          <p:nvPr>
+            <p:ph type="sldImg" idx="2"/>
+          </p:nvPr>
+        </p:nvSpPr>
+        <p:spPr/>
+      </p:sp>
+      <p:sp>
+        <p:nvSpPr>
+          <p:cNvPr id="3" name="Notes Placeholder 2"/>
+          <p:cNvSpPr>
+            <a:spLocks noGrp="1"/>
+          </p:cNvSpPr>
+          <p:nvPr>
+            <p:ph type="body" sz="quarter" idx="3"/>
+          </p:nvPr>
+        </p:nvSpPr>
+        <p:spPr/>
+        <p:txBody>
+          <a:bodyPr/>
+          <a:lstStyle/>
+          <a:p>
+            <a:r>
+              <a:t>신촌의 같은 그림입니다. 원표본과 매칭 방법에서는 주성분 1번이 점선(p=0.05)을 살짝 넘지만 보정 후에는 유의하지 않고, '체형 영향을 미리 뺀' 방법에서만 주성분 1번이 보정 후에도 살짝 유의합니다(그림에서 'q&lt;0.05' 표시가 붙은 유일한 막대).</a:t>
+            </a:r>
+          </a:p>
+        </p:txBody>
+      </p:sp>
+      <p:sp>
+        <p:nvSpPr>
+          <p:cNvPr id="4" name="Slide Number Placeholder 3"/>
+          <p:cNvSpPr>
+            <a:spLocks noGrp="1"/>
+          </p:cNvSpPr>
+          <p:nvPr>
+            <p:ph type="sldNum" sz="quarter" idx="5"/>
+          </p:nvPr>
+        </p:nvSpPr>
+        <p:spPr/>
+      </p:sp>
+    </p:spTree>
+    <p:extLst>
+      <p:ext uri="{BB962C8B-B14F-4D97-AF65-F5344CB8AC3E}">
+        <p14:creationId xmlns:p14="http://schemas.microsoft.com/office/powerpoint/2010/main" val="866072478"/>
+      </p:ext>
+    </p:extLst>
   </p:cSld>
   <p:clrMapOvr>
     <a:masterClrMapping/>
@@ -4661,6 +2650,108 @@
         <p14:creationId xmlns:p14="http://schemas.microsoft.com/office/powerpoint/2010/main" val="2422871882"/>
       </p:ext>
     </p:extLst>
+  </p:cSld>
+  <p:clrMapOvr>
+    <a:masterClrMapping/>
+  </p:clrMapOvr>
+</p:notes>
+</file>
+
+<file path=ppt/notesSlides/notesSlide20.xml><?xml version="1.0" encoding="utf-8"?>
+<p:notes xmlns:a="http://schemas.openxmlformats.org/drawingml/2006/main" xmlns:r="http://schemas.openxmlformats.org/officeDocument/2006/relationships" xmlns:p="http://schemas.openxmlformats.org/presentationml/2006/main">
+  <p:cSld>
+    <p:spTree>
+      <p:nvGrpSpPr>
+        <p:cNvPr id="1" name=""/>
+        <p:cNvGrpSpPr/>
+        <p:nvPr/>
+      </p:nvGrpSpPr>
+      <p:grpSpPr>
+        <a:xfrm>
+          <a:off x="0" y="0"/>
+          <a:ext cx="0" cy="0"/>
+          <a:chOff x="0" y="0"/>
+          <a:chExt cx="0" cy="0"/>
+        </a:xfrm>
+      </p:grpSpPr>
+      <p:sp>
+        <p:nvSpPr>
+          <p:cNvPr id="2" name="Slide Image Placeholder 1"/>
+          <p:cNvSpPr>
+            <a:spLocks noGrp="1" noRot="1" noChangeAspect="1"/>
+          </p:cNvSpPr>
+          <p:nvPr>
+            <p:ph type="sldImg" idx="2"/>
+          </p:nvPr>
+        </p:nvSpPr>
+        <p:spPr/>
+      </p:sp>
+      <p:sp>
+        <p:nvSpPr>
+          <p:cNvPr id="3" name="Notes Placeholder 2"/>
+          <p:cNvSpPr>
+            <a:spLocks noGrp="1"/>
+          </p:cNvSpPr>
+          <p:nvPr>
+            <p:ph type="body" sz="quarter" idx="3"/>
+          </p:nvPr>
+        </p:nvSpPr>
+        <p:spPr/>
+        <p:txBody>
+          <a:bodyPr/>
+          <a:lstStyle/>
+          <a:p>
+            <a:r>
+              <a:t>이 슬라이드는 AEC 정보를 딥러닝(CNN)에 넣어 만든 Stage-2 모델의 실제 성능을 보여줍니다. 비교 대상(대조군)은 AEC 없이 그냥 기준선만 재조정한 경우(threshold-shift only)입니다 -- AEC가 정말 도움이 되는지, 아니면 기준선만 바꿔도 비슷한 효과가 나는지 확인하기 위해서입니다.</a:t>
+            </a:r>
+          </a:p>
+          <a:p>
+            <a:endParaRPr/>
+          </a:p>
+          <a:p>
+            <a:r>
+              <a:t>Net NRI(순재분류개선지수)는 기존보다 올바르게 재분류된 사람 수 - 잘못 재분류된 사람 수로, 클수록 좋습니다. spec p-value는 Specificity(특이도) 개선이 우연이 아닌지 검정한 값(전부 매우 작아 확실히 유의). n_deesc는 Positive(위험군)에서 Negative(정상군)로 재분류된(de-escalate, 불필요한 정밀검사를 피한) 사람 수입니다.</a:t>
+            </a:r>
+          </a:p>
+          <a:p>
+            <a:endParaRPr/>
+          </a:p>
+          <a:p>
+            <a:r>
+              <a:t>자체 학습 결과(위 표): 신촌에서는 AEC-CNN(+86명 개선)이 기준선 조정만 한 경우(+63명)보다 확실히 낫지만, 강남에서는 오히려 기준선 조정(+77명)이 AEC-CNN(+70명)보다 낫습니다 -- 코호트마다 결과가 반대로 나옵니다. 두 코호트 모두 전체 모델 구별력(AUC)은 Stage-1보다 유의하게 좋아지지 않았습니다(오히려 아주 조금 떨어졌지만 통계적으로는 차이 없음, DeLong 검정).</a:t>
+            </a:r>
+          </a:p>
+          <a:p>
+            <a:endParaRPr/>
+          </a:p>
+          <a:p>
+            <a:r>
+              <a:t>다른 병원에 그대로 적용한 결과(아래 표, external transfer): 신촌에서 학습해 강남에 적용하면 개선 폭(+95명)은 가장 크지만, Sensitivity(민감도, 위험군을 잡아내는 능력)가 너무 떨어져서 '기존보다 나쁘지 않다'는 안전성 검정(NI test)을 통과하지 못했습니다(FAIL) -- 숫자만 보면 좋아 보이지만 실제로는 위험한 결과입니다. AUC도 유의하게 떨어졌습니다(p=0.010). 반대로 강남에서 학습해 신촌에 적용한 경우는 안전성 검정을 통과했습니다(PASS).</a:t>
+            </a:r>
+          </a:p>
+          <a:p>
+            <a:endParaRPr/>
+          </a:p>
+          <a:p>
+            <a:r>
+              <a:t>강남 데이터에서 AEC-CNN 자체의 구별력(자체 검증 AUC)이 0.52로 거의 '동전 던지기' 수준이었는데, 이는 슬라이드7에서 봤던 '강남은 원곡선 자체에서 TP-FP 차이가 유의하지 않았다(p=0.227)'는 결과와 일치합니다 -- 애초에 강남 AEC 곡선에는 구별할 신호 자체가 거의 없었다는 뜻입니다.</a:t>
+            </a:r>
+          </a:p>
+        </p:txBody>
+      </p:sp>
+      <p:sp>
+        <p:nvSpPr>
+          <p:cNvPr id="4" name="Slide Number Placeholder 3"/>
+          <p:cNvSpPr>
+            <a:spLocks noGrp="1"/>
+          </p:cNvSpPr>
+          <p:nvPr>
+            <p:ph type="sldNum" sz="quarter" idx="5"/>
+          </p:nvPr>
+        </p:nvSpPr>
+        <p:spPr/>
+      </p:sp>
+    </p:spTree>
   </p:cSld>
   <p:clrMapOvr>
     <a:masterClrMapping/>
@@ -6668,7 +4759,7 @@
         <p:cNvPr id="1" name="">
           <a:extLst>
             <a:ext uri="{FF2B5EF4-FFF2-40B4-BE49-F238E27FC236}">
-              <a16:creationId xmlns:a16="http://schemas.microsoft.com/office/drawing/2014/main" id="{47A0344B-725A-F24C-70BD-475446FDCB5F}"/>
+              <a16:creationId xmlns:a16="http://schemas.microsoft.com/office/drawing/2014/main" id="{2EBA2420-E723-6665-DCCB-E52911A66D08}"/>
             </a:ext>
           </a:extLst>
         </p:cNvPr>
@@ -6688,7 +4779,7 @@
           <p:cNvPr id="2" name="Slide Image Placeholder 1">
             <a:extLst>
               <a:ext uri="{FF2B5EF4-FFF2-40B4-BE49-F238E27FC236}">
-                <a16:creationId xmlns:a16="http://schemas.microsoft.com/office/drawing/2014/main" id="{24BAC708-998B-CF8A-8C87-3767BF180915}"/>
+                <a16:creationId xmlns:a16="http://schemas.microsoft.com/office/drawing/2014/main" id="{F3713888-BF43-2450-5FED-16EC9B8C32C1}"/>
               </a:ext>
             </a:extLst>
           </p:cNvPr>
@@ -6706,7 +4797,7 @@
           <p:cNvPr id="3" name="Notes Placeholder 2">
             <a:extLst>
               <a:ext uri="{FF2B5EF4-FFF2-40B4-BE49-F238E27FC236}">
-                <a16:creationId xmlns:a16="http://schemas.microsoft.com/office/drawing/2014/main" id="{258D1B52-3F75-4EE0-B52D-7E29EE64D08C}"/>
+                <a16:creationId xmlns:a16="http://schemas.microsoft.com/office/drawing/2014/main" id="{E1A6067E-181E-C473-6C54-2EAEDDBC1476}"/>
               </a:ext>
             </a:extLst>
           </p:cNvPr>
@@ -6722,9 +4813,7 @@
           <a:bodyPr/>
           <a:lstStyle/>
           <a:p>
-            <a:r>
-              <a:t>지금까지의 결과를 정리하면, AEC 곡선 하나만으로는(원곡선이든, 요약 지표든, 주성분이든) TP와 FP를 뚜렷하게 구별하기 어렵습니다. 다만 강남과 신촌 결과가 완전히 같지는 않아서(신촌에 미세한 흔적이 남음) 좀 더 정교한 접근이 필요합니다. 다음 단계로는 임상 정보(성별/나이/키/체중)와 AEC 곡선 정보를 딥러닝 모델(멀티모달 구조)로 함께 학습시켜서 사람이 놓칠 수 있는 복합적인 패턴을 잡아낼 수 있는지 시도하고, Stage-1 모델 자체의 성능(AUC)을 높이는 방법도 함께 연구할 계획입니다.</a:t>
-            </a:r>
+            <a:endParaRPr dirty="0"/>
           </a:p>
         </p:txBody>
       </p:sp>
@@ -6733,7 +4822,7 @@
           <p:cNvPr id="4" name="Slide Number Placeholder 3">
             <a:extLst>
               <a:ext uri="{FF2B5EF4-FFF2-40B4-BE49-F238E27FC236}">
-                <a16:creationId xmlns:a16="http://schemas.microsoft.com/office/drawing/2014/main" id="{24E0675F-AB5A-2AC6-A453-932F57D74234}"/>
+                <a16:creationId xmlns:a16="http://schemas.microsoft.com/office/drawing/2014/main" id="{A9E894A4-9428-5570-9E01-97013C86E605}"/>
               </a:ext>
             </a:extLst>
           </p:cNvPr>
@@ -6749,7 +4838,7 @@
     </p:spTree>
     <p:extLst>
       <p:ext uri="{BB962C8B-B14F-4D97-AF65-F5344CB8AC3E}">
-        <p14:creationId xmlns:p14="http://schemas.microsoft.com/office/powerpoint/2010/main" val="739262899"/>
+        <p14:creationId xmlns:p14="http://schemas.microsoft.com/office/powerpoint/2010/main" val="2941846415"/>
       </p:ext>
     </p:extLst>
   </p:cSld>
@@ -6760,11 +4849,17 @@
 </file>
 
 <file path=ppt/notesSlides/notesSlide9.xml><?xml version="1.0" encoding="utf-8"?>
-<p:notes xmlns:a="http://schemas.openxmlformats.org/drawingml/2006/main" xmlns:r="http://schemas.openxmlformats.org/officeDocument/2006/relationships" xmlns:p="http://schemas.openxmlformats.org/presentationml/2006/main" showMasterSp="0" showMasterPhAnim="0">
+<p:notes xmlns:a="http://schemas.openxmlformats.org/drawingml/2006/main" xmlns:r="http://schemas.openxmlformats.org/officeDocument/2006/relationships" xmlns:p="http://schemas.openxmlformats.org/presentationml/2006/main">
   <p:cSld>
     <p:spTree>
       <p:nvGrpSpPr>
-        <p:cNvPr id="1" name="Shape 1171"/>
+        <p:cNvPr id="1" name="">
+          <a:extLst>
+            <a:ext uri="{FF2B5EF4-FFF2-40B4-BE49-F238E27FC236}">
+              <a16:creationId xmlns:a16="http://schemas.microsoft.com/office/drawing/2014/main" id="{1D9B4B38-7BBE-384B-08E0-EC5CCA129203}"/>
+            </a:ext>
+          </a:extLst>
+        </p:cNvPr>
         <p:cNvGrpSpPr/>
         <p:nvPr/>
       </p:nvGrpSpPr>
@@ -6778,7 +4873,13 @@
       </p:grpSpPr>
       <p:sp>
         <p:nvSpPr>
-          <p:cNvPr id="1172" name="Google Shape;1172;g3d412ffb079_0_61:notes"/>
+          <p:cNvPr id="2" name="Slide Image Placeholder 1">
+            <a:extLst>
+              <a:ext uri="{FF2B5EF4-FFF2-40B4-BE49-F238E27FC236}">
+                <a16:creationId xmlns:a16="http://schemas.microsoft.com/office/drawing/2014/main" id="{2635EAA2-E56D-CF65-27FB-3C5E293D2228}"/>
+              </a:ext>
+            </a:extLst>
+          </p:cNvPr>
           <p:cNvSpPr>
             <a:spLocks noGrp="1" noRot="1" noChangeAspect="1"/>
           </p:cNvSpPr>
@@ -6786,126 +4887,55 @@
             <p:ph type="sldImg" idx="2"/>
           </p:nvPr>
         </p:nvSpPr>
-        <p:spPr>
-          <a:xfrm>
-            <a:off x="4040188" y="857250"/>
-            <a:ext cx="4113212" cy="2314575"/>
-          </a:xfrm>
-          <a:custGeom>
-            <a:avLst/>
-            <a:gdLst/>
-            <a:ahLst/>
-            <a:cxnLst/>
-            <a:rect l="l" t="t" r="r" b="b"/>
-            <a:pathLst>
-              <a:path w="120000" h="120000" extrusionOk="0">
-                <a:moveTo>
-                  <a:pt x="0" y="0"/>
-                </a:moveTo>
-                <a:lnTo>
-                  <a:pt x="120000" y="0"/>
-                </a:lnTo>
-                <a:lnTo>
-                  <a:pt x="120000" y="120000"/>
-                </a:lnTo>
-                <a:lnTo>
-                  <a:pt x="0" y="120000"/>
-                </a:lnTo>
-                <a:close/>
-              </a:path>
-            </a:pathLst>
-          </a:custGeom>
-        </p:spPr>
+        <p:spPr/>
       </p:sp>
       <p:sp>
         <p:nvSpPr>
-          <p:cNvPr id="1173" name="Google Shape;1173;g3d412ffb079_0_61:notes"/>
-          <p:cNvSpPr txBox="1">
+          <p:cNvPr id="3" name="Notes Placeholder 2">
+            <a:extLst>
+              <a:ext uri="{FF2B5EF4-FFF2-40B4-BE49-F238E27FC236}">
+                <a16:creationId xmlns:a16="http://schemas.microsoft.com/office/drawing/2014/main" id="{5B566CBE-F434-B15D-0319-075DA3B1125C}"/>
+              </a:ext>
+            </a:extLst>
+          </p:cNvPr>
+          <p:cNvSpPr>
             <a:spLocks noGrp="1"/>
           </p:cNvSpPr>
           <p:nvPr>
-            <p:ph type="body" idx="1"/>
+            <p:ph type="body" sz="quarter" idx="3"/>
           </p:nvPr>
         </p:nvSpPr>
-        <p:spPr>
-          <a:xfrm>
-            <a:off x="1219200" y="3300413"/>
-            <a:ext cx="9753600" cy="2700300"/>
-          </a:xfrm>
-          <a:prstGeom prst="rect">
-            <a:avLst/>
-          </a:prstGeom>
-        </p:spPr>
+        <p:spPr/>
         <p:txBody>
-          <a:bodyPr spcFirstLastPara="1" wrap="square" lIns="91425" tIns="45700" rIns="91425" bIns="45700" anchor="t" anchorCtr="0">
-            <a:noAutofit/>
-          </a:bodyPr>
+          <a:bodyPr/>
           <a:lstStyle/>
           <a:p>
-            <a:pPr marL="0" lvl="0" indent="0" algn="l" rtl="0">
-              <a:spcBef>
-                <a:spcPts val="0"/>
-              </a:spcBef>
-              <a:spcAft>
-                <a:spcPts val="0"/>
-              </a:spcAft>
-              <a:buNone/>
-            </a:pPr>
-            <a:endParaRPr/>
+            <a:endParaRPr dirty="0"/>
           </a:p>
         </p:txBody>
       </p:sp>
       <p:sp>
         <p:nvSpPr>
-          <p:cNvPr id="1174" name="Google Shape;1174;g3d412ffb079_0_61:notes"/>
-          <p:cNvSpPr txBox="1">
+          <p:cNvPr id="4" name="Slide Number Placeholder 3">
+            <a:extLst>
+              <a:ext uri="{FF2B5EF4-FFF2-40B4-BE49-F238E27FC236}">
+                <a16:creationId xmlns:a16="http://schemas.microsoft.com/office/drawing/2014/main" id="{7180F1B5-225B-F102-5CE0-B452385B029F}"/>
+              </a:ext>
+            </a:extLst>
+          </p:cNvPr>
+          <p:cNvSpPr>
             <a:spLocks noGrp="1"/>
           </p:cNvSpPr>
           <p:nvPr>
-            <p:ph type="sldNum" idx="12"/>
+            <p:ph type="sldNum" sz="quarter" idx="5"/>
           </p:nvPr>
         </p:nvSpPr>
-        <p:spPr>
-          <a:xfrm>
-            <a:off x="6905625" y="6513513"/>
-            <a:ext cx="5283300" cy="344400"/>
-          </a:xfrm>
-          <a:prstGeom prst="rect">
-            <a:avLst/>
-          </a:prstGeom>
-        </p:spPr>
-        <p:txBody>
-          <a:bodyPr spcFirstLastPara="1" wrap="square" lIns="91425" tIns="45700" rIns="91425" bIns="45700" anchor="b" anchorCtr="0">
-            <a:noAutofit/>
-          </a:bodyPr>
-          <a:lstStyle/>
-          <a:p>
-            <a:pPr marL="0" lvl="0" indent="0" algn="r" rtl="0">
-              <a:spcBef>
-                <a:spcPts val="0"/>
-              </a:spcBef>
-              <a:spcAft>
-                <a:spcPts val="0"/>
-              </a:spcAft>
-              <a:buClr>
-                <a:srgbClr val="000000"/>
-              </a:buClr>
-              <a:buSzPts val="1200"/>
-              <a:buFont typeface="Arial"/>
-              <a:buNone/>
-            </a:pPr>
-            <a:fld id="{00000000-1234-1234-1234-123412341234}" type="slidenum">
-              <a:rPr lang="en-US"/>
-              <a:t>9</a:t>
-            </a:fld>
-            <a:endParaRPr/>
-          </a:p>
-        </p:txBody>
+        <p:spPr/>
       </p:sp>
     </p:spTree>
     <p:extLst>
       <p:ext uri="{BB962C8B-B14F-4D97-AF65-F5344CB8AC3E}">
-        <p14:creationId xmlns:p14="http://schemas.microsoft.com/office/powerpoint/2010/main" val="1263641952"/>
+        <p14:creationId xmlns:p14="http://schemas.microsoft.com/office/powerpoint/2010/main" val="4206960517"/>
       </p:ext>
     </p:extLst>
   </p:cSld>
@@ -10706,6 +8736,498 @@
         <p:cNvPr id="1" name="">
           <a:extLst>
             <a:ext uri="{FF2B5EF4-FFF2-40B4-BE49-F238E27FC236}">
+              <a16:creationId xmlns:a16="http://schemas.microsoft.com/office/drawing/2014/main" id="{AC13EEA3-8169-4982-51FC-817A931E7C9A}"/>
+            </a:ext>
+          </a:extLst>
+        </p:cNvPr>
+        <p:cNvGrpSpPr/>
+        <p:nvPr/>
+      </p:nvGrpSpPr>
+      <p:grpSpPr>
+        <a:xfrm>
+          <a:off x="0" y="0"/>
+          <a:ext cx="0" cy="0"/>
+          <a:chOff x="0" y="0"/>
+          <a:chExt cx="0" cy="0"/>
+        </a:xfrm>
+      </p:grpSpPr>
+      <p:sp>
+        <p:nvSpPr>
+          <p:cNvPr id="9" name="Content Placeholder 2">
+            <a:extLst>
+              <a:ext uri="{FF2B5EF4-FFF2-40B4-BE49-F238E27FC236}">
+                <a16:creationId xmlns:a16="http://schemas.microsoft.com/office/drawing/2014/main" id="{7C8E35FC-00AC-E988-B8A6-6855EB330E41}"/>
+              </a:ext>
+            </a:extLst>
+          </p:cNvPr>
+          <p:cNvSpPr>
+            <a:spLocks noGrp="1"/>
+          </p:cNvSpPr>
+          <p:nvPr>
+            <p:ph idx="1"/>
+          </p:nvPr>
+        </p:nvSpPr>
+        <p:spPr>
+          <a:xfrm>
+            <a:off x="508000" y="897468"/>
+            <a:ext cx="11176000" cy="5063066"/>
+          </a:xfrm>
+        </p:spPr>
+        <p:txBody>
+          <a:bodyPr wrap="square"/>
+          <a:lstStyle/>
+          <a:p>
+            <a:r>
+              <a:rPr lang="en-US" b="1" dirty="0"/>
+              <a:t>BMI</a:t>
+            </a:r>
+            <a:r>
+              <a:rPr lang="ko-KR" altLang="en-US" b="1" dirty="0"/>
+              <a:t> </a:t>
+            </a:r>
+            <a:r>
+              <a:rPr lang="en-US" altLang="ko-KR" b="1" dirty="0"/>
+              <a:t>4</a:t>
+            </a:r>
+            <a:r>
+              <a:rPr lang="ko-KR" altLang="en-US" b="1" dirty="0"/>
+              <a:t>구간 내에서 </a:t>
+            </a:r>
+            <a:r>
+              <a:rPr lang="en-US" altLang="ko-KR" b="1" dirty="0"/>
+              <a:t>Low-SMI </a:t>
+            </a:r>
+            <a:r>
+              <a:rPr lang="ko-KR" altLang="en-US" b="1" dirty="0"/>
+              <a:t>그룹 </a:t>
+            </a:r>
+            <a:r>
+              <a:rPr lang="en-US" altLang="ko-KR" b="1" dirty="0"/>
+              <a:t>AEC </a:t>
+            </a:r>
+            <a:r>
+              <a:rPr lang="ko-KR" altLang="en-US" b="1" dirty="0"/>
+              <a:t>비교</a:t>
+            </a:r>
+            <a:endParaRPr lang="en-US" altLang="ko-KR" b="1" dirty="0"/>
+          </a:p>
+          <a:p>
+            <a:pPr lvl="1"/>
+            <a:r>
+              <a:rPr lang="en-US" dirty="0"/>
+              <a:t>Underweight, Obese </a:t>
+            </a:r>
+            <a:r>
+              <a:rPr lang="ko-KR" altLang="en-US" dirty="0"/>
+              <a:t>그룹은 </a:t>
+            </a:r>
+            <a:r>
+              <a:rPr lang="en-US" altLang="ko-KR" dirty="0"/>
+              <a:t>p&gt;0.05, Normal, Overweight </a:t>
+            </a:r>
+            <a:r>
+              <a:rPr lang="ko-KR" altLang="en-US" dirty="0"/>
+              <a:t>그룹은 </a:t>
+            </a:r>
+            <a:r>
+              <a:rPr lang="en-US" altLang="ko-KR" dirty="0"/>
+              <a:t>p&lt;0.05</a:t>
+            </a:r>
+            <a:endParaRPr dirty="0"/>
+          </a:p>
+        </p:txBody>
+      </p:sp>
+      <p:sp>
+        <p:nvSpPr>
+          <p:cNvPr id="2" name="Title 1">
+            <a:extLst>
+              <a:ext uri="{FF2B5EF4-FFF2-40B4-BE49-F238E27FC236}">
+                <a16:creationId xmlns:a16="http://schemas.microsoft.com/office/drawing/2014/main" id="{2E165D3D-CCFD-DA8C-3606-FB29A37CBE54}"/>
+              </a:ext>
+            </a:extLst>
+          </p:cNvPr>
+          <p:cNvSpPr>
+            <a:spLocks noGrp="1"/>
+          </p:cNvSpPr>
+          <p:nvPr>
+            <p:ph type="title"/>
+          </p:nvPr>
+        </p:nvSpPr>
+        <p:spPr>
+          <a:xfrm>
+            <a:off x="508000" y="365126"/>
+            <a:ext cx="11176000" cy="532342"/>
+          </a:xfrm>
+        </p:spPr>
+        <p:txBody>
+          <a:bodyPr anchor="ctr">
+            <a:normAutofit/>
+          </a:bodyPr>
+          <a:lstStyle/>
+          <a:p>
+            <a:r>
+              <a:t>Detailed progress</a:t>
+            </a:r>
+          </a:p>
+        </p:txBody>
+      </p:sp>
+      <p:sp>
+        <p:nvSpPr>
+          <p:cNvPr id="13" name="Slide Number Placeholder 3">
+            <a:extLst>
+              <a:ext uri="{FF2B5EF4-FFF2-40B4-BE49-F238E27FC236}">
+                <a16:creationId xmlns:a16="http://schemas.microsoft.com/office/drawing/2014/main" id="{9BCF46B7-9577-61C2-E953-33198623FDCF}"/>
+              </a:ext>
+            </a:extLst>
+          </p:cNvPr>
+          <p:cNvSpPr>
+            <a:spLocks noGrp="1"/>
+          </p:cNvSpPr>
+          <p:nvPr>
+            <p:ph type="sldNum" sz="quarter" idx="12"/>
+          </p:nvPr>
+        </p:nvSpPr>
+        <p:spPr>
+          <a:xfrm>
+            <a:off x="11404600" y="6517302"/>
+            <a:ext cx="558800" cy="321398"/>
+          </a:xfrm>
+        </p:spPr>
+        <p:txBody>
+          <a:bodyPr/>
+          <a:lstStyle/>
+          <a:p>
+            <a:pPr>
+              <a:spcAft>
+                <a:spcPts val="600"/>
+              </a:spcAft>
+            </a:pPr>
+            <a:fld id="{9F4AF89A-28FA-47FA-B28F-9A9C6913CB7A}" type="slidenum">
+              <a:rPr lang="ko-KR" altLang="en-US" smtClean="0"/>
+              <a:pPr>
+                <a:spcAft>
+                  <a:spcPts val="600"/>
+                </a:spcAft>
+              </a:pPr>
+              <a:t>10</a:t>
+            </a:fld>
+            <a:endParaRPr lang="ko-KR" altLang="en-US"/>
+          </a:p>
+        </p:txBody>
+      </p:sp>
+      <p:grpSp>
+        <p:nvGrpSpPr>
+          <p:cNvPr id="12" name="그룹 11">
+            <a:extLst>
+              <a:ext uri="{FF2B5EF4-FFF2-40B4-BE49-F238E27FC236}">
+                <a16:creationId xmlns:a16="http://schemas.microsoft.com/office/drawing/2014/main" id="{FCB22C96-967F-85DB-4C68-C0B6A72FF574}"/>
+              </a:ext>
+            </a:extLst>
+          </p:cNvPr>
+          <p:cNvGrpSpPr/>
+          <p:nvPr/>
+        </p:nvGrpSpPr>
+        <p:grpSpPr>
+          <a:xfrm>
+            <a:off x="126844" y="3289790"/>
+            <a:ext cx="11743642" cy="2093225"/>
+            <a:chOff x="126844" y="2632064"/>
+            <a:chExt cx="11743642" cy="2093225"/>
+          </a:xfrm>
+        </p:grpSpPr>
+        <p:pic>
+          <p:nvPicPr>
+            <p:cNvPr id="8" name="그림 7">
+              <a:extLst>
+                <a:ext uri="{FF2B5EF4-FFF2-40B4-BE49-F238E27FC236}">
+                  <a16:creationId xmlns:a16="http://schemas.microsoft.com/office/drawing/2014/main" id="{60589E0E-074B-5150-58EB-15A657E28175}"/>
+                </a:ext>
+              </a:extLst>
+            </p:cNvPr>
+            <p:cNvPicPr>
+              <a:picLocks noChangeAspect="1"/>
+            </p:cNvPicPr>
+            <p:nvPr/>
+          </p:nvPicPr>
+          <p:blipFill>
+            <a:blip r:embed="rId3"/>
+            <a:srcRect t="6512" b="46753"/>
+            <a:stretch>
+              <a:fillRect/>
+            </a:stretch>
+          </p:blipFill>
+          <p:spPr>
+            <a:xfrm>
+              <a:off x="126844" y="2632064"/>
+              <a:ext cx="5871821" cy="2092436"/>
+            </a:xfrm>
+            <a:prstGeom prst="rect">
+              <a:avLst/>
+            </a:prstGeom>
+            <a:noFill/>
+          </p:spPr>
+        </p:pic>
+        <p:pic>
+          <p:nvPicPr>
+            <p:cNvPr id="11" name="그림 10">
+              <a:extLst>
+                <a:ext uri="{FF2B5EF4-FFF2-40B4-BE49-F238E27FC236}">
+                  <a16:creationId xmlns:a16="http://schemas.microsoft.com/office/drawing/2014/main" id="{EA7113A2-EB7D-C978-C58B-A91E9B63BA18}"/>
+                </a:ext>
+              </a:extLst>
+            </p:cNvPr>
+            <p:cNvPicPr>
+              <a:picLocks noChangeAspect="1"/>
+            </p:cNvPicPr>
+            <p:nvPr/>
+          </p:nvPicPr>
+          <p:blipFill>
+            <a:blip r:embed="rId3"/>
+            <a:srcRect t="53248"/>
+            <a:stretch>
+              <a:fillRect/>
+            </a:stretch>
+          </p:blipFill>
+          <p:spPr>
+            <a:xfrm>
+              <a:off x="5998665" y="2632064"/>
+              <a:ext cx="5871821" cy="2093225"/>
+            </a:xfrm>
+            <a:prstGeom prst="rect">
+              <a:avLst/>
+            </a:prstGeom>
+            <a:noFill/>
+          </p:spPr>
+        </p:pic>
+      </p:grpSp>
+    </p:spTree>
+    <p:extLst>
+      <p:ext uri="{BB962C8B-B14F-4D97-AF65-F5344CB8AC3E}">
+        <p14:creationId xmlns:p14="http://schemas.microsoft.com/office/powerpoint/2010/main" val="2675931764"/>
+      </p:ext>
+    </p:extLst>
+  </p:cSld>
+  <p:clrMapOvr>
+    <a:masterClrMapping/>
+  </p:clrMapOvr>
+</p:sld>
+</file>
+
+<file path=ppt/slides/slide11.xml><?xml version="1.0" encoding="utf-8"?>
+<p:sld xmlns:a="http://schemas.openxmlformats.org/drawingml/2006/main" xmlns:r="http://schemas.openxmlformats.org/officeDocument/2006/relationships" xmlns:p="http://schemas.openxmlformats.org/presentationml/2006/main">
+  <p:cSld>
+    <p:spTree>
+      <p:nvGrpSpPr>
+        <p:cNvPr id="1" name="">
+          <a:extLst>
+            <a:ext uri="{FF2B5EF4-FFF2-40B4-BE49-F238E27FC236}">
+              <a16:creationId xmlns:a16="http://schemas.microsoft.com/office/drawing/2014/main" id="{E59226F4-B148-DB82-FA51-148222F26EE8}"/>
+            </a:ext>
+          </a:extLst>
+        </p:cNvPr>
+        <p:cNvGrpSpPr/>
+        <p:nvPr/>
+      </p:nvGrpSpPr>
+      <p:grpSpPr>
+        <a:xfrm>
+          <a:off x="0" y="0"/>
+          <a:ext cx="0" cy="0"/>
+          <a:chOff x="0" y="0"/>
+          <a:chExt cx="0" cy="0"/>
+        </a:xfrm>
+      </p:grpSpPr>
+      <p:sp>
+        <p:nvSpPr>
+          <p:cNvPr id="2" name="Title 1">
+            <a:extLst>
+              <a:ext uri="{FF2B5EF4-FFF2-40B4-BE49-F238E27FC236}">
+                <a16:creationId xmlns:a16="http://schemas.microsoft.com/office/drawing/2014/main" id="{F40E46A9-C734-6449-1C3E-8E16175EBE54}"/>
+              </a:ext>
+            </a:extLst>
+          </p:cNvPr>
+          <p:cNvSpPr>
+            <a:spLocks noGrp="1"/>
+          </p:cNvSpPr>
+          <p:nvPr>
+            <p:ph type="title"/>
+          </p:nvPr>
+        </p:nvSpPr>
+        <p:spPr/>
+        <p:txBody>
+          <a:bodyPr/>
+          <a:lstStyle/>
+          <a:p>
+            <a:r>
+              <a:rPr lang="en-US" altLang="ko-KR" dirty="0"/>
+              <a:t>Next Plans</a:t>
+            </a:r>
+            <a:endParaRPr dirty="0"/>
+          </a:p>
+        </p:txBody>
+      </p:sp>
+      <p:sp>
+        <p:nvSpPr>
+          <p:cNvPr id="3" name="Content Placeholder 2">
+            <a:extLst>
+              <a:ext uri="{FF2B5EF4-FFF2-40B4-BE49-F238E27FC236}">
+                <a16:creationId xmlns:a16="http://schemas.microsoft.com/office/drawing/2014/main" id="{877D2408-F981-AD7F-0BC2-B4589BD31CF4}"/>
+              </a:ext>
+            </a:extLst>
+          </p:cNvPr>
+          <p:cNvSpPr>
+            <a:spLocks noGrp="1"/>
+          </p:cNvSpPr>
+          <p:nvPr>
+            <p:ph idx="1"/>
+          </p:nvPr>
+        </p:nvSpPr>
+        <p:spPr/>
+        <p:txBody>
+          <a:bodyPr>
+            <a:normAutofit/>
+          </a:bodyPr>
+          <a:lstStyle/>
+          <a:p>
+            <a:pPr>
+              <a:lnSpc>
+                <a:spcPct val="150000"/>
+              </a:lnSpc>
+            </a:pPr>
+            <a:r>
+              <a:rPr lang="en-US" b="1" dirty="0"/>
+              <a:t>AEC-128 raw curve만으로는 TP/FP 구분 불가 (코호트 간 결과 불일치) → 새로운 접근 필요</a:t>
+            </a:r>
+            <a:endParaRPr lang="en-US" altLang="ko-KR" b="1" dirty="0"/>
+          </a:p>
+          <a:p>
+            <a:pPr>
+              <a:lnSpc>
+                <a:spcPct val="150000"/>
+              </a:lnSpc>
+            </a:pPr>
+            <a:r>
+              <a:rPr lang="en-US" b="1" dirty="0"/>
+              <a:t>Clinic Data</a:t>
+            </a:r>
+            <a:r>
+              <a:rPr lang="ko-KR" altLang="en-US" b="1" dirty="0"/>
+              <a:t>와 </a:t>
+            </a:r>
+            <a:r>
+              <a:rPr lang="en-US" altLang="ko-KR" b="1" dirty="0"/>
+              <a:t>AEC Feature</a:t>
+            </a:r>
+            <a:r>
+              <a:rPr lang="ko-KR" altLang="en-US" b="1" dirty="0"/>
+              <a:t>의 </a:t>
+            </a:r>
+            <a:r>
+              <a:rPr lang="en-US" altLang="ko-KR" b="1" dirty="0"/>
+              <a:t>Multimodal Architecture </a:t>
+            </a:r>
+            <a:r>
+              <a:rPr lang="ko-KR" altLang="en-US" b="1" dirty="0"/>
+              <a:t>설계</a:t>
+            </a:r>
+            <a:endParaRPr lang="en-US" altLang="ko-KR" b="1" dirty="0"/>
+          </a:p>
+          <a:p>
+            <a:pPr>
+              <a:lnSpc>
+                <a:spcPct val="150000"/>
+              </a:lnSpc>
+            </a:pPr>
+            <a:r>
+              <a:rPr lang="en-US" b="1" dirty="0"/>
+              <a:t>AUC </a:t>
+            </a:r>
+            <a:r>
+              <a:rPr lang="ko-KR" altLang="en-US" b="1" dirty="0"/>
+              <a:t>개선 방안 연구</a:t>
+            </a:r>
+            <a:endParaRPr b="1" dirty="0"/>
+          </a:p>
+        </p:txBody>
+      </p:sp>
+    </p:spTree>
+    <p:extLst>
+      <p:ext uri="{BB962C8B-B14F-4D97-AF65-F5344CB8AC3E}">
+        <p14:creationId xmlns:p14="http://schemas.microsoft.com/office/powerpoint/2010/main" val="2022533225"/>
+      </p:ext>
+    </p:extLst>
+  </p:cSld>
+  <p:clrMapOvr>
+    <a:masterClrMapping/>
+  </p:clrMapOvr>
+</p:sld>
+</file>
+
+<file path=ppt/slides/slide12.xml><?xml version="1.0" encoding="utf-8"?>
+<p:sld xmlns:a="http://schemas.openxmlformats.org/drawingml/2006/main" xmlns:r="http://schemas.openxmlformats.org/officeDocument/2006/relationships" xmlns:p="http://schemas.openxmlformats.org/presentationml/2006/main">
+  <p:cSld>
+    <p:spTree>
+      <p:nvGrpSpPr>
+        <p:cNvPr id="1" name="Shape 1175"/>
+        <p:cNvGrpSpPr/>
+        <p:nvPr/>
+      </p:nvGrpSpPr>
+      <p:grpSpPr>
+        <a:xfrm>
+          <a:off x="0" y="0"/>
+          <a:ext cx="0" cy="0"/>
+          <a:chOff x="0" y="0"/>
+          <a:chExt cx="0" cy="0"/>
+        </a:xfrm>
+      </p:grpSpPr>
+      <p:pic>
+        <p:nvPicPr>
+          <p:cNvPr id="1176" name="Google Shape;1176;g3d412ffb079_0_61"/>
+          <p:cNvPicPr preferRelativeResize="0"/>
+          <p:nvPr/>
+        </p:nvPicPr>
+        <p:blipFill>
+          <a:blip r:embed="rId3">
+            <a:alphaModFix/>
+          </a:blip>
+          <a:stretch>
+            <a:fillRect/>
+          </a:stretch>
+        </p:blipFill>
+        <p:spPr>
+          <a:xfrm>
+            <a:off x="0" y="0"/>
+            <a:ext cx="12192000" cy="6858000"/>
+          </a:xfrm>
+          <a:prstGeom prst="rect">
+            <a:avLst/>
+          </a:prstGeom>
+          <a:noFill/>
+          <a:ln>
+            <a:noFill/>
+          </a:ln>
+        </p:spPr>
+      </p:pic>
+    </p:spTree>
+    <p:extLst>
+      <p:ext uri="{BB962C8B-B14F-4D97-AF65-F5344CB8AC3E}">
+        <p14:creationId xmlns:p14="http://schemas.microsoft.com/office/powerpoint/2010/main" val="1579866099"/>
+      </p:ext>
+    </p:extLst>
+  </p:cSld>
+  <p:clrMapOvr>
+    <a:masterClrMapping/>
+  </p:clrMapOvr>
+</p:sld>
+</file>
+
+<file path=ppt/slides/slide13.xml><?xml version="1.0" encoding="utf-8"?>
+<p:sld xmlns:a="http://schemas.openxmlformats.org/drawingml/2006/main" xmlns:r="http://schemas.openxmlformats.org/officeDocument/2006/relationships" xmlns:p="http://schemas.openxmlformats.org/presentationml/2006/main">
+  <p:cSld>
+    <p:spTree>
+      <p:nvGrpSpPr>
+        <p:cNvPr id="1" name="">
+          <a:extLst>
+            <a:ext uri="{FF2B5EF4-FFF2-40B4-BE49-F238E27FC236}">
               <a16:creationId xmlns:a16="http://schemas.microsoft.com/office/drawing/2014/main" id="{10012059-9B33-147B-1677-BDD8E142BC46}"/>
             </a:ext>
           </a:extLst>
@@ -10988,7 +9510,7 @@
 </p:sld>
 </file>
 
-<file path=ppt/slides/slide11.xml><?xml version="1.0" encoding="utf-8"?>
+<file path=ppt/slides/slide14.xml><?xml version="1.0" encoding="utf-8"?>
 <p:sld xmlns:a="http://schemas.openxmlformats.org/drawingml/2006/main" xmlns:r="http://schemas.openxmlformats.org/officeDocument/2006/relationships" xmlns:p="http://schemas.openxmlformats.org/presentationml/2006/main">
   <p:cSld>
     <p:spTree>
@@ -11460,7 +9982,7 @@
 </p:sld>
 </file>
 
-<file path=ppt/slides/slide12.xml><?xml version="1.0" encoding="utf-8"?>
+<file path=ppt/slides/slide15.xml><?xml version="1.0" encoding="utf-8"?>
 <p:sld xmlns:a="http://schemas.openxmlformats.org/drawingml/2006/main" xmlns:r="http://schemas.openxmlformats.org/officeDocument/2006/relationships" xmlns:p="http://schemas.openxmlformats.org/presentationml/2006/main">
   <p:cSld>
     <p:spTree>
@@ -11574,7 +10096,7 @@
 </p:sld>
 </file>
 
-<file path=ppt/slides/slide13.xml><?xml version="1.0" encoding="utf-8"?>
+<file path=ppt/slides/slide16.xml><?xml version="1.0" encoding="utf-8"?>
 <p:sld xmlns:a="http://schemas.openxmlformats.org/drawingml/2006/main" xmlns:r="http://schemas.openxmlformats.org/officeDocument/2006/relationships" xmlns:p="http://schemas.openxmlformats.org/presentationml/2006/main">
   <p:cSld>
     <p:spTree>
@@ -11688,7 +10210,7 @@
 </p:sld>
 </file>
 
-<file path=ppt/slides/slide14.xml><?xml version="1.0" encoding="utf-8"?>
+<file path=ppt/slides/slide17.xml><?xml version="1.0" encoding="utf-8"?>
 <p:sld xmlns:a="http://schemas.openxmlformats.org/drawingml/2006/main" xmlns:r="http://schemas.openxmlformats.org/officeDocument/2006/relationships" xmlns:p="http://schemas.openxmlformats.org/presentationml/2006/main">
   <p:cSld>
     <p:spTree>
@@ -12144,7 +10666,7 @@
 </p:sld>
 </file>
 
-<file path=ppt/slides/slide15.xml><?xml version="1.0" encoding="utf-8"?>
+<file path=ppt/slides/slide18.xml><?xml version="1.0" encoding="utf-8"?>
 <p:sld xmlns:a="http://schemas.openxmlformats.org/drawingml/2006/main" xmlns:r="http://schemas.openxmlformats.org/officeDocument/2006/relationships" xmlns:p="http://schemas.openxmlformats.org/presentationml/2006/main">
   <p:cSld>
     <p:spTree>
@@ -12258,7 +10780,7 @@
 </p:sld>
 </file>
 
-<file path=ppt/slides/slide16.xml><?xml version="1.0" encoding="utf-8"?>
+<file path=ppt/slides/slide19.xml><?xml version="1.0" encoding="utf-8"?>
 <p:sld xmlns:a="http://schemas.openxmlformats.org/drawingml/2006/main" xmlns:r="http://schemas.openxmlformats.org/officeDocument/2006/relationships" xmlns:p="http://schemas.openxmlformats.org/presentationml/2006/main">
   <p:cSld>
     <p:spTree>
@@ -12372,7 +10894,210 @@
 </p:sld>
 </file>
 
-<file path=ppt/slides/slide17.xml><?xml version="1.0" encoding="utf-8"?>
+<file path=ppt/slides/slide2.xml><?xml version="1.0" encoding="utf-8"?>
+<p:sld xmlns:a="http://schemas.openxmlformats.org/drawingml/2006/main" xmlns:r="http://schemas.openxmlformats.org/officeDocument/2006/relationships" xmlns:p="http://schemas.openxmlformats.org/presentationml/2006/main">
+  <p:cSld>
+    <p:spTree>
+      <p:nvGrpSpPr>
+        <p:cNvPr id="1" name="">
+          <a:extLst>
+            <a:ext uri="{FF2B5EF4-FFF2-40B4-BE49-F238E27FC236}">
+              <a16:creationId xmlns:a16="http://schemas.microsoft.com/office/drawing/2014/main" id="{482226C0-E69E-C194-4D15-4398B9723FE9}"/>
+            </a:ext>
+          </a:extLst>
+        </p:cNvPr>
+        <p:cNvGrpSpPr/>
+        <p:nvPr/>
+      </p:nvGrpSpPr>
+      <p:grpSpPr>
+        <a:xfrm>
+          <a:off x="0" y="0"/>
+          <a:ext cx="0" cy="0"/>
+          <a:chOff x="0" y="0"/>
+          <a:chExt cx="0" cy="0"/>
+        </a:xfrm>
+      </p:grpSpPr>
+      <p:sp>
+        <p:nvSpPr>
+          <p:cNvPr id="2" name="Title 1">
+            <a:extLst>
+              <a:ext uri="{FF2B5EF4-FFF2-40B4-BE49-F238E27FC236}">
+                <a16:creationId xmlns:a16="http://schemas.microsoft.com/office/drawing/2014/main" id="{0C9B3FC9-B52B-FBE4-B31A-9F4816FDE012}"/>
+              </a:ext>
+            </a:extLst>
+          </p:cNvPr>
+          <p:cNvSpPr>
+            <a:spLocks noGrp="1"/>
+          </p:cNvSpPr>
+          <p:nvPr>
+            <p:ph type="title"/>
+          </p:nvPr>
+        </p:nvSpPr>
+        <p:spPr/>
+        <p:txBody>
+          <a:bodyPr/>
+          <a:lstStyle/>
+          <a:p>
+            <a:r>
+              <a:rPr lang="en-US" altLang="ko-KR" dirty="0"/>
+              <a:t>Detailed progress</a:t>
+            </a:r>
+            <a:endParaRPr dirty="0"/>
+          </a:p>
+        </p:txBody>
+      </p:sp>
+      <p:sp>
+        <p:nvSpPr>
+          <p:cNvPr id="5" name="내용 개체 틀 3">
+            <a:extLst>
+              <a:ext uri="{FF2B5EF4-FFF2-40B4-BE49-F238E27FC236}">
+                <a16:creationId xmlns:a16="http://schemas.microsoft.com/office/drawing/2014/main" id="{1B16767E-149D-831B-AF7B-A6F405D5B884}"/>
+              </a:ext>
+            </a:extLst>
+          </p:cNvPr>
+          <p:cNvSpPr>
+            <a:spLocks noGrp="1"/>
+          </p:cNvSpPr>
+          <p:nvPr>
+            <p:ph idx="1"/>
+          </p:nvPr>
+        </p:nvSpPr>
+        <p:spPr>
+          <a:xfrm>
+            <a:off x="507999" y="901700"/>
+            <a:ext cx="11176000" cy="1905000"/>
+          </a:xfrm>
+        </p:spPr>
+        <p:txBody>
+          <a:bodyPr>
+            <a:normAutofit fontScale="92500" lnSpcReduction="20000"/>
+          </a:bodyPr>
+          <a:lstStyle/>
+          <a:p>
+            <a:r>
+              <a:rPr lang="en-US" altLang="ko-KR" dirty="0"/>
+              <a:t>Clinic 4</a:t>
+            </a:r>
+            <a:r>
+              <a:rPr lang="ko-KR" altLang="en-US" dirty="0"/>
+              <a:t>개 변수</a:t>
+            </a:r>
+            <a:r>
+              <a:rPr lang="en-US" altLang="ko-KR" dirty="0"/>
+              <a:t>(Sex, Age, Height, Weight)</a:t>
+            </a:r>
+            <a:r>
+              <a:rPr lang="ko-KR" altLang="en-US" dirty="0"/>
+              <a:t>로 성별별 </a:t>
+            </a:r>
+            <a:r>
+              <a:rPr lang="en-US" altLang="ko-KR" dirty="0"/>
+              <a:t>low-SMI </a:t>
+            </a:r>
+            <a:r>
+              <a:rPr lang="ko-KR" altLang="en-US" dirty="0"/>
+              <a:t>분류 </a:t>
+            </a:r>
+            <a:r>
+              <a:rPr lang="en-US" altLang="ko-KR" dirty="0"/>
+              <a:t>(M: </a:t>
+            </a:r>
+            <a:r>
+              <a:rPr lang="en-US" altLang="ko-KR" dirty="0" err="1"/>
+              <a:t>smi</a:t>
+            </a:r>
+            <a:r>
+              <a:rPr lang="en-US" altLang="ko-KR" dirty="0"/>
+              <a:t> &lt; 45.4, F: </a:t>
+            </a:r>
+            <a:r>
+              <a:rPr lang="en-US" altLang="ko-KR" dirty="0" err="1"/>
+              <a:t>smi</a:t>
+            </a:r>
+            <a:r>
+              <a:rPr lang="en-US" altLang="ko-KR" dirty="0"/>
+              <a:t> &lt; 34.4)</a:t>
+            </a:r>
+          </a:p>
+          <a:p>
+            <a:r>
+              <a:rPr lang="en-US" altLang="ko-KR" dirty="0"/>
+              <a:t>AUC internal 0.828 / external 0.835</a:t>
+            </a:r>
+          </a:p>
+          <a:p>
+            <a:r>
+              <a:rPr lang="en-US" altLang="ko-KR" dirty="0"/>
+              <a:t>Sensitivity 90%</a:t>
+            </a:r>
+            <a:r>
+              <a:rPr lang="ko-KR" altLang="en-US" dirty="0"/>
+              <a:t>인</a:t>
+            </a:r>
+            <a:r>
+              <a:rPr lang="en-US" altLang="ko-KR" dirty="0"/>
+              <a:t> </a:t>
+            </a:r>
+            <a:r>
+              <a:rPr lang="ko-KR" altLang="en-US" dirty="0"/>
+              <a:t>컷오프로 </a:t>
+            </a:r>
+            <a:r>
+              <a:rPr lang="en-US" altLang="ko-KR" dirty="0"/>
+              <a:t>Confusion Matrix </a:t>
+            </a:r>
+            <a:r>
+              <a:rPr lang="ko-KR" altLang="en-US" dirty="0"/>
+              <a:t>확인</a:t>
+            </a:r>
+            <a:endParaRPr lang="en-US" altLang="ko-KR" dirty="0"/>
+          </a:p>
+        </p:txBody>
+      </p:sp>
+      <p:pic>
+        <p:nvPicPr>
+          <p:cNvPr id="6" name="그림 5">
+            <a:extLst>
+              <a:ext uri="{FF2B5EF4-FFF2-40B4-BE49-F238E27FC236}">
+                <a16:creationId xmlns:a16="http://schemas.microsoft.com/office/drawing/2014/main" id="{ABC264B1-4288-3E34-F029-AF4C93DB48B4}"/>
+              </a:ext>
+            </a:extLst>
+          </p:cNvPr>
+          <p:cNvPicPr>
+            <a:picLocks noChangeAspect="1"/>
+          </p:cNvPicPr>
+          <p:nvPr/>
+        </p:nvPicPr>
+        <p:blipFill>
+          <a:blip r:embed="rId3"/>
+          <a:stretch>
+            <a:fillRect/>
+          </a:stretch>
+        </p:blipFill>
+        <p:spPr>
+          <a:xfrm>
+            <a:off x="2541298" y="2857500"/>
+            <a:ext cx="7109401" cy="3416300"/>
+          </a:xfrm>
+          <a:prstGeom prst="rect">
+            <a:avLst/>
+          </a:prstGeom>
+        </p:spPr>
+      </p:pic>
+    </p:spTree>
+    <p:extLst>
+      <p:ext uri="{BB962C8B-B14F-4D97-AF65-F5344CB8AC3E}">
+        <p14:creationId xmlns:p14="http://schemas.microsoft.com/office/powerpoint/2010/main" val="267915398"/>
+      </p:ext>
+    </p:extLst>
+  </p:cSld>
+  <p:clrMapOvr>
+    <a:masterClrMapping/>
+  </p:clrMapOvr>
+</p:sld>
+</file>
+
+<file path=ppt/slides/slide20.xml><?xml version="1.0" encoding="utf-8"?>
 <p:sld xmlns:a="http://schemas.openxmlformats.org/drawingml/2006/main" xmlns:r="http://schemas.openxmlformats.org/officeDocument/2006/relationships" xmlns:p="http://schemas.openxmlformats.org/presentationml/2006/main">
   <p:cSld>
     <p:spTree>
@@ -14400,209 +13125,6 @@
     <p:extLst>
       <p:ext uri="{BB962C8B-B14F-4D97-AF65-F5344CB8AC3E}">
         <p14:creationId xmlns:p14="http://schemas.microsoft.com/office/powerpoint/2010/main" val="4012494835"/>
-      </p:ext>
-    </p:extLst>
-  </p:cSld>
-  <p:clrMapOvr>
-    <a:masterClrMapping/>
-  </p:clrMapOvr>
-</p:sld>
-</file>
-
-<file path=ppt/slides/slide2.xml><?xml version="1.0" encoding="utf-8"?>
-<p:sld xmlns:a="http://schemas.openxmlformats.org/drawingml/2006/main" xmlns:r="http://schemas.openxmlformats.org/officeDocument/2006/relationships" xmlns:p="http://schemas.openxmlformats.org/presentationml/2006/main">
-  <p:cSld>
-    <p:spTree>
-      <p:nvGrpSpPr>
-        <p:cNvPr id="1" name="">
-          <a:extLst>
-            <a:ext uri="{FF2B5EF4-FFF2-40B4-BE49-F238E27FC236}">
-              <a16:creationId xmlns:a16="http://schemas.microsoft.com/office/drawing/2014/main" id="{482226C0-E69E-C194-4D15-4398B9723FE9}"/>
-            </a:ext>
-          </a:extLst>
-        </p:cNvPr>
-        <p:cNvGrpSpPr/>
-        <p:nvPr/>
-      </p:nvGrpSpPr>
-      <p:grpSpPr>
-        <a:xfrm>
-          <a:off x="0" y="0"/>
-          <a:ext cx="0" cy="0"/>
-          <a:chOff x="0" y="0"/>
-          <a:chExt cx="0" cy="0"/>
-        </a:xfrm>
-      </p:grpSpPr>
-      <p:sp>
-        <p:nvSpPr>
-          <p:cNvPr id="2" name="Title 1">
-            <a:extLst>
-              <a:ext uri="{FF2B5EF4-FFF2-40B4-BE49-F238E27FC236}">
-                <a16:creationId xmlns:a16="http://schemas.microsoft.com/office/drawing/2014/main" id="{0C9B3FC9-B52B-FBE4-B31A-9F4816FDE012}"/>
-              </a:ext>
-            </a:extLst>
-          </p:cNvPr>
-          <p:cNvSpPr>
-            <a:spLocks noGrp="1"/>
-          </p:cNvSpPr>
-          <p:nvPr>
-            <p:ph type="title"/>
-          </p:nvPr>
-        </p:nvSpPr>
-        <p:spPr/>
-        <p:txBody>
-          <a:bodyPr/>
-          <a:lstStyle/>
-          <a:p>
-            <a:r>
-              <a:rPr lang="en-US" altLang="ko-KR" dirty="0"/>
-              <a:t>Detailed progress</a:t>
-            </a:r>
-            <a:endParaRPr dirty="0"/>
-          </a:p>
-        </p:txBody>
-      </p:sp>
-      <p:sp>
-        <p:nvSpPr>
-          <p:cNvPr id="5" name="내용 개체 틀 3">
-            <a:extLst>
-              <a:ext uri="{FF2B5EF4-FFF2-40B4-BE49-F238E27FC236}">
-                <a16:creationId xmlns:a16="http://schemas.microsoft.com/office/drawing/2014/main" id="{1B16767E-149D-831B-AF7B-A6F405D5B884}"/>
-              </a:ext>
-            </a:extLst>
-          </p:cNvPr>
-          <p:cNvSpPr>
-            <a:spLocks noGrp="1"/>
-          </p:cNvSpPr>
-          <p:nvPr>
-            <p:ph idx="1"/>
-          </p:nvPr>
-        </p:nvSpPr>
-        <p:spPr>
-          <a:xfrm>
-            <a:off x="507999" y="901700"/>
-            <a:ext cx="11176000" cy="1905000"/>
-          </a:xfrm>
-        </p:spPr>
-        <p:txBody>
-          <a:bodyPr>
-            <a:normAutofit fontScale="92500" lnSpcReduction="20000"/>
-          </a:bodyPr>
-          <a:lstStyle/>
-          <a:p>
-            <a:r>
-              <a:rPr lang="en-US" altLang="ko-KR" dirty="0"/>
-              <a:t>Clinic 4</a:t>
-            </a:r>
-            <a:r>
-              <a:rPr lang="ko-KR" altLang="en-US" dirty="0"/>
-              <a:t>개 변수</a:t>
-            </a:r>
-            <a:r>
-              <a:rPr lang="en-US" altLang="ko-KR" dirty="0"/>
-              <a:t>(Sex, Age, Height, Weight)</a:t>
-            </a:r>
-            <a:r>
-              <a:rPr lang="ko-KR" altLang="en-US" dirty="0"/>
-              <a:t>로 성별별 </a:t>
-            </a:r>
-            <a:r>
-              <a:rPr lang="en-US" altLang="ko-KR" dirty="0"/>
-              <a:t>low-SMI </a:t>
-            </a:r>
-            <a:r>
-              <a:rPr lang="ko-KR" altLang="en-US" dirty="0"/>
-              <a:t>분류 </a:t>
-            </a:r>
-            <a:r>
-              <a:rPr lang="en-US" altLang="ko-KR" dirty="0"/>
-              <a:t>(M: </a:t>
-            </a:r>
-            <a:r>
-              <a:rPr lang="en-US" altLang="ko-KR" dirty="0" err="1"/>
-              <a:t>smi</a:t>
-            </a:r>
-            <a:r>
-              <a:rPr lang="en-US" altLang="ko-KR" dirty="0"/>
-              <a:t> &lt; 45.4, F: </a:t>
-            </a:r>
-            <a:r>
-              <a:rPr lang="en-US" altLang="ko-KR" dirty="0" err="1"/>
-              <a:t>smi</a:t>
-            </a:r>
-            <a:r>
-              <a:rPr lang="en-US" altLang="ko-KR" dirty="0"/>
-              <a:t> &lt; 34.4)</a:t>
-            </a:r>
-          </a:p>
-          <a:p>
-            <a:r>
-              <a:rPr lang="en-US" altLang="ko-KR" dirty="0"/>
-              <a:t>AUC internal 0.828 / external 0.835</a:t>
-            </a:r>
-          </a:p>
-          <a:p>
-            <a:r>
-              <a:rPr lang="en-US" altLang="ko-KR" dirty="0"/>
-              <a:t>Sensitivity 90%</a:t>
-            </a:r>
-            <a:r>
-              <a:rPr lang="ko-KR" altLang="en-US" dirty="0"/>
-              <a:t>인</a:t>
-            </a:r>
-            <a:r>
-              <a:rPr lang="en-US" altLang="ko-KR" dirty="0"/>
-              <a:t> </a:t>
-            </a:r>
-            <a:r>
-              <a:rPr lang="ko-KR" altLang="en-US" dirty="0"/>
-              <a:t>컷오프로 </a:t>
-            </a:r>
-            <a:r>
-              <a:rPr lang="en-US" altLang="ko-KR" dirty="0"/>
-              <a:t>Confusion Matrix </a:t>
-            </a:r>
-            <a:r>
-              <a:rPr lang="ko-KR" altLang="en-US" dirty="0"/>
-              <a:t>확인</a:t>
-            </a:r>
-            <a:endParaRPr lang="en-US" altLang="ko-KR" dirty="0"/>
-          </a:p>
-        </p:txBody>
-      </p:sp>
-      <p:pic>
-        <p:nvPicPr>
-          <p:cNvPr id="6" name="그림 5">
-            <a:extLst>
-              <a:ext uri="{FF2B5EF4-FFF2-40B4-BE49-F238E27FC236}">
-                <a16:creationId xmlns:a16="http://schemas.microsoft.com/office/drawing/2014/main" id="{ABC264B1-4288-3E34-F029-AF4C93DB48B4}"/>
-              </a:ext>
-            </a:extLst>
-          </p:cNvPr>
-          <p:cNvPicPr>
-            <a:picLocks noChangeAspect="1"/>
-          </p:cNvPicPr>
-          <p:nvPr/>
-        </p:nvPicPr>
-        <p:blipFill>
-          <a:blip r:embed="rId3"/>
-          <a:stretch>
-            <a:fillRect/>
-          </a:stretch>
-        </p:blipFill>
-        <p:spPr>
-          <a:xfrm>
-            <a:off x="2541298" y="2857500"/>
-            <a:ext cx="7109401" cy="3416300"/>
-          </a:xfrm>
-          <a:prstGeom prst="rect">
-            <a:avLst/>
-          </a:prstGeom>
-        </p:spPr>
-      </p:pic>
-    </p:spTree>
-    <p:extLst>
-      <p:ext uri="{BB962C8B-B14F-4D97-AF65-F5344CB8AC3E}">
-        <p14:creationId xmlns:p14="http://schemas.microsoft.com/office/powerpoint/2010/main" val="267915398"/>
       </p:ext>
     </p:extLst>
   </p:cSld>
@@ -18815,8 +17337,16 @@
           <a:lstStyle/>
           <a:p>
             <a:r>
-              <a:rPr b="1"/>
-              <a:t>Stage-1 TP vs FP AEC-128 비교 (Propensity-matched)</a:t>
+              <a:rPr b="1" dirty="0"/>
+              <a:t>Stage-1 TP vs FP AEC-128 </a:t>
+            </a:r>
+            <a:r>
+              <a:rPr b="1" dirty="0" err="1"/>
+              <a:t>비교</a:t>
+            </a:r>
+            <a:r>
+              <a:rPr b="1" dirty="0"/>
+              <a:t> (Propensity-matched)</a:t>
             </a:r>
           </a:p>
         </p:txBody>
@@ -18837,7 +17367,7 @@
         <p:cNvPr id="1" name="">
           <a:extLst>
             <a:ext uri="{FF2B5EF4-FFF2-40B4-BE49-F238E27FC236}">
-              <a16:creationId xmlns:a16="http://schemas.microsoft.com/office/drawing/2014/main" id="{E59226F4-B148-DB82-FA51-148222F26EE8}"/>
+              <a16:creationId xmlns:a16="http://schemas.microsoft.com/office/drawing/2014/main" id="{2FAB1490-7C63-959D-C44A-B14C6162527E}"/>
             </a:ext>
           </a:extLst>
         </p:cNvPr>
@@ -18857,7 +17387,7 @@
           <p:cNvPr id="2" name="Title 1">
             <a:extLst>
               <a:ext uri="{FF2B5EF4-FFF2-40B4-BE49-F238E27FC236}">
-                <a16:creationId xmlns:a16="http://schemas.microsoft.com/office/drawing/2014/main" id="{F40E46A9-C734-6449-1C3E-8E16175EBE54}"/>
+                <a16:creationId xmlns:a16="http://schemas.microsoft.com/office/drawing/2014/main" id="{79235B60-929D-E7CF-E3FC-A08935602A40}"/>
               </a:ext>
             </a:extLst>
           </p:cNvPr>
@@ -18874,10 +17404,8 @@
           <a:lstStyle/>
           <a:p>
             <a:r>
-              <a:rPr lang="en-US" altLang="ko-KR" dirty="0"/>
-              <a:t>Next Plans</a:t>
-            </a:r>
-            <a:endParaRPr dirty="0"/>
+              <a:t>Detailed progress</a:t>
+            </a:r>
           </a:p>
         </p:txBody>
       </p:sp>
@@ -18886,7 +17414,7 @@
           <p:cNvPr id="3" name="Content Placeholder 2">
             <a:extLst>
               <a:ext uri="{FF2B5EF4-FFF2-40B4-BE49-F238E27FC236}">
-                <a16:creationId xmlns:a16="http://schemas.microsoft.com/office/drawing/2014/main" id="{877D2408-F981-AD7F-0BC2-B4589BD31CF4}"/>
+                <a16:creationId xmlns:a16="http://schemas.microsoft.com/office/drawing/2014/main" id="{F2E6BDB9-CAAF-31F7-C32C-365F7025BEB8}"/>
               </a:ext>
             </a:extLst>
           </p:cNvPr>
@@ -18899,76 +17427,119 @@
         </p:nvSpPr>
         <p:spPr/>
         <p:txBody>
-          <a:bodyPr>
-            <a:normAutofit/>
-          </a:bodyPr>
+          <a:bodyPr wrap="square"/>
           <a:lstStyle/>
           <a:p>
-            <a:pPr>
-              <a:lnSpc>
-                <a:spcPct val="150000"/>
-              </a:lnSpc>
-            </a:pPr>
+            <a:r>
+              <a:rPr b="1" dirty="0"/>
+              <a:t>Stage-1 TP vs FP AEC-128 </a:t>
+            </a:r>
+            <a:r>
+              <a:rPr b="1" dirty="0" err="1"/>
+              <a:t>비교</a:t>
+            </a:r>
+            <a:r>
+              <a:rPr b="1" dirty="0"/>
+              <a:t> (</a:t>
+            </a:r>
             <a:r>
               <a:rPr lang="en-US" b="1" dirty="0"/>
-              <a:t>AEC-128 raw curve만으로는 TP/FP 구분 불가 (코호트 간 결과 불일치) → 새로운 접근 필요</a:t>
-            </a:r>
-            <a:endParaRPr lang="en-US" altLang="ko-KR" b="1" dirty="0"/>
-          </a:p>
-          <a:p>
-            <a:pPr>
-              <a:lnSpc>
-                <a:spcPct val="150000"/>
-              </a:lnSpc>
-            </a:pPr>
-            <a:r>
-              <a:rPr lang="en-US" b="1" dirty="0"/>
-              <a:t>Clinic Data</a:t>
-            </a:r>
-            <a:r>
-              <a:rPr lang="ko-KR" altLang="en-US" b="1" dirty="0"/>
-              <a:t>와 </a:t>
-            </a:r>
-            <a:r>
-              <a:rPr lang="en-US" altLang="ko-KR" b="1" dirty="0"/>
-              <a:t>AEC Feature</a:t>
-            </a:r>
-            <a:r>
-              <a:rPr lang="ko-KR" altLang="en-US" b="1" dirty="0"/>
-              <a:t>의 </a:t>
-            </a:r>
-            <a:r>
-              <a:rPr lang="en-US" altLang="ko-KR" b="1" dirty="0"/>
-              <a:t>Multimodal Architecture </a:t>
-            </a:r>
-            <a:r>
-              <a:rPr lang="ko-KR" altLang="en-US" b="1" dirty="0"/>
-              <a:t>설계</a:t>
-            </a:r>
-            <a:endParaRPr lang="en-US" altLang="ko-KR" b="1" dirty="0"/>
-          </a:p>
-          <a:p>
-            <a:pPr>
-              <a:lnSpc>
-                <a:spcPct val="150000"/>
-              </a:lnSpc>
-            </a:pPr>
-            <a:r>
-              <a:rPr lang="en-US" b="1" dirty="0"/>
-              <a:t>AUC </a:t>
-            </a:r>
-            <a:r>
-              <a:rPr lang="ko-KR" altLang="en-US" b="1" dirty="0"/>
-              <a:t>개선 방안 연구</a:t>
-            </a:r>
-            <a:endParaRPr b="1" dirty="0"/>
+              <a:t>global z-score</a:t>
+            </a:r>
+            <a:r>
+              <a:rPr b="1" dirty="0"/>
+              <a:t>)</a:t>
+            </a:r>
           </a:p>
         </p:txBody>
       </p:sp>
+      <p:grpSp>
+        <p:nvGrpSpPr>
+          <p:cNvPr id="13" name="그룹 12">
+            <a:extLst>
+              <a:ext uri="{FF2B5EF4-FFF2-40B4-BE49-F238E27FC236}">
+                <a16:creationId xmlns:a16="http://schemas.microsoft.com/office/drawing/2014/main" id="{27668FA3-423A-1F57-A470-58B0D524D4EE}"/>
+              </a:ext>
+            </a:extLst>
+          </p:cNvPr>
+          <p:cNvGrpSpPr>
+            <a:grpSpLocks noChangeAspect="1"/>
+          </p:cNvGrpSpPr>
+          <p:nvPr/>
+        </p:nvGrpSpPr>
+        <p:grpSpPr>
+          <a:xfrm>
+            <a:off x="336000" y="1987971"/>
+            <a:ext cx="11520000" cy="3934449"/>
+            <a:chOff x="686689" y="1987971"/>
+            <a:chExt cx="11125871" cy="3799841"/>
+          </a:xfrm>
+        </p:grpSpPr>
+        <p:pic>
+          <p:nvPicPr>
+            <p:cNvPr id="5" name="그림 4">
+              <a:extLst>
+                <a:ext uri="{FF2B5EF4-FFF2-40B4-BE49-F238E27FC236}">
+                  <a16:creationId xmlns:a16="http://schemas.microsoft.com/office/drawing/2014/main" id="{2BED3638-25D5-1F57-0586-718E7ED4C512}"/>
+                </a:ext>
+              </a:extLst>
+            </p:cNvPr>
+            <p:cNvPicPr>
+              <a:picLocks noChangeAspect="1"/>
+            </p:cNvPicPr>
+            <p:nvPr/>
+          </p:nvPicPr>
+          <p:blipFill>
+            <a:blip r:embed="rId3"/>
+            <a:stretch>
+              <a:fillRect/>
+            </a:stretch>
+          </p:blipFill>
+          <p:spPr>
+            <a:xfrm>
+              <a:off x="686689" y="1987972"/>
+              <a:ext cx="5562935" cy="3799840"/>
+            </a:xfrm>
+            <a:prstGeom prst="rect">
+              <a:avLst/>
+            </a:prstGeom>
+          </p:spPr>
+        </p:pic>
+        <p:pic>
+          <p:nvPicPr>
+            <p:cNvPr id="12" name="그림 11">
+              <a:extLst>
+                <a:ext uri="{FF2B5EF4-FFF2-40B4-BE49-F238E27FC236}">
+                  <a16:creationId xmlns:a16="http://schemas.microsoft.com/office/drawing/2014/main" id="{803C9B5E-D40F-7083-0B70-D0E571DD214A}"/>
+                </a:ext>
+              </a:extLst>
+            </p:cNvPr>
+            <p:cNvPicPr>
+              <a:picLocks noChangeAspect="1"/>
+            </p:cNvPicPr>
+            <p:nvPr/>
+          </p:nvPicPr>
+          <p:blipFill>
+            <a:blip r:embed="rId4"/>
+            <a:stretch>
+              <a:fillRect/>
+            </a:stretch>
+          </p:blipFill>
+          <p:spPr>
+            <a:xfrm>
+              <a:off x="6249624" y="1987971"/>
+              <a:ext cx="5562936" cy="3799841"/>
+            </a:xfrm>
+            <a:prstGeom prst="rect">
+              <a:avLst/>
+            </a:prstGeom>
+          </p:spPr>
+        </p:pic>
+      </p:grpSp>
     </p:spTree>
     <p:extLst>
       <p:ext uri="{BB962C8B-B14F-4D97-AF65-F5344CB8AC3E}">
-        <p14:creationId xmlns:p14="http://schemas.microsoft.com/office/powerpoint/2010/main" val="2022533225"/>
+        <p14:creationId xmlns:p14="http://schemas.microsoft.com/office/powerpoint/2010/main" val="3553742509"/>
       </p:ext>
     </p:extLst>
   </p:cSld>
@@ -18983,7 +17554,13 @@
   <p:cSld>
     <p:spTree>
       <p:nvGrpSpPr>
-        <p:cNvPr id="1" name="Shape 1175"/>
+        <p:cNvPr id="1" name="">
+          <a:extLst>
+            <a:ext uri="{FF2B5EF4-FFF2-40B4-BE49-F238E27FC236}">
+              <a16:creationId xmlns:a16="http://schemas.microsoft.com/office/drawing/2014/main" id="{CBF393F4-49FC-B75A-45E9-F19D9A32AB39}"/>
+            </a:ext>
+          </a:extLst>
+        </p:cNvPr>
         <p:cNvGrpSpPr/>
         <p:nvPr/>
       </p:nvGrpSpPr>
@@ -18995,38 +17572,168 @@
           <a:chExt cx="0" cy="0"/>
         </a:xfrm>
       </p:grpSpPr>
-      <p:pic>
-        <p:nvPicPr>
-          <p:cNvPr id="1176" name="Google Shape;1176;g3d412ffb079_0_61"/>
-          <p:cNvPicPr preferRelativeResize="0"/>
+      <p:sp>
+        <p:nvSpPr>
+          <p:cNvPr id="2" name="Title 1">
+            <a:extLst>
+              <a:ext uri="{FF2B5EF4-FFF2-40B4-BE49-F238E27FC236}">
+                <a16:creationId xmlns:a16="http://schemas.microsoft.com/office/drawing/2014/main" id="{B29DC96B-5545-A303-9023-0E01929E4BB2}"/>
+              </a:ext>
+            </a:extLst>
+          </p:cNvPr>
+          <p:cNvSpPr>
+            <a:spLocks noGrp="1"/>
+          </p:cNvSpPr>
+          <p:nvPr>
+            <p:ph type="title"/>
+          </p:nvPr>
+        </p:nvSpPr>
+        <p:spPr/>
+        <p:txBody>
+          <a:bodyPr/>
+          <a:lstStyle/>
+          <a:p>
+            <a:r>
+              <a:t>Detailed progress</a:t>
+            </a:r>
+          </a:p>
+        </p:txBody>
+      </p:sp>
+      <p:sp>
+        <p:nvSpPr>
+          <p:cNvPr id="3" name="Content Placeholder 2">
+            <a:extLst>
+              <a:ext uri="{FF2B5EF4-FFF2-40B4-BE49-F238E27FC236}">
+                <a16:creationId xmlns:a16="http://schemas.microsoft.com/office/drawing/2014/main" id="{5253AD8E-0315-0F34-20E0-786C52B70CFA}"/>
+              </a:ext>
+            </a:extLst>
+          </p:cNvPr>
+          <p:cNvSpPr>
+            <a:spLocks noGrp="1"/>
+          </p:cNvSpPr>
+          <p:nvPr>
+            <p:ph idx="1"/>
+          </p:nvPr>
+        </p:nvSpPr>
+        <p:spPr/>
+        <p:txBody>
+          <a:bodyPr wrap="square"/>
+          <a:lstStyle/>
+          <a:p>
+            <a:r>
+              <a:rPr b="1" dirty="0"/>
+              <a:t>Stage-1 TP vs FP AEC-128 </a:t>
+            </a:r>
+            <a:r>
+              <a:rPr b="1" dirty="0" err="1"/>
+              <a:t>비교</a:t>
+            </a:r>
+            <a:r>
+              <a:rPr b="1" dirty="0"/>
+              <a:t> (</a:t>
+            </a:r>
+            <a:r>
+              <a:rPr lang="en-US" b="1" dirty="0"/>
+              <a:t>global z-score, </a:t>
+            </a:r>
+            <a:r>
+              <a:rPr lang="en-US" b="1" dirty="0" err="1"/>
+              <a:t>psm</a:t>
+            </a:r>
+            <a:r>
+              <a:rPr b="1" dirty="0"/>
+              <a:t>)</a:t>
+            </a:r>
+          </a:p>
+        </p:txBody>
+      </p:sp>
+      <p:grpSp>
+        <p:nvGrpSpPr>
+          <p:cNvPr id="9" name="그룹 8">
+            <a:extLst>
+              <a:ext uri="{FF2B5EF4-FFF2-40B4-BE49-F238E27FC236}">
+                <a16:creationId xmlns:a16="http://schemas.microsoft.com/office/drawing/2014/main" id="{23DF6E0B-3AA1-6E4A-461A-ECC74C6A28E9}"/>
+              </a:ext>
+            </a:extLst>
+          </p:cNvPr>
+          <p:cNvGrpSpPr>
+            <a:grpSpLocks noChangeAspect="1"/>
+          </p:cNvGrpSpPr>
           <p:nvPr/>
-        </p:nvPicPr>
-        <p:blipFill>
-          <a:blip r:embed="rId3">
-            <a:alphaModFix/>
-          </a:blip>
-          <a:stretch>
-            <a:fillRect/>
-          </a:stretch>
-        </p:blipFill>
-        <p:spPr>
+        </p:nvGrpSpPr>
+        <p:grpSpPr>
           <a:xfrm>
-            <a:off x="0" y="0"/>
-            <a:ext cx="12192000" cy="6858000"/>
+            <a:off x="336000" y="1987972"/>
+            <a:ext cx="11520000" cy="3934449"/>
+            <a:chOff x="686685" y="1987972"/>
+            <a:chExt cx="11125876" cy="3799843"/>
           </a:xfrm>
-          <a:prstGeom prst="rect">
-            <a:avLst/>
-          </a:prstGeom>
-          <a:noFill/>
-          <a:ln>
-            <a:noFill/>
-          </a:ln>
-        </p:spPr>
-      </p:pic>
+        </p:grpSpPr>
+        <p:pic>
+          <p:nvPicPr>
+            <p:cNvPr id="6" name="그림 5">
+              <a:extLst>
+                <a:ext uri="{FF2B5EF4-FFF2-40B4-BE49-F238E27FC236}">
+                  <a16:creationId xmlns:a16="http://schemas.microsoft.com/office/drawing/2014/main" id="{E1CCC0D5-B5F6-9E5B-752B-6715AB14A084}"/>
+                </a:ext>
+              </a:extLst>
+            </p:cNvPr>
+            <p:cNvPicPr>
+              <a:picLocks noChangeAspect="1"/>
+            </p:cNvPicPr>
+            <p:nvPr/>
+          </p:nvPicPr>
+          <p:blipFill>
+            <a:blip r:embed="rId3"/>
+            <a:stretch>
+              <a:fillRect/>
+            </a:stretch>
+          </p:blipFill>
+          <p:spPr>
+            <a:xfrm>
+              <a:off x="6249624" y="1987972"/>
+              <a:ext cx="5562937" cy="3799842"/>
+            </a:xfrm>
+            <a:prstGeom prst="rect">
+              <a:avLst/>
+            </a:prstGeom>
+          </p:spPr>
+        </p:pic>
+        <p:pic>
+          <p:nvPicPr>
+            <p:cNvPr id="8" name="그림 7">
+              <a:extLst>
+                <a:ext uri="{FF2B5EF4-FFF2-40B4-BE49-F238E27FC236}">
+                  <a16:creationId xmlns:a16="http://schemas.microsoft.com/office/drawing/2014/main" id="{B8A97B46-6AC7-EC5A-5D76-394A336851E4}"/>
+                </a:ext>
+              </a:extLst>
+            </p:cNvPr>
+            <p:cNvPicPr>
+              <a:picLocks noChangeAspect="1"/>
+            </p:cNvPicPr>
+            <p:nvPr/>
+          </p:nvPicPr>
+          <p:blipFill>
+            <a:blip r:embed="rId4"/>
+            <a:stretch>
+              <a:fillRect/>
+            </a:stretch>
+          </p:blipFill>
+          <p:spPr>
+            <a:xfrm>
+              <a:off x="686685" y="1987972"/>
+              <a:ext cx="5562939" cy="3799843"/>
+            </a:xfrm>
+            <a:prstGeom prst="rect">
+              <a:avLst/>
+            </a:prstGeom>
+          </p:spPr>
+        </p:pic>
+      </p:grpSp>
     </p:spTree>
     <p:extLst>
       <p:ext uri="{BB962C8B-B14F-4D97-AF65-F5344CB8AC3E}">
-        <p14:creationId xmlns:p14="http://schemas.microsoft.com/office/powerpoint/2010/main" val="1579866099"/>
+        <p14:creationId xmlns:p14="http://schemas.microsoft.com/office/powerpoint/2010/main" val="886946762"/>
       </p:ext>
     </p:extLst>
   </p:cSld>
